--- a/slides/T319_Regressão_Linear (Parte III).pptx
+++ b/slides/T319_Regressão_Linear (Parte III).pptx
@@ -5,7 +5,7 @@
     <p:sldMasterId id="2147483648" r:id="rId1"/>
   </p:sldMasterIdLst>
   <p:notesMasterIdLst>
-    <p:notesMasterId r:id="rId44"/>
+    <p:notesMasterId r:id="rId45"/>
   </p:notesMasterIdLst>
   <p:sldIdLst>
     <p:sldId id="259" r:id="rId2"/>
@@ -15,41 +15,42 @@
     <p:sldId id="513" r:id="rId6"/>
     <p:sldId id="489" r:id="rId7"/>
     <p:sldId id="488" r:id="rId8"/>
-    <p:sldId id="486" r:id="rId9"/>
-    <p:sldId id="492" r:id="rId10"/>
-    <p:sldId id="493" r:id="rId11"/>
-    <p:sldId id="501" r:id="rId12"/>
-    <p:sldId id="494" r:id="rId13"/>
-    <p:sldId id="490" r:id="rId14"/>
-    <p:sldId id="497" r:id="rId15"/>
-    <p:sldId id="499" r:id="rId16"/>
-    <p:sldId id="500" r:id="rId17"/>
-    <p:sldId id="502" r:id="rId18"/>
-    <p:sldId id="495" r:id="rId19"/>
-    <p:sldId id="514" r:id="rId20"/>
-    <p:sldId id="496" r:id="rId21"/>
-    <p:sldId id="512" r:id="rId22"/>
-    <p:sldId id="504" r:id="rId23"/>
-    <p:sldId id="505" r:id="rId24"/>
-    <p:sldId id="508" r:id="rId25"/>
-    <p:sldId id="510" r:id="rId26"/>
-    <p:sldId id="511" r:id="rId27"/>
-    <p:sldId id="482" r:id="rId28"/>
-    <p:sldId id="317" r:id="rId29"/>
-    <p:sldId id="332" r:id="rId30"/>
-    <p:sldId id="299" r:id="rId31"/>
-    <p:sldId id="285" r:id="rId32"/>
-    <p:sldId id="415" r:id="rId33"/>
-    <p:sldId id="283" r:id="rId34"/>
-    <p:sldId id="274" r:id="rId35"/>
-    <p:sldId id="278" r:id="rId36"/>
-    <p:sldId id="292" r:id="rId37"/>
-    <p:sldId id="498" r:id="rId38"/>
-    <p:sldId id="295" r:id="rId39"/>
-    <p:sldId id="396" r:id="rId40"/>
-    <p:sldId id="484" r:id="rId41"/>
-    <p:sldId id="421" r:id="rId42"/>
-    <p:sldId id="423" r:id="rId43"/>
+    <p:sldId id="515" r:id="rId9"/>
+    <p:sldId id="486" r:id="rId10"/>
+    <p:sldId id="492" r:id="rId11"/>
+    <p:sldId id="493" r:id="rId12"/>
+    <p:sldId id="501" r:id="rId13"/>
+    <p:sldId id="494" r:id="rId14"/>
+    <p:sldId id="490" r:id="rId15"/>
+    <p:sldId id="497" r:id="rId16"/>
+    <p:sldId id="499" r:id="rId17"/>
+    <p:sldId id="500" r:id="rId18"/>
+    <p:sldId id="502" r:id="rId19"/>
+    <p:sldId id="495" r:id="rId20"/>
+    <p:sldId id="514" r:id="rId21"/>
+    <p:sldId id="496" r:id="rId22"/>
+    <p:sldId id="512" r:id="rId23"/>
+    <p:sldId id="504" r:id="rId24"/>
+    <p:sldId id="505" r:id="rId25"/>
+    <p:sldId id="508" r:id="rId26"/>
+    <p:sldId id="510" r:id="rId27"/>
+    <p:sldId id="511" r:id="rId28"/>
+    <p:sldId id="482" r:id="rId29"/>
+    <p:sldId id="317" r:id="rId30"/>
+    <p:sldId id="332" r:id="rId31"/>
+    <p:sldId id="299" r:id="rId32"/>
+    <p:sldId id="285" r:id="rId33"/>
+    <p:sldId id="415" r:id="rId34"/>
+    <p:sldId id="283" r:id="rId35"/>
+    <p:sldId id="274" r:id="rId36"/>
+    <p:sldId id="278" r:id="rId37"/>
+    <p:sldId id="292" r:id="rId38"/>
+    <p:sldId id="498" r:id="rId39"/>
+    <p:sldId id="295" r:id="rId40"/>
+    <p:sldId id="396" r:id="rId41"/>
+    <p:sldId id="484" r:id="rId42"/>
+    <p:sldId id="421" r:id="rId43"/>
+    <p:sldId id="423" r:id="rId44"/>
   </p:sldIdLst>
   <p:sldSz cx="12192000" cy="6858000"/>
   <p:notesSz cx="6858000" cy="9144000"/>
@@ -565,7 +566,7 @@
           <a:p>
             <a:fld id="{DAF0AF11-6A8A-4E64-94F5-26D4FBA2A01D}" type="datetimeFigureOut">
               <a:rPr lang="nl-BE" smtClean="0"/>
-              <a:t>10/10/2025</a:t>
+              <a:t>10/04/2026</a:t>
             </a:fld>
             <a:endParaRPr lang="nl-BE"/>
           </a:p>
@@ -1201,7 +1202,7 @@
     </p:spTree>
     <p:extLst>
       <p:ext uri="{BB962C8B-B14F-4D97-AF65-F5344CB8AC3E}">
-        <p14:creationId xmlns:p14="http://schemas.microsoft.com/office/powerpoint/2010/main" val="3245870633"/>
+        <p14:creationId xmlns:p14="http://schemas.microsoft.com/office/powerpoint/2010/main" val="626906048"/>
       </p:ext>
     </p:extLst>
   </p:cSld>
@@ -1495,6 +1496,300 @@
     </p:spTree>
     <p:extLst>
       <p:ext uri="{BB962C8B-B14F-4D97-AF65-F5344CB8AC3E}">
+        <p14:creationId xmlns:p14="http://schemas.microsoft.com/office/powerpoint/2010/main" val="3245870633"/>
+      </p:ext>
+    </p:extLst>
+  </p:cSld>
+  <p:clrMapOvr>
+    <a:masterClrMapping/>
+  </p:clrMapOvr>
+</p:notes>
+</file>
+
+<file path=ppt/notesSlides/notesSlide12.xml><?xml version="1.0" encoding="utf-8"?>
+<p:notes xmlns:a="http://schemas.openxmlformats.org/drawingml/2006/main" xmlns:r="http://schemas.openxmlformats.org/officeDocument/2006/relationships" xmlns:p="http://schemas.openxmlformats.org/presentationml/2006/main">
+  <p:cSld>
+    <p:spTree>
+      <p:nvGrpSpPr>
+        <p:cNvPr id="1" name=""/>
+        <p:cNvGrpSpPr/>
+        <p:nvPr/>
+      </p:nvGrpSpPr>
+      <p:grpSpPr>
+        <a:xfrm>
+          <a:off x="0" y="0"/>
+          <a:ext cx="0" cy="0"/>
+          <a:chOff x="0" y="0"/>
+          <a:chExt cx="0" cy="0"/>
+        </a:xfrm>
+      </p:grpSpPr>
+      <p:sp>
+        <p:nvSpPr>
+          <p:cNvPr id="2" name="Espaço Reservado para Imagem de Slide 1"/>
+          <p:cNvSpPr>
+            <a:spLocks noGrp="1" noRot="1" noChangeAspect="1"/>
+          </p:cNvSpPr>
+          <p:nvPr>
+            <p:ph type="sldImg"/>
+          </p:nvPr>
+        </p:nvSpPr>
+        <p:spPr/>
+      </p:sp>
+      <p:sp>
+        <p:nvSpPr>
+          <p:cNvPr id="3" name="Espaço Reservado para Anotações 2"/>
+          <p:cNvSpPr>
+            <a:spLocks noGrp="1"/>
+          </p:cNvSpPr>
+          <p:nvPr>
+            <p:ph type="body" idx="1"/>
+          </p:nvPr>
+        </p:nvSpPr>
+        <p:spPr/>
+        <p:txBody>
+          <a:bodyPr/>
+          <a:lstStyle/>
+          <a:p>
+            <a:pPr marL="0" marR="0" lvl="0" indent="0" algn="l" defTabSz="914400" rtl="0" eaLnBrk="1" fontAlgn="auto" latinLnBrk="0" hangingPunct="1">
+              <a:lnSpc>
+                <a:spcPct val="100000"/>
+              </a:lnSpc>
+              <a:spcBef>
+                <a:spcPts val="0"/>
+              </a:spcBef>
+              <a:spcAft>
+                <a:spcPts val="0"/>
+              </a:spcAft>
+              <a:buClrTx/>
+              <a:buSzTx/>
+              <a:buFontTx/>
+              <a:buNone/>
+              <a:tabLst/>
+              <a:defRPr/>
+            </a:pPr>
+            <a:r>
+              <a:rPr lang="pt-BR" b="1" dirty="0"/>
+              <a:t>Exemplo</a:t>
+            </a:r>
+            <a:r>
+              <a:rPr lang="pt-BR" dirty="0"/>
+              <a:t>:</a:t>
+            </a:r>
+            <a:r>
+              <a:rPr lang="pt-BR" baseline="0" dirty="0"/>
+              <a:t> </a:t>
+            </a:r>
+            <a:r>
+              <a:rPr lang="pt-BR" dirty="0"/>
+              <a:t>https://colab.research.google.com/</a:t>
+            </a:r>
+            <a:r>
+              <a:rPr lang="pt-BR" dirty="0" err="1"/>
+              <a:t>github</a:t>
+            </a:r>
+            <a:r>
+              <a:rPr lang="pt-BR" dirty="0"/>
+              <a:t>/zz4fap/t319_aprendizado_de_maquina/</a:t>
+            </a:r>
+            <a:r>
+              <a:rPr lang="pt-BR" dirty="0" err="1"/>
+              <a:t>blob</a:t>
+            </a:r>
+            <a:r>
+              <a:rPr lang="pt-BR" dirty="0"/>
+              <a:t>/</a:t>
+            </a:r>
+            <a:r>
+              <a:rPr lang="pt-BR" dirty="0" err="1"/>
+              <a:t>main</a:t>
+            </a:r>
+            <a:r>
+              <a:rPr lang="pt-BR" dirty="0"/>
+              <a:t>/notebooks/</a:t>
+            </a:r>
+            <a:r>
+              <a:rPr lang="pt-BR" dirty="0" err="1"/>
+              <a:t>regression</a:t>
+            </a:r>
+            <a:r>
+              <a:rPr lang="pt-BR" dirty="0"/>
+              <a:t>/</a:t>
+            </a:r>
+            <a:r>
+              <a:rPr lang="pt-BR" dirty="0" err="1"/>
+              <a:t>gd_versions</a:t>
+            </a:r>
+            <a:r>
+              <a:rPr lang="pt-BR" dirty="0"/>
+              <a:t>/</a:t>
+            </a:r>
+            <a:r>
+              <a:rPr lang="pt-BR" dirty="0" err="1"/>
+              <a:t>gde_com_redução_gradual.ipynb</a:t>
+            </a:r>
+            <a:endParaRPr lang="pt-BR" dirty="0"/>
+          </a:p>
+          <a:p>
+            <a:endParaRPr lang="pt-BR" sz="1200" baseline="0" dirty="0"/>
+          </a:p>
+          <a:p>
+            <a:r>
+              <a:rPr lang="pt-BR" sz="1200" baseline="0" dirty="0"/>
+              <a:t>Os passos começam com grandes valores (o que ajuda a progredir rapidamente e a escapar de mínimos locais, casos em que a superfície de erro seja bastante irregular) e depois diminuem cada vez mais, permitindo que o algoritmo se estabilize no mínimo global.</a:t>
+            </a:r>
+          </a:p>
+          <a:p>
+            <a:endParaRPr lang="pt-BR" sz="1200" baseline="0" dirty="0"/>
+          </a:p>
+          <a:p>
+            <a:r>
+              <a:rPr lang="pt-BR" dirty="0"/>
+              <a:t>Se a taxa de aprendizagem for reduzida muito rapidamente, o algoritmo poderá ficar preso no mínimo local ou até ficar</a:t>
+            </a:r>
+            <a:r>
+              <a:rPr lang="pt-BR" baseline="0" dirty="0"/>
+              <a:t> travado antes de chegar ao mínimo</a:t>
+            </a:r>
+            <a:r>
+              <a:rPr lang="pt-BR" dirty="0"/>
+              <a:t>. Se a taxa de aprendizado for reduzida muito lentamente, o algoritmo poderá oscilar ao</a:t>
+            </a:r>
+            <a:r>
+              <a:rPr lang="pt-BR" baseline="0" dirty="0"/>
+              <a:t> redor do</a:t>
+            </a:r>
+            <a:r>
+              <a:rPr lang="pt-BR" dirty="0"/>
+              <a:t> mínimo por um longo tempo e acabar com uma solução não ótima (</a:t>
+            </a:r>
+            <a:r>
+              <a:rPr lang="pt-BR" dirty="0" err="1"/>
+              <a:t>sub-ótima</a:t>
+            </a:r>
+            <a:r>
+              <a:rPr lang="pt-BR" dirty="0"/>
+              <a:t>) caso o treinamento se encerre muito cedo.</a:t>
+            </a:r>
+          </a:p>
+          <a:p>
+            <a:endParaRPr lang="pt-BR" dirty="0"/>
+          </a:p>
+          <a:p>
+            <a:r>
+              <a:rPr lang="pt-BR" b="1" dirty="0"/>
+              <a:t>Alguns tipos de esquema para ajuste do passo de aprendizagem são:</a:t>
+            </a:r>
+          </a:p>
+          <a:p>
+            <a:pPr marL="171450" indent="-171450">
+              <a:buFont typeface="Arial" panose="020B0604020202020204" pitchFamily="34" charset="0"/>
+              <a:buChar char="•"/>
+            </a:pPr>
+            <a:r>
+              <a:rPr lang="pt-BR" b="1" dirty="0"/>
+              <a:t>Decaimento por etapas ou degraus</a:t>
+            </a:r>
+            <a:r>
+              <a:rPr lang="pt-BR" dirty="0"/>
+              <a:t>: reduz a taxa de aprendizado de algum fator a cada número pré-definido de iterações ou épocas. Os valores típicos são utilizados para reduzir a taxa de aprendizado pela metade a cada número pré-definido de épocas. Esses números dependem muito do tipo de problema e do modelo. Uma heurística que você pode ver na prática é observar o erro de validação durante o treinamento com uma taxa de aprendizado fixa e reduzir a taxa de aprendizado em uma constante (por exemplo, 0,5) sempre que o erro de validação parar de decrescer.</a:t>
+            </a:r>
+          </a:p>
+          <a:p>
+            <a:pPr marL="171450" indent="-171450">
+              <a:buFont typeface="Arial" panose="020B0604020202020204" pitchFamily="34" charset="0"/>
+              <a:buChar char="•"/>
+            </a:pPr>
+            <a:r>
+              <a:rPr lang="pt-BR" b="1" dirty="0"/>
+              <a:t>Decaimento exponencial</a:t>
+            </a:r>
+            <a:r>
+              <a:rPr lang="pt-BR" dirty="0"/>
+              <a:t>: tem a forma matemática α = α0 e^(-</a:t>
+            </a:r>
+            <a:r>
+              <a:rPr lang="pt-BR" dirty="0" err="1"/>
+              <a:t>kt</a:t>
+            </a:r>
+            <a:r>
+              <a:rPr lang="pt-BR" dirty="0"/>
+              <a:t>), onde α0, k são hiperparâmetros e t é o número da iteração (mas você também pode usar o número de épocas).</a:t>
+            </a:r>
+          </a:p>
+          <a:p>
+            <a:pPr marL="171450" indent="-171450">
+              <a:buFont typeface="Arial" panose="020B0604020202020204" pitchFamily="34" charset="0"/>
+              <a:buChar char="•"/>
+            </a:pPr>
+            <a:r>
+              <a:rPr lang="pt-BR" b="1" dirty="0"/>
+              <a:t>Decaimento temporal</a:t>
+            </a:r>
+            <a:r>
+              <a:rPr lang="pt-BR" dirty="0"/>
+              <a:t>: tem a forma matemática α = α0 / (1 + </a:t>
+            </a:r>
+            <a:r>
+              <a:rPr lang="pt-BR" dirty="0" err="1"/>
+              <a:t>kt</a:t>
+            </a:r>
+            <a:r>
+              <a:rPr lang="pt-BR" dirty="0"/>
+              <a:t>), onde a0, k são hiperparâmetros e t é o número da iteração.</a:t>
+            </a:r>
+          </a:p>
+          <a:p>
+            <a:pPr marL="171450" indent="-171450">
+              <a:buFont typeface="Arial" panose="020B0604020202020204" pitchFamily="34" charset="0"/>
+              <a:buChar char="•"/>
+            </a:pPr>
+            <a:endParaRPr lang="pt-BR" dirty="0"/>
+          </a:p>
+          <a:p>
+            <a:pPr marL="0" indent="0">
+              <a:buFont typeface="Arial" panose="020B0604020202020204" pitchFamily="34" charset="0"/>
+              <a:buNone/>
+            </a:pPr>
+            <a:r>
+              <a:rPr lang="pt-BR" b="1" dirty="0"/>
+              <a:t>Exemplo</a:t>
+            </a:r>
+            <a:r>
+              <a:rPr lang="pt-BR" dirty="0"/>
+              <a:t>: stocastic_gradient_descent_with_learning_schedule_and_with_figures.ipynb</a:t>
+            </a:r>
+          </a:p>
+          <a:p>
+            <a:endParaRPr lang="pt-BR" dirty="0"/>
+          </a:p>
+        </p:txBody>
+      </p:sp>
+      <p:sp>
+        <p:nvSpPr>
+          <p:cNvPr id="4" name="Espaço Reservado para Número de Slide 3"/>
+          <p:cNvSpPr>
+            <a:spLocks noGrp="1"/>
+          </p:cNvSpPr>
+          <p:nvPr>
+            <p:ph type="sldNum" sz="quarter" idx="5"/>
+          </p:nvPr>
+        </p:nvSpPr>
+        <p:spPr/>
+        <p:txBody>
+          <a:bodyPr/>
+          <a:lstStyle/>
+          <a:p>
+            <a:fld id="{DA8B99DF-01BC-492A-8CEF-4FD88D18DD9D}" type="slidenum">
+              <a:rPr lang="nl-BE" smtClean="0"/>
+              <a:t>27</a:t>
+            </a:fld>
+            <a:endParaRPr lang="nl-BE"/>
+          </a:p>
+        </p:txBody>
+      </p:sp>
+    </p:spTree>
+    <p:extLst>
+      <p:ext uri="{BB962C8B-B14F-4D97-AF65-F5344CB8AC3E}">
         <p14:creationId xmlns:p14="http://schemas.microsoft.com/office/powerpoint/2010/main" val="3702569322"/>
       </p:ext>
     </p:extLst>
@@ -1505,7 +1800,7 @@
 </p:notes>
 </file>
 
-<file path=ppt/notesSlides/notesSlide12.xml><?xml version="1.0" encoding="utf-8"?>
+<file path=ppt/notesSlides/notesSlide13.xml><?xml version="1.0" encoding="utf-8"?>
 <p:notes xmlns:a="http://schemas.openxmlformats.org/drawingml/2006/main" xmlns:r="http://schemas.openxmlformats.org/officeDocument/2006/relationships" xmlns:p="http://schemas.openxmlformats.org/presentationml/2006/main">
   <p:cSld>
     <p:spTree>
@@ -1601,7 +1896,7 @@
           <a:p>
             <a:fld id="{DA8B99DF-01BC-492A-8CEF-4FD88D18DD9D}" type="slidenum">
               <a:rPr lang="nl-BE" smtClean="0"/>
-              <a:t>27</a:t>
+              <a:t>28</a:t>
             </a:fld>
             <a:endParaRPr lang="nl-BE"/>
           </a:p>
@@ -1611,90 +1906,6 @@
     <p:extLst>
       <p:ext uri="{BB962C8B-B14F-4D97-AF65-F5344CB8AC3E}">
         <p14:creationId xmlns:p14="http://schemas.microsoft.com/office/powerpoint/2010/main" val="1119925003"/>
-      </p:ext>
-    </p:extLst>
-  </p:cSld>
-  <p:clrMapOvr>
-    <a:masterClrMapping/>
-  </p:clrMapOvr>
-</p:notes>
-</file>
-
-<file path=ppt/notesSlides/notesSlide13.xml><?xml version="1.0" encoding="utf-8"?>
-<p:notes xmlns:a="http://schemas.openxmlformats.org/drawingml/2006/main" xmlns:r="http://schemas.openxmlformats.org/officeDocument/2006/relationships" xmlns:p="http://schemas.openxmlformats.org/presentationml/2006/main">
-  <p:cSld>
-    <p:spTree>
-      <p:nvGrpSpPr>
-        <p:cNvPr id="1" name=""/>
-        <p:cNvGrpSpPr/>
-        <p:nvPr/>
-      </p:nvGrpSpPr>
-      <p:grpSpPr>
-        <a:xfrm>
-          <a:off x="0" y="0"/>
-          <a:ext cx="0" cy="0"/>
-          <a:chOff x="0" y="0"/>
-          <a:chExt cx="0" cy="0"/>
-        </a:xfrm>
-      </p:grpSpPr>
-      <p:sp>
-        <p:nvSpPr>
-          <p:cNvPr id="2" name="Slide Image Placeholder 1"/>
-          <p:cNvSpPr>
-            <a:spLocks noGrp="1" noRot="1" noChangeAspect="1"/>
-          </p:cNvSpPr>
-          <p:nvPr>
-            <p:ph type="sldImg"/>
-          </p:nvPr>
-        </p:nvSpPr>
-        <p:spPr/>
-      </p:sp>
-      <p:sp>
-        <p:nvSpPr>
-          <p:cNvPr id="3" name="Notes Placeholder 2"/>
-          <p:cNvSpPr>
-            <a:spLocks noGrp="1"/>
-          </p:cNvSpPr>
-          <p:nvPr>
-            <p:ph type="body" idx="1"/>
-          </p:nvPr>
-        </p:nvSpPr>
-        <p:spPr/>
-        <p:txBody>
-          <a:bodyPr/>
-          <a:lstStyle/>
-          <a:p>
-            <a:endParaRPr lang="nl-BE" dirty="0"/>
-          </a:p>
-        </p:txBody>
-      </p:sp>
-      <p:sp>
-        <p:nvSpPr>
-          <p:cNvPr id="4" name="Slide Number Placeholder 3"/>
-          <p:cNvSpPr>
-            <a:spLocks noGrp="1"/>
-          </p:cNvSpPr>
-          <p:nvPr>
-            <p:ph type="sldNum" sz="quarter" idx="10"/>
-          </p:nvPr>
-        </p:nvSpPr>
-        <p:spPr/>
-        <p:txBody>
-          <a:bodyPr/>
-          <a:lstStyle/>
-          <a:p>
-            <a:fld id="{DA8B99DF-01BC-492A-8CEF-4FD88D18DD9D}" type="slidenum">
-              <a:rPr lang="nl-BE" smtClean="0"/>
-              <a:t>32</a:t>
-            </a:fld>
-            <a:endParaRPr lang="nl-BE"/>
-          </a:p>
-        </p:txBody>
-      </p:sp>
-    </p:spTree>
-    <p:extLst>
-      <p:ext uri="{BB962C8B-B14F-4D97-AF65-F5344CB8AC3E}">
-        <p14:creationId xmlns:p14="http://schemas.microsoft.com/office/powerpoint/2010/main" val="3474938315"/>
       </p:ext>
     </p:extLst>
   </p:cSld>
@@ -1778,7 +1989,7 @@
     </p:spTree>
     <p:extLst>
       <p:ext uri="{BB962C8B-B14F-4D97-AF65-F5344CB8AC3E}">
-        <p14:creationId xmlns:p14="http://schemas.microsoft.com/office/powerpoint/2010/main" val="127471941"/>
+        <p14:creationId xmlns:p14="http://schemas.microsoft.com/office/powerpoint/2010/main" val="3474938315"/>
       </p:ext>
     </p:extLst>
   </p:cSld>
@@ -1853,7 +2064,7 @@
           <a:p>
             <a:fld id="{DA8B99DF-01BC-492A-8CEF-4FD88D18DD9D}" type="slidenum">
               <a:rPr lang="nl-BE" smtClean="0"/>
-              <a:t>36</a:t>
+              <a:t>34</a:t>
             </a:fld>
             <a:endParaRPr lang="nl-BE"/>
           </a:p>
@@ -1862,7 +2073,7 @@
     </p:spTree>
     <p:extLst>
       <p:ext uri="{BB962C8B-B14F-4D97-AF65-F5344CB8AC3E}">
-        <p14:creationId xmlns:p14="http://schemas.microsoft.com/office/powerpoint/2010/main" val="1535109884"/>
+        <p14:creationId xmlns:p14="http://schemas.microsoft.com/office/powerpoint/2010/main" val="127471941"/>
       </p:ext>
     </p:extLst>
   </p:cSld>
@@ -1946,7 +2157,7 @@
     </p:spTree>
     <p:extLst>
       <p:ext uri="{BB962C8B-B14F-4D97-AF65-F5344CB8AC3E}">
-        <p14:creationId xmlns:p14="http://schemas.microsoft.com/office/powerpoint/2010/main" val="4087609378"/>
+        <p14:creationId xmlns:p14="http://schemas.microsoft.com/office/powerpoint/2010/main" val="1535109884"/>
       </p:ext>
     </p:extLst>
   </p:cSld>
@@ -2000,10 +2211,7 @@
           <a:bodyPr/>
           <a:lstStyle/>
           <a:p>
-            <a:r>
-              <a:rPr lang="pt-BR" dirty="0"/>
-              <a:t>O termo momentum aumenta para dimensões cujos gradientes apontam nas mesmas direções e reduz atualizações para dimensões cujos gradientes mudam de direção. Como resultado, temos convergência mais rápida e oscilação reduzida.</a:t>
-            </a:r>
+            <a:endParaRPr lang="nl-BE" dirty="0"/>
           </a:p>
         </p:txBody>
       </p:sp>
@@ -2024,7 +2232,94 @@
           <a:p>
             <a:fld id="{DA8B99DF-01BC-492A-8CEF-4FD88D18DD9D}" type="slidenum">
               <a:rPr lang="nl-BE" smtClean="0"/>
-              <a:t>42</a:t>
+              <a:t>38</a:t>
+            </a:fld>
+            <a:endParaRPr lang="nl-BE"/>
+          </a:p>
+        </p:txBody>
+      </p:sp>
+    </p:spTree>
+    <p:extLst>
+      <p:ext uri="{BB962C8B-B14F-4D97-AF65-F5344CB8AC3E}">
+        <p14:creationId xmlns:p14="http://schemas.microsoft.com/office/powerpoint/2010/main" val="4087609378"/>
+      </p:ext>
+    </p:extLst>
+  </p:cSld>
+  <p:clrMapOvr>
+    <a:masterClrMapping/>
+  </p:clrMapOvr>
+</p:notes>
+</file>
+
+<file path=ppt/notesSlides/notesSlide18.xml><?xml version="1.0" encoding="utf-8"?>
+<p:notes xmlns:a="http://schemas.openxmlformats.org/drawingml/2006/main" xmlns:r="http://schemas.openxmlformats.org/officeDocument/2006/relationships" xmlns:p="http://schemas.openxmlformats.org/presentationml/2006/main">
+  <p:cSld>
+    <p:spTree>
+      <p:nvGrpSpPr>
+        <p:cNvPr id="1" name=""/>
+        <p:cNvGrpSpPr/>
+        <p:nvPr/>
+      </p:nvGrpSpPr>
+      <p:grpSpPr>
+        <a:xfrm>
+          <a:off x="0" y="0"/>
+          <a:ext cx="0" cy="0"/>
+          <a:chOff x="0" y="0"/>
+          <a:chExt cx="0" cy="0"/>
+        </a:xfrm>
+      </p:grpSpPr>
+      <p:sp>
+        <p:nvSpPr>
+          <p:cNvPr id="2" name="Slide Image Placeholder 1"/>
+          <p:cNvSpPr>
+            <a:spLocks noGrp="1" noRot="1" noChangeAspect="1"/>
+          </p:cNvSpPr>
+          <p:nvPr>
+            <p:ph type="sldImg"/>
+          </p:nvPr>
+        </p:nvSpPr>
+        <p:spPr/>
+      </p:sp>
+      <p:sp>
+        <p:nvSpPr>
+          <p:cNvPr id="3" name="Notes Placeholder 2"/>
+          <p:cNvSpPr>
+            <a:spLocks noGrp="1"/>
+          </p:cNvSpPr>
+          <p:nvPr>
+            <p:ph type="body" idx="1"/>
+          </p:nvPr>
+        </p:nvSpPr>
+        <p:spPr/>
+        <p:txBody>
+          <a:bodyPr/>
+          <a:lstStyle/>
+          <a:p>
+            <a:r>
+              <a:rPr lang="pt-BR" dirty="0"/>
+              <a:t>O termo momentum aumenta para dimensões cujos gradientes apontam nas mesmas direções e reduz atualizações para dimensões cujos gradientes mudam de direção. Como resultado, temos convergência mais rápida e oscilação reduzida.</a:t>
+            </a:r>
+          </a:p>
+        </p:txBody>
+      </p:sp>
+      <p:sp>
+        <p:nvSpPr>
+          <p:cNvPr id="4" name="Slide Number Placeholder 3"/>
+          <p:cNvSpPr>
+            <a:spLocks noGrp="1"/>
+          </p:cNvSpPr>
+          <p:nvPr>
+            <p:ph type="sldNum" sz="quarter" idx="10"/>
+          </p:nvPr>
+        </p:nvSpPr>
+        <p:spPr/>
+        <p:txBody>
+          <a:bodyPr/>
+          <a:lstStyle/>
+          <a:p>
+            <a:fld id="{DA8B99DF-01BC-492A-8CEF-4FD88D18DD9D}" type="slidenum">
+              <a:rPr lang="nl-BE" smtClean="0"/>
+              <a:t>43</a:t>
             </a:fld>
             <a:endParaRPr lang="nl-BE"/>
           </a:p>
@@ -2261,7 +2556,13 @@
   <p:cSld>
     <p:spTree>
       <p:nvGrpSpPr>
-        <p:cNvPr id="1" name=""/>
+        <p:cNvPr id="1" name="">
+          <a:extLst>
+            <a:ext uri="{FF2B5EF4-FFF2-40B4-BE49-F238E27FC236}">
+              <a16:creationId xmlns:a16="http://schemas.microsoft.com/office/drawing/2014/main" id="{DF48AB0C-D174-227A-BD51-362467074522}"/>
+            </a:ext>
+          </a:extLst>
+        </p:cNvPr>
         <p:cNvGrpSpPr/>
         <p:nvPr/>
       </p:nvGrpSpPr>
@@ -2275,7 +2576,13 @@
       </p:grpSpPr>
       <p:sp>
         <p:nvSpPr>
-          <p:cNvPr id="2" name="Espaço Reservado para Imagem de Slide 1"/>
+          <p:cNvPr id="2" name="Espaço Reservado para Imagem de Slide 1">
+            <a:extLst>
+              <a:ext uri="{FF2B5EF4-FFF2-40B4-BE49-F238E27FC236}">
+                <a16:creationId xmlns:a16="http://schemas.microsoft.com/office/drawing/2014/main" id="{0D4E4E0D-D7AE-CA65-005C-7F2AA44B1A1A}"/>
+              </a:ext>
+            </a:extLst>
+          </p:cNvPr>
           <p:cNvSpPr>
             <a:spLocks noGrp="1" noRot="1" noChangeAspect="1"/>
           </p:cNvSpPr>
@@ -2287,7 +2594,13 @@
       </p:sp>
       <p:sp>
         <p:nvSpPr>
-          <p:cNvPr id="3" name="Espaço Reservado para Anotações 2"/>
+          <p:cNvPr id="3" name="Espaço Reservado para Anotações 2">
+            <a:extLst>
+              <a:ext uri="{FF2B5EF4-FFF2-40B4-BE49-F238E27FC236}">
+                <a16:creationId xmlns:a16="http://schemas.microsoft.com/office/drawing/2014/main" id="{3DD45B2D-93B1-B492-046D-31D637D3191C}"/>
+              </a:ext>
+            </a:extLst>
+          </p:cNvPr>
           <p:cNvSpPr>
             <a:spLocks noGrp="1"/>
           </p:cNvSpPr>
@@ -2300,133 +2613,133 @@
           <a:bodyPr/>
           <a:lstStyle/>
           <a:p>
-            <a:pPr marL="0" marR="0" lvl="0" indent="0" algn="l" defTabSz="914400" rtl="0" eaLnBrk="1" fontAlgn="auto" latinLnBrk="0" hangingPunct="1">
-              <a:lnSpc>
-                <a:spcPct val="100000"/>
-              </a:lnSpc>
-              <a:spcBef>
-                <a:spcPts val="0"/>
-              </a:spcBef>
-              <a:spcAft>
-                <a:spcPts val="0"/>
-              </a:spcAft>
-              <a:buClrTx/>
-              <a:buSzTx/>
-              <a:buFontTx/>
-              <a:buNone/>
-              <a:tabLst/>
-              <a:defRPr/>
-            </a:pPr>
-            <a:r>
-              <a:rPr lang="pt-BR" b="1" dirty="0"/>
-              <a:t>Exemplo</a:t>
-            </a:r>
-            <a:r>
-              <a:rPr lang="pt-BR" dirty="0"/>
-              <a:t>: https://colab.research.google.com/github/zz4fap/t319_aprendizado_de_maquina/blob/main/notebooks/regression/selecionando_o_passo_de_aprendizagem.ipynb</a:t>
+            <a:r>
+              <a:rPr lang="pt-BR" sz="1200" dirty="0"/>
+              <a:t>Se o</a:t>
+            </a:r>
+            <a:r>
+              <a:rPr lang="pt-BR" sz="1200" baseline="0" dirty="0"/>
+              <a:t> passo</a:t>
+            </a:r>
+            <a:r>
+              <a:rPr lang="pt-BR" sz="1200" dirty="0"/>
+              <a:t> de aprendizagem for muito pequeno, o algoritmo precisará passar por muitas iterações para convergir, o que levará muito tempo.</a:t>
             </a:r>
           </a:p>
           <a:p>
-            <a:pPr marL="0" marR="0" lvl="0" indent="0" algn="l" defTabSz="914400" rtl="0" eaLnBrk="1" fontAlgn="auto" latinLnBrk="0" hangingPunct="1">
-              <a:lnSpc>
-                <a:spcPct val="100000"/>
-              </a:lnSpc>
-              <a:spcBef>
-                <a:spcPts val="0"/>
-              </a:spcBef>
-              <a:spcAft>
-                <a:spcPts val="0"/>
-              </a:spcAft>
-              <a:buClrTx/>
-              <a:buSzTx/>
-              <a:buFontTx/>
-              <a:buNone/>
-              <a:tabLst/>
-              <a:defRPr/>
-            </a:pPr>
-            <a:endParaRPr lang="pt-BR" dirty="0"/>
+            <a:endParaRPr lang="pt-BR" sz="1200" dirty="0"/>
           </a:p>
           <a:p>
-            <a:pPr marL="0" marR="0" lvl="0" indent="0" algn="l" defTabSz="914400" rtl="0" eaLnBrk="1" fontAlgn="auto" latinLnBrk="0" hangingPunct="1">
-              <a:lnSpc>
-                <a:spcPct val="100000"/>
-              </a:lnSpc>
-              <a:spcBef>
-                <a:spcPts val="0"/>
-              </a:spcBef>
-              <a:spcAft>
-                <a:spcPts val="0"/>
-              </a:spcAft>
-              <a:buClrTx/>
-              <a:buSzTx/>
-              <a:buFontTx/>
-              <a:buNone/>
-              <a:tabLst/>
-              <a:defRPr/>
-            </a:pPr>
-            <a:r>
-              <a:rPr lang="pt-BR" dirty="0"/>
-              <a:t>Hiperparâmetro: parâmetro que influencia no aprendizado do algoritmo,</a:t>
-            </a:r>
-            <a:r>
-              <a:rPr lang="pt-BR" baseline="0" dirty="0"/>
-              <a:t> ou seja, dita seu aprendizado. Não é um parâmetro aprendido pelo modelo como no caso dos pesos de um modelo de regressão linear.</a:t>
-            </a:r>
-            <a:endParaRPr lang="pt-BR" dirty="0"/>
+            <a:r>
+              <a:rPr lang="pt-BR" sz="1200" dirty="0"/>
+              <a:t>Por outro lado, se ele</a:t>
+            </a:r>
+            <a:r>
+              <a:rPr lang="pt-BR" sz="1200" baseline="0" dirty="0"/>
+              <a:t> </a:t>
+            </a:r>
+            <a:r>
+              <a:rPr lang="pt-BR" sz="1200" dirty="0"/>
+              <a:t>for muito grande, você pode pular o vale e acabar do outro lado, possivelmente até mais alto do que antes. Isso pode fazer o algoritmo divergir, com valores cada vez maiores, falhando em encontrar uma boa solução.</a:t>
+            </a:r>
           </a:p>
           <a:p>
-            <a:endParaRPr lang="pt-BR" dirty="0"/>
+            <a:endParaRPr lang="pt-BR" sz="1200" dirty="0"/>
           </a:p>
           <a:p>
             <a:r>
-              <a:rPr lang="pt-BR" dirty="0"/>
-              <a:t>Se o</a:t>
-            </a:r>
-            <a:r>
-              <a:rPr lang="pt-BR" baseline="0" dirty="0"/>
-              <a:t> passo</a:t>
-            </a:r>
-            <a:r>
-              <a:rPr lang="pt-BR" dirty="0"/>
-              <a:t> de aprendizagem for muito pequeno, o algoritmo precisará passar por muitas iterações para convergir, o que levará muito tempo.</a:t>
+              <a:rPr lang="pt-BR" sz="1200" dirty="0"/>
+              <a:t>Assim, o</a:t>
+            </a:r>
+            <a:r>
+              <a:rPr lang="pt-BR" sz="1200" baseline="0" dirty="0"/>
+              <a:t> passo </a:t>
+            </a:r>
+            <a:r>
+              <a:rPr lang="pt-BR" sz="1200" dirty="0"/>
+              <a:t>de aprendizagem deve ser experimentado/explorado para encontrar o melhor valor que acelere a descida do gradiente.</a:t>
             </a:r>
           </a:p>
           <a:p>
-            <a:endParaRPr lang="pt-BR" dirty="0"/>
+            <a:endParaRPr lang="pt-BR" sz="1200" dirty="0"/>
           </a:p>
           <a:p>
             <a:r>
-              <a:rPr lang="pt-BR" dirty="0"/>
-              <a:t>Por outro lado, se ele</a:t>
-            </a:r>
-            <a:r>
-              <a:rPr lang="pt-BR" baseline="0" dirty="0"/>
+              <a:rPr lang="pt-BR" sz="1200" dirty="0"/>
+              <a:t>O momentum adiciona uma fração da atualização de peso anterior a atual. Quando o gradiente continua apontando na mesma direção por atualizações consecutivas, isso aumentará o tamanho dos passos dados em direção ao mínimo.</a:t>
+            </a:r>
+            <a:r>
+              <a:rPr lang="pt-BR" sz="1200" baseline="0" dirty="0"/>
               <a:t> </a:t>
             </a:r>
             <a:r>
-              <a:rPr lang="pt-BR" dirty="0"/>
-              <a:t>for muito grande, você pode pular o vale e acabar do outro lado, possivelmente até mais alto do que antes. Isso pode fazer o algoritmo divergir, com valores cada vez maiores, falhando em encontrar uma boa solução.</a:t>
+              <a:rPr lang="pt-BR" sz="1200" dirty="0"/>
+              <a:t>Por outro lado, quando o gradiente continua mudando de direção, o momentum suaviza as variações, ou seja, as atualizações.</a:t>
             </a:r>
           </a:p>
           <a:p>
-            <a:endParaRPr lang="pt-BR" dirty="0"/>
+            <a:endParaRPr lang="pt-BR" sz="1200" dirty="0"/>
           </a:p>
           <a:p>
             <a:r>
-              <a:rPr lang="pt-BR" dirty="0"/>
-              <a:t>Assim, o</a:t>
-            </a:r>
-            <a:r>
-              <a:rPr lang="pt-BR" baseline="0" dirty="0"/>
-              <a:t> passo </a:t>
-            </a:r>
-            <a:r>
-              <a:rPr lang="pt-BR" dirty="0"/>
-              <a:t>de aprendizagem deve ser experimentado/explorado para encontrar o melhor valor que acelere a descida do gradiente.</a:t>
+              <a:rPr lang="pt-BR" sz="1200" b="1" dirty="0"/>
+              <a:t>OBS</a:t>
+            </a:r>
+            <a:r>
+              <a:rPr lang="pt-BR" sz="1200" dirty="0"/>
+              <a:t>.: Passos largos durante as iterações iniciais e curtos conforme o algoritmo se aproxima do mínimo podem acelerar a convergência.</a:t>
+            </a:r>
+            <a:r>
+              <a:rPr lang="pt-BR" sz="1200" baseline="0" dirty="0"/>
+              <a:t> </a:t>
+            </a:r>
+            <a:r>
+              <a:rPr lang="pt-BR" sz="1200" dirty="0"/>
+              <a:t>Este tipo de abordagem é implementada por </a:t>
+            </a:r>
+            <a:r>
+              <a:rPr lang="pt-BR" sz="1200" b="1" i="1" dirty="0"/>
+              <a:t>esquemas de variação programada</a:t>
+            </a:r>
+            <a:r>
+              <a:rPr lang="pt-BR" sz="1200" dirty="0"/>
+              <a:t> do passo de aprendizagem </a:t>
             </a:r>
           </a:p>
           <a:p>
-            <a:endParaRPr lang="pt-BR" dirty="0"/>
+            <a:pPr marL="171450" indent="-171450">
+              <a:buFont typeface="Arial" panose="020B0604020202020204" pitchFamily="34" charset="0"/>
+              <a:buChar char="•"/>
+            </a:pPr>
+            <a:r>
+              <a:rPr lang="pt-BR" sz="1200" dirty="0"/>
+              <a:t>Por exemplo: momentum, </a:t>
+            </a:r>
+            <a:r>
+              <a:rPr lang="pt-BR" sz="1200" dirty="0" err="1"/>
+              <a:t>anelamento</a:t>
+            </a:r>
+            <a:r>
+              <a:rPr lang="pt-BR" sz="1200" dirty="0"/>
+              <a:t>, algoritmos de otimização com ajuste adaptativo do passo de aprendizagem (</a:t>
+            </a:r>
+            <a:r>
+              <a:rPr lang="pt-BR" sz="1200" dirty="0" err="1"/>
+              <a:t>RMSProp</a:t>
+            </a:r>
+            <a:r>
+              <a:rPr lang="pt-BR" sz="1200" dirty="0"/>
+              <a:t>, </a:t>
+            </a:r>
+            <a:r>
+              <a:rPr lang="pt-BR" sz="1200" dirty="0" err="1"/>
+              <a:t>AdaGrad</a:t>
+            </a:r>
+            <a:r>
+              <a:rPr lang="pt-BR" sz="1200" dirty="0"/>
+              <a:t>, Adam, etc.).</a:t>
+            </a:r>
+            <a:endParaRPr lang="nl-BE" sz="1200" dirty="0"/>
           </a:p>
           <a:p>
             <a:endParaRPr lang="pt-BR" dirty="0"/>
@@ -2435,7 +2748,13 @@
       </p:sp>
       <p:sp>
         <p:nvSpPr>
-          <p:cNvPr id="4" name="Espaço Reservado para Número de Slide 3"/>
+          <p:cNvPr id="4" name="Espaço Reservado para Número de Slide 3">
+            <a:extLst>
+              <a:ext uri="{FF2B5EF4-FFF2-40B4-BE49-F238E27FC236}">
+                <a16:creationId xmlns:a16="http://schemas.microsoft.com/office/drawing/2014/main" id="{B8545EF8-C430-5B8E-0455-9C90ED3CE05E}"/>
+              </a:ext>
+            </a:extLst>
+          </p:cNvPr>
           <p:cNvSpPr>
             <a:spLocks noGrp="1"/>
           </p:cNvSpPr>
@@ -2459,7 +2778,7 @@
     </p:spTree>
     <p:extLst>
       <p:ext uri="{BB962C8B-B14F-4D97-AF65-F5344CB8AC3E}">
-        <p14:creationId xmlns:p14="http://schemas.microsoft.com/office/powerpoint/2010/main" val="3595689694"/>
+        <p14:creationId xmlns:p14="http://schemas.microsoft.com/office/powerpoint/2010/main" val="3716366062"/>
       </p:ext>
     </p:extLst>
   </p:cSld>
@@ -2470,942 +2789,6 @@
 </file>
 
 <file path=ppt/notesSlides/notesSlide4.xml><?xml version="1.0" encoding="utf-8"?>
-<p:notes xmlns:a="http://schemas.openxmlformats.org/drawingml/2006/main" xmlns:r="http://schemas.openxmlformats.org/officeDocument/2006/relationships" xmlns:p="http://schemas.openxmlformats.org/presentationml/2006/main">
-  <p:cSld>
-    <p:spTree>
-      <p:nvGrpSpPr>
-        <p:cNvPr id="1" name=""/>
-        <p:cNvGrpSpPr/>
-        <p:nvPr/>
-      </p:nvGrpSpPr>
-      <p:grpSpPr>
-        <a:xfrm>
-          <a:off x="0" y="0"/>
-          <a:ext cx="0" cy="0"/>
-          <a:chOff x="0" y="0"/>
-          <a:chExt cx="0" cy="0"/>
-        </a:xfrm>
-      </p:grpSpPr>
-      <p:sp>
-        <p:nvSpPr>
-          <p:cNvPr id="2" name="Espaço Reservado para Imagem de Slide 1"/>
-          <p:cNvSpPr>
-            <a:spLocks noGrp="1" noRot="1" noChangeAspect="1"/>
-          </p:cNvSpPr>
-          <p:nvPr>
-            <p:ph type="sldImg"/>
-          </p:nvPr>
-        </p:nvSpPr>
-        <p:spPr/>
-      </p:sp>
-      <p:sp>
-        <p:nvSpPr>
-          <p:cNvPr id="3" name="Espaço Reservado para Anotações 2"/>
-          <p:cNvSpPr>
-            <a:spLocks noGrp="1"/>
-          </p:cNvSpPr>
-          <p:nvPr>
-            <p:ph type="body" idx="1"/>
-          </p:nvPr>
-        </p:nvSpPr>
-        <p:spPr/>
-        <p:txBody>
-          <a:bodyPr/>
-          <a:lstStyle/>
-          <a:p>
-            <a:r>
-              <a:rPr lang="pt-BR" dirty="0"/>
-              <a:t>Enquanto </a:t>
-            </a:r>
-            <a:r>
-              <a:rPr lang="pt-BR" baseline="0" dirty="0"/>
-              <a:t>a </a:t>
-            </a:r>
-            <a:r>
-              <a:rPr lang="pt-BR" dirty="0"/>
-              <a:t>direção é determinada pelo</a:t>
-            </a:r>
-            <a:r>
-              <a:rPr lang="pt-BR" baseline="0" dirty="0"/>
-              <a:t> vetor</a:t>
-            </a:r>
-            <a:r>
-              <a:rPr lang="pt-BR" dirty="0"/>
-              <a:t> gradiente da função de erro, a taxa de aprendizado determina o quão grande um passo é dado nessa direção.</a:t>
-            </a:r>
-          </a:p>
-          <a:p>
-            <a:endParaRPr lang="pt-BR" dirty="0"/>
-          </a:p>
-          <a:p>
-            <a:r>
-              <a:rPr lang="pt-BR" dirty="0"/>
-              <a:t>Se o</a:t>
-            </a:r>
-            <a:r>
-              <a:rPr lang="pt-BR" baseline="0" dirty="0"/>
-              <a:t> passo</a:t>
-            </a:r>
-            <a:r>
-              <a:rPr lang="pt-BR" dirty="0"/>
-              <a:t> de aprendizagem for muito pequeno, o algoritmo precisará passar por muitas iterações até convergir, o que levará muito tempo.</a:t>
-            </a:r>
-          </a:p>
-          <a:p>
-            <a:endParaRPr lang="pt-BR" dirty="0"/>
-          </a:p>
-          <a:p>
-            <a:r>
-              <a:rPr lang="pt-BR" dirty="0"/>
-              <a:t>Por outro lado, se ele</a:t>
-            </a:r>
-            <a:r>
-              <a:rPr lang="pt-BR" baseline="0" dirty="0"/>
-              <a:t> </a:t>
-            </a:r>
-            <a:r>
-              <a:rPr lang="pt-BR" dirty="0"/>
-              <a:t>for muito grande, você pode pular o vale e acabar do outro lado, possivelmente até mais alto do que antes. Isso pode fazer o algoritmo divergir, com valores cada vez maiores, falhando em encontrar uma boa solução.</a:t>
-            </a:r>
-          </a:p>
-          <a:p>
-            <a:endParaRPr lang="pt-BR" dirty="0"/>
-          </a:p>
-          <a:p>
-            <a:r>
-              <a:rPr lang="pt-BR" dirty="0"/>
-              <a:t>Assim, o</a:t>
-            </a:r>
-            <a:r>
-              <a:rPr lang="pt-BR" baseline="0" dirty="0"/>
-              <a:t> passo </a:t>
-            </a:r>
-            <a:r>
-              <a:rPr lang="pt-BR" dirty="0"/>
-              <a:t>de aprendizagem deve ser experimentado/explorado para encontrar o melhor valor que acelere a descida do gradiente.</a:t>
-            </a:r>
-          </a:p>
-          <a:p>
-            <a:endParaRPr lang="pt-BR" dirty="0"/>
-          </a:p>
-          <a:p>
-            <a:r>
-              <a:rPr lang="pt-BR" dirty="0"/>
-              <a:t>Ao usar grandes valores para o passo de aprendizagem, é possível encontrar um ciclo de feedback positivo no qual grandes valores induzem grandes gradientes que, então, induzem uma grande atualização dos pesos. Se essas atualizações aumentarem consistentemente o tamanho dos pesos, então [os pesos] se afastam rapidamente do</a:t>
-            </a:r>
-            <a:r>
-              <a:rPr lang="pt-BR" baseline="0" dirty="0"/>
-              <a:t> ponto de mínimo </a:t>
-            </a:r>
-            <a:r>
-              <a:rPr lang="pt-BR" dirty="0"/>
-              <a:t>até que ocorra o estouro da precisão numérica.</a:t>
-            </a:r>
-          </a:p>
-          <a:p>
-            <a:endParaRPr lang="pt-BR" dirty="0"/>
-          </a:p>
-          <a:p>
-            <a:pPr marL="0" marR="0" lvl="0" indent="0" algn="l" defTabSz="914400" rtl="0" eaLnBrk="1" fontAlgn="auto" latinLnBrk="0" hangingPunct="1">
-              <a:lnSpc>
-                <a:spcPct val="100000"/>
-              </a:lnSpc>
-              <a:spcBef>
-                <a:spcPts val="0"/>
-              </a:spcBef>
-              <a:spcAft>
-                <a:spcPts val="0"/>
-              </a:spcAft>
-              <a:buClrTx/>
-              <a:buSzTx/>
-              <a:buFontTx/>
-              <a:buNone/>
-              <a:tabLst/>
-              <a:defRPr/>
-            </a:pPr>
-            <a:r>
-              <a:rPr lang="pt-BR" dirty="0"/>
-              <a:t>Uma boa intuição para se ter em mente é que, com uma alta taxa de aprendizado o vetor de pesos “oscila” ou “pula” caoticamente, incapaz de convergir para áreas mais profundas, porém mais estreitas, da superfície de erro. </a:t>
-            </a:r>
-          </a:p>
-          <a:p>
-            <a:endParaRPr lang="nl-BE" dirty="0"/>
-          </a:p>
-          <a:p>
-            <a:endParaRPr lang="pt-BR" dirty="0"/>
-          </a:p>
-        </p:txBody>
-      </p:sp>
-      <p:sp>
-        <p:nvSpPr>
-          <p:cNvPr id="4" name="Espaço Reservado para Número de Slide 3"/>
-          <p:cNvSpPr>
-            <a:spLocks noGrp="1"/>
-          </p:cNvSpPr>
-          <p:nvPr>
-            <p:ph type="sldNum" sz="quarter" idx="5"/>
-          </p:nvPr>
-        </p:nvSpPr>
-        <p:spPr/>
-        <p:txBody>
-          <a:bodyPr/>
-          <a:lstStyle/>
-          <a:p>
-            <a:fld id="{DA8B99DF-01BC-492A-8CEF-4FD88D18DD9D}" type="slidenum">
-              <a:rPr lang="nl-BE" smtClean="0"/>
-              <a:t>9</a:t>
-            </a:fld>
-            <a:endParaRPr lang="nl-BE"/>
-          </a:p>
-        </p:txBody>
-      </p:sp>
-    </p:spTree>
-    <p:extLst>
-      <p:ext uri="{BB962C8B-B14F-4D97-AF65-F5344CB8AC3E}">
-        <p14:creationId xmlns:p14="http://schemas.microsoft.com/office/powerpoint/2010/main" val="2293088979"/>
-      </p:ext>
-    </p:extLst>
-  </p:cSld>
-  <p:clrMapOvr>
-    <a:masterClrMapping/>
-  </p:clrMapOvr>
-</p:notes>
-</file>
-
-<file path=ppt/notesSlides/notesSlide5.xml><?xml version="1.0" encoding="utf-8"?>
-<p:notes xmlns:a="http://schemas.openxmlformats.org/drawingml/2006/main" xmlns:r="http://schemas.openxmlformats.org/officeDocument/2006/relationships" xmlns:p="http://schemas.openxmlformats.org/presentationml/2006/main">
-  <p:cSld>
-    <p:spTree>
-      <p:nvGrpSpPr>
-        <p:cNvPr id="1" name=""/>
-        <p:cNvGrpSpPr/>
-        <p:nvPr/>
-      </p:nvGrpSpPr>
-      <p:grpSpPr>
-        <a:xfrm>
-          <a:off x="0" y="0"/>
-          <a:ext cx="0" cy="0"/>
-          <a:chOff x="0" y="0"/>
-          <a:chExt cx="0" cy="0"/>
-        </a:xfrm>
-      </p:grpSpPr>
-      <p:sp>
-        <p:nvSpPr>
-          <p:cNvPr id="2" name="Espaço Reservado para Imagem de Slide 1"/>
-          <p:cNvSpPr>
-            <a:spLocks noGrp="1" noRot="1" noChangeAspect="1"/>
-          </p:cNvSpPr>
-          <p:nvPr>
-            <p:ph type="sldImg"/>
-          </p:nvPr>
-        </p:nvSpPr>
-        <p:spPr/>
-      </p:sp>
-      <p:sp>
-        <p:nvSpPr>
-          <p:cNvPr id="3" name="Espaço Reservado para Anotações 2"/>
-          <p:cNvSpPr>
-            <a:spLocks noGrp="1"/>
-          </p:cNvSpPr>
-          <p:nvPr>
-            <p:ph type="body" idx="1"/>
-          </p:nvPr>
-        </p:nvSpPr>
-        <p:spPr/>
-        <p:txBody>
-          <a:bodyPr/>
-          <a:lstStyle/>
-          <a:p>
-            <a:r>
-              <a:rPr lang="pt-BR" dirty="0"/>
-              <a:t>Enquanto </a:t>
-            </a:r>
-            <a:r>
-              <a:rPr lang="pt-BR" baseline="0" dirty="0"/>
-              <a:t>a </a:t>
-            </a:r>
-            <a:r>
-              <a:rPr lang="pt-BR" dirty="0"/>
-              <a:t>direção é determinada pelo</a:t>
-            </a:r>
-            <a:r>
-              <a:rPr lang="pt-BR" baseline="0" dirty="0"/>
-              <a:t> vetor</a:t>
-            </a:r>
-            <a:r>
-              <a:rPr lang="pt-BR" dirty="0"/>
-              <a:t> gradiente da função de erro, a taxa de aprendizado determina o quão grande um passo é dado nessa direção.</a:t>
-            </a:r>
-          </a:p>
-          <a:p>
-            <a:endParaRPr lang="pt-BR" dirty="0"/>
-          </a:p>
-          <a:p>
-            <a:r>
-              <a:rPr lang="pt-BR" dirty="0"/>
-              <a:t>Se o</a:t>
-            </a:r>
-            <a:r>
-              <a:rPr lang="pt-BR" baseline="0" dirty="0"/>
-              <a:t> passo</a:t>
-            </a:r>
-            <a:r>
-              <a:rPr lang="pt-BR" dirty="0"/>
-              <a:t> de aprendizagem for muito pequeno, o algoritmo precisará passar por muitas iterações até convergir, o que levará muito tempo.</a:t>
-            </a:r>
-          </a:p>
-          <a:p>
-            <a:endParaRPr lang="pt-BR" dirty="0"/>
-          </a:p>
-          <a:p>
-            <a:r>
-              <a:rPr lang="pt-BR" dirty="0"/>
-              <a:t>Por outro lado, se ele</a:t>
-            </a:r>
-            <a:r>
-              <a:rPr lang="pt-BR" baseline="0" dirty="0"/>
-              <a:t> </a:t>
-            </a:r>
-            <a:r>
-              <a:rPr lang="pt-BR" dirty="0"/>
-              <a:t>for muito grande, você pode pular o vale e acabar do outro lado, possivelmente até mais alto do que antes. Isso pode fazer o algoritmo divergir, com valores cada vez maiores, falhando em encontrar uma boa solução.</a:t>
-            </a:r>
-          </a:p>
-          <a:p>
-            <a:endParaRPr lang="pt-BR" dirty="0"/>
-          </a:p>
-          <a:p>
-            <a:r>
-              <a:rPr lang="pt-BR" dirty="0"/>
-              <a:t>Assim, o</a:t>
-            </a:r>
-            <a:r>
-              <a:rPr lang="pt-BR" baseline="0" dirty="0"/>
-              <a:t> passo </a:t>
-            </a:r>
-            <a:r>
-              <a:rPr lang="pt-BR" dirty="0"/>
-              <a:t>de aprendizagem deve ser experimentado/explorado para encontrar o melhor valor que acelere a descida do gradiente.</a:t>
-            </a:r>
-          </a:p>
-          <a:p>
-            <a:endParaRPr lang="pt-BR" dirty="0"/>
-          </a:p>
-          <a:p>
-            <a:r>
-              <a:rPr lang="pt-BR" dirty="0"/>
-              <a:t>Ao usar grandes valores para o passo de aprendizagem, é possível encontrar um ciclo de feedback positivo no qual grandes valores induzem grandes gradientes que, então, induzem uma grande atualização dos pesos. Se essas atualizações aumentarem consistentemente o tamanho dos pesos, então [os pesos] se afastam rapidamente do</a:t>
-            </a:r>
-            <a:r>
-              <a:rPr lang="pt-BR" baseline="0" dirty="0"/>
-              <a:t> ponto de mínimo </a:t>
-            </a:r>
-            <a:r>
-              <a:rPr lang="pt-BR" dirty="0"/>
-              <a:t>até que ocorra o estouro da precisão numérica.</a:t>
-            </a:r>
-          </a:p>
-          <a:p>
-            <a:endParaRPr lang="pt-BR" dirty="0"/>
-          </a:p>
-          <a:p>
-            <a:pPr marL="0" marR="0" lvl="0" indent="0" algn="l" defTabSz="914400" rtl="0" eaLnBrk="1" fontAlgn="auto" latinLnBrk="0" hangingPunct="1">
-              <a:lnSpc>
-                <a:spcPct val="100000"/>
-              </a:lnSpc>
-              <a:spcBef>
-                <a:spcPts val="0"/>
-              </a:spcBef>
-              <a:spcAft>
-                <a:spcPts val="0"/>
-              </a:spcAft>
-              <a:buClrTx/>
-              <a:buSzTx/>
-              <a:buFontTx/>
-              <a:buNone/>
-              <a:tabLst/>
-              <a:defRPr/>
-            </a:pPr>
-            <a:r>
-              <a:rPr lang="pt-BR" dirty="0"/>
-              <a:t>Uma boa intuição para se ter em mente é que, com uma alta taxa de aprendizado o vetor de pesos “oscila” ou “pula” caoticamente, incapaz de convergir para áreas mais profundas, porém mais estreitas, da superfície de erro. </a:t>
-            </a:r>
-          </a:p>
-          <a:p>
-            <a:endParaRPr lang="nl-BE" dirty="0"/>
-          </a:p>
-          <a:p>
-            <a:endParaRPr lang="pt-BR" dirty="0"/>
-          </a:p>
-        </p:txBody>
-      </p:sp>
-      <p:sp>
-        <p:nvSpPr>
-          <p:cNvPr id="4" name="Espaço Reservado para Número de Slide 3"/>
-          <p:cNvSpPr>
-            <a:spLocks noGrp="1"/>
-          </p:cNvSpPr>
-          <p:nvPr>
-            <p:ph type="sldNum" sz="quarter" idx="5"/>
-          </p:nvPr>
-        </p:nvSpPr>
-        <p:spPr/>
-        <p:txBody>
-          <a:bodyPr/>
-          <a:lstStyle/>
-          <a:p>
-            <a:fld id="{DA8B99DF-01BC-492A-8CEF-4FD88D18DD9D}" type="slidenum">
-              <a:rPr lang="nl-BE" smtClean="0"/>
-              <a:t>10</a:t>
-            </a:fld>
-            <a:endParaRPr lang="nl-BE"/>
-          </a:p>
-        </p:txBody>
-      </p:sp>
-    </p:spTree>
-    <p:extLst>
-      <p:ext uri="{BB962C8B-B14F-4D97-AF65-F5344CB8AC3E}">
-        <p14:creationId xmlns:p14="http://schemas.microsoft.com/office/powerpoint/2010/main" val="1520696515"/>
-      </p:ext>
-    </p:extLst>
-  </p:cSld>
-  <p:clrMapOvr>
-    <a:masterClrMapping/>
-  </p:clrMapOvr>
-</p:notes>
-</file>
-
-<file path=ppt/notesSlides/notesSlide6.xml><?xml version="1.0" encoding="utf-8"?>
-<p:notes xmlns:a="http://schemas.openxmlformats.org/drawingml/2006/main" xmlns:r="http://schemas.openxmlformats.org/officeDocument/2006/relationships" xmlns:p="http://schemas.openxmlformats.org/presentationml/2006/main">
-  <p:cSld>
-    <p:spTree>
-      <p:nvGrpSpPr>
-        <p:cNvPr id="1" name=""/>
-        <p:cNvGrpSpPr/>
-        <p:nvPr/>
-      </p:nvGrpSpPr>
-      <p:grpSpPr>
-        <a:xfrm>
-          <a:off x="0" y="0"/>
-          <a:ext cx="0" cy="0"/>
-          <a:chOff x="0" y="0"/>
-          <a:chExt cx="0" cy="0"/>
-        </a:xfrm>
-      </p:grpSpPr>
-      <p:sp>
-        <p:nvSpPr>
-          <p:cNvPr id="2" name="Espaço Reservado para Imagem de Slide 1"/>
-          <p:cNvSpPr>
-            <a:spLocks noGrp="1" noRot="1" noChangeAspect="1"/>
-          </p:cNvSpPr>
-          <p:nvPr>
-            <p:ph type="sldImg"/>
-          </p:nvPr>
-        </p:nvSpPr>
-        <p:spPr/>
-      </p:sp>
-      <p:sp>
-        <p:nvSpPr>
-          <p:cNvPr id="3" name="Espaço Reservado para Anotações 2"/>
-          <p:cNvSpPr>
-            <a:spLocks noGrp="1"/>
-          </p:cNvSpPr>
-          <p:nvPr>
-            <p:ph type="body" idx="1"/>
-          </p:nvPr>
-        </p:nvSpPr>
-        <p:spPr/>
-        <p:txBody>
-          <a:bodyPr/>
-          <a:lstStyle/>
-          <a:p>
-            <a:r>
-              <a:rPr lang="pt-BR" dirty="0"/>
-              <a:t>Enquanto </a:t>
-            </a:r>
-            <a:r>
-              <a:rPr lang="pt-BR" baseline="0" dirty="0"/>
-              <a:t>a </a:t>
-            </a:r>
-            <a:r>
-              <a:rPr lang="pt-BR" dirty="0"/>
-              <a:t>direção é determinada pelo</a:t>
-            </a:r>
-            <a:r>
-              <a:rPr lang="pt-BR" baseline="0" dirty="0"/>
-              <a:t> vetor</a:t>
-            </a:r>
-            <a:r>
-              <a:rPr lang="pt-BR" dirty="0"/>
-              <a:t> gradiente da função de erro, a taxa de aprendizado determina o quão grande um passo é dado nessa direção.</a:t>
-            </a:r>
-          </a:p>
-          <a:p>
-            <a:endParaRPr lang="pt-BR" dirty="0"/>
-          </a:p>
-          <a:p>
-            <a:r>
-              <a:rPr lang="pt-BR" dirty="0"/>
-              <a:t>Se o</a:t>
-            </a:r>
-            <a:r>
-              <a:rPr lang="pt-BR" baseline="0" dirty="0"/>
-              <a:t> passo</a:t>
-            </a:r>
-            <a:r>
-              <a:rPr lang="pt-BR" dirty="0"/>
-              <a:t> de aprendizagem for muito pequeno, o algoritmo precisará passar por muitas iterações até convergir, o que levará muito tempo.</a:t>
-            </a:r>
-          </a:p>
-          <a:p>
-            <a:endParaRPr lang="pt-BR" dirty="0"/>
-          </a:p>
-          <a:p>
-            <a:r>
-              <a:rPr lang="pt-BR" dirty="0"/>
-              <a:t>Por outro lado, se ele</a:t>
-            </a:r>
-            <a:r>
-              <a:rPr lang="pt-BR" baseline="0" dirty="0"/>
-              <a:t> </a:t>
-            </a:r>
-            <a:r>
-              <a:rPr lang="pt-BR" dirty="0"/>
-              <a:t>for muito grande, você pode pular o vale e acabar do outro lado, possivelmente até mais alto do que antes. Isso pode fazer o algoritmo divergir, com valores cada vez maiores, falhando em encontrar uma boa solução.</a:t>
-            </a:r>
-          </a:p>
-          <a:p>
-            <a:endParaRPr lang="pt-BR" dirty="0"/>
-          </a:p>
-          <a:p>
-            <a:r>
-              <a:rPr lang="pt-BR" dirty="0"/>
-              <a:t>Assim, o</a:t>
-            </a:r>
-            <a:r>
-              <a:rPr lang="pt-BR" baseline="0" dirty="0"/>
-              <a:t> passo </a:t>
-            </a:r>
-            <a:r>
-              <a:rPr lang="pt-BR" dirty="0"/>
-              <a:t>de aprendizagem deve ser experimentado/explorado para encontrar o melhor valor que acelere a descida do gradiente.</a:t>
-            </a:r>
-          </a:p>
-          <a:p>
-            <a:endParaRPr lang="pt-BR" dirty="0"/>
-          </a:p>
-          <a:p>
-            <a:r>
-              <a:rPr lang="pt-BR" dirty="0"/>
-              <a:t>Ao usar grandes valores para o passo de aprendizagem, é possível encontrar um ciclo de feedback positivo no qual grandes valores induzem grandes gradientes que, então, induzem uma grande atualização dos pesos. Se essas atualizações aumentarem consistentemente o tamanho dos pesos, então [os pesos] se afastam rapidamente do</a:t>
-            </a:r>
-            <a:r>
-              <a:rPr lang="pt-BR" baseline="0" dirty="0"/>
-              <a:t> ponto de mínimo </a:t>
-            </a:r>
-            <a:r>
-              <a:rPr lang="pt-BR" dirty="0"/>
-              <a:t>até que ocorra o estouro da precisão numérica.</a:t>
-            </a:r>
-          </a:p>
-          <a:p>
-            <a:endParaRPr lang="pt-BR" dirty="0"/>
-          </a:p>
-          <a:p>
-            <a:pPr marL="0" marR="0" lvl="0" indent="0" algn="l" defTabSz="914400" rtl="0" eaLnBrk="1" fontAlgn="auto" latinLnBrk="0" hangingPunct="1">
-              <a:lnSpc>
-                <a:spcPct val="100000"/>
-              </a:lnSpc>
-              <a:spcBef>
-                <a:spcPts val="0"/>
-              </a:spcBef>
-              <a:spcAft>
-                <a:spcPts val="0"/>
-              </a:spcAft>
-              <a:buClrTx/>
-              <a:buSzTx/>
-              <a:buFontTx/>
-              <a:buNone/>
-              <a:tabLst/>
-              <a:defRPr/>
-            </a:pPr>
-            <a:r>
-              <a:rPr lang="pt-BR" dirty="0"/>
-              <a:t>Uma boa intuição para se ter em mente é que, com uma alta taxa de aprendizado o vetor de pesos “oscila” ou “pula” caoticamente, incapaz de convergir para áreas mais profundas, porém mais estreitas, da superfície de erro. </a:t>
-            </a:r>
-          </a:p>
-          <a:p>
-            <a:endParaRPr lang="nl-BE" dirty="0"/>
-          </a:p>
-          <a:p>
-            <a:endParaRPr lang="pt-BR" dirty="0"/>
-          </a:p>
-        </p:txBody>
-      </p:sp>
-      <p:sp>
-        <p:nvSpPr>
-          <p:cNvPr id="4" name="Espaço Reservado para Número de Slide 3"/>
-          <p:cNvSpPr>
-            <a:spLocks noGrp="1"/>
-          </p:cNvSpPr>
-          <p:nvPr>
-            <p:ph type="sldNum" sz="quarter" idx="5"/>
-          </p:nvPr>
-        </p:nvSpPr>
-        <p:spPr/>
-        <p:txBody>
-          <a:bodyPr/>
-          <a:lstStyle/>
-          <a:p>
-            <a:fld id="{DA8B99DF-01BC-492A-8CEF-4FD88D18DD9D}" type="slidenum">
-              <a:rPr lang="nl-BE" smtClean="0"/>
-              <a:t>11</a:t>
-            </a:fld>
-            <a:endParaRPr lang="nl-BE"/>
-          </a:p>
-        </p:txBody>
-      </p:sp>
-    </p:spTree>
-    <p:extLst>
-      <p:ext uri="{BB962C8B-B14F-4D97-AF65-F5344CB8AC3E}">
-        <p14:creationId xmlns:p14="http://schemas.microsoft.com/office/powerpoint/2010/main" val="785167618"/>
-      </p:ext>
-    </p:extLst>
-  </p:cSld>
-  <p:clrMapOvr>
-    <a:masterClrMapping/>
-  </p:clrMapOvr>
-</p:notes>
-</file>
-
-<file path=ppt/notesSlides/notesSlide7.xml><?xml version="1.0" encoding="utf-8"?>
-<p:notes xmlns:a="http://schemas.openxmlformats.org/drawingml/2006/main" xmlns:r="http://schemas.openxmlformats.org/officeDocument/2006/relationships" xmlns:p="http://schemas.openxmlformats.org/presentationml/2006/main">
-  <p:cSld>
-    <p:spTree>
-      <p:nvGrpSpPr>
-        <p:cNvPr id="1" name=""/>
-        <p:cNvGrpSpPr/>
-        <p:nvPr/>
-      </p:nvGrpSpPr>
-      <p:grpSpPr>
-        <a:xfrm>
-          <a:off x="0" y="0"/>
-          <a:ext cx="0" cy="0"/>
-          <a:chOff x="0" y="0"/>
-          <a:chExt cx="0" cy="0"/>
-        </a:xfrm>
-      </p:grpSpPr>
-      <p:sp>
-        <p:nvSpPr>
-          <p:cNvPr id="2" name="Espaço Reservado para Imagem de Slide 1"/>
-          <p:cNvSpPr>
-            <a:spLocks noGrp="1" noRot="1" noChangeAspect="1"/>
-          </p:cNvSpPr>
-          <p:nvPr>
-            <p:ph type="sldImg"/>
-          </p:nvPr>
-        </p:nvSpPr>
-        <p:spPr/>
-      </p:sp>
-      <p:sp>
-        <p:nvSpPr>
-          <p:cNvPr id="3" name="Espaço Reservado para Anotações 2"/>
-          <p:cNvSpPr>
-            <a:spLocks noGrp="1"/>
-          </p:cNvSpPr>
-          <p:nvPr>
-            <p:ph type="body" idx="1"/>
-          </p:nvPr>
-        </p:nvSpPr>
-        <p:spPr/>
-        <p:txBody>
-          <a:bodyPr/>
-          <a:lstStyle/>
-          <a:p>
-            <a:r>
-              <a:rPr lang="pt-BR" sz="1200" dirty="0"/>
-              <a:t>Se o</a:t>
-            </a:r>
-            <a:r>
-              <a:rPr lang="pt-BR" sz="1200" baseline="0" dirty="0"/>
-              <a:t> passo</a:t>
-            </a:r>
-            <a:r>
-              <a:rPr lang="pt-BR" sz="1200" dirty="0"/>
-              <a:t> de aprendizagem for muito pequeno, o algoritmo precisará passar por muitas iterações para convergir, o que levará muito tempo.</a:t>
-            </a:r>
-          </a:p>
-          <a:p>
-            <a:endParaRPr lang="pt-BR" sz="1200" dirty="0"/>
-          </a:p>
-          <a:p>
-            <a:r>
-              <a:rPr lang="pt-BR" sz="1200" dirty="0"/>
-              <a:t>Por outro lado, se ele</a:t>
-            </a:r>
-            <a:r>
-              <a:rPr lang="pt-BR" sz="1200" baseline="0" dirty="0"/>
-              <a:t> </a:t>
-            </a:r>
-            <a:r>
-              <a:rPr lang="pt-BR" sz="1200" dirty="0"/>
-              <a:t>for muito grande, você pode pular o vale e acabar do outro lado, possivelmente até mais alto do que antes. Isso pode fazer o algoritmo divergir, com valores cada vez maiores, falhando em encontrar uma boa solução.</a:t>
-            </a:r>
-          </a:p>
-          <a:p>
-            <a:endParaRPr lang="pt-BR" sz="1200" dirty="0"/>
-          </a:p>
-          <a:p>
-            <a:r>
-              <a:rPr lang="pt-BR" sz="1200" dirty="0"/>
-              <a:t>Assim, o</a:t>
-            </a:r>
-            <a:r>
-              <a:rPr lang="pt-BR" sz="1200" baseline="0" dirty="0"/>
-              <a:t> passo </a:t>
-            </a:r>
-            <a:r>
-              <a:rPr lang="pt-BR" sz="1200" dirty="0"/>
-              <a:t>de aprendizagem deve ser experimentado/explorado para encontrar o melhor valor que acelere a descida do gradiente.</a:t>
-            </a:r>
-          </a:p>
-          <a:p>
-            <a:endParaRPr lang="pt-BR" sz="1200" dirty="0"/>
-          </a:p>
-          <a:p>
-            <a:r>
-              <a:rPr lang="pt-BR" sz="1200" dirty="0"/>
-              <a:t>O momentum adiciona uma fração da atualização de peso anterior a atual. Quando o gradiente continua apontando na mesma direção por atualizações consecutivas, isso aumentará o tamanho dos passos dados em direção ao mínimo.</a:t>
-            </a:r>
-            <a:r>
-              <a:rPr lang="pt-BR" sz="1200" baseline="0" dirty="0"/>
-              <a:t> </a:t>
-            </a:r>
-            <a:r>
-              <a:rPr lang="pt-BR" sz="1200" dirty="0"/>
-              <a:t>Por outro lado, quando o gradiente continua mudando de direção, o momentum suaviza as variações, ou seja, as atualizações.</a:t>
-            </a:r>
-          </a:p>
-          <a:p>
-            <a:endParaRPr lang="pt-BR" sz="1200" dirty="0"/>
-          </a:p>
-          <a:p>
-            <a:r>
-              <a:rPr lang="pt-BR" sz="1200" b="1" dirty="0"/>
-              <a:t>OBS</a:t>
-            </a:r>
-            <a:r>
-              <a:rPr lang="pt-BR" sz="1200" dirty="0"/>
-              <a:t>.: Passos largos durante as iterações iniciais e curtos conforme o algoritmo se aproxima do mínimo podem acelerar a convergência.</a:t>
-            </a:r>
-            <a:r>
-              <a:rPr lang="pt-BR" sz="1200" baseline="0" dirty="0"/>
-              <a:t> </a:t>
-            </a:r>
-            <a:r>
-              <a:rPr lang="pt-BR" sz="1200" dirty="0"/>
-              <a:t>Este tipo de abordagem é implementada por </a:t>
-            </a:r>
-            <a:r>
-              <a:rPr lang="pt-BR" sz="1200" b="1" i="1" dirty="0"/>
-              <a:t>esquemas de variação programada</a:t>
-            </a:r>
-            <a:r>
-              <a:rPr lang="pt-BR" sz="1200" dirty="0"/>
-              <a:t> do passo de aprendizagem </a:t>
-            </a:r>
-          </a:p>
-          <a:p>
-            <a:pPr marL="171450" indent="-171450">
-              <a:buFont typeface="Arial" panose="020B0604020202020204" pitchFamily="34" charset="0"/>
-              <a:buChar char="•"/>
-            </a:pPr>
-            <a:r>
-              <a:rPr lang="pt-BR" sz="1200" dirty="0"/>
-              <a:t>Por exemplo: momentum, </a:t>
-            </a:r>
-            <a:r>
-              <a:rPr lang="pt-BR" sz="1200" dirty="0" err="1"/>
-              <a:t>anelamento</a:t>
-            </a:r>
-            <a:r>
-              <a:rPr lang="pt-BR" sz="1200" dirty="0"/>
-              <a:t>, algoritmos de otimização com ajuste adaptativo do passo de aprendizagem (</a:t>
-            </a:r>
-            <a:r>
-              <a:rPr lang="pt-BR" sz="1200" dirty="0" err="1"/>
-              <a:t>RMSProp</a:t>
-            </a:r>
-            <a:r>
-              <a:rPr lang="pt-BR" sz="1200" dirty="0"/>
-              <a:t>, </a:t>
-            </a:r>
-            <a:r>
-              <a:rPr lang="pt-BR" sz="1200" dirty="0" err="1"/>
-              <a:t>AdaGrad</a:t>
-            </a:r>
-            <a:r>
-              <a:rPr lang="pt-BR" sz="1200" dirty="0"/>
-              <a:t>, Adam, etc.).</a:t>
-            </a:r>
-            <a:endParaRPr lang="nl-BE" sz="1200" dirty="0"/>
-          </a:p>
-        </p:txBody>
-      </p:sp>
-      <p:sp>
-        <p:nvSpPr>
-          <p:cNvPr id="4" name="Espaço Reservado para Número de Slide 3"/>
-          <p:cNvSpPr>
-            <a:spLocks noGrp="1"/>
-          </p:cNvSpPr>
-          <p:nvPr>
-            <p:ph type="sldNum" sz="quarter" idx="5"/>
-          </p:nvPr>
-        </p:nvSpPr>
-        <p:spPr/>
-        <p:txBody>
-          <a:bodyPr/>
-          <a:lstStyle/>
-          <a:p>
-            <a:fld id="{DA8B99DF-01BC-492A-8CEF-4FD88D18DD9D}" type="slidenum">
-              <a:rPr lang="nl-BE" smtClean="0"/>
-              <a:t>12</a:t>
-            </a:fld>
-            <a:endParaRPr lang="nl-BE"/>
-          </a:p>
-        </p:txBody>
-      </p:sp>
-    </p:spTree>
-    <p:extLst>
-      <p:ext uri="{BB962C8B-B14F-4D97-AF65-F5344CB8AC3E}">
-        <p14:creationId xmlns:p14="http://schemas.microsoft.com/office/powerpoint/2010/main" val="3919986911"/>
-      </p:ext>
-    </p:extLst>
-  </p:cSld>
-  <p:clrMapOvr>
-    <a:masterClrMapping/>
-  </p:clrMapOvr>
-</p:notes>
-</file>
-
-<file path=ppt/notesSlides/notesSlide8.xml><?xml version="1.0" encoding="utf-8"?>
-<p:notes xmlns:a="http://schemas.openxmlformats.org/drawingml/2006/main" xmlns:r="http://schemas.openxmlformats.org/officeDocument/2006/relationships" xmlns:p="http://schemas.openxmlformats.org/presentationml/2006/main">
-  <p:cSld>
-    <p:spTree>
-      <p:nvGrpSpPr>
-        <p:cNvPr id="1" name=""/>
-        <p:cNvGrpSpPr/>
-        <p:nvPr/>
-      </p:nvGrpSpPr>
-      <p:grpSpPr>
-        <a:xfrm>
-          <a:off x="0" y="0"/>
-          <a:ext cx="0" cy="0"/>
-          <a:chOff x="0" y="0"/>
-          <a:chExt cx="0" cy="0"/>
-        </a:xfrm>
-      </p:grpSpPr>
-      <p:sp>
-        <p:nvSpPr>
-          <p:cNvPr id="2" name="Espaço Reservado para Imagem de Slide 1"/>
-          <p:cNvSpPr>
-            <a:spLocks noGrp="1" noRot="1" noChangeAspect="1"/>
-          </p:cNvSpPr>
-          <p:nvPr>
-            <p:ph type="sldImg"/>
-          </p:nvPr>
-        </p:nvSpPr>
-        <p:spPr/>
-      </p:sp>
-      <p:sp>
-        <p:nvSpPr>
-          <p:cNvPr id="3" name="Espaço Reservado para Anotações 2"/>
-          <p:cNvSpPr>
-            <a:spLocks noGrp="1"/>
-          </p:cNvSpPr>
-          <p:nvPr>
-            <p:ph type="body" idx="1"/>
-          </p:nvPr>
-        </p:nvSpPr>
-        <p:spPr/>
-        <p:txBody>
-          <a:bodyPr/>
-          <a:lstStyle/>
-          <a:p>
-            <a:r>
-              <a:rPr lang="pt-BR" dirty="0"/>
-              <a:t>Como sabemos se o gradiente</a:t>
-            </a:r>
-            <a:r>
-              <a:rPr lang="pt-BR" baseline="0" dirty="0"/>
-              <a:t> descendente está funcionando corretamente em relação ao aprendizado?</a:t>
-            </a:r>
-            <a:endParaRPr lang="pt-BR" dirty="0"/>
-          </a:p>
-          <a:p>
-            <a:endParaRPr lang="pt-BR" dirty="0"/>
-          </a:p>
-          <a:p>
-            <a:r>
-              <a:rPr lang="pt-BR" dirty="0"/>
-              <a:t>Como</a:t>
-            </a:r>
-            <a:r>
-              <a:rPr lang="pt-BR" baseline="0" dirty="0"/>
-              <a:t> você consegue </a:t>
-            </a:r>
-            <a:r>
-              <a:rPr lang="pt-BR" baseline="0" dirty="0" err="1"/>
-              <a:t>debugar</a:t>
-            </a:r>
-            <a:r>
-              <a:rPr lang="pt-BR" baseline="0" dirty="0"/>
-              <a:t>/depurar o algoritmo do gradiente descendente quando não é possível se plotar o gráfico de contorno e verificar o caminho seguido pelo algoritmo?</a:t>
-            </a:r>
-            <a:endParaRPr lang="pt-BR" dirty="0"/>
-          </a:p>
-          <a:p>
-            <a:endParaRPr lang="pt-BR" dirty="0"/>
-          </a:p>
-        </p:txBody>
-      </p:sp>
-      <p:sp>
-        <p:nvSpPr>
-          <p:cNvPr id="4" name="Espaço Reservado para Número de Slide 3"/>
-          <p:cNvSpPr>
-            <a:spLocks noGrp="1"/>
-          </p:cNvSpPr>
-          <p:nvPr>
-            <p:ph type="sldNum" sz="quarter" idx="5"/>
-          </p:nvPr>
-        </p:nvSpPr>
-        <p:spPr/>
-        <p:txBody>
-          <a:bodyPr/>
-          <a:lstStyle/>
-          <a:p>
-            <a:fld id="{DA8B99DF-01BC-492A-8CEF-4FD88D18DD9D}" type="slidenum">
-              <a:rPr lang="nl-BE" smtClean="0"/>
-              <a:t>13</a:t>
-            </a:fld>
-            <a:endParaRPr lang="nl-BE"/>
-          </a:p>
-        </p:txBody>
-      </p:sp>
-    </p:spTree>
-    <p:extLst>
-      <p:ext uri="{BB962C8B-B14F-4D97-AF65-F5344CB8AC3E}">
-        <p14:creationId xmlns:p14="http://schemas.microsoft.com/office/powerpoint/2010/main" val="602861601"/>
-      </p:ext>
-    </p:extLst>
-  </p:cSld>
-  <p:clrMapOvr>
-    <a:masterClrMapping/>
-  </p:clrMapOvr>
-</p:notes>
-</file>
-
-<file path=ppt/notesSlides/notesSlide9.xml><?xml version="1.0" encoding="utf-8"?>
 <p:notes xmlns:a="http://schemas.openxmlformats.org/drawingml/2006/main" xmlns:r="http://schemas.openxmlformats.org/officeDocument/2006/relationships" xmlns:p="http://schemas.openxmlformats.org/presentationml/2006/main">
   <p:cSld>
     <p:spTree>
@@ -3472,191 +2855,110 @@
             </a:r>
             <a:r>
               <a:rPr lang="pt-BR" dirty="0"/>
-              <a:t>:</a:t>
-            </a:r>
-            <a:r>
-              <a:rPr lang="pt-BR" baseline="0" dirty="0"/>
-              <a:t> </a:t>
-            </a:r>
-            <a:r>
-              <a:rPr lang="pt-BR" dirty="0"/>
-              <a:t>https://colab.research.google.com/</a:t>
-            </a:r>
-            <a:r>
-              <a:rPr lang="pt-BR" dirty="0" err="1"/>
-              <a:t>github</a:t>
-            </a:r>
-            <a:r>
-              <a:rPr lang="pt-BR" dirty="0"/>
-              <a:t>/zz4fap/t319_aprendizado_de_maquina/</a:t>
-            </a:r>
-            <a:r>
-              <a:rPr lang="pt-BR" dirty="0" err="1"/>
-              <a:t>blob</a:t>
-            </a:r>
-            <a:r>
-              <a:rPr lang="pt-BR" dirty="0"/>
-              <a:t>/</a:t>
-            </a:r>
-            <a:r>
-              <a:rPr lang="pt-BR" dirty="0" err="1"/>
-              <a:t>main</a:t>
-            </a:r>
-            <a:r>
-              <a:rPr lang="pt-BR" dirty="0"/>
-              <a:t>/notebooks/</a:t>
-            </a:r>
-            <a:r>
-              <a:rPr lang="pt-BR" dirty="0" err="1"/>
-              <a:t>regression</a:t>
-            </a:r>
-            <a:r>
-              <a:rPr lang="pt-BR" dirty="0"/>
-              <a:t>/</a:t>
-            </a:r>
-            <a:r>
-              <a:rPr lang="pt-BR" dirty="0" err="1"/>
-              <a:t>gd_versions</a:t>
-            </a:r>
-            <a:r>
-              <a:rPr lang="pt-BR" dirty="0"/>
-              <a:t>/</a:t>
-            </a:r>
-            <a:r>
-              <a:rPr lang="pt-BR" dirty="0" err="1"/>
-              <a:t>gde_com_redução_gradual.ipynb</a:t>
-            </a:r>
+              <a:t>: https://colab.research.google.com/github/zz4fap/t319_aprendizado_de_maquina/blob/main/notebooks/regression/selecionando_o_passo_de_aprendizagem.ipynb</a:t>
+            </a:r>
+          </a:p>
+          <a:p>
+            <a:pPr marL="0" marR="0" lvl="0" indent="0" algn="l" defTabSz="914400" rtl="0" eaLnBrk="1" fontAlgn="auto" latinLnBrk="0" hangingPunct="1">
+              <a:lnSpc>
+                <a:spcPct val="100000"/>
+              </a:lnSpc>
+              <a:spcBef>
+                <a:spcPts val="0"/>
+              </a:spcBef>
+              <a:spcAft>
+                <a:spcPts val="0"/>
+              </a:spcAft>
+              <a:buClrTx/>
+              <a:buSzTx/>
+              <a:buFontTx/>
+              <a:buNone/>
+              <a:tabLst/>
+              <a:defRPr/>
+            </a:pPr>
             <a:endParaRPr lang="pt-BR" dirty="0"/>
           </a:p>
           <a:p>
-            <a:endParaRPr lang="pt-BR" sz="1200" baseline="0" dirty="0"/>
-          </a:p>
-          <a:p>
-            <a:r>
-              <a:rPr lang="pt-BR" sz="1200" baseline="0" dirty="0"/>
-              <a:t>Os passos começam com grandes valores (o que ajuda a progredir rapidamente e a escapar de mínimos locais, casos em que a superfície de erro seja bastante irregular) e depois diminuem cada vez mais, permitindo que o algoritmo se estabilize no mínimo global.</a:t>
-            </a:r>
-          </a:p>
-          <a:p>
-            <a:endParaRPr lang="pt-BR" sz="1200" baseline="0" dirty="0"/>
-          </a:p>
-          <a:p>
+            <a:pPr marL="0" marR="0" lvl="0" indent="0" algn="l" defTabSz="914400" rtl="0" eaLnBrk="1" fontAlgn="auto" latinLnBrk="0" hangingPunct="1">
+              <a:lnSpc>
+                <a:spcPct val="100000"/>
+              </a:lnSpc>
+              <a:spcBef>
+                <a:spcPts val="0"/>
+              </a:spcBef>
+              <a:spcAft>
+                <a:spcPts val="0"/>
+              </a:spcAft>
+              <a:buClrTx/>
+              <a:buSzTx/>
+              <a:buFontTx/>
+              <a:buNone/>
+              <a:tabLst/>
+              <a:defRPr/>
+            </a:pPr>
             <a:r>
               <a:rPr lang="pt-BR" dirty="0"/>
-              <a:t>Se a taxa de aprendizagem for reduzida muito rapidamente, o algoritmo poderá ficar preso no mínimo local ou até ficar</a:t>
+              <a:t>Hiperparâmetro: parâmetro que influencia no aprendizado do algoritmo,</a:t>
             </a:r>
             <a:r>
               <a:rPr lang="pt-BR" baseline="0" dirty="0"/>
-              <a:t> travado antes de chegar ao mínimo</a:t>
-            </a:r>
-            <a:r>
-              <a:rPr lang="pt-BR" dirty="0"/>
-              <a:t>. Se a taxa de aprendizado for reduzida muito lentamente, o algoritmo poderá oscilar ao</a:t>
-            </a:r>
-            <a:r>
-              <a:rPr lang="pt-BR" baseline="0" dirty="0"/>
-              <a:t> redor do</a:t>
-            </a:r>
-            <a:r>
-              <a:rPr lang="pt-BR" dirty="0"/>
-              <a:t> mínimo por um longo tempo e acabar com uma solução não ótima (</a:t>
-            </a:r>
-            <a:r>
-              <a:rPr lang="pt-BR" dirty="0" err="1"/>
-              <a:t>sub-ótima</a:t>
-            </a:r>
-            <a:r>
-              <a:rPr lang="pt-BR" dirty="0"/>
-              <a:t>) caso o treinamento se encerre muito cedo.</a:t>
-            </a:r>
+              <a:t> ou seja, dita seu aprendizado. Não é um parâmetro aprendido pelo modelo como no caso dos pesos de um modelo de regressão linear.</a:t>
+            </a:r>
+            <a:endParaRPr lang="pt-BR" dirty="0"/>
           </a:p>
           <a:p>
             <a:endParaRPr lang="pt-BR" dirty="0"/>
           </a:p>
           <a:p>
             <a:r>
-              <a:rPr lang="pt-BR" b="1" dirty="0"/>
-              <a:t>Alguns tipos de esquema para ajuste do passo de aprendizagem são:</a:t>
+              <a:rPr lang="pt-BR" dirty="0"/>
+              <a:t>Se o</a:t>
+            </a:r>
+            <a:r>
+              <a:rPr lang="pt-BR" baseline="0" dirty="0"/>
+              <a:t> passo</a:t>
+            </a:r>
+            <a:r>
+              <a:rPr lang="pt-BR" dirty="0"/>
+              <a:t> de aprendizagem for muito pequeno, o algoritmo precisará passar por muitas iterações para convergir, o que levará muito tempo.</a:t>
             </a:r>
           </a:p>
           <a:p>
-            <a:pPr marL="171450" indent="-171450">
-              <a:buFont typeface="Arial" panose="020B0604020202020204" pitchFamily="34" charset="0"/>
-              <a:buChar char="•"/>
-            </a:pPr>
-            <a:r>
-              <a:rPr lang="pt-BR" b="1" dirty="0"/>
-              <a:t>Decaimento por etapas ou degraus</a:t>
-            </a:r>
-            <a:r>
-              <a:rPr lang="pt-BR" dirty="0"/>
-              <a:t>: reduz a taxa de aprendizado de algum fator a cada número pré-definido de iterações ou épocas. Os valores típicos são utilizados para reduzir a taxa de aprendizado pela metade a cada número pré-definido de épocas. Esses números dependem muito do tipo de problema e do modelo. Uma heurística que você pode ver na prática é observar o erro de validação durante o treinamento com uma taxa de aprendizado fixa e reduzir a taxa de aprendizado em uma constante (por exemplo, 0,5) sempre que o erro de validação parar de decrescer.</a:t>
-            </a:r>
-          </a:p>
-          <a:p>
-            <a:pPr marL="171450" indent="-171450">
-              <a:buFont typeface="Arial" panose="020B0604020202020204" pitchFamily="34" charset="0"/>
-              <a:buChar char="•"/>
-            </a:pPr>
-            <a:r>
-              <a:rPr lang="pt-BR" b="1" dirty="0"/>
-              <a:t>Decaimento exponencial</a:t>
-            </a:r>
-            <a:r>
-              <a:rPr lang="pt-BR" dirty="0"/>
-              <a:t>: tem a forma matemática α = α0 e^(-</a:t>
-            </a:r>
-            <a:r>
-              <a:rPr lang="pt-BR" dirty="0" err="1"/>
-              <a:t>kt</a:t>
-            </a:r>
-            <a:r>
-              <a:rPr lang="pt-BR" dirty="0"/>
-              <a:t>), onde α0, k são hiperparâmetros e t é o número da iteração (mas você também pode usar o número de épocas).</a:t>
-            </a:r>
-          </a:p>
-          <a:p>
-            <a:pPr marL="171450" indent="-171450">
-              <a:buFont typeface="Arial" panose="020B0604020202020204" pitchFamily="34" charset="0"/>
-              <a:buChar char="•"/>
-            </a:pPr>
-            <a:r>
-              <a:rPr lang="pt-BR" b="1" dirty="0"/>
-              <a:t>Decaimento temporal</a:t>
-            </a:r>
-            <a:r>
-              <a:rPr lang="pt-BR" dirty="0"/>
-              <a:t>: tem a forma matemática α = α0 / (1 + </a:t>
-            </a:r>
-            <a:r>
-              <a:rPr lang="pt-BR" dirty="0" err="1"/>
-              <a:t>kt</a:t>
-            </a:r>
-            <a:r>
-              <a:rPr lang="pt-BR" dirty="0"/>
-              <a:t>), onde a0, k são hiperparâmetros e t é o número da iteração.</a:t>
-            </a:r>
-          </a:p>
-          <a:p>
-            <a:pPr marL="171450" indent="-171450">
-              <a:buFont typeface="Arial" panose="020B0604020202020204" pitchFamily="34" charset="0"/>
-              <a:buChar char="•"/>
-            </a:pPr>
             <a:endParaRPr lang="pt-BR" dirty="0"/>
           </a:p>
           <a:p>
-            <a:pPr marL="0" indent="0">
-              <a:buFont typeface="Arial" panose="020B0604020202020204" pitchFamily="34" charset="0"/>
-              <a:buNone/>
-            </a:pPr>
-            <a:r>
-              <a:rPr lang="pt-BR" b="1" dirty="0"/>
-              <a:t>Exemplo</a:t>
-            </a:r>
             <a:r>
               <a:rPr lang="pt-BR" dirty="0"/>
-              <a:t>: stocastic_gradient_descent_with_learning_schedule_and_with_figures.ipynb</a:t>
-            </a:r>
+              <a:t>Por outro lado, se ele</a:t>
+            </a:r>
+            <a:r>
+              <a:rPr lang="pt-BR" baseline="0" dirty="0"/>
+              <a:t> </a:t>
+            </a:r>
+            <a:r>
+              <a:rPr lang="pt-BR" dirty="0"/>
+              <a:t>for muito grande, você pode pular o vale e acabar do outro lado, possivelmente até mais alto do que antes. Isso pode fazer o algoritmo divergir, com valores cada vez maiores, falhando em encontrar uma boa solução.</a:t>
+            </a:r>
+          </a:p>
+          <a:p>
+            <a:endParaRPr lang="pt-BR" dirty="0"/>
+          </a:p>
+          <a:p>
+            <a:r>
+              <a:rPr lang="pt-BR" dirty="0"/>
+              <a:t>Assim, o</a:t>
+            </a:r>
+            <a:r>
+              <a:rPr lang="pt-BR" baseline="0" dirty="0"/>
+              <a:t> passo </a:t>
+            </a:r>
+            <a:r>
+              <a:rPr lang="pt-BR" dirty="0"/>
+              <a:t>de aprendizagem deve ser experimentado/explorado para encontrar o melhor valor que acelere a descida do gradiente.</a:t>
+            </a:r>
+          </a:p>
+          <a:p>
+            <a:endParaRPr lang="pt-BR" dirty="0"/>
           </a:p>
           <a:p>
             <a:endParaRPr lang="pt-BR" dirty="0"/>
@@ -3680,7 +2982,7 @@
           <a:p>
             <a:fld id="{DA8B99DF-01BC-492A-8CEF-4FD88D18DD9D}" type="slidenum">
               <a:rPr lang="nl-BE" smtClean="0"/>
-              <a:t>24</a:t>
+              <a:t>9</a:t>
             </a:fld>
             <a:endParaRPr lang="nl-BE"/>
           </a:p>
@@ -3689,7 +2991,943 @@
     </p:spTree>
     <p:extLst>
       <p:ext uri="{BB962C8B-B14F-4D97-AF65-F5344CB8AC3E}">
-        <p14:creationId xmlns:p14="http://schemas.microsoft.com/office/powerpoint/2010/main" val="626906048"/>
+        <p14:creationId xmlns:p14="http://schemas.microsoft.com/office/powerpoint/2010/main" val="3595689694"/>
+      </p:ext>
+    </p:extLst>
+  </p:cSld>
+  <p:clrMapOvr>
+    <a:masterClrMapping/>
+  </p:clrMapOvr>
+</p:notes>
+</file>
+
+<file path=ppt/notesSlides/notesSlide5.xml><?xml version="1.0" encoding="utf-8"?>
+<p:notes xmlns:a="http://schemas.openxmlformats.org/drawingml/2006/main" xmlns:r="http://schemas.openxmlformats.org/officeDocument/2006/relationships" xmlns:p="http://schemas.openxmlformats.org/presentationml/2006/main">
+  <p:cSld>
+    <p:spTree>
+      <p:nvGrpSpPr>
+        <p:cNvPr id="1" name=""/>
+        <p:cNvGrpSpPr/>
+        <p:nvPr/>
+      </p:nvGrpSpPr>
+      <p:grpSpPr>
+        <a:xfrm>
+          <a:off x="0" y="0"/>
+          <a:ext cx="0" cy="0"/>
+          <a:chOff x="0" y="0"/>
+          <a:chExt cx="0" cy="0"/>
+        </a:xfrm>
+      </p:grpSpPr>
+      <p:sp>
+        <p:nvSpPr>
+          <p:cNvPr id="2" name="Espaço Reservado para Imagem de Slide 1"/>
+          <p:cNvSpPr>
+            <a:spLocks noGrp="1" noRot="1" noChangeAspect="1"/>
+          </p:cNvSpPr>
+          <p:nvPr>
+            <p:ph type="sldImg"/>
+          </p:nvPr>
+        </p:nvSpPr>
+        <p:spPr/>
+      </p:sp>
+      <p:sp>
+        <p:nvSpPr>
+          <p:cNvPr id="3" name="Espaço Reservado para Anotações 2"/>
+          <p:cNvSpPr>
+            <a:spLocks noGrp="1"/>
+          </p:cNvSpPr>
+          <p:nvPr>
+            <p:ph type="body" idx="1"/>
+          </p:nvPr>
+        </p:nvSpPr>
+        <p:spPr/>
+        <p:txBody>
+          <a:bodyPr/>
+          <a:lstStyle/>
+          <a:p>
+            <a:r>
+              <a:rPr lang="pt-BR" dirty="0"/>
+              <a:t>Enquanto </a:t>
+            </a:r>
+            <a:r>
+              <a:rPr lang="pt-BR" baseline="0" dirty="0"/>
+              <a:t>a </a:t>
+            </a:r>
+            <a:r>
+              <a:rPr lang="pt-BR" dirty="0"/>
+              <a:t>direção é determinada pelo</a:t>
+            </a:r>
+            <a:r>
+              <a:rPr lang="pt-BR" baseline="0" dirty="0"/>
+              <a:t> vetor</a:t>
+            </a:r>
+            <a:r>
+              <a:rPr lang="pt-BR" dirty="0"/>
+              <a:t> gradiente da função de erro, a taxa de aprendizado determina o quão grande um passo é dado nessa direção.</a:t>
+            </a:r>
+          </a:p>
+          <a:p>
+            <a:endParaRPr lang="pt-BR" dirty="0"/>
+          </a:p>
+          <a:p>
+            <a:r>
+              <a:rPr lang="pt-BR" dirty="0"/>
+              <a:t>Se o</a:t>
+            </a:r>
+            <a:r>
+              <a:rPr lang="pt-BR" baseline="0" dirty="0"/>
+              <a:t> passo</a:t>
+            </a:r>
+            <a:r>
+              <a:rPr lang="pt-BR" dirty="0"/>
+              <a:t> de aprendizagem for muito pequeno, o algoritmo precisará passar por muitas iterações até convergir, o que levará muito tempo.</a:t>
+            </a:r>
+          </a:p>
+          <a:p>
+            <a:endParaRPr lang="pt-BR" dirty="0"/>
+          </a:p>
+          <a:p>
+            <a:r>
+              <a:rPr lang="pt-BR" dirty="0"/>
+              <a:t>Por outro lado, se ele</a:t>
+            </a:r>
+            <a:r>
+              <a:rPr lang="pt-BR" baseline="0" dirty="0"/>
+              <a:t> </a:t>
+            </a:r>
+            <a:r>
+              <a:rPr lang="pt-BR" dirty="0"/>
+              <a:t>for muito grande, você pode pular o vale e acabar do outro lado, possivelmente até mais alto do que antes. Isso pode fazer o algoritmo divergir, com valores cada vez maiores, falhando em encontrar uma boa solução.</a:t>
+            </a:r>
+          </a:p>
+          <a:p>
+            <a:endParaRPr lang="pt-BR" dirty="0"/>
+          </a:p>
+          <a:p>
+            <a:r>
+              <a:rPr lang="pt-BR" dirty="0"/>
+              <a:t>Assim, o</a:t>
+            </a:r>
+            <a:r>
+              <a:rPr lang="pt-BR" baseline="0" dirty="0"/>
+              <a:t> passo </a:t>
+            </a:r>
+            <a:r>
+              <a:rPr lang="pt-BR" dirty="0"/>
+              <a:t>de aprendizagem deve ser experimentado/explorado para encontrar o melhor valor que acelere a descida do gradiente.</a:t>
+            </a:r>
+          </a:p>
+          <a:p>
+            <a:endParaRPr lang="pt-BR" dirty="0"/>
+          </a:p>
+          <a:p>
+            <a:r>
+              <a:rPr lang="pt-BR" dirty="0"/>
+              <a:t>Ao usar grandes valores para o passo de aprendizagem, é possível encontrar um ciclo de feedback positivo no qual grandes valores induzem grandes gradientes que, então, induzem uma grande atualização dos pesos. Se essas atualizações aumentarem consistentemente o tamanho dos pesos, então [os pesos] se afastam rapidamente do</a:t>
+            </a:r>
+            <a:r>
+              <a:rPr lang="pt-BR" baseline="0" dirty="0"/>
+              <a:t> ponto de mínimo </a:t>
+            </a:r>
+            <a:r>
+              <a:rPr lang="pt-BR" dirty="0"/>
+              <a:t>até que ocorra o estouro da precisão numérica.</a:t>
+            </a:r>
+          </a:p>
+          <a:p>
+            <a:endParaRPr lang="pt-BR" dirty="0"/>
+          </a:p>
+          <a:p>
+            <a:pPr marL="0" marR="0" lvl="0" indent="0" algn="l" defTabSz="914400" rtl="0" eaLnBrk="1" fontAlgn="auto" latinLnBrk="0" hangingPunct="1">
+              <a:lnSpc>
+                <a:spcPct val="100000"/>
+              </a:lnSpc>
+              <a:spcBef>
+                <a:spcPts val="0"/>
+              </a:spcBef>
+              <a:spcAft>
+                <a:spcPts val="0"/>
+              </a:spcAft>
+              <a:buClrTx/>
+              <a:buSzTx/>
+              <a:buFontTx/>
+              <a:buNone/>
+              <a:tabLst/>
+              <a:defRPr/>
+            </a:pPr>
+            <a:r>
+              <a:rPr lang="pt-BR" dirty="0"/>
+              <a:t>Uma boa intuição para se ter em mente é que, com uma alta taxa de aprendizado o vetor de pesos “oscila” ou “pula” caoticamente, incapaz de convergir para áreas mais profundas, porém mais estreitas, da superfície de erro. </a:t>
+            </a:r>
+          </a:p>
+          <a:p>
+            <a:endParaRPr lang="nl-BE" dirty="0"/>
+          </a:p>
+          <a:p>
+            <a:endParaRPr lang="pt-BR" dirty="0"/>
+          </a:p>
+        </p:txBody>
+      </p:sp>
+      <p:sp>
+        <p:nvSpPr>
+          <p:cNvPr id="4" name="Espaço Reservado para Número de Slide 3"/>
+          <p:cNvSpPr>
+            <a:spLocks noGrp="1"/>
+          </p:cNvSpPr>
+          <p:nvPr>
+            <p:ph type="sldNum" sz="quarter" idx="5"/>
+          </p:nvPr>
+        </p:nvSpPr>
+        <p:spPr/>
+        <p:txBody>
+          <a:bodyPr/>
+          <a:lstStyle/>
+          <a:p>
+            <a:fld id="{DA8B99DF-01BC-492A-8CEF-4FD88D18DD9D}" type="slidenum">
+              <a:rPr lang="nl-BE" smtClean="0"/>
+              <a:t>10</a:t>
+            </a:fld>
+            <a:endParaRPr lang="nl-BE"/>
+          </a:p>
+        </p:txBody>
+      </p:sp>
+    </p:spTree>
+    <p:extLst>
+      <p:ext uri="{BB962C8B-B14F-4D97-AF65-F5344CB8AC3E}">
+        <p14:creationId xmlns:p14="http://schemas.microsoft.com/office/powerpoint/2010/main" val="2293088979"/>
+      </p:ext>
+    </p:extLst>
+  </p:cSld>
+  <p:clrMapOvr>
+    <a:masterClrMapping/>
+  </p:clrMapOvr>
+</p:notes>
+</file>
+
+<file path=ppt/notesSlides/notesSlide6.xml><?xml version="1.0" encoding="utf-8"?>
+<p:notes xmlns:a="http://schemas.openxmlformats.org/drawingml/2006/main" xmlns:r="http://schemas.openxmlformats.org/officeDocument/2006/relationships" xmlns:p="http://schemas.openxmlformats.org/presentationml/2006/main">
+  <p:cSld>
+    <p:spTree>
+      <p:nvGrpSpPr>
+        <p:cNvPr id="1" name=""/>
+        <p:cNvGrpSpPr/>
+        <p:nvPr/>
+      </p:nvGrpSpPr>
+      <p:grpSpPr>
+        <a:xfrm>
+          <a:off x="0" y="0"/>
+          <a:ext cx="0" cy="0"/>
+          <a:chOff x="0" y="0"/>
+          <a:chExt cx="0" cy="0"/>
+        </a:xfrm>
+      </p:grpSpPr>
+      <p:sp>
+        <p:nvSpPr>
+          <p:cNvPr id="2" name="Espaço Reservado para Imagem de Slide 1"/>
+          <p:cNvSpPr>
+            <a:spLocks noGrp="1" noRot="1" noChangeAspect="1"/>
+          </p:cNvSpPr>
+          <p:nvPr>
+            <p:ph type="sldImg"/>
+          </p:nvPr>
+        </p:nvSpPr>
+        <p:spPr/>
+      </p:sp>
+      <p:sp>
+        <p:nvSpPr>
+          <p:cNvPr id="3" name="Espaço Reservado para Anotações 2"/>
+          <p:cNvSpPr>
+            <a:spLocks noGrp="1"/>
+          </p:cNvSpPr>
+          <p:nvPr>
+            <p:ph type="body" idx="1"/>
+          </p:nvPr>
+        </p:nvSpPr>
+        <p:spPr/>
+        <p:txBody>
+          <a:bodyPr/>
+          <a:lstStyle/>
+          <a:p>
+            <a:r>
+              <a:rPr lang="pt-BR" dirty="0"/>
+              <a:t>Enquanto </a:t>
+            </a:r>
+            <a:r>
+              <a:rPr lang="pt-BR" baseline="0" dirty="0"/>
+              <a:t>a </a:t>
+            </a:r>
+            <a:r>
+              <a:rPr lang="pt-BR" dirty="0"/>
+              <a:t>direção é determinada pelo</a:t>
+            </a:r>
+            <a:r>
+              <a:rPr lang="pt-BR" baseline="0" dirty="0"/>
+              <a:t> vetor</a:t>
+            </a:r>
+            <a:r>
+              <a:rPr lang="pt-BR" dirty="0"/>
+              <a:t> gradiente da função de erro, a taxa de aprendizado determina o quão grande um passo é dado nessa direção.</a:t>
+            </a:r>
+          </a:p>
+          <a:p>
+            <a:endParaRPr lang="pt-BR" dirty="0"/>
+          </a:p>
+          <a:p>
+            <a:r>
+              <a:rPr lang="pt-BR" dirty="0"/>
+              <a:t>Se o</a:t>
+            </a:r>
+            <a:r>
+              <a:rPr lang="pt-BR" baseline="0" dirty="0"/>
+              <a:t> passo</a:t>
+            </a:r>
+            <a:r>
+              <a:rPr lang="pt-BR" dirty="0"/>
+              <a:t> de aprendizagem for muito pequeno, o algoritmo precisará passar por muitas iterações até convergir, o que levará muito tempo.</a:t>
+            </a:r>
+          </a:p>
+          <a:p>
+            <a:endParaRPr lang="pt-BR" dirty="0"/>
+          </a:p>
+          <a:p>
+            <a:r>
+              <a:rPr lang="pt-BR" dirty="0"/>
+              <a:t>Por outro lado, se ele</a:t>
+            </a:r>
+            <a:r>
+              <a:rPr lang="pt-BR" baseline="0" dirty="0"/>
+              <a:t> </a:t>
+            </a:r>
+            <a:r>
+              <a:rPr lang="pt-BR" dirty="0"/>
+              <a:t>for muito grande, você pode pular o vale e acabar do outro lado, possivelmente até mais alto do que antes. Isso pode fazer o algoritmo divergir, com valores cada vez maiores, falhando em encontrar uma boa solução.</a:t>
+            </a:r>
+          </a:p>
+          <a:p>
+            <a:endParaRPr lang="pt-BR" dirty="0"/>
+          </a:p>
+          <a:p>
+            <a:r>
+              <a:rPr lang="pt-BR" dirty="0"/>
+              <a:t>Assim, o</a:t>
+            </a:r>
+            <a:r>
+              <a:rPr lang="pt-BR" baseline="0" dirty="0"/>
+              <a:t> passo </a:t>
+            </a:r>
+            <a:r>
+              <a:rPr lang="pt-BR" dirty="0"/>
+              <a:t>de aprendizagem deve ser experimentado/explorado para encontrar o melhor valor que acelere a descida do gradiente.</a:t>
+            </a:r>
+          </a:p>
+          <a:p>
+            <a:endParaRPr lang="pt-BR" dirty="0"/>
+          </a:p>
+          <a:p>
+            <a:r>
+              <a:rPr lang="pt-BR" dirty="0"/>
+              <a:t>Ao usar grandes valores para o passo de aprendizagem, é possível encontrar um ciclo de feedback positivo no qual grandes valores induzem grandes gradientes que, então, induzem uma grande atualização dos pesos. Se essas atualizações aumentarem consistentemente o tamanho dos pesos, então [os pesos] se afastam rapidamente do</a:t>
+            </a:r>
+            <a:r>
+              <a:rPr lang="pt-BR" baseline="0" dirty="0"/>
+              <a:t> ponto de mínimo </a:t>
+            </a:r>
+            <a:r>
+              <a:rPr lang="pt-BR" dirty="0"/>
+              <a:t>até que ocorra o estouro da precisão numérica.</a:t>
+            </a:r>
+          </a:p>
+          <a:p>
+            <a:endParaRPr lang="pt-BR" dirty="0"/>
+          </a:p>
+          <a:p>
+            <a:pPr marL="0" marR="0" lvl="0" indent="0" algn="l" defTabSz="914400" rtl="0" eaLnBrk="1" fontAlgn="auto" latinLnBrk="0" hangingPunct="1">
+              <a:lnSpc>
+                <a:spcPct val="100000"/>
+              </a:lnSpc>
+              <a:spcBef>
+                <a:spcPts val="0"/>
+              </a:spcBef>
+              <a:spcAft>
+                <a:spcPts val="0"/>
+              </a:spcAft>
+              <a:buClrTx/>
+              <a:buSzTx/>
+              <a:buFontTx/>
+              <a:buNone/>
+              <a:tabLst/>
+              <a:defRPr/>
+            </a:pPr>
+            <a:r>
+              <a:rPr lang="pt-BR" dirty="0"/>
+              <a:t>Uma boa intuição para se ter em mente é que, com uma alta taxa de aprendizado o vetor de pesos “oscila” ou “pula” caoticamente, incapaz de convergir para áreas mais profundas, porém mais estreitas, da superfície de erro. </a:t>
+            </a:r>
+          </a:p>
+          <a:p>
+            <a:endParaRPr lang="nl-BE" dirty="0"/>
+          </a:p>
+          <a:p>
+            <a:endParaRPr lang="pt-BR" dirty="0"/>
+          </a:p>
+        </p:txBody>
+      </p:sp>
+      <p:sp>
+        <p:nvSpPr>
+          <p:cNvPr id="4" name="Espaço Reservado para Número de Slide 3"/>
+          <p:cNvSpPr>
+            <a:spLocks noGrp="1"/>
+          </p:cNvSpPr>
+          <p:nvPr>
+            <p:ph type="sldNum" sz="quarter" idx="5"/>
+          </p:nvPr>
+        </p:nvSpPr>
+        <p:spPr/>
+        <p:txBody>
+          <a:bodyPr/>
+          <a:lstStyle/>
+          <a:p>
+            <a:fld id="{DA8B99DF-01BC-492A-8CEF-4FD88D18DD9D}" type="slidenum">
+              <a:rPr lang="nl-BE" smtClean="0"/>
+              <a:t>11</a:t>
+            </a:fld>
+            <a:endParaRPr lang="nl-BE"/>
+          </a:p>
+        </p:txBody>
+      </p:sp>
+    </p:spTree>
+    <p:extLst>
+      <p:ext uri="{BB962C8B-B14F-4D97-AF65-F5344CB8AC3E}">
+        <p14:creationId xmlns:p14="http://schemas.microsoft.com/office/powerpoint/2010/main" val="1520696515"/>
+      </p:ext>
+    </p:extLst>
+  </p:cSld>
+  <p:clrMapOvr>
+    <a:masterClrMapping/>
+  </p:clrMapOvr>
+</p:notes>
+</file>
+
+<file path=ppt/notesSlides/notesSlide7.xml><?xml version="1.0" encoding="utf-8"?>
+<p:notes xmlns:a="http://schemas.openxmlformats.org/drawingml/2006/main" xmlns:r="http://schemas.openxmlformats.org/officeDocument/2006/relationships" xmlns:p="http://schemas.openxmlformats.org/presentationml/2006/main">
+  <p:cSld>
+    <p:spTree>
+      <p:nvGrpSpPr>
+        <p:cNvPr id="1" name=""/>
+        <p:cNvGrpSpPr/>
+        <p:nvPr/>
+      </p:nvGrpSpPr>
+      <p:grpSpPr>
+        <a:xfrm>
+          <a:off x="0" y="0"/>
+          <a:ext cx="0" cy="0"/>
+          <a:chOff x="0" y="0"/>
+          <a:chExt cx="0" cy="0"/>
+        </a:xfrm>
+      </p:grpSpPr>
+      <p:sp>
+        <p:nvSpPr>
+          <p:cNvPr id="2" name="Espaço Reservado para Imagem de Slide 1"/>
+          <p:cNvSpPr>
+            <a:spLocks noGrp="1" noRot="1" noChangeAspect="1"/>
+          </p:cNvSpPr>
+          <p:nvPr>
+            <p:ph type="sldImg"/>
+          </p:nvPr>
+        </p:nvSpPr>
+        <p:spPr/>
+      </p:sp>
+      <p:sp>
+        <p:nvSpPr>
+          <p:cNvPr id="3" name="Espaço Reservado para Anotações 2"/>
+          <p:cNvSpPr>
+            <a:spLocks noGrp="1"/>
+          </p:cNvSpPr>
+          <p:nvPr>
+            <p:ph type="body" idx="1"/>
+          </p:nvPr>
+        </p:nvSpPr>
+        <p:spPr/>
+        <p:txBody>
+          <a:bodyPr/>
+          <a:lstStyle/>
+          <a:p>
+            <a:r>
+              <a:rPr lang="pt-BR" dirty="0"/>
+              <a:t>Enquanto </a:t>
+            </a:r>
+            <a:r>
+              <a:rPr lang="pt-BR" baseline="0" dirty="0"/>
+              <a:t>a </a:t>
+            </a:r>
+            <a:r>
+              <a:rPr lang="pt-BR" dirty="0"/>
+              <a:t>direção é determinada pelo</a:t>
+            </a:r>
+            <a:r>
+              <a:rPr lang="pt-BR" baseline="0" dirty="0"/>
+              <a:t> vetor</a:t>
+            </a:r>
+            <a:r>
+              <a:rPr lang="pt-BR" dirty="0"/>
+              <a:t> gradiente da função de erro, a taxa de aprendizado determina o quão grande um passo é dado nessa direção.</a:t>
+            </a:r>
+          </a:p>
+          <a:p>
+            <a:endParaRPr lang="pt-BR" dirty="0"/>
+          </a:p>
+          <a:p>
+            <a:r>
+              <a:rPr lang="pt-BR" dirty="0"/>
+              <a:t>Se o</a:t>
+            </a:r>
+            <a:r>
+              <a:rPr lang="pt-BR" baseline="0" dirty="0"/>
+              <a:t> passo</a:t>
+            </a:r>
+            <a:r>
+              <a:rPr lang="pt-BR" dirty="0"/>
+              <a:t> de aprendizagem for muito pequeno, o algoritmo precisará passar por muitas iterações até convergir, o que levará muito tempo.</a:t>
+            </a:r>
+          </a:p>
+          <a:p>
+            <a:endParaRPr lang="pt-BR" dirty="0"/>
+          </a:p>
+          <a:p>
+            <a:r>
+              <a:rPr lang="pt-BR" dirty="0"/>
+              <a:t>Por outro lado, se ele</a:t>
+            </a:r>
+            <a:r>
+              <a:rPr lang="pt-BR" baseline="0" dirty="0"/>
+              <a:t> </a:t>
+            </a:r>
+            <a:r>
+              <a:rPr lang="pt-BR" dirty="0"/>
+              <a:t>for muito grande, você pode pular o vale e acabar do outro lado, possivelmente até mais alto do que antes. Isso pode fazer o algoritmo divergir, com valores cada vez maiores, falhando em encontrar uma boa solução.</a:t>
+            </a:r>
+          </a:p>
+          <a:p>
+            <a:endParaRPr lang="pt-BR" dirty="0"/>
+          </a:p>
+          <a:p>
+            <a:r>
+              <a:rPr lang="pt-BR" dirty="0"/>
+              <a:t>Assim, o</a:t>
+            </a:r>
+            <a:r>
+              <a:rPr lang="pt-BR" baseline="0" dirty="0"/>
+              <a:t> passo </a:t>
+            </a:r>
+            <a:r>
+              <a:rPr lang="pt-BR" dirty="0"/>
+              <a:t>de aprendizagem deve ser experimentado/explorado para encontrar o melhor valor que acelere a descida do gradiente.</a:t>
+            </a:r>
+          </a:p>
+          <a:p>
+            <a:endParaRPr lang="pt-BR" dirty="0"/>
+          </a:p>
+          <a:p>
+            <a:r>
+              <a:rPr lang="pt-BR" dirty="0"/>
+              <a:t>Ao usar grandes valores para o passo de aprendizagem, é possível encontrar um ciclo de feedback positivo no qual grandes valores induzem grandes gradientes que, então, induzem uma grande atualização dos pesos. Se essas atualizações aumentarem consistentemente o tamanho dos pesos, então [os pesos] se afastam rapidamente do</a:t>
+            </a:r>
+            <a:r>
+              <a:rPr lang="pt-BR" baseline="0" dirty="0"/>
+              <a:t> ponto de mínimo </a:t>
+            </a:r>
+            <a:r>
+              <a:rPr lang="pt-BR" dirty="0"/>
+              <a:t>até que ocorra o estouro da precisão numérica.</a:t>
+            </a:r>
+          </a:p>
+          <a:p>
+            <a:endParaRPr lang="pt-BR" dirty="0"/>
+          </a:p>
+          <a:p>
+            <a:pPr marL="0" marR="0" lvl="0" indent="0" algn="l" defTabSz="914400" rtl="0" eaLnBrk="1" fontAlgn="auto" latinLnBrk="0" hangingPunct="1">
+              <a:lnSpc>
+                <a:spcPct val="100000"/>
+              </a:lnSpc>
+              <a:spcBef>
+                <a:spcPts val="0"/>
+              </a:spcBef>
+              <a:spcAft>
+                <a:spcPts val="0"/>
+              </a:spcAft>
+              <a:buClrTx/>
+              <a:buSzTx/>
+              <a:buFontTx/>
+              <a:buNone/>
+              <a:tabLst/>
+              <a:defRPr/>
+            </a:pPr>
+            <a:r>
+              <a:rPr lang="pt-BR" dirty="0"/>
+              <a:t>Uma boa intuição para se ter em mente é que, com uma alta taxa de aprendizado o vetor de pesos “oscila” ou “pula” caoticamente, incapaz de convergir para áreas mais profundas, porém mais estreitas, da superfície de erro. </a:t>
+            </a:r>
+          </a:p>
+          <a:p>
+            <a:endParaRPr lang="nl-BE" dirty="0"/>
+          </a:p>
+          <a:p>
+            <a:endParaRPr lang="pt-BR" dirty="0"/>
+          </a:p>
+        </p:txBody>
+      </p:sp>
+      <p:sp>
+        <p:nvSpPr>
+          <p:cNvPr id="4" name="Espaço Reservado para Número de Slide 3"/>
+          <p:cNvSpPr>
+            <a:spLocks noGrp="1"/>
+          </p:cNvSpPr>
+          <p:nvPr>
+            <p:ph type="sldNum" sz="quarter" idx="5"/>
+          </p:nvPr>
+        </p:nvSpPr>
+        <p:spPr/>
+        <p:txBody>
+          <a:bodyPr/>
+          <a:lstStyle/>
+          <a:p>
+            <a:fld id="{DA8B99DF-01BC-492A-8CEF-4FD88D18DD9D}" type="slidenum">
+              <a:rPr lang="nl-BE" smtClean="0"/>
+              <a:t>12</a:t>
+            </a:fld>
+            <a:endParaRPr lang="nl-BE"/>
+          </a:p>
+        </p:txBody>
+      </p:sp>
+    </p:spTree>
+    <p:extLst>
+      <p:ext uri="{BB962C8B-B14F-4D97-AF65-F5344CB8AC3E}">
+        <p14:creationId xmlns:p14="http://schemas.microsoft.com/office/powerpoint/2010/main" val="785167618"/>
+      </p:ext>
+    </p:extLst>
+  </p:cSld>
+  <p:clrMapOvr>
+    <a:masterClrMapping/>
+  </p:clrMapOvr>
+</p:notes>
+</file>
+
+<file path=ppt/notesSlides/notesSlide8.xml><?xml version="1.0" encoding="utf-8"?>
+<p:notes xmlns:a="http://schemas.openxmlformats.org/drawingml/2006/main" xmlns:r="http://schemas.openxmlformats.org/officeDocument/2006/relationships" xmlns:p="http://schemas.openxmlformats.org/presentationml/2006/main">
+  <p:cSld>
+    <p:spTree>
+      <p:nvGrpSpPr>
+        <p:cNvPr id="1" name=""/>
+        <p:cNvGrpSpPr/>
+        <p:nvPr/>
+      </p:nvGrpSpPr>
+      <p:grpSpPr>
+        <a:xfrm>
+          <a:off x="0" y="0"/>
+          <a:ext cx="0" cy="0"/>
+          <a:chOff x="0" y="0"/>
+          <a:chExt cx="0" cy="0"/>
+        </a:xfrm>
+      </p:grpSpPr>
+      <p:sp>
+        <p:nvSpPr>
+          <p:cNvPr id="2" name="Espaço Reservado para Imagem de Slide 1"/>
+          <p:cNvSpPr>
+            <a:spLocks noGrp="1" noRot="1" noChangeAspect="1"/>
+          </p:cNvSpPr>
+          <p:nvPr>
+            <p:ph type="sldImg"/>
+          </p:nvPr>
+        </p:nvSpPr>
+        <p:spPr/>
+      </p:sp>
+      <p:sp>
+        <p:nvSpPr>
+          <p:cNvPr id="3" name="Espaço Reservado para Anotações 2"/>
+          <p:cNvSpPr>
+            <a:spLocks noGrp="1"/>
+          </p:cNvSpPr>
+          <p:nvPr>
+            <p:ph type="body" idx="1"/>
+          </p:nvPr>
+        </p:nvSpPr>
+        <p:spPr/>
+        <p:txBody>
+          <a:bodyPr/>
+          <a:lstStyle/>
+          <a:p>
+            <a:r>
+              <a:rPr lang="pt-BR" sz="1200" dirty="0"/>
+              <a:t>Se o</a:t>
+            </a:r>
+            <a:r>
+              <a:rPr lang="pt-BR" sz="1200" baseline="0" dirty="0"/>
+              <a:t> passo</a:t>
+            </a:r>
+            <a:r>
+              <a:rPr lang="pt-BR" sz="1200" dirty="0"/>
+              <a:t> de aprendizagem for muito pequeno, o algoritmo precisará passar por muitas iterações para convergir, o que levará muito tempo.</a:t>
+            </a:r>
+          </a:p>
+          <a:p>
+            <a:endParaRPr lang="pt-BR" sz="1200" dirty="0"/>
+          </a:p>
+          <a:p>
+            <a:r>
+              <a:rPr lang="pt-BR" sz="1200" dirty="0"/>
+              <a:t>Por outro lado, se ele</a:t>
+            </a:r>
+            <a:r>
+              <a:rPr lang="pt-BR" sz="1200" baseline="0" dirty="0"/>
+              <a:t> </a:t>
+            </a:r>
+            <a:r>
+              <a:rPr lang="pt-BR" sz="1200" dirty="0"/>
+              <a:t>for muito grande, você pode pular o vale e acabar do outro lado, possivelmente até mais alto do que antes. Isso pode fazer o algoritmo divergir, com valores cada vez maiores, falhando em encontrar uma boa solução.</a:t>
+            </a:r>
+          </a:p>
+          <a:p>
+            <a:endParaRPr lang="pt-BR" sz="1200" dirty="0"/>
+          </a:p>
+          <a:p>
+            <a:r>
+              <a:rPr lang="pt-BR" sz="1200" dirty="0"/>
+              <a:t>Assim, o</a:t>
+            </a:r>
+            <a:r>
+              <a:rPr lang="pt-BR" sz="1200" baseline="0" dirty="0"/>
+              <a:t> passo </a:t>
+            </a:r>
+            <a:r>
+              <a:rPr lang="pt-BR" sz="1200" dirty="0"/>
+              <a:t>de aprendizagem deve ser experimentado/explorado para encontrar o melhor valor que acelere a descida do gradiente.</a:t>
+            </a:r>
+          </a:p>
+          <a:p>
+            <a:endParaRPr lang="pt-BR" sz="1200" dirty="0"/>
+          </a:p>
+          <a:p>
+            <a:r>
+              <a:rPr lang="pt-BR" sz="1200" dirty="0"/>
+              <a:t>O momentum adiciona uma fração da atualização de peso anterior a atual. Quando o gradiente continua apontando na mesma direção por atualizações consecutivas, isso aumentará o tamanho dos passos dados em direção ao mínimo.</a:t>
+            </a:r>
+            <a:r>
+              <a:rPr lang="pt-BR" sz="1200" baseline="0" dirty="0"/>
+              <a:t> </a:t>
+            </a:r>
+            <a:r>
+              <a:rPr lang="pt-BR" sz="1200" dirty="0"/>
+              <a:t>Por outro lado, quando o gradiente continua mudando de direção, o momentum suaviza as variações, ou seja, as atualizações.</a:t>
+            </a:r>
+          </a:p>
+          <a:p>
+            <a:endParaRPr lang="pt-BR" sz="1200" dirty="0"/>
+          </a:p>
+          <a:p>
+            <a:r>
+              <a:rPr lang="pt-BR" sz="1200" b="1" dirty="0"/>
+              <a:t>OBS</a:t>
+            </a:r>
+            <a:r>
+              <a:rPr lang="pt-BR" sz="1200" dirty="0"/>
+              <a:t>.: Passos largos durante as iterações iniciais e curtos conforme o algoritmo se aproxima do mínimo podem acelerar a convergência.</a:t>
+            </a:r>
+            <a:r>
+              <a:rPr lang="pt-BR" sz="1200" baseline="0" dirty="0"/>
+              <a:t> </a:t>
+            </a:r>
+            <a:r>
+              <a:rPr lang="pt-BR" sz="1200" dirty="0"/>
+              <a:t>Este tipo de abordagem é implementada por </a:t>
+            </a:r>
+            <a:r>
+              <a:rPr lang="pt-BR" sz="1200" b="1" i="1" dirty="0"/>
+              <a:t>esquemas de variação programada</a:t>
+            </a:r>
+            <a:r>
+              <a:rPr lang="pt-BR" sz="1200" dirty="0"/>
+              <a:t> do passo de aprendizagem </a:t>
+            </a:r>
+          </a:p>
+          <a:p>
+            <a:pPr marL="171450" indent="-171450">
+              <a:buFont typeface="Arial" panose="020B0604020202020204" pitchFamily="34" charset="0"/>
+              <a:buChar char="•"/>
+            </a:pPr>
+            <a:r>
+              <a:rPr lang="pt-BR" sz="1200" dirty="0"/>
+              <a:t>Por exemplo: momentum, </a:t>
+            </a:r>
+            <a:r>
+              <a:rPr lang="pt-BR" sz="1200" dirty="0" err="1"/>
+              <a:t>anelamento</a:t>
+            </a:r>
+            <a:r>
+              <a:rPr lang="pt-BR" sz="1200" dirty="0"/>
+              <a:t>, algoritmos de otimização com ajuste adaptativo do passo de aprendizagem (</a:t>
+            </a:r>
+            <a:r>
+              <a:rPr lang="pt-BR" sz="1200" dirty="0" err="1"/>
+              <a:t>RMSProp</a:t>
+            </a:r>
+            <a:r>
+              <a:rPr lang="pt-BR" sz="1200" dirty="0"/>
+              <a:t>, </a:t>
+            </a:r>
+            <a:r>
+              <a:rPr lang="pt-BR" sz="1200" dirty="0" err="1"/>
+              <a:t>AdaGrad</a:t>
+            </a:r>
+            <a:r>
+              <a:rPr lang="pt-BR" sz="1200" dirty="0"/>
+              <a:t>, Adam, etc.).</a:t>
+            </a:r>
+            <a:endParaRPr lang="nl-BE" sz="1200" dirty="0"/>
+          </a:p>
+        </p:txBody>
+      </p:sp>
+      <p:sp>
+        <p:nvSpPr>
+          <p:cNvPr id="4" name="Espaço Reservado para Número de Slide 3"/>
+          <p:cNvSpPr>
+            <a:spLocks noGrp="1"/>
+          </p:cNvSpPr>
+          <p:nvPr>
+            <p:ph type="sldNum" sz="quarter" idx="5"/>
+          </p:nvPr>
+        </p:nvSpPr>
+        <p:spPr/>
+        <p:txBody>
+          <a:bodyPr/>
+          <a:lstStyle/>
+          <a:p>
+            <a:fld id="{DA8B99DF-01BC-492A-8CEF-4FD88D18DD9D}" type="slidenum">
+              <a:rPr lang="nl-BE" smtClean="0"/>
+              <a:t>13</a:t>
+            </a:fld>
+            <a:endParaRPr lang="nl-BE"/>
+          </a:p>
+        </p:txBody>
+      </p:sp>
+    </p:spTree>
+    <p:extLst>
+      <p:ext uri="{BB962C8B-B14F-4D97-AF65-F5344CB8AC3E}">
+        <p14:creationId xmlns:p14="http://schemas.microsoft.com/office/powerpoint/2010/main" val="3919986911"/>
+      </p:ext>
+    </p:extLst>
+  </p:cSld>
+  <p:clrMapOvr>
+    <a:masterClrMapping/>
+  </p:clrMapOvr>
+</p:notes>
+</file>
+
+<file path=ppt/notesSlides/notesSlide9.xml><?xml version="1.0" encoding="utf-8"?>
+<p:notes xmlns:a="http://schemas.openxmlformats.org/drawingml/2006/main" xmlns:r="http://schemas.openxmlformats.org/officeDocument/2006/relationships" xmlns:p="http://schemas.openxmlformats.org/presentationml/2006/main">
+  <p:cSld>
+    <p:spTree>
+      <p:nvGrpSpPr>
+        <p:cNvPr id="1" name=""/>
+        <p:cNvGrpSpPr/>
+        <p:nvPr/>
+      </p:nvGrpSpPr>
+      <p:grpSpPr>
+        <a:xfrm>
+          <a:off x="0" y="0"/>
+          <a:ext cx="0" cy="0"/>
+          <a:chOff x="0" y="0"/>
+          <a:chExt cx="0" cy="0"/>
+        </a:xfrm>
+      </p:grpSpPr>
+      <p:sp>
+        <p:nvSpPr>
+          <p:cNvPr id="2" name="Espaço Reservado para Imagem de Slide 1"/>
+          <p:cNvSpPr>
+            <a:spLocks noGrp="1" noRot="1" noChangeAspect="1"/>
+          </p:cNvSpPr>
+          <p:nvPr>
+            <p:ph type="sldImg"/>
+          </p:nvPr>
+        </p:nvSpPr>
+        <p:spPr/>
+      </p:sp>
+      <p:sp>
+        <p:nvSpPr>
+          <p:cNvPr id="3" name="Espaço Reservado para Anotações 2"/>
+          <p:cNvSpPr>
+            <a:spLocks noGrp="1"/>
+          </p:cNvSpPr>
+          <p:nvPr>
+            <p:ph type="body" idx="1"/>
+          </p:nvPr>
+        </p:nvSpPr>
+        <p:spPr/>
+        <p:txBody>
+          <a:bodyPr/>
+          <a:lstStyle/>
+          <a:p>
+            <a:r>
+              <a:rPr lang="pt-BR" dirty="0"/>
+              <a:t>Como sabemos se o gradiente</a:t>
+            </a:r>
+            <a:r>
+              <a:rPr lang="pt-BR" baseline="0" dirty="0"/>
+              <a:t> descendente está funcionando corretamente em relação ao aprendizado?</a:t>
+            </a:r>
+            <a:endParaRPr lang="pt-BR" dirty="0"/>
+          </a:p>
+          <a:p>
+            <a:endParaRPr lang="pt-BR" dirty="0"/>
+          </a:p>
+          <a:p>
+            <a:r>
+              <a:rPr lang="pt-BR" dirty="0"/>
+              <a:t>Como</a:t>
+            </a:r>
+            <a:r>
+              <a:rPr lang="pt-BR" baseline="0" dirty="0"/>
+              <a:t> você consegue </a:t>
+            </a:r>
+            <a:r>
+              <a:rPr lang="pt-BR" baseline="0" dirty="0" err="1"/>
+              <a:t>debugar</a:t>
+            </a:r>
+            <a:r>
+              <a:rPr lang="pt-BR" baseline="0" dirty="0"/>
+              <a:t>/depurar o algoritmo do gradiente descendente quando não é possível se plotar o gráfico de contorno e verificar o caminho seguido pelo algoritmo?</a:t>
+            </a:r>
+            <a:endParaRPr lang="pt-BR" dirty="0"/>
+          </a:p>
+          <a:p>
+            <a:endParaRPr lang="pt-BR" dirty="0"/>
+          </a:p>
+        </p:txBody>
+      </p:sp>
+      <p:sp>
+        <p:nvSpPr>
+          <p:cNvPr id="4" name="Espaço Reservado para Número de Slide 3"/>
+          <p:cNvSpPr>
+            <a:spLocks noGrp="1"/>
+          </p:cNvSpPr>
+          <p:nvPr>
+            <p:ph type="sldNum" sz="quarter" idx="5"/>
+          </p:nvPr>
+        </p:nvSpPr>
+        <p:spPr/>
+        <p:txBody>
+          <a:bodyPr/>
+          <a:lstStyle/>
+          <a:p>
+            <a:fld id="{DA8B99DF-01BC-492A-8CEF-4FD88D18DD9D}" type="slidenum">
+              <a:rPr lang="nl-BE" smtClean="0"/>
+              <a:t>14</a:t>
+            </a:fld>
+            <a:endParaRPr lang="nl-BE"/>
+          </a:p>
+        </p:txBody>
+      </p:sp>
+    </p:spTree>
+    <p:extLst>
+      <p:ext uri="{BB962C8B-B14F-4D97-AF65-F5344CB8AC3E}">
+        <p14:creationId xmlns:p14="http://schemas.microsoft.com/office/powerpoint/2010/main" val="602861601"/>
       </p:ext>
     </p:extLst>
   </p:cSld>
@@ -3830,7 +4068,7 @@
           <a:p>
             <a:fld id="{C80E15A5-E95B-43EB-9AC7-9A96397448C0}" type="datetimeFigureOut">
               <a:rPr lang="nl-BE" smtClean="0"/>
-              <a:t>10/10/2025</a:t>
+              <a:t>10/04/2026</a:t>
             </a:fld>
             <a:endParaRPr lang="nl-BE"/>
           </a:p>
@@ -4000,7 +4238,7 @@
           <a:p>
             <a:fld id="{C80E15A5-E95B-43EB-9AC7-9A96397448C0}" type="datetimeFigureOut">
               <a:rPr lang="nl-BE" smtClean="0"/>
-              <a:t>10/10/2025</a:t>
+              <a:t>10/04/2026</a:t>
             </a:fld>
             <a:endParaRPr lang="nl-BE"/>
           </a:p>
@@ -4180,7 +4418,7 @@
           <a:p>
             <a:fld id="{C80E15A5-E95B-43EB-9AC7-9A96397448C0}" type="datetimeFigureOut">
               <a:rPr lang="nl-BE" smtClean="0"/>
-              <a:t>10/10/2025</a:t>
+              <a:t>10/04/2026</a:t>
             </a:fld>
             <a:endParaRPr lang="nl-BE"/>
           </a:p>
@@ -4350,7 +4588,7 @@
           <a:p>
             <a:fld id="{C80E15A5-E95B-43EB-9AC7-9A96397448C0}" type="datetimeFigureOut">
               <a:rPr lang="nl-BE" smtClean="0"/>
-              <a:t>10/10/2025</a:t>
+              <a:t>10/04/2026</a:t>
             </a:fld>
             <a:endParaRPr lang="nl-BE"/>
           </a:p>
@@ -4596,7 +4834,7 @@
           <a:p>
             <a:fld id="{C80E15A5-E95B-43EB-9AC7-9A96397448C0}" type="datetimeFigureOut">
               <a:rPr lang="nl-BE" smtClean="0"/>
-              <a:t>10/10/2025</a:t>
+              <a:t>10/04/2026</a:t>
             </a:fld>
             <a:endParaRPr lang="nl-BE"/>
           </a:p>
@@ -4828,7 +5066,7 @@
           <a:p>
             <a:fld id="{C80E15A5-E95B-43EB-9AC7-9A96397448C0}" type="datetimeFigureOut">
               <a:rPr lang="nl-BE" smtClean="0"/>
-              <a:t>10/10/2025</a:t>
+              <a:t>10/04/2026</a:t>
             </a:fld>
             <a:endParaRPr lang="nl-BE"/>
           </a:p>
@@ -5195,7 +5433,7 @@
           <a:p>
             <a:fld id="{C80E15A5-E95B-43EB-9AC7-9A96397448C0}" type="datetimeFigureOut">
               <a:rPr lang="nl-BE" smtClean="0"/>
-              <a:t>10/10/2025</a:t>
+              <a:t>10/04/2026</a:t>
             </a:fld>
             <a:endParaRPr lang="nl-BE"/>
           </a:p>
@@ -5313,7 +5551,7 @@
           <a:p>
             <a:fld id="{C80E15A5-E95B-43EB-9AC7-9A96397448C0}" type="datetimeFigureOut">
               <a:rPr lang="nl-BE" smtClean="0"/>
-              <a:t>10/10/2025</a:t>
+              <a:t>10/04/2026</a:t>
             </a:fld>
             <a:endParaRPr lang="nl-BE"/>
           </a:p>
@@ -5408,7 +5646,7 @@
           <a:p>
             <a:fld id="{C80E15A5-E95B-43EB-9AC7-9A96397448C0}" type="datetimeFigureOut">
               <a:rPr lang="nl-BE" smtClean="0"/>
-              <a:t>10/10/2025</a:t>
+              <a:t>10/04/2026</a:t>
             </a:fld>
             <a:endParaRPr lang="nl-BE"/>
           </a:p>
@@ -5685,7 +5923,7 @@
           <a:p>
             <a:fld id="{C80E15A5-E95B-43EB-9AC7-9A96397448C0}" type="datetimeFigureOut">
               <a:rPr lang="nl-BE" smtClean="0"/>
-              <a:t>10/10/2025</a:t>
+              <a:t>10/04/2026</a:t>
             </a:fld>
             <a:endParaRPr lang="nl-BE"/>
           </a:p>
@@ -5938,7 +6176,7 @@
           <a:p>
             <a:fld id="{C80E15A5-E95B-43EB-9AC7-9A96397448C0}" type="datetimeFigureOut">
               <a:rPr lang="nl-BE" smtClean="0"/>
-              <a:t>10/10/2025</a:t>
+              <a:t>10/04/2026</a:t>
             </a:fld>
             <a:endParaRPr lang="nl-BE"/>
           </a:p>
@@ -6151,7 +6389,7 @@
           <a:p>
             <a:fld id="{C80E15A5-E95B-43EB-9AC7-9A96397448C0}" type="datetimeFigureOut">
               <a:rPr lang="nl-BE" smtClean="0"/>
-              <a:t>10/10/2025</a:t>
+              <a:t>10/04/2026</a:t>
             </a:fld>
             <a:endParaRPr lang="nl-BE"/>
           </a:p>
@@ -6764,6 +7002,527 @@
           <p:cNvPr id="2" name="Título 1">
             <a:extLst>
               <a:ext uri="{FF2B5EF4-FFF2-40B4-BE49-F238E27FC236}">
+                <a16:creationId xmlns:a16="http://schemas.microsoft.com/office/drawing/2014/main" id="{53807E1E-02FA-BE90-DF8D-F7CD2EFB6D24}"/>
+              </a:ext>
+            </a:extLst>
+          </p:cNvPr>
+          <p:cNvSpPr>
+            <a:spLocks noGrp="1"/>
+          </p:cNvSpPr>
+          <p:nvPr>
+            <p:ph type="title"/>
+          </p:nvPr>
+        </p:nvSpPr>
+        <p:spPr/>
+        <p:txBody>
+          <a:bodyPr/>
+          <a:lstStyle/>
+          <a:p>
+            <a:r>
+              <a:rPr lang="pt-BR" dirty="0"/>
+              <a:t>Passo de aprendizado grande</a:t>
+            </a:r>
+          </a:p>
+        </p:txBody>
+      </p:sp>
+      <mc:AlternateContent xmlns:mc="http://schemas.openxmlformats.org/markup-compatibility/2006" xmlns:a14="http://schemas.microsoft.com/office/drawing/2010/main">
+        <mc:Choice Requires="a14">
+          <p:sp>
+            <p:nvSpPr>
+              <p:cNvPr id="3" name="Espaço Reservado para Conteúdo 2">
+                <a:extLst>
+                  <a:ext uri="{FF2B5EF4-FFF2-40B4-BE49-F238E27FC236}">
+                    <a16:creationId xmlns:a16="http://schemas.microsoft.com/office/drawing/2014/main" id="{E69917BF-2F45-6A09-7D88-35A718CBAA50}"/>
+                  </a:ext>
+                </a:extLst>
+              </p:cNvPr>
+              <p:cNvSpPr>
+                <a:spLocks noGrp="1"/>
+              </p:cNvSpPr>
+              <p:nvPr>
+                <p:ph idx="1"/>
+              </p:nvPr>
+            </p:nvSpPr>
+            <p:spPr>
+              <a:xfrm>
+                <a:off x="838200" y="1825624"/>
+                <a:ext cx="11253715" cy="4881733"/>
+              </a:xfrm>
+            </p:spPr>
+            <p:txBody>
+              <a:bodyPr>
+                <a:normAutofit/>
+              </a:bodyPr>
+              <a:lstStyle/>
+              <a:p>
+                <a:r>
+                  <a:rPr lang="pt-BR" dirty="0"/>
+                  <a:t>Caso o passo seja grande, o algoritmo pode nunca convergir.</a:t>
+                </a:r>
+              </a:p>
+              <a:p>
+                <a:r>
+                  <a:rPr lang="pt-BR" dirty="0"/>
+                  <a:t>Se o passo</a:t>
+                </a:r>
+                <a14:m>
+                  <m:oMath xmlns:m="http://schemas.openxmlformats.org/officeDocument/2006/math">
+                    <m:r>
+                      <a:rPr lang="pt-BR" i="1">
+                        <a:latin typeface="Cambria Math" panose="02040503050406030204" pitchFamily="18" charset="0"/>
+                        <a:ea typeface="Cambria Math" panose="02040503050406030204" pitchFamily="18" charset="0"/>
+                      </a:rPr>
+                      <m:t> </m:t>
+                    </m:r>
+                  </m:oMath>
+                </a14:m>
+                <a:r>
+                  <a:rPr lang="pt-BR" dirty="0"/>
+                  <a:t>for grande, </a:t>
+                </a:r>
+                <a:r>
+                  <a:rPr lang="pt-BR" b="1" i="1" dirty="0">
+                    <a:solidFill>
+                      <a:srgbClr val="00B050"/>
+                    </a:solidFill>
+                  </a:rPr>
+                  <a:t>mas não tão grande assim</a:t>
+                </a:r>
+                <a:r>
+                  <a:rPr lang="pt-BR" dirty="0"/>
+                  <a:t>, o algoritmo pode ficar “</a:t>
+                </a:r>
+                <a:r>
+                  <a:rPr lang="pt-BR" b="1" i="1" dirty="0">
+                    <a:solidFill>
+                      <a:srgbClr val="00B050"/>
+                    </a:solidFill>
+                  </a:rPr>
+                  <a:t>pulando</a:t>
+                </a:r>
+                <a:r>
+                  <a:rPr lang="pt-BR" dirty="0"/>
+                  <a:t>” ou “</a:t>
+                </a:r>
+                <a:r>
+                  <a:rPr lang="pt-BR" b="1" i="1" dirty="0">
+                    <a:solidFill>
+                      <a:srgbClr val="00B050"/>
+                    </a:solidFill>
+                  </a:rPr>
+                  <a:t>oscilando</a:t>
+                </a:r>
+                <a:r>
+                  <a:rPr lang="pt-BR" dirty="0"/>
+                  <a:t>” </a:t>
+                </a:r>
+                <a:r>
+                  <a:rPr lang="pt-BR" b="1" i="1" dirty="0">
+                    <a:solidFill>
+                      <a:srgbClr val="00B050"/>
+                    </a:solidFill>
+                  </a:rPr>
+                  <a:t>de um lado para o outro da superfície de erro </a:t>
+                </a:r>
+                <a:r>
+                  <a:rPr lang="pt-BR" dirty="0"/>
+                  <a:t>até que, por sorte, ele converge.</a:t>
+                </a:r>
+              </a:p>
+              <a:p>
+                <a:pPr lvl="1">
+                  <a:buFont typeface="Wingdings" panose="05000000000000000000" pitchFamily="2" charset="2"/>
+                  <a:buChar char="§"/>
+                </a:pPr>
+                <a:r>
+                  <a:rPr lang="pt-BR" dirty="0">
+                    <a:ea typeface="Cambria Math" panose="02040503050406030204" pitchFamily="18" charset="0"/>
+                  </a:rPr>
+                  <a:t>No exemplo abaixo, com </a:t>
+                </a:r>
+                <a14:m>
+                  <m:oMath xmlns:m="http://schemas.openxmlformats.org/officeDocument/2006/math">
+                    <m:r>
+                      <a:rPr lang="pt-BR" i="1">
+                        <a:latin typeface="Cambria Math" panose="02040503050406030204" pitchFamily="18" charset="0"/>
+                        <a:ea typeface="Cambria Math" panose="02040503050406030204" pitchFamily="18" charset="0"/>
+                      </a:rPr>
+                      <m:t>𝛼</m:t>
+                    </m:r>
+                    <m:r>
+                      <a:rPr lang="pt-BR" i="1">
+                        <a:latin typeface="Cambria Math" panose="02040503050406030204" pitchFamily="18" charset="0"/>
+                        <a:ea typeface="Cambria Math" panose="02040503050406030204" pitchFamily="18" charset="0"/>
+                      </a:rPr>
+                      <m:t>=1.8×</m:t>
+                    </m:r>
+                    <m:sSup>
+                      <m:sSupPr>
+                        <m:ctrlPr>
+                          <a:rPr lang="pt-BR" b="0" i="1" smtClean="0">
+                            <a:latin typeface="Cambria Math" panose="02040503050406030204" pitchFamily="18" charset="0"/>
+                          </a:rPr>
+                        </m:ctrlPr>
+                      </m:sSupPr>
+                      <m:e>
+                        <m:r>
+                          <a:rPr lang="pt-BR" b="0" i="1" smtClean="0">
+                            <a:latin typeface="Cambria Math" panose="02040503050406030204" pitchFamily="18" charset="0"/>
+                          </a:rPr>
+                          <m:t>10</m:t>
+                        </m:r>
+                      </m:e>
+                      <m:sup>
+                        <m:r>
+                          <a:rPr lang="pt-BR" b="0" i="1" smtClean="0">
+                            <a:latin typeface="Cambria Math" panose="02040503050406030204" pitchFamily="18" charset="0"/>
+                          </a:rPr>
+                          <m:t>−4</m:t>
+                        </m:r>
+                      </m:sup>
+                    </m:sSup>
+                  </m:oMath>
+                </a14:m>
+                <a:r>
+                  <a:rPr lang="pt-BR" dirty="0"/>
+                  <a:t>, o algoritmo oscila inicialmente, mas acaba convergindo após 20 épocas.</a:t>
+                </a:r>
+              </a:p>
+            </p:txBody>
+          </p:sp>
+        </mc:Choice>
+        <mc:Fallback xmlns="">
+          <p:sp>
+            <p:nvSpPr>
+              <p:cNvPr id="3" name="Espaço Reservado para Conteúdo 2">
+                <a:extLst>
+                  <a:ext uri="{FF2B5EF4-FFF2-40B4-BE49-F238E27FC236}">
+                    <a16:creationId xmlns:a16="http://schemas.microsoft.com/office/drawing/2014/main" id="{E69917BF-2F45-6A09-7D88-35A718CBAA50}"/>
+                  </a:ext>
+                </a:extLst>
+              </p:cNvPr>
+              <p:cNvSpPr>
+                <a:spLocks noGrp="1" noRot="1" noChangeAspect="1" noMove="1" noResize="1" noEditPoints="1" noAdjustHandles="1" noChangeArrowheads="1" noChangeShapeType="1" noTextEdit="1"/>
+              </p:cNvSpPr>
+              <p:nvPr>
+                <p:ph idx="1"/>
+              </p:nvPr>
+            </p:nvSpPr>
+            <p:spPr>
+              <a:xfrm>
+                <a:off x="838200" y="1825624"/>
+                <a:ext cx="11253715" cy="4881733"/>
+              </a:xfrm>
+              <a:blipFill>
+                <a:blip r:embed="rId3"/>
+                <a:stretch>
+                  <a:fillRect l="-975" t="-1998"/>
+                </a:stretch>
+              </a:blipFill>
+            </p:spPr>
+            <p:txBody>
+              <a:bodyPr/>
+              <a:lstStyle/>
+              <a:p>
+                <a:r>
+                  <a:rPr lang="pt-BR">
+                    <a:noFill/>
+                  </a:rPr>
+                  <a:t> </a:t>
+                </a:r>
+              </a:p>
+            </p:txBody>
+          </p:sp>
+        </mc:Fallback>
+      </mc:AlternateContent>
+      <p:pic>
+        <p:nvPicPr>
+          <p:cNvPr id="4" name="Picture 8">
+            <a:extLst>
+              <a:ext uri="{FF2B5EF4-FFF2-40B4-BE49-F238E27FC236}">
+                <a16:creationId xmlns:a16="http://schemas.microsoft.com/office/drawing/2014/main" id="{E1C923F9-D8D5-387C-D5B7-782CE5422B74}"/>
+              </a:ext>
+            </a:extLst>
+          </p:cNvPr>
+          <p:cNvPicPr>
+            <a:picLocks noChangeAspect="1"/>
+          </p:cNvPicPr>
+          <p:nvPr/>
+        </p:nvPicPr>
+        <p:blipFill rotWithShape="1">
+          <a:blip r:embed="rId4" cstate="print">
+            <a:extLst>
+              <a:ext uri="{28A0092B-C50C-407E-A947-70E740481C1C}">
+                <a14:useLocalDpi xmlns:a14="http://schemas.microsoft.com/office/drawing/2010/main" val="0"/>
+              </a:ext>
+            </a:extLst>
+          </a:blip>
+          <a:srcRect l="1394" t="13692" r="22970" b="19399"/>
+          <a:stretch/>
+        </p:blipFill>
+        <p:spPr>
+          <a:xfrm>
+            <a:off x="1172949" y="4372942"/>
+            <a:ext cx="2677839" cy="2368858"/>
+          </a:xfrm>
+          <a:prstGeom prst="rect">
+            <a:avLst/>
+          </a:prstGeom>
+        </p:spPr>
+      </p:pic>
+      <p:pic>
+        <p:nvPicPr>
+          <p:cNvPr id="5" name="Picture 3">
+            <a:extLst>
+              <a:ext uri="{FF2B5EF4-FFF2-40B4-BE49-F238E27FC236}">
+                <a16:creationId xmlns:a16="http://schemas.microsoft.com/office/drawing/2014/main" id="{5F7D6C9C-2DF4-F962-D10F-5412C1DA0807}"/>
+              </a:ext>
+            </a:extLst>
+          </p:cNvPr>
+          <p:cNvPicPr>
+            <a:picLocks noChangeAspect="1"/>
+          </p:cNvPicPr>
+          <p:nvPr/>
+        </p:nvPicPr>
+        <p:blipFill rotWithShape="1">
+          <a:blip r:embed="rId5" cstate="print">
+            <a:extLst>
+              <a:ext uri="{28A0092B-C50C-407E-A947-70E740481C1C}">
+                <a14:useLocalDpi xmlns:a14="http://schemas.microsoft.com/office/drawing/2010/main" val="0"/>
+              </a:ext>
+            </a:extLst>
+          </a:blip>
+          <a:srcRect t="6940" r="9378" b="2314"/>
+          <a:stretch/>
+        </p:blipFill>
+        <p:spPr>
+          <a:xfrm>
+            <a:off x="5413644" y="4373526"/>
+            <a:ext cx="2369910" cy="2373159"/>
+          </a:xfrm>
+          <a:prstGeom prst="rect">
+            <a:avLst/>
+          </a:prstGeom>
+        </p:spPr>
+      </p:pic>
+      <p:cxnSp>
+        <p:nvCxnSpPr>
+          <p:cNvPr id="7" name="Straight Arrow Connector 7">
+            <a:extLst>
+              <a:ext uri="{FF2B5EF4-FFF2-40B4-BE49-F238E27FC236}">
+                <a16:creationId xmlns:a16="http://schemas.microsoft.com/office/drawing/2014/main" id="{98A69CEB-47F4-A85F-762F-6622419002E6}"/>
+              </a:ext>
+            </a:extLst>
+          </p:cNvPr>
+          <p:cNvCxnSpPr>
+            <a:cxnSpLocks/>
+          </p:cNvCxnSpPr>
+          <p:nvPr/>
+        </p:nvCxnSpPr>
+        <p:spPr>
+          <a:xfrm flipV="1">
+            <a:off x="5385153" y="6533910"/>
+            <a:ext cx="277779" cy="165718"/>
+          </a:xfrm>
+          <a:prstGeom prst="straightConnector1">
+            <a:avLst/>
+          </a:prstGeom>
+          <a:ln>
+            <a:solidFill>
+              <a:srgbClr val="FF0000"/>
+            </a:solidFill>
+            <a:tailEnd type="triangle"/>
+          </a:ln>
+        </p:spPr>
+        <p:style>
+          <a:lnRef idx="1">
+            <a:schemeClr val="accent1"/>
+          </a:lnRef>
+          <a:fillRef idx="0">
+            <a:schemeClr val="accent1"/>
+          </a:fillRef>
+          <a:effectRef idx="0">
+            <a:schemeClr val="accent1"/>
+          </a:effectRef>
+          <a:fontRef idx="minor">
+            <a:schemeClr val="tx1"/>
+          </a:fontRef>
+        </p:style>
+      </p:cxnSp>
+      <mc:AlternateContent xmlns:mc="http://schemas.openxmlformats.org/markup-compatibility/2006" xmlns:a14="http://schemas.microsoft.com/office/drawing/2010/main">
+        <mc:Choice Requires="a14">
+          <p:sp>
+            <p:nvSpPr>
+              <p:cNvPr id="8" name="TextBox 10">
+                <a:extLst>
+                  <a:ext uri="{FF2B5EF4-FFF2-40B4-BE49-F238E27FC236}">
+                    <a16:creationId xmlns:a16="http://schemas.microsoft.com/office/drawing/2014/main" id="{54AC2781-3C16-CFC1-9D56-9FC370256E77}"/>
+                  </a:ext>
+                </a:extLst>
+              </p:cNvPr>
+              <p:cNvSpPr txBox="1"/>
+              <p:nvPr/>
+            </p:nvSpPr>
+            <p:spPr>
+              <a:xfrm>
+                <a:off x="4380464" y="6530351"/>
+                <a:ext cx="1263477" cy="338554"/>
+              </a:xfrm>
+              <a:prstGeom prst="rect">
+                <a:avLst/>
+              </a:prstGeom>
+              <a:noFill/>
+            </p:spPr>
+            <p:txBody>
+              <a:bodyPr wrap="square" rtlCol="0">
+                <a:spAutoFit/>
+              </a:bodyPr>
+              <a:lstStyle/>
+              <a:p>
+                <a:pPr algn="ctr"/>
+                <a14:m>
+                  <m:oMath xmlns:m="http://schemas.openxmlformats.org/officeDocument/2006/math">
+                    <m:r>
+                      <a:rPr lang="pt-BR" sz="1600" b="1" i="1" smtClean="0">
+                        <a:latin typeface="Cambria Math" panose="02040503050406030204" pitchFamily="18" charset="0"/>
+                      </a:rPr>
+                      <m:t>𝒂</m:t>
+                    </m:r>
+                  </m:oMath>
+                </a14:m>
+                <a:r>
+                  <a:rPr lang="pt-BR" sz="1600" dirty="0"/>
+                  <a:t> inicial</a:t>
+                </a:r>
+              </a:p>
+            </p:txBody>
+          </p:sp>
+        </mc:Choice>
+        <mc:Fallback xmlns="">
+          <p:sp>
+            <p:nvSpPr>
+              <p:cNvPr id="8" name="TextBox 10">
+                <a:extLst>
+                  <a:ext uri="{FF2B5EF4-FFF2-40B4-BE49-F238E27FC236}">
+                    <a16:creationId xmlns:a16="http://schemas.microsoft.com/office/drawing/2014/main" id="{54AC2781-3C16-CFC1-9D56-9FC370256E77}"/>
+                  </a:ext>
+                </a:extLst>
+              </p:cNvPr>
+              <p:cNvSpPr txBox="1">
+                <a:spLocks noRot="1" noChangeAspect="1" noMove="1" noResize="1" noEditPoints="1" noAdjustHandles="1" noChangeArrowheads="1" noChangeShapeType="1" noTextEdit="1"/>
+              </p:cNvSpPr>
+              <p:nvPr/>
+            </p:nvSpPr>
+            <p:spPr>
+              <a:xfrm>
+                <a:off x="4380464" y="6530351"/>
+                <a:ext cx="1263477" cy="338554"/>
+              </a:xfrm>
+              <a:prstGeom prst="rect">
+                <a:avLst/>
+              </a:prstGeom>
+              <a:blipFill>
+                <a:blip r:embed="rId6"/>
+                <a:stretch>
+                  <a:fillRect t="-5357" b="-21429"/>
+                </a:stretch>
+              </a:blipFill>
+            </p:spPr>
+            <p:txBody>
+              <a:bodyPr/>
+              <a:lstStyle/>
+              <a:p>
+                <a:r>
+                  <a:rPr lang="pt-BR">
+                    <a:noFill/>
+                  </a:rPr>
+                  <a:t> </a:t>
+                </a:r>
+              </a:p>
+            </p:txBody>
+          </p:sp>
+        </mc:Fallback>
+      </mc:AlternateContent>
+      <p:pic>
+        <p:nvPicPr>
+          <p:cNvPr id="2050" name="Picture 2">
+            <a:extLst>
+              <a:ext uri="{FF2B5EF4-FFF2-40B4-BE49-F238E27FC236}">
+                <a16:creationId xmlns:a16="http://schemas.microsoft.com/office/drawing/2014/main" id="{6232E825-A6A5-D6AD-ED62-433ACECDE117}"/>
+              </a:ext>
+            </a:extLst>
+          </p:cNvPr>
+          <p:cNvPicPr>
+            <a:picLocks noChangeAspect="1" noChangeArrowheads="1"/>
+          </p:cNvPicPr>
+          <p:nvPr/>
+        </p:nvPicPr>
+        <p:blipFill rotWithShape="1">
+          <a:blip r:embed="rId7">
+            <a:extLst>
+              <a:ext uri="{28A0092B-C50C-407E-A947-70E740481C1C}">
+                <a14:useLocalDpi xmlns:a14="http://schemas.microsoft.com/office/drawing/2010/main" val="0"/>
+              </a:ext>
+            </a:extLst>
+          </a:blip>
+          <a:srcRect l="50000"/>
+          <a:stretch/>
+        </p:blipFill>
+        <p:spPr bwMode="auto">
+          <a:xfrm>
+            <a:off x="9337328" y="4375353"/>
+            <a:ext cx="2129926" cy="2363275"/>
+          </a:xfrm>
+          <a:prstGeom prst="rect">
+            <a:avLst/>
+          </a:prstGeom>
+          <a:noFill/>
+          <a:extLst>
+            <a:ext uri="{909E8E84-426E-40DD-AFC4-6F175D3DCCD1}">
+              <a14:hiddenFill xmlns:a14="http://schemas.microsoft.com/office/drawing/2010/main">
+                <a:solidFill>
+                  <a:srgbClr val="FFFFFF"/>
+                </a:solidFill>
+              </a14:hiddenFill>
+            </a:ext>
+          </a:extLst>
+        </p:spPr>
+      </p:pic>
+    </p:spTree>
+    <p:extLst>
+      <p:ext uri="{BB962C8B-B14F-4D97-AF65-F5344CB8AC3E}">
+        <p14:creationId xmlns:p14="http://schemas.microsoft.com/office/powerpoint/2010/main" val="3605936758"/>
+      </p:ext>
+    </p:extLst>
+  </p:cSld>
+  <p:clrMapOvr>
+    <a:masterClrMapping/>
+  </p:clrMapOvr>
+</p:sld>
+</file>
+
+<file path=ppt/slides/slide11.xml><?xml version="1.0" encoding="utf-8"?>
+<p:sld xmlns:a="http://schemas.openxmlformats.org/drawingml/2006/main" xmlns:r="http://schemas.openxmlformats.org/officeDocument/2006/relationships" xmlns:p="http://schemas.openxmlformats.org/presentationml/2006/main">
+  <p:cSld>
+    <p:spTree>
+      <p:nvGrpSpPr>
+        <p:cNvPr id="1" name=""/>
+        <p:cNvGrpSpPr/>
+        <p:nvPr/>
+      </p:nvGrpSpPr>
+      <p:grpSpPr>
+        <a:xfrm>
+          <a:off x="0" y="0"/>
+          <a:ext cx="0" cy="0"/>
+          <a:chOff x="0" y="0"/>
+          <a:chExt cx="0" cy="0"/>
+        </a:xfrm>
+      </p:grpSpPr>
+      <p:sp>
+        <p:nvSpPr>
+          <p:cNvPr id="2" name="Título 1">
+            <a:extLst>
+              <a:ext uri="{FF2B5EF4-FFF2-40B4-BE49-F238E27FC236}">
                 <a16:creationId xmlns:a16="http://schemas.microsoft.com/office/drawing/2014/main" id="{4A86A124-E47D-3417-36BC-8BEE00BC4668}"/>
               </a:ext>
             </a:extLst>
@@ -6787,8 +7546,8 @@
           </a:p>
         </p:txBody>
       </p:sp>
-      <mc:AlternateContent xmlns:mc="http://schemas.openxmlformats.org/markup-compatibility/2006" xmlns:a14="http://schemas.microsoft.com/office/drawing/2010/main">
-        <mc:Choice Requires="a14">
+      <mc:AlternateContent xmlns:mc="http://schemas.openxmlformats.org/markup-compatibility/2006">
+        <mc:Choice xmlns:a14="http://schemas.microsoft.com/office/drawing/2010/main" Requires="a14">
           <p:sp>
             <p:nvSpPr>
               <p:cNvPr id="3" name="Espaço Reservado para Conteúdo 2">
@@ -6808,7 +7567,7 @@
             <p:spPr>
               <a:xfrm>
                 <a:off x="5763126" y="1825624"/>
-                <a:ext cx="6304548" cy="5032375"/>
+                <a:ext cx="6312610" cy="5032375"/>
               </a:xfrm>
             </p:spPr>
             <p:txBody>
@@ -6846,7 +7605,19 @@
                 </a:r>
                 <a:r>
                   <a:rPr lang="pt-BR" dirty="0"/>
-                  <a:t>, a cada época, o algoritmo “pula” para um valor mais alto do que o anterior e, assim, acaba divergindo.</a:t>
+                  <a:t>, a cada época, o algoritmo “pula” para um </a:t>
+                </a:r>
+                <a:r>
+                  <a:rPr lang="pt-BR" b="1" i="1" dirty="0">
+                    <a:solidFill>
+                      <a:srgbClr val="7030A0"/>
+                    </a:solidFill>
+                  </a:rPr>
+                  <a:t>valor de erro mais alto do que o anterior </a:t>
+                </a:r>
+                <a:r>
+                  <a:rPr lang="pt-BR" dirty="0"/>
+                  <a:t>e, assim, acaba divergindo.</a:t>
                 </a:r>
               </a:p>
               <a:p>
@@ -6870,7 +7641,7 @@
             </p:txBody>
           </p:sp>
         </mc:Choice>
-        <mc:Fallback xmlns="">
+        <mc:Fallback>
           <p:sp>
             <p:nvSpPr>
               <p:cNvPr id="3" name="Espaço Reservado para Conteúdo 2">
@@ -6890,12 +7661,12 @@
             <p:spPr>
               <a:xfrm>
                 <a:off x="5763126" y="1825624"/>
-                <a:ext cx="6304548" cy="5032375"/>
+                <a:ext cx="6312610" cy="5032375"/>
               </a:xfrm>
               <a:blipFill>
                 <a:blip r:embed="rId3"/>
                 <a:stretch>
-                  <a:fillRect l="-1739" t="-1937" r="-3092"/>
+                  <a:fillRect l="-1737" t="-1937" r="-2992"/>
                 </a:stretch>
               </a:blipFill>
             </p:spPr>
@@ -6904,7 +7675,7 @@
               <a:lstStyle/>
               <a:p>
                 <a:r>
-                  <a:rPr lang="pt-BR">
+                  <a:rPr lang="en-US">
                     <a:noFill/>
                   </a:rPr>
                   <a:t> </a:t>
@@ -7088,7 +7859,7 @@
 </p:sld>
 </file>
 
-<file path=ppt/slides/slide11.xml><?xml version="1.0" encoding="utf-8"?>
+<file path=ppt/slides/slide12.xml><?xml version="1.0" encoding="utf-8"?>
 <p:sld xmlns:a="http://schemas.openxmlformats.org/drawingml/2006/main" xmlns:r="http://schemas.openxmlformats.org/officeDocument/2006/relationships" xmlns:p="http://schemas.openxmlformats.org/presentationml/2006/main">
   <p:cSld>
     <p:spTree>
@@ -7219,7 +7990,7 @@
                   <a:srgbClr val="7030A0"/>
                 </a:solidFill>
               </a:rPr>
-              <a:t>estouro da representação numérica</a:t>
+              <a:t>estouro (overflow) da representação numérica</a:t>
             </a:r>
             <a:r>
               <a:rPr lang="pt-BR" dirty="0"/>
@@ -7232,8 +8003,12 @@
               <a:buChar char="§"/>
             </a:pPr>
             <a:r>
+              <a:rPr lang="pt-BR" b="1" i="1" dirty="0"/>
+              <a:t>Overflow</a:t>
+            </a:r>
+            <a:r>
               <a:rPr lang="pt-BR" dirty="0"/>
-              <a:t>Problema que ocorre quando uma variável não pode mais representar um valor, pois ele é maior do que o intervalo que ela pode armazenar.</a:t>
+              <a:t>: problema que ocorre quando uma variável não pode mais representar um valor, pois ele é maior do que o intervalo que ela pode armazenar.</a:t>
             </a:r>
           </a:p>
         </p:txBody>
@@ -7412,7 +8187,7 @@
 </p:sld>
 </file>
 
-<file path=ppt/slides/slide12.xml><?xml version="1.0" encoding="utf-8"?>
+<file path=ppt/slides/slide13.xml><?xml version="1.0" encoding="utf-8"?>
 <p:sld xmlns:a="http://schemas.openxmlformats.org/drawingml/2006/main" xmlns:r="http://schemas.openxmlformats.org/officeDocument/2006/relationships" xmlns:p="http://schemas.openxmlformats.org/presentationml/2006/main">
   <p:cSld>
     <p:spTree>
@@ -7913,7 +8688,7 @@
 </p:sld>
 </file>
 
-<file path=ppt/slides/slide13.xml><?xml version="1.0" encoding="utf-8"?>
+<file path=ppt/slides/slide14.xml><?xml version="1.0" encoding="utf-8"?>
 <p:sld xmlns:a="http://schemas.openxmlformats.org/drawingml/2006/main" xmlns:r="http://schemas.openxmlformats.org/officeDocument/2006/relationships" xmlns:p="http://schemas.openxmlformats.org/presentationml/2006/main">
   <p:cSld>
     <p:spTree>
@@ -7976,8 +8751,8 @@
         </p:nvSpPr>
         <p:spPr>
           <a:xfrm>
-            <a:off x="5269832" y="1825624"/>
-            <a:ext cx="6809873" cy="5032375"/>
+            <a:off x="5033914" y="1825624"/>
+            <a:ext cx="7045792" cy="5032375"/>
           </a:xfrm>
         </p:spPr>
         <p:txBody>
@@ -7990,11 +8765,11 @@
                   <a:srgbClr val="00B050"/>
                 </a:solidFill>
               </a:rPr>
-              <a:t>Nem sempre iremos conseguir plotar a superfície de erro e de contorno </a:t>
+              <a:t>Nem sempre nós iremos conseguir plotar as superfícies de erro e de contorno </a:t>
             </a:r>
             <a:r>
               <a:rPr lang="pt-BR" dirty="0"/>
-              <a:t>para analisarmos o treinamento e o desempenho de um modelo.</a:t>
+              <a:t>para analisarmos o treinamento de um modelo.</a:t>
             </a:r>
           </a:p>
           <a:p>
@@ -8045,41 +8820,59 @@
               <a:t> de treinamento para analisar o aprendizado de um modelo.</a:t>
             </a:r>
           </a:p>
+          <a:p>
+            <a:r>
+              <a:rPr lang="pt-BR" dirty="0"/>
+              <a:t>Vejamos alguns exemplos.</a:t>
+            </a:r>
+          </a:p>
         </p:txBody>
       </p:sp>
       <p:pic>
         <p:nvPicPr>
-          <p:cNvPr id="4" name="Picture 7">
+          <p:cNvPr id="1026" name="Picture 2">
             <a:extLst>
               <a:ext uri="{FF2B5EF4-FFF2-40B4-BE49-F238E27FC236}">
-                <a16:creationId xmlns:a16="http://schemas.microsoft.com/office/drawing/2014/main" id="{3AA8C8C3-3C48-8D40-77C8-31C7934D9AE5}"/>
+                <a16:creationId xmlns:a16="http://schemas.microsoft.com/office/drawing/2014/main" id="{F4BA05E0-AD99-1037-FAD5-43DCC4317B7A}"/>
               </a:ext>
             </a:extLst>
           </p:cNvPr>
           <p:cNvPicPr>
-            <a:picLocks noChangeAspect="1"/>
+            <a:picLocks noChangeAspect="1" noChangeArrowheads="1"/>
           </p:cNvPicPr>
           <p:nvPr/>
         </p:nvPicPr>
-        <p:blipFill rotWithShape="1">
-          <a:blip r:embed="rId3" cstate="print">
+        <p:blipFill>
+          <a:blip r:embed="rId3">
             <a:extLst>
               <a:ext uri="{28A0092B-C50C-407E-A947-70E740481C1C}">
                 <a14:useLocalDpi xmlns:a14="http://schemas.microsoft.com/office/drawing/2010/main" val="0"/>
               </a:ext>
             </a:extLst>
           </a:blip>
-          <a:srcRect l="1394" t="13692" r="22970" b="19399"/>
-          <a:stretch/>
+          <a:srcRect/>
+          <a:stretch>
+            <a:fillRect/>
+          </a:stretch>
         </p:blipFill>
-        <p:spPr>
+        <p:spPr bwMode="auto">
           <a:xfrm>
-            <a:off x="838200" y="2276307"/>
-            <a:ext cx="3965906" cy="3017588"/>
+            <a:off x="465677" y="1938959"/>
+            <a:ext cx="4332567" cy="4370176"/>
           </a:xfrm>
           <a:prstGeom prst="rect">
             <a:avLst/>
           </a:prstGeom>
+          <a:noFill/>
+          <a:extLst>
+            <a:ext uri="{909E8E84-426E-40DD-AFC4-6F175D3DCCD1}">
+              <a14:hiddenFill xmlns:a14="http://schemas.microsoft.com/office/drawing/2010/main">
+                <a:solidFill>
+                  <a:srgbClr val="FFFFFF"/>
+                </a:solidFill>
+              </a14:hiddenFill>
+            </a:ext>
+          </a:extLst>
         </p:spPr>
       </p:pic>
     </p:spTree>
@@ -8095,7 +8888,7 @@
 </p:sld>
 </file>
 
-<file path=ppt/slides/slide14.xml><?xml version="1.0" encoding="utf-8"?>
+<file path=ppt/slides/slide15.xml><?xml version="1.0" encoding="utf-8"?>
 <p:sld xmlns:a="http://schemas.openxmlformats.org/drawingml/2006/main" xmlns:r="http://schemas.openxmlformats.org/officeDocument/2006/relationships" xmlns:p="http://schemas.openxmlformats.org/presentationml/2006/main">
   <p:cSld>
     <p:spTree>
@@ -8159,7 +8952,7 @@
         <p:spPr>
           <a:xfrm>
             <a:off x="4860759" y="1825624"/>
-            <a:ext cx="7146758" cy="5032375"/>
+            <a:ext cx="7205550" cy="5032375"/>
           </a:xfrm>
         </p:spPr>
         <p:txBody>
@@ -8246,11 +9039,11 @@
                   <a:srgbClr val="00B050"/>
                 </a:solidFill>
               </a:rPr>
-              <a:t>erro diminui rapidamente nas primeiras épocas </a:t>
+              <a:t>erro diminui rapidamente nas primeiras iterações</a:t>
             </a:r>
             <a:r>
               <a:rPr lang="pt-BR" dirty="0"/>
-              <a:t>(ou iterações).</a:t>
+              <a:t>.</a:t>
             </a:r>
           </a:p>
           <a:p>
@@ -8300,7 +9093,7 @@
             </a:r>
             <a:r>
               <a:rPr lang="pt-BR" dirty="0"/>
-              <a:t> ao longo das épocas, indicando que os </a:t>
+              <a:t> ao longo das iterações, indicando que os </a:t>
             </a:r>
             <a:r>
               <a:rPr lang="pt-BR" b="1" i="1" dirty="0">
@@ -8322,7 +9115,7 @@
             </a:pPr>
             <a:r>
               <a:rPr lang="pt-BR" dirty="0"/>
-              <a:t>Por exemplo, o treinamento pode ser encerrado quando o erro entre duas épocas consecutivas for menor do que um valor pré-definido (e.g., 1e-5).</a:t>
+              <a:t>Por exemplo, o treinamento pode ser encerrado quando o erro entre duas iterações consecutivas for menor do que um valor pré-definido (e.g., 1e-5).</a:t>
             </a:r>
           </a:p>
         </p:txBody>
@@ -8462,7 +9255,7 @@
 </p:sld>
 </file>
 
-<file path=ppt/slides/slide15.xml><?xml version="1.0" encoding="utf-8"?>
+<file path=ppt/slides/slide16.xml><?xml version="1.0" encoding="utf-8"?>
 <p:sld xmlns:a="http://schemas.openxmlformats.org/drawingml/2006/main" xmlns:r="http://schemas.openxmlformats.org/officeDocument/2006/relationships" xmlns:p="http://schemas.openxmlformats.org/presentationml/2006/main">
   <p:cSld>
     <p:spTree>
@@ -8764,7 +9557,7 @@
 </p:sld>
 </file>
 
-<file path=ppt/slides/slide16.xml><?xml version="1.0" encoding="utf-8"?>
+<file path=ppt/slides/slide17.xml><?xml version="1.0" encoding="utf-8"?>
 <p:sld xmlns:a="http://schemas.openxmlformats.org/drawingml/2006/main" xmlns:r="http://schemas.openxmlformats.org/officeDocument/2006/relationships" xmlns:p="http://schemas.openxmlformats.org/presentationml/2006/main">
   <p:cSld>
     <p:spTree>
@@ -9058,7 +9851,7 @@
 </p:sld>
 </file>
 
-<file path=ppt/slides/slide17.xml><?xml version="1.0" encoding="utf-8"?>
+<file path=ppt/slides/slide18.xml><?xml version="1.0" encoding="utf-8"?>
 <p:sld xmlns:a="http://schemas.openxmlformats.org/drawingml/2006/main" xmlns:r="http://schemas.openxmlformats.org/officeDocument/2006/relationships" xmlns:p="http://schemas.openxmlformats.org/presentationml/2006/main">
   <p:cSld>
     <p:spTree>
@@ -9320,7 +10113,7 @@
 </p:sld>
 </file>
 
-<file path=ppt/slides/slide18.xml><?xml version="1.0" encoding="utf-8"?>
+<file path=ppt/slides/slide19.xml><?xml version="1.0" encoding="utf-8"?>
 <p:sld xmlns:a="http://schemas.openxmlformats.org/drawingml/2006/main" xmlns:r="http://schemas.openxmlformats.org/officeDocument/2006/relationships" xmlns:p="http://schemas.openxmlformats.org/presentationml/2006/main">
   <p:cSld>
     <p:spTree>
@@ -9365,8 +10158,8 @@
           </a:p>
         </p:txBody>
       </p:sp>
-      <mc:AlternateContent xmlns:mc="http://schemas.openxmlformats.org/markup-compatibility/2006">
-        <mc:Choice xmlns:a14="http://schemas.microsoft.com/office/drawing/2010/main" Requires="a14">
+      <mc:AlternateContent xmlns:mc="http://schemas.openxmlformats.org/markup-compatibility/2006" xmlns:a14="http://schemas.microsoft.com/office/drawing/2010/main">
+        <mc:Choice Requires="a14">
           <p:sp>
             <p:nvSpPr>
               <p:cNvPr id="3" name="Espaço Reservado para Conteúdo 2">
@@ -9495,7 +10288,7 @@
             </p:txBody>
           </p:sp>
         </mc:Choice>
-        <mc:Fallback>
+        <mc:Fallback xmlns="">
           <p:sp>
             <p:nvSpPr>
               <p:cNvPr id="3" name="Espaço Reservado para Conteúdo 2">
@@ -9623,7 +10416,245 @@
 </p:sld>
 </file>
 
-<file path=ppt/slides/slide19.xml><?xml version="1.0" encoding="utf-8"?>
+<file path=ppt/slides/slide2.xml><?xml version="1.0" encoding="utf-8"?>
+<p:sld xmlns:a="http://schemas.openxmlformats.org/drawingml/2006/main" xmlns:r="http://schemas.openxmlformats.org/officeDocument/2006/relationships" xmlns:p="http://schemas.openxmlformats.org/presentationml/2006/main">
+  <p:cSld>
+    <p:spTree>
+      <p:nvGrpSpPr>
+        <p:cNvPr id="1" name=""/>
+        <p:cNvGrpSpPr/>
+        <p:nvPr/>
+      </p:nvGrpSpPr>
+      <p:grpSpPr>
+        <a:xfrm>
+          <a:off x="0" y="0"/>
+          <a:ext cx="0" cy="0"/>
+          <a:chOff x="0" y="0"/>
+          <a:chExt cx="0" cy="0"/>
+        </a:xfrm>
+      </p:grpSpPr>
+      <p:sp>
+        <p:nvSpPr>
+          <p:cNvPr id="2" name="Title 1"/>
+          <p:cNvSpPr>
+            <a:spLocks noGrp="1"/>
+          </p:cNvSpPr>
+          <p:nvPr>
+            <p:ph type="title"/>
+          </p:nvPr>
+        </p:nvSpPr>
+        <p:spPr/>
+        <p:txBody>
+          <a:bodyPr/>
+          <a:lstStyle/>
+          <a:p>
+            <a:r>
+              <a:rPr lang="pt-BR"/>
+              <a:t>Recapitulando</a:t>
+            </a:r>
+            <a:endParaRPr lang="pt-BR" dirty="0"/>
+          </a:p>
+        </p:txBody>
+      </p:sp>
+      <mc:AlternateContent xmlns:mc="http://schemas.openxmlformats.org/markup-compatibility/2006">
+        <mc:Choice xmlns:a14="http://schemas.microsoft.com/office/drawing/2010/main" Requires="a14">
+          <p:sp>
+            <p:nvSpPr>
+              <p:cNvPr id="3" name="Content Placeholder 2"/>
+              <p:cNvSpPr>
+                <a:spLocks noGrp="1"/>
+              </p:cNvSpPr>
+              <p:nvPr>
+                <p:ph idx="1"/>
+              </p:nvPr>
+            </p:nvSpPr>
+            <p:spPr>
+              <a:xfrm>
+                <a:off x="838198" y="1825624"/>
+                <a:ext cx="11284672" cy="5032376"/>
+              </a:xfrm>
+            </p:spPr>
+            <p:txBody>
+              <a:bodyPr>
+                <a:normAutofit/>
+              </a:bodyPr>
+              <a:lstStyle/>
+              <a:p>
+                <a:r>
+                  <a:rPr lang="pt-BR" dirty="0"/>
+                  <a:t>No tópico anterior, falamos sobre o vetor gradiente.</a:t>
+                </a:r>
+              </a:p>
+              <a:p>
+                <a:r>
+                  <a:rPr lang="pt-BR" dirty="0"/>
+                  <a:t>Aprendemos dois algoritmos que usam o vetor gradiente para a resolução de problemas de otimização:</a:t>
+                </a:r>
+              </a:p>
+              <a:p>
+                <a:pPr lvl="1">
+                  <a:buFont typeface="Wingdings" panose="05000000000000000000" pitchFamily="2" charset="2"/>
+                  <a:buChar char="§"/>
+                </a:pPr>
+                <a:r>
+                  <a:rPr lang="pt-BR" b="1" i="1" dirty="0"/>
+                  <a:t>Gradiente ascendente </a:t>
+                </a:r>
+                <a:r>
+                  <a:rPr lang="pt-BR" dirty="0"/>
+                  <a:t>para problemas de </a:t>
+                </a:r>
+                <a:r>
+                  <a:rPr lang="pt-BR" b="1" i="1" dirty="0">
+                    <a:solidFill>
+                      <a:srgbClr val="00B050"/>
+                    </a:solidFill>
+                  </a:rPr>
+                  <a:t>maximização</a:t>
+                </a:r>
+                <a:r>
+                  <a:rPr lang="pt-BR" dirty="0"/>
+                  <a:t>.</a:t>
+                </a:r>
+              </a:p>
+              <a:p>
+                <a:pPr lvl="1">
+                  <a:buFont typeface="Wingdings" panose="05000000000000000000" pitchFamily="2" charset="2"/>
+                  <a:buChar char="§"/>
+                </a:pPr>
+                <a:r>
+                  <a:rPr lang="pt-BR" b="1" i="1" dirty="0"/>
+                  <a:t>Gradiente descendente</a:t>
+                </a:r>
+                <a:r>
+                  <a:rPr lang="pt-BR" dirty="0"/>
+                  <a:t> para problemas de </a:t>
+                </a:r>
+                <a:r>
+                  <a:rPr lang="pt-BR" b="1" i="1" dirty="0">
+                    <a:solidFill>
+                      <a:srgbClr val="00B050"/>
+                    </a:solidFill>
+                  </a:rPr>
+                  <a:t>minimização</a:t>
+                </a:r>
+                <a:r>
+                  <a:rPr lang="pt-BR" dirty="0"/>
+                  <a:t>.</a:t>
+                </a:r>
+              </a:p>
+              <a:p>
+                <a:r>
+                  <a:rPr lang="pt-BR" dirty="0"/>
+                  <a:t>Aprendemos as três versões do gradiente descendente:</a:t>
+                </a:r>
+              </a:p>
+              <a:p>
+                <a:pPr lvl="1">
+                  <a:buFont typeface="Wingdings" panose="05000000000000000000" pitchFamily="2" charset="2"/>
+                  <a:buChar char="§"/>
+                </a:pPr>
+                <a:r>
+                  <a:rPr lang="pt-BR" dirty="0"/>
+                  <a:t>Batelada</a:t>
+                </a:r>
+              </a:p>
+              <a:p>
+                <a:pPr lvl="1">
+                  <a:buFont typeface="Wingdings" panose="05000000000000000000" pitchFamily="2" charset="2"/>
+                  <a:buChar char="§"/>
+                </a:pPr>
+                <a:r>
+                  <a:rPr lang="pt-BR" dirty="0"/>
+                  <a:t>Estocástico</a:t>
+                </a:r>
+              </a:p>
+              <a:p>
+                <a:pPr lvl="1">
+                  <a:buFont typeface="Wingdings" panose="05000000000000000000" pitchFamily="2" charset="2"/>
+                  <a:buChar char="§"/>
+                </a:pPr>
+                <a:r>
+                  <a:rPr lang="pt-BR" dirty="0"/>
+                  <a:t>Mini-batch</a:t>
+                </a:r>
+              </a:p>
+              <a:p>
+                <a:r>
+                  <a:rPr lang="pt-BR" dirty="0"/>
+                  <a:t>Neste tópico, discutiremos o quão importante é o ajuste do passo de aprendizagem, </a:t>
+                </a:r>
+                <a14:m>
+                  <m:oMath xmlns:m="http://schemas.openxmlformats.org/officeDocument/2006/math">
+                    <m:r>
+                      <a:rPr lang="pt-BR" i="1" smtClean="0">
+                        <a:latin typeface="Cambria Math" panose="02040503050406030204" pitchFamily="18" charset="0"/>
+                        <a:ea typeface="Cambria Math" panose="02040503050406030204" pitchFamily="18" charset="0"/>
+                      </a:rPr>
+                      <m:t>𝛼</m:t>
+                    </m:r>
+                  </m:oMath>
+                </a14:m>
+                <a:r>
+                  <a:rPr lang="pt-BR" dirty="0"/>
+                  <a:t>.</a:t>
+                </a:r>
+              </a:p>
+            </p:txBody>
+          </p:sp>
+        </mc:Choice>
+        <mc:Fallback>
+          <p:sp>
+            <p:nvSpPr>
+              <p:cNvPr id="3" name="Content Placeholder 2"/>
+              <p:cNvSpPr>
+                <a:spLocks noGrp="1" noRot="1" noChangeAspect="1" noMove="1" noResize="1" noEditPoints="1" noAdjustHandles="1" noChangeArrowheads="1" noChangeShapeType="1" noTextEdit="1"/>
+              </p:cNvSpPr>
+              <p:nvPr>
+                <p:ph idx="1"/>
+              </p:nvPr>
+            </p:nvSpPr>
+            <p:spPr>
+              <a:xfrm>
+                <a:off x="838198" y="1825624"/>
+                <a:ext cx="11284672" cy="5032376"/>
+              </a:xfrm>
+              <a:blipFill>
+                <a:blip r:embed="rId2"/>
+                <a:stretch>
+                  <a:fillRect l="-918" t="-1937"/>
+                </a:stretch>
+              </a:blipFill>
+            </p:spPr>
+            <p:txBody>
+              <a:bodyPr/>
+              <a:lstStyle/>
+              <a:p>
+                <a:r>
+                  <a:rPr lang="en-US">
+                    <a:noFill/>
+                  </a:rPr>
+                  <a:t> </a:t>
+                </a:r>
+              </a:p>
+            </p:txBody>
+          </p:sp>
+        </mc:Fallback>
+      </mc:AlternateContent>
+    </p:spTree>
+    <p:extLst>
+      <p:ext uri="{BB962C8B-B14F-4D97-AF65-F5344CB8AC3E}">
+        <p14:creationId xmlns:p14="http://schemas.microsoft.com/office/powerpoint/2010/main" val="3057771208"/>
+      </p:ext>
+    </p:extLst>
+  </p:cSld>
+  <p:clrMapOvr>
+    <a:masterClrMapping/>
+  </p:clrMapOvr>
+</p:sld>
+</file>
+
+<file path=ppt/slides/slide20.xml><?xml version="1.0" encoding="utf-8"?>
 <p:sld xmlns:a="http://schemas.openxmlformats.org/drawingml/2006/main" xmlns:r="http://schemas.openxmlformats.org/officeDocument/2006/relationships" xmlns:p="http://schemas.openxmlformats.org/presentationml/2006/main">
   <p:cSld>
     <p:spTree>
@@ -9895,245 +10926,7 @@
 </p:sld>
 </file>
 
-<file path=ppt/slides/slide2.xml><?xml version="1.0" encoding="utf-8"?>
-<p:sld xmlns:a="http://schemas.openxmlformats.org/drawingml/2006/main" xmlns:r="http://schemas.openxmlformats.org/officeDocument/2006/relationships" xmlns:p="http://schemas.openxmlformats.org/presentationml/2006/main">
-  <p:cSld>
-    <p:spTree>
-      <p:nvGrpSpPr>
-        <p:cNvPr id="1" name=""/>
-        <p:cNvGrpSpPr/>
-        <p:nvPr/>
-      </p:nvGrpSpPr>
-      <p:grpSpPr>
-        <a:xfrm>
-          <a:off x="0" y="0"/>
-          <a:ext cx="0" cy="0"/>
-          <a:chOff x="0" y="0"/>
-          <a:chExt cx="0" cy="0"/>
-        </a:xfrm>
-      </p:grpSpPr>
-      <p:sp>
-        <p:nvSpPr>
-          <p:cNvPr id="2" name="Title 1"/>
-          <p:cNvSpPr>
-            <a:spLocks noGrp="1"/>
-          </p:cNvSpPr>
-          <p:nvPr>
-            <p:ph type="title"/>
-          </p:nvPr>
-        </p:nvSpPr>
-        <p:spPr/>
-        <p:txBody>
-          <a:bodyPr/>
-          <a:lstStyle/>
-          <a:p>
-            <a:r>
-              <a:rPr lang="pt-BR"/>
-              <a:t>Recapitulando</a:t>
-            </a:r>
-            <a:endParaRPr lang="pt-BR" dirty="0"/>
-          </a:p>
-        </p:txBody>
-      </p:sp>
-      <mc:AlternateContent xmlns:mc="http://schemas.openxmlformats.org/markup-compatibility/2006" xmlns:a14="http://schemas.microsoft.com/office/drawing/2010/main">
-        <mc:Choice Requires="a14">
-          <p:sp>
-            <p:nvSpPr>
-              <p:cNvPr id="3" name="Content Placeholder 2"/>
-              <p:cNvSpPr>
-                <a:spLocks noGrp="1"/>
-              </p:cNvSpPr>
-              <p:nvPr>
-                <p:ph idx="1"/>
-              </p:nvPr>
-            </p:nvSpPr>
-            <p:spPr>
-              <a:xfrm>
-                <a:off x="838199" y="1825624"/>
-                <a:ext cx="11077282" cy="5032376"/>
-              </a:xfrm>
-            </p:spPr>
-            <p:txBody>
-              <a:bodyPr>
-                <a:normAutofit lnSpcReduction="10000"/>
-              </a:bodyPr>
-              <a:lstStyle/>
-              <a:p>
-                <a:r>
-                  <a:rPr lang="pt-BR" dirty="0"/>
-                  <a:t>No tópico anterior, falamos sobre o vetor gradiente.</a:t>
-                </a:r>
-              </a:p>
-              <a:p>
-                <a:r>
-                  <a:rPr lang="pt-BR" dirty="0"/>
-                  <a:t>Aprendemos dois algoritmos que usam o vetor gradiente para a resolução de problemas de otimização.</a:t>
-                </a:r>
-              </a:p>
-              <a:p>
-                <a:pPr lvl="1">
-                  <a:buFont typeface="Wingdings" panose="05000000000000000000" pitchFamily="2" charset="2"/>
-                  <a:buChar char="§"/>
-                </a:pPr>
-                <a:r>
-                  <a:rPr lang="pt-BR" b="1" i="1" dirty="0"/>
-                  <a:t>Gradiente ascendente </a:t>
-                </a:r>
-                <a:r>
-                  <a:rPr lang="pt-BR" dirty="0"/>
-                  <a:t>para problemas de </a:t>
-                </a:r>
-                <a:r>
-                  <a:rPr lang="pt-BR" b="1" i="1" dirty="0">
-                    <a:solidFill>
-                      <a:srgbClr val="00B050"/>
-                    </a:solidFill>
-                  </a:rPr>
-                  <a:t>maximização</a:t>
-                </a:r>
-                <a:r>
-                  <a:rPr lang="pt-BR" dirty="0"/>
-                  <a:t>.</a:t>
-                </a:r>
-              </a:p>
-              <a:p>
-                <a:pPr lvl="1">
-                  <a:buFont typeface="Wingdings" panose="05000000000000000000" pitchFamily="2" charset="2"/>
-                  <a:buChar char="§"/>
-                </a:pPr>
-                <a:r>
-                  <a:rPr lang="pt-BR" b="1" i="1" dirty="0"/>
-                  <a:t>Gradiente descendente</a:t>
-                </a:r>
-                <a:r>
-                  <a:rPr lang="pt-BR" dirty="0"/>
-                  <a:t> para problemas de </a:t>
-                </a:r>
-                <a:r>
-                  <a:rPr lang="pt-BR" b="1" i="1" dirty="0">
-                    <a:solidFill>
-                      <a:srgbClr val="00B050"/>
-                    </a:solidFill>
-                  </a:rPr>
-                  <a:t>minimização</a:t>
-                </a:r>
-                <a:r>
-                  <a:rPr lang="pt-BR" dirty="0"/>
-                  <a:t>.</a:t>
-                </a:r>
-              </a:p>
-              <a:p>
-                <a:r>
-                  <a:rPr lang="pt-BR" dirty="0"/>
-                  <a:t>Falamos sobre as três versões do gradiente descendente e as comparamos:</a:t>
-                </a:r>
-              </a:p>
-              <a:p>
-                <a:pPr lvl="1">
-                  <a:buFont typeface="Wingdings" panose="05000000000000000000" pitchFamily="2" charset="2"/>
-                  <a:buChar char="§"/>
-                </a:pPr>
-                <a:r>
-                  <a:rPr lang="pt-BR" dirty="0"/>
-                  <a:t>Batelada</a:t>
-                </a:r>
-              </a:p>
-              <a:p>
-                <a:pPr lvl="1">
-                  <a:buFont typeface="Wingdings" panose="05000000000000000000" pitchFamily="2" charset="2"/>
-                  <a:buChar char="§"/>
-                </a:pPr>
-                <a:r>
-                  <a:rPr lang="pt-BR" dirty="0"/>
-                  <a:t>Estocástico</a:t>
-                </a:r>
-              </a:p>
-              <a:p>
-                <a:pPr lvl="1">
-                  <a:buFont typeface="Wingdings" panose="05000000000000000000" pitchFamily="2" charset="2"/>
-                  <a:buChar char="§"/>
-                </a:pPr>
-                <a:r>
-                  <a:rPr lang="pt-BR" dirty="0"/>
-                  <a:t>Mini-batch</a:t>
-                </a:r>
-              </a:p>
-              <a:p>
-                <a:r>
-                  <a:rPr lang="pt-BR" dirty="0"/>
-                  <a:t>Neste tópico, discutiremos o quão importante é o ajuste do passo de aprendizagem, </a:t>
-                </a:r>
-                <a14:m>
-                  <m:oMath xmlns:m="http://schemas.openxmlformats.org/officeDocument/2006/math">
-                    <m:r>
-                      <a:rPr lang="pt-BR" i="1" smtClean="0">
-                        <a:latin typeface="Cambria Math" panose="02040503050406030204" pitchFamily="18" charset="0"/>
-                        <a:ea typeface="Cambria Math" panose="02040503050406030204" pitchFamily="18" charset="0"/>
-                      </a:rPr>
-                      <m:t>𝛼</m:t>
-                    </m:r>
-                  </m:oMath>
-                </a14:m>
-                <a:r>
-                  <a:rPr lang="pt-BR" dirty="0"/>
-                  <a:t>.</a:t>
-                </a:r>
-              </a:p>
-            </p:txBody>
-          </p:sp>
-        </mc:Choice>
-        <mc:Fallback xmlns="">
-          <p:sp>
-            <p:nvSpPr>
-              <p:cNvPr id="3" name="Content Placeholder 2"/>
-              <p:cNvSpPr>
-                <a:spLocks noGrp="1" noRot="1" noChangeAspect="1" noMove="1" noResize="1" noEditPoints="1" noAdjustHandles="1" noChangeArrowheads="1" noChangeShapeType="1" noTextEdit="1"/>
-              </p:cNvSpPr>
-              <p:nvPr>
-                <p:ph idx="1"/>
-              </p:nvPr>
-            </p:nvSpPr>
-            <p:spPr>
-              <a:xfrm>
-                <a:off x="838199" y="1825624"/>
-                <a:ext cx="11077282" cy="5032376"/>
-              </a:xfrm>
-              <a:blipFill>
-                <a:blip r:embed="rId2"/>
-                <a:stretch>
-                  <a:fillRect l="-935" t="-2663" r="-1760"/>
-                </a:stretch>
-              </a:blipFill>
-            </p:spPr>
-            <p:txBody>
-              <a:bodyPr/>
-              <a:lstStyle/>
-              <a:p>
-                <a:r>
-                  <a:rPr lang="pt-BR">
-                    <a:noFill/>
-                  </a:rPr>
-                  <a:t> </a:t>
-                </a:r>
-              </a:p>
-            </p:txBody>
-          </p:sp>
-        </mc:Fallback>
-      </mc:AlternateContent>
-    </p:spTree>
-    <p:extLst>
-      <p:ext uri="{BB962C8B-B14F-4D97-AF65-F5344CB8AC3E}">
-        <p14:creationId xmlns:p14="http://schemas.microsoft.com/office/powerpoint/2010/main" val="3057771208"/>
-      </p:ext>
-    </p:extLst>
-  </p:cSld>
-  <p:clrMapOvr>
-    <a:masterClrMapping/>
-  </p:clrMapOvr>
-</p:sld>
-</file>
-
-<file path=ppt/slides/slide20.xml><?xml version="1.0" encoding="utf-8"?>
+<file path=ppt/slides/slide21.xml><?xml version="1.0" encoding="utf-8"?>
 <p:sld xmlns:a="http://schemas.openxmlformats.org/drawingml/2006/main" xmlns:r="http://schemas.openxmlformats.org/officeDocument/2006/relationships" xmlns:p="http://schemas.openxmlformats.org/presentationml/2006/main">
   <p:cSld>
     <p:spTree>
@@ -10178,8 +10971,8 @@
           </a:p>
         </p:txBody>
       </p:sp>
-      <mc:AlternateContent xmlns:mc="http://schemas.openxmlformats.org/markup-compatibility/2006">
-        <mc:Choice xmlns:a14="http://schemas.microsoft.com/office/drawing/2010/main" Requires="a14">
+      <mc:AlternateContent xmlns:mc="http://schemas.openxmlformats.org/markup-compatibility/2006" xmlns:a14="http://schemas.microsoft.com/office/drawing/2010/main">
+        <mc:Choice Requires="a14">
           <p:sp>
             <p:nvSpPr>
               <p:cNvPr id="3" name="Espaço Reservado para Conteúdo 2">
@@ -10700,7 +11493,7 @@
             </p:txBody>
           </p:sp>
         </mc:Choice>
-        <mc:Fallback>
+        <mc:Fallback xmlns="">
           <p:sp>
             <p:nvSpPr>
               <p:cNvPr id="3" name="Espaço Reservado para Conteúdo 2">
@@ -10809,7 +11602,7 @@
 </p:sld>
 </file>
 
-<file path=ppt/slides/slide21.xml><?xml version="1.0" encoding="utf-8"?>
+<file path=ppt/slides/slide22.xml><?xml version="1.0" encoding="utf-8"?>
 <p:sld xmlns:a="http://schemas.openxmlformats.org/drawingml/2006/main" xmlns:r="http://schemas.openxmlformats.org/officeDocument/2006/relationships" xmlns:p="http://schemas.openxmlformats.org/presentationml/2006/main">
   <p:cSld>
     <p:spTree>
@@ -11536,7 +12329,7 @@
 </p:sld>
 </file>
 
-<file path=ppt/slides/slide22.xml><?xml version="1.0" encoding="utf-8"?>
+<file path=ppt/slides/slide23.xml><?xml version="1.0" encoding="utf-8"?>
 <p:sld xmlns:a="http://schemas.openxmlformats.org/drawingml/2006/main" xmlns:r="http://schemas.openxmlformats.org/officeDocument/2006/relationships" xmlns:p="http://schemas.openxmlformats.org/presentationml/2006/main">
   <p:cSld>
     <p:spTree>
@@ -11581,8 +12374,8 @@
           </a:p>
         </p:txBody>
       </p:sp>
-      <mc:AlternateContent xmlns:mc="http://schemas.openxmlformats.org/markup-compatibility/2006">
-        <mc:Choice xmlns:a14="http://schemas.microsoft.com/office/drawing/2010/main" Requires="a14">
+      <mc:AlternateContent xmlns:mc="http://schemas.openxmlformats.org/markup-compatibility/2006" xmlns:a14="http://schemas.microsoft.com/office/drawing/2010/main">
+        <mc:Choice Requires="a14">
           <p:sp>
             <p:nvSpPr>
               <p:cNvPr id="3" name="Espaço Reservado para Conteúdo 2">
@@ -12280,7 +13073,7 @@
             </p:txBody>
           </p:sp>
         </mc:Choice>
-        <mc:Fallback>
+        <mc:Fallback xmlns="">
           <p:sp>
             <p:nvSpPr>
               <p:cNvPr id="3" name="Espaço Reservado para Conteúdo 2">
@@ -12337,7 +13130,7 @@
 </p:sld>
 </file>
 
-<file path=ppt/slides/slide23.xml><?xml version="1.0" encoding="utf-8"?>
+<file path=ppt/slides/slide24.xml><?xml version="1.0" encoding="utf-8"?>
 <p:sld xmlns:a="http://schemas.openxmlformats.org/drawingml/2006/main" xmlns:r="http://schemas.openxmlformats.org/officeDocument/2006/relationships" xmlns:p="http://schemas.openxmlformats.org/presentationml/2006/main">
   <p:cSld>
     <p:spTree>
@@ -12387,8 +13180,8 @@
           </a:p>
         </p:txBody>
       </p:sp>
-      <mc:AlternateContent xmlns:mc="http://schemas.openxmlformats.org/markup-compatibility/2006">
-        <mc:Choice xmlns:a14="http://schemas.microsoft.com/office/drawing/2010/main" Requires="a14">
+      <mc:AlternateContent xmlns:mc="http://schemas.openxmlformats.org/markup-compatibility/2006" xmlns:a14="http://schemas.microsoft.com/office/drawing/2010/main">
+        <mc:Choice Requires="a14">
           <p:sp>
             <p:nvSpPr>
               <p:cNvPr id="3" name="Espaço Reservado para Conteúdo 2">
@@ -12604,7 +13397,7 @@
             </p:txBody>
           </p:sp>
         </mc:Choice>
-        <mc:Fallback>
+        <mc:Fallback xmlns="">
           <p:sp>
             <p:nvSpPr>
               <p:cNvPr id="3" name="Espaço Reservado para Conteúdo 2">
@@ -12661,7 +13454,7 @@
 </p:sld>
 </file>
 
-<file path=ppt/slides/slide24.xml><?xml version="1.0" encoding="utf-8"?>
+<file path=ppt/slides/slide25.xml><?xml version="1.0" encoding="utf-8"?>
 <p:sld xmlns:a="http://schemas.openxmlformats.org/drawingml/2006/main" xmlns:r="http://schemas.openxmlformats.org/officeDocument/2006/relationships" xmlns:p="http://schemas.openxmlformats.org/presentationml/2006/main">
   <p:cSld>
     <p:spTree>
@@ -13895,7 +14688,7 @@
 </p:sld>
 </file>
 
-<file path=ppt/slides/slide25.xml><?xml version="1.0" encoding="utf-8"?>
+<file path=ppt/slides/slide26.xml><?xml version="1.0" encoding="utf-8"?>
 <p:sld xmlns:a="http://schemas.openxmlformats.org/drawingml/2006/main" xmlns:r="http://schemas.openxmlformats.org/officeDocument/2006/relationships" xmlns:p="http://schemas.openxmlformats.org/presentationml/2006/main">
   <p:cSld>
     <p:spTree>
@@ -14944,8 +15737,8 @@
           </a:p>
         </p:txBody>
       </p:sp>
-      <mc:AlternateContent xmlns:mc="http://schemas.openxmlformats.org/markup-compatibility/2006">
-        <mc:Choice xmlns:a14="http://schemas.microsoft.com/office/drawing/2010/main" Requires="a14">
+      <mc:AlternateContent xmlns:mc="http://schemas.openxmlformats.org/markup-compatibility/2006" xmlns:a14="http://schemas.microsoft.com/office/drawing/2010/main">
+        <mc:Choice Requires="a14">
           <p:sp>
             <p:nvSpPr>
               <p:cNvPr id="15" name="Espaço Reservado para Conteúdo 2">
@@ -15050,7 +15843,7 @@
             </p:txBody>
           </p:sp>
         </mc:Choice>
-        <mc:Fallback>
+        <mc:Fallback xmlns="">
           <p:sp>
             <p:nvSpPr>
               <p:cNvPr id="15" name="Espaço Reservado para Conteúdo 2">
@@ -15143,7 +15936,7 @@
 </p:sld>
 </file>
 
-<file path=ppt/slides/slide26.xml><?xml version="1.0" encoding="utf-8"?>
+<file path=ppt/slides/slide27.xml><?xml version="1.0" encoding="utf-8"?>
 <p:sld xmlns:a="http://schemas.openxmlformats.org/drawingml/2006/main" xmlns:r="http://schemas.openxmlformats.org/officeDocument/2006/relationships" xmlns:p="http://schemas.openxmlformats.org/presentationml/2006/main">
   <p:cSld>
     <p:spTree>
@@ -16298,7 +17091,7 @@
 </p:sld>
 </file>
 
-<file path=ppt/slides/slide27.xml><?xml version="1.0" encoding="utf-8"?>
+<file path=ppt/slides/slide28.xml><?xml version="1.0" encoding="utf-8"?>
 <p:sld xmlns:a="http://schemas.openxmlformats.org/drawingml/2006/main" xmlns:r="http://schemas.openxmlformats.org/officeDocument/2006/relationships" xmlns:p="http://schemas.openxmlformats.org/presentationml/2006/main">
   <p:cSld>
     <p:spTree>
@@ -16471,7 +17264,7 @@
 </p:sld>
 </file>
 
-<file path=ppt/slides/slide28.xml><?xml version="1.0" encoding="utf-8"?>
+<file path=ppt/slides/slide29.xml><?xml version="1.0" encoding="utf-8"?>
 <p:sld xmlns:a="http://schemas.openxmlformats.org/drawingml/2006/main" xmlns:r="http://schemas.openxmlformats.org/officeDocument/2006/relationships" xmlns:p="http://schemas.openxmlformats.org/presentationml/2006/main">
   <p:cSld>
     <p:spTree>
@@ -16556,7 +17349,349 @@
 </p:sld>
 </file>
 
-<file path=ppt/slides/slide29.xml><?xml version="1.0" encoding="utf-8"?>
+<file path=ppt/slides/slide3.xml><?xml version="1.0" encoding="utf-8"?>
+<p:sld xmlns:a="http://schemas.openxmlformats.org/drawingml/2006/main" xmlns:r="http://schemas.openxmlformats.org/officeDocument/2006/relationships" xmlns:p="http://schemas.openxmlformats.org/presentationml/2006/main">
+  <p:cSld>
+    <p:spTree>
+      <p:nvGrpSpPr>
+        <p:cNvPr id="1" name=""/>
+        <p:cNvGrpSpPr/>
+        <p:nvPr/>
+      </p:nvGrpSpPr>
+      <p:grpSpPr>
+        <a:xfrm>
+          <a:off x="0" y="0"/>
+          <a:ext cx="0" cy="0"/>
+          <a:chOff x="0" y="0"/>
+          <a:chExt cx="0" cy="0"/>
+        </a:xfrm>
+      </p:grpSpPr>
+      <p:sp>
+        <p:nvSpPr>
+          <p:cNvPr id="2" name="Título 1">
+            <a:extLst>
+              <a:ext uri="{FF2B5EF4-FFF2-40B4-BE49-F238E27FC236}">
+                <a16:creationId xmlns:a16="http://schemas.microsoft.com/office/drawing/2014/main" id="{B4A549E3-7E5B-04E3-09ED-A7C3171C6D5F}"/>
+              </a:ext>
+            </a:extLst>
+          </p:cNvPr>
+          <p:cNvSpPr>
+            <a:spLocks noGrp="1"/>
+          </p:cNvSpPr>
+          <p:nvPr>
+            <p:ph type="title"/>
+          </p:nvPr>
+        </p:nvSpPr>
+        <p:spPr/>
+        <p:txBody>
+          <a:bodyPr/>
+          <a:lstStyle/>
+          <a:p>
+            <a:r>
+              <a:rPr lang="pt-BR" dirty="0"/>
+              <a:t>Escolha do passo de aprendizagem</a:t>
+            </a:r>
+          </a:p>
+        </p:txBody>
+      </p:sp>
+      <mc:AlternateContent xmlns:mc="http://schemas.openxmlformats.org/markup-compatibility/2006">
+        <mc:Choice xmlns:a14="http://schemas.microsoft.com/office/drawing/2010/main" Requires="a14">
+          <p:sp>
+            <p:nvSpPr>
+              <p:cNvPr id="3" name="Espaço Reservado para Conteúdo 2">
+                <a:extLst>
+                  <a:ext uri="{FF2B5EF4-FFF2-40B4-BE49-F238E27FC236}">
+                    <a16:creationId xmlns:a16="http://schemas.microsoft.com/office/drawing/2014/main" id="{3323DEB1-E32D-5111-52A9-A936D5B18776}"/>
+                  </a:ext>
+                </a:extLst>
+              </p:cNvPr>
+              <p:cNvSpPr>
+                <a:spLocks noGrp="1"/>
+              </p:cNvSpPr>
+              <p:nvPr>
+                <p:ph idx="1"/>
+              </p:nvPr>
+            </p:nvSpPr>
+            <p:spPr>
+              <a:xfrm>
+                <a:off x="5693790" y="1825624"/>
+                <a:ext cx="6498210" cy="5032375"/>
+              </a:xfrm>
+            </p:spPr>
+            <p:txBody>
+              <a:bodyPr>
+                <a:normAutofit/>
+              </a:bodyPr>
+              <a:lstStyle/>
+              <a:p>
+                <a:r>
+                  <a:rPr lang="pt-BR" dirty="0"/>
+                  <a:t>Conforme nós vimos antes, no gradiente descendente, o </a:t>
+                </a:r>
+                <a:r>
+                  <a:rPr lang="pt-BR" b="1" i="1" dirty="0">
+                    <a:solidFill>
+                      <a:srgbClr val="FF0000"/>
+                    </a:solidFill>
+                  </a:rPr>
+                  <a:t>negativo</a:t>
+                </a:r>
+                <a:r>
+                  <a:rPr lang="pt-BR" dirty="0"/>
+                  <a:t> do </a:t>
+                </a:r>
+                <a:r>
+                  <a:rPr lang="pt-BR" b="1" i="1" dirty="0">
+                    <a:solidFill>
+                      <a:srgbClr val="7030A0"/>
+                    </a:solidFill>
+                  </a:rPr>
+                  <a:t>vetor gradiente</a:t>
+                </a:r>
+                <a:r>
+                  <a:rPr lang="pt-BR" dirty="0"/>
+                  <a:t>, </a:t>
+                </a:r>
+                <a14:m>
+                  <m:oMath xmlns:m="http://schemas.openxmlformats.org/officeDocument/2006/math">
+                    <m:r>
+                      <a:rPr lang="pt-BR" b="0" i="0" smtClean="0">
+                        <a:latin typeface="Cambria Math" panose="02040503050406030204" pitchFamily="18" charset="0"/>
+                        <a:ea typeface="Cambria Math" panose="02040503050406030204" pitchFamily="18" charset="0"/>
+                      </a:rPr>
+                      <m:t>−</m:t>
+                    </m:r>
+                    <m:r>
+                      <a:rPr lang="pt-BR" i="1" smtClean="0">
+                        <a:latin typeface="Cambria Math" panose="02040503050406030204" pitchFamily="18" charset="0"/>
+                        <a:ea typeface="Cambria Math" panose="02040503050406030204" pitchFamily="18" charset="0"/>
+                      </a:rPr>
+                      <m:t>𝛻</m:t>
+                    </m:r>
+                    <m:r>
+                      <a:rPr lang="pt-BR" i="1" smtClean="0">
+                        <a:latin typeface="Cambria Math" panose="02040503050406030204" pitchFamily="18" charset="0"/>
+                        <a:ea typeface="Cambria Math" panose="02040503050406030204" pitchFamily="18" charset="0"/>
+                      </a:rPr>
+                      <m:t>𝑓</m:t>
+                    </m:r>
+                    <m:d>
+                      <m:dPr>
+                        <m:ctrlPr>
+                          <a:rPr lang="pt-BR" i="1">
+                            <a:latin typeface="Cambria Math" panose="02040503050406030204" pitchFamily="18" charset="0"/>
+                            <a:ea typeface="Cambria Math" panose="02040503050406030204" pitchFamily="18" charset="0"/>
+                          </a:rPr>
+                        </m:ctrlPr>
+                      </m:dPr>
+                      <m:e>
+                        <m:r>
+                          <a:rPr lang="pt-BR" i="1">
+                            <a:latin typeface="Cambria Math" panose="02040503050406030204" pitchFamily="18" charset="0"/>
+                          </a:rPr>
+                          <m:t>𝑥</m:t>
+                        </m:r>
+                      </m:e>
+                    </m:d>
+                  </m:oMath>
+                </a14:m>
+                <a:r>
+                  <a:rPr lang="pt-BR" dirty="0"/>
+                  <a:t>:</a:t>
+                </a:r>
+              </a:p>
+              <a:p>
+                <a:pPr lvl="1">
+                  <a:buFont typeface="Wingdings" panose="05000000000000000000" pitchFamily="2" charset="2"/>
+                  <a:buChar char="§"/>
+                </a:pPr>
+                <a:r>
+                  <a:rPr lang="pt-BR" dirty="0"/>
+                  <a:t>dá a </a:t>
+                </a:r>
+                <a:r>
+                  <a:rPr lang="pt-BR" b="1" i="1" dirty="0">
+                    <a:solidFill>
+                      <a:srgbClr val="00B050"/>
+                    </a:solidFill>
+                  </a:rPr>
+                  <a:t>direção </a:t>
+                </a:r>
+                <a:r>
+                  <a:rPr lang="pt-BR" b="1" i="1" dirty="0">
+                    <a:solidFill>
+                      <a:srgbClr val="00B050"/>
+                    </a:solidFill>
+                    <a:effectLst/>
+                  </a:rPr>
+                  <a:t>de decrescimento mais rápido de uma função</a:t>
+                </a:r>
+                <a:r>
+                  <a:rPr lang="pt-BR" b="0" i="0" dirty="0">
+                    <a:effectLst/>
+                  </a:rPr>
+                  <a:t> a partir de um ponto qualquer</a:t>
+                </a:r>
+              </a:p>
+              <a:p>
+                <a:pPr lvl="1">
+                  <a:buFont typeface="Wingdings" panose="05000000000000000000" pitchFamily="2" charset="2"/>
+                  <a:buChar char="§"/>
+                </a:pPr>
+                <a:r>
+                  <a:rPr lang="pt-BR" b="0" i="0" dirty="0">
+                    <a:effectLst/>
+                  </a:rPr>
+                  <a:t>e sua </a:t>
+                </a:r>
+                <a:r>
+                  <a:rPr lang="pt-BR" b="1" i="1" dirty="0">
+                    <a:solidFill>
+                      <a:srgbClr val="00B050"/>
+                    </a:solidFill>
+                    <a:effectLst/>
+                  </a:rPr>
+                  <a:t>magnitude</a:t>
+                </a:r>
+                <a:r>
+                  <a:rPr lang="pt-BR" b="0" i="0" dirty="0">
+                    <a:effectLst/>
+                  </a:rPr>
+                  <a:t> indica a </a:t>
+                </a:r>
+                <a:r>
+                  <a:rPr lang="pt-BR" b="1" i="1" dirty="0">
+                    <a:solidFill>
+                      <a:srgbClr val="00B050"/>
+                    </a:solidFill>
+                    <a:effectLst/>
+                  </a:rPr>
+                  <a:t>taxa de variação da função</a:t>
+                </a:r>
+                <a:r>
+                  <a:rPr lang="pt-BR" b="0" i="0" dirty="0">
+                    <a:effectLst/>
+                  </a:rPr>
+                  <a:t> nessa direção.</a:t>
+                </a:r>
+                <a:endParaRPr lang="pt-BR" b="1" i="1" dirty="0">
+                  <a:effectLst/>
+                </a:endParaRPr>
+              </a:p>
+              <a:p>
+                <a:r>
+                  <a:rPr lang="pt-BR" dirty="0"/>
+                  <a:t>Porém, ele </a:t>
+                </a:r>
+                <a:r>
+                  <a:rPr lang="pt-BR" b="1" i="1" dirty="0">
+                    <a:solidFill>
+                      <a:schemeClr val="accent2"/>
+                    </a:solidFill>
+                  </a:rPr>
+                  <a:t>não nos informa a distância até o ponto de máximo</a:t>
+                </a:r>
+                <a:r>
+                  <a:rPr lang="pt-BR" dirty="0"/>
+                  <a:t>.</a:t>
+                </a:r>
+              </a:p>
+            </p:txBody>
+          </p:sp>
+        </mc:Choice>
+        <mc:Fallback>
+          <p:sp>
+            <p:nvSpPr>
+              <p:cNvPr id="3" name="Espaço Reservado para Conteúdo 2">
+                <a:extLst>
+                  <a:ext uri="{FF2B5EF4-FFF2-40B4-BE49-F238E27FC236}">
+                    <a16:creationId xmlns:a16="http://schemas.microsoft.com/office/drawing/2014/main" id="{3323DEB1-E32D-5111-52A9-A936D5B18776}"/>
+                  </a:ext>
+                </a:extLst>
+              </p:cNvPr>
+              <p:cNvSpPr>
+                <a:spLocks noGrp="1" noRot="1" noChangeAspect="1" noMove="1" noResize="1" noEditPoints="1" noAdjustHandles="1" noChangeArrowheads="1" noChangeShapeType="1" noTextEdit="1"/>
+              </p:cNvSpPr>
+              <p:nvPr>
+                <p:ph idx="1"/>
+              </p:nvPr>
+            </p:nvSpPr>
+            <p:spPr>
+              <a:xfrm>
+                <a:off x="5693790" y="1825624"/>
+                <a:ext cx="6498210" cy="5032375"/>
+              </a:xfrm>
+              <a:blipFill>
+                <a:blip r:embed="rId2"/>
+                <a:stretch>
+                  <a:fillRect l="-1689" t="-1937"/>
+                </a:stretch>
+              </a:blipFill>
+            </p:spPr>
+            <p:txBody>
+              <a:bodyPr/>
+              <a:lstStyle/>
+              <a:p>
+                <a:r>
+                  <a:rPr lang="en-US">
+                    <a:noFill/>
+                  </a:rPr>
+                  <a:t> </a:t>
+                </a:r>
+              </a:p>
+            </p:txBody>
+          </p:sp>
+        </mc:Fallback>
+      </mc:AlternateContent>
+      <p:pic>
+        <p:nvPicPr>
+          <p:cNvPr id="4" name="Imagem 3">
+            <a:extLst>
+              <a:ext uri="{FF2B5EF4-FFF2-40B4-BE49-F238E27FC236}">
+                <a16:creationId xmlns:a16="http://schemas.microsoft.com/office/drawing/2014/main" id="{860F9137-10B0-2765-3CAF-0E8F4196E620}"/>
+              </a:ext>
+            </a:extLst>
+          </p:cNvPr>
+          <p:cNvPicPr>
+            <a:picLocks noChangeAspect="1"/>
+          </p:cNvPicPr>
+          <p:nvPr/>
+        </p:nvPicPr>
+        <p:blipFill rotWithShape="1">
+          <a:blip r:embed="rId3">
+            <a:extLst>
+              <a:ext uri="{28A0092B-C50C-407E-A947-70E740481C1C}">
+                <a14:useLocalDpi xmlns:a14="http://schemas.microsoft.com/office/drawing/2010/main" val="0"/>
+              </a:ext>
+            </a:extLst>
+          </a:blip>
+          <a:srcRect t="47746"/>
+          <a:stretch/>
+        </p:blipFill>
+        <p:spPr>
+          <a:xfrm>
+            <a:off x="191677" y="2780906"/>
+            <a:ext cx="5270984" cy="1888343"/>
+          </a:xfrm>
+          <a:prstGeom prst="rect">
+            <a:avLst/>
+          </a:prstGeom>
+        </p:spPr>
+      </p:pic>
+    </p:spTree>
+    <p:extLst>
+      <p:ext uri="{BB962C8B-B14F-4D97-AF65-F5344CB8AC3E}">
+        <p14:creationId xmlns:p14="http://schemas.microsoft.com/office/powerpoint/2010/main" val="1489300720"/>
+      </p:ext>
+    </p:extLst>
+  </p:cSld>
+  <p:clrMapOvr>
+    <a:masterClrMapping/>
+  </p:clrMapOvr>
+</p:sld>
+</file>
+
+<file path=ppt/slides/slide30.xml><?xml version="1.0" encoding="utf-8"?>
 <p:sld xmlns:a="http://schemas.openxmlformats.org/drawingml/2006/main" xmlns:r="http://schemas.openxmlformats.org/officeDocument/2006/relationships" xmlns:p="http://schemas.openxmlformats.org/presentationml/2006/main">
   <p:cSld>
     <p:spTree>
@@ -16832,327 +17967,7 @@
 </p:sld>
 </file>
 
-<file path=ppt/slides/slide3.xml><?xml version="1.0" encoding="utf-8"?>
-<p:sld xmlns:a="http://schemas.openxmlformats.org/drawingml/2006/main" xmlns:r="http://schemas.openxmlformats.org/officeDocument/2006/relationships" xmlns:p="http://schemas.openxmlformats.org/presentationml/2006/main">
-  <p:cSld>
-    <p:spTree>
-      <p:nvGrpSpPr>
-        <p:cNvPr id="1" name=""/>
-        <p:cNvGrpSpPr/>
-        <p:nvPr/>
-      </p:nvGrpSpPr>
-      <p:grpSpPr>
-        <a:xfrm>
-          <a:off x="0" y="0"/>
-          <a:ext cx="0" cy="0"/>
-          <a:chOff x="0" y="0"/>
-          <a:chExt cx="0" cy="0"/>
-        </a:xfrm>
-      </p:grpSpPr>
-      <p:sp>
-        <p:nvSpPr>
-          <p:cNvPr id="2" name="Título 1">
-            <a:extLst>
-              <a:ext uri="{FF2B5EF4-FFF2-40B4-BE49-F238E27FC236}">
-                <a16:creationId xmlns:a16="http://schemas.microsoft.com/office/drawing/2014/main" id="{B4A549E3-7E5B-04E3-09ED-A7C3171C6D5F}"/>
-              </a:ext>
-            </a:extLst>
-          </p:cNvPr>
-          <p:cNvSpPr>
-            <a:spLocks noGrp="1"/>
-          </p:cNvSpPr>
-          <p:nvPr>
-            <p:ph type="title"/>
-          </p:nvPr>
-        </p:nvSpPr>
-        <p:spPr/>
-        <p:txBody>
-          <a:bodyPr/>
-          <a:lstStyle/>
-          <a:p>
-            <a:r>
-              <a:rPr lang="pt-BR" dirty="0"/>
-              <a:t>Escolha do passo de aprendizagem</a:t>
-            </a:r>
-          </a:p>
-        </p:txBody>
-      </p:sp>
-      <mc:AlternateContent xmlns:mc="http://schemas.openxmlformats.org/markup-compatibility/2006" xmlns:a14="http://schemas.microsoft.com/office/drawing/2010/main">
-        <mc:Choice Requires="a14">
-          <p:sp>
-            <p:nvSpPr>
-              <p:cNvPr id="3" name="Espaço Reservado para Conteúdo 2">
-                <a:extLst>
-                  <a:ext uri="{FF2B5EF4-FFF2-40B4-BE49-F238E27FC236}">
-                    <a16:creationId xmlns:a16="http://schemas.microsoft.com/office/drawing/2014/main" id="{3323DEB1-E32D-5111-52A9-A936D5B18776}"/>
-                  </a:ext>
-                </a:extLst>
-              </p:cNvPr>
-              <p:cNvSpPr>
-                <a:spLocks noGrp="1"/>
-              </p:cNvSpPr>
-              <p:nvPr>
-                <p:ph idx="1"/>
-              </p:nvPr>
-            </p:nvSpPr>
-            <p:spPr>
-              <a:xfrm>
-                <a:off x="5693790" y="1825624"/>
-                <a:ext cx="6306533" cy="5032375"/>
-              </a:xfrm>
-            </p:spPr>
-            <p:txBody>
-              <a:bodyPr>
-                <a:normAutofit/>
-              </a:bodyPr>
-              <a:lstStyle/>
-              <a:p>
-                <a:r>
-                  <a:rPr lang="pt-BR" dirty="0"/>
-                  <a:t>Conforme nós vimos antes, no gradiente descendente, o </a:t>
-                </a:r>
-                <a:r>
-                  <a:rPr lang="pt-BR" b="1" i="1" dirty="0">
-                    <a:solidFill>
-                      <a:srgbClr val="FF0000"/>
-                    </a:solidFill>
-                  </a:rPr>
-                  <a:t>negativo</a:t>
-                </a:r>
-                <a:r>
-                  <a:rPr lang="pt-BR" dirty="0"/>
-                  <a:t> do </a:t>
-                </a:r>
-                <a:r>
-                  <a:rPr lang="pt-BR" b="1" i="1" dirty="0">
-                    <a:solidFill>
-                      <a:srgbClr val="7030A0"/>
-                    </a:solidFill>
-                  </a:rPr>
-                  <a:t>vetor gradiente</a:t>
-                </a:r>
-                <a:r>
-                  <a:rPr lang="pt-BR" dirty="0"/>
-                  <a:t>, </a:t>
-                </a:r>
-                <a14:m>
-                  <m:oMath xmlns:m="http://schemas.openxmlformats.org/officeDocument/2006/math">
-                    <m:r>
-                      <a:rPr lang="pt-BR" b="0" i="0" smtClean="0">
-                        <a:latin typeface="Cambria Math" panose="02040503050406030204" pitchFamily="18" charset="0"/>
-                        <a:ea typeface="Cambria Math" panose="02040503050406030204" pitchFamily="18" charset="0"/>
-                      </a:rPr>
-                      <m:t>−</m:t>
-                    </m:r>
-                    <m:r>
-                      <a:rPr lang="pt-BR" i="1" smtClean="0">
-                        <a:latin typeface="Cambria Math" panose="02040503050406030204" pitchFamily="18" charset="0"/>
-                        <a:ea typeface="Cambria Math" panose="02040503050406030204" pitchFamily="18" charset="0"/>
-                      </a:rPr>
-                      <m:t>𝛻</m:t>
-                    </m:r>
-                    <m:r>
-                      <a:rPr lang="pt-BR" i="1" smtClean="0">
-                        <a:latin typeface="Cambria Math" panose="02040503050406030204" pitchFamily="18" charset="0"/>
-                        <a:ea typeface="Cambria Math" panose="02040503050406030204" pitchFamily="18" charset="0"/>
-                      </a:rPr>
-                      <m:t>𝑓</m:t>
-                    </m:r>
-                    <m:d>
-                      <m:dPr>
-                        <m:ctrlPr>
-                          <a:rPr lang="pt-BR" i="1">
-                            <a:latin typeface="Cambria Math" panose="02040503050406030204" pitchFamily="18" charset="0"/>
-                            <a:ea typeface="Cambria Math" panose="02040503050406030204" pitchFamily="18" charset="0"/>
-                          </a:rPr>
-                        </m:ctrlPr>
-                      </m:dPr>
-                      <m:e>
-                        <m:r>
-                          <a:rPr lang="pt-BR" i="1">
-                            <a:latin typeface="Cambria Math" panose="02040503050406030204" pitchFamily="18" charset="0"/>
-                          </a:rPr>
-                          <m:t>𝑥</m:t>
-                        </m:r>
-                      </m:e>
-                    </m:d>
-                  </m:oMath>
-                </a14:m>
-                <a:r>
-                  <a:rPr lang="pt-BR" dirty="0"/>
-                  <a:t>, dá a </a:t>
-                </a:r>
-                <a:r>
-                  <a:rPr lang="pt-BR" b="1" i="1" dirty="0">
-                    <a:solidFill>
-                      <a:srgbClr val="00B050"/>
-                    </a:solidFill>
-                  </a:rPr>
-                  <a:t>direção </a:t>
-                </a:r>
-                <a:r>
-                  <a:rPr lang="pt-BR" b="1" i="1" dirty="0">
-                    <a:solidFill>
-                      <a:srgbClr val="00B050"/>
-                    </a:solidFill>
-                    <a:effectLst/>
-                  </a:rPr>
-                  <a:t>de decrescimento mais rápido de uma função</a:t>
-                </a:r>
-                <a:r>
-                  <a:rPr lang="pt-BR" b="0" i="0" dirty="0">
-                    <a:effectLst/>
-                  </a:rPr>
-                  <a:t> a partir de um ponto e sua </a:t>
-                </a:r>
-                <a:r>
-                  <a:rPr lang="pt-BR" b="1" i="1" dirty="0">
-                    <a:solidFill>
-                      <a:srgbClr val="00B050"/>
-                    </a:solidFill>
-                    <a:effectLst/>
-                  </a:rPr>
-                  <a:t>magnitude</a:t>
-                </a:r>
-                <a:r>
-                  <a:rPr lang="pt-BR" b="0" i="0" dirty="0">
-                    <a:effectLst/>
-                  </a:rPr>
-                  <a:t> indica a </a:t>
-                </a:r>
-                <a:r>
-                  <a:rPr lang="pt-BR" b="1" i="1" dirty="0">
-                    <a:solidFill>
-                      <a:srgbClr val="00B050"/>
-                    </a:solidFill>
-                    <a:effectLst/>
-                  </a:rPr>
-                  <a:t>taxa de variação da função</a:t>
-                </a:r>
-                <a:r>
-                  <a:rPr lang="pt-BR" b="0" i="0" dirty="0">
-                    <a:effectLst/>
-                  </a:rPr>
-                  <a:t> nessa direção.</a:t>
-                </a:r>
-                <a:endParaRPr lang="pt-BR" b="1" i="1" dirty="0">
-                  <a:effectLst/>
-                </a:endParaRPr>
-              </a:p>
-              <a:p>
-                <a:r>
-                  <a:rPr lang="pt-BR" dirty="0"/>
-                  <a:t>Porém, ele </a:t>
-                </a:r>
-                <a:r>
-                  <a:rPr lang="pt-BR" b="1" i="1" dirty="0">
-                    <a:solidFill>
-                      <a:schemeClr val="accent2"/>
-                    </a:solidFill>
-                  </a:rPr>
-                  <a:t>não nos informa a distância até o ponto de máximo</a:t>
-                </a:r>
-                <a:r>
-                  <a:rPr lang="pt-BR" dirty="0"/>
-                  <a:t>.</a:t>
-                </a:r>
-              </a:p>
-            </p:txBody>
-          </p:sp>
-        </mc:Choice>
-        <mc:Fallback xmlns="">
-          <p:sp>
-            <p:nvSpPr>
-              <p:cNvPr id="3" name="Espaço Reservado para Conteúdo 2">
-                <a:extLst>
-                  <a:ext uri="{FF2B5EF4-FFF2-40B4-BE49-F238E27FC236}">
-                    <a16:creationId xmlns:a16="http://schemas.microsoft.com/office/drawing/2014/main" id="{3323DEB1-E32D-5111-52A9-A936D5B18776}"/>
-                  </a:ext>
-                </a:extLst>
-              </p:cNvPr>
-              <p:cNvSpPr>
-                <a:spLocks noGrp="1" noRot="1" noChangeAspect="1" noMove="1" noResize="1" noEditPoints="1" noAdjustHandles="1" noChangeArrowheads="1" noChangeShapeType="1" noTextEdit="1"/>
-              </p:cNvSpPr>
-              <p:nvPr>
-                <p:ph idx="1"/>
-              </p:nvPr>
-            </p:nvSpPr>
-            <p:spPr>
-              <a:xfrm>
-                <a:off x="5693790" y="1825624"/>
-                <a:ext cx="6306533" cy="5032375"/>
-              </a:xfrm>
-              <a:blipFill>
-                <a:blip r:embed="rId2"/>
-                <a:stretch>
-                  <a:fillRect l="-1739" t="-1937" r="-2222"/>
-                </a:stretch>
-              </a:blipFill>
-            </p:spPr>
-            <p:txBody>
-              <a:bodyPr/>
-              <a:lstStyle/>
-              <a:p>
-                <a:r>
-                  <a:rPr lang="pt-BR">
-                    <a:noFill/>
-                  </a:rPr>
-                  <a:t> </a:t>
-                </a:r>
-              </a:p>
-            </p:txBody>
-          </p:sp>
-        </mc:Fallback>
-      </mc:AlternateContent>
-      <p:pic>
-        <p:nvPicPr>
-          <p:cNvPr id="4" name="Imagem 3">
-            <a:extLst>
-              <a:ext uri="{FF2B5EF4-FFF2-40B4-BE49-F238E27FC236}">
-                <a16:creationId xmlns:a16="http://schemas.microsoft.com/office/drawing/2014/main" id="{860F9137-10B0-2765-3CAF-0E8F4196E620}"/>
-              </a:ext>
-            </a:extLst>
-          </p:cNvPr>
-          <p:cNvPicPr>
-            <a:picLocks noChangeAspect="1"/>
-          </p:cNvPicPr>
-          <p:nvPr/>
-        </p:nvPicPr>
-        <p:blipFill rotWithShape="1">
-          <a:blip r:embed="rId3">
-            <a:extLst>
-              <a:ext uri="{28A0092B-C50C-407E-A947-70E740481C1C}">
-                <a14:useLocalDpi xmlns:a14="http://schemas.microsoft.com/office/drawing/2010/main" val="0"/>
-              </a:ext>
-            </a:extLst>
-          </a:blip>
-          <a:srcRect t="47746"/>
-          <a:stretch/>
-        </p:blipFill>
-        <p:spPr>
-          <a:xfrm>
-            <a:off x="191677" y="2780906"/>
-            <a:ext cx="5270984" cy="1888343"/>
-          </a:xfrm>
-          <a:prstGeom prst="rect">
-            <a:avLst/>
-          </a:prstGeom>
-        </p:spPr>
-      </p:pic>
-    </p:spTree>
-    <p:extLst>
-      <p:ext uri="{BB962C8B-B14F-4D97-AF65-F5344CB8AC3E}">
-        <p14:creationId xmlns:p14="http://schemas.microsoft.com/office/powerpoint/2010/main" val="1489300720"/>
-      </p:ext>
-    </p:extLst>
-  </p:cSld>
-  <p:clrMapOvr>
-    <a:masterClrMapping/>
-  </p:clrMapOvr>
-</p:sld>
-</file>
-
-<file path=ppt/slides/slide30.xml><?xml version="1.0" encoding="utf-8"?>
+<file path=ppt/slides/slide31.xml><?xml version="1.0" encoding="utf-8"?>
 <p:sld xmlns:a="http://schemas.openxmlformats.org/drawingml/2006/main" xmlns:r="http://schemas.openxmlformats.org/officeDocument/2006/relationships" xmlns:p="http://schemas.openxmlformats.org/presentationml/2006/main">
   <p:cSld>
     <p:spTree>
@@ -17210,7 +18025,7 @@
 </p:sld>
 </file>
 
-<file path=ppt/slides/slide31.xml><?xml version="1.0" encoding="utf-8"?>
+<file path=ppt/slides/slide32.xml><?xml version="1.0" encoding="utf-8"?>
 <p:sld xmlns:a="http://schemas.openxmlformats.org/drawingml/2006/main" xmlns:r="http://schemas.openxmlformats.org/officeDocument/2006/relationships" xmlns:p="http://schemas.openxmlformats.org/presentationml/2006/main">
   <p:cSld>
     <p:spTree>
@@ -18959,7 +19774,7 @@
 </p:sld>
 </file>
 
-<file path=ppt/slides/slide32.xml><?xml version="1.0" encoding="utf-8"?>
+<file path=ppt/slides/slide33.xml><?xml version="1.0" encoding="utf-8"?>
 <p:sld xmlns:a="http://schemas.openxmlformats.org/drawingml/2006/main" xmlns:r="http://schemas.openxmlformats.org/officeDocument/2006/relationships" xmlns:p="http://schemas.openxmlformats.org/presentationml/2006/main">
   <p:cSld>
     <p:spTree>
@@ -20900,7 +21715,7 @@
 </p:sld>
 </file>
 
-<file path=ppt/slides/slide33.xml><?xml version="1.0" encoding="utf-8"?>
+<file path=ppt/slides/slide34.xml><?xml version="1.0" encoding="utf-8"?>
 <p:sld xmlns:a="http://schemas.openxmlformats.org/drawingml/2006/main" xmlns:r="http://schemas.openxmlformats.org/officeDocument/2006/relationships" xmlns:p="http://schemas.openxmlformats.org/presentationml/2006/main">
   <p:cSld>
     <p:spTree>
@@ -22050,7 +22865,7 @@
 </p:sld>
 </file>
 
-<file path=ppt/slides/slide34.xml><?xml version="1.0" encoding="utf-8"?>
+<file path=ppt/slides/slide35.xml><?xml version="1.0" encoding="utf-8"?>
 <p:sld xmlns:a="http://schemas.openxmlformats.org/drawingml/2006/main" xmlns:r="http://schemas.openxmlformats.org/officeDocument/2006/relationships" xmlns:p="http://schemas.openxmlformats.org/presentationml/2006/main">
   <p:cSld>
     <p:spTree>
@@ -23395,7 +24210,7 @@
 </p:sld>
 </file>
 
-<file path=ppt/slides/slide35.xml><?xml version="1.0" encoding="utf-8"?>
+<file path=ppt/slides/slide36.xml><?xml version="1.0" encoding="utf-8"?>
 <p:sld xmlns:a="http://schemas.openxmlformats.org/drawingml/2006/main" xmlns:r="http://schemas.openxmlformats.org/officeDocument/2006/relationships" xmlns:p="http://schemas.openxmlformats.org/presentationml/2006/main">
   <p:cSld>
     <p:spTree>
@@ -24739,7 +25554,7 @@
 </p:sld>
 </file>
 
-<file path=ppt/slides/slide36.xml><?xml version="1.0" encoding="utf-8"?>
+<file path=ppt/slides/slide37.xml><?xml version="1.0" encoding="utf-8"?>
 <p:sld xmlns:a="http://schemas.openxmlformats.org/drawingml/2006/main" xmlns:r="http://schemas.openxmlformats.org/officeDocument/2006/relationships" xmlns:p="http://schemas.openxmlformats.org/presentationml/2006/main">
   <p:cSld>
     <p:spTree>
@@ -26584,8 +27399,8 @@
             </a:fontRef>
           </p:style>
         </p:cxnSp>
-        <mc:AlternateContent xmlns:mc="http://schemas.openxmlformats.org/markup-compatibility/2006">
-          <mc:Choice xmlns:a14="http://schemas.microsoft.com/office/drawing/2010/main" Requires="a14">
+        <mc:AlternateContent xmlns:mc="http://schemas.openxmlformats.org/markup-compatibility/2006" xmlns:a14="http://schemas.microsoft.com/office/drawing/2010/main">
+          <mc:Choice Requires="a14">
             <p:sp>
               <p:nvSpPr>
                 <p:cNvPr id="7" name="Rectangle 6">
@@ -26677,7 +27492,7 @@
               </p:txBody>
             </p:sp>
           </mc:Choice>
-          <mc:Fallback>
+          <mc:Fallback xmlns="">
             <p:sp>
               <p:nvSpPr>
                 <p:cNvPr id="7" name="Rectangle 6">
@@ -27307,7 +28122,7 @@
 </p:sld>
 </file>
 
-<file path=ppt/slides/slide37.xml><?xml version="1.0" encoding="utf-8"?>
+<file path=ppt/slides/slide38.xml><?xml version="1.0" encoding="utf-8"?>
 <p:sld xmlns:a="http://schemas.openxmlformats.org/drawingml/2006/main" xmlns:r="http://schemas.openxmlformats.org/officeDocument/2006/relationships" xmlns:p="http://schemas.openxmlformats.org/presentationml/2006/main">
   <p:cSld>
     <p:spTree>
@@ -29067,7 +29882,7 @@
 </p:sld>
 </file>
 
-<file path=ppt/slides/slide38.xml><?xml version="1.0" encoding="utf-8"?>
+<file path=ppt/slides/slide39.xml><?xml version="1.0" encoding="utf-8"?>
 <p:sld xmlns:a="http://schemas.openxmlformats.org/drawingml/2006/main" xmlns:r="http://schemas.openxmlformats.org/officeDocument/2006/relationships" xmlns:p="http://schemas.openxmlformats.org/presentationml/2006/main">
   <p:cSld>
     <p:spTree>
@@ -32493,7 +33308,462 @@
 </p:sld>
 </file>
 
-<file path=ppt/slides/slide39.xml><?xml version="1.0" encoding="utf-8"?>
+<file path=ppt/slides/slide4.xml><?xml version="1.0" encoding="utf-8"?>
+<p:sld xmlns:a="http://schemas.openxmlformats.org/drawingml/2006/main" xmlns:r="http://schemas.openxmlformats.org/officeDocument/2006/relationships" xmlns:p="http://schemas.openxmlformats.org/presentationml/2006/main">
+  <p:cSld>
+    <p:spTree>
+      <p:nvGrpSpPr>
+        <p:cNvPr id="1" name=""/>
+        <p:cNvGrpSpPr/>
+        <p:nvPr/>
+      </p:nvGrpSpPr>
+      <p:grpSpPr>
+        <a:xfrm>
+          <a:off x="0" y="0"/>
+          <a:ext cx="0" cy="0"/>
+          <a:chOff x="0" y="0"/>
+          <a:chExt cx="0" cy="0"/>
+        </a:xfrm>
+      </p:grpSpPr>
+      <p:sp>
+        <p:nvSpPr>
+          <p:cNvPr id="2" name="Título 1">
+            <a:extLst>
+              <a:ext uri="{FF2B5EF4-FFF2-40B4-BE49-F238E27FC236}">
+                <a16:creationId xmlns:a16="http://schemas.microsoft.com/office/drawing/2014/main" id="{B4A549E3-7E5B-04E3-09ED-A7C3171C6D5F}"/>
+              </a:ext>
+            </a:extLst>
+          </p:cNvPr>
+          <p:cNvSpPr>
+            <a:spLocks noGrp="1"/>
+          </p:cNvSpPr>
+          <p:nvPr>
+            <p:ph type="title"/>
+          </p:nvPr>
+        </p:nvSpPr>
+        <p:spPr/>
+        <p:txBody>
+          <a:bodyPr/>
+          <a:lstStyle/>
+          <a:p>
+            <a:r>
+              <a:rPr lang="pt-BR" dirty="0"/>
+              <a:t>Escolha do passo de aprendizagem</a:t>
+            </a:r>
+          </a:p>
+        </p:txBody>
+      </p:sp>
+      <mc:AlternateContent xmlns:mc="http://schemas.openxmlformats.org/markup-compatibility/2006">
+        <mc:Choice xmlns:a14="http://schemas.microsoft.com/office/drawing/2010/main" Requires="a14">
+          <p:sp>
+            <p:nvSpPr>
+              <p:cNvPr id="3" name="Espaço Reservado para Conteúdo 2">
+                <a:extLst>
+                  <a:ext uri="{FF2B5EF4-FFF2-40B4-BE49-F238E27FC236}">
+                    <a16:creationId xmlns:a16="http://schemas.microsoft.com/office/drawing/2014/main" id="{3323DEB1-E32D-5111-52A9-A936D5B18776}"/>
+                  </a:ext>
+                </a:extLst>
+              </p:cNvPr>
+              <p:cNvSpPr>
+                <a:spLocks noGrp="1"/>
+              </p:cNvSpPr>
+              <p:nvPr>
+                <p:ph idx="1"/>
+              </p:nvPr>
+            </p:nvSpPr>
+            <p:spPr>
+              <a:xfrm>
+                <a:off x="5533534" y="1825624"/>
+                <a:ext cx="6466789" cy="5032375"/>
+              </a:xfrm>
+            </p:spPr>
+            <p:txBody>
+              <a:bodyPr>
+                <a:normAutofit/>
+              </a:bodyPr>
+              <a:lstStyle/>
+              <a:p>
+                <a:r>
+                  <a:rPr lang="pt-BR" dirty="0"/>
+                  <a:t>Portanto, para </a:t>
+                </a:r>
+                <a:r>
+                  <a:rPr lang="pt-BR" b="1" i="1" dirty="0">
+                    <a:solidFill>
+                      <a:srgbClr val="00B050"/>
+                    </a:solidFill>
+                  </a:rPr>
+                  <a:t>andarmos na direção oposta à apontada pelo vetor gradiente</a:t>
+                </a:r>
+                <a:r>
+                  <a:rPr lang="pt-BR" dirty="0"/>
+                  <a:t>, usamos uma </a:t>
+                </a:r>
+                <a:r>
+                  <a:rPr lang="pt-BR" b="1" i="1" dirty="0">
+                    <a:solidFill>
+                      <a:srgbClr val="7030A0"/>
+                    </a:solidFill>
+                  </a:rPr>
+                  <a:t>porcentagem</a:t>
+                </a:r>
+                <a:r>
+                  <a:rPr lang="pt-BR" dirty="0"/>
+                  <a:t> do seu valor.</a:t>
+                </a:r>
+              </a:p>
+              <a:p>
+                <a:r>
+                  <a:rPr lang="pt-BR" dirty="0"/>
+                  <a:t>Essa porcentagem é dada pelo </a:t>
+                </a:r>
+                <a:r>
+                  <a:rPr lang="pt-BR" b="1" i="1" dirty="0">
+                    <a:solidFill>
+                      <a:srgbClr val="00B050"/>
+                    </a:solidFill>
+                  </a:rPr>
+                  <a:t>passo de aprendizagem</a:t>
+                </a:r>
+                <a:r>
+                  <a:rPr lang="pt-BR" dirty="0"/>
+                  <a:t>, </a:t>
+                </a:r>
+                <a14:m>
+                  <m:oMath xmlns:m="http://schemas.openxmlformats.org/officeDocument/2006/math">
+                    <m:r>
+                      <a:rPr lang="pt-BR" i="1" smtClean="0">
+                        <a:latin typeface="Cambria Math" panose="02040503050406030204" pitchFamily="18" charset="0"/>
+                        <a:ea typeface="Cambria Math" panose="02040503050406030204" pitchFamily="18" charset="0"/>
+                      </a:rPr>
+                      <m:t>𝛼</m:t>
+                    </m:r>
+                  </m:oMath>
+                </a14:m>
+                <a:r>
+                  <a:rPr lang="pt-BR" dirty="0"/>
+                  <a:t>, que é sempre um valor maior do que zero.</a:t>
+                </a:r>
+              </a:p>
+              <a:p>
+                <a:endParaRPr lang="pt-BR" dirty="0"/>
+              </a:p>
+            </p:txBody>
+          </p:sp>
+        </mc:Choice>
+        <mc:Fallback>
+          <p:sp>
+            <p:nvSpPr>
+              <p:cNvPr id="3" name="Espaço Reservado para Conteúdo 2">
+                <a:extLst>
+                  <a:ext uri="{FF2B5EF4-FFF2-40B4-BE49-F238E27FC236}">
+                    <a16:creationId xmlns:a16="http://schemas.microsoft.com/office/drawing/2014/main" id="{3323DEB1-E32D-5111-52A9-A936D5B18776}"/>
+                  </a:ext>
+                </a:extLst>
+              </p:cNvPr>
+              <p:cNvSpPr>
+                <a:spLocks noGrp="1" noRot="1" noChangeAspect="1" noMove="1" noResize="1" noEditPoints="1" noAdjustHandles="1" noChangeArrowheads="1" noChangeShapeType="1" noTextEdit="1"/>
+              </p:cNvSpPr>
+              <p:nvPr>
+                <p:ph idx="1"/>
+              </p:nvPr>
+            </p:nvSpPr>
+            <p:spPr>
+              <a:xfrm>
+                <a:off x="5533534" y="1825624"/>
+                <a:ext cx="6466789" cy="5032375"/>
+              </a:xfrm>
+              <a:blipFill>
+                <a:blip r:embed="rId2"/>
+                <a:stretch>
+                  <a:fillRect l="-1697" t="-1937" r="-2262"/>
+                </a:stretch>
+              </a:blipFill>
+            </p:spPr>
+            <p:txBody>
+              <a:bodyPr/>
+              <a:lstStyle/>
+              <a:p>
+                <a:r>
+                  <a:rPr lang="en-US">
+                    <a:noFill/>
+                  </a:rPr>
+                  <a:t> </a:t>
+                </a:r>
+              </a:p>
+            </p:txBody>
+          </p:sp>
+        </mc:Fallback>
+      </mc:AlternateContent>
+      <mc:AlternateContent xmlns:mc="http://schemas.openxmlformats.org/markup-compatibility/2006" xmlns:a14="http://schemas.microsoft.com/office/drawing/2010/main">
+        <mc:Choice Requires="a14">
+          <p:sp>
+            <p:nvSpPr>
+              <p:cNvPr id="6" name="CaixaDeTexto 5">
+                <a:extLst>
+                  <a:ext uri="{FF2B5EF4-FFF2-40B4-BE49-F238E27FC236}">
+                    <a16:creationId xmlns:a16="http://schemas.microsoft.com/office/drawing/2014/main" id="{C0979B72-FA06-3341-0C8C-22E5606766C2}"/>
+                  </a:ext>
+                </a:extLst>
+              </p:cNvPr>
+              <p:cNvSpPr txBox="1"/>
+              <p:nvPr/>
+            </p:nvSpPr>
+            <p:spPr>
+              <a:xfrm>
+                <a:off x="1074655" y="3428804"/>
+                <a:ext cx="3777792" cy="913007"/>
+              </a:xfrm>
+              <a:prstGeom prst="rect">
+                <a:avLst/>
+              </a:prstGeom>
+              <a:noFill/>
+            </p:spPr>
+            <p:txBody>
+              <a:bodyPr wrap="square">
+                <a:spAutoFit/>
+              </a:bodyPr>
+              <a:lstStyle/>
+              <a:p>
+                <a:pPr/>
+                <a14:m>
+                  <m:oMathPara xmlns:m="http://schemas.openxmlformats.org/officeDocument/2006/math">
+                    <m:oMathParaPr>
+                      <m:jc m:val="centerGroup"/>
+                    </m:oMathParaPr>
+                    <m:oMath xmlns:m="http://schemas.openxmlformats.org/officeDocument/2006/math">
+                      <m:r>
+                        <a:rPr lang="pt-BR" sz="2800" b="1" i="1" smtClean="0">
+                          <a:solidFill>
+                            <a:schemeClr val="tx1"/>
+                          </a:solidFill>
+                          <a:latin typeface="Cambria Math" panose="02040503050406030204" pitchFamily="18" charset="0"/>
+                        </a:rPr>
+                        <m:t>𝒂</m:t>
+                      </m:r>
+                      <m:r>
+                        <a:rPr lang="en-US" sz="2800" b="1" i="1">
+                          <a:solidFill>
+                            <a:schemeClr val="tx1"/>
+                          </a:solidFill>
+                          <a:latin typeface="Cambria Math" panose="02040503050406030204" pitchFamily="18" charset="0"/>
+                          <a:ea typeface="Cambria Math" panose="02040503050406030204" pitchFamily="18" charset="0"/>
+                        </a:rPr>
+                        <m:t>←</m:t>
+                      </m:r>
+                      <m:r>
+                        <a:rPr lang="pt-BR" sz="2800" b="1" i="1">
+                          <a:solidFill>
+                            <a:schemeClr val="tx1"/>
+                          </a:solidFill>
+                          <a:latin typeface="Cambria Math" panose="02040503050406030204" pitchFamily="18" charset="0"/>
+                        </a:rPr>
+                        <m:t>𝒂</m:t>
+                      </m:r>
+                      <m:r>
+                        <a:rPr lang="pt-BR" sz="2800" i="1">
+                          <a:solidFill>
+                            <a:schemeClr val="tx1"/>
+                          </a:solidFill>
+                          <a:latin typeface="Cambria Math" panose="02040503050406030204" pitchFamily="18" charset="0"/>
+                          <a:ea typeface="Cambria Math" panose="02040503050406030204" pitchFamily="18" charset="0"/>
+                        </a:rPr>
+                        <m:t>−</m:t>
+                      </m:r>
+                      <m:r>
+                        <a:rPr lang="pt-BR" sz="2800" i="1">
+                          <a:solidFill>
+                            <a:schemeClr val="tx1"/>
+                          </a:solidFill>
+                          <a:latin typeface="Cambria Math" panose="02040503050406030204" pitchFamily="18" charset="0"/>
+                          <a:ea typeface="Cambria Math" panose="02040503050406030204" pitchFamily="18" charset="0"/>
+                        </a:rPr>
+                        <m:t>𝛼</m:t>
+                      </m:r>
+                      <m:f>
+                        <m:fPr>
+                          <m:ctrlPr>
+                            <a:rPr lang="pt-BR" sz="2800" i="1">
+                              <a:solidFill>
+                                <a:schemeClr val="tx1"/>
+                              </a:solidFill>
+                              <a:latin typeface="Cambria Math" panose="02040503050406030204" pitchFamily="18" charset="0"/>
+                              <a:ea typeface="Cambria Math" panose="02040503050406030204" pitchFamily="18" charset="0"/>
+                            </a:rPr>
+                          </m:ctrlPr>
+                        </m:fPr>
+                        <m:num>
+                          <m:r>
+                            <a:rPr lang="pt-BR" sz="2800" i="1">
+                              <a:solidFill>
+                                <a:schemeClr val="tx1"/>
+                              </a:solidFill>
+                              <a:latin typeface="Cambria Math" panose="02040503050406030204" pitchFamily="18" charset="0"/>
+                              <a:ea typeface="Cambria Math" panose="02040503050406030204" pitchFamily="18" charset="0"/>
+                            </a:rPr>
+                            <m:t>𝜕</m:t>
+                          </m:r>
+                          <m:sSub>
+                            <m:sSubPr>
+                              <m:ctrlPr>
+                                <a:rPr lang="pt-BR" sz="2800" i="1">
+                                  <a:solidFill>
+                                    <a:schemeClr val="tx1"/>
+                                  </a:solidFill>
+                                  <a:latin typeface="Cambria Math" panose="02040503050406030204" pitchFamily="18" charset="0"/>
+                                  <a:ea typeface="Cambria Math" panose="02040503050406030204" pitchFamily="18" charset="0"/>
+                                </a:rPr>
+                              </m:ctrlPr>
+                            </m:sSubPr>
+                            <m:e>
+                              <m:r>
+                                <a:rPr lang="pt-BR" sz="2800" i="1">
+                                  <a:solidFill>
+                                    <a:schemeClr val="tx1"/>
+                                  </a:solidFill>
+                                  <a:latin typeface="Cambria Math" panose="02040503050406030204" pitchFamily="18" charset="0"/>
+                                  <a:ea typeface="Cambria Math" panose="02040503050406030204" pitchFamily="18" charset="0"/>
+                                </a:rPr>
+                                <m:t>𝐽</m:t>
+                              </m:r>
+                            </m:e>
+                            <m:sub>
+                              <m:r>
+                                <a:rPr lang="pt-BR" sz="2800" i="1">
+                                  <a:solidFill>
+                                    <a:schemeClr val="tx1"/>
+                                  </a:solidFill>
+                                  <a:latin typeface="Cambria Math" panose="02040503050406030204" pitchFamily="18" charset="0"/>
+                                  <a:ea typeface="Cambria Math" panose="02040503050406030204" pitchFamily="18" charset="0"/>
+                                </a:rPr>
+                                <m:t>𝑒</m:t>
+                              </m:r>
+                            </m:sub>
+                          </m:sSub>
+                          <m:r>
+                            <a:rPr lang="pt-BR" sz="2800" i="1">
+                              <a:solidFill>
+                                <a:schemeClr val="tx1"/>
+                              </a:solidFill>
+                              <a:latin typeface="Cambria Math" panose="02040503050406030204" pitchFamily="18" charset="0"/>
+                              <a:ea typeface="Cambria Math" panose="02040503050406030204" pitchFamily="18" charset="0"/>
+                            </a:rPr>
+                            <m:t>(</m:t>
+                          </m:r>
+                          <m:r>
+                            <a:rPr lang="pt-BR" sz="2800" b="1" i="1">
+                              <a:solidFill>
+                                <a:schemeClr val="tx1"/>
+                              </a:solidFill>
+                              <a:latin typeface="Cambria Math" panose="02040503050406030204" pitchFamily="18" charset="0"/>
+                              <a:ea typeface="Cambria Math" panose="02040503050406030204" pitchFamily="18" charset="0"/>
+                            </a:rPr>
+                            <m:t>𝒂</m:t>
+                          </m:r>
+                          <m:r>
+                            <a:rPr lang="pt-BR" sz="2800" i="1">
+                              <a:solidFill>
+                                <a:schemeClr val="tx1"/>
+                              </a:solidFill>
+                              <a:latin typeface="Cambria Math" panose="02040503050406030204" pitchFamily="18" charset="0"/>
+                              <a:ea typeface="Cambria Math" panose="02040503050406030204" pitchFamily="18" charset="0"/>
+                            </a:rPr>
+                            <m:t>)</m:t>
+                          </m:r>
+                        </m:num>
+                        <m:den>
+                          <m:r>
+                            <a:rPr lang="pt-BR" sz="2800" i="1">
+                              <a:solidFill>
+                                <a:schemeClr val="tx1"/>
+                              </a:solidFill>
+                              <a:latin typeface="Cambria Math" panose="02040503050406030204" pitchFamily="18" charset="0"/>
+                              <a:ea typeface="Cambria Math" panose="02040503050406030204" pitchFamily="18" charset="0"/>
+                            </a:rPr>
+                            <m:t>𝜕</m:t>
+                          </m:r>
+                          <m:r>
+                            <a:rPr lang="pt-BR" sz="2800" b="1" i="1">
+                              <a:solidFill>
+                                <a:schemeClr val="tx1"/>
+                              </a:solidFill>
+                              <a:latin typeface="Cambria Math" panose="02040503050406030204" pitchFamily="18" charset="0"/>
+                            </a:rPr>
+                            <m:t>𝒂</m:t>
+                          </m:r>
+                        </m:den>
+                      </m:f>
+                    </m:oMath>
+                  </m:oMathPara>
+                </a14:m>
+                <a:endParaRPr lang="pt-BR" sz="2800" dirty="0">
+                  <a:solidFill>
+                    <a:schemeClr val="tx1"/>
+                  </a:solidFill>
+                </a:endParaRPr>
+              </a:p>
+            </p:txBody>
+          </p:sp>
+        </mc:Choice>
+        <mc:Fallback xmlns="">
+          <p:sp>
+            <p:nvSpPr>
+              <p:cNvPr id="6" name="CaixaDeTexto 5">
+                <a:extLst>
+                  <a:ext uri="{FF2B5EF4-FFF2-40B4-BE49-F238E27FC236}">
+                    <a16:creationId xmlns:a16="http://schemas.microsoft.com/office/drawing/2014/main" id="{C0979B72-FA06-3341-0C8C-22E5606766C2}"/>
+                  </a:ext>
+                </a:extLst>
+              </p:cNvPr>
+              <p:cNvSpPr txBox="1">
+                <a:spLocks noRot="1" noChangeAspect="1" noMove="1" noResize="1" noEditPoints="1" noAdjustHandles="1" noChangeArrowheads="1" noChangeShapeType="1" noTextEdit="1"/>
+              </p:cNvSpPr>
+              <p:nvPr/>
+            </p:nvSpPr>
+            <p:spPr>
+              <a:xfrm>
+                <a:off x="1074655" y="3428804"/>
+                <a:ext cx="3777792" cy="913007"/>
+              </a:xfrm>
+              <a:prstGeom prst="rect">
+                <a:avLst/>
+              </a:prstGeom>
+              <a:blipFill>
+                <a:blip r:embed="rId3"/>
+                <a:stretch>
+                  <a:fillRect/>
+                </a:stretch>
+              </a:blipFill>
+            </p:spPr>
+            <p:txBody>
+              <a:bodyPr/>
+              <a:lstStyle/>
+              <a:p>
+                <a:r>
+                  <a:rPr lang="pt-BR">
+                    <a:noFill/>
+                  </a:rPr>
+                  <a:t> </a:t>
+                </a:r>
+              </a:p>
+            </p:txBody>
+          </p:sp>
+        </mc:Fallback>
+      </mc:AlternateContent>
+    </p:spTree>
+    <p:extLst>
+      <p:ext uri="{BB962C8B-B14F-4D97-AF65-F5344CB8AC3E}">
+        <p14:creationId xmlns:p14="http://schemas.microsoft.com/office/powerpoint/2010/main" val="2681891839"/>
+      </p:ext>
+    </p:extLst>
+  </p:cSld>
+  <p:clrMapOvr>
+    <a:masterClrMapping/>
+  </p:clrMapOvr>
+</p:sld>
+</file>
+
+<file path=ppt/slides/slide40.xml><?xml version="1.0" encoding="utf-8"?>
 <p:sld xmlns:a="http://schemas.openxmlformats.org/drawingml/2006/main" xmlns:r="http://schemas.openxmlformats.org/officeDocument/2006/relationships" xmlns:p="http://schemas.openxmlformats.org/presentationml/2006/main">
   <p:cSld>
     <p:spTree>
@@ -34568,462 +35838,7 @@
 </p:sld>
 </file>
 
-<file path=ppt/slides/slide4.xml><?xml version="1.0" encoding="utf-8"?>
-<p:sld xmlns:a="http://schemas.openxmlformats.org/drawingml/2006/main" xmlns:r="http://schemas.openxmlformats.org/officeDocument/2006/relationships" xmlns:p="http://schemas.openxmlformats.org/presentationml/2006/main">
-  <p:cSld>
-    <p:spTree>
-      <p:nvGrpSpPr>
-        <p:cNvPr id="1" name=""/>
-        <p:cNvGrpSpPr/>
-        <p:nvPr/>
-      </p:nvGrpSpPr>
-      <p:grpSpPr>
-        <a:xfrm>
-          <a:off x="0" y="0"/>
-          <a:ext cx="0" cy="0"/>
-          <a:chOff x="0" y="0"/>
-          <a:chExt cx="0" cy="0"/>
-        </a:xfrm>
-      </p:grpSpPr>
-      <p:sp>
-        <p:nvSpPr>
-          <p:cNvPr id="2" name="Título 1">
-            <a:extLst>
-              <a:ext uri="{FF2B5EF4-FFF2-40B4-BE49-F238E27FC236}">
-                <a16:creationId xmlns:a16="http://schemas.microsoft.com/office/drawing/2014/main" id="{B4A549E3-7E5B-04E3-09ED-A7C3171C6D5F}"/>
-              </a:ext>
-            </a:extLst>
-          </p:cNvPr>
-          <p:cNvSpPr>
-            <a:spLocks noGrp="1"/>
-          </p:cNvSpPr>
-          <p:nvPr>
-            <p:ph type="title"/>
-          </p:nvPr>
-        </p:nvSpPr>
-        <p:spPr/>
-        <p:txBody>
-          <a:bodyPr/>
-          <a:lstStyle/>
-          <a:p>
-            <a:r>
-              <a:rPr lang="pt-BR" dirty="0"/>
-              <a:t>Escolha do passo de aprendizagem</a:t>
-            </a:r>
-          </a:p>
-        </p:txBody>
-      </p:sp>
-      <mc:AlternateContent xmlns:mc="http://schemas.openxmlformats.org/markup-compatibility/2006" xmlns:a14="http://schemas.microsoft.com/office/drawing/2010/main">
-        <mc:Choice Requires="a14">
-          <p:sp>
-            <p:nvSpPr>
-              <p:cNvPr id="3" name="Espaço Reservado para Conteúdo 2">
-                <a:extLst>
-                  <a:ext uri="{FF2B5EF4-FFF2-40B4-BE49-F238E27FC236}">
-                    <a16:creationId xmlns:a16="http://schemas.microsoft.com/office/drawing/2014/main" id="{3323DEB1-E32D-5111-52A9-A936D5B18776}"/>
-                  </a:ext>
-                </a:extLst>
-              </p:cNvPr>
-              <p:cNvSpPr>
-                <a:spLocks noGrp="1"/>
-              </p:cNvSpPr>
-              <p:nvPr>
-                <p:ph idx="1"/>
-              </p:nvPr>
-            </p:nvSpPr>
-            <p:spPr>
-              <a:xfrm>
-                <a:off x="5533534" y="1825624"/>
-                <a:ext cx="6466789" cy="5032375"/>
-              </a:xfrm>
-            </p:spPr>
-            <p:txBody>
-              <a:bodyPr>
-                <a:normAutofit/>
-              </a:bodyPr>
-              <a:lstStyle/>
-              <a:p>
-                <a:r>
-                  <a:rPr lang="pt-BR" dirty="0"/>
-                  <a:t>Portanto, para </a:t>
-                </a:r>
-                <a:r>
-                  <a:rPr lang="pt-BR" b="1" i="1" dirty="0">
-                    <a:solidFill>
-                      <a:srgbClr val="00B050"/>
-                    </a:solidFill>
-                  </a:rPr>
-                  <a:t>andarmos na direção apontada pelo vetor gradiente</a:t>
-                </a:r>
-                <a:r>
-                  <a:rPr lang="pt-BR" dirty="0"/>
-                  <a:t>, usamos uma </a:t>
-                </a:r>
-                <a:r>
-                  <a:rPr lang="pt-BR" b="1" i="1" dirty="0">
-                    <a:solidFill>
-                      <a:srgbClr val="7030A0"/>
-                    </a:solidFill>
-                  </a:rPr>
-                  <a:t>porcentagem</a:t>
-                </a:r>
-                <a:r>
-                  <a:rPr lang="pt-BR" dirty="0"/>
-                  <a:t> do seu valor.</a:t>
-                </a:r>
-              </a:p>
-              <a:p>
-                <a:r>
-                  <a:rPr lang="pt-BR" dirty="0"/>
-                  <a:t>Essa porcentagem é dada pelo </a:t>
-                </a:r>
-                <a:r>
-                  <a:rPr lang="pt-BR" b="1" i="1" dirty="0">
-                    <a:solidFill>
-                      <a:srgbClr val="00B050"/>
-                    </a:solidFill>
-                  </a:rPr>
-                  <a:t>passo de aprendizagem</a:t>
-                </a:r>
-                <a:r>
-                  <a:rPr lang="pt-BR" dirty="0"/>
-                  <a:t>, </a:t>
-                </a:r>
-                <a14:m>
-                  <m:oMath xmlns:m="http://schemas.openxmlformats.org/officeDocument/2006/math">
-                    <m:r>
-                      <a:rPr lang="pt-BR" i="1" smtClean="0">
-                        <a:latin typeface="Cambria Math" panose="02040503050406030204" pitchFamily="18" charset="0"/>
-                        <a:ea typeface="Cambria Math" panose="02040503050406030204" pitchFamily="18" charset="0"/>
-                      </a:rPr>
-                      <m:t>𝛼</m:t>
-                    </m:r>
-                  </m:oMath>
-                </a14:m>
-                <a:r>
-                  <a:rPr lang="pt-BR" dirty="0"/>
-                  <a:t>, que é sempre um valor maior do que zero.</a:t>
-                </a:r>
-              </a:p>
-              <a:p>
-                <a:endParaRPr lang="pt-BR" dirty="0"/>
-              </a:p>
-            </p:txBody>
-          </p:sp>
-        </mc:Choice>
-        <mc:Fallback xmlns="">
-          <p:sp>
-            <p:nvSpPr>
-              <p:cNvPr id="3" name="Espaço Reservado para Conteúdo 2">
-                <a:extLst>
-                  <a:ext uri="{FF2B5EF4-FFF2-40B4-BE49-F238E27FC236}">
-                    <a16:creationId xmlns:a16="http://schemas.microsoft.com/office/drawing/2014/main" id="{3323DEB1-E32D-5111-52A9-A936D5B18776}"/>
-                  </a:ext>
-                </a:extLst>
-              </p:cNvPr>
-              <p:cNvSpPr>
-                <a:spLocks noGrp="1" noRot="1" noChangeAspect="1" noMove="1" noResize="1" noEditPoints="1" noAdjustHandles="1" noChangeArrowheads="1" noChangeShapeType="1" noTextEdit="1"/>
-              </p:cNvSpPr>
-              <p:nvPr>
-                <p:ph idx="1"/>
-              </p:nvPr>
-            </p:nvSpPr>
-            <p:spPr>
-              <a:xfrm>
-                <a:off x="5533534" y="1825624"/>
-                <a:ext cx="6466789" cy="5032375"/>
-              </a:xfrm>
-              <a:blipFill>
-                <a:blip r:embed="rId2"/>
-                <a:stretch>
-                  <a:fillRect l="-1697" t="-1937" r="-2262"/>
-                </a:stretch>
-              </a:blipFill>
-            </p:spPr>
-            <p:txBody>
-              <a:bodyPr/>
-              <a:lstStyle/>
-              <a:p>
-                <a:r>
-                  <a:rPr lang="pt-BR">
-                    <a:noFill/>
-                  </a:rPr>
-                  <a:t> </a:t>
-                </a:r>
-              </a:p>
-            </p:txBody>
-          </p:sp>
-        </mc:Fallback>
-      </mc:AlternateContent>
-      <mc:AlternateContent xmlns:mc="http://schemas.openxmlformats.org/markup-compatibility/2006" xmlns:a14="http://schemas.microsoft.com/office/drawing/2010/main">
-        <mc:Choice Requires="a14">
-          <p:sp>
-            <p:nvSpPr>
-              <p:cNvPr id="6" name="CaixaDeTexto 5">
-                <a:extLst>
-                  <a:ext uri="{FF2B5EF4-FFF2-40B4-BE49-F238E27FC236}">
-                    <a16:creationId xmlns:a16="http://schemas.microsoft.com/office/drawing/2014/main" id="{C0979B72-FA06-3341-0C8C-22E5606766C2}"/>
-                  </a:ext>
-                </a:extLst>
-              </p:cNvPr>
-              <p:cNvSpPr txBox="1"/>
-              <p:nvPr/>
-            </p:nvSpPr>
-            <p:spPr>
-              <a:xfrm>
-                <a:off x="1074655" y="3428804"/>
-                <a:ext cx="3777792" cy="913007"/>
-              </a:xfrm>
-              <a:prstGeom prst="rect">
-                <a:avLst/>
-              </a:prstGeom>
-              <a:noFill/>
-            </p:spPr>
-            <p:txBody>
-              <a:bodyPr wrap="square">
-                <a:spAutoFit/>
-              </a:bodyPr>
-              <a:lstStyle/>
-              <a:p>
-                <a:pPr/>
-                <a14:m>
-                  <m:oMathPara xmlns:m="http://schemas.openxmlformats.org/officeDocument/2006/math">
-                    <m:oMathParaPr>
-                      <m:jc m:val="centerGroup"/>
-                    </m:oMathParaPr>
-                    <m:oMath xmlns:m="http://schemas.openxmlformats.org/officeDocument/2006/math">
-                      <m:r>
-                        <a:rPr lang="pt-BR" sz="2800" b="1" i="1" smtClean="0">
-                          <a:solidFill>
-                            <a:schemeClr val="tx1"/>
-                          </a:solidFill>
-                          <a:latin typeface="Cambria Math" panose="02040503050406030204" pitchFamily="18" charset="0"/>
-                        </a:rPr>
-                        <m:t>𝒂</m:t>
-                      </m:r>
-                      <m:r>
-                        <a:rPr lang="en-US" sz="2800" b="1" i="1">
-                          <a:solidFill>
-                            <a:schemeClr val="tx1"/>
-                          </a:solidFill>
-                          <a:latin typeface="Cambria Math" panose="02040503050406030204" pitchFamily="18" charset="0"/>
-                          <a:ea typeface="Cambria Math" panose="02040503050406030204" pitchFamily="18" charset="0"/>
-                        </a:rPr>
-                        <m:t>←</m:t>
-                      </m:r>
-                      <m:r>
-                        <a:rPr lang="pt-BR" sz="2800" b="1" i="1">
-                          <a:solidFill>
-                            <a:schemeClr val="tx1"/>
-                          </a:solidFill>
-                          <a:latin typeface="Cambria Math" panose="02040503050406030204" pitchFamily="18" charset="0"/>
-                        </a:rPr>
-                        <m:t>𝒂</m:t>
-                      </m:r>
-                      <m:r>
-                        <a:rPr lang="pt-BR" sz="2800" i="1">
-                          <a:solidFill>
-                            <a:schemeClr val="tx1"/>
-                          </a:solidFill>
-                          <a:latin typeface="Cambria Math" panose="02040503050406030204" pitchFamily="18" charset="0"/>
-                          <a:ea typeface="Cambria Math" panose="02040503050406030204" pitchFamily="18" charset="0"/>
-                        </a:rPr>
-                        <m:t>−</m:t>
-                      </m:r>
-                      <m:r>
-                        <a:rPr lang="pt-BR" sz="2800" i="1">
-                          <a:solidFill>
-                            <a:schemeClr val="tx1"/>
-                          </a:solidFill>
-                          <a:latin typeface="Cambria Math" panose="02040503050406030204" pitchFamily="18" charset="0"/>
-                          <a:ea typeface="Cambria Math" panose="02040503050406030204" pitchFamily="18" charset="0"/>
-                        </a:rPr>
-                        <m:t>𝛼</m:t>
-                      </m:r>
-                      <m:f>
-                        <m:fPr>
-                          <m:ctrlPr>
-                            <a:rPr lang="pt-BR" sz="2800" i="1">
-                              <a:solidFill>
-                                <a:schemeClr val="tx1"/>
-                              </a:solidFill>
-                              <a:latin typeface="Cambria Math" panose="02040503050406030204" pitchFamily="18" charset="0"/>
-                              <a:ea typeface="Cambria Math" panose="02040503050406030204" pitchFamily="18" charset="0"/>
-                            </a:rPr>
-                          </m:ctrlPr>
-                        </m:fPr>
-                        <m:num>
-                          <m:r>
-                            <a:rPr lang="pt-BR" sz="2800" i="1">
-                              <a:solidFill>
-                                <a:schemeClr val="tx1"/>
-                              </a:solidFill>
-                              <a:latin typeface="Cambria Math" panose="02040503050406030204" pitchFamily="18" charset="0"/>
-                              <a:ea typeface="Cambria Math" panose="02040503050406030204" pitchFamily="18" charset="0"/>
-                            </a:rPr>
-                            <m:t>𝜕</m:t>
-                          </m:r>
-                          <m:sSub>
-                            <m:sSubPr>
-                              <m:ctrlPr>
-                                <a:rPr lang="pt-BR" sz="2800" i="1">
-                                  <a:solidFill>
-                                    <a:schemeClr val="tx1"/>
-                                  </a:solidFill>
-                                  <a:latin typeface="Cambria Math" panose="02040503050406030204" pitchFamily="18" charset="0"/>
-                                  <a:ea typeface="Cambria Math" panose="02040503050406030204" pitchFamily="18" charset="0"/>
-                                </a:rPr>
-                              </m:ctrlPr>
-                            </m:sSubPr>
-                            <m:e>
-                              <m:r>
-                                <a:rPr lang="pt-BR" sz="2800" i="1">
-                                  <a:solidFill>
-                                    <a:schemeClr val="tx1"/>
-                                  </a:solidFill>
-                                  <a:latin typeface="Cambria Math" panose="02040503050406030204" pitchFamily="18" charset="0"/>
-                                  <a:ea typeface="Cambria Math" panose="02040503050406030204" pitchFamily="18" charset="0"/>
-                                </a:rPr>
-                                <m:t>𝐽</m:t>
-                              </m:r>
-                            </m:e>
-                            <m:sub>
-                              <m:r>
-                                <a:rPr lang="pt-BR" sz="2800" i="1">
-                                  <a:solidFill>
-                                    <a:schemeClr val="tx1"/>
-                                  </a:solidFill>
-                                  <a:latin typeface="Cambria Math" panose="02040503050406030204" pitchFamily="18" charset="0"/>
-                                  <a:ea typeface="Cambria Math" panose="02040503050406030204" pitchFamily="18" charset="0"/>
-                                </a:rPr>
-                                <m:t>𝑒</m:t>
-                              </m:r>
-                            </m:sub>
-                          </m:sSub>
-                          <m:r>
-                            <a:rPr lang="pt-BR" sz="2800" i="1">
-                              <a:solidFill>
-                                <a:schemeClr val="tx1"/>
-                              </a:solidFill>
-                              <a:latin typeface="Cambria Math" panose="02040503050406030204" pitchFamily="18" charset="0"/>
-                              <a:ea typeface="Cambria Math" panose="02040503050406030204" pitchFamily="18" charset="0"/>
-                            </a:rPr>
-                            <m:t>(</m:t>
-                          </m:r>
-                          <m:r>
-                            <a:rPr lang="pt-BR" sz="2800" b="1" i="1">
-                              <a:solidFill>
-                                <a:schemeClr val="tx1"/>
-                              </a:solidFill>
-                              <a:latin typeface="Cambria Math" panose="02040503050406030204" pitchFamily="18" charset="0"/>
-                              <a:ea typeface="Cambria Math" panose="02040503050406030204" pitchFamily="18" charset="0"/>
-                            </a:rPr>
-                            <m:t>𝒂</m:t>
-                          </m:r>
-                          <m:r>
-                            <a:rPr lang="pt-BR" sz="2800" i="1">
-                              <a:solidFill>
-                                <a:schemeClr val="tx1"/>
-                              </a:solidFill>
-                              <a:latin typeface="Cambria Math" panose="02040503050406030204" pitchFamily="18" charset="0"/>
-                              <a:ea typeface="Cambria Math" panose="02040503050406030204" pitchFamily="18" charset="0"/>
-                            </a:rPr>
-                            <m:t>)</m:t>
-                          </m:r>
-                        </m:num>
-                        <m:den>
-                          <m:r>
-                            <a:rPr lang="pt-BR" sz="2800" i="1">
-                              <a:solidFill>
-                                <a:schemeClr val="tx1"/>
-                              </a:solidFill>
-                              <a:latin typeface="Cambria Math" panose="02040503050406030204" pitchFamily="18" charset="0"/>
-                              <a:ea typeface="Cambria Math" panose="02040503050406030204" pitchFamily="18" charset="0"/>
-                            </a:rPr>
-                            <m:t>𝜕</m:t>
-                          </m:r>
-                          <m:r>
-                            <a:rPr lang="pt-BR" sz="2800" b="1" i="1">
-                              <a:solidFill>
-                                <a:schemeClr val="tx1"/>
-                              </a:solidFill>
-                              <a:latin typeface="Cambria Math" panose="02040503050406030204" pitchFamily="18" charset="0"/>
-                            </a:rPr>
-                            <m:t>𝒂</m:t>
-                          </m:r>
-                        </m:den>
-                      </m:f>
-                    </m:oMath>
-                  </m:oMathPara>
-                </a14:m>
-                <a:endParaRPr lang="pt-BR" sz="2800" dirty="0">
-                  <a:solidFill>
-                    <a:schemeClr val="tx1"/>
-                  </a:solidFill>
-                </a:endParaRPr>
-              </a:p>
-            </p:txBody>
-          </p:sp>
-        </mc:Choice>
-        <mc:Fallback xmlns="">
-          <p:sp>
-            <p:nvSpPr>
-              <p:cNvPr id="6" name="CaixaDeTexto 5">
-                <a:extLst>
-                  <a:ext uri="{FF2B5EF4-FFF2-40B4-BE49-F238E27FC236}">
-                    <a16:creationId xmlns:a16="http://schemas.microsoft.com/office/drawing/2014/main" id="{C0979B72-FA06-3341-0C8C-22E5606766C2}"/>
-                  </a:ext>
-                </a:extLst>
-              </p:cNvPr>
-              <p:cNvSpPr txBox="1">
-                <a:spLocks noRot="1" noChangeAspect="1" noMove="1" noResize="1" noEditPoints="1" noAdjustHandles="1" noChangeArrowheads="1" noChangeShapeType="1" noTextEdit="1"/>
-              </p:cNvSpPr>
-              <p:nvPr/>
-            </p:nvSpPr>
-            <p:spPr>
-              <a:xfrm>
-                <a:off x="1074655" y="3428804"/>
-                <a:ext cx="3777792" cy="913007"/>
-              </a:xfrm>
-              <a:prstGeom prst="rect">
-                <a:avLst/>
-              </a:prstGeom>
-              <a:blipFill>
-                <a:blip r:embed="rId3"/>
-                <a:stretch>
-                  <a:fillRect/>
-                </a:stretch>
-              </a:blipFill>
-            </p:spPr>
-            <p:txBody>
-              <a:bodyPr/>
-              <a:lstStyle/>
-              <a:p>
-                <a:r>
-                  <a:rPr lang="pt-BR">
-                    <a:noFill/>
-                  </a:rPr>
-                  <a:t> </a:t>
-                </a:r>
-              </a:p>
-            </p:txBody>
-          </p:sp>
-        </mc:Fallback>
-      </mc:AlternateContent>
-    </p:spTree>
-    <p:extLst>
-      <p:ext uri="{BB962C8B-B14F-4D97-AF65-F5344CB8AC3E}">
-        <p14:creationId xmlns:p14="http://schemas.microsoft.com/office/powerpoint/2010/main" val="2681891839"/>
-      </p:ext>
-    </p:extLst>
-  </p:cSld>
-  <p:clrMapOvr>
-    <a:masterClrMapping/>
-  </p:clrMapOvr>
-</p:sld>
-</file>
-
-<file path=ppt/slides/slide40.xml><?xml version="1.0" encoding="utf-8"?>
+<file path=ppt/slides/slide41.xml><?xml version="1.0" encoding="utf-8"?>
 <p:sld xmlns:a="http://schemas.openxmlformats.org/drawingml/2006/main" xmlns:r="http://schemas.openxmlformats.org/officeDocument/2006/relationships" xmlns:p="http://schemas.openxmlformats.org/presentationml/2006/main">
   <p:cSld>
     <p:spTree>
@@ -35128,7 +35943,7 @@
 </p:sld>
 </file>
 
-<file path=ppt/slides/slide41.xml><?xml version="1.0" encoding="utf-8"?>
+<file path=ppt/slides/slide42.xml><?xml version="1.0" encoding="utf-8"?>
 <p:sld xmlns:a="http://schemas.openxmlformats.org/drawingml/2006/main" xmlns:r="http://schemas.openxmlformats.org/officeDocument/2006/relationships" xmlns:p="http://schemas.openxmlformats.org/presentationml/2006/main">
   <p:cSld>
     <p:spTree>
@@ -37272,7 +38087,7 @@
 </p:sld>
 </file>
 
-<file path=ppt/slides/slide42.xml><?xml version="1.0" encoding="utf-8"?>
+<file path=ppt/slides/slide43.xml><?xml version="1.0" encoding="utf-8"?>
 <p:sld xmlns:a="http://schemas.openxmlformats.org/drawingml/2006/main" xmlns:r="http://schemas.openxmlformats.org/officeDocument/2006/relationships" xmlns:p="http://schemas.openxmlformats.org/presentationml/2006/main">
   <p:cSld>
     <p:spTree>
@@ -38158,7 +38973,19 @@
             </a:pPr>
             <a:r>
               <a:rPr lang="pt-BR" sz="4400" b="1" i="1" dirty="0"/>
-              <a:t>Portanto, como veremos, a escolha do passo de aprendizagem é muito importante para o aprendizado de um modelo de ML.</a:t>
+              <a:t>Portanto, como veremos, a escolha do passo de aprendizagem é muito importante para o </a:t>
+            </a:r>
+            <a:r>
+              <a:rPr lang="pt-BR" sz="4400" b="1" i="1" dirty="0">
+                <a:solidFill>
+                  <a:schemeClr val="accent2"/>
+                </a:solidFill>
+              </a:rPr>
+              <a:t>aprendizado</a:t>
+            </a:r>
+            <a:r>
+              <a:rPr lang="pt-BR" sz="4400" b="1" i="1" dirty="0"/>
+              <a:t> de um modelo de ML.</a:t>
             </a:r>
           </a:p>
         </p:txBody>
@@ -38221,14 +39048,292 @@
           </a:p>
         </p:txBody>
       </p:sp>
-      <mc:AlternateContent xmlns:mc="http://schemas.openxmlformats.org/markup-compatibility/2006" xmlns:a14="http://schemas.microsoft.com/office/drawing/2010/main">
-        <mc:Choice Requires="a14">
+      <p:sp>
+        <p:nvSpPr>
+          <p:cNvPr id="3" name="Espaço Reservado para Conteúdo 2">
+            <a:extLst>
+              <a:ext uri="{FF2B5EF4-FFF2-40B4-BE49-F238E27FC236}">
+                <a16:creationId xmlns:a16="http://schemas.microsoft.com/office/drawing/2014/main" id="{5937D7F6-2609-AE39-CC56-50E8812A0FF6}"/>
+              </a:ext>
+            </a:extLst>
+          </p:cNvPr>
+          <p:cNvSpPr>
+            <a:spLocks noGrp="1"/>
+          </p:cNvSpPr>
+          <p:nvPr>
+            <p:ph idx="1"/>
+          </p:nvPr>
+        </p:nvSpPr>
+        <p:spPr>
+          <a:xfrm>
+            <a:off x="838201" y="1825624"/>
+            <a:ext cx="11180974" cy="5032375"/>
+          </a:xfrm>
+        </p:spPr>
+        <p:txBody>
+          <a:bodyPr>
+            <a:normAutofit/>
+          </a:bodyPr>
+          <a:lstStyle/>
+          <a:p>
+            <a:r>
+              <a:rPr lang="pt-BR" b="0" i="0" dirty="0">
+                <a:effectLst/>
+              </a:rPr>
+              <a:t>O passo de aprendizagem é um </a:t>
+            </a:r>
+            <a:r>
+              <a:rPr lang="pt-BR" b="1" i="1" dirty="0">
+                <a:solidFill>
+                  <a:srgbClr val="7030A0"/>
+                </a:solidFill>
+                <a:effectLst/>
+              </a:rPr>
+              <a:t>hiperparâmetro</a:t>
+            </a:r>
+            <a:r>
+              <a:rPr lang="pt-BR" b="0" i="0" dirty="0">
+                <a:effectLst/>
+              </a:rPr>
+              <a:t> que influencia diretamente o </a:t>
+            </a:r>
+            <a:r>
+              <a:rPr lang="pt-BR" b="1" i="1" dirty="0">
+                <a:solidFill>
+                  <a:srgbClr val="00B050"/>
+                </a:solidFill>
+                <a:effectLst/>
+              </a:rPr>
+              <a:t>desempenho e a convergência </a:t>
+            </a:r>
+            <a:r>
+              <a:rPr lang="pt-BR" b="0" i="0" dirty="0">
+                <a:effectLst/>
+              </a:rPr>
+              <a:t>do algoritmo do gradiente descendente.</a:t>
+            </a:r>
+          </a:p>
+          <a:p>
+            <a:pPr lvl="1">
+              <a:buFont typeface="Wingdings" panose="05000000000000000000" pitchFamily="2" charset="2"/>
+              <a:buChar char="§"/>
+            </a:pPr>
+            <a:r>
+              <a:rPr lang="pt-BR" sz="2400" b="1" i="0" dirty="0">
+                <a:effectLst/>
+              </a:rPr>
+              <a:t>Hiperparâmetros</a:t>
+            </a:r>
+            <a:r>
+              <a:rPr lang="pt-BR" sz="2400" b="0" i="0" dirty="0">
+                <a:effectLst/>
+              </a:rPr>
+              <a:t>: são </a:t>
+            </a:r>
+            <a:r>
+              <a:rPr lang="pt-BR" sz="2400" b="1" i="1" dirty="0">
+                <a:solidFill>
+                  <a:srgbClr val="00B050"/>
+                </a:solidFill>
+                <a:effectLst/>
+              </a:rPr>
+              <a:t>parâmetros que </a:t>
+            </a:r>
+            <a:r>
+              <a:rPr lang="pt-BR" sz="2400" b="1" i="1" dirty="0">
+                <a:solidFill>
+                  <a:schemeClr val="accent2"/>
+                </a:solidFill>
+                <a:effectLst/>
+              </a:rPr>
+              <a:t>não são aprendidos </a:t>
+            </a:r>
+            <a:r>
+              <a:rPr lang="pt-BR" sz="2400" b="1" i="1" dirty="0">
+                <a:solidFill>
+                  <a:srgbClr val="00B050"/>
+                </a:solidFill>
+                <a:effectLst/>
+              </a:rPr>
+              <a:t>durante o treinamento </a:t>
+            </a:r>
+            <a:r>
+              <a:rPr lang="pt-BR" sz="2400" b="0" i="0" dirty="0">
+                <a:effectLst/>
+              </a:rPr>
+              <a:t>do modelo, mas que </a:t>
+            </a:r>
+            <a:r>
+              <a:rPr lang="pt-BR" sz="2400" b="1" i="1" dirty="0">
+                <a:solidFill>
+                  <a:schemeClr val="accent2"/>
+                </a:solidFill>
+                <a:effectLst/>
+              </a:rPr>
+              <a:t>influenciam</a:t>
+            </a:r>
+            <a:r>
+              <a:rPr lang="pt-BR" sz="2400" b="0" i="0" dirty="0">
+                <a:effectLst/>
+              </a:rPr>
+              <a:t> </a:t>
+            </a:r>
+            <a:r>
+              <a:rPr lang="pt-BR" sz="2400" dirty="0"/>
+              <a:t>seu</a:t>
+            </a:r>
+            <a:r>
+              <a:rPr lang="pt-BR" sz="2400" b="0" i="0" dirty="0">
+                <a:effectLst/>
+              </a:rPr>
+              <a:t> aprendizado.</a:t>
+            </a:r>
+            <a:endParaRPr lang="pt-BR" b="0" i="0" dirty="0">
+              <a:effectLst/>
+            </a:endParaRPr>
+          </a:p>
+          <a:p>
+            <a:r>
+              <a:rPr lang="pt-BR" b="0" i="0" dirty="0">
+                <a:effectLst/>
+              </a:rPr>
+              <a:t>Valores </a:t>
+            </a:r>
+            <a:r>
+              <a:rPr lang="pt-BR" b="1" i="1" dirty="0">
+                <a:solidFill>
+                  <a:srgbClr val="00B050"/>
+                </a:solidFill>
+                <a:effectLst/>
+              </a:rPr>
+              <a:t>muito pequenos </a:t>
+            </a:r>
+            <a:r>
+              <a:rPr lang="pt-BR" b="0" i="0" dirty="0">
+                <a:effectLst/>
+              </a:rPr>
+              <a:t>podem resultar em </a:t>
+            </a:r>
+            <a:r>
+              <a:rPr lang="pt-BR" b="1" i="1" dirty="0">
+                <a:solidFill>
+                  <a:srgbClr val="00B050"/>
+                </a:solidFill>
+                <a:effectLst/>
+              </a:rPr>
+              <a:t>treinamento lento</a:t>
+            </a:r>
+            <a:r>
+              <a:rPr lang="pt-BR" b="0" i="0" dirty="0">
+                <a:effectLst/>
+              </a:rPr>
+              <a:t>, enquanto valores </a:t>
+            </a:r>
+            <a:r>
+              <a:rPr lang="pt-BR" b="1" i="1" dirty="0">
+                <a:solidFill>
+                  <a:srgbClr val="00B050"/>
+                </a:solidFill>
+                <a:effectLst/>
+              </a:rPr>
+              <a:t>muito grandes</a:t>
+            </a:r>
+            <a:r>
+              <a:rPr lang="pt-BR" b="0" i="0" dirty="0">
+                <a:effectLst/>
+              </a:rPr>
+              <a:t> podem causar </a:t>
+            </a:r>
+            <a:r>
+              <a:rPr lang="pt-BR" b="1" i="1" dirty="0">
+                <a:solidFill>
+                  <a:srgbClr val="00B050"/>
+                </a:solidFill>
+                <a:effectLst/>
+              </a:rPr>
+              <a:t>divergência</a:t>
+            </a:r>
+            <a:r>
+              <a:rPr lang="pt-BR" b="0" i="0" dirty="0">
+                <a:effectLst/>
+              </a:rPr>
+              <a:t>. </a:t>
+            </a:r>
+          </a:p>
+        </p:txBody>
+      </p:sp>
+    </p:spTree>
+    <p:extLst>
+      <p:ext uri="{BB962C8B-B14F-4D97-AF65-F5344CB8AC3E}">
+        <p14:creationId xmlns:p14="http://schemas.microsoft.com/office/powerpoint/2010/main" val="938094781"/>
+      </p:ext>
+    </p:extLst>
+  </p:cSld>
+  <p:clrMapOvr>
+    <a:masterClrMapping/>
+  </p:clrMapOvr>
+</p:sld>
+</file>
+
+<file path=ppt/slides/slide8.xml><?xml version="1.0" encoding="utf-8"?>
+<p:sld xmlns:a="http://schemas.openxmlformats.org/drawingml/2006/main" xmlns:r="http://schemas.openxmlformats.org/officeDocument/2006/relationships" xmlns:p="http://schemas.openxmlformats.org/presentationml/2006/main">
+  <p:cSld>
+    <p:spTree>
+      <p:nvGrpSpPr>
+        <p:cNvPr id="1" name="">
+          <a:extLst>
+            <a:ext uri="{FF2B5EF4-FFF2-40B4-BE49-F238E27FC236}">
+              <a16:creationId xmlns:a16="http://schemas.microsoft.com/office/drawing/2014/main" id="{1FFE269A-BAE6-D3D2-D3D5-D3729950A913}"/>
+            </a:ext>
+          </a:extLst>
+        </p:cNvPr>
+        <p:cNvGrpSpPr/>
+        <p:nvPr/>
+      </p:nvGrpSpPr>
+      <p:grpSpPr>
+        <a:xfrm>
+          <a:off x="0" y="0"/>
+          <a:ext cx="0" cy="0"/>
+          <a:chOff x="0" y="0"/>
+          <a:chExt cx="0" cy="0"/>
+        </a:xfrm>
+      </p:grpSpPr>
+      <p:sp>
+        <p:nvSpPr>
+          <p:cNvPr id="2" name="Título 1">
+            <a:extLst>
+              <a:ext uri="{FF2B5EF4-FFF2-40B4-BE49-F238E27FC236}">
+                <a16:creationId xmlns:a16="http://schemas.microsoft.com/office/drawing/2014/main" id="{5DED89F4-1942-2D2B-889C-C3577D0B0B98}"/>
+              </a:ext>
+            </a:extLst>
+          </p:cNvPr>
+          <p:cNvSpPr>
+            <a:spLocks noGrp="1"/>
+          </p:cNvSpPr>
+          <p:nvPr>
+            <p:ph type="title"/>
+          </p:nvPr>
+        </p:nvSpPr>
+        <p:spPr/>
+        <p:txBody>
+          <a:bodyPr/>
+          <a:lstStyle/>
+          <a:p>
+            <a:r>
+              <a:rPr lang="pt-BR" dirty="0"/>
+              <a:t>Escolha do passo de aprendizagem</a:t>
+            </a:r>
+          </a:p>
+        </p:txBody>
+      </p:sp>
+      <mc:AlternateContent xmlns:mc="http://schemas.openxmlformats.org/markup-compatibility/2006">
+        <mc:Choice xmlns:a14="http://schemas.microsoft.com/office/drawing/2010/main" Requires="a14">
           <p:sp>
             <p:nvSpPr>
               <p:cNvPr id="3" name="Espaço Reservado para Conteúdo 2">
                 <a:extLst>
                   <a:ext uri="{FF2B5EF4-FFF2-40B4-BE49-F238E27FC236}">
-                    <a16:creationId xmlns:a16="http://schemas.microsoft.com/office/drawing/2014/main" id="{5937D7F6-2609-AE39-CC56-50E8812A0FF6}"/>
+                    <a16:creationId xmlns:a16="http://schemas.microsoft.com/office/drawing/2014/main" id="{8285281D-6D6B-265C-A039-D994EB0BA835}"/>
                   </a:ext>
                 </a:extLst>
               </p:cNvPr>
@@ -38241,13 +39346,13 @@
             </p:nvSpPr>
             <p:spPr>
               <a:xfrm>
-                <a:off x="838201" y="1825624"/>
-                <a:ext cx="11180974" cy="5032375"/>
+                <a:off x="838200" y="1825624"/>
+                <a:ext cx="11180975" cy="5032375"/>
               </a:xfrm>
             </p:spPr>
             <p:txBody>
               <a:bodyPr>
-                <a:normAutofit lnSpcReduction="10000"/>
+                <a:normAutofit/>
               </a:bodyPr>
               <a:lstStyle/>
               <a:p>
@@ -38255,165 +39360,28 @@
                   <a:rPr lang="pt-BR" b="0" i="0" dirty="0">
                     <a:effectLst/>
                   </a:rPr>
-                  <a:t>O passo de aprendizagem é um </a:t>
+                  <a:t>Em geral, a escolha do passo é feita </a:t>
                 </a:r>
                 <a:r>
-                  <a:rPr lang="pt-BR" b="1" i="1" dirty="0">
+                  <a:rPr lang="pt-BR" b="1" i="0" dirty="0">
                     <a:solidFill>
-                      <a:srgbClr val="7030A0"/>
+                      <a:schemeClr val="accent2"/>
                     </a:solidFill>
                     <a:effectLst/>
                   </a:rPr>
-                  <a:t>hiperparâmetro</a:t>
+                  <a:t>empiricamente</a:t>
                 </a:r>
                 <a:r>
                   <a:rPr lang="pt-BR" b="0" i="0" dirty="0">
                     <a:effectLst/>
                   </a:rPr>
-                  <a:t> que influencia diretamente o </a:t>
-                </a:r>
-                <a:r>
-                  <a:rPr lang="pt-BR" b="1" i="1" dirty="0">
-                    <a:solidFill>
-                      <a:srgbClr val="00B050"/>
-                    </a:solidFill>
-                    <a:effectLst/>
-                  </a:rPr>
-                  <a:t>desempenho e a convergência </a:t>
-                </a:r>
-                <a:r>
-                  <a:rPr lang="pt-BR" b="0" i="0" dirty="0">
-                    <a:effectLst/>
-                  </a:rPr>
-                  <a:t>do algoritmo do gradiente descendente.</a:t>
-                </a:r>
-              </a:p>
-              <a:p>
-                <a:pPr lvl="1">
-                  <a:buFont typeface="Wingdings" panose="05000000000000000000" pitchFamily="2" charset="2"/>
-                  <a:buChar char="§"/>
-                </a:pPr>
-                <a:r>
-                  <a:rPr lang="pt-BR" sz="2400" b="1" i="0" dirty="0">
-                    <a:effectLst/>
-                  </a:rPr>
-                  <a:t>Hiperparâmetros</a:t>
-                </a:r>
-                <a:r>
-                  <a:rPr lang="pt-BR" sz="2400" b="0" i="0" dirty="0">
-                    <a:effectLst/>
-                  </a:rPr>
-                  <a:t>: são </a:t>
-                </a:r>
-                <a:r>
-                  <a:rPr lang="pt-BR" sz="2400" b="1" i="1" dirty="0">
-                    <a:solidFill>
-                      <a:srgbClr val="00B050"/>
-                    </a:solidFill>
-                    <a:effectLst/>
-                  </a:rPr>
-                  <a:t>parâmetros que não são aprendidos durante o treinamento </a:t>
-                </a:r>
-                <a:r>
-                  <a:rPr lang="pt-BR" sz="2400" b="0" i="0" dirty="0">
-                    <a:effectLst/>
-                  </a:rPr>
-                  <a:t>do modelo, mas que influenciam </a:t>
-                </a:r>
-                <a:r>
-                  <a:rPr lang="pt-BR" sz="2400" dirty="0"/>
-                  <a:t>seu</a:t>
-                </a:r>
-                <a:r>
-                  <a:rPr lang="pt-BR" sz="2400" b="0" i="0" dirty="0">
-                    <a:effectLst/>
-                  </a:rPr>
-                  <a:t> aprendizado.</a:t>
-                </a:r>
-                <a:endParaRPr lang="pt-BR" b="0" i="0" dirty="0">
-                  <a:effectLst/>
-                </a:endParaRPr>
-              </a:p>
-              <a:p>
-                <a:r>
-                  <a:rPr lang="pt-BR" b="0" i="0" dirty="0">
-                    <a:effectLst/>
-                  </a:rPr>
-                  <a:t>Valores </a:t>
-                </a:r>
-                <a:r>
-                  <a:rPr lang="pt-BR" b="1" i="1" dirty="0">
-                    <a:solidFill>
-                      <a:srgbClr val="00B050"/>
-                    </a:solidFill>
-                    <a:effectLst/>
-                  </a:rPr>
-                  <a:t>muito pequenos </a:t>
-                </a:r>
-                <a:r>
-                  <a:rPr lang="pt-BR" b="0" i="0" dirty="0">
-                    <a:effectLst/>
-                  </a:rPr>
-                  <a:t>podem resultar em </a:t>
-                </a:r>
-                <a:r>
-                  <a:rPr lang="pt-BR" b="1" i="1" dirty="0">
-                    <a:solidFill>
-                      <a:srgbClr val="00B050"/>
-                    </a:solidFill>
-                    <a:effectLst/>
-                  </a:rPr>
-                  <a:t>treinamento lento</a:t>
-                </a:r>
-                <a:r>
-                  <a:rPr lang="pt-BR" b="0" i="0" dirty="0">
-                    <a:effectLst/>
-                  </a:rPr>
-                  <a:t>, enquanto valores </a:t>
-                </a:r>
-                <a:r>
-                  <a:rPr lang="pt-BR" b="1" i="1" dirty="0">
-                    <a:solidFill>
-                      <a:srgbClr val="00B050"/>
-                    </a:solidFill>
-                    <a:effectLst/>
-                  </a:rPr>
-                  <a:t>muito grandes</a:t>
-                </a:r>
-                <a:r>
-                  <a:rPr lang="pt-BR" b="0" i="0" dirty="0">
-                    <a:effectLst/>
-                  </a:rPr>
-                  <a:t> podem causar </a:t>
-                </a:r>
-                <a:r>
-                  <a:rPr lang="pt-BR" b="1" i="1" dirty="0">
-                    <a:solidFill>
-                      <a:srgbClr val="00B050"/>
-                    </a:solidFill>
-                    <a:effectLst/>
-                  </a:rPr>
-                  <a:t>divergência</a:t>
-                </a:r>
-                <a:r>
-                  <a:rPr lang="pt-BR" b="0" i="0" dirty="0">
-                    <a:effectLst/>
-                  </a:rPr>
-                  <a:t>. </a:t>
-                </a:r>
-              </a:p>
-              <a:p>
-                <a:r>
-                  <a:rPr lang="pt-BR" b="0" i="0" dirty="0">
-                    <a:effectLst/>
-                  </a:rPr>
-                  <a:t>Em geral, a escolha do passo é feita empiricamente por meio de experimentação.</a:t>
+                  <a:t> por meio de experimentação.</a:t>
                 </a:r>
               </a:p>
               <a:p>
                 <a:r>
                   <a:rPr lang="pt-BR" dirty="0"/>
-                  <a:t>Uma regra empírica para </a:t>
+                  <a:t>Uma regra empírica para a </a:t>
                 </a:r>
                 <a:r>
                   <a:rPr lang="pt-BR" b="1" i="1" dirty="0"/>
@@ -38425,17 +39393,18 @@
                 </a:r>
                 <a:r>
                   <a:rPr lang="pt-BR" b="1" i="1" dirty="0"/>
-                  <a:t>ajuste </a:t>
+                  <a:t>ajuste manual</a:t>
                 </a:r>
                 <a:r>
-                  <a:rPr lang="pt-BR" b="1" i="1"/>
-                  <a:t>manual</a:t>
-                </a:r>
-                <a:r>
-                  <a:rPr lang="pt-BR"/>
+                  <a:rPr lang="pt-BR" dirty="0"/>
                   <a:t>):</a:t>
                 </a:r>
-                <a:endParaRPr lang="pt-BR" dirty="0"/>
+              </a:p>
+              <a:p>
+                <a:pPr marL="0" indent="0">
+                  <a:buNone/>
+                </a:pPr>
+                <a:endParaRPr lang="pt-BR" sz="1200" dirty="0"/>
               </a:p>
               <a:p>
                 <a:pPr marL="0" indent="0">
@@ -38464,16 +39433,28 @@
                 </a14:m>
                 <a:endParaRPr lang="pt-BR" dirty="0"/>
               </a:p>
+              <a:p>
+                <a:pPr marL="0" indent="0">
+                  <a:buNone/>
+                </a:pPr>
+                <a:endParaRPr lang="pt-BR" dirty="0"/>
+              </a:p>
+              <a:p>
+                <a:r>
+                  <a:rPr lang="pt-BR" dirty="0"/>
+                  <a:t>Vejamos um exemplo sobre como o passo de aprendizagem afeta a convergência de um modelo.</a:t>
+                </a:r>
+              </a:p>
             </p:txBody>
           </p:sp>
         </mc:Choice>
-        <mc:Fallback xmlns="">
+        <mc:Fallback>
           <p:sp>
             <p:nvSpPr>
               <p:cNvPr id="3" name="Espaço Reservado para Conteúdo 2">
                 <a:extLst>
                   <a:ext uri="{FF2B5EF4-FFF2-40B4-BE49-F238E27FC236}">
-                    <a16:creationId xmlns:a16="http://schemas.microsoft.com/office/drawing/2014/main" id="{5937D7F6-2609-AE39-CC56-50E8812A0FF6}"/>
+                    <a16:creationId xmlns:a16="http://schemas.microsoft.com/office/drawing/2014/main" id="{8285281D-6D6B-265C-A039-D994EB0BA835}"/>
                   </a:ext>
                 </a:extLst>
               </p:cNvPr>
@@ -38486,13 +39467,13 @@
             </p:nvSpPr>
             <p:spPr>
               <a:xfrm>
-                <a:off x="838201" y="1825624"/>
-                <a:ext cx="11180974" cy="5032375"/>
+                <a:off x="838200" y="1825624"/>
+                <a:ext cx="11180975" cy="5032375"/>
               </a:xfrm>
               <a:blipFill>
                 <a:blip r:embed="rId3"/>
                 <a:stretch>
-                  <a:fillRect l="-981" t="-2663" r="-1254"/>
+                  <a:fillRect l="-981" t="-1937" r="-818"/>
                 </a:stretch>
               </a:blipFill>
             </p:spPr>
@@ -38501,7 +39482,7 @@
               <a:lstStyle/>
               <a:p>
                 <a:r>
-                  <a:rPr lang="pt-BR">
+                  <a:rPr lang="en-US">
                     <a:noFill/>
                   </a:rPr>
                   <a:t> </a:t>
@@ -38516,7 +39497,7 @@
           <p:cNvPr id="6" name="Arc 16">
             <a:extLst>
               <a:ext uri="{FF2B5EF4-FFF2-40B4-BE49-F238E27FC236}">
-                <a16:creationId xmlns:a16="http://schemas.microsoft.com/office/drawing/2014/main" id="{FADFFC9D-BD51-9093-3AFE-1567CE0EE43C}"/>
+                <a16:creationId xmlns:a16="http://schemas.microsoft.com/office/drawing/2014/main" id="{1A2AFCEC-F229-2F9D-721F-2B79E5A495C4}"/>
               </a:ext>
             </a:extLst>
           </p:cNvPr>
@@ -38525,7 +39506,7 @@
         </p:nvSpPr>
         <p:spPr>
           <a:xfrm rot="7589185">
-            <a:off x="4144164" y="5194536"/>
+            <a:off x="4144164" y="3082925"/>
             <a:ext cx="1059543" cy="1393371"/>
           </a:xfrm>
           <a:prstGeom prst="arc">
@@ -38559,14 +39540,14 @@
           </a:p>
         </p:txBody>
       </p:sp>
-      <mc:AlternateContent xmlns:mc="http://schemas.openxmlformats.org/markup-compatibility/2006" xmlns:a14="http://schemas.microsoft.com/office/drawing/2010/main">
-        <mc:Choice Requires="a14">
+      <mc:AlternateContent xmlns:mc="http://schemas.openxmlformats.org/markup-compatibility/2006">
+        <mc:Choice xmlns:a14="http://schemas.microsoft.com/office/drawing/2010/main" Requires="a14">
           <p:sp>
             <p:nvSpPr>
               <p:cNvPr id="7" name="TextBox 17">
                 <a:extLst>
                   <a:ext uri="{FF2B5EF4-FFF2-40B4-BE49-F238E27FC236}">
-                    <a16:creationId xmlns:a16="http://schemas.microsoft.com/office/drawing/2014/main" id="{3E05BB30-5F5E-02E5-F40C-5ED014858567}"/>
+                    <a16:creationId xmlns:a16="http://schemas.microsoft.com/office/drawing/2014/main" id="{D62868F5-25A9-0A54-1884-F4E8AEC8A7A8}"/>
                   </a:ext>
                 </a:extLst>
               </p:cNvPr>
@@ -38575,7 +39556,7 @@
             </p:nvSpPr>
             <p:spPr>
               <a:xfrm>
-                <a:off x="4240751" y="6480330"/>
+                <a:off x="4240751" y="4368719"/>
                 <a:ext cx="1059543" cy="369332"/>
               </a:xfrm>
               <a:prstGeom prst="rect">
@@ -38617,13 +39598,13 @@
             </p:txBody>
           </p:sp>
         </mc:Choice>
-        <mc:Fallback xmlns="">
+        <mc:Fallback>
           <p:sp>
             <p:nvSpPr>
               <p:cNvPr id="7" name="TextBox 17">
                 <a:extLst>
                   <a:ext uri="{FF2B5EF4-FFF2-40B4-BE49-F238E27FC236}">
-                    <a16:creationId xmlns:a16="http://schemas.microsoft.com/office/drawing/2014/main" id="{3E05BB30-5F5E-02E5-F40C-5ED014858567}"/>
+                    <a16:creationId xmlns:a16="http://schemas.microsoft.com/office/drawing/2014/main" id="{D62868F5-25A9-0A54-1884-F4E8AEC8A7A8}"/>
                   </a:ext>
                 </a:extLst>
               </p:cNvPr>
@@ -38634,7 +39615,7 @@
             </p:nvSpPr>
             <p:spPr>
               <a:xfrm>
-                <a:off x="4240751" y="6480330"/>
+                <a:off x="4240751" y="4368719"/>
                 <a:ext cx="1059543" cy="369332"/>
               </a:xfrm>
               <a:prstGeom prst="rect">
@@ -38652,7 +39633,7 @@
               <a:lstStyle/>
               <a:p>
                 <a:r>
-                  <a:rPr lang="pt-BR">
+                  <a:rPr lang="en-US">
                     <a:noFill/>
                   </a:rPr>
                   <a:t> </a:t>
@@ -38667,7 +39648,7 @@
           <p:cNvPr id="8" name="Arc 18">
             <a:extLst>
               <a:ext uri="{FF2B5EF4-FFF2-40B4-BE49-F238E27FC236}">
-                <a16:creationId xmlns:a16="http://schemas.microsoft.com/office/drawing/2014/main" id="{7E54F900-1BCF-B720-53AA-630E39DA0CA7}"/>
+                <a16:creationId xmlns:a16="http://schemas.microsoft.com/office/drawing/2014/main" id="{CFDF7D89-CCC3-6619-B407-4DA4B327E47C}"/>
               </a:ext>
             </a:extLst>
           </p:cNvPr>
@@ -38676,7 +39657,7 @@
         </p:nvSpPr>
         <p:spPr>
           <a:xfrm rot="7589185">
-            <a:off x="5120693" y="5220906"/>
+            <a:off x="5120693" y="3109295"/>
             <a:ext cx="1059543" cy="1393371"/>
           </a:xfrm>
           <a:prstGeom prst="arc">
@@ -38710,14 +39691,14 @@
           </a:p>
         </p:txBody>
       </p:sp>
-      <mc:AlternateContent xmlns:mc="http://schemas.openxmlformats.org/markup-compatibility/2006" xmlns:a14="http://schemas.microsoft.com/office/drawing/2010/main">
-        <mc:Choice Requires="a14">
+      <mc:AlternateContent xmlns:mc="http://schemas.openxmlformats.org/markup-compatibility/2006">
+        <mc:Choice xmlns:a14="http://schemas.microsoft.com/office/drawing/2010/main" Requires="a14">
           <p:sp>
             <p:nvSpPr>
               <p:cNvPr id="9" name="TextBox 19">
                 <a:extLst>
                   <a:ext uri="{FF2B5EF4-FFF2-40B4-BE49-F238E27FC236}">
-                    <a16:creationId xmlns:a16="http://schemas.microsoft.com/office/drawing/2014/main" id="{143895B5-9CD7-6B2A-5B40-B65ADC335727}"/>
+                    <a16:creationId xmlns:a16="http://schemas.microsoft.com/office/drawing/2014/main" id="{2CCDD6AF-0252-9D8D-FDA3-EB0F44912779}"/>
                   </a:ext>
                 </a:extLst>
               </p:cNvPr>
@@ -38726,7 +39707,7 @@
             </p:nvSpPr>
             <p:spPr>
               <a:xfrm>
-                <a:off x="5268460" y="6499845"/>
+                <a:off x="5268460" y="4388234"/>
                 <a:ext cx="1059543" cy="369332"/>
               </a:xfrm>
               <a:prstGeom prst="rect">
@@ -38775,13 +39756,13 @@
             </p:txBody>
           </p:sp>
         </mc:Choice>
-        <mc:Fallback xmlns="">
+        <mc:Fallback>
           <p:sp>
             <p:nvSpPr>
               <p:cNvPr id="9" name="TextBox 19">
                 <a:extLst>
                   <a:ext uri="{FF2B5EF4-FFF2-40B4-BE49-F238E27FC236}">
-                    <a16:creationId xmlns:a16="http://schemas.microsoft.com/office/drawing/2014/main" id="{143895B5-9CD7-6B2A-5B40-B65ADC335727}"/>
+                    <a16:creationId xmlns:a16="http://schemas.microsoft.com/office/drawing/2014/main" id="{2CCDD6AF-0252-9D8D-FDA3-EB0F44912779}"/>
                   </a:ext>
                 </a:extLst>
               </p:cNvPr>
@@ -38792,7 +39773,7 @@
             </p:nvSpPr>
             <p:spPr>
               <a:xfrm>
-                <a:off x="5268460" y="6499845"/>
+                <a:off x="5268460" y="4388234"/>
                 <a:ext cx="1059543" cy="369332"/>
               </a:xfrm>
               <a:prstGeom prst="rect">
@@ -38810,7 +39791,7 @@
               <a:lstStyle/>
               <a:p>
                 <a:r>
-                  <a:rPr lang="pt-BR">
+                  <a:rPr lang="en-US">
                     <a:noFill/>
                   </a:rPr>
                   <a:t> </a:t>
@@ -38825,7 +39806,7 @@
           <p:cNvPr id="10" name="Arc 20">
             <a:extLst>
               <a:ext uri="{FF2B5EF4-FFF2-40B4-BE49-F238E27FC236}">
-                <a16:creationId xmlns:a16="http://schemas.microsoft.com/office/drawing/2014/main" id="{35953112-E242-B812-3BDA-2555E5932180}"/>
+                <a16:creationId xmlns:a16="http://schemas.microsoft.com/office/drawing/2014/main" id="{818E0AB7-C50C-DAE7-2D8D-E8DD94FA3182}"/>
               </a:ext>
             </a:extLst>
           </p:cNvPr>
@@ -38834,7 +39815,7 @@
         </p:nvSpPr>
         <p:spPr>
           <a:xfrm rot="7381844">
-            <a:off x="6086074" y="5429728"/>
+            <a:off x="6086074" y="3318117"/>
             <a:ext cx="821031" cy="1155237"/>
           </a:xfrm>
           <a:prstGeom prst="arc">
@@ -38868,14 +39849,14 @@
           </a:p>
         </p:txBody>
       </p:sp>
-      <mc:AlternateContent xmlns:mc="http://schemas.openxmlformats.org/markup-compatibility/2006" xmlns:a14="http://schemas.microsoft.com/office/drawing/2010/main">
-        <mc:Choice Requires="a14">
+      <mc:AlternateContent xmlns:mc="http://schemas.openxmlformats.org/markup-compatibility/2006">
+        <mc:Choice xmlns:a14="http://schemas.microsoft.com/office/drawing/2010/main" Requires="a14">
           <p:sp>
             <p:nvSpPr>
               <p:cNvPr id="11" name="TextBox 21">
                 <a:extLst>
                   <a:ext uri="{FF2B5EF4-FFF2-40B4-BE49-F238E27FC236}">
-                    <a16:creationId xmlns:a16="http://schemas.microsoft.com/office/drawing/2014/main" id="{E8AC4AC6-AC67-A956-F839-099263F85B11}"/>
+                    <a16:creationId xmlns:a16="http://schemas.microsoft.com/office/drawing/2014/main" id="{3271C99E-AEF6-8927-7542-49F74407A6BC}"/>
                   </a:ext>
                 </a:extLst>
               </p:cNvPr>
@@ -38884,7 +39865,7 @@
             </p:nvSpPr>
             <p:spPr>
               <a:xfrm>
-                <a:off x="6047412" y="6489012"/>
+                <a:off x="6047412" y="4377401"/>
                 <a:ext cx="1059543" cy="369332"/>
               </a:xfrm>
               <a:prstGeom prst="rect">
@@ -38926,13 +39907,13 @@
             </p:txBody>
           </p:sp>
         </mc:Choice>
-        <mc:Fallback xmlns="">
+        <mc:Fallback>
           <p:sp>
             <p:nvSpPr>
               <p:cNvPr id="11" name="TextBox 21">
                 <a:extLst>
                   <a:ext uri="{FF2B5EF4-FFF2-40B4-BE49-F238E27FC236}">
-                    <a16:creationId xmlns:a16="http://schemas.microsoft.com/office/drawing/2014/main" id="{E8AC4AC6-AC67-A956-F839-099263F85B11}"/>
+                    <a16:creationId xmlns:a16="http://schemas.microsoft.com/office/drawing/2014/main" id="{3271C99E-AEF6-8927-7542-49F74407A6BC}"/>
                   </a:ext>
                 </a:extLst>
               </p:cNvPr>
@@ -38943,7 +39924,7 @@
             </p:nvSpPr>
             <p:spPr>
               <a:xfrm>
-                <a:off x="6047412" y="6489012"/>
+                <a:off x="6047412" y="4377401"/>
                 <a:ext cx="1059543" cy="369332"/>
               </a:xfrm>
               <a:prstGeom prst="rect">
@@ -38961,7 +39942,7 @@
               <a:lstStyle/>
               <a:p>
                 <a:r>
-                  <a:rPr lang="pt-BR">
+                  <a:rPr lang="en-US">
                     <a:noFill/>
                   </a:rPr>
                   <a:t> </a:t>
@@ -38976,7 +39957,7 @@
           <p:cNvPr id="12" name="Arc 22">
             <a:extLst>
               <a:ext uri="{FF2B5EF4-FFF2-40B4-BE49-F238E27FC236}">
-                <a16:creationId xmlns:a16="http://schemas.microsoft.com/office/drawing/2014/main" id="{7975BFFB-0E0B-DB6F-4946-7B7CFBBD7764}"/>
+                <a16:creationId xmlns:a16="http://schemas.microsoft.com/office/drawing/2014/main" id="{AB2099C8-9393-2A15-B4B2-07F28FB94BED}"/>
               </a:ext>
             </a:extLst>
           </p:cNvPr>
@@ -38985,7 +39966,7 @@
         </p:nvSpPr>
         <p:spPr>
           <a:xfrm rot="7285154">
-            <a:off x="6889653" y="5492856"/>
+            <a:off x="6889653" y="3381245"/>
             <a:ext cx="729866" cy="1080087"/>
           </a:xfrm>
           <a:prstGeom prst="arc">
@@ -39024,7 +40005,7 @@
           <p:cNvPr id="13" name="Arc 25">
             <a:extLst>
               <a:ext uri="{FF2B5EF4-FFF2-40B4-BE49-F238E27FC236}">
-                <a16:creationId xmlns:a16="http://schemas.microsoft.com/office/drawing/2014/main" id="{38544561-E633-C2CD-7154-BE26A6E6C18E}"/>
+                <a16:creationId xmlns:a16="http://schemas.microsoft.com/office/drawing/2014/main" id="{C78F8B88-FAE6-2A19-6579-85CC3113D217}"/>
               </a:ext>
             </a:extLst>
           </p:cNvPr>
@@ -39033,7 +40014,7 @@
         </p:nvSpPr>
         <p:spPr>
           <a:xfrm rot="7043539">
-            <a:off x="7606310" y="5646660"/>
+            <a:off x="7606310" y="3535049"/>
             <a:ext cx="574483" cy="919370"/>
           </a:xfrm>
           <a:prstGeom prst="arc">
@@ -39072,7 +40053,7 @@
           <p:cNvPr id="14" name="Arc 26">
             <a:extLst>
               <a:ext uri="{FF2B5EF4-FFF2-40B4-BE49-F238E27FC236}">
-                <a16:creationId xmlns:a16="http://schemas.microsoft.com/office/drawing/2014/main" id="{4EF49F99-C5ED-5CB9-69BE-6074CF85E4B4}"/>
+                <a16:creationId xmlns:a16="http://schemas.microsoft.com/office/drawing/2014/main" id="{7B79369F-B410-B830-3CB9-B764FE8A4AAE}"/>
               </a:ext>
             </a:extLst>
           </p:cNvPr>
@@ -39081,7 +40062,7 @@
         </p:nvSpPr>
         <p:spPr>
           <a:xfrm rot="7439932">
-            <a:off x="8202137" y="5725698"/>
+            <a:off x="8202137" y="3614087"/>
             <a:ext cx="492730" cy="824698"/>
           </a:xfrm>
           <a:prstGeom prst="arc">
@@ -39118,14 +40099,14 @@
           </a:p>
         </p:txBody>
       </p:sp>
-      <mc:AlternateContent xmlns:mc="http://schemas.openxmlformats.org/markup-compatibility/2006" xmlns:a14="http://schemas.microsoft.com/office/drawing/2010/main">
-        <mc:Choice Requires="a14">
+      <mc:AlternateContent xmlns:mc="http://schemas.openxmlformats.org/markup-compatibility/2006">
+        <mc:Choice xmlns:a14="http://schemas.microsoft.com/office/drawing/2010/main" Requires="a14">
           <p:sp>
             <p:nvSpPr>
               <p:cNvPr id="15" name="TextBox 28">
                 <a:extLst>
                   <a:ext uri="{FF2B5EF4-FFF2-40B4-BE49-F238E27FC236}">
-                    <a16:creationId xmlns:a16="http://schemas.microsoft.com/office/drawing/2014/main" id="{F8424A97-4931-D4FB-2715-5C7B8EF2182B}"/>
+                    <a16:creationId xmlns:a16="http://schemas.microsoft.com/office/drawing/2014/main" id="{0BFF65D1-3AE6-F606-65CE-8753A55A46A4}"/>
                   </a:ext>
                 </a:extLst>
               </p:cNvPr>
@@ -39134,7 +40115,7 @@
             </p:nvSpPr>
             <p:spPr>
               <a:xfrm>
-                <a:off x="7504301" y="6482262"/>
+                <a:off x="7504301" y="4370651"/>
                 <a:ext cx="1059543" cy="369332"/>
               </a:xfrm>
               <a:prstGeom prst="rect">
@@ -39176,13 +40157,13 @@
             </p:txBody>
           </p:sp>
         </mc:Choice>
-        <mc:Fallback xmlns="">
+        <mc:Fallback>
           <p:sp>
             <p:nvSpPr>
               <p:cNvPr id="15" name="TextBox 28">
                 <a:extLst>
                   <a:ext uri="{FF2B5EF4-FFF2-40B4-BE49-F238E27FC236}">
-                    <a16:creationId xmlns:a16="http://schemas.microsoft.com/office/drawing/2014/main" id="{F8424A97-4931-D4FB-2715-5C7B8EF2182B}"/>
+                    <a16:creationId xmlns:a16="http://schemas.microsoft.com/office/drawing/2014/main" id="{0BFF65D1-3AE6-F606-65CE-8753A55A46A4}"/>
                   </a:ext>
                 </a:extLst>
               </p:cNvPr>
@@ -39193,7 +40174,7 @@
             </p:nvSpPr>
             <p:spPr>
               <a:xfrm>
-                <a:off x="7504301" y="6482262"/>
+                <a:off x="7504301" y="4370651"/>
                 <a:ext cx="1059543" cy="369332"/>
               </a:xfrm>
               <a:prstGeom prst="rect">
@@ -39211,7 +40192,7 @@
               <a:lstStyle/>
               <a:p>
                 <a:r>
-                  <a:rPr lang="pt-BR">
+                  <a:rPr lang="en-US">
                     <a:noFill/>
                   </a:rPr>
                   <a:t> </a:t>
@@ -39221,14 +40202,14 @@
           </p:sp>
         </mc:Fallback>
       </mc:AlternateContent>
-      <mc:AlternateContent xmlns:mc="http://schemas.openxmlformats.org/markup-compatibility/2006" xmlns:a14="http://schemas.microsoft.com/office/drawing/2010/main">
-        <mc:Choice Requires="a14">
+      <mc:AlternateContent xmlns:mc="http://schemas.openxmlformats.org/markup-compatibility/2006">
+        <mc:Choice xmlns:a14="http://schemas.microsoft.com/office/drawing/2010/main" Requires="a14">
           <p:sp>
             <p:nvSpPr>
               <p:cNvPr id="16" name="TextBox 29">
                 <a:extLst>
                   <a:ext uri="{FF2B5EF4-FFF2-40B4-BE49-F238E27FC236}">
-                    <a16:creationId xmlns:a16="http://schemas.microsoft.com/office/drawing/2014/main" id="{F4403508-F5BF-1E8E-02DB-4035FA6169FC}"/>
+                    <a16:creationId xmlns:a16="http://schemas.microsoft.com/office/drawing/2014/main" id="{A8013C86-EDB8-0F4F-5437-D60CCA588A3A}"/>
                   </a:ext>
                 </a:extLst>
               </p:cNvPr>
@@ -39237,7 +40218,7 @@
             </p:nvSpPr>
             <p:spPr>
               <a:xfrm>
-                <a:off x="8141180" y="6493794"/>
+                <a:off x="8141180" y="4382183"/>
                 <a:ext cx="1059543" cy="369332"/>
               </a:xfrm>
               <a:prstGeom prst="rect">
@@ -39286,13 +40267,13 @@
             </p:txBody>
           </p:sp>
         </mc:Choice>
-        <mc:Fallback xmlns="">
+        <mc:Fallback>
           <p:sp>
             <p:nvSpPr>
               <p:cNvPr id="16" name="TextBox 29">
                 <a:extLst>
                   <a:ext uri="{FF2B5EF4-FFF2-40B4-BE49-F238E27FC236}">
-                    <a16:creationId xmlns:a16="http://schemas.microsoft.com/office/drawing/2014/main" id="{F4403508-F5BF-1E8E-02DB-4035FA6169FC}"/>
+                    <a16:creationId xmlns:a16="http://schemas.microsoft.com/office/drawing/2014/main" id="{A8013C86-EDB8-0F4F-5437-D60CCA588A3A}"/>
                   </a:ext>
                 </a:extLst>
               </p:cNvPr>
@@ -39303,7 +40284,7 @@
             </p:nvSpPr>
             <p:spPr>
               <a:xfrm>
-                <a:off x="8141180" y="6493794"/>
+                <a:off x="8141180" y="4382183"/>
                 <a:ext cx="1059543" cy="369332"/>
               </a:xfrm>
               <a:prstGeom prst="rect">
@@ -39321,7 +40302,7 @@
               <a:lstStyle/>
               <a:p>
                 <a:r>
-                  <a:rPr lang="pt-BR">
+                  <a:rPr lang="en-US">
                     <a:noFill/>
                   </a:rPr>
                   <a:t> </a:t>
@@ -39331,14 +40312,14 @@
           </p:sp>
         </mc:Fallback>
       </mc:AlternateContent>
-      <mc:AlternateContent xmlns:mc="http://schemas.openxmlformats.org/markup-compatibility/2006" xmlns:a14="http://schemas.microsoft.com/office/drawing/2010/main">
-        <mc:Choice Requires="a14">
+      <mc:AlternateContent xmlns:mc="http://schemas.openxmlformats.org/markup-compatibility/2006">
+        <mc:Choice xmlns:a14="http://schemas.microsoft.com/office/drawing/2010/main" Requires="a14">
           <p:sp>
             <p:nvSpPr>
               <p:cNvPr id="17" name="TextBox 19">
                 <a:extLst>
                   <a:ext uri="{FF2B5EF4-FFF2-40B4-BE49-F238E27FC236}">
-                    <a16:creationId xmlns:a16="http://schemas.microsoft.com/office/drawing/2014/main" id="{34060A1D-2E52-39F5-0DF8-189C862047D9}"/>
+                    <a16:creationId xmlns:a16="http://schemas.microsoft.com/office/drawing/2014/main" id="{357BFBCA-02B4-CEB5-7178-D86ABD6A8692}"/>
                   </a:ext>
                 </a:extLst>
               </p:cNvPr>
@@ -39347,7 +40328,7 @@
             </p:nvSpPr>
             <p:spPr>
               <a:xfrm>
-                <a:off x="6822682" y="6490418"/>
+                <a:off x="6822682" y="4378807"/>
                 <a:ext cx="1059543" cy="369332"/>
               </a:xfrm>
               <a:prstGeom prst="rect">
@@ -39396,13 +40377,13 @@
             </p:txBody>
           </p:sp>
         </mc:Choice>
-        <mc:Fallback xmlns="">
+        <mc:Fallback>
           <p:sp>
             <p:nvSpPr>
               <p:cNvPr id="17" name="TextBox 19">
                 <a:extLst>
                   <a:ext uri="{FF2B5EF4-FFF2-40B4-BE49-F238E27FC236}">
-                    <a16:creationId xmlns:a16="http://schemas.microsoft.com/office/drawing/2014/main" id="{34060A1D-2E52-39F5-0DF8-189C862047D9}"/>
+                    <a16:creationId xmlns:a16="http://schemas.microsoft.com/office/drawing/2014/main" id="{357BFBCA-02B4-CEB5-7178-D86ABD6A8692}"/>
                   </a:ext>
                 </a:extLst>
               </p:cNvPr>
@@ -39413,7 +40394,7 @@
             </p:nvSpPr>
             <p:spPr>
               <a:xfrm>
-                <a:off x="6822682" y="6490418"/>
+                <a:off x="6822682" y="4378807"/>
                 <a:ext cx="1059543" cy="369332"/>
               </a:xfrm>
               <a:prstGeom prst="rect">
@@ -39431,7 +40412,7 @@
               <a:lstStyle/>
               <a:p>
                 <a:r>
-                  <a:rPr lang="pt-BR">
+                  <a:rPr lang="en-US">
                     <a:noFill/>
                   </a:rPr>
                   <a:t> </a:t>
@@ -39446,7 +40427,7 @@
           <p:cNvPr id="18" name="Rectangle 3">
             <a:extLst>
               <a:ext uri="{FF2B5EF4-FFF2-40B4-BE49-F238E27FC236}">
-                <a16:creationId xmlns:a16="http://schemas.microsoft.com/office/drawing/2014/main" id="{A93A9D3A-8C54-B58D-C4C0-7F2E2E3666A0}"/>
+                <a16:creationId xmlns:a16="http://schemas.microsoft.com/office/drawing/2014/main" id="{ECC1348D-ED69-1853-49EB-C944A25E0844}"/>
               </a:ext>
             </a:extLst>
           </p:cNvPr>
@@ -39487,7 +40468,7 @@
     </p:spTree>
     <p:extLst>
       <p:ext uri="{BB962C8B-B14F-4D97-AF65-F5344CB8AC3E}">
-        <p14:creationId xmlns:p14="http://schemas.microsoft.com/office/powerpoint/2010/main" val="938094781"/>
+        <p14:creationId xmlns:p14="http://schemas.microsoft.com/office/powerpoint/2010/main" val="3409471373"/>
       </p:ext>
     </p:extLst>
   </p:cSld>
@@ -39497,7 +40478,7 @@
 </p:sld>
 </file>
 
-<file path=ppt/slides/slide8.xml><?xml version="1.0" encoding="utf-8"?>
+<file path=ppt/slides/slide9.xml><?xml version="1.0" encoding="utf-8"?>
 <p:sld xmlns:a="http://schemas.openxmlformats.org/drawingml/2006/main" xmlns:r="http://schemas.openxmlformats.org/officeDocument/2006/relationships" xmlns:p="http://schemas.openxmlformats.org/presentationml/2006/main">
   <p:cSld>
     <p:spTree>
@@ -39991,527 +40972,6 @@
     <p:extLst>
       <p:ext uri="{BB962C8B-B14F-4D97-AF65-F5344CB8AC3E}">
         <p14:creationId xmlns:p14="http://schemas.microsoft.com/office/powerpoint/2010/main" val="1648661492"/>
-      </p:ext>
-    </p:extLst>
-  </p:cSld>
-  <p:clrMapOvr>
-    <a:masterClrMapping/>
-  </p:clrMapOvr>
-</p:sld>
-</file>
-
-<file path=ppt/slides/slide9.xml><?xml version="1.0" encoding="utf-8"?>
-<p:sld xmlns:a="http://schemas.openxmlformats.org/drawingml/2006/main" xmlns:r="http://schemas.openxmlformats.org/officeDocument/2006/relationships" xmlns:p="http://schemas.openxmlformats.org/presentationml/2006/main">
-  <p:cSld>
-    <p:spTree>
-      <p:nvGrpSpPr>
-        <p:cNvPr id="1" name=""/>
-        <p:cNvGrpSpPr/>
-        <p:nvPr/>
-      </p:nvGrpSpPr>
-      <p:grpSpPr>
-        <a:xfrm>
-          <a:off x="0" y="0"/>
-          <a:ext cx="0" cy="0"/>
-          <a:chOff x="0" y="0"/>
-          <a:chExt cx="0" cy="0"/>
-        </a:xfrm>
-      </p:grpSpPr>
-      <p:sp>
-        <p:nvSpPr>
-          <p:cNvPr id="2" name="Título 1">
-            <a:extLst>
-              <a:ext uri="{FF2B5EF4-FFF2-40B4-BE49-F238E27FC236}">
-                <a16:creationId xmlns:a16="http://schemas.microsoft.com/office/drawing/2014/main" id="{53807E1E-02FA-BE90-DF8D-F7CD2EFB6D24}"/>
-              </a:ext>
-            </a:extLst>
-          </p:cNvPr>
-          <p:cNvSpPr>
-            <a:spLocks noGrp="1"/>
-          </p:cNvSpPr>
-          <p:nvPr>
-            <p:ph type="title"/>
-          </p:nvPr>
-        </p:nvSpPr>
-        <p:spPr/>
-        <p:txBody>
-          <a:bodyPr/>
-          <a:lstStyle/>
-          <a:p>
-            <a:r>
-              <a:rPr lang="pt-BR" dirty="0"/>
-              <a:t>Passo de aprendizado grande</a:t>
-            </a:r>
-          </a:p>
-        </p:txBody>
-      </p:sp>
-      <mc:AlternateContent xmlns:mc="http://schemas.openxmlformats.org/markup-compatibility/2006" xmlns:a14="http://schemas.microsoft.com/office/drawing/2010/main">
-        <mc:Choice Requires="a14">
-          <p:sp>
-            <p:nvSpPr>
-              <p:cNvPr id="3" name="Espaço Reservado para Conteúdo 2">
-                <a:extLst>
-                  <a:ext uri="{FF2B5EF4-FFF2-40B4-BE49-F238E27FC236}">
-                    <a16:creationId xmlns:a16="http://schemas.microsoft.com/office/drawing/2014/main" id="{E69917BF-2F45-6A09-7D88-35A718CBAA50}"/>
-                  </a:ext>
-                </a:extLst>
-              </p:cNvPr>
-              <p:cNvSpPr>
-                <a:spLocks noGrp="1"/>
-              </p:cNvSpPr>
-              <p:nvPr>
-                <p:ph idx="1"/>
-              </p:nvPr>
-            </p:nvSpPr>
-            <p:spPr>
-              <a:xfrm>
-                <a:off x="838200" y="1825624"/>
-                <a:ext cx="11253715" cy="4881733"/>
-              </a:xfrm>
-            </p:spPr>
-            <p:txBody>
-              <a:bodyPr>
-                <a:normAutofit/>
-              </a:bodyPr>
-              <a:lstStyle/>
-              <a:p>
-                <a:r>
-                  <a:rPr lang="pt-BR" dirty="0"/>
-                  <a:t>Caso o passo seja grande, o algoritmo pode nunca convergir.</a:t>
-                </a:r>
-              </a:p>
-              <a:p>
-                <a:r>
-                  <a:rPr lang="pt-BR" dirty="0"/>
-                  <a:t>Se o passo</a:t>
-                </a:r>
-                <a14:m>
-                  <m:oMath xmlns:m="http://schemas.openxmlformats.org/officeDocument/2006/math">
-                    <m:r>
-                      <a:rPr lang="pt-BR" i="1">
-                        <a:latin typeface="Cambria Math" panose="02040503050406030204" pitchFamily="18" charset="0"/>
-                        <a:ea typeface="Cambria Math" panose="02040503050406030204" pitchFamily="18" charset="0"/>
-                      </a:rPr>
-                      <m:t> </m:t>
-                    </m:r>
-                  </m:oMath>
-                </a14:m>
-                <a:r>
-                  <a:rPr lang="pt-BR" dirty="0"/>
-                  <a:t>for grande, </a:t>
-                </a:r>
-                <a:r>
-                  <a:rPr lang="pt-BR" b="1" i="1" dirty="0">
-                    <a:solidFill>
-                      <a:srgbClr val="00B050"/>
-                    </a:solidFill>
-                  </a:rPr>
-                  <a:t>mas não tão grande assim</a:t>
-                </a:r>
-                <a:r>
-                  <a:rPr lang="pt-BR" dirty="0"/>
-                  <a:t>, o algoritmo pode ficar “</a:t>
-                </a:r>
-                <a:r>
-                  <a:rPr lang="pt-BR" b="1" i="1" dirty="0">
-                    <a:solidFill>
-                      <a:srgbClr val="00B050"/>
-                    </a:solidFill>
-                  </a:rPr>
-                  <a:t>pulando</a:t>
-                </a:r>
-                <a:r>
-                  <a:rPr lang="pt-BR" dirty="0"/>
-                  <a:t>” ou “</a:t>
-                </a:r>
-                <a:r>
-                  <a:rPr lang="pt-BR" b="1" i="1" dirty="0">
-                    <a:solidFill>
-                      <a:srgbClr val="00B050"/>
-                    </a:solidFill>
-                  </a:rPr>
-                  <a:t>oscilando</a:t>
-                </a:r>
-                <a:r>
-                  <a:rPr lang="pt-BR" dirty="0"/>
-                  <a:t>” </a:t>
-                </a:r>
-                <a:r>
-                  <a:rPr lang="pt-BR" b="1" i="1" dirty="0">
-                    <a:solidFill>
-                      <a:srgbClr val="00B050"/>
-                    </a:solidFill>
-                  </a:rPr>
-                  <a:t>de um lado para o outro da superfície de erro </a:t>
-                </a:r>
-                <a:r>
-                  <a:rPr lang="pt-BR" dirty="0"/>
-                  <a:t>até que, por sorte, ele converge.</a:t>
-                </a:r>
-              </a:p>
-              <a:p>
-                <a:pPr lvl="1">
-                  <a:buFont typeface="Wingdings" panose="05000000000000000000" pitchFamily="2" charset="2"/>
-                  <a:buChar char="§"/>
-                </a:pPr>
-                <a:r>
-                  <a:rPr lang="pt-BR" dirty="0">
-                    <a:ea typeface="Cambria Math" panose="02040503050406030204" pitchFamily="18" charset="0"/>
-                  </a:rPr>
-                  <a:t>No exemplo abaixo, com </a:t>
-                </a:r>
-                <a14:m>
-                  <m:oMath xmlns:m="http://schemas.openxmlformats.org/officeDocument/2006/math">
-                    <m:r>
-                      <a:rPr lang="pt-BR" i="1">
-                        <a:latin typeface="Cambria Math" panose="02040503050406030204" pitchFamily="18" charset="0"/>
-                        <a:ea typeface="Cambria Math" panose="02040503050406030204" pitchFamily="18" charset="0"/>
-                      </a:rPr>
-                      <m:t>𝛼</m:t>
-                    </m:r>
-                    <m:r>
-                      <a:rPr lang="pt-BR" i="1">
-                        <a:latin typeface="Cambria Math" panose="02040503050406030204" pitchFamily="18" charset="0"/>
-                        <a:ea typeface="Cambria Math" panose="02040503050406030204" pitchFamily="18" charset="0"/>
-                      </a:rPr>
-                      <m:t>=1.8×</m:t>
-                    </m:r>
-                    <m:sSup>
-                      <m:sSupPr>
-                        <m:ctrlPr>
-                          <a:rPr lang="pt-BR" b="0" i="1" smtClean="0">
-                            <a:latin typeface="Cambria Math" panose="02040503050406030204" pitchFamily="18" charset="0"/>
-                          </a:rPr>
-                        </m:ctrlPr>
-                      </m:sSupPr>
-                      <m:e>
-                        <m:r>
-                          <a:rPr lang="pt-BR" b="0" i="1" smtClean="0">
-                            <a:latin typeface="Cambria Math" panose="02040503050406030204" pitchFamily="18" charset="0"/>
-                          </a:rPr>
-                          <m:t>10</m:t>
-                        </m:r>
-                      </m:e>
-                      <m:sup>
-                        <m:r>
-                          <a:rPr lang="pt-BR" b="0" i="1" smtClean="0">
-                            <a:latin typeface="Cambria Math" panose="02040503050406030204" pitchFamily="18" charset="0"/>
-                          </a:rPr>
-                          <m:t>−4</m:t>
-                        </m:r>
-                      </m:sup>
-                    </m:sSup>
-                  </m:oMath>
-                </a14:m>
-                <a:r>
-                  <a:rPr lang="pt-BR" dirty="0"/>
-                  <a:t>, o algoritmo oscila inicialmente, mas acaba convergindo após 20 épocas.</a:t>
-                </a:r>
-              </a:p>
-            </p:txBody>
-          </p:sp>
-        </mc:Choice>
-        <mc:Fallback xmlns="">
-          <p:sp>
-            <p:nvSpPr>
-              <p:cNvPr id="3" name="Espaço Reservado para Conteúdo 2">
-                <a:extLst>
-                  <a:ext uri="{FF2B5EF4-FFF2-40B4-BE49-F238E27FC236}">
-                    <a16:creationId xmlns:a16="http://schemas.microsoft.com/office/drawing/2014/main" id="{E69917BF-2F45-6A09-7D88-35A718CBAA50}"/>
-                  </a:ext>
-                </a:extLst>
-              </p:cNvPr>
-              <p:cNvSpPr>
-                <a:spLocks noGrp="1" noRot="1" noChangeAspect="1" noMove="1" noResize="1" noEditPoints="1" noAdjustHandles="1" noChangeArrowheads="1" noChangeShapeType="1" noTextEdit="1"/>
-              </p:cNvSpPr>
-              <p:nvPr>
-                <p:ph idx="1"/>
-              </p:nvPr>
-            </p:nvSpPr>
-            <p:spPr>
-              <a:xfrm>
-                <a:off x="838200" y="1825624"/>
-                <a:ext cx="11253715" cy="4881733"/>
-              </a:xfrm>
-              <a:blipFill>
-                <a:blip r:embed="rId3"/>
-                <a:stretch>
-                  <a:fillRect l="-975" t="-1998"/>
-                </a:stretch>
-              </a:blipFill>
-            </p:spPr>
-            <p:txBody>
-              <a:bodyPr/>
-              <a:lstStyle/>
-              <a:p>
-                <a:r>
-                  <a:rPr lang="pt-BR">
-                    <a:noFill/>
-                  </a:rPr>
-                  <a:t> </a:t>
-                </a:r>
-              </a:p>
-            </p:txBody>
-          </p:sp>
-        </mc:Fallback>
-      </mc:AlternateContent>
-      <p:pic>
-        <p:nvPicPr>
-          <p:cNvPr id="4" name="Picture 8">
-            <a:extLst>
-              <a:ext uri="{FF2B5EF4-FFF2-40B4-BE49-F238E27FC236}">
-                <a16:creationId xmlns:a16="http://schemas.microsoft.com/office/drawing/2014/main" id="{E1C923F9-D8D5-387C-D5B7-782CE5422B74}"/>
-              </a:ext>
-            </a:extLst>
-          </p:cNvPr>
-          <p:cNvPicPr>
-            <a:picLocks noChangeAspect="1"/>
-          </p:cNvPicPr>
-          <p:nvPr/>
-        </p:nvPicPr>
-        <p:blipFill rotWithShape="1">
-          <a:blip r:embed="rId4" cstate="print">
-            <a:extLst>
-              <a:ext uri="{28A0092B-C50C-407E-A947-70E740481C1C}">
-                <a14:useLocalDpi xmlns:a14="http://schemas.microsoft.com/office/drawing/2010/main" val="0"/>
-              </a:ext>
-            </a:extLst>
-          </a:blip>
-          <a:srcRect l="1394" t="13692" r="22970" b="19399"/>
-          <a:stretch/>
-        </p:blipFill>
-        <p:spPr>
-          <a:xfrm>
-            <a:off x="1172949" y="4372942"/>
-            <a:ext cx="2677839" cy="2368858"/>
-          </a:xfrm>
-          <a:prstGeom prst="rect">
-            <a:avLst/>
-          </a:prstGeom>
-        </p:spPr>
-      </p:pic>
-      <p:pic>
-        <p:nvPicPr>
-          <p:cNvPr id="5" name="Picture 3">
-            <a:extLst>
-              <a:ext uri="{FF2B5EF4-FFF2-40B4-BE49-F238E27FC236}">
-                <a16:creationId xmlns:a16="http://schemas.microsoft.com/office/drawing/2014/main" id="{5F7D6C9C-2DF4-F962-D10F-5412C1DA0807}"/>
-              </a:ext>
-            </a:extLst>
-          </p:cNvPr>
-          <p:cNvPicPr>
-            <a:picLocks noChangeAspect="1"/>
-          </p:cNvPicPr>
-          <p:nvPr/>
-        </p:nvPicPr>
-        <p:blipFill rotWithShape="1">
-          <a:blip r:embed="rId5" cstate="print">
-            <a:extLst>
-              <a:ext uri="{28A0092B-C50C-407E-A947-70E740481C1C}">
-                <a14:useLocalDpi xmlns:a14="http://schemas.microsoft.com/office/drawing/2010/main" val="0"/>
-              </a:ext>
-            </a:extLst>
-          </a:blip>
-          <a:srcRect t="6940" r="9378" b="2314"/>
-          <a:stretch/>
-        </p:blipFill>
-        <p:spPr>
-          <a:xfrm>
-            <a:off x="5413644" y="4373526"/>
-            <a:ext cx="2369910" cy="2373159"/>
-          </a:xfrm>
-          <a:prstGeom prst="rect">
-            <a:avLst/>
-          </a:prstGeom>
-        </p:spPr>
-      </p:pic>
-      <p:cxnSp>
-        <p:nvCxnSpPr>
-          <p:cNvPr id="7" name="Straight Arrow Connector 7">
-            <a:extLst>
-              <a:ext uri="{FF2B5EF4-FFF2-40B4-BE49-F238E27FC236}">
-                <a16:creationId xmlns:a16="http://schemas.microsoft.com/office/drawing/2014/main" id="{98A69CEB-47F4-A85F-762F-6622419002E6}"/>
-              </a:ext>
-            </a:extLst>
-          </p:cNvPr>
-          <p:cNvCxnSpPr>
-            <a:cxnSpLocks/>
-          </p:cNvCxnSpPr>
-          <p:nvPr/>
-        </p:nvCxnSpPr>
-        <p:spPr>
-          <a:xfrm flipV="1">
-            <a:off x="5385153" y="6533910"/>
-            <a:ext cx="277779" cy="165718"/>
-          </a:xfrm>
-          <a:prstGeom prst="straightConnector1">
-            <a:avLst/>
-          </a:prstGeom>
-          <a:ln>
-            <a:solidFill>
-              <a:srgbClr val="FF0000"/>
-            </a:solidFill>
-            <a:tailEnd type="triangle"/>
-          </a:ln>
-        </p:spPr>
-        <p:style>
-          <a:lnRef idx="1">
-            <a:schemeClr val="accent1"/>
-          </a:lnRef>
-          <a:fillRef idx="0">
-            <a:schemeClr val="accent1"/>
-          </a:fillRef>
-          <a:effectRef idx="0">
-            <a:schemeClr val="accent1"/>
-          </a:effectRef>
-          <a:fontRef idx="minor">
-            <a:schemeClr val="tx1"/>
-          </a:fontRef>
-        </p:style>
-      </p:cxnSp>
-      <mc:AlternateContent xmlns:mc="http://schemas.openxmlformats.org/markup-compatibility/2006" xmlns:a14="http://schemas.microsoft.com/office/drawing/2010/main">
-        <mc:Choice Requires="a14">
-          <p:sp>
-            <p:nvSpPr>
-              <p:cNvPr id="8" name="TextBox 10">
-                <a:extLst>
-                  <a:ext uri="{FF2B5EF4-FFF2-40B4-BE49-F238E27FC236}">
-                    <a16:creationId xmlns:a16="http://schemas.microsoft.com/office/drawing/2014/main" id="{54AC2781-3C16-CFC1-9D56-9FC370256E77}"/>
-                  </a:ext>
-                </a:extLst>
-              </p:cNvPr>
-              <p:cNvSpPr txBox="1"/>
-              <p:nvPr/>
-            </p:nvSpPr>
-            <p:spPr>
-              <a:xfrm>
-                <a:off x="4380464" y="6530351"/>
-                <a:ext cx="1263477" cy="338554"/>
-              </a:xfrm>
-              <a:prstGeom prst="rect">
-                <a:avLst/>
-              </a:prstGeom>
-              <a:noFill/>
-            </p:spPr>
-            <p:txBody>
-              <a:bodyPr wrap="square" rtlCol="0">
-                <a:spAutoFit/>
-              </a:bodyPr>
-              <a:lstStyle/>
-              <a:p>
-                <a:pPr algn="ctr"/>
-                <a14:m>
-                  <m:oMath xmlns:m="http://schemas.openxmlformats.org/officeDocument/2006/math">
-                    <m:r>
-                      <a:rPr lang="pt-BR" sz="1600" b="1" i="1" smtClean="0">
-                        <a:latin typeface="Cambria Math" panose="02040503050406030204" pitchFamily="18" charset="0"/>
-                      </a:rPr>
-                      <m:t>𝒂</m:t>
-                    </m:r>
-                  </m:oMath>
-                </a14:m>
-                <a:r>
-                  <a:rPr lang="pt-BR" sz="1600" dirty="0"/>
-                  <a:t> inicial</a:t>
-                </a:r>
-              </a:p>
-            </p:txBody>
-          </p:sp>
-        </mc:Choice>
-        <mc:Fallback xmlns="">
-          <p:sp>
-            <p:nvSpPr>
-              <p:cNvPr id="8" name="TextBox 10">
-                <a:extLst>
-                  <a:ext uri="{FF2B5EF4-FFF2-40B4-BE49-F238E27FC236}">
-                    <a16:creationId xmlns:a16="http://schemas.microsoft.com/office/drawing/2014/main" id="{54AC2781-3C16-CFC1-9D56-9FC370256E77}"/>
-                  </a:ext>
-                </a:extLst>
-              </p:cNvPr>
-              <p:cNvSpPr txBox="1">
-                <a:spLocks noRot="1" noChangeAspect="1" noMove="1" noResize="1" noEditPoints="1" noAdjustHandles="1" noChangeArrowheads="1" noChangeShapeType="1" noTextEdit="1"/>
-              </p:cNvSpPr>
-              <p:nvPr/>
-            </p:nvSpPr>
-            <p:spPr>
-              <a:xfrm>
-                <a:off x="4380464" y="6530351"/>
-                <a:ext cx="1263477" cy="338554"/>
-              </a:xfrm>
-              <a:prstGeom prst="rect">
-                <a:avLst/>
-              </a:prstGeom>
-              <a:blipFill>
-                <a:blip r:embed="rId6"/>
-                <a:stretch>
-                  <a:fillRect t="-5357" b="-21429"/>
-                </a:stretch>
-              </a:blipFill>
-            </p:spPr>
-            <p:txBody>
-              <a:bodyPr/>
-              <a:lstStyle/>
-              <a:p>
-                <a:r>
-                  <a:rPr lang="pt-BR">
-                    <a:noFill/>
-                  </a:rPr>
-                  <a:t> </a:t>
-                </a:r>
-              </a:p>
-            </p:txBody>
-          </p:sp>
-        </mc:Fallback>
-      </mc:AlternateContent>
-      <p:pic>
-        <p:nvPicPr>
-          <p:cNvPr id="2050" name="Picture 2">
-            <a:extLst>
-              <a:ext uri="{FF2B5EF4-FFF2-40B4-BE49-F238E27FC236}">
-                <a16:creationId xmlns:a16="http://schemas.microsoft.com/office/drawing/2014/main" id="{6232E825-A6A5-D6AD-ED62-433ACECDE117}"/>
-              </a:ext>
-            </a:extLst>
-          </p:cNvPr>
-          <p:cNvPicPr>
-            <a:picLocks noChangeAspect="1" noChangeArrowheads="1"/>
-          </p:cNvPicPr>
-          <p:nvPr/>
-        </p:nvPicPr>
-        <p:blipFill rotWithShape="1">
-          <a:blip r:embed="rId7">
-            <a:extLst>
-              <a:ext uri="{28A0092B-C50C-407E-A947-70E740481C1C}">
-                <a14:useLocalDpi xmlns:a14="http://schemas.microsoft.com/office/drawing/2010/main" val="0"/>
-              </a:ext>
-            </a:extLst>
-          </a:blip>
-          <a:srcRect l="50000"/>
-          <a:stretch/>
-        </p:blipFill>
-        <p:spPr bwMode="auto">
-          <a:xfrm>
-            <a:off x="9337328" y="4375353"/>
-            <a:ext cx="2129926" cy="2363275"/>
-          </a:xfrm>
-          <a:prstGeom prst="rect">
-            <a:avLst/>
-          </a:prstGeom>
-          <a:noFill/>
-          <a:extLst>
-            <a:ext uri="{909E8E84-426E-40DD-AFC4-6F175D3DCCD1}">
-              <a14:hiddenFill xmlns:a14="http://schemas.microsoft.com/office/drawing/2010/main">
-                <a:solidFill>
-                  <a:srgbClr val="FFFFFF"/>
-                </a:solidFill>
-              </a14:hiddenFill>
-            </a:ext>
-          </a:extLst>
-        </p:spPr>
-      </p:pic>
-    </p:spTree>
-    <p:extLst>
-      <p:ext uri="{BB962C8B-B14F-4D97-AF65-F5344CB8AC3E}">
-        <p14:creationId xmlns:p14="http://schemas.microsoft.com/office/powerpoint/2010/main" val="3605936758"/>
       </p:ext>
     </p:extLst>
   </p:cSld>

--- a/slides/T319_Regressão_Linear (Parte III).pptx
+++ b/slides/T319_Regressão_Linear (Parte III).pptx
@@ -2,55 +2,56 @@
 <file path=ppt/presentation.xml><?xml version="1.0" encoding="utf-8"?>
 <p:presentation xmlns:a="http://schemas.openxmlformats.org/drawingml/2006/main" xmlns:r="http://schemas.openxmlformats.org/officeDocument/2006/relationships" xmlns:p="http://schemas.openxmlformats.org/presentationml/2006/main" saveSubsetFonts="1">
   <p:sldMasterIdLst>
-    <p:sldMasterId id="2147483648" r:id="rId1"/>
+    <p:sldMasterId id="2147483648" r:id="rId4"/>
   </p:sldMasterIdLst>
   <p:notesMasterIdLst>
-    <p:notesMasterId r:id="rId45"/>
+    <p:notesMasterId r:id="rId49"/>
   </p:notesMasterIdLst>
   <p:sldIdLst>
-    <p:sldId id="259" r:id="rId2"/>
-    <p:sldId id="463" r:id="rId3"/>
-    <p:sldId id="485" r:id="rId4"/>
-    <p:sldId id="487" r:id="rId5"/>
-    <p:sldId id="513" r:id="rId6"/>
-    <p:sldId id="489" r:id="rId7"/>
-    <p:sldId id="488" r:id="rId8"/>
-    <p:sldId id="515" r:id="rId9"/>
-    <p:sldId id="486" r:id="rId10"/>
-    <p:sldId id="492" r:id="rId11"/>
-    <p:sldId id="493" r:id="rId12"/>
-    <p:sldId id="501" r:id="rId13"/>
-    <p:sldId id="494" r:id="rId14"/>
-    <p:sldId id="490" r:id="rId15"/>
-    <p:sldId id="497" r:id="rId16"/>
-    <p:sldId id="499" r:id="rId17"/>
-    <p:sldId id="500" r:id="rId18"/>
-    <p:sldId id="502" r:id="rId19"/>
-    <p:sldId id="495" r:id="rId20"/>
-    <p:sldId id="514" r:id="rId21"/>
-    <p:sldId id="496" r:id="rId22"/>
-    <p:sldId id="512" r:id="rId23"/>
-    <p:sldId id="504" r:id="rId24"/>
-    <p:sldId id="505" r:id="rId25"/>
-    <p:sldId id="508" r:id="rId26"/>
-    <p:sldId id="510" r:id="rId27"/>
-    <p:sldId id="511" r:id="rId28"/>
-    <p:sldId id="482" r:id="rId29"/>
-    <p:sldId id="317" r:id="rId30"/>
-    <p:sldId id="332" r:id="rId31"/>
-    <p:sldId id="299" r:id="rId32"/>
-    <p:sldId id="285" r:id="rId33"/>
-    <p:sldId id="415" r:id="rId34"/>
-    <p:sldId id="283" r:id="rId35"/>
-    <p:sldId id="274" r:id="rId36"/>
-    <p:sldId id="278" r:id="rId37"/>
-    <p:sldId id="292" r:id="rId38"/>
-    <p:sldId id="498" r:id="rId39"/>
-    <p:sldId id="295" r:id="rId40"/>
-    <p:sldId id="396" r:id="rId41"/>
-    <p:sldId id="484" r:id="rId42"/>
-    <p:sldId id="421" r:id="rId43"/>
-    <p:sldId id="423" r:id="rId44"/>
+    <p:sldId id="259" r:id="rId5"/>
+    <p:sldId id="463" r:id="rId6"/>
+    <p:sldId id="485" r:id="rId7"/>
+    <p:sldId id="487" r:id="rId8"/>
+    <p:sldId id="513" r:id="rId9"/>
+    <p:sldId id="489" r:id="rId10"/>
+    <p:sldId id="488" r:id="rId11"/>
+    <p:sldId id="515" r:id="rId12"/>
+    <p:sldId id="486" r:id="rId13"/>
+    <p:sldId id="492" r:id="rId14"/>
+    <p:sldId id="493" r:id="rId15"/>
+    <p:sldId id="501" r:id="rId16"/>
+    <p:sldId id="494" r:id="rId17"/>
+    <p:sldId id="490" r:id="rId18"/>
+    <p:sldId id="497" r:id="rId19"/>
+    <p:sldId id="499" r:id="rId20"/>
+    <p:sldId id="500" r:id="rId21"/>
+    <p:sldId id="502" r:id="rId22"/>
+    <p:sldId id="495" r:id="rId23"/>
+    <p:sldId id="516" r:id="rId24"/>
+    <p:sldId id="496" r:id="rId25"/>
+    <p:sldId id="512" r:id="rId26"/>
+    <p:sldId id="504" r:id="rId27"/>
+    <p:sldId id="517" r:id="rId28"/>
+    <p:sldId id="505" r:id="rId29"/>
+    <p:sldId id="508" r:id="rId30"/>
+    <p:sldId id="510" r:id="rId31"/>
+    <p:sldId id="511" r:id="rId32"/>
+    <p:sldId id="482" r:id="rId33"/>
+    <p:sldId id="317" r:id="rId34"/>
+    <p:sldId id="332" r:id="rId35"/>
+    <p:sldId id="299" r:id="rId36"/>
+    <p:sldId id="285" r:id="rId37"/>
+    <p:sldId id="415" r:id="rId38"/>
+    <p:sldId id="283" r:id="rId39"/>
+    <p:sldId id="274" r:id="rId40"/>
+    <p:sldId id="278" r:id="rId41"/>
+    <p:sldId id="292" r:id="rId42"/>
+    <p:sldId id="498" r:id="rId43"/>
+    <p:sldId id="295" r:id="rId44"/>
+    <p:sldId id="396" r:id="rId45"/>
+    <p:sldId id="484" r:id="rId46"/>
+    <p:sldId id="421" r:id="rId47"/>
+    <p:sldId id="423" r:id="rId48"/>
   </p:sldIdLst>
   <p:sldSz cx="12192000" cy="6858000"/>
   <p:notesSz cx="6858000" cy="9144000"/>
@@ -157,333 +158,6 @@
 </p:presentation>
 </file>
 
-<file path=ppt/revisionInfo.xml><?xml version="1.0" encoding="utf-8"?>
-<p1510:revInfo xmlns:a="http://schemas.openxmlformats.org/drawingml/2006/main" xmlns:r="http://schemas.openxmlformats.org/officeDocument/2006/relationships" xmlns:p1510="http://schemas.microsoft.com/office/powerpoint/2015/10/main">
-  <p1510:revLst>
-    <p1510:client id="{20CAF96C-3A3A-4667-836E-5D2043E55A0D}" v="89" dt="2020-02-17T16:29:36.671"/>
-    <p1510:client id="{328F8323-A8B4-4BB5-8B29-141FF986EA24}" v="11" dt="2020-04-06T19:56:50.842"/>
-    <p1510:client id="{58D05219-7C7B-4B91-A7AF-DC0AF21441D4}" v="8" dt="2020-03-15T18:19:04.037"/>
-    <p1510:client id="{62FC7D01-7DC2-4ECC-8EE4-941CF425DBEE}" v="272" dt="2020-04-04T01:47:57.654"/>
-    <p1510:client id="{7B93843C-DFF4-4B6D-9934-AB8C4C568E2D}" v="86" dt="2020-03-14T00:29:41.866"/>
-    <p1510:client id="{B7CA8C48-7DAD-40D1-BA98-01463637147D}" v="67" dt="2020-03-14T21:04:21.668"/>
-    <p1510:client id="{BAE3137E-5ED2-488F-90AA-67C3B75162E2}" v="4" dt="2020-04-06T18:41:56.776"/>
-  </p1510:revLst>
-</p1510:revInfo>
-</file>
-
-<file path=ppt/changesInfos/changesInfo1.xml><?xml version="1.0" encoding="utf-8"?>
-<pc:chgInfo xmlns:a="http://schemas.openxmlformats.org/drawingml/2006/main" xmlns:r="http://schemas.openxmlformats.org/officeDocument/2006/relationships" xmlns:ac="http://schemas.microsoft.com/office/drawing/2013/main/command" xmlns:pc="http://schemas.microsoft.com/office/powerpoint/2013/main/command">
-  <pc:docChgLst>
-    <pc:chgData name="Felipe Augusto Pereira de Figueiredo" userId="e1771b70d906f94b" providerId="Windows Live" clId="Web-{B7CA8C48-7DAD-40D1-BA98-01463637147D}"/>
-    <pc:docChg chg="modSld">
-      <pc:chgData name="Felipe Augusto Pereira de Figueiredo" userId="e1771b70d906f94b" providerId="Windows Live" clId="Web-{B7CA8C48-7DAD-40D1-BA98-01463637147D}" dt="2020-03-14T21:04:21.668" v="66" actId="20577"/>
-      <pc:docMkLst>
-        <pc:docMk/>
-      </pc:docMkLst>
-      <pc:sldChg chg="modSp">
-        <pc:chgData name="Felipe Augusto Pereira de Figueiredo" userId="e1771b70d906f94b" providerId="Windows Live" clId="Web-{B7CA8C48-7DAD-40D1-BA98-01463637147D}" dt="2020-03-14T21:04:21.668" v="65" actId="20577"/>
-        <pc:sldMkLst>
-          <pc:docMk/>
-          <pc:sldMk cId="63867976" sldId="310"/>
-        </pc:sldMkLst>
-        <pc:spChg chg="mod">
-          <ac:chgData name="Felipe Augusto Pereira de Figueiredo" userId="e1771b70d906f94b" providerId="Windows Live" clId="Web-{B7CA8C48-7DAD-40D1-BA98-01463637147D}" dt="2020-03-14T21:04:21.668" v="65" actId="20577"/>
-          <ac:spMkLst>
-            <pc:docMk/>
-            <pc:sldMk cId="63867976" sldId="310"/>
-            <ac:spMk id="3" creationId="{00000000-0000-0000-0000-000000000000}"/>
-          </ac:spMkLst>
-        </pc:spChg>
-      </pc:sldChg>
-    </pc:docChg>
-  </pc:docChgLst>
-  <pc:docChgLst>
-    <pc:chgData name="Felipe Augusto Pereira de Figueiredo" userId="e1771b70d906f94b" providerId="Windows Live" clId="Web-{BAE3137E-5ED2-488F-90AA-67C3B75162E2}"/>
-    <pc:docChg chg="delSld">
-      <pc:chgData name="Felipe Augusto Pereira de Figueiredo" userId="e1771b70d906f94b" providerId="Windows Live" clId="Web-{BAE3137E-5ED2-488F-90AA-67C3B75162E2}" dt="2020-04-06T18:41:56.776" v="3"/>
-      <pc:docMkLst>
-        <pc:docMk/>
-      </pc:docMkLst>
-      <pc:sldChg chg="del">
-        <pc:chgData name="Felipe Augusto Pereira de Figueiredo" userId="e1771b70d906f94b" providerId="Windows Live" clId="Web-{BAE3137E-5ED2-488F-90AA-67C3B75162E2}" dt="2020-04-06T18:41:36.120" v="0"/>
-        <pc:sldMkLst>
-          <pc:docMk/>
-          <pc:sldMk cId="2987778591" sldId="361"/>
-        </pc:sldMkLst>
-      </pc:sldChg>
-      <pc:sldChg chg="del">
-        <pc:chgData name="Felipe Augusto Pereira de Figueiredo" userId="e1771b70d906f94b" providerId="Windows Live" clId="Web-{BAE3137E-5ED2-488F-90AA-67C3B75162E2}" dt="2020-04-06T18:41:56.698" v="2"/>
-        <pc:sldMkLst>
-          <pc:docMk/>
-          <pc:sldMk cId="1383714521" sldId="385"/>
-        </pc:sldMkLst>
-      </pc:sldChg>
-      <pc:sldChg chg="del">
-        <pc:chgData name="Felipe Augusto Pereira de Figueiredo" userId="e1771b70d906f94b" providerId="Windows Live" clId="Web-{BAE3137E-5ED2-488F-90AA-67C3B75162E2}" dt="2020-04-06T18:41:56.776" v="3"/>
-        <pc:sldMkLst>
-          <pc:docMk/>
-          <pc:sldMk cId="1326828379" sldId="386"/>
-        </pc:sldMkLst>
-      </pc:sldChg>
-      <pc:sldChg chg="del">
-        <pc:chgData name="Felipe Augusto Pereira de Figueiredo" userId="e1771b70d906f94b" providerId="Windows Live" clId="Web-{BAE3137E-5ED2-488F-90AA-67C3B75162E2}" dt="2020-04-06T18:41:48.901" v="1"/>
-        <pc:sldMkLst>
-          <pc:docMk/>
-          <pc:sldMk cId="2260281898" sldId="387"/>
-        </pc:sldMkLst>
-      </pc:sldChg>
-    </pc:docChg>
-  </pc:docChgLst>
-  <pc:docChgLst>
-    <pc:chgData name="Felipe Augusto Pereira de Figueiredo" userId="e1771b70d906f94b" providerId="Windows Live" clId="Web-{20CAF96C-3A3A-4667-836E-5D2043E55A0D}"/>
-    <pc:docChg chg="addSld modSld">
-      <pc:chgData name="Felipe Augusto Pereira de Figueiredo" userId="e1771b70d906f94b" providerId="Windows Live" clId="Web-{20CAF96C-3A3A-4667-836E-5D2043E55A0D}" dt="2020-02-17T16:29:36.671" v="85"/>
-      <pc:docMkLst>
-        <pc:docMk/>
-      </pc:docMkLst>
-      <pc:sldChg chg="delSp modSp">
-        <pc:chgData name="Felipe Augusto Pereira de Figueiredo" userId="e1771b70d906f94b" providerId="Windows Live" clId="Web-{20CAF96C-3A3A-4667-836E-5D2043E55A0D}" dt="2020-02-17T16:28:56.981" v="84"/>
-        <pc:sldMkLst>
-          <pc:docMk/>
-          <pc:sldMk cId="2105159769" sldId="256"/>
-        </pc:sldMkLst>
-        <pc:spChg chg="mod">
-          <ac:chgData name="Felipe Augusto Pereira de Figueiredo" userId="e1771b70d906f94b" providerId="Windows Live" clId="Web-{20CAF96C-3A3A-4667-836E-5D2043E55A0D}" dt="2020-02-17T16:28:51.715" v="81" actId="20577"/>
-          <ac:spMkLst>
-            <pc:docMk/>
-            <pc:sldMk cId="2105159769" sldId="256"/>
-            <ac:spMk id="2" creationId="{00000000-0000-0000-0000-000000000000}"/>
-          </ac:spMkLst>
-        </pc:spChg>
-        <pc:spChg chg="del mod">
-          <ac:chgData name="Felipe Augusto Pereira de Figueiredo" userId="e1771b70d906f94b" providerId="Windows Live" clId="Web-{20CAF96C-3A3A-4667-836E-5D2043E55A0D}" dt="2020-02-17T16:28:56.981" v="84"/>
-          <ac:spMkLst>
-            <pc:docMk/>
-            <pc:sldMk cId="2105159769" sldId="256"/>
-            <ac:spMk id="3" creationId="{00000000-0000-0000-0000-000000000000}"/>
-          </ac:spMkLst>
-        </pc:spChg>
-      </pc:sldChg>
-      <pc:sldChg chg="new">
-        <pc:chgData name="Felipe Augusto Pereira de Figueiredo" userId="e1771b70d906f94b" providerId="Windows Live" clId="Web-{20CAF96C-3A3A-4667-836E-5D2043E55A0D}" dt="2020-02-17T16:29:36.671" v="85"/>
-        <pc:sldMkLst>
-          <pc:docMk/>
-          <pc:sldMk cId="2437199265" sldId="257"/>
-        </pc:sldMkLst>
-      </pc:sldChg>
-    </pc:docChg>
-  </pc:docChgLst>
-  <pc:docChgLst>
-    <pc:chgData name="Felipe Augusto Pereira de Figueiredo" userId="e1771b70d906f94b" providerId="Windows Live" clId="Web-{08E38356-0DC9-4DD7-A6CF-E66A8B5B2F0A}"/>
-    <pc:docChg chg="modSld">
-      <pc:chgData name="Felipe Augusto Pereira de Figueiredo" userId="e1771b70d906f94b" providerId="Windows Live" clId="Web-{08E38356-0DC9-4DD7-A6CF-E66A8B5B2F0A}" dt="2020-03-18T17:39:02.661" v="87"/>
-      <pc:docMkLst>
-        <pc:docMk/>
-      </pc:docMkLst>
-      <pc:sldChg chg="modNotes">
-        <pc:chgData name="Felipe Augusto Pereira de Figueiredo" userId="e1771b70d906f94b" providerId="Windows Live" clId="Web-{08E38356-0DC9-4DD7-A6CF-E66A8B5B2F0A}" dt="2020-03-18T17:39:02.661" v="87"/>
-        <pc:sldMkLst>
-          <pc:docMk/>
-          <pc:sldMk cId="1706263506" sldId="312"/>
-        </pc:sldMkLst>
-      </pc:sldChg>
-    </pc:docChg>
-  </pc:docChgLst>
-  <pc:docChgLst>
-    <pc:chgData name="Felipe Augusto Pereira de Figueiredo" userId="e1771b70d906f94b" providerId="Windows Live" clId="Web-{7B93843C-DFF4-4B6D-9934-AB8C4C568E2D}"/>
-    <pc:docChg chg="modSld">
-      <pc:chgData name="Felipe Augusto Pereira de Figueiredo" userId="e1771b70d906f94b" providerId="Windows Live" clId="Web-{7B93843C-DFF4-4B6D-9934-AB8C4C568E2D}" dt="2020-03-14T00:29:41.866" v="84" actId="20577"/>
-      <pc:docMkLst>
-        <pc:docMk/>
-      </pc:docMkLst>
-      <pc:sldChg chg="modSp">
-        <pc:chgData name="Felipe Augusto Pereira de Figueiredo" userId="e1771b70d906f94b" providerId="Windows Live" clId="Web-{7B93843C-DFF4-4B6D-9934-AB8C4C568E2D}" dt="2020-03-14T00:29:41.866" v="83" actId="20577"/>
-        <pc:sldMkLst>
-          <pc:docMk/>
-          <pc:sldMk cId="63867976" sldId="310"/>
-        </pc:sldMkLst>
-        <pc:spChg chg="mod">
-          <ac:chgData name="Felipe Augusto Pereira de Figueiredo" userId="e1771b70d906f94b" providerId="Windows Live" clId="Web-{7B93843C-DFF4-4B6D-9934-AB8C4C568E2D}" dt="2020-03-14T00:29:41.866" v="83" actId="20577"/>
-          <ac:spMkLst>
-            <pc:docMk/>
-            <pc:sldMk cId="63867976" sldId="310"/>
-            <ac:spMk id="2" creationId="{00000000-0000-0000-0000-000000000000}"/>
-          </ac:spMkLst>
-        </pc:spChg>
-        <pc:spChg chg="mod">
-          <ac:chgData name="Felipe Augusto Pereira de Figueiredo" userId="e1771b70d906f94b" providerId="Windows Live" clId="Web-{7B93843C-DFF4-4B6D-9934-AB8C4C568E2D}" dt="2020-03-14T00:29:05.036" v="71" actId="20577"/>
-          <ac:spMkLst>
-            <pc:docMk/>
-            <pc:sldMk cId="63867976" sldId="310"/>
-            <ac:spMk id="3" creationId="{00000000-0000-0000-0000-000000000000}"/>
-          </ac:spMkLst>
-        </pc:spChg>
-      </pc:sldChg>
-    </pc:docChg>
-  </pc:docChgLst>
-  <pc:docChgLst>
-    <pc:chgData name="Felipe Augusto Pereira de Figueiredo" userId="e1771b70d906f94b" providerId="Windows Live" clId="Web-{62FC7D01-7DC2-4ECC-8EE4-941CF425DBEE}"/>
-    <pc:docChg chg="addSld delSld modSld">
-      <pc:chgData name="Felipe Augusto Pereira de Figueiredo" userId="e1771b70d906f94b" providerId="Windows Live" clId="Web-{62FC7D01-7DC2-4ECC-8EE4-941CF425DBEE}" dt="2020-04-04T01:47:57.654" v="273" actId="1076"/>
-      <pc:docMkLst>
-        <pc:docMk/>
-      </pc:docMkLst>
-      <pc:sldChg chg="del">
-        <pc:chgData name="Felipe Augusto Pereira de Figueiredo" userId="e1771b70d906f94b" providerId="Windows Live" clId="Web-{62FC7D01-7DC2-4ECC-8EE4-941CF425DBEE}" dt="2020-04-04T01:13:21.236" v="1"/>
-        <pc:sldMkLst>
-          <pc:docMk/>
-          <pc:sldMk cId="883606865" sldId="300"/>
-        </pc:sldMkLst>
-      </pc:sldChg>
-      <pc:sldChg chg="addSp modSp">
-        <pc:chgData name="Felipe Augusto Pereira de Figueiredo" userId="e1771b70d906f94b" providerId="Windows Live" clId="Web-{62FC7D01-7DC2-4ECC-8EE4-941CF425DBEE}" dt="2020-04-04T01:47:57.654" v="273" actId="1076"/>
-        <pc:sldMkLst>
-          <pc:docMk/>
-          <pc:sldMk cId="1037579582" sldId="332"/>
-        </pc:sldMkLst>
-        <pc:picChg chg="add mod">
-          <ac:chgData name="Felipe Augusto Pereira de Figueiredo" userId="e1771b70d906f94b" providerId="Windows Live" clId="Web-{62FC7D01-7DC2-4ECC-8EE4-941CF425DBEE}" dt="2020-04-04T01:47:57.654" v="273" actId="1076"/>
-          <ac:picMkLst>
-            <pc:docMk/>
-            <pc:sldMk cId="1037579582" sldId="332"/>
-            <ac:picMk id="3" creationId="{2A0DF154-7178-4F01-A59C-CD7D1EB3AD92}"/>
-          </ac:picMkLst>
-        </pc:picChg>
-      </pc:sldChg>
-      <pc:sldChg chg="modSp">
-        <pc:chgData name="Felipe Augusto Pereira de Figueiredo" userId="e1771b70d906f94b" providerId="Windows Live" clId="Web-{62FC7D01-7DC2-4ECC-8EE4-941CF425DBEE}" dt="2020-04-04T01:25:24.877" v="195" actId="20577"/>
-        <pc:sldMkLst>
-          <pc:docMk/>
-          <pc:sldMk cId="2987778591" sldId="361"/>
-        </pc:sldMkLst>
-        <pc:spChg chg="mod">
-          <ac:chgData name="Felipe Augusto Pereira de Figueiredo" userId="e1771b70d906f94b" providerId="Windows Live" clId="Web-{62FC7D01-7DC2-4ECC-8EE4-941CF425DBEE}" dt="2020-04-04T01:25:24.877" v="195" actId="20577"/>
-          <ac:spMkLst>
-            <pc:docMk/>
-            <pc:sldMk cId="2987778591" sldId="361"/>
-            <ac:spMk id="3" creationId="{00000000-0000-0000-0000-000000000000}"/>
-          </ac:spMkLst>
-        </pc:spChg>
-      </pc:sldChg>
-      <pc:sldChg chg="modSp modNotes">
-        <pc:chgData name="Felipe Augusto Pereira de Figueiredo" userId="e1771b70d906f94b" providerId="Windows Live" clId="Web-{62FC7D01-7DC2-4ECC-8EE4-941CF425DBEE}" dt="2020-04-04T01:22:38.663" v="142" actId="14100"/>
-        <pc:sldMkLst>
-          <pc:docMk/>
-          <pc:sldMk cId="3813385247" sldId="378"/>
-        </pc:sldMkLst>
-        <pc:spChg chg="mod">
-          <ac:chgData name="Felipe Augusto Pereira de Figueiredo" userId="e1771b70d906f94b" providerId="Windows Live" clId="Web-{62FC7D01-7DC2-4ECC-8EE4-941CF425DBEE}" dt="2020-04-04T01:22:38.663" v="142" actId="14100"/>
-          <ac:spMkLst>
-            <pc:docMk/>
-            <pc:sldMk cId="3813385247" sldId="378"/>
-            <ac:spMk id="3" creationId="{00000000-0000-0000-0000-000000000000}"/>
-          </ac:spMkLst>
-        </pc:spChg>
-      </pc:sldChg>
-      <pc:sldChg chg="del">
-        <pc:chgData name="Felipe Augusto Pereira de Figueiredo" userId="e1771b70d906f94b" providerId="Windows Live" clId="Web-{62FC7D01-7DC2-4ECC-8EE4-941CF425DBEE}" dt="2020-04-04T01:24:50.391" v="175"/>
-        <pc:sldMkLst>
-          <pc:docMk/>
-          <pc:sldMk cId="2636909579" sldId="379"/>
-        </pc:sldMkLst>
-      </pc:sldChg>
-      <pc:sldChg chg="del">
-        <pc:chgData name="Felipe Augusto Pereira de Figueiredo" userId="e1771b70d906f94b" providerId="Windows Live" clId="Web-{62FC7D01-7DC2-4ECC-8EE4-941CF425DBEE}" dt="2020-04-04T01:24:50.406" v="176"/>
-        <pc:sldMkLst>
-          <pc:docMk/>
-          <pc:sldMk cId="3307251767" sldId="380"/>
-        </pc:sldMkLst>
-      </pc:sldChg>
-      <pc:sldChg chg="del">
-        <pc:chgData name="Felipe Augusto Pereira de Figueiredo" userId="e1771b70d906f94b" providerId="Windows Live" clId="Web-{62FC7D01-7DC2-4ECC-8EE4-941CF425DBEE}" dt="2020-04-04T01:28:01.669" v="197"/>
-        <pc:sldMkLst>
-          <pc:docMk/>
-          <pc:sldMk cId="1498450978" sldId="381"/>
-        </pc:sldMkLst>
-      </pc:sldChg>
-      <pc:sldChg chg="add replId">
-        <pc:chgData name="Felipe Augusto Pereira de Figueiredo" userId="e1771b70d906f94b" providerId="Windows Live" clId="Web-{62FC7D01-7DC2-4ECC-8EE4-941CF425DBEE}" dt="2020-04-04T01:13:12.219" v="0"/>
-        <pc:sldMkLst>
-          <pc:docMk/>
-          <pc:sldMk cId="1168747188" sldId="398"/>
-        </pc:sldMkLst>
-      </pc:sldChg>
-      <pc:sldChg chg="modSp new modNotes">
-        <pc:chgData name="Felipe Augusto Pereira de Figueiredo" userId="e1771b70d906f94b" providerId="Windows Live" clId="Web-{62FC7D01-7DC2-4ECC-8EE4-941CF425DBEE}" dt="2020-04-04T01:33:54.380" v="268" actId="20577"/>
-        <pc:sldMkLst>
-          <pc:docMk/>
-          <pc:sldMk cId="2414479644" sldId="399"/>
-        </pc:sldMkLst>
-        <pc:spChg chg="mod">
-          <ac:chgData name="Felipe Augusto Pereira de Figueiredo" userId="e1771b70d906f94b" providerId="Windows Live" clId="Web-{62FC7D01-7DC2-4ECC-8EE4-941CF425DBEE}" dt="2020-04-04T01:19:47.214" v="68" actId="20577"/>
-          <ac:spMkLst>
-            <pc:docMk/>
-            <pc:sldMk cId="2414479644" sldId="399"/>
-            <ac:spMk id="2" creationId="{F4227E34-0D58-4F7C-A44C-874904CC31AB}"/>
-          </ac:spMkLst>
-        </pc:spChg>
-        <pc:spChg chg="mod">
-          <ac:chgData name="Felipe Augusto Pereira de Figueiredo" userId="e1771b70d906f94b" providerId="Windows Live" clId="Web-{62FC7D01-7DC2-4ECC-8EE4-941CF425DBEE}" dt="2020-04-04T01:33:54.380" v="268" actId="20577"/>
-          <ac:spMkLst>
-            <pc:docMk/>
-            <pc:sldMk cId="2414479644" sldId="399"/>
-            <ac:spMk id="3" creationId="{96005A71-5862-4C74-B1AF-2AAB990B557F}"/>
-          </ac:spMkLst>
-        </pc:spChg>
-      </pc:sldChg>
-    </pc:docChg>
-  </pc:docChgLst>
-  <pc:docChgLst>
-    <pc:chgData name="Felipe Augusto Pereira de Figueiredo" userId="e1771b70d906f94b" providerId="Windows Live" clId="Web-{58D05219-7C7B-4B91-A7AF-DC0AF21441D4}"/>
-    <pc:docChg chg="modSld">
-      <pc:chgData name="Felipe Augusto Pereira de Figueiredo" userId="e1771b70d906f94b" providerId="Windows Live" clId="Web-{58D05219-7C7B-4B91-A7AF-DC0AF21441D4}" dt="2020-03-15T18:19:02.459" v="6" actId="20577"/>
-      <pc:docMkLst>
-        <pc:docMk/>
-      </pc:docMkLst>
-      <pc:sldChg chg="modSp">
-        <pc:chgData name="Felipe Augusto Pereira de Figueiredo" userId="e1771b70d906f94b" providerId="Windows Live" clId="Web-{58D05219-7C7B-4B91-A7AF-DC0AF21441D4}" dt="2020-03-15T18:18:57.443" v="4" actId="20577"/>
-        <pc:sldMkLst>
-          <pc:docMk/>
-          <pc:sldMk cId="63867976" sldId="310"/>
-        </pc:sldMkLst>
-        <pc:spChg chg="mod">
-          <ac:chgData name="Felipe Augusto Pereira de Figueiredo" userId="e1771b70d906f94b" providerId="Windows Live" clId="Web-{58D05219-7C7B-4B91-A7AF-DC0AF21441D4}" dt="2020-03-15T18:18:57.443" v="4" actId="20577"/>
-          <ac:spMkLst>
-            <pc:docMk/>
-            <pc:sldMk cId="63867976" sldId="310"/>
-            <ac:spMk id="3" creationId="{00000000-0000-0000-0000-000000000000}"/>
-          </ac:spMkLst>
-        </pc:spChg>
-      </pc:sldChg>
-    </pc:docChg>
-  </pc:docChgLst>
-  <pc:docChgLst>
-    <pc:chgData name="Felipe Augusto Pereira de Figueiredo" userId="e1771b70d906f94b" providerId="Windows Live" clId="Web-{328F8323-A8B4-4BB5-8B29-141FF986EA24}"/>
-    <pc:docChg chg="modSld">
-      <pc:chgData name="Felipe Augusto Pereira de Figueiredo" userId="e1771b70d906f94b" providerId="Windows Live" clId="Web-{328F8323-A8B4-4BB5-8B29-141FF986EA24}" dt="2020-04-06T19:56:50.780" v="9" actId="20577"/>
-      <pc:docMkLst>
-        <pc:docMk/>
-      </pc:docMkLst>
-      <pc:sldChg chg="modSp">
-        <pc:chgData name="Felipe Augusto Pereira de Figueiredo" userId="e1771b70d906f94b" providerId="Windows Live" clId="Web-{328F8323-A8B4-4BB5-8B29-141FF986EA24}" dt="2020-04-06T19:56:50.780" v="8" actId="20577"/>
-        <pc:sldMkLst>
-          <pc:docMk/>
-          <pc:sldMk cId="4289465553" sldId="388"/>
-        </pc:sldMkLst>
-        <pc:spChg chg="mod">
-          <ac:chgData name="Felipe Augusto Pereira de Figueiredo" userId="e1771b70d906f94b" providerId="Windows Live" clId="Web-{328F8323-A8B4-4BB5-8B29-141FF986EA24}" dt="2020-04-06T19:56:50.780" v="8" actId="20577"/>
-          <ac:spMkLst>
-            <pc:docMk/>
-            <pc:sldMk cId="4289465553" sldId="388"/>
-            <ac:spMk id="3" creationId="{00000000-0000-0000-0000-000000000000}"/>
-          </ac:spMkLst>
-        </pc:spChg>
-      </pc:sldChg>
-    </pc:docChg>
-  </pc:docChgLst>
-</pc:chgInfo>
-</file>
-
 <file path=ppt/notesMasters/notesMaster1.xml><?xml version="1.0" encoding="utf-8"?>
 <p:notesMaster xmlns:a="http://schemas.openxmlformats.org/drawingml/2006/main" xmlns:r="http://schemas.openxmlformats.org/officeDocument/2006/relationships" xmlns:p="http://schemas.openxmlformats.org/presentationml/2006/main">
   <p:cSld>
@@ -566,7 +240,7 @@
           <a:p>
             <a:fld id="{DAF0AF11-6A8A-4E64-94F5-26D4FBA2A01D}" type="datetimeFigureOut">
               <a:rPr lang="nl-BE" smtClean="0"/>
-              <a:t>10/04/2026</a:t>
+              <a:t>24/04/2026</a:t>
             </a:fld>
             <a:endParaRPr lang="nl-BE"/>
           </a:p>
@@ -937,7 +611,7 @@
       </p:grpSpPr>
       <p:sp>
         <p:nvSpPr>
-          <p:cNvPr id="2" name="Espaço Reservado para Imagem de Slide 1"/>
+          <p:cNvPr id="2" name="Slide Image Placeholder 1"/>
           <p:cNvSpPr>
             <a:spLocks noGrp="1" noRot="1" noChangeAspect="1"/>
           </p:cNvSpPr>
@@ -949,7 +623,7 @@
       </p:sp>
       <p:sp>
         <p:nvSpPr>
-          <p:cNvPr id="3" name="Espaço Reservado para Anotações 2"/>
+          <p:cNvPr id="3" name="Notes Placeholder 2"/>
           <p:cNvSpPr>
             <a:spLocks noGrp="1"/>
           </p:cNvSpPr>
@@ -980,205 +654,30 @@
               <a:defRPr/>
             </a:pPr>
             <a:r>
-              <a:rPr lang="pt-BR" b="1" dirty="0"/>
-              <a:t>Exemplo</a:t>
-            </a:r>
-            <a:r>
               <a:rPr lang="pt-BR" dirty="0"/>
-              <a:t>:</a:t>
-            </a:r>
-            <a:r>
-              <a:rPr lang="pt-BR" baseline="0" dirty="0"/>
-              <a:t> </a:t>
+              <a:t>Cada passo é adaptado com base no histórico (</a:t>
+            </a:r>
+            <a:r>
+              <a:rPr lang="en-US" dirty="0" err="1"/>
+              <a:t>comportamento</a:t>
+            </a:r>
+            <a:r>
+              <a:rPr lang="en-US" dirty="0"/>
+              <a:t> passado)</a:t>
             </a:r>
             <a:r>
               <a:rPr lang="pt-BR" dirty="0"/>
-              <a:t>https://colab.research.google.com/</a:t>
-            </a:r>
-            <a:r>
-              <a:rPr lang="pt-BR" dirty="0" err="1"/>
-              <a:t>github</a:t>
-            </a:r>
-            <a:r>
-              <a:rPr lang="pt-BR" dirty="0"/>
-              <a:t>/zz4fap/t319_aprendizado_de_maquina/</a:t>
-            </a:r>
-            <a:r>
-              <a:rPr lang="pt-BR" dirty="0" err="1"/>
-              <a:t>blob</a:t>
-            </a:r>
-            <a:r>
-              <a:rPr lang="pt-BR" dirty="0"/>
-              <a:t>/</a:t>
-            </a:r>
-            <a:r>
-              <a:rPr lang="pt-BR" dirty="0" err="1"/>
-              <a:t>main</a:t>
-            </a:r>
-            <a:r>
-              <a:rPr lang="pt-BR" dirty="0"/>
-              <a:t>/notebooks/</a:t>
-            </a:r>
-            <a:r>
-              <a:rPr lang="pt-BR" dirty="0" err="1"/>
-              <a:t>regression</a:t>
-            </a:r>
-            <a:r>
-              <a:rPr lang="pt-BR" dirty="0"/>
-              <a:t>/</a:t>
-            </a:r>
-            <a:r>
-              <a:rPr lang="pt-BR" dirty="0" err="1"/>
-              <a:t>gd_versions</a:t>
-            </a:r>
-            <a:r>
-              <a:rPr lang="pt-BR" dirty="0"/>
-              <a:t>/</a:t>
-            </a:r>
-            <a:r>
-              <a:rPr lang="pt-BR" dirty="0" err="1"/>
-              <a:t>gde_com_redução_gradual.ipynb</a:t>
-            </a:r>
-            <a:endParaRPr lang="pt-BR" dirty="0"/>
+              <a:t> dos gradientes.</a:t>
+            </a:r>
           </a:p>
           <a:p>
-            <a:endParaRPr lang="pt-BR" sz="1200" baseline="0" dirty="0"/>
-          </a:p>
-          <a:p>
-            <a:r>
-              <a:rPr lang="pt-BR" sz="1200" baseline="0" dirty="0"/>
-              <a:t>Os passos começam com grandes valores (o que ajuda a progredir rapidamente e a escapar de mínimos locais, casos em que a superfície de erro seja bastante irregular) e depois diminuem cada vez mais, permitindo que o algoritmo se estabilize no mínimo global.</a:t>
-            </a:r>
-          </a:p>
-          <a:p>
-            <a:endParaRPr lang="pt-BR" sz="1200" baseline="0" dirty="0"/>
-          </a:p>
-          <a:p>
-            <a:r>
-              <a:rPr lang="pt-BR" dirty="0"/>
-              <a:t>Se a taxa de aprendizagem for reduzida muito rapidamente, o algoritmo poderá ficar preso no mínimo local ou até ficar</a:t>
-            </a:r>
-            <a:r>
-              <a:rPr lang="pt-BR" baseline="0" dirty="0"/>
-              <a:t> travado antes de chegar ao mínimo</a:t>
-            </a:r>
-            <a:r>
-              <a:rPr lang="pt-BR" dirty="0"/>
-              <a:t>. Se a taxa de aprendizado for reduzida muito lentamente, o algoritmo poderá oscilar ao</a:t>
-            </a:r>
-            <a:r>
-              <a:rPr lang="pt-BR" baseline="0" dirty="0"/>
-              <a:t> redor do</a:t>
-            </a:r>
-            <a:r>
-              <a:rPr lang="pt-BR" dirty="0"/>
-              <a:t> mínimo por um longo tempo e acabar com uma solução não ótima (</a:t>
-            </a:r>
-            <a:r>
-              <a:rPr lang="pt-BR" dirty="0" err="1"/>
-              <a:t>sub-ótima</a:t>
-            </a:r>
-            <a:r>
-              <a:rPr lang="pt-BR" dirty="0"/>
-              <a:t>) caso o treinamento se encerre muito cedo.</a:t>
-            </a:r>
-          </a:p>
-          <a:p>
-            <a:endParaRPr lang="pt-BR" dirty="0"/>
-          </a:p>
-          <a:p>
-            <a:r>
-              <a:rPr lang="pt-BR" b="1" dirty="0"/>
-              <a:t>Alguns tipos de esquema para ajuste do passo de aprendizagem são:</a:t>
-            </a:r>
-          </a:p>
-          <a:p>
-            <a:pPr marL="171450" indent="-171450">
-              <a:buFont typeface="Arial" panose="020B0604020202020204" pitchFamily="34" charset="0"/>
-              <a:buChar char="•"/>
-            </a:pPr>
-            <a:r>
-              <a:rPr lang="pt-BR" b="1" dirty="0"/>
-              <a:t>Decaimento por etapas ou degraus</a:t>
-            </a:r>
-            <a:r>
-              <a:rPr lang="pt-BR" dirty="0"/>
-              <a:t>: reduz a taxa de aprendizado de algum fator a cada número pré-definido de iterações ou épocas. Os valores típicos são utilizados para reduzir a taxa de aprendizado pela metade a cada número pré-definido de épocas. Esses números dependem muito do tipo de problema e do modelo. Uma heurística que você pode ver na prática é observar o erro de validação durante o treinamento com uma taxa de aprendizado fixa e reduzir a taxa de aprendizado em uma constante (por exemplo, 0,5) sempre que o erro de validação parar de decrescer.</a:t>
-            </a:r>
-          </a:p>
-          <a:p>
-            <a:pPr marL="171450" indent="-171450">
-              <a:buFont typeface="Arial" panose="020B0604020202020204" pitchFamily="34" charset="0"/>
-              <a:buChar char="•"/>
-            </a:pPr>
-            <a:r>
-              <a:rPr lang="pt-BR" b="1" dirty="0"/>
-              <a:t>Decaimento exponencial</a:t>
-            </a:r>
-            <a:r>
-              <a:rPr lang="pt-BR" dirty="0"/>
-              <a:t>: tem a forma matemática α = α0 e^(-</a:t>
-            </a:r>
-            <a:r>
-              <a:rPr lang="pt-BR" dirty="0" err="1"/>
-              <a:t>kt</a:t>
-            </a:r>
-            <a:r>
-              <a:rPr lang="pt-BR" dirty="0"/>
-              <a:t>), onde α0, k são hiperparâmetros e t é o número da iteração (mas você também pode usar o número de épocas).</a:t>
-            </a:r>
-          </a:p>
-          <a:p>
-            <a:pPr marL="171450" indent="-171450">
-              <a:buFont typeface="Arial" panose="020B0604020202020204" pitchFamily="34" charset="0"/>
-              <a:buChar char="•"/>
-            </a:pPr>
-            <a:r>
-              <a:rPr lang="pt-BR" b="1" dirty="0"/>
-              <a:t>Decaimento temporal</a:t>
-            </a:r>
-            <a:r>
-              <a:rPr lang="pt-BR" dirty="0"/>
-              <a:t>: tem a forma matemática α = α0 / (1 + </a:t>
-            </a:r>
-            <a:r>
-              <a:rPr lang="pt-BR" dirty="0" err="1"/>
-              <a:t>kt</a:t>
-            </a:r>
-            <a:r>
-              <a:rPr lang="pt-BR" dirty="0"/>
-              <a:t>), onde a0, k são hiperparâmetros e t é o número da iteração.</a:t>
-            </a:r>
-          </a:p>
-          <a:p>
-            <a:pPr marL="171450" indent="-171450">
-              <a:buFont typeface="Arial" panose="020B0604020202020204" pitchFamily="34" charset="0"/>
-              <a:buChar char="•"/>
-            </a:pPr>
-            <a:endParaRPr lang="pt-BR" dirty="0"/>
-          </a:p>
-          <a:p>
-            <a:pPr marL="0" indent="0">
-              <a:buFont typeface="Arial" panose="020B0604020202020204" pitchFamily="34" charset="0"/>
-              <a:buNone/>
-            </a:pPr>
-            <a:r>
-              <a:rPr lang="pt-BR" b="1" dirty="0"/>
-              <a:t>Exemplo</a:t>
-            </a:r>
-            <a:r>
-              <a:rPr lang="pt-BR" dirty="0"/>
-              <a:t>: stocastic_gradient_descent_with_learning_schedule_and_with_figures.ipynb</a:t>
-            </a:r>
-          </a:p>
-          <a:p>
-            <a:endParaRPr lang="pt-BR" dirty="0"/>
+            <a:endParaRPr lang="en-US" dirty="0"/>
           </a:p>
         </p:txBody>
       </p:sp>
       <p:sp>
         <p:nvSpPr>
-          <p:cNvPr id="4" name="Espaço Reservado para Número de Slide 3"/>
+          <p:cNvPr id="4" name="Slide Number Placeholder 3"/>
           <p:cNvSpPr>
             <a:spLocks noGrp="1"/>
           </p:cNvSpPr>
@@ -1193,7 +692,7 @@
           <a:p>
             <a:fld id="{DA8B99DF-01BC-492A-8CEF-4FD88D18DD9D}" type="slidenum">
               <a:rPr lang="nl-BE" smtClean="0"/>
-              <a:t>25</a:t>
+              <a:t>24</a:t>
             </a:fld>
             <a:endParaRPr lang="nl-BE"/>
           </a:p>
@@ -1202,7 +701,7 @@
     </p:spTree>
     <p:extLst>
       <p:ext uri="{BB962C8B-B14F-4D97-AF65-F5344CB8AC3E}">
-        <p14:creationId xmlns:p14="http://schemas.microsoft.com/office/powerpoint/2010/main" val="626906048"/>
+        <p14:creationId xmlns:p14="http://schemas.microsoft.com/office/powerpoint/2010/main" val="1553186560"/>
       </p:ext>
     </p:extLst>
   </p:cSld>
@@ -1496,7 +995,7 @@
     </p:spTree>
     <p:extLst>
       <p:ext uri="{BB962C8B-B14F-4D97-AF65-F5344CB8AC3E}">
-        <p14:creationId xmlns:p14="http://schemas.microsoft.com/office/powerpoint/2010/main" val="3245870633"/>
+        <p14:creationId xmlns:p14="http://schemas.microsoft.com/office/powerpoint/2010/main" val="626906048"/>
       </p:ext>
     </p:extLst>
   </p:cSld>
@@ -1790,6 +1289,300 @@
     </p:spTree>
     <p:extLst>
       <p:ext uri="{BB962C8B-B14F-4D97-AF65-F5344CB8AC3E}">
+        <p14:creationId xmlns:p14="http://schemas.microsoft.com/office/powerpoint/2010/main" val="3245870633"/>
+      </p:ext>
+    </p:extLst>
+  </p:cSld>
+  <p:clrMapOvr>
+    <a:masterClrMapping/>
+  </p:clrMapOvr>
+</p:notes>
+</file>
+
+<file path=ppt/notesSlides/notesSlide13.xml><?xml version="1.0" encoding="utf-8"?>
+<p:notes xmlns:a="http://schemas.openxmlformats.org/drawingml/2006/main" xmlns:r="http://schemas.openxmlformats.org/officeDocument/2006/relationships" xmlns:p="http://schemas.openxmlformats.org/presentationml/2006/main">
+  <p:cSld>
+    <p:spTree>
+      <p:nvGrpSpPr>
+        <p:cNvPr id="1" name=""/>
+        <p:cNvGrpSpPr/>
+        <p:nvPr/>
+      </p:nvGrpSpPr>
+      <p:grpSpPr>
+        <a:xfrm>
+          <a:off x="0" y="0"/>
+          <a:ext cx="0" cy="0"/>
+          <a:chOff x="0" y="0"/>
+          <a:chExt cx="0" cy="0"/>
+        </a:xfrm>
+      </p:grpSpPr>
+      <p:sp>
+        <p:nvSpPr>
+          <p:cNvPr id="2" name="Espaço Reservado para Imagem de Slide 1"/>
+          <p:cNvSpPr>
+            <a:spLocks noGrp="1" noRot="1" noChangeAspect="1"/>
+          </p:cNvSpPr>
+          <p:nvPr>
+            <p:ph type="sldImg"/>
+          </p:nvPr>
+        </p:nvSpPr>
+        <p:spPr/>
+      </p:sp>
+      <p:sp>
+        <p:nvSpPr>
+          <p:cNvPr id="3" name="Espaço Reservado para Anotações 2"/>
+          <p:cNvSpPr>
+            <a:spLocks noGrp="1"/>
+          </p:cNvSpPr>
+          <p:nvPr>
+            <p:ph type="body" idx="1"/>
+          </p:nvPr>
+        </p:nvSpPr>
+        <p:spPr/>
+        <p:txBody>
+          <a:bodyPr/>
+          <a:lstStyle/>
+          <a:p>
+            <a:pPr marL="0" marR="0" lvl="0" indent="0" algn="l" defTabSz="914400" rtl="0" eaLnBrk="1" fontAlgn="auto" latinLnBrk="0" hangingPunct="1">
+              <a:lnSpc>
+                <a:spcPct val="100000"/>
+              </a:lnSpc>
+              <a:spcBef>
+                <a:spcPts val="0"/>
+              </a:spcBef>
+              <a:spcAft>
+                <a:spcPts val="0"/>
+              </a:spcAft>
+              <a:buClrTx/>
+              <a:buSzTx/>
+              <a:buFontTx/>
+              <a:buNone/>
+              <a:tabLst/>
+              <a:defRPr/>
+            </a:pPr>
+            <a:r>
+              <a:rPr lang="pt-BR" b="1" dirty="0"/>
+              <a:t>Exemplo</a:t>
+            </a:r>
+            <a:r>
+              <a:rPr lang="pt-BR" dirty="0"/>
+              <a:t>:</a:t>
+            </a:r>
+            <a:r>
+              <a:rPr lang="pt-BR" baseline="0" dirty="0"/>
+              <a:t> </a:t>
+            </a:r>
+            <a:r>
+              <a:rPr lang="pt-BR" dirty="0"/>
+              <a:t>https://colab.research.google.com/</a:t>
+            </a:r>
+            <a:r>
+              <a:rPr lang="pt-BR" dirty="0" err="1"/>
+              <a:t>github</a:t>
+            </a:r>
+            <a:r>
+              <a:rPr lang="pt-BR" dirty="0"/>
+              <a:t>/zz4fap/t319_aprendizado_de_maquina/</a:t>
+            </a:r>
+            <a:r>
+              <a:rPr lang="pt-BR" dirty="0" err="1"/>
+              <a:t>blob</a:t>
+            </a:r>
+            <a:r>
+              <a:rPr lang="pt-BR" dirty="0"/>
+              <a:t>/</a:t>
+            </a:r>
+            <a:r>
+              <a:rPr lang="pt-BR" dirty="0" err="1"/>
+              <a:t>main</a:t>
+            </a:r>
+            <a:r>
+              <a:rPr lang="pt-BR" dirty="0"/>
+              <a:t>/notebooks/</a:t>
+            </a:r>
+            <a:r>
+              <a:rPr lang="pt-BR" dirty="0" err="1"/>
+              <a:t>regression</a:t>
+            </a:r>
+            <a:r>
+              <a:rPr lang="pt-BR" dirty="0"/>
+              <a:t>/</a:t>
+            </a:r>
+            <a:r>
+              <a:rPr lang="pt-BR" dirty="0" err="1"/>
+              <a:t>gd_versions</a:t>
+            </a:r>
+            <a:r>
+              <a:rPr lang="pt-BR" dirty="0"/>
+              <a:t>/</a:t>
+            </a:r>
+            <a:r>
+              <a:rPr lang="pt-BR" dirty="0" err="1"/>
+              <a:t>gde_com_redução_gradual.ipynb</a:t>
+            </a:r>
+            <a:endParaRPr lang="pt-BR" dirty="0"/>
+          </a:p>
+          <a:p>
+            <a:endParaRPr lang="pt-BR" sz="1200" baseline="0" dirty="0"/>
+          </a:p>
+          <a:p>
+            <a:r>
+              <a:rPr lang="pt-BR" sz="1200" baseline="0" dirty="0"/>
+              <a:t>Os passos começam com grandes valores (o que ajuda a progredir rapidamente e a escapar de mínimos locais, casos em que a superfície de erro seja bastante irregular) e depois diminuem cada vez mais, permitindo que o algoritmo se estabilize no mínimo global.</a:t>
+            </a:r>
+          </a:p>
+          <a:p>
+            <a:endParaRPr lang="pt-BR" sz="1200" baseline="0" dirty="0"/>
+          </a:p>
+          <a:p>
+            <a:r>
+              <a:rPr lang="pt-BR" dirty="0"/>
+              <a:t>Se a taxa de aprendizagem for reduzida muito rapidamente, o algoritmo poderá ficar preso no mínimo local ou até ficar</a:t>
+            </a:r>
+            <a:r>
+              <a:rPr lang="pt-BR" baseline="0" dirty="0"/>
+              <a:t> travado antes de chegar ao mínimo</a:t>
+            </a:r>
+            <a:r>
+              <a:rPr lang="pt-BR" dirty="0"/>
+              <a:t>. Se a taxa de aprendizado for reduzida muito lentamente, o algoritmo poderá oscilar ao</a:t>
+            </a:r>
+            <a:r>
+              <a:rPr lang="pt-BR" baseline="0" dirty="0"/>
+              <a:t> redor do</a:t>
+            </a:r>
+            <a:r>
+              <a:rPr lang="pt-BR" dirty="0"/>
+              <a:t> mínimo por um longo tempo e acabar com uma solução não ótima (</a:t>
+            </a:r>
+            <a:r>
+              <a:rPr lang="pt-BR" dirty="0" err="1"/>
+              <a:t>sub-ótima</a:t>
+            </a:r>
+            <a:r>
+              <a:rPr lang="pt-BR" dirty="0"/>
+              <a:t>) caso o treinamento se encerre muito cedo.</a:t>
+            </a:r>
+          </a:p>
+          <a:p>
+            <a:endParaRPr lang="pt-BR" dirty="0"/>
+          </a:p>
+          <a:p>
+            <a:r>
+              <a:rPr lang="pt-BR" b="1" dirty="0"/>
+              <a:t>Alguns tipos de esquema para ajuste do passo de aprendizagem são:</a:t>
+            </a:r>
+          </a:p>
+          <a:p>
+            <a:pPr marL="171450" indent="-171450">
+              <a:buFont typeface="Arial" panose="020B0604020202020204" pitchFamily="34" charset="0"/>
+              <a:buChar char="•"/>
+            </a:pPr>
+            <a:r>
+              <a:rPr lang="pt-BR" b="1" dirty="0"/>
+              <a:t>Decaimento por etapas ou degraus</a:t>
+            </a:r>
+            <a:r>
+              <a:rPr lang="pt-BR" dirty="0"/>
+              <a:t>: reduz a taxa de aprendizado de algum fator a cada número pré-definido de iterações ou épocas. Os valores típicos são utilizados para reduzir a taxa de aprendizado pela metade a cada número pré-definido de épocas. Esses números dependem muito do tipo de problema e do modelo. Uma heurística que você pode ver na prática é observar o erro de validação durante o treinamento com uma taxa de aprendizado fixa e reduzir a taxa de aprendizado em uma constante (por exemplo, 0,5) sempre que o erro de validação parar de decrescer.</a:t>
+            </a:r>
+          </a:p>
+          <a:p>
+            <a:pPr marL="171450" indent="-171450">
+              <a:buFont typeface="Arial" panose="020B0604020202020204" pitchFamily="34" charset="0"/>
+              <a:buChar char="•"/>
+            </a:pPr>
+            <a:r>
+              <a:rPr lang="pt-BR" b="1" dirty="0"/>
+              <a:t>Decaimento exponencial</a:t>
+            </a:r>
+            <a:r>
+              <a:rPr lang="pt-BR" dirty="0"/>
+              <a:t>: tem a forma matemática α = α0 e^(-</a:t>
+            </a:r>
+            <a:r>
+              <a:rPr lang="pt-BR" dirty="0" err="1"/>
+              <a:t>kt</a:t>
+            </a:r>
+            <a:r>
+              <a:rPr lang="pt-BR" dirty="0"/>
+              <a:t>), onde α0, k são hiperparâmetros e t é o número da iteração (mas você também pode usar o número de épocas).</a:t>
+            </a:r>
+          </a:p>
+          <a:p>
+            <a:pPr marL="171450" indent="-171450">
+              <a:buFont typeface="Arial" panose="020B0604020202020204" pitchFamily="34" charset="0"/>
+              <a:buChar char="•"/>
+            </a:pPr>
+            <a:r>
+              <a:rPr lang="pt-BR" b="1" dirty="0"/>
+              <a:t>Decaimento temporal</a:t>
+            </a:r>
+            <a:r>
+              <a:rPr lang="pt-BR" dirty="0"/>
+              <a:t>: tem a forma matemática α = α0 / (1 + </a:t>
+            </a:r>
+            <a:r>
+              <a:rPr lang="pt-BR" dirty="0" err="1"/>
+              <a:t>kt</a:t>
+            </a:r>
+            <a:r>
+              <a:rPr lang="pt-BR" dirty="0"/>
+              <a:t>), onde a0, k são hiperparâmetros e t é o número da iteração.</a:t>
+            </a:r>
+          </a:p>
+          <a:p>
+            <a:pPr marL="171450" indent="-171450">
+              <a:buFont typeface="Arial" panose="020B0604020202020204" pitchFamily="34" charset="0"/>
+              <a:buChar char="•"/>
+            </a:pPr>
+            <a:endParaRPr lang="pt-BR" dirty="0"/>
+          </a:p>
+          <a:p>
+            <a:pPr marL="0" indent="0">
+              <a:buFont typeface="Arial" panose="020B0604020202020204" pitchFamily="34" charset="0"/>
+              <a:buNone/>
+            </a:pPr>
+            <a:r>
+              <a:rPr lang="pt-BR" b="1" dirty="0"/>
+              <a:t>Exemplo</a:t>
+            </a:r>
+            <a:r>
+              <a:rPr lang="pt-BR" dirty="0"/>
+              <a:t>: stocastic_gradient_descent_with_learning_schedule_and_with_figures.ipynb</a:t>
+            </a:r>
+          </a:p>
+          <a:p>
+            <a:endParaRPr lang="pt-BR" dirty="0"/>
+          </a:p>
+        </p:txBody>
+      </p:sp>
+      <p:sp>
+        <p:nvSpPr>
+          <p:cNvPr id="4" name="Espaço Reservado para Número de Slide 3"/>
+          <p:cNvSpPr>
+            <a:spLocks noGrp="1"/>
+          </p:cNvSpPr>
+          <p:nvPr>
+            <p:ph type="sldNum" sz="quarter" idx="5"/>
+          </p:nvPr>
+        </p:nvSpPr>
+        <p:spPr/>
+        <p:txBody>
+          <a:bodyPr/>
+          <a:lstStyle/>
+          <a:p>
+            <a:fld id="{DA8B99DF-01BC-492A-8CEF-4FD88D18DD9D}" type="slidenum">
+              <a:rPr lang="nl-BE" smtClean="0"/>
+              <a:t>28</a:t>
+            </a:fld>
+            <a:endParaRPr lang="nl-BE"/>
+          </a:p>
+        </p:txBody>
+      </p:sp>
+    </p:spTree>
+    <p:extLst>
+      <p:ext uri="{BB962C8B-B14F-4D97-AF65-F5344CB8AC3E}">
         <p14:creationId xmlns:p14="http://schemas.microsoft.com/office/powerpoint/2010/main" val="3702569322"/>
       </p:ext>
     </p:extLst>
@@ -1800,7 +1593,7 @@
 </p:notes>
 </file>
 
-<file path=ppt/notesSlides/notesSlide13.xml><?xml version="1.0" encoding="utf-8"?>
+<file path=ppt/notesSlides/notesSlide14.xml><?xml version="1.0" encoding="utf-8"?>
 <p:notes xmlns:a="http://schemas.openxmlformats.org/drawingml/2006/main" xmlns:r="http://schemas.openxmlformats.org/officeDocument/2006/relationships" xmlns:p="http://schemas.openxmlformats.org/presentationml/2006/main">
   <p:cSld>
     <p:spTree>
@@ -1896,7 +1689,7 @@
           <a:p>
             <a:fld id="{DA8B99DF-01BC-492A-8CEF-4FD88D18DD9D}" type="slidenum">
               <a:rPr lang="nl-BE" smtClean="0"/>
-              <a:t>28</a:t>
+              <a:t>29</a:t>
             </a:fld>
             <a:endParaRPr lang="nl-BE"/>
           </a:p>
@@ -1906,90 +1699,6 @@
     <p:extLst>
       <p:ext uri="{BB962C8B-B14F-4D97-AF65-F5344CB8AC3E}">
         <p14:creationId xmlns:p14="http://schemas.microsoft.com/office/powerpoint/2010/main" val="1119925003"/>
-      </p:ext>
-    </p:extLst>
-  </p:cSld>
-  <p:clrMapOvr>
-    <a:masterClrMapping/>
-  </p:clrMapOvr>
-</p:notes>
-</file>
-
-<file path=ppt/notesSlides/notesSlide14.xml><?xml version="1.0" encoding="utf-8"?>
-<p:notes xmlns:a="http://schemas.openxmlformats.org/drawingml/2006/main" xmlns:r="http://schemas.openxmlformats.org/officeDocument/2006/relationships" xmlns:p="http://schemas.openxmlformats.org/presentationml/2006/main">
-  <p:cSld>
-    <p:spTree>
-      <p:nvGrpSpPr>
-        <p:cNvPr id="1" name=""/>
-        <p:cNvGrpSpPr/>
-        <p:nvPr/>
-      </p:nvGrpSpPr>
-      <p:grpSpPr>
-        <a:xfrm>
-          <a:off x="0" y="0"/>
-          <a:ext cx="0" cy="0"/>
-          <a:chOff x="0" y="0"/>
-          <a:chExt cx="0" cy="0"/>
-        </a:xfrm>
-      </p:grpSpPr>
-      <p:sp>
-        <p:nvSpPr>
-          <p:cNvPr id="2" name="Slide Image Placeholder 1"/>
-          <p:cNvSpPr>
-            <a:spLocks noGrp="1" noRot="1" noChangeAspect="1"/>
-          </p:cNvSpPr>
-          <p:nvPr>
-            <p:ph type="sldImg"/>
-          </p:nvPr>
-        </p:nvSpPr>
-        <p:spPr/>
-      </p:sp>
-      <p:sp>
-        <p:nvSpPr>
-          <p:cNvPr id="3" name="Notes Placeholder 2"/>
-          <p:cNvSpPr>
-            <a:spLocks noGrp="1"/>
-          </p:cNvSpPr>
-          <p:nvPr>
-            <p:ph type="body" idx="1"/>
-          </p:nvPr>
-        </p:nvSpPr>
-        <p:spPr/>
-        <p:txBody>
-          <a:bodyPr/>
-          <a:lstStyle/>
-          <a:p>
-            <a:endParaRPr lang="nl-BE" dirty="0"/>
-          </a:p>
-        </p:txBody>
-      </p:sp>
-      <p:sp>
-        <p:nvSpPr>
-          <p:cNvPr id="4" name="Slide Number Placeholder 3"/>
-          <p:cNvSpPr>
-            <a:spLocks noGrp="1"/>
-          </p:cNvSpPr>
-          <p:nvPr>
-            <p:ph type="sldNum" sz="quarter" idx="10"/>
-          </p:nvPr>
-        </p:nvSpPr>
-        <p:spPr/>
-        <p:txBody>
-          <a:bodyPr/>
-          <a:lstStyle/>
-          <a:p>
-            <a:fld id="{DA8B99DF-01BC-492A-8CEF-4FD88D18DD9D}" type="slidenum">
-              <a:rPr lang="nl-BE" smtClean="0"/>
-              <a:t>33</a:t>
-            </a:fld>
-            <a:endParaRPr lang="nl-BE"/>
-          </a:p>
-        </p:txBody>
-      </p:sp>
-    </p:spTree>
-    <p:extLst>
-      <p:ext uri="{BB962C8B-B14F-4D97-AF65-F5344CB8AC3E}">
-        <p14:creationId xmlns:p14="http://schemas.microsoft.com/office/powerpoint/2010/main" val="3474938315"/>
       </p:ext>
     </p:extLst>
   </p:cSld>
@@ -2073,7 +1782,7 @@
     </p:spTree>
     <p:extLst>
       <p:ext uri="{BB962C8B-B14F-4D97-AF65-F5344CB8AC3E}">
-        <p14:creationId xmlns:p14="http://schemas.microsoft.com/office/powerpoint/2010/main" val="127471941"/>
+        <p14:creationId xmlns:p14="http://schemas.microsoft.com/office/powerpoint/2010/main" val="3474938315"/>
       </p:ext>
     </p:extLst>
   </p:cSld>
@@ -2148,7 +1857,7 @@
           <a:p>
             <a:fld id="{DA8B99DF-01BC-492A-8CEF-4FD88D18DD9D}" type="slidenum">
               <a:rPr lang="nl-BE" smtClean="0"/>
-              <a:t>37</a:t>
+              <a:t>35</a:t>
             </a:fld>
             <a:endParaRPr lang="nl-BE"/>
           </a:p>
@@ -2157,7 +1866,7 @@
     </p:spTree>
     <p:extLst>
       <p:ext uri="{BB962C8B-B14F-4D97-AF65-F5344CB8AC3E}">
-        <p14:creationId xmlns:p14="http://schemas.microsoft.com/office/powerpoint/2010/main" val="1535109884"/>
+        <p14:creationId xmlns:p14="http://schemas.microsoft.com/office/powerpoint/2010/main" val="127471941"/>
       </p:ext>
     </p:extLst>
   </p:cSld>
@@ -2241,7 +1950,7 @@
     </p:spTree>
     <p:extLst>
       <p:ext uri="{BB962C8B-B14F-4D97-AF65-F5344CB8AC3E}">
-        <p14:creationId xmlns:p14="http://schemas.microsoft.com/office/powerpoint/2010/main" val="4087609378"/>
+        <p14:creationId xmlns:p14="http://schemas.microsoft.com/office/powerpoint/2010/main" val="1535109884"/>
       </p:ext>
     </p:extLst>
   </p:cSld>
@@ -2295,10 +2004,7 @@
           <a:bodyPr/>
           <a:lstStyle/>
           <a:p>
-            <a:r>
-              <a:rPr lang="pt-BR" dirty="0"/>
-              <a:t>O termo momentum aumenta para dimensões cujos gradientes apontam nas mesmas direções e reduz atualizações para dimensões cujos gradientes mudam de direção. Como resultado, temos convergência mais rápida e oscilação reduzida.</a:t>
-            </a:r>
+            <a:endParaRPr lang="nl-BE" dirty="0"/>
           </a:p>
         </p:txBody>
       </p:sp>
@@ -2319,7 +2025,94 @@
           <a:p>
             <a:fld id="{DA8B99DF-01BC-492A-8CEF-4FD88D18DD9D}" type="slidenum">
               <a:rPr lang="nl-BE" smtClean="0"/>
-              <a:t>43</a:t>
+              <a:t>39</a:t>
+            </a:fld>
+            <a:endParaRPr lang="nl-BE"/>
+          </a:p>
+        </p:txBody>
+      </p:sp>
+    </p:spTree>
+    <p:extLst>
+      <p:ext uri="{BB962C8B-B14F-4D97-AF65-F5344CB8AC3E}">
+        <p14:creationId xmlns:p14="http://schemas.microsoft.com/office/powerpoint/2010/main" val="4087609378"/>
+      </p:ext>
+    </p:extLst>
+  </p:cSld>
+  <p:clrMapOvr>
+    <a:masterClrMapping/>
+  </p:clrMapOvr>
+</p:notes>
+</file>
+
+<file path=ppt/notesSlides/notesSlide19.xml><?xml version="1.0" encoding="utf-8"?>
+<p:notes xmlns:a="http://schemas.openxmlformats.org/drawingml/2006/main" xmlns:r="http://schemas.openxmlformats.org/officeDocument/2006/relationships" xmlns:p="http://schemas.openxmlformats.org/presentationml/2006/main">
+  <p:cSld>
+    <p:spTree>
+      <p:nvGrpSpPr>
+        <p:cNvPr id="1" name=""/>
+        <p:cNvGrpSpPr/>
+        <p:nvPr/>
+      </p:nvGrpSpPr>
+      <p:grpSpPr>
+        <a:xfrm>
+          <a:off x="0" y="0"/>
+          <a:ext cx="0" cy="0"/>
+          <a:chOff x="0" y="0"/>
+          <a:chExt cx="0" cy="0"/>
+        </a:xfrm>
+      </p:grpSpPr>
+      <p:sp>
+        <p:nvSpPr>
+          <p:cNvPr id="2" name="Slide Image Placeholder 1"/>
+          <p:cNvSpPr>
+            <a:spLocks noGrp="1" noRot="1" noChangeAspect="1"/>
+          </p:cNvSpPr>
+          <p:nvPr>
+            <p:ph type="sldImg"/>
+          </p:nvPr>
+        </p:nvSpPr>
+        <p:spPr/>
+      </p:sp>
+      <p:sp>
+        <p:nvSpPr>
+          <p:cNvPr id="3" name="Notes Placeholder 2"/>
+          <p:cNvSpPr>
+            <a:spLocks noGrp="1"/>
+          </p:cNvSpPr>
+          <p:nvPr>
+            <p:ph type="body" idx="1"/>
+          </p:nvPr>
+        </p:nvSpPr>
+        <p:spPr/>
+        <p:txBody>
+          <a:bodyPr/>
+          <a:lstStyle/>
+          <a:p>
+            <a:r>
+              <a:rPr lang="pt-BR" dirty="0"/>
+              <a:t>O termo momentum aumenta para dimensões cujos gradientes apontam nas mesmas direções e reduz atualizações para dimensões cujos gradientes mudam de direção. Como resultado, temos convergência mais rápida e oscilação reduzida.</a:t>
+            </a:r>
+          </a:p>
+        </p:txBody>
+      </p:sp>
+      <p:sp>
+        <p:nvSpPr>
+          <p:cNvPr id="4" name="Slide Number Placeholder 3"/>
+          <p:cNvSpPr>
+            <a:spLocks noGrp="1"/>
+          </p:cNvSpPr>
+          <p:nvPr>
+            <p:ph type="sldNum" sz="quarter" idx="10"/>
+          </p:nvPr>
+        </p:nvSpPr>
+        <p:spPr/>
+        <p:txBody>
+          <a:bodyPr/>
+          <a:lstStyle/>
+          <a:p>
+            <a:fld id="{DA8B99DF-01BC-492A-8CEF-4FD88D18DD9D}" type="slidenum">
+              <a:rPr lang="nl-BE" smtClean="0"/>
+              <a:t>44</a:t>
             </a:fld>
             <a:endParaRPr lang="nl-BE"/>
           </a:p>
@@ -4068,7 +3861,7 @@
           <a:p>
             <a:fld id="{C80E15A5-E95B-43EB-9AC7-9A96397448C0}" type="datetimeFigureOut">
               <a:rPr lang="nl-BE" smtClean="0"/>
-              <a:t>10/04/2026</a:t>
+              <a:t>24/04/2026</a:t>
             </a:fld>
             <a:endParaRPr lang="nl-BE"/>
           </a:p>
@@ -4238,7 +4031,7 @@
           <a:p>
             <a:fld id="{C80E15A5-E95B-43EB-9AC7-9A96397448C0}" type="datetimeFigureOut">
               <a:rPr lang="nl-BE" smtClean="0"/>
-              <a:t>10/04/2026</a:t>
+              <a:t>24/04/2026</a:t>
             </a:fld>
             <a:endParaRPr lang="nl-BE"/>
           </a:p>
@@ -4418,7 +4211,7 @@
           <a:p>
             <a:fld id="{C80E15A5-E95B-43EB-9AC7-9A96397448C0}" type="datetimeFigureOut">
               <a:rPr lang="nl-BE" smtClean="0"/>
-              <a:t>10/04/2026</a:t>
+              <a:t>24/04/2026</a:t>
             </a:fld>
             <a:endParaRPr lang="nl-BE"/>
           </a:p>
@@ -4588,7 +4381,7 @@
           <a:p>
             <a:fld id="{C80E15A5-E95B-43EB-9AC7-9A96397448C0}" type="datetimeFigureOut">
               <a:rPr lang="nl-BE" smtClean="0"/>
-              <a:t>10/04/2026</a:t>
+              <a:t>24/04/2026</a:t>
             </a:fld>
             <a:endParaRPr lang="nl-BE"/>
           </a:p>
@@ -4834,7 +4627,7 @@
           <a:p>
             <a:fld id="{C80E15A5-E95B-43EB-9AC7-9A96397448C0}" type="datetimeFigureOut">
               <a:rPr lang="nl-BE" smtClean="0"/>
-              <a:t>10/04/2026</a:t>
+              <a:t>24/04/2026</a:t>
             </a:fld>
             <a:endParaRPr lang="nl-BE"/>
           </a:p>
@@ -5066,7 +4859,7 @@
           <a:p>
             <a:fld id="{C80E15A5-E95B-43EB-9AC7-9A96397448C0}" type="datetimeFigureOut">
               <a:rPr lang="nl-BE" smtClean="0"/>
-              <a:t>10/04/2026</a:t>
+              <a:t>24/04/2026</a:t>
             </a:fld>
             <a:endParaRPr lang="nl-BE"/>
           </a:p>
@@ -5433,7 +5226,7 @@
           <a:p>
             <a:fld id="{C80E15A5-E95B-43EB-9AC7-9A96397448C0}" type="datetimeFigureOut">
               <a:rPr lang="nl-BE" smtClean="0"/>
-              <a:t>10/04/2026</a:t>
+              <a:t>24/04/2026</a:t>
             </a:fld>
             <a:endParaRPr lang="nl-BE"/>
           </a:p>
@@ -5551,7 +5344,7 @@
           <a:p>
             <a:fld id="{C80E15A5-E95B-43EB-9AC7-9A96397448C0}" type="datetimeFigureOut">
               <a:rPr lang="nl-BE" smtClean="0"/>
-              <a:t>10/04/2026</a:t>
+              <a:t>24/04/2026</a:t>
             </a:fld>
             <a:endParaRPr lang="nl-BE"/>
           </a:p>
@@ -5646,7 +5439,7 @@
           <a:p>
             <a:fld id="{C80E15A5-E95B-43EB-9AC7-9A96397448C0}" type="datetimeFigureOut">
               <a:rPr lang="nl-BE" smtClean="0"/>
-              <a:t>10/04/2026</a:t>
+              <a:t>24/04/2026</a:t>
             </a:fld>
             <a:endParaRPr lang="nl-BE"/>
           </a:p>
@@ -5923,7 +5716,7 @@
           <a:p>
             <a:fld id="{C80E15A5-E95B-43EB-9AC7-9A96397448C0}" type="datetimeFigureOut">
               <a:rPr lang="nl-BE" smtClean="0"/>
-              <a:t>10/04/2026</a:t>
+              <a:t>24/04/2026</a:t>
             </a:fld>
             <a:endParaRPr lang="nl-BE"/>
           </a:p>
@@ -6176,7 +5969,7 @@
           <a:p>
             <a:fld id="{C80E15A5-E95B-43EB-9AC7-9A96397448C0}" type="datetimeFigureOut">
               <a:rPr lang="nl-BE" smtClean="0"/>
-              <a:t>10/04/2026</a:t>
+              <a:t>24/04/2026</a:t>
             </a:fld>
             <a:endParaRPr lang="nl-BE"/>
           </a:p>
@@ -6389,7 +6182,7 @@
           <a:p>
             <a:fld id="{C80E15A5-E95B-43EB-9AC7-9A96397448C0}" type="datetimeFigureOut">
               <a:rPr lang="nl-BE" smtClean="0"/>
-              <a:t>10/04/2026</a:t>
+              <a:t>24/04/2026</a:t>
             </a:fld>
             <a:endParaRPr lang="nl-BE"/>
           </a:p>
@@ -7546,8 +7339,8 @@
           </a:p>
         </p:txBody>
       </p:sp>
-      <mc:AlternateContent xmlns:mc="http://schemas.openxmlformats.org/markup-compatibility/2006">
-        <mc:Choice xmlns:a14="http://schemas.microsoft.com/office/drawing/2010/main" Requires="a14">
+      <mc:AlternateContent xmlns:mc="http://schemas.openxmlformats.org/markup-compatibility/2006" xmlns:a14="http://schemas.microsoft.com/office/drawing/2010/main">
+        <mc:Choice Requires="a14">
           <p:sp>
             <p:nvSpPr>
               <p:cNvPr id="3" name="Espaço Reservado para Conteúdo 2">
@@ -7641,7 +7434,7 @@
             </p:txBody>
           </p:sp>
         </mc:Choice>
-        <mc:Fallback>
+        <mc:Fallback xmlns="">
           <p:sp>
             <p:nvSpPr>
               <p:cNvPr id="3" name="Espaço Reservado para Conteúdo 2">
@@ -10212,7 +10005,19 @@
                 </a14:m>
                 <a:r>
                   <a:rPr lang="pt-BR" dirty="0"/>
-                  <a:t> é pequeno), são mais rápidas e menos complexas computacionalmente que o GDB. </a:t>
+                  <a:t> é pequeno), são </a:t>
+                </a:r>
+                <a:r>
+                  <a:rPr lang="pt-BR" b="1" dirty="0">
+                    <a:solidFill>
+                      <a:srgbClr val="7030A0"/>
+                    </a:solidFill>
+                  </a:rPr>
+                  <a:t>mais rápidas e menos complexas</a:t>
+                </a:r>
+                <a:r>
+                  <a:rPr lang="pt-BR" dirty="0"/>
+                  <a:t> computacionalmente que o GDB. </a:t>
                 </a:r>
               </a:p>
               <a:p>
@@ -10282,7 +10087,7 @@
                 </a:r>
                 <a:r>
                   <a:rPr lang="pt-BR" dirty="0"/>
-                  <a:t>para o mínimo (i.e., oscilam ao redor dele).</a:t>
+                  <a:t>para o mínimo (i.e., ficam oscilando ao redor dele).</a:t>
                 </a:r>
               </a:p>
             </p:txBody>
@@ -10456,8 +10261,8 @@
           </a:p>
         </p:txBody>
       </p:sp>
-      <mc:AlternateContent xmlns:mc="http://schemas.openxmlformats.org/markup-compatibility/2006">
-        <mc:Choice xmlns:a14="http://schemas.microsoft.com/office/drawing/2010/main" Requires="a14">
+      <mc:AlternateContent xmlns:mc="http://schemas.openxmlformats.org/markup-compatibility/2006" xmlns:a14="http://schemas.microsoft.com/office/drawing/2010/main">
+        <mc:Choice Requires="a14">
           <p:sp>
             <p:nvSpPr>
               <p:cNvPr id="3" name="Content Placeholder 2"/>
@@ -10603,7 +10408,7 @@
             </p:txBody>
           </p:sp>
         </mc:Choice>
-        <mc:Fallback>
+        <mc:Fallback xmlns="">
           <p:sp>
             <p:nvSpPr>
               <p:cNvPr id="3" name="Content Placeholder 2"/>
@@ -10659,7 +10464,13 @@
   <p:cSld>
     <p:spTree>
       <p:nvGrpSpPr>
-        <p:cNvPr id="1" name=""/>
+        <p:cNvPr id="1" name="">
+          <a:extLst>
+            <a:ext uri="{FF2B5EF4-FFF2-40B4-BE49-F238E27FC236}">
+              <a16:creationId xmlns:a16="http://schemas.microsoft.com/office/drawing/2014/main" id="{C36CEC42-2ACC-2FC6-E985-3086CBDF706A}"/>
+            </a:ext>
+          </a:extLst>
+        </p:cNvPr>
         <p:cNvGrpSpPr/>
         <p:nvPr/>
       </p:nvGrpSpPr>
@@ -10676,7 +10487,7 @@
           <p:cNvPr id="2" name="Título 1">
             <a:extLst>
               <a:ext uri="{FF2B5EF4-FFF2-40B4-BE49-F238E27FC236}">
-                <a16:creationId xmlns:a16="http://schemas.microsoft.com/office/drawing/2014/main" id="{E3B1AA5C-2DDF-9C9C-CE89-50D9B6F2FC20}"/>
+                <a16:creationId xmlns:a16="http://schemas.microsoft.com/office/drawing/2014/main" id="{9B31511E-2ADF-BE92-63B5-8C3324D0FAAC}"/>
               </a:ext>
             </a:extLst>
           </p:cNvPr>
@@ -10704,7 +10515,7 @@
           <p:cNvPr id="3" name="Espaço Reservado para Conteúdo 2">
             <a:extLst>
               <a:ext uri="{FF2B5EF4-FFF2-40B4-BE49-F238E27FC236}">
-                <a16:creationId xmlns:a16="http://schemas.microsoft.com/office/drawing/2014/main" id="{83A38DD3-AAC8-CEBB-5966-BFE9490F478F}"/>
+                <a16:creationId xmlns:a16="http://schemas.microsoft.com/office/drawing/2014/main" id="{CB538911-187A-BB31-817A-F09DF8DE48BF}"/>
               </a:ext>
             </a:extLst>
           </p:cNvPr>
@@ -10717,8 +10528,8 @@
         </p:nvSpPr>
         <p:spPr>
           <a:xfrm>
-            <a:off x="5005633" y="1825624"/>
-            <a:ext cx="7021267" cy="5032375"/>
+            <a:off x="4901938" y="1825624"/>
+            <a:ext cx="7290061" cy="5032375"/>
           </a:xfrm>
         </p:spPr>
         <p:txBody>
@@ -10840,6 +10651,48 @@
               <a:t>.</a:t>
             </a:r>
           </a:p>
+          <a:p>
+            <a:pPr lvl="1">
+              <a:buFont typeface="Wingdings" panose="05000000000000000000" pitchFamily="2" charset="2"/>
+              <a:buChar char="§"/>
+            </a:pPr>
+            <a:r>
+              <a:rPr lang="pt-BR" b="1" dirty="0"/>
+              <a:t>Redução do passo</a:t>
+            </a:r>
+            <a:r>
+              <a:rPr lang="pt-BR" dirty="0"/>
+              <a:t>: força a convergência</a:t>
+            </a:r>
+          </a:p>
+          <a:p>
+            <a:pPr lvl="1">
+              <a:buFont typeface="Wingdings" panose="05000000000000000000" pitchFamily="2" charset="2"/>
+              <a:buChar char="§"/>
+            </a:pPr>
+            <a:r>
+              <a:rPr lang="pt-BR" b="1" dirty="0"/>
+              <a:t>Termo momentum</a:t>
+            </a:r>
+            <a:r>
+              <a:rPr lang="pt-BR" dirty="0"/>
+              <a:t>: redução da variação de direção</a:t>
+            </a:r>
+          </a:p>
+          <a:p>
+            <a:pPr lvl="1">
+              <a:buFont typeface="Wingdings" panose="05000000000000000000" pitchFamily="2" charset="2"/>
+              <a:buChar char="§"/>
+            </a:pPr>
+            <a:r>
+              <a:rPr lang="pt-BR" b="1" dirty="0"/>
+              <a:t>Ajuste adaptativo</a:t>
+            </a:r>
+            <a:r>
+              <a:rPr lang="pt-BR" dirty="0"/>
+              <a:t>: passos independentes</a:t>
+            </a:r>
+          </a:p>
         </p:txBody>
       </p:sp>
       <p:pic>
@@ -10847,7 +10700,7 @@
           <p:cNvPr id="5" name="Picture 4">
             <a:extLst>
               <a:ext uri="{FF2B5EF4-FFF2-40B4-BE49-F238E27FC236}">
-                <a16:creationId xmlns:a16="http://schemas.microsoft.com/office/drawing/2014/main" id="{9020E7D6-CA2A-B280-FAB0-7CB7234FA8CD}"/>
+                <a16:creationId xmlns:a16="http://schemas.microsoft.com/office/drawing/2014/main" id="{5951F0C5-9F3A-DC7B-9FF5-1DD6FD4844F5}"/>
               </a:ext>
             </a:extLst>
           </p:cNvPr>
@@ -10882,7 +10735,7 @@
           <p:cNvPr id="6" name="CaixaDeTexto 5">
             <a:extLst>
               <a:ext uri="{FF2B5EF4-FFF2-40B4-BE49-F238E27FC236}">
-                <a16:creationId xmlns:a16="http://schemas.microsoft.com/office/drawing/2014/main" id="{F143DAE8-8D22-F84F-9F56-58021C456514}"/>
+                <a16:creationId xmlns:a16="http://schemas.microsoft.com/office/drawing/2014/main" id="{B3814E3E-CFEA-A936-CCE6-0F39D8FC7B56}"/>
               </a:ext>
             </a:extLst>
           </p:cNvPr>
@@ -10916,7 +10769,7 @@
     </p:spTree>
     <p:extLst>
       <p:ext uri="{BB962C8B-B14F-4D97-AF65-F5344CB8AC3E}">
-        <p14:creationId xmlns:p14="http://schemas.microsoft.com/office/powerpoint/2010/main" val="2658258202"/>
+        <p14:creationId xmlns:p14="http://schemas.microsoft.com/office/powerpoint/2010/main" val="2631455725"/>
       </p:ext>
     </p:extLst>
   </p:cSld>
@@ -10966,7 +10819,7 @@
           <a:p>
             <a:r>
               <a:rPr lang="pt-BR" dirty="0"/>
-              <a:t>Ajuste do passo de aprendizagem</a:t>
+              <a:t>Redução gradual do passo de aprendizagem</a:t>
             </a:r>
           </a:p>
         </p:txBody>
@@ -11487,7 +11340,7 @@
               <a:p>
                 <a:r>
                   <a:rPr lang="pt-BR" dirty="0"/>
-                  <a:t>Veremos a seguir um exemplo de como ela funciona. </a:t>
+                  <a:t>Veremos em breve um exemplo de como ela funciona. </a:t>
                 </a:r>
               </a:p>
             </p:txBody>
@@ -11635,14 +11488,19 @@
             <p:ph type="title"/>
           </p:nvPr>
         </p:nvSpPr>
-        <p:spPr/>
+        <p:spPr>
+          <a:xfrm>
+            <a:off x="838199" y="365125"/>
+            <a:ext cx="10756769" cy="1325563"/>
+          </a:xfrm>
+        </p:spPr>
         <p:txBody>
           <a:bodyPr/>
           <a:lstStyle/>
           <a:p>
             <a:r>
               <a:rPr lang="pt-BR" dirty="0"/>
-              <a:t>Técnicas mais comuns para a redução gradual</a:t>
+              <a:t>Técnicas mais comuns para a redução do passo</a:t>
             </a:r>
           </a:p>
         </p:txBody>
@@ -12369,7 +12227,7 @@
           <a:p>
             <a:r>
               <a:rPr lang="pt-BR" dirty="0"/>
-              <a:t>Ajuste do termo de atualização dos pesos</a:t>
+              <a:t>Termo momentum</a:t>
             </a:r>
           </a:p>
         </p:txBody>
@@ -12395,7 +12253,7 @@
             <p:spPr>
               <a:xfrm>
                 <a:off x="838199" y="1825624"/>
-                <a:ext cx="11218683" cy="5032375"/>
+                <a:ext cx="11284671" cy="5032375"/>
               </a:xfrm>
             </p:spPr>
             <p:txBody>
@@ -12778,27 +12636,25 @@
                         </a:rPr>
                         <m:t>𝒂</m:t>
                       </m:r>
-                      <m:r>
-                        <a:rPr lang="pt-BR" sz="2800" b="0" i="1" smtClean="0">
-                          <a:latin typeface="Cambria Math" panose="02040503050406030204" pitchFamily="18" charset="0"/>
-                          <a:ea typeface="Cambria Math" panose="02040503050406030204" pitchFamily="18" charset="0"/>
-                        </a:rPr>
-                        <m:t>(</m:t>
-                      </m:r>
-                      <m:r>
-                        <a:rPr lang="pt-BR" sz="2800" b="0" i="1" smtClean="0">
-                          <a:latin typeface="Cambria Math" panose="02040503050406030204" pitchFamily="18" charset="0"/>
-                          <a:ea typeface="Cambria Math" panose="02040503050406030204" pitchFamily="18" charset="0"/>
-                        </a:rPr>
-                        <m:t>𝑖</m:t>
-                      </m:r>
-                      <m:r>
-                        <a:rPr lang="pt-BR" sz="2800" b="0" i="1" smtClean="0">
-                          <a:latin typeface="Cambria Math" panose="02040503050406030204" pitchFamily="18" charset="0"/>
-                          <a:ea typeface="Cambria Math" panose="02040503050406030204" pitchFamily="18" charset="0"/>
-                        </a:rPr>
-                        <m:t>)</m:t>
-                      </m:r>
+                      <m:d>
+                        <m:dPr>
+                          <m:ctrlPr>
+                            <a:rPr lang="pt-BR" sz="2800" b="0" i="1" smtClean="0">
+                              <a:latin typeface="Cambria Math" panose="02040503050406030204" pitchFamily="18" charset="0"/>
+                              <a:ea typeface="Cambria Math" panose="02040503050406030204" pitchFamily="18" charset="0"/>
+                            </a:rPr>
+                          </m:ctrlPr>
+                        </m:dPr>
+                        <m:e>
+                          <m:r>
+                            <a:rPr lang="pt-BR" sz="2800" b="0" i="1" smtClean="0">
+                              <a:latin typeface="Cambria Math" panose="02040503050406030204" pitchFamily="18" charset="0"/>
+                              <a:ea typeface="Cambria Math" panose="02040503050406030204" pitchFamily="18" charset="0"/>
+                            </a:rPr>
+                            <m:t>𝑖</m:t>
+                          </m:r>
+                        </m:e>
+                      </m:d>
                       <m:r>
                         <a:rPr lang="pt-BR" sz="2800" b="0" i="0" smtClean="0">
                           <a:latin typeface="Cambria Math" panose="02040503050406030204" pitchFamily="18" charset="0"/>
@@ -12820,33 +12676,31 @@
                         </a:rPr>
                         <m:t>𝝂</m:t>
                       </m:r>
-                      <m:r>
-                        <a:rPr lang="pt-BR" sz="2800" b="0" i="1" smtClean="0">
-                          <a:latin typeface="Cambria Math" panose="02040503050406030204" pitchFamily="18" charset="0"/>
-                          <a:ea typeface="Cambria Math" panose="02040503050406030204" pitchFamily="18" charset="0"/>
-                        </a:rPr>
-                        <m:t>(</m:t>
-                      </m:r>
-                      <m:r>
-                        <a:rPr lang="pt-BR" sz="2800" b="0" i="1" smtClean="0">
-                          <a:latin typeface="Cambria Math" panose="02040503050406030204" pitchFamily="18" charset="0"/>
-                          <a:ea typeface="Cambria Math" panose="02040503050406030204" pitchFamily="18" charset="0"/>
-                        </a:rPr>
-                        <m:t>𝑖</m:t>
-                      </m:r>
-                      <m:r>
-                        <a:rPr lang="pt-BR" sz="2800" b="0" i="1" smtClean="0">
-                          <a:latin typeface="Cambria Math" panose="02040503050406030204" pitchFamily="18" charset="0"/>
-                          <a:ea typeface="Cambria Math" panose="02040503050406030204" pitchFamily="18" charset="0"/>
-                        </a:rPr>
-                        <m:t>)</m:t>
-                      </m:r>
+                      <m:d>
+                        <m:dPr>
+                          <m:ctrlPr>
+                            <a:rPr lang="pt-BR" sz="2800" b="0" i="1" smtClean="0">
+                              <a:latin typeface="Cambria Math" panose="02040503050406030204" pitchFamily="18" charset="0"/>
+                              <a:ea typeface="Cambria Math" panose="02040503050406030204" pitchFamily="18" charset="0"/>
+                            </a:rPr>
+                          </m:ctrlPr>
+                        </m:dPr>
+                        <m:e>
+                          <m:r>
+                            <a:rPr lang="pt-BR" sz="2800" b="0" i="1" smtClean="0">
+                              <a:latin typeface="Cambria Math" panose="02040503050406030204" pitchFamily="18" charset="0"/>
+                              <a:ea typeface="Cambria Math" panose="02040503050406030204" pitchFamily="18" charset="0"/>
+                            </a:rPr>
+                            <m:t>𝑖</m:t>
+                          </m:r>
+                        </m:e>
+                      </m:d>
                       <m:r>
                         <a:rPr lang="pt-BR" sz="2800" b="1" i="1" smtClean="0">
                           <a:latin typeface="Cambria Math" panose="02040503050406030204" pitchFamily="18" charset="0"/>
                           <a:ea typeface="Cambria Math" panose="02040503050406030204" pitchFamily="18" charset="0"/>
                         </a:rPr>
-                        <m:t>.</m:t>
+                        <m:t>,</m:t>
                       </m:r>
                     </m:oMath>
                   </m:oMathPara>
@@ -12970,11 +12824,33 @@
                       <a:srgbClr val="00B050"/>
                     </a:solidFill>
                   </a:rPr>
-                  <a:t>estimativa do vetor gradiente </a:t>
+                  <a:t>estimativa do vetor gradiente</a:t>
                 </a:r>
                 <a:r>
                   <a:rPr lang="pt-BR" dirty="0"/>
-                  <a:t>e </a:t>
+                  <a:t> para a </a:t>
+                </a:r>
+                <a14:m>
+                  <m:oMath xmlns:m="http://schemas.openxmlformats.org/officeDocument/2006/math">
+                    <m:r>
+                      <a:rPr lang="pt-BR" b="0" i="1" smtClean="0">
+                        <a:latin typeface="Cambria Math" panose="02040503050406030204" pitchFamily="18" charset="0"/>
+                      </a:rPr>
+                      <m:t>𝑖</m:t>
+                    </m:r>
+                  </m:oMath>
+                </a14:m>
+                <a:r>
+                  <a:rPr lang="pt-BR" dirty="0"/>
+                  <a:t>-</a:t>
+                </a:r>
+                <a:r>
+                  <a:rPr lang="pt-BR" dirty="0" err="1"/>
+                  <a:t>ésima</a:t>
+                </a:r>
+                <a:r>
+                  <a:rPr lang="pt-BR" dirty="0"/>
+                  <a:t> iteração e </a:t>
                 </a:r>
                 <a14:m>
                   <m:oMath xmlns:m="http://schemas.openxmlformats.org/officeDocument/2006/math">
@@ -13093,12 +12969,12 @@
             <p:spPr>
               <a:xfrm>
                 <a:off x="838199" y="1825624"/>
-                <a:ext cx="11218683" cy="5032375"/>
+                <a:ext cx="11284671" cy="5032375"/>
               </a:xfrm>
               <a:blipFill>
                 <a:blip r:embed="rId2"/>
                 <a:stretch>
-                  <a:fillRect l="-1086" t="-2663" r="-598" b="-969"/>
+                  <a:fillRect l="-1080" t="-2663" r="-432" b="-969"/>
                 </a:stretch>
               </a:blipFill>
             </p:spPr>
@@ -13149,6 +13025,263 @@
       </p:grpSpPr>
       <p:sp>
         <p:nvSpPr>
+          <p:cNvPr id="2" name="Title 1">
+            <a:extLst>
+              <a:ext uri="{FF2B5EF4-FFF2-40B4-BE49-F238E27FC236}">
+                <a16:creationId xmlns:a16="http://schemas.microsoft.com/office/drawing/2014/main" id="{F8B3DAB7-81B5-3D1B-C4D3-AF73617FBA19}"/>
+              </a:ext>
+            </a:extLst>
+          </p:cNvPr>
+          <p:cNvSpPr>
+            <a:spLocks noGrp="1"/>
+          </p:cNvSpPr>
+          <p:nvPr>
+            <p:ph type="title"/>
+          </p:nvPr>
+        </p:nvSpPr>
+        <p:spPr/>
+        <p:txBody>
+          <a:bodyPr/>
+          <a:lstStyle/>
+          <a:p>
+            <a:r>
+              <a:rPr lang="pt-BR" dirty="0"/>
+              <a:t>Variação adaptativa dos passos</a:t>
+            </a:r>
+            <a:endParaRPr lang="en-US" dirty="0"/>
+          </a:p>
+        </p:txBody>
+      </p:sp>
+      <p:sp>
+        <p:nvSpPr>
+          <p:cNvPr id="3" name="Content Placeholder 2">
+            <a:extLst>
+              <a:ext uri="{FF2B5EF4-FFF2-40B4-BE49-F238E27FC236}">
+                <a16:creationId xmlns:a16="http://schemas.microsoft.com/office/drawing/2014/main" id="{130F5DF8-C455-D55B-1076-4FD7884AAF6C}"/>
+              </a:ext>
+            </a:extLst>
+          </p:cNvPr>
+          <p:cNvSpPr>
+            <a:spLocks noGrp="1"/>
+          </p:cNvSpPr>
+          <p:nvPr>
+            <p:ph idx="1"/>
+          </p:nvPr>
+        </p:nvSpPr>
+        <p:spPr>
+          <a:xfrm>
+            <a:off x="838199" y="1825624"/>
+            <a:ext cx="11353801" cy="5032375"/>
+          </a:xfrm>
+        </p:spPr>
+        <p:txBody>
+          <a:bodyPr>
+            <a:normAutofit/>
+          </a:bodyPr>
+          <a:lstStyle/>
+          <a:p>
+            <a:r>
+              <a:rPr lang="pt-BR" dirty="0"/>
+              <a:t>Ajustam </a:t>
+            </a:r>
+            <a:r>
+              <a:rPr lang="pt-BR" b="1" i="1" dirty="0">
+                <a:solidFill>
+                  <a:schemeClr val="accent2"/>
+                </a:solidFill>
+              </a:rPr>
+              <a:t>automaticamente</a:t>
+            </a:r>
+            <a:r>
+              <a:rPr lang="pt-BR" dirty="0"/>
+              <a:t> o </a:t>
+            </a:r>
+            <a:r>
+              <a:rPr lang="pt-BR" b="1" i="1" dirty="0">
+                <a:solidFill>
+                  <a:srgbClr val="00B050"/>
+                </a:solidFill>
+              </a:rPr>
+              <a:t>passo de aprendizado </a:t>
+            </a:r>
+            <a:r>
+              <a:rPr lang="pt-BR" b="1" i="1" dirty="0">
+                <a:solidFill>
+                  <a:schemeClr val="accent2"/>
+                </a:solidFill>
+              </a:rPr>
+              <a:t>para cada peso</a:t>
+            </a:r>
+            <a:r>
+              <a:rPr lang="pt-BR" dirty="0"/>
+              <a:t> ao longo do treinamento, em vez de usar um único valor fixo.</a:t>
+            </a:r>
+          </a:p>
+          <a:p>
+            <a:pPr lvl="1">
+              <a:buFont typeface="Wingdings" panose="05000000000000000000" pitchFamily="2" charset="2"/>
+              <a:buChar char="§"/>
+            </a:pPr>
+            <a:r>
+              <a:rPr lang="pt-BR" dirty="0"/>
+              <a:t>Cada peso do modelo tem seu próprio passo de aprendizagem.</a:t>
+            </a:r>
+          </a:p>
+          <a:p>
+            <a:pPr lvl="1">
+              <a:buFont typeface="Wingdings" panose="05000000000000000000" pitchFamily="2" charset="2"/>
+              <a:buChar char="§"/>
+            </a:pPr>
+            <a:r>
+              <a:rPr lang="pt-BR" dirty="0"/>
+              <a:t>Cada passo é adaptado com base no histórico dos gradientes.</a:t>
+            </a:r>
+          </a:p>
+          <a:p>
+            <a:r>
+              <a:rPr lang="pt-BR" dirty="0"/>
+              <a:t>As técnicas mais conhecidas são </a:t>
+            </a:r>
+            <a:r>
+              <a:rPr lang="pt-BR" dirty="0" err="1"/>
+              <a:t>AdaGrad</a:t>
+            </a:r>
+            <a:r>
+              <a:rPr lang="pt-BR" dirty="0"/>
+              <a:t>, </a:t>
+            </a:r>
+            <a:r>
+              <a:rPr lang="pt-BR" dirty="0" err="1"/>
+              <a:t>RMSProp</a:t>
+            </a:r>
+            <a:r>
+              <a:rPr lang="pt-BR" dirty="0"/>
+              <a:t> e Adam.</a:t>
+            </a:r>
+            <a:r>
+              <a:rPr lang="pt-BR" b="1" dirty="0"/>
+              <a:t> </a:t>
+            </a:r>
+          </a:p>
+          <a:p>
+            <a:r>
+              <a:rPr lang="pt-BR" b="1" dirty="0" err="1"/>
+              <a:t>AdaGrad</a:t>
+            </a:r>
+            <a:r>
+              <a:rPr lang="pt-BR" dirty="0"/>
+              <a:t> reduz o passo usando o acúmulo de gradientes anteriores.</a:t>
+            </a:r>
+          </a:p>
+          <a:p>
+            <a:r>
+              <a:rPr lang="pt-BR" b="1" dirty="0" err="1"/>
+              <a:t>RMSProp</a:t>
+            </a:r>
+            <a:r>
+              <a:rPr lang="pt-BR" dirty="0"/>
+              <a:t> usa uma média móvel dos gradientes anteriores para evitar que a passo caia demais.</a:t>
+            </a:r>
+          </a:p>
+          <a:p>
+            <a:r>
+              <a:rPr lang="pt-BR" b="1" dirty="0"/>
+              <a:t>Adam</a:t>
+            </a:r>
+            <a:r>
+              <a:rPr lang="pt-BR" dirty="0"/>
+              <a:t> combina </a:t>
+            </a:r>
+            <a:r>
+              <a:rPr lang="pt-BR" dirty="0" err="1"/>
+              <a:t>RMSProp</a:t>
+            </a:r>
+            <a:r>
+              <a:rPr lang="pt-BR" dirty="0"/>
+              <a:t> com termo momento (média dos gradientes).</a:t>
+            </a:r>
+          </a:p>
+          <a:p>
+            <a:r>
+              <a:rPr lang="pt-BR" dirty="0"/>
+              <a:t>Em geral, </a:t>
+            </a:r>
+            <a:r>
+              <a:rPr lang="pt-BR" b="1" i="1" dirty="0">
+                <a:solidFill>
+                  <a:srgbClr val="00B050"/>
+                </a:solidFill>
+              </a:rPr>
+              <a:t>não precisa de </a:t>
+            </a:r>
+            <a:r>
+              <a:rPr lang="pt-BR" b="1" i="1">
+                <a:solidFill>
+                  <a:srgbClr val="00B050"/>
+                </a:solidFill>
+              </a:rPr>
+              <a:t>ajuste de </a:t>
+            </a:r>
+            <a:r>
+              <a:rPr lang="pt-BR" b="1" i="1" dirty="0">
+                <a:solidFill>
+                  <a:srgbClr val="00B050"/>
+                </a:solidFill>
+              </a:rPr>
+              <a:t>nenhum </a:t>
+            </a:r>
+            <a:r>
+              <a:rPr lang="pt-BR" b="1" i="1" dirty="0" err="1">
+                <a:solidFill>
+                  <a:srgbClr val="00B050"/>
+                </a:solidFill>
+              </a:rPr>
+              <a:t>hiperparâmetro</a:t>
+            </a:r>
+            <a:r>
+              <a:rPr lang="pt-BR" b="1" i="1" dirty="0">
+                <a:solidFill>
+                  <a:srgbClr val="00B050"/>
+                </a:solidFill>
+              </a:rPr>
+              <a:t>.</a:t>
+            </a:r>
+            <a:endParaRPr lang="en-US" dirty="0"/>
+          </a:p>
+        </p:txBody>
+      </p:sp>
+    </p:spTree>
+    <p:extLst>
+      <p:ext uri="{BB962C8B-B14F-4D97-AF65-F5344CB8AC3E}">
+        <p14:creationId xmlns:p14="http://schemas.microsoft.com/office/powerpoint/2010/main" val="3031723956"/>
+      </p:ext>
+    </p:extLst>
+  </p:cSld>
+  <p:clrMapOvr>
+    <a:masterClrMapping/>
+  </p:clrMapOvr>
+</p:sld>
+</file>
+
+<file path=ppt/slides/slide25.xml><?xml version="1.0" encoding="utf-8"?>
+<p:sld xmlns:a="http://schemas.openxmlformats.org/drawingml/2006/main" xmlns:r="http://schemas.openxmlformats.org/officeDocument/2006/relationships" xmlns:p="http://schemas.openxmlformats.org/presentationml/2006/main">
+  <p:cSld>
+    <p:spTree>
+      <p:nvGrpSpPr>
+        <p:cNvPr id="1" name=""/>
+        <p:cNvGrpSpPr/>
+        <p:nvPr/>
+      </p:nvGrpSpPr>
+      <p:grpSpPr>
+        <a:xfrm>
+          <a:off x="0" y="0"/>
+          <a:ext cx="0" cy="0"/>
+          <a:chOff x="0" y="0"/>
+          <a:chExt cx="0" cy="0"/>
+        </a:xfrm>
+      </p:grpSpPr>
+      <p:sp>
+        <p:nvSpPr>
           <p:cNvPr id="2" name="Título 1">
             <a:extLst>
               <a:ext uri="{FF2B5EF4-FFF2-40B4-BE49-F238E27FC236}">
@@ -13175,7 +13308,7 @@
           <a:p>
             <a:r>
               <a:rPr lang="pt-BR" dirty="0"/>
-              <a:t>Ajuste dos pesos e de seu termo de atualização</a:t>
+              <a:t>Variação adaptativa dos passos</a:t>
             </a:r>
           </a:p>
         </p:txBody>
@@ -13201,7 +13334,7 @@
             <p:spPr>
               <a:xfrm>
                 <a:off x="838199" y="1825624"/>
-                <a:ext cx="11085095" cy="5032375"/>
+                <a:ext cx="11209257" cy="5032375"/>
               </a:xfrm>
             </p:spPr>
             <p:txBody>
@@ -13209,63 +13342,6 @@
                 <a:normAutofit/>
               </a:bodyPr>
               <a:lstStyle/>
-              <a:p>
-                <a:r>
-                  <a:rPr lang="pt-BR" dirty="0"/>
-                  <a:t>Na </a:t>
-                </a:r>
-                <a:r>
-                  <a:rPr lang="pt-BR" b="1" i="1" dirty="0">
-                    <a:solidFill>
-                      <a:srgbClr val="7030A0"/>
-                    </a:solidFill>
-                  </a:rPr>
-                  <a:t>variação adaptativa</a:t>
-                </a:r>
-                <a:r>
-                  <a:rPr lang="pt-BR" dirty="0"/>
-                  <a:t>, o passo</a:t>
-                </a:r>
-                <a14:m>
-                  <m:oMath xmlns:m="http://schemas.openxmlformats.org/officeDocument/2006/math">
-                    <m:r>
-                      <a:rPr lang="pt-BR" i="1">
-                        <a:latin typeface="Cambria Math" panose="02040503050406030204" pitchFamily="18" charset="0"/>
-                        <a:ea typeface="Cambria Math" panose="02040503050406030204" pitchFamily="18" charset="0"/>
-                      </a:rPr>
-                      <m:t> </m:t>
-                    </m:r>
-                  </m:oMath>
-                </a14:m>
-                <a:r>
-                  <a:rPr lang="pt-BR" dirty="0"/>
-                  <a:t>de aprendizagem é </a:t>
-                </a:r>
-                <a:r>
-                  <a:rPr lang="pt-BR" b="1" i="1" dirty="0">
-                    <a:solidFill>
-                      <a:srgbClr val="00B050"/>
-                    </a:solidFill>
-                  </a:rPr>
-                  <a:t>ajustado adaptativamente </a:t>
-                </a:r>
-                <a:r>
-                  <a:rPr lang="pt-BR" dirty="0"/>
-                  <a:t>de acordo com a </a:t>
-                </a:r>
-                <a:r>
-                  <a:rPr lang="pt-BR" b="1" i="1" dirty="0">
-                    <a:solidFill>
-                      <a:srgbClr val="7030A0"/>
-                    </a:solidFill>
-                  </a:rPr>
-                  <a:t>inclinação da superfície de erro</a:t>
-                </a:r>
-                <a:r>
-                  <a:rPr lang="pt-BR" dirty="0"/>
-                  <a:t>. </a:t>
-                </a:r>
-              </a:p>
               <a:p>
                 <a:r>
                   <a:rPr lang="pt-BR" dirty="0"/>
@@ -13322,6 +13398,63 @@
                 <a:r>
                   <a:rPr lang="pt-BR" dirty="0"/>
                   <a:t> na direção dos pesos.</a:t>
+                </a:r>
+              </a:p>
+              <a:p>
+                <a:r>
+                  <a:rPr lang="pt-BR" dirty="0"/>
+                  <a:t>Na </a:t>
+                </a:r>
+                <a:r>
+                  <a:rPr lang="pt-BR" b="1" i="1" dirty="0">
+                    <a:solidFill>
+                      <a:srgbClr val="7030A0"/>
+                    </a:solidFill>
+                  </a:rPr>
+                  <a:t>variação adaptativa</a:t>
+                </a:r>
+                <a:r>
+                  <a:rPr lang="pt-BR" dirty="0"/>
+                  <a:t>, o passo</a:t>
+                </a:r>
+                <a14:m>
+                  <m:oMath xmlns:m="http://schemas.openxmlformats.org/officeDocument/2006/math">
+                    <m:r>
+                      <a:rPr lang="pt-BR" i="1">
+                        <a:latin typeface="Cambria Math" panose="02040503050406030204" pitchFamily="18" charset="0"/>
+                        <a:ea typeface="Cambria Math" panose="02040503050406030204" pitchFamily="18" charset="0"/>
+                      </a:rPr>
+                      <m:t> </m:t>
+                    </m:r>
+                  </m:oMath>
+                </a14:m>
+                <a:r>
+                  <a:rPr lang="pt-BR" dirty="0"/>
+                  <a:t>de aprendizagem é </a:t>
+                </a:r>
+                <a:r>
+                  <a:rPr lang="pt-BR" b="1" i="1" dirty="0">
+                    <a:solidFill>
+                      <a:srgbClr val="00B050"/>
+                    </a:solidFill>
+                  </a:rPr>
+                  <a:t>ajustado adaptativamente </a:t>
+                </a:r>
+                <a:r>
+                  <a:rPr lang="pt-BR" dirty="0"/>
+                  <a:t>de acordo com a </a:t>
+                </a:r>
+                <a:r>
+                  <a:rPr lang="pt-BR" b="1" i="1" dirty="0">
+                    <a:solidFill>
+                      <a:srgbClr val="7030A0"/>
+                    </a:solidFill>
+                  </a:rPr>
+                  <a:t>inclinação da superfície de erro</a:t>
+                </a:r>
+                <a:r>
+                  <a:rPr lang="pt-BR" dirty="0"/>
+                  <a:t>. </a:t>
                 </a:r>
               </a:p>
               <a:p>
@@ -13417,12 +13550,12 @@
             <p:spPr>
               <a:xfrm>
                 <a:off x="838199" y="1825624"/>
-                <a:ext cx="11085095" cy="5032375"/>
+                <a:ext cx="11209257" cy="5032375"/>
               </a:xfrm>
               <a:blipFill>
                 <a:blip r:embed="rId2"/>
                 <a:stretch>
-                  <a:fillRect l="-935" t="-1937"/>
+                  <a:fillRect l="-924" t="-1937"/>
                 </a:stretch>
               </a:blipFill>
             </p:spPr>
@@ -13454,7 +13587,7 @@
 </p:sld>
 </file>
 
-<file path=ppt/slides/slide25.xml><?xml version="1.0" encoding="utf-8"?>
+<file path=ppt/slides/slide26.xml><?xml version="1.0" encoding="utf-8"?>
 <p:sld xmlns:a="http://schemas.openxmlformats.org/drawingml/2006/main" xmlns:r="http://schemas.openxmlformats.org/officeDocument/2006/relationships" xmlns:p="http://schemas.openxmlformats.org/presentationml/2006/main">
   <p:cSld>
     <p:spTree>
@@ -14688,7 +14821,7 @@
 </p:sld>
 </file>
 
-<file path=ppt/slides/slide26.xml><?xml version="1.0" encoding="utf-8"?>
+<file path=ppt/slides/slide27.xml><?xml version="1.0" encoding="utf-8"?>
 <p:sld xmlns:a="http://schemas.openxmlformats.org/drawingml/2006/main" xmlns:r="http://schemas.openxmlformats.org/officeDocument/2006/relationships" xmlns:p="http://schemas.openxmlformats.org/presentationml/2006/main">
   <p:cSld>
     <p:spTree>
@@ -15936,7 +16069,7 @@
 </p:sld>
 </file>
 
-<file path=ppt/slides/slide27.xml><?xml version="1.0" encoding="utf-8"?>
+<file path=ppt/slides/slide28.xml><?xml version="1.0" encoding="utf-8"?>
 <p:sld xmlns:a="http://schemas.openxmlformats.org/drawingml/2006/main" xmlns:r="http://schemas.openxmlformats.org/officeDocument/2006/relationships" xmlns:p="http://schemas.openxmlformats.org/presentationml/2006/main">
   <p:cSld>
     <p:spTree>
@@ -17091,7 +17224,7 @@
 </p:sld>
 </file>
 
-<file path=ppt/slides/slide28.xml><?xml version="1.0" encoding="utf-8"?>
+<file path=ppt/slides/slide29.xml><?xml version="1.0" encoding="utf-8"?>
 <p:sld xmlns:a="http://schemas.openxmlformats.org/drawingml/2006/main" xmlns:r="http://schemas.openxmlformats.org/officeDocument/2006/relationships" xmlns:p="http://schemas.openxmlformats.org/presentationml/2006/main">
   <p:cSld>
     <p:spTree>
@@ -17255,91 +17388,6 @@
     <p:extLst>
       <p:ext uri="{BB962C8B-B14F-4D97-AF65-F5344CB8AC3E}">
         <p14:creationId xmlns:p14="http://schemas.microsoft.com/office/powerpoint/2010/main" val="2149093365"/>
-      </p:ext>
-    </p:extLst>
-  </p:cSld>
-  <p:clrMapOvr>
-    <a:masterClrMapping/>
-  </p:clrMapOvr>
-</p:sld>
-</file>
-
-<file path=ppt/slides/slide29.xml><?xml version="1.0" encoding="utf-8"?>
-<p:sld xmlns:a="http://schemas.openxmlformats.org/drawingml/2006/main" xmlns:r="http://schemas.openxmlformats.org/officeDocument/2006/relationships" xmlns:p="http://schemas.openxmlformats.org/presentationml/2006/main">
-  <p:cSld>
-    <p:spTree>
-      <p:nvGrpSpPr>
-        <p:cNvPr id="1" name=""/>
-        <p:cNvGrpSpPr/>
-        <p:nvPr/>
-      </p:nvGrpSpPr>
-      <p:grpSpPr>
-        <a:xfrm>
-          <a:off x="0" y="0"/>
-          <a:ext cx="0" cy="0"/>
-          <a:chOff x="0" y="0"/>
-          <a:chExt cx="0" cy="0"/>
-        </a:xfrm>
-      </p:grpSpPr>
-      <p:sp>
-        <p:nvSpPr>
-          <p:cNvPr id="4" name="Título 1">
-            <a:extLst>
-              <a:ext uri="{FF2B5EF4-FFF2-40B4-BE49-F238E27FC236}">
-                <a16:creationId xmlns:a16="http://schemas.microsoft.com/office/drawing/2014/main" id="{32666AC8-2E17-4DB4-B0F5-60C640CCFD2E}"/>
-              </a:ext>
-            </a:extLst>
-          </p:cNvPr>
-          <p:cNvSpPr txBox="1">
-            <a:spLocks/>
-          </p:cNvSpPr>
-          <p:nvPr/>
-        </p:nvSpPr>
-        <p:spPr>
-          <a:xfrm>
-            <a:off x="1431533" y="2720526"/>
-            <a:ext cx="9144000" cy="1029541"/>
-          </a:xfrm>
-          <a:prstGeom prst="rect">
-            <a:avLst/>
-          </a:prstGeom>
-        </p:spPr>
-        <p:txBody>
-          <a:bodyPr vert="horz" lIns="91440" tIns="45720" rIns="91440" bIns="45720" rtlCol="0" anchor="ctr">
-            <a:normAutofit/>
-          </a:bodyPr>
-          <a:lstStyle>
-            <a:lvl1pPr algn="l" defTabSz="914400" rtl="0" eaLnBrk="1" latinLnBrk="0" hangingPunct="1">
-              <a:lnSpc>
-                <a:spcPct val="90000"/>
-              </a:lnSpc>
-              <a:spcBef>
-                <a:spcPct val="0"/>
-              </a:spcBef>
-              <a:buNone/>
-              <a:defRPr sz="4400" kern="1200">
-                <a:solidFill>
-                  <a:schemeClr val="tx1"/>
-                </a:solidFill>
-                <a:latin typeface="+mj-lt"/>
-                <a:ea typeface="+mj-ea"/>
-                <a:cs typeface="+mj-cs"/>
-              </a:defRPr>
-            </a:lvl1pPr>
-          </a:lstStyle>
-          <a:p>
-            <a:pPr algn="ctr"/>
-            <a:r>
-              <a:rPr lang="pt-BR" sz="6600" dirty="0"/>
-              <a:t>Obrigado!</a:t>
-            </a:r>
-          </a:p>
-        </p:txBody>
-      </p:sp>
-    </p:spTree>
-    <p:extLst>
-      <p:ext uri="{BB962C8B-B14F-4D97-AF65-F5344CB8AC3E}">
-        <p14:creationId xmlns:p14="http://schemas.microsoft.com/office/powerpoint/2010/main" val="309872539"/>
       </p:ext>
     </p:extLst>
   </p:cSld>
@@ -17394,8 +17442,8 @@
           </a:p>
         </p:txBody>
       </p:sp>
-      <mc:AlternateContent xmlns:mc="http://schemas.openxmlformats.org/markup-compatibility/2006">
-        <mc:Choice xmlns:a14="http://schemas.microsoft.com/office/drawing/2010/main" Requires="a14">
+      <mc:AlternateContent xmlns:mc="http://schemas.openxmlformats.org/markup-compatibility/2006" xmlns:a14="http://schemas.microsoft.com/office/drawing/2010/main">
+        <mc:Choice Requires="a14">
           <p:sp>
             <p:nvSpPr>
               <p:cNvPr id="3" name="Espaço Reservado para Conteúdo 2">
@@ -17599,7 +17647,7 @@
             </p:txBody>
           </p:sp>
         </mc:Choice>
-        <mc:Fallback>
+        <mc:Fallback xmlns="">
           <p:sp>
             <p:nvSpPr>
               <p:cNvPr id="3" name="Espaço Reservado para Conteúdo 2">
@@ -17692,6 +17740,91 @@
 </file>
 
 <file path=ppt/slides/slide30.xml><?xml version="1.0" encoding="utf-8"?>
+<p:sld xmlns:a="http://schemas.openxmlformats.org/drawingml/2006/main" xmlns:r="http://schemas.openxmlformats.org/officeDocument/2006/relationships" xmlns:p="http://schemas.openxmlformats.org/presentationml/2006/main">
+  <p:cSld>
+    <p:spTree>
+      <p:nvGrpSpPr>
+        <p:cNvPr id="1" name=""/>
+        <p:cNvGrpSpPr/>
+        <p:nvPr/>
+      </p:nvGrpSpPr>
+      <p:grpSpPr>
+        <a:xfrm>
+          <a:off x="0" y="0"/>
+          <a:ext cx="0" cy="0"/>
+          <a:chOff x="0" y="0"/>
+          <a:chExt cx="0" cy="0"/>
+        </a:xfrm>
+      </p:grpSpPr>
+      <p:sp>
+        <p:nvSpPr>
+          <p:cNvPr id="4" name="Título 1">
+            <a:extLst>
+              <a:ext uri="{FF2B5EF4-FFF2-40B4-BE49-F238E27FC236}">
+                <a16:creationId xmlns:a16="http://schemas.microsoft.com/office/drawing/2014/main" id="{32666AC8-2E17-4DB4-B0F5-60C640CCFD2E}"/>
+              </a:ext>
+            </a:extLst>
+          </p:cNvPr>
+          <p:cNvSpPr txBox="1">
+            <a:spLocks/>
+          </p:cNvSpPr>
+          <p:nvPr/>
+        </p:nvSpPr>
+        <p:spPr>
+          <a:xfrm>
+            <a:off x="1431533" y="2720526"/>
+            <a:ext cx="9144000" cy="1029541"/>
+          </a:xfrm>
+          <a:prstGeom prst="rect">
+            <a:avLst/>
+          </a:prstGeom>
+        </p:spPr>
+        <p:txBody>
+          <a:bodyPr vert="horz" lIns="91440" tIns="45720" rIns="91440" bIns="45720" rtlCol="0" anchor="ctr">
+            <a:normAutofit/>
+          </a:bodyPr>
+          <a:lstStyle>
+            <a:lvl1pPr algn="l" defTabSz="914400" rtl="0" eaLnBrk="1" latinLnBrk="0" hangingPunct="1">
+              <a:lnSpc>
+                <a:spcPct val="90000"/>
+              </a:lnSpc>
+              <a:spcBef>
+                <a:spcPct val="0"/>
+              </a:spcBef>
+              <a:buNone/>
+              <a:defRPr sz="4400" kern="1200">
+                <a:solidFill>
+                  <a:schemeClr val="tx1"/>
+                </a:solidFill>
+                <a:latin typeface="+mj-lt"/>
+                <a:ea typeface="+mj-ea"/>
+                <a:cs typeface="+mj-cs"/>
+              </a:defRPr>
+            </a:lvl1pPr>
+          </a:lstStyle>
+          <a:p>
+            <a:pPr algn="ctr"/>
+            <a:r>
+              <a:rPr lang="pt-BR" sz="6600" dirty="0"/>
+              <a:t>Obrigado!</a:t>
+            </a:r>
+          </a:p>
+        </p:txBody>
+      </p:sp>
+    </p:spTree>
+    <p:extLst>
+      <p:ext uri="{BB962C8B-B14F-4D97-AF65-F5344CB8AC3E}">
+        <p14:creationId xmlns:p14="http://schemas.microsoft.com/office/powerpoint/2010/main" val="309872539"/>
+      </p:ext>
+    </p:extLst>
+  </p:cSld>
+  <p:clrMapOvr>
+    <a:masterClrMapping/>
+  </p:clrMapOvr>
+</p:sld>
+</file>
+
+<file path=ppt/slides/slide31.xml><?xml version="1.0" encoding="utf-8"?>
 <p:sld xmlns:a="http://schemas.openxmlformats.org/drawingml/2006/main" xmlns:r="http://schemas.openxmlformats.org/officeDocument/2006/relationships" xmlns:p="http://schemas.openxmlformats.org/presentationml/2006/main">
   <p:cSld>
     <p:spTree>
@@ -17967,7 +18100,7 @@
 </p:sld>
 </file>
 
-<file path=ppt/slides/slide31.xml><?xml version="1.0" encoding="utf-8"?>
+<file path=ppt/slides/slide32.xml><?xml version="1.0" encoding="utf-8"?>
 <p:sld xmlns:a="http://schemas.openxmlformats.org/drawingml/2006/main" xmlns:r="http://schemas.openxmlformats.org/officeDocument/2006/relationships" xmlns:p="http://schemas.openxmlformats.org/presentationml/2006/main">
   <p:cSld>
     <p:spTree>
@@ -18025,7 +18158,7 @@
 </p:sld>
 </file>
 
-<file path=ppt/slides/slide32.xml><?xml version="1.0" encoding="utf-8"?>
+<file path=ppt/slides/slide33.xml><?xml version="1.0" encoding="utf-8"?>
 <p:sld xmlns:a="http://schemas.openxmlformats.org/drawingml/2006/main" xmlns:r="http://schemas.openxmlformats.org/officeDocument/2006/relationships" xmlns:p="http://schemas.openxmlformats.org/presentationml/2006/main">
   <p:cSld>
     <p:spTree>
@@ -19774,7 +19907,7 @@
 </p:sld>
 </file>
 
-<file path=ppt/slides/slide33.xml><?xml version="1.0" encoding="utf-8"?>
+<file path=ppt/slides/slide34.xml><?xml version="1.0" encoding="utf-8"?>
 <p:sld xmlns:a="http://schemas.openxmlformats.org/drawingml/2006/main" xmlns:r="http://schemas.openxmlformats.org/officeDocument/2006/relationships" xmlns:p="http://schemas.openxmlformats.org/presentationml/2006/main">
   <p:cSld>
     <p:spTree>
@@ -21715,7 +21848,7 @@
 </p:sld>
 </file>
 
-<file path=ppt/slides/slide34.xml><?xml version="1.0" encoding="utf-8"?>
+<file path=ppt/slides/slide35.xml><?xml version="1.0" encoding="utf-8"?>
 <p:sld xmlns:a="http://schemas.openxmlformats.org/drawingml/2006/main" xmlns:r="http://schemas.openxmlformats.org/officeDocument/2006/relationships" xmlns:p="http://schemas.openxmlformats.org/presentationml/2006/main">
   <p:cSld>
     <p:spTree>
@@ -22865,7 +22998,7 @@
 </p:sld>
 </file>
 
-<file path=ppt/slides/slide35.xml><?xml version="1.0" encoding="utf-8"?>
+<file path=ppt/slides/slide36.xml><?xml version="1.0" encoding="utf-8"?>
 <p:sld xmlns:a="http://schemas.openxmlformats.org/drawingml/2006/main" xmlns:r="http://schemas.openxmlformats.org/officeDocument/2006/relationships" xmlns:p="http://schemas.openxmlformats.org/presentationml/2006/main">
   <p:cSld>
     <p:spTree>
@@ -24210,7 +24343,7 @@
 </p:sld>
 </file>
 
-<file path=ppt/slides/slide36.xml><?xml version="1.0" encoding="utf-8"?>
+<file path=ppt/slides/slide37.xml><?xml version="1.0" encoding="utf-8"?>
 <p:sld xmlns:a="http://schemas.openxmlformats.org/drawingml/2006/main" xmlns:r="http://schemas.openxmlformats.org/officeDocument/2006/relationships" xmlns:p="http://schemas.openxmlformats.org/presentationml/2006/main">
   <p:cSld>
     <p:spTree>
@@ -25554,7 +25687,7 @@
 </p:sld>
 </file>
 
-<file path=ppt/slides/slide37.xml><?xml version="1.0" encoding="utf-8"?>
+<file path=ppt/slides/slide38.xml><?xml version="1.0" encoding="utf-8"?>
 <p:sld xmlns:a="http://schemas.openxmlformats.org/drawingml/2006/main" xmlns:r="http://schemas.openxmlformats.org/officeDocument/2006/relationships" xmlns:p="http://schemas.openxmlformats.org/presentationml/2006/main">
   <p:cSld>
     <p:spTree>
@@ -28122,7 +28255,7 @@
 </p:sld>
 </file>
 
-<file path=ppt/slides/slide38.xml><?xml version="1.0" encoding="utf-8"?>
+<file path=ppt/slides/slide39.xml><?xml version="1.0" encoding="utf-8"?>
 <p:sld xmlns:a="http://schemas.openxmlformats.org/drawingml/2006/main" xmlns:r="http://schemas.openxmlformats.org/officeDocument/2006/relationships" xmlns:p="http://schemas.openxmlformats.org/presentationml/2006/main">
   <p:cSld>
     <p:spTree>
@@ -29882,3432 +30015,6 @@
 </p:sld>
 </file>
 
-<file path=ppt/slides/slide39.xml><?xml version="1.0" encoding="utf-8"?>
-<p:sld xmlns:a="http://schemas.openxmlformats.org/drawingml/2006/main" xmlns:r="http://schemas.openxmlformats.org/officeDocument/2006/relationships" xmlns:p="http://schemas.openxmlformats.org/presentationml/2006/main">
-  <p:cSld>
-    <p:spTree>
-      <p:nvGrpSpPr>
-        <p:cNvPr id="1" name=""/>
-        <p:cNvGrpSpPr/>
-        <p:nvPr/>
-      </p:nvGrpSpPr>
-      <p:grpSpPr>
-        <a:xfrm>
-          <a:off x="0" y="0"/>
-          <a:ext cx="0" cy="0"/>
-          <a:chOff x="0" y="0"/>
-          <a:chExt cx="0" cy="0"/>
-        </a:xfrm>
-      </p:grpSpPr>
-      <p:grpSp>
-        <p:nvGrpSpPr>
-          <p:cNvPr id="167" name="Group 166"/>
-          <p:cNvGrpSpPr/>
-          <p:nvPr/>
-        </p:nvGrpSpPr>
-        <p:grpSpPr>
-          <a:xfrm>
-            <a:off x="6818898" y="2134388"/>
-            <a:ext cx="3549478" cy="3157828"/>
-            <a:chOff x="6818898" y="2134388"/>
-            <a:chExt cx="3549478" cy="3157828"/>
-          </a:xfrm>
-        </p:grpSpPr>
-        <p:sp>
-          <p:nvSpPr>
-            <p:cNvPr id="108" name="Oval 107"/>
-            <p:cNvSpPr/>
-            <p:nvPr/>
-          </p:nvSpPr>
-          <p:spPr>
-            <a:xfrm>
-              <a:off x="7353299" y="2749031"/>
-              <a:ext cx="2160000" cy="2160000"/>
-            </a:xfrm>
-            <a:prstGeom prst="ellipse">
-              <a:avLst/>
-            </a:prstGeom>
-            <a:noFill/>
-            <a:ln>
-              <a:solidFill>
-                <a:schemeClr val="tx1"/>
-              </a:solidFill>
-            </a:ln>
-          </p:spPr>
-          <p:style>
-            <a:lnRef idx="2">
-              <a:schemeClr val="accent1">
-                <a:shade val="50000"/>
-              </a:schemeClr>
-            </a:lnRef>
-            <a:fillRef idx="1">
-              <a:schemeClr val="accent1"/>
-            </a:fillRef>
-            <a:effectRef idx="0">
-              <a:schemeClr val="accent1"/>
-            </a:effectRef>
-            <a:fontRef idx="minor">
-              <a:schemeClr val="lt1"/>
-            </a:fontRef>
-          </p:style>
-          <p:txBody>
-            <a:bodyPr rtlCol="0" anchor="ctr"/>
-            <a:lstStyle/>
-            <a:p>
-              <a:pPr algn="ctr"/>
-              <a:endParaRPr lang="pt-BR"/>
-            </a:p>
-          </p:txBody>
-        </p:sp>
-        <p:sp>
-          <p:nvSpPr>
-            <p:cNvPr id="109" name="Oval 108"/>
-            <p:cNvSpPr/>
-            <p:nvPr/>
-          </p:nvSpPr>
-          <p:spPr>
-            <a:xfrm>
-              <a:off x="7533299" y="2929031"/>
-              <a:ext cx="1800000" cy="1800000"/>
-            </a:xfrm>
-            <a:prstGeom prst="ellipse">
-              <a:avLst/>
-            </a:prstGeom>
-            <a:noFill/>
-            <a:ln>
-              <a:solidFill>
-                <a:schemeClr val="tx1"/>
-              </a:solidFill>
-            </a:ln>
-          </p:spPr>
-          <p:style>
-            <a:lnRef idx="2">
-              <a:schemeClr val="accent1">
-                <a:shade val="50000"/>
-              </a:schemeClr>
-            </a:lnRef>
-            <a:fillRef idx="1">
-              <a:schemeClr val="accent1"/>
-            </a:fillRef>
-            <a:effectRef idx="0">
-              <a:schemeClr val="accent1"/>
-            </a:effectRef>
-            <a:fontRef idx="minor">
-              <a:schemeClr val="lt1"/>
-            </a:fontRef>
-          </p:style>
-          <p:txBody>
-            <a:bodyPr rtlCol="0" anchor="ctr"/>
-            <a:lstStyle/>
-            <a:p>
-              <a:pPr algn="ctr"/>
-              <a:endParaRPr lang="pt-BR"/>
-            </a:p>
-          </p:txBody>
-        </p:sp>
-        <p:sp>
-          <p:nvSpPr>
-            <p:cNvPr id="110" name="Oval 109"/>
-            <p:cNvSpPr/>
-            <p:nvPr/>
-          </p:nvSpPr>
-          <p:spPr>
-            <a:xfrm>
-              <a:off x="7713299" y="3109031"/>
-              <a:ext cx="1440000" cy="1440000"/>
-            </a:xfrm>
-            <a:prstGeom prst="ellipse">
-              <a:avLst/>
-            </a:prstGeom>
-            <a:noFill/>
-            <a:ln>
-              <a:solidFill>
-                <a:schemeClr val="tx1"/>
-              </a:solidFill>
-            </a:ln>
-          </p:spPr>
-          <p:style>
-            <a:lnRef idx="2">
-              <a:schemeClr val="accent1">
-                <a:shade val="50000"/>
-              </a:schemeClr>
-            </a:lnRef>
-            <a:fillRef idx="1">
-              <a:schemeClr val="accent1"/>
-            </a:fillRef>
-            <a:effectRef idx="0">
-              <a:schemeClr val="accent1"/>
-            </a:effectRef>
-            <a:fontRef idx="minor">
-              <a:schemeClr val="lt1"/>
-            </a:fontRef>
-          </p:style>
-          <p:txBody>
-            <a:bodyPr rtlCol="0" anchor="ctr"/>
-            <a:lstStyle/>
-            <a:p>
-              <a:pPr algn="ctr"/>
-              <a:endParaRPr lang="pt-BR"/>
-            </a:p>
-          </p:txBody>
-        </p:sp>
-        <p:sp>
-          <p:nvSpPr>
-            <p:cNvPr id="111" name="Oval 110"/>
-            <p:cNvSpPr/>
-            <p:nvPr/>
-          </p:nvSpPr>
-          <p:spPr>
-            <a:xfrm>
-              <a:off x="7893299" y="3289031"/>
-              <a:ext cx="1080000" cy="1080000"/>
-            </a:xfrm>
-            <a:prstGeom prst="ellipse">
-              <a:avLst/>
-            </a:prstGeom>
-            <a:noFill/>
-            <a:ln>
-              <a:solidFill>
-                <a:schemeClr val="tx1"/>
-              </a:solidFill>
-            </a:ln>
-          </p:spPr>
-          <p:style>
-            <a:lnRef idx="2">
-              <a:schemeClr val="accent1">
-                <a:shade val="50000"/>
-              </a:schemeClr>
-            </a:lnRef>
-            <a:fillRef idx="1">
-              <a:schemeClr val="accent1"/>
-            </a:fillRef>
-            <a:effectRef idx="0">
-              <a:schemeClr val="accent1"/>
-            </a:effectRef>
-            <a:fontRef idx="minor">
-              <a:schemeClr val="lt1"/>
-            </a:fontRef>
-          </p:style>
-          <p:txBody>
-            <a:bodyPr rtlCol="0" anchor="ctr"/>
-            <a:lstStyle/>
-            <a:p>
-              <a:pPr algn="ctr"/>
-              <a:endParaRPr lang="pt-BR"/>
-            </a:p>
-          </p:txBody>
-        </p:sp>
-        <p:sp>
-          <p:nvSpPr>
-            <p:cNvPr id="112" name="Oval 111"/>
-            <p:cNvSpPr/>
-            <p:nvPr/>
-          </p:nvSpPr>
-          <p:spPr>
-            <a:xfrm>
-              <a:off x="8073299" y="3469031"/>
-              <a:ext cx="720000" cy="720000"/>
-            </a:xfrm>
-            <a:prstGeom prst="ellipse">
-              <a:avLst/>
-            </a:prstGeom>
-            <a:noFill/>
-            <a:ln>
-              <a:solidFill>
-                <a:schemeClr val="tx1"/>
-              </a:solidFill>
-            </a:ln>
-          </p:spPr>
-          <p:style>
-            <a:lnRef idx="2">
-              <a:schemeClr val="accent1">
-                <a:shade val="50000"/>
-              </a:schemeClr>
-            </a:lnRef>
-            <a:fillRef idx="1">
-              <a:schemeClr val="accent1"/>
-            </a:fillRef>
-            <a:effectRef idx="0">
-              <a:schemeClr val="accent1"/>
-            </a:effectRef>
-            <a:fontRef idx="minor">
-              <a:schemeClr val="lt1"/>
-            </a:fontRef>
-          </p:style>
-          <p:txBody>
-            <a:bodyPr rtlCol="0" anchor="ctr"/>
-            <a:lstStyle/>
-            <a:p>
-              <a:pPr algn="ctr"/>
-              <a:endParaRPr lang="pt-BR"/>
-            </a:p>
-          </p:txBody>
-        </p:sp>
-        <p:sp>
-          <p:nvSpPr>
-            <p:cNvPr id="113" name="Oval 112"/>
-            <p:cNvSpPr/>
-            <p:nvPr/>
-          </p:nvSpPr>
-          <p:spPr>
-            <a:xfrm>
-              <a:off x="8253299" y="3649031"/>
-              <a:ext cx="360000" cy="360000"/>
-            </a:xfrm>
-            <a:prstGeom prst="ellipse">
-              <a:avLst/>
-            </a:prstGeom>
-            <a:noFill/>
-            <a:ln>
-              <a:solidFill>
-                <a:schemeClr val="tx1"/>
-              </a:solidFill>
-            </a:ln>
-          </p:spPr>
-          <p:style>
-            <a:lnRef idx="2">
-              <a:schemeClr val="accent1">
-                <a:shade val="50000"/>
-              </a:schemeClr>
-            </a:lnRef>
-            <a:fillRef idx="1">
-              <a:schemeClr val="accent1"/>
-            </a:fillRef>
-            <a:effectRef idx="0">
-              <a:schemeClr val="accent1"/>
-            </a:effectRef>
-            <a:fontRef idx="minor">
-              <a:schemeClr val="lt1"/>
-            </a:fontRef>
-          </p:style>
-          <p:txBody>
-            <a:bodyPr rtlCol="0" anchor="ctr"/>
-            <a:lstStyle/>
-            <a:p>
-              <a:pPr algn="ctr"/>
-              <a:endParaRPr lang="pt-BR"/>
-            </a:p>
-          </p:txBody>
-        </p:sp>
-        <p:sp>
-          <p:nvSpPr>
-            <p:cNvPr id="114" name="Multiply 113"/>
-            <p:cNvSpPr>
-              <a:spLocks noChangeAspect="1"/>
-            </p:cNvSpPr>
-            <p:nvPr/>
-          </p:nvSpPr>
-          <p:spPr>
-            <a:xfrm>
-              <a:off x="8349614" y="3734666"/>
-              <a:ext cx="158298" cy="180000"/>
-            </a:xfrm>
-            <a:prstGeom prst="mathMultiply">
-              <a:avLst/>
-            </a:prstGeom>
-            <a:solidFill>
-              <a:srgbClr val="FF0000"/>
-            </a:solidFill>
-            <a:ln w="3175">
-              <a:solidFill>
-                <a:schemeClr val="tx1"/>
-              </a:solidFill>
-            </a:ln>
-          </p:spPr>
-          <p:style>
-            <a:lnRef idx="2">
-              <a:schemeClr val="accent1">
-                <a:shade val="50000"/>
-              </a:schemeClr>
-            </a:lnRef>
-            <a:fillRef idx="1">
-              <a:schemeClr val="accent1"/>
-            </a:fillRef>
-            <a:effectRef idx="0">
-              <a:schemeClr val="accent1"/>
-            </a:effectRef>
-            <a:fontRef idx="minor">
-              <a:schemeClr val="lt1"/>
-            </a:fontRef>
-          </p:style>
-          <p:txBody>
-            <a:bodyPr rtlCol="0" anchor="ctr"/>
-            <a:lstStyle/>
-            <a:p>
-              <a:pPr algn="ctr"/>
-              <a:endParaRPr lang="pt-BR"/>
-            </a:p>
-          </p:txBody>
-        </p:sp>
-        <p:cxnSp>
-          <p:nvCxnSpPr>
-            <p:cNvPr id="119" name="Straight Connector 118"/>
-            <p:cNvCxnSpPr/>
-            <p:nvPr/>
-          </p:nvCxnSpPr>
-          <p:spPr>
-            <a:xfrm flipH="1">
-              <a:off x="7936368" y="4340403"/>
-              <a:ext cx="136931" cy="180000"/>
-            </a:xfrm>
-            <a:prstGeom prst="line">
-              <a:avLst/>
-            </a:prstGeom>
-            <a:ln w="12700">
-              <a:solidFill>
-                <a:schemeClr val="tx1"/>
-              </a:solidFill>
-              <a:prstDash val="dash"/>
-            </a:ln>
-          </p:spPr>
-          <p:style>
-            <a:lnRef idx="1">
-              <a:schemeClr val="accent1"/>
-            </a:lnRef>
-            <a:fillRef idx="0">
-              <a:schemeClr val="accent1"/>
-            </a:fillRef>
-            <a:effectRef idx="0">
-              <a:schemeClr val="accent1"/>
-            </a:effectRef>
-            <a:fontRef idx="minor">
-              <a:schemeClr val="tx1"/>
-            </a:fontRef>
-          </p:style>
-        </p:cxnSp>
-        <p:cxnSp>
-          <p:nvCxnSpPr>
-            <p:cNvPr id="121" name="Straight Connector 120"/>
-            <p:cNvCxnSpPr/>
-            <p:nvPr/>
-          </p:nvCxnSpPr>
-          <p:spPr>
-            <a:xfrm flipH="1">
-              <a:off x="8074119" y="4165165"/>
-              <a:ext cx="153100" cy="175266"/>
-            </a:xfrm>
-            <a:prstGeom prst="line">
-              <a:avLst/>
-            </a:prstGeom>
-            <a:ln w="12700">
-              <a:solidFill>
-                <a:schemeClr val="tx1"/>
-              </a:solidFill>
-              <a:prstDash val="dash"/>
-            </a:ln>
-          </p:spPr>
-          <p:style>
-            <a:lnRef idx="1">
-              <a:schemeClr val="accent1"/>
-            </a:lnRef>
-            <a:fillRef idx="0">
-              <a:schemeClr val="accent1"/>
-            </a:fillRef>
-            <a:effectRef idx="0">
-              <a:schemeClr val="accent1"/>
-            </a:effectRef>
-            <a:fontRef idx="minor">
-              <a:schemeClr val="tx1"/>
-            </a:fontRef>
-          </p:style>
-        </p:cxnSp>
-        <p:cxnSp>
-          <p:nvCxnSpPr>
-            <p:cNvPr id="123" name="Straight Connector 122"/>
-            <p:cNvCxnSpPr/>
-            <p:nvPr/>
-          </p:nvCxnSpPr>
-          <p:spPr>
-            <a:xfrm flipH="1">
-              <a:off x="8216880" y="4030041"/>
-              <a:ext cx="86539" cy="150678"/>
-            </a:xfrm>
-            <a:prstGeom prst="line">
-              <a:avLst/>
-            </a:prstGeom>
-            <a:ln w="12700">
-              <a:solidFill>
-                <a:schemeClr val="tx1"/>
-              </a:solidFill>
-              <a:prstDash val="dash"/>
-            </a:ln>
-          </p:spPr>
-          <p:style>
-            <a:lnRef idx="1">
-              <a:schemeClr val="accent1"/>
-            </a:lnRef>
-            <a:fillRef idx="0">
-              <a:schemeClr val="accent1"/>
-            </a:fillRef>
-            <a:effectRef idx="0">
-              <a:schemeClr val="accent1"/>
-            </a:effectRef>
-            <a:fontRef idx="minor">
-              <a:schemeClr val="tx1"/>
-            </a:fontRef>
-          </p:style>
-        </p:cxnSp>
-        <p:cxnSp>
-          <p:nvCxnSpPr>
-            <p:cNvPr id="126" name="Straight Connector 125"/>
-            <p:cNvCxnSpPr/>
-            <p:nvPr/>
-          </p:nvCxnSpPr>
-          <p:spPr>
-            <a:xfrm flipH="1">
-              <a:off x="8304826" y="3915692"/>
-              <a:ext cx="65154" cy="112507"/>
-            </a:xfrm>
-            <a:prstGeom prst="line">
-              <a:avLst/>
-            </a:prstGeom>
-            <a:ln w="12700">
-              <a:solidFill>
-                <a:schemeClr val="tx1"/>
-              </a:solidFill>
-              <a:prstDash val="dash"/>
-            </a:ln>
-          </p:spPr>
-          <p:style>
-            <a:lnRef idx="1">
-              <a:schemeClr val="accent1"/>
-            </a:lnRef>
-            <a:fillRef idx="0">
-              <a:schemeClr val="accent1"/>
-            </a:fillRef>
-            <a:effectRef idx="0">
-              <a:schemeClr val="accent1"/>
-            </a:effectRef>
-            <a:fontRef idx="minor">
-              <a:schemeClr val="tx1"/>
-            </a:fontRef>
-          </p:style>
-        </p:cxnSp>
-        <p:cxnSp>
-          <p:nvCxnSpPr>
-            <p:cNvPr id="128" name="Straight Connector 127"/>
-            <p:cNvCxnSpPr/>
-            <p:nvPr/>
-          </p:nvCxnSpPr>
-          <p:spPr>
-            <a:xfrm flipH="1">
-              <a:off x="8368145" y="3829031"/>
-              <a:ext cx="65154" cy="92178"/>
-            </a:xfrm>
-            <a:prstGeom prst="line">
-              <a:avLst/>
-            </a:prstGeom>
-            <a:ln w="12700">
-              <a:solidFill>
-                <a:schemeClr val="tx1"/>
-              </a:solidFill>
-              <a:prstDash val="dash"/>
-            </a:ln>
-          </p:spPr>
-          <p:style>
-            <a:lnRef idx="1">
-              <a:schemeClr val="accent1"/>
-            </a:lnRef>
-            <a:fillRef idx="0">
-              <a:schemeClr val="accent1"/>
-            </a:fillRef>
-            <a:effectRef idx="0">
-              <a:schemeClr val="accent1"/>
-            </a:effectRef>
-            <a:fontRef idx="minor">
-              <a:schemeClr val="tx1"/>
-            </a:fontRef>
-          </p:style>
-        </p:cxnSp>
-        <p:sp>
-          <p:nvSpPr>
-            <p:cNvPr id="131" name="Multiply 130"/>
-            <p:cNvSpPr>
-              <a:spLocks noChangeAspect="1"/>
-            </p:cNvSpPr>
-            <p:nvPr/>
-          </p:nvSpPr>
-          <p:spPr>
-            <a:xfrm>
-              <a:off x="7733351" y="4634932"/>
-              <a:ext cx="72817" cy="82800"/>
-            </a:xfrm>
-            <a:prstGeom prst="mathMultiply">
-              <a:avLst/>
-            </a:prstGeom>
-            <a:solidFill>
-              <a:srgbClr val="00B0F0"/>
-            </a:solidFill>
-            <a:ln w="3175">
-              <a:solidFill>
-                <a:schemeClr val="tx1"/>
-              </a:solidFill>
-            </a:ln>
-          </p:spPr>
-          <p:style>
-            <a:lnRef idx="2">
-              <a:schemeClr val="accent1">
-                <a:shade val="50000"/>
-              </a:schemeClr>
-            </a:lnRef>
-            <a:fillRef idx="1">
-              <a:schemeClr val="accent1"/>
-            </a:fillRef>
-            <a:effectRef idx="0">
-              <a:schemeClr val="accent1"/>
-            </a:effectRef>
-            <a:fontRef idx="minor">
-              <a:schemeClr val="lt1"/>
-            </a:fontRef>
-          </p:style>
-          <p:txBody>
-            <a:bodyPr rtlCol="0" anchor="ctr"/>
-            <a:lstStyle/>
-            <a:p>
-              <a:pPr algn="ctr"/>
-              <a:endParaRPr lang="pt-BR"/>
-            </a:p>
-          </p:txBody>
-        </p:sp>
-        <p:cxnSp>
-          <p:nvCxnSpPr>
-            <p:cNvPr id="115" name="Straight Connector 114"/>
-            <p:cNvCxnSpPr/>
-            <p:nvPr/>
-          </p:nvCxnSpPr>
-          <p:spPr>
-            <a:xfrm flipH="1">
-              <a:off x="7750018" y="4513680"/>
-              <a:ext cx="193832" cy="182857"/>
-            </a:xfrm>
-            <a:prstGeom prst="line">
-              <a:avLst/>
-            </a:prstGeom>
-            <a:ln w="12700">
-              <a:solidFill>
-                <a:schemeClr val="tx1"/>
-              </a:solidFill>
-              <a:prstDash val="dash"/>
-            </a:ln>
-          </p:spPr>
-          <p:style>
-            <a:lnRef idx="1">
-              <a:schemeClr val="accent1"/>
-            </a:lnRef>
-            <a:fillRef idx="0">
-              <a:schemeClr val="accent1"/>
-            </a:fillRef>
-            <a:effectRef idx="0">
-              <a:schemeClr val="accent1"/>
-            </a:effectRef>
-            <a:fontRef idx="minor">
-              <a:schemeClr val="tx1"/>
-            </a:fontRef>
-          </p:style>
-        </p:cxnSp>
-        <p:sp>
-          <p:nvSpPr>
-            <p:cNvPr id="132" name="Multiply 131"/>
-            <p:cNvSpPr>
-              <a:spLocks noChangeAspect="1"/>
-            </p:cNvSpPr>
-            <p:nvPr/>
-          </p:nvSpPr>
-          <p:spPr>
-            <a:xfrm>
-              <a:off x="7907441" y="4469956"/>
-              <a:ext cx="72817" cy="82800"/>
-            </a:xfrm>
-            <a:prstGeom prst="mathMultiply">
-              <a:avLst/>
-            </a:prstGeom>
-            <a:solidFill>
-              <a:srgbClr val="00B0F0"/>
-            </a:solidFill>
-            <a:ln w="3175">
-              <a:solidFill>
-                <a:schemeClr val="tx1"/>
-              </a:solidFill>
-            </a:ln>
-          </p:spPr>
-          <p:style>
-            <a:lnRef idx="2">
-              <a:schemeClr val="accent1">
-                <a:shade val="50000"/>
-              </a:schemeClr>
-            </a:lnRef>
-            <a:fillRef idx="1">
-              <a:schemeClr val="accent1"/>
-            </a:fillRef>
-            <a:effectRef idx="0">
-              <a:schemeClr val="accent1"/>
-            </a:effectRef>
-            <a:fontRef idx="minor">
-              <a:schemeClr val="lt1"/>
-            </a:fontRef>
-          </p:style>
-          <p:txBody>
-            <a:bodyPr rtlCol="0" anchor="ctr"/>
-            <a:lstStyle/>
-            <a:p>
-              <a:pPr algn="ctr"/>
-              <a:endParaRPr lang="pt-BR"/>
-            </a:p>
-          </p:txBody>
-        </p:sp>
-        <p:sp>
-          <p:nvSpPr>
-            <p:cNvPr id="133" name="Multiply 132"/>
-            <p:cNvSpPr>
-              <a:spLocks noChangeAspect="1"/>
-            </p:cNvSpPr>
-            <p:nvPr/>
-          </p:nvSpPr>
-          <p:spPr>
-            <a:xfrm>
-              <a:off x="7991128" y="4358555"/>
-              <a:ext cx="72817" cy="82800"/>
-            </a:xfrm>
-            <a:prstGeom prst="mathMultiply">
-              <a:avLst/>
-            </a:prstGeom>
-            <a:solidFill>
-              <a:srgbClr val="00B0F0"/>
-            </a:solidFill>
-            <a:ln w="3175">
-              <a:solidFill>
-                <a:schemeClr val="tx1"/>
-              </a:solidFill>
-            </a:ln>
-          </p:spPr>
-          <p:style>
-            <a:lnRef idx="2">
-              <a:schemeClr val="accent1">
-                <a:shade val="50000"/>
-              </a:schemeClr>
-            </a:lnRef>
-            <a:fillRef idx="1">
-              <a:schemeClr val="accent1"/>
-            </a:fillRef>
-            <a:effectRef idx="0">
-              <a:schemeClr val="accent1"/>
-            </a:effectRef>
-            <a:fontRef idx="minor">
-              <a:schemeClr val="lt1"/>
-            </a:fontRef>
-          </p:style>
-          <p:txBody>
-            <a:bodyPr rtlCol="0" anchor="ctr"/>
-            <a:lstStyle/>
-            <a:p>
-              <a:pPr algn="ctr"/>
-              <a:endParaRPr lang="pt-BR"/>
-            </a:p>
-          </p:txBody>
-        </p:sp>
-        <p:sp>
-          <p:nvSpPr>
-            <p:cNvPr id="134" name="Multiply 133"/>
-            <p:cNvSpPr>
-              <a:spLocks noChangeAspect="1"/>
-            </p:cNvSpPr>
-            <p:nvPr/>
-          </p:nvSpPr>
-          <p:spPr>
-            <a:xfrm>
-              <a:off x="8073299" y="4257603"/>
-              <a:ext cx="72817" cy="82800"/>
-            </a:xfrm>
-            <a:prstGeom prst="mathMultiply">
-              <a:avLst/>
-            </a:prstGeom>
-            <a:solidFill>
-              <a:srgbClr val="00B0F0"/>
-            </a:solidFill>
-            <a:ln w="3175">
-              <a:solidFill>
-                <a:schemeClr val="tx1"/>
-              </a:solidFill>
-            </a:ln>
-          </p:spPr>
-          <p:style>
-            <a:lnRef idx="2">
-              <a:schemeClr val="accent1">
-                <a:shade val="50000"/>
-              </a:schemeClr>
-            </a:lnRef>
-            <a:fillRef idx="1">
-              <a:schemeClr val="accent1"/>
-            </a:fillRef>
-            <a:effectRef idx="0">
-              <a:schemeClr val="accent1"/>
-            </a:effectRef>
-            <a:fontRef idx="minor">
-              <a:schemeClr val="lt1"/>
-            </a:fontRef>
-          </p:style>
-          <p:txBody>
-            <a:bodyPr rtlCol="0" anchor="ctr"/>
-            <a:lstStyle/>
-            <a:p>
-              <a:pPr algn="ctr"/>
-              <a:endParaRPr lang="pt-BR"/>
-            </a:p>
-          </p:txBody>
-        </p:sp>
-        <p:sp>
-          <p:nvSpPr>
-            <p:cNvPr id="135" name="Multiply 134"/>
-            <p:cNvSpPr>
-              <a:spLocks noChangeAspect="1"/>
-            </p:cNvSpPr>
-            <p:nvPr/>
-          </p:nvSpPr>
-          <p:spPr>
-            <a:xfrm>
-              <a:off x="8300077" y="3920332"/>
-              <a:ext cx="72817" cy="82800"/>
-            </a:xfrm>
-            <a:prstGeom prst="mathMultiply">
-              <a:avLst/>
-            </a:prstGeom>
-            <a:solidFill>
-              <a:srgbClr val="00B0F0"/>
-            </a:solidFill>
-            <a:ln w="3175">
-              <a:solidFill>
-                <a:schemeClr val="tx1"/>
-              </a:solidFill>
-            </a:ln>
-          </p:spPr>
-          <p:style>
-            <a:lnRef idx="2">
-              <a:schemeClr val="accent1">
-                <a:shade val="50000"/>
-              </a:schemeClr>
-            </a:lnRef>
-            <a:fillRef idx="1">
-              <a:schemeClr val="accent1"/>
-            </a:fillRef>
-            <a:effectRef idx="0">
-              <a:schemeClr val="accent1"/>
-            </a:effectRef>
-            <a:fontRef idx="minor">
-              <a:schemeClr val="lt1"/>
-            </a:fontRef>
-          </p:style>
-          <p:txBody>
-            <a:bodyPr rtlCol="0" anchor="ctr"/>
-            <a:lstStyle/>
-            <a:p>
-              <a:pPr algn="ctr"/>
-              <a:endParaRPr lang="pt-BR"/>
-            </a:p>
-          </p:txBody>
-        </p:sp>
-        <p:sp>
-          <p:nvSpPr>
-            <p:cNvPr id="154" name="Multiply 153"/>
-            <p:cNvSpPr>
-              <a:spLocks noChangeAspect="1"/>
-            </p:cNvSpPr>
-            <p:nvPr/>
-          </p:nvSpPr>
-          <p:spPr>
-            <a:xfrm>
-              <a:off x="8175312" y="4136565"/>
-              <a:ext cx="72817" cy="82800"/>
-            </a:xfrm>
-            <a:prstGeom prst="mathMultiply">
-              <a:avLst/>
-            </a:prstGeom>
-            <a:solidFill>
-              <a:srgbClr val="00B0F0"/>
-            </a:solidFill>
-            <a:ln w="3175">
-              <a:solidFill>
-                <a:schemeClr val="tx1"/>
-              </a:solidFill>
-            </a:ln>
-          </p:spPr>
-          <p:style>
-            <a:lnRef idx="2">
-              <a:schemeClr val="accent1">
-                <a:shade val="50000"/>
-              </a:schemeClr>
-            </a:lnRef>
-            <a:fillRef idx="1">
-              <a:schemeClr val="accent1"/>
-            </a:fillRef>
-            <a:effectRef idx="0">
-              <a:schemeClr val="accent1"/>
-            </a:effectRef>
-            <a:fontRef idx="minor">
-              <a:schemeClr val="lt1"/>
-            </a:fontRef>
-          </p:style>
-          <p:txBody>
-            <a:bodyPr rtlCol="0" anchor="ctr"/>
-            <a:lstStyle/>
-            <a:p>
-              <a:pPr algn="ctr"/>
-              <a:endParaRPr lang="pt-BR"/>
-            </a:p>
-          </p:txBody>
-        </p:sp>
-        <p:sp>
-          <p:nvSpPr>
-            <p:cNvPr id="155" name="Multiply 154"/>
-            <p:cNvSpPr>
-              <a:spLocks noChangeAspect="1"/>
-            </p:cNvSpPr>
-            <p:nvPr/>
-          </p:nvSpPr>
-          <p:spPr>
-            <a:xfrm>
-              <a:off x="8241507" y="4011444"/>
-              <a:ext cx="72817" cy="82800"/>
-            </a:xfrm>
-            <a:prstGeom prst="mathMultiply">
-              <a:avLst/>
-            </a:prstGeom>
-            <a:solidFill>
-              <a:srgbClr val="00B0F0"/>
-            </a:solidFill>
-            <a:ln w="3175">
-              <a:solidFill>
-                <a:schemeClr val="tx1"/>
-              </a:solidFill>
-            </a:ln>
-          </p:spPr>
-          <p:style>
-            <a:lnRef idx="2">
-              <a:schemeClr val="accent1">
-                <a:shade val="50000"/>
-              </a:schemeClr>
-            </a:lnRef>
-            <a:fillRef idx="1">
-              <a:schemeClr val="accent1"/>
-            </a:fillRef>
-            <a:effectRef idx="0">
-              <a:schemeClr val="accent1"/>
-            </a:effectRef>
-            <a:fontRef idx="minor">
-              <a:schemeClr val="lt1"/>
-            </a:fontRef>
-          </p:style>
-          <p:txBody>
-            <a:bodyPr rtlCol="0" anchor="ctr"/>
-            <a:lstStyle/>
-            <a:p>
-              <a:pPr algn="ctr"/>
-              <a:endParaRPr lang="pt-BR"/>
-            </a:p>
-          </p:txBody>
-        </p:sp>
-        <p:cxnSp>
-          <p:nvCxnSpPr>
-            <p:cNvPr id="160" name="Straight Arrow Connector 159"/>
-            <p:cNvCxnSpPr/>
-            <p:nvPr/>
-          </p:nvCxnSpPr>
-          <p:spPr>
-            <a:xfrm>
-              <a:off x="7038874" y="2534498"/>
-              <a:ext cx="0" cy="2556000"/>
-            </a:xfrm>
-            <a:prstGeom prst="straightConnector1">
-              <a:avLst/>
-            </a:prstGeom>
-            <a:ln w="19050">
-              <a:solidFill>
-                <a:schemeClr val="tx1"/>
-              </a:solidFill>
-              <a:headEnd type="triangle" w="med" len="med"/>
-              <a:tailEnd type="none" w="med" len="med"/>
-            </a:ln>
-          </p:spPr>
-          <p:style>
-            <a:lnRef idx="1">
-              <a:schemeClr val="accent1"/>
-            </a:lnRef>
-            <a:fillRef idx="0">
-              <a:schemeClr val="accent1"/>
-            </a:fillRef>
-            <a:effectRef idx="0">
-              <a:schemeClr val="accent1"/>
-            </a:effectRef>
-            <a:fontRef idx="minor">
-              <a:schemeClr val="tx1"/>
-            </a:fontRef>
-          </p:style>
-        </p:cxnSp>
-        <p:cxnSp>
-          <p:nvCxnSpPr>
-            <p:cNvPr id="161" name="Straight Arrow Connector 160"/>
-            <p:cNvCxnSpPr/>
-            <p:nvPr/>
-          </p:nvCxnSpPr>
-          <p:spPr>
-            <a:xfrm rot="5400000">
-              <a:off x="8507912" y="3626810"/>
-              <a:ext cx="0" cy="2952000"/>
-            </a:xfrm>
-            <a:prstGeom prst="straightConnector1">
-              <a:avLst/>
-            </a:prstGeom>
-            <a:ln w="19050">
-              <a:solidFill>
-                <a:schemeClr val="tx1"/>
-              </a:solidFill>
-              <a:headEnd type="triangle" w="med" len="med"/>
-              <a:tailEnd type="none" w="med" len="med"/>
-            </a:ln>
-          </p:spPr>
-          <p:style>
-            <a:lnRef idx="1">
-              <a:schemeClr val="accent1"/>
-            </a:lnRef>
-            <a:fillRef idx="0">
-              <a:schemeClr val="accent1"/>
-            </a:fillRef>
-            <a:effectRef idx="0">
-              <a:schemeClr val="accent1"/>
-            </a:effectRef>
-            <a:fontRef idx="minor">
-              <a:schemeClr val="tx1"/>
-            </a:fontRef>
-          </p:style>
-        </p:cxnSp>
-        <mc:AlternateContent xmlns:mc="http://schemas.openxmlformats.org/markup-compatibility/2006" xmlns:a14="http://schemas.microsoft.com/office/drawing/2010/main">
-          <mc:Choice Requires="a14">
-            <p:sp>
-              <p:nvSpPr>
-                <p:cNvPr id="162" name="TextBox 161"/>
-                <p:cNvSpPr txBox="1"/>
-                <p:nvPr/>
-              </p:nvSpPr>
-              <p:spPr>
-                <a:xfrm>
-                  <a:off x="9942348" y="4892106"/>
-                  <a:ext cx="426028" cy="400110"/>
-                </a:xfrm>
-                <a:prstGeom prst="rect">
-                  <a:avLst/>
-                </a:prstGeom>
-                <a:noFill/>
-              </p:spPr>
-              <p:txBody>
-                <a:bodyPr wrap="square" rtlCol="0">
-                  <a:spAutoFit/>
-                </a:bodyPr>
-                <a:lstStyle/>
-                <a:p>
-                  <a:pPr/>
-                  <a14:m>
-                    <m:oMathPara xmlns:m="http://schemas.openxmlformats.org/officeDocument/2006/math">
-                      <m:oMathParaPr>
-                        <m:jc m:val="centerGroup"/>
-                      </m:oMathParaPr>
-                      <m:oMath xmlns:m="http://schemas.openxmlformats.org/officeDocument/2006/math">
-                        <m:sSub>
-                          <m:sSubPr>
-                            <m:ctrlPr>
-                              <a:rPr lang="pt-BR" sz="2000" i="1" smtClean="0">
-                                <a:latin typeface="Cambria Math" panose="02040503050406030204" pitchFamily="18" charset="0"/>
-                              </a:rPr>
-                            </m:ctrlPr>
-                          </m:sSubPr>
-                          <m:e>
-                            <m:r>
-                              <a:rPr lang="pt-BR" sz="2000" b="0" i="1" smtClean="0">
-                                <a:latin typeface="Cambria Math" panose="02040503050406030204" pitchFamily="18" charset="0"/>
-                              </a:rPr>
-                              <m:t>𝑎</m:t>
-                            </m:r>
-                          </m:e>
-                          <m:sub>
-                            <m:r>
-                              <a:rPr lang="pt-BR" sz="2000" b="0" i="1" smtClean="0">
-                                <a:latin typeface="Cambria Math" panose="02040503050406030204" pitchFamily="18" charset="0"/>
-                              </a:rPr>
-                              <m:t>1</m:t>
-                            </m:r>
-                          </m:sub>
-                        </m:sSub>
-                      </m:oMath>
-                    </m:oMathPara>
-                  </a14:m>
-                  <a:endParaRPr lang="pt-BR" sz="2000" dirty="0"/>
-                </a:p>
-              </p:txBody>
-            </p:sp>
-          </mc:Choice>
-          <mc:Fallback xmlns="">
-            <p:sp>
-              <p:nvSpPr>
-                <p:cNvPr id="162" name="TextBox 161"/>
-                <p:cNvSpPr txBox="1">
-                  <a:spLocks noRot="1" noChangeAspect="1" noMove="1" noResize="1" noEditPoints="1" noAdjustHandles="1" noChangeArrowheads="1" noChangeShapeType="1" noTextEdit="1"/>
-                </p:cNvSpPr>
-                <p:nvPr/>
-              </p:nvSpPr>
-              <p:spPr>
-                <a:xfrm>
-                  <a:off x="9942348" y="4892106"/>
-                  <a:ext cx="426028" cy="400110"/>
-                </a:xfrm>
-                <a:prstGeom prst="rect">
-                  <a:avLst/>
-                </a:prstGeom>
-                <a:blipFill>
-                  <a:blip r:embed="rId2"/>
-                  <a:stretch>
-                    <a:fillRect/>
-                  </a:stretch>
-                </a:blipFill>
-              </p:spPr>
-              <p:txBody>
-                <a:bodyPr/>
-                <a:lstStyle/>
-                <a:p>
-                  <a:r>
-                    <a:rPr lang="pt-BR">
-                      <a:noFill/>
-                    </a:rPr>
-                    <a:t> </a:t>
-                  </a:r>
-                </a:p>
-              </p:txBody>
-            </p:sp>
-          </mc:Fallback>
-        </mc:AlternateContent>
-        <mc:AlternateContent xmlns:mc="http://schemas.openxmlformats.org/markup-compatibility/2006" xmlns:a14="http://schemas.microsoft.com/office/drawing/2010/main">
-          <mc:Choice Requires="a14">
-            <p:sp>
-              <p:nvSpPr>
-                <p:cNvPr id="163" name="TextBox 162"/>
-                <p:cNvSpPr txBox="1"/>
-                <p:nvPr/>
-              </p:nvSpPr>
-              <p:spPr>
-                <a:xfrm>
-                  <a:off x="6818898" y="2134388"/>
-                  <a:ext cx="426028" cy="400110"/>
-                </a:xfrm>
-                <a:prstGeom prst="rect">
-                  <a:avLst/>
-                </a:prstGeom>
-                <a:noFill/>
-              </p:spPr>
-              <p:txBody>
-                <a:bodyPr wrap="square" rtlCol="0">
-                  <a:spAutoFit/>
-                </a:bodyPr>
-                <a:lstStyle/>
-                <a:p>
-                  <a:pPr/>
-                  <a14:m>
-                    <m:oMathPara xmlns:m="http://schemas.openxmlformats.org/officeDocument/2006/math">
-                      <m:oMathParaPr>
-                        <m:jc m:val="centerGroup"/>
-                      </m:oMathParaPr>
-                      <m:oMath xmlns:m="http://schemas.openxmlformats.org/officeDocument/2006/math">
-                        <m:sSub>
-                          <m:sSubPr>
-                            <m:ctrlPr>
-                              <a:rPr lang="pt-BR" sz="2000" i="1" smtClean="0">
-                                <a:latin typeface="Cambria Math" panose="02040503050406030204" pitchFamily="18" charset="0"/>
-                              </a:rPr>
-                            </m:ctrlPr>
-                          </m:sSubPr>
-                          <m:e>
-                            <m:r>
-                              <a:rPr lang="pt-BR" sz="2000" b="0" i="1" smtClean="0">
-                                <a:latin typeface="Cambria Math" panose="02040503050406030204" pitchFamily="18" charset="0"/>
-                              </a:rPr>
-                              <m:t>𝑎</m:t>
-                            </m:r>
-                          </m:e>
-                          <m:sub>
-                            <m:r>
-                              <a:rPr lang="pt-BR" sz="2000" b="0" i="1" smtClean="0">
-                                <a:latin typeface="Cambria Math" panose="02040503050406030204" pitchFamily="18" charset="0"/>
-                              </a:rPr>
-                              <m:t>2</m:t>
-                            </m:r>
-                          </m:sub>
-                        </m:sSub>
-                      </m:oMath>
-                    </m:oMathPara>
-                  </a14:m>
-                  <a:endParaRPr lang="pt-BR" sz="2000" dirty="0"/>
-                </a:p>
-              </p:txBody>
-            </p:sp>
-          </mc:Choice>
-          <mc:Fallback xmlns="">
-            <p:sp>
-              <p:nvSpPr>
-                <p:cNvPr id="163" name="TextBox 162"/>
-                <p:cNvSpPr txBox="1">
-                  <a:spLocks noRot="1" noChangeAspect="1" noMove="1" noResize="1" noEditPoints="1" noAdjustHandles="1" noChangeArrowheads="1" noChangeShapeType="1" noTextEdit="1"/>
-                </p:cNvSpPr>
-                <p:nvPr/>
-              </p:nvSpPr>
-              <p:spPr>
-                <a:xfrm>
-                  <a:off x="6818898" y="2134388"/>
-                  <a:ext cx="426028" cy="400110"/>
-                </a:xfrm>
-                <a:prstGeom prst="rect">
-                  <a:avLst/>
-                </a:prstGeom>
-                <a:blipFill>
-                  <a:blip r:embed="rId3"/>
-                  <a:stretch>
-                    <a:fillRect/>
-                  </a:stretch>
-                </a:blipFill>
-              </p:spPr>
-              <p:txBody>
-                <a:bodyPr/>
-                <a:lstStyle/>
-                <a:p>
-                  <a:r>
-                    <a:rPr lang="pt-BR">
-                      <a:noFill/>
-                    </a:rPr>
-                    <a:t> </a:t>
-                  </a:r>
-                </a:p>
-              </p:txBody>
-            </p:sp>
-          </mc:Fallback>
-        </mc:AlternateContent>
-      </p:grpSp>
-      <p:grpSp>
-        <p:nvGrpSpPr>
-          <p:cNvPr id="166" name="Group 165"/>
-          <p:cNvGrpSpPr/>
-          <p:nvPr/>
-        </p:nvGrpSpPr>
-        <p:grpSpPr>
-          <a:xfrm>
-            <a:off x="2817120" y="895312"/>
-            <a:ext cx="3539783" cy="4892060"/>
-            <a:chOff x="2817120" y="895312"/>
-            <a:chExt cx="3539783" cy="4892060"/>
-          </a:xfrm>
-        </p:grpSpPr>
-        <p:sp>
-          <p:nvSpPr>
-            <p:cNvPr id="4" name="Oval 3"/>
-            <p:cNvSpPr>
-              <a:spLocks/>
-            </p:cNvSpPr>
-            <p:nvPr/>
-          </p:nvSpPr>
-          <p:spPr>
-            <a:xfrm>
-              <a:off x="3657598" y="1683325"/>
-              <a:ext cx="1800000" cy="3600000"/>
-            </a:xfrm>
-            <a:prstGeom prst="ellipse">
-              <a:avLst/>
-            </a:prstGeom>
-            <a:noFill/>
-            <a:ln>
-              <a:solidFill>
-                <a:schemeClr val="tx1"/>
-              </a:solidFill>
-            </a:ln>
-          </p:spPr>
-          <p:style>
-            <a:lnRef idx="2">
-              <a:schemeClr val="accent1">
-                <a:shade val="50000"/>
-              </a:schemeClr>
-            </a:lnRef>
-            <a:fillRef idx="1">
-              <a:schemeClr val="accent1"/>
-            </a:fillRef>
-            <a:effectRef idx="0">
-              <a:schemeClr val="accent1"/>
-            </a:effectRef>
-            <a:fontRef idx="minor">
-              <a:schemeClr val="lt1"/>
-            </a:fontRef>
-          </p:style>
-          <p:txBody>
-            <a:bodyPr rtlCol="0" anchor="ctr"/>
-            <a:lstStyle/>
-            <a:p>
-              <a:pPr algn="ctr"/>
-              <a:endParaRPr lang="pt-BR"/>
-            </a:p>
-          </p:txBody>
-        </p:sp>
-        <p:sp>
-          <p:nvSpPr>
-            <p:cNvPr id="5" name="Oval 4"/>
-            <p:cNvSpPr/>
-            <p:nvPr/>
-          </p:nvSpPr>
-          <p:spPr>
-            <a:xfrm>
-              <a:off x="4017598" y="2042031"/>
-              <a:ext cx="1080000" cy="2880000"/>
-            </a:xfrm>
-            <a:prstGeom prst="ellipse">
-              <a:avLst/>
-            </a:prstGeom>
-            <a:noFill/>
-            <a:ln>
-              <a:solidFill>
-                <a:schemeClr val="tx1"/>
-              </a:solidFill>
-            </a:ln>
-          </p:spPr>
-          <p:style>
-            <a:lnRef idx="2">
-              <a:schemeClr val="accent1">
-                <a:shade val="50000"/>
-              </a:schemeClr>
-            </a:lnRef>
-            <a:fillRef idx="1">
-              <a:schemeClr val="accent1"/>
-            </a:fillRef>
-            <a:effectRef idx="0">
-              <a:schemeClr val="accent1"/>
-            </a:effectRef>
-            <a:fontRef idx="minor">
-              <a:schemeClr val="lt1"/>
-            </a:fontRef>
-          </p:style>
-          <p:txBody>
-            <a:bodyPr rtlCol="0" anchor="ctr"/>
-            <a:lstStyle/>
-            <a:p>
-              <a:pPr algn="ctr"/>
-              <a:endParaRPr lang="pt-BR"/>
-            </a:p>
-          </p:txBody>
-        </p:sp>
-        <p:sp>
-          <p:nvSpPr>
-            <p:cNvPr id="7" name="Oval 6"/>
-            <p:cNvSpPr/>
-            <p:nvPr/>
-          </p:nvSpPr>
-          <p:spPr>
-            <a:xfrm>
-              <a:off x="4377598" y="2402031"/>
-              <a:ext cx="360000" cy="2160000"/>
-            </a:xfrm>
-            <a:prstGeom prst="ellipse">
-              <a:avLst/>
-            </a:prstGeom>
-            <a:noFill/>
-            <a:ln>
-              <a:solidFill>
-                <a:schemeClr val="tx1"/>
-              </a:solidFill>
-            </a:ln>
-          </p:spPr>
-          <p:style>
-            <a:lnRef idx="2">
-              <a:schemeClr val="accent1">
-                <a:shade val="50000"/>
-              </a:schemeClr>
-            </a:lnRef>
-            <a:fillRef idx="1">
-              <a:schemeClr val="accent1"/>
-            </a:fillRef>
-            <a:effectRef idx="0">
-              <a:schemeClr val="accent1"/>
-            </a:effectRef>
-            <a:fontRef idx="minor">
-              <a:schemeClr val="lt1"/>
-            </a:fontRef>
-          </p:style>
-          <p:txBody>
-            <a:bodyPr rtlCol="0" anchor="ctr"/>
-            <a:lstStyle/>
-            <a:p>
-              <a:pPr algn="ctr"/>
-              <a:endParaRPr lang="pt-BR"/>
-            </a:p>
-          </p:txBody>
-        </p:sp>
-        <p:sp>
-          <p:nvSpPr>
-            <p:cNvPr id="9" name="Oval 8"/>
-            <p:cNvSpPr/>
-            <p:nvPr/>
-          </p:nvSpPr>
-          <p:spPr>
-            <a:xfrm>
-              <a:off x="4197598" y="2222031"/>
-              <a:ext cx="720000" cy="2520000"/>
-            </a:xfrm>
-            <a:prstGeom prst="ellipse">
-              <a:avLst/>
-            </a:prstGeom>
-            <a:noFill/>
-            <a:ln>
-              <a:solidFill>
-                <a:schemeClr val="tx1"/>
-              </a:solidFill>
-            </a:ln>
-          </p:spPr>
-          <p:style>
-            <a:lnRef idx="2">
-              <a:schemeClr val="accent1">
-                <a:shade val="50000"/>
-              </a:schemeClr>
-            </a:lnRef>
-            <a:fillRef idx="1">
-              <a:schemeClr val="accent1"/>
-            </a:fillRef>
-            <a:effectRef idx="0">
-              <a:schemeClr val="accent1"/>
-            </a:effectRef>
-            <a:fontRef idx="minor">
-              <a:schemeClr val="lt1"/>
-            </a:fontRef>
-          </p:style>
-          <p:txBody>
-            <a:bodyPr rtlCol="0" anchor="ctr"/>
-            <a:lstStyle/>
-            <a:p>
-              <a:pPr algn="ctr"/>
-              <a:endParaRPr lang="pt-BR"/>
-            </a:p>
-          </p:txBody>
-        </p:sp>
-        <p:sp>
-          <p:nvSpPr>
-            <p:cNvPr id="10" name="Oval 9"/>
-            <p:cNvSpPr/>
-            <p:nvPr/>
-          </p:nvSpPr>
-          <p:spPr>
-            <a:xfrm>
-              <a:off x="3837598" y="1862031"/>
-              <a:ext cx="1440000" cy="3240000"/>
-            </a:xfrm>
-            <a:prstGeom prst="ellipse">
-              <a:avLst/>
-            </a:prstGeom>
-            <a:noFill/>
-            <a:ln>
-              <a:solidFill>
-                <a:schemeClr val="tx1"/>
-              </a:solidFill>
-            </a:ln>
-          </p:spPr>
-          <p:style>
-            <a:lnRef idx="2">
-              <a:schemeClr val="accent1">
-                <a:shade val="50000"/>
-              </a:schemeClr>
-            </a:lnRef>
-            <a:fillRef idx="1">
-              <a:schemeClr val="accent1"/>
-            </a:fillRef>
-            <a:effectRef idx="0">
-              <a:schemeClr val="accent1"/>
-            </a:effectRef>
-            <a:fontRef idx="minor">
-              <a:schemeClr val="lt1"/>
-            </a:fontRef>
-          </p:style>
-          <p:txBody>
-            <a:bodyPr rtlCol="0" anchor="ctr"/>
-            <a:lstStyle/>
-            <a:p>
-              <a:pPr algn="ctr"/>
-              <a:endParaRPr lang="pt-BR"/>
-            </a:p>
-          </p:txBody>
-        </p:sp>
-        <p:sp>
-          <p:nvSpPr>
-            <p:cNvPr id="11" name="Oval 10"/>
-            <p:cNvSpPr>
-              <a:spLocks/>
-            </p:cNvSpPr>
-            <p:nvPr/>
-          </p:nvSpPr>
-          <p:spPr>
-            <a:xfrm>
-              <a:off x="3477598" y="1502031"/>
-              <a:ext cx="2160000" cy="3960000"/>
-            </a:xfrm>
-            <a:prstGeom prst="ellipse">
-              <a:avLst/>
-            </a:prstGeom>
-            <a:noFill/>
-            <a:ln>
-              <a:solidFill>
-                <a:schemeClr val="tx1"/>
-              </a:solidFill>
-            </a:ln>
-          </p:spPr>
-          <p:style>
-            <a:lnRef idx="2">
-              <a:schemeClr val="accent1">
-                <a:shade val="50000"/>
-              </a:schemeClr>
-            </a:lnRef>
-            <a:fillRef idx="1">
-              <a:schemeClr val="accent1"/>
-            </a:fillRef>
-            <a:effectRef idx="0">
-              <a:schemeClr val="accent1"/>
-            </a:effectRef>
-            <a:fontRef idx="minor">
-              <a:schemeClr val="lt1"/>
-            </a:fontRef>
-          </p:style>
-          <p:txBody>
-            <a:bodyPr rtlCol="0" anchor="ctr"/>
-            <a:lstStyle/>
-            <a:p>
-              <a:pPr algn="ctr"/>
-              <a:endParaRPr lang="pt-BR"/>
-            </a:p>
-          </p:txBody>
-        </p:sp>
-        <p:cxnSp>
-          <p:nvCxnSpPr>
-            <p:cNvPr id="103" name="Straight Connector 102"/>
-            <p:cNvCxnSpPr/>
-            <p:nvPr/>
-          </p:nvCxnSpPr>
-          <p:spPr>
-            <a:xfrm flipH="1">
-              <a:off x="4253250" y="5216278"/>
-              <a:ext cx="386493" cy="153789"/>
-            </a:xfrm>
-            <a:prstGeom prst="line">
-              <a:avLst/>
-            </a:prstGeom>
-            <a:ln w="12700">
-              <a:solidFill>
-                <a:schemeClr val="tx1"/>
-              </a:solidFill>
-              <a:prstDash val="dash"/>
-            </a:ln>
-          </p:spPr>
-          <p:style>
-            <a:lnRef idx="1">
-              <a:schemeClr val="accent1"/>
-            </a:lnRef>
-            <a:fillRef idx="0">
-              <a:schemeClr val="accent1"/>
-            </a:fillRef>
-            <a:effectRef idx="0">
-              <a:schemeClr val="accent1"/>
-            </a:effectRef>
-            <a:fontRef idx="minor">
-              <a:schemeClr val="tx1"/>
-            </a:fontRef>
-          </p:style>
-        </p:cxnSp>
-        <p:sp>
-          <p:nvSpPr>
-            <p:cNvPr id="136" name="Multiply 135"/>
-            <p:cNvSpPr>
-              <a:spLocks/>
-            </p:cNvSpPr>
-            <p:nvPr/>
-          </p:nvSpPr>
-          <p:spPr>
-            <a:xfrm>
-              <a:off x="4216841" y="5338443"/>
-              <a:ext cx="72817" cy="82800"/>
-            </a:xfrm>
-            <a:prstGeom prst="mathMultiply">
-              <a:avLst/>
-            </a:prstGeom>
-            <a:solidFill>
-              <a:srgbClr val="00B0F0"/>
-            </a:solidFill>
-            <a:ln w="3175">
-              <a:solidFill>
-                <a:schemeClr val="tx1"/>
-              </a:solidFill>
-            </a:ln>
-          </p:spPr>
-          <p:style>
-            <a:lnRef idx="2">
-              <a:schemeClr val="accent1">
-                <a:shade val="50000"/>
-              </a:schemeClr>
-            </a:lnRef>
-            <a:fillRef idx="1">
-              <a:schemeClr val="accent1"/>
-            </a:fillRef>
-            <a:effectRef idx="0">
-              <a:schemeClr val="accent1"/>
-            </a:effectRef>
-            <a:fontRef idx="minor">
-              <a:schemeClr val="lt1"/>
-            </a:fontRef>
-          </p:style>
-          <p:txBody>
-            <a:bodyPr rtlCol="0" anchor="ctr"/>
-            <a:lstStyle/>
-            <a:p>
-              <a:pPr algn="ctr"/>
-              <a:endParaRPr lang="pt-BR"/>
-            </a:p>
-          </p:txBody>
-        </p:sp>
-        <p:sp>
-          <p:nvSpPr>
-            <p:cNvPr id="137" name="Multiply 136"/>
-            <p:cNvSpPr>
-              <a:spLocks/>
-            </p:cNvSpPr>
-            <p:nvPr/>
-          </p:nvSpPr>
-          <p:spPr>
-            <a:xfrm>
-              <a:off x="4598658" y="5170600"/>
-              <a:ext cx="72817" cy="82800"/>
-            </a:xfrm>
-            <a:prstGeom prst="mathMultiply">
-              <a:avLst/>
-            </a:prstGeom>
-            <a:solidFill>
-              <a:srgbClr val="00B0F0"/>
-            </a:solidFill>
-            <a:ln w="3175">
-              <a:solidFill>
-                <a:schemeClr val="tx1"/>
-              </a:solidFill>
-            </a:ln>
-          </p:spPr>
-          <p:style>
-            <a:lnRef idx="2">
-              <a:schemeClr val="accent1">
-                <a:shade val="50000"/>
-              </a:schemeClr>
-            </a:lnRef>
-            <a:fillRef idx="1">
-              <a:schemeClr val="accent1"/>
-            </a:fillRef>
-            <a:effectRef idx="0">
-              <a:schemeClr val="accent1"/>
-            </a:effectRef>
-            <a:fontRef idx="minor">
-              <a:schemeClr val="lt1"/>
-            </a:fontRef>
-          </p:style>
-          <p:txBody>
-            <a:bodyPr rtlCol="0" anchor="ctr"/>
-            <a:lstStyle/>
-            <a:p>
-              <a:pPr algn="ctr"/>
-              <a:endParaRPr lang="pt-BR"/>
-            </a:p>
-          </p:txBody>
-        </p:sp>
-        <p:sp>
-          <p:nvSpPr>
-            <p:cNvPr id="69" name="Multiply 68"/>
-            <p:cNvSpPr>
-              <a:spLocks noChangeAspect="1"/>
-            </p:cNvSpPr>
-            <p:nvPr/>
-          </p:nvSpPr>
-          <p:spPr>
-            <a:xfrm>
-              <a:off x="4468132" y="3344554"/>
-              <a:ext cx="158298" cy="180000"/>
-            </a:xfrm>
-            <a:prstGeom prst="mathMultiply">
-              <a:avLst/>
-            </a:prstGeom>
-            <a:solidFill>
-              <a:srgbClr val="FF0000"/>
-            </a:solidFill>
-            <a:ln w="3175">
-              <a:solidFill>
-                <a:schemeClr val="tx1"/>
-              </a:solidFill>
-            </a:ln>
-          </p:spPr>
-          <p:style>
-            <a:lnRef idx="2">
-              <a:schemeClr val="accent1">
-                <a:shade val="50000"/>
-              </a:schemeClr>
-            </a:lnRef>
-            <a:fillRef idx="1">
-              <a:schemeClr val="accent1"/>
-            </a:fillRef>
-            <a:effectRef idx="0">
-              <a:schemeClr val="accent1"/>
-            </a:effectRef>
-            <a:fontRef idx="minor">
-              <a:schemeClr val="lt1"/>
-            </a:fontRef>
-          </p:style>
-          <p:txBody>
-            <a:bodyPr rtlCol="0" anchor="ctr"/>
-            <a:lstStyle/>
-            <a:p>
-              <a:pPr algn="ctr"/>
-              <a:endParaRPr lang="pt-BR"/>
-            </a:p>
-          </p:txBody>
-        </p:sp>
-        <p:cxnSp>
-          <p:nvCxnSpPr>
-            <p:cNvPr id="71" name="Straight Connector 70"/>
-            <p:cNvCxnSpPr/>
-            <p:nvPr/>
-          </p:nvCxnSpPr>
-          <p:spPr>
-            <a:xfrm flipH="1" flipV="1">
-              <a:off x="4516368" y="3611183"/>
-              <a:ext cx="73202" cy="50119"/>
-            </a:xfrm>
-            <a:prstGeom prst="line">
-              <a:avLst/>
-            </a:prstGeom>
-            <a:ln w="12700">
-              <a:solidFill>
-                <a:schemeClr val="tx1"/>
-              </a:solidFill>
-              <a:prstDash val="dash"/>
-            </a:ln>
-          </p:spPr>
-          <p:style>
-            <a:lnRef idx="1">
-              <a:schemeClr val="accent1"/>
-            </a:lnRef>
-            <a:fillRef idx="0">
-              <a:schemeClr val="accent1"/>
-            </a:fillRef>
-            <a:effectRef idx="0">
-              <a:schemeClr val="accent1"/>
-            </a:effectRef>
-            <a:fontRef idx="minor">
-              <a:schemeClr val="tx1"/>
-            </a:fontRef>
-          </p:style>
-        </p:cxnSp>
-        <p:cxnSp>
-          <p:nvCxnSpPr>
-            <p:cNvPr id="74" name="Straight Connector 73"/>
-            <p:cNvCxnSpPr/>
-            <p:nvPr/>
-          </p:nvCxnSpPr>
-          <p:spPr>
-            <a:xfrm rot="5400000" flipH="1" flipV="1">
-              <a:off x="4522774" y="3661302"/>
-              <a:ext cx="73202" cy="50119"/>
-            </a:xfrm>
-            <a:prstGeom prst="line">
-              <a:avLst/>
-            </a:prstGeom>
-            <a:ln w="12700">
-              <a:solidFill>
-                <a:schemeClr val="tx1"/>
-              </a:solidFill>
-              <a:prstDash val="dash"/>
-            </a:ln>
-          </p:spPr>
-          <p:style>
-            <a:lnRef idx="1">
-              <a:schemeClr val="accent1"/>
-            </a:lnRef>
-            <a:fillRef idx="0">
-              <a:schemeClr val="accent1"/>
-            </a:fillRef>
-            <a:effectRef idx="0">
-              <a:schemeClr val="accent1"/>
-            </a:effectRef>
-            <a:fontRef idx="minor">
-              <a:schemeClr val="tx1"/>
-            </a:fontRef>
-          </p:style>
-        </p:cxnSp>
-        <p:cxnSp>
-          <p:nvCxnSpPr>
-            <p:cNvPr id="76" name="Straight Connector 75"/>
-            <p:cNvCxnSpPr/>
-            <p:nvPr/>
-          </p:nvCxnSpPr>
-          <p:spPr>
-            <a:xfrm rot="5400000" flipH="1" flipV="1">
-              <a:off x="4540454" y="3778347"/>
-              <a:ext cx="73202" cy="50119"/>
-            </a:xfrm>
-            <a:prstGeom prst="line">
-              <a:avLst/>
-            </a:prstGeom>
-            <a:ln w="12700">
-              <a:solidFill>
-                <a:schemeClr val="tx1"/>
-              </a:solidFill>
-              <a:prstDash val="dash"/>
-            </a:ln>
-          </p:spPr>
-          <p:style>
-            <a:lnRef idx="1">
-              <a:schemeClr val="accent1"/>
-            </a:lnRef>
-            <a:fillRef idx="0">
-              <a:schemeClr val="accent1"/>
-            </a:fillRef>
-            <a:effectRef idx="0">
-              <a:schemeClr val="accent1"/>
-            </a:effectRef>
-            <a:fontRef idx="minor">
-              <a:schemeClr val="tx1"/>
-            </a:fontRef>
-          </p:style>
-        </p:cxnSp>
-        <p:cxnSp>
-          <p:nvCxnSpPr>
-            <p:cNvPr id="77" name="Straight Connector 76"/>
-            <p:cNvCxnSpPr/>
-            <p:nvPr/>
-          </p:nvCxnSpPr>
-          <p:spPr>
-            <a:xfrm rot="10800000" flipH="1" flipV="1">
-              <a:off x="4551995" y="3841032"/>
-              <a:ext cx="73202" cy="50119"/>
-            </a:xfrm>
-            <a:prstGeom prst="line">
-              <a:avLst/>
-            </a:prstGeom>
-            <a:ln w="12700">
-              <a:solidFill>
-                <a:schemeClr val="tx1"/>
-              </a:solidFill>
-              <a:prstDash val="dash"/>
-            </a:ln>
-          </p:spPr>
-          <p:style>
-            <a:lnRef idx="1">
-              <a:schemeClr val="accent1"/>
-            </a:lnRef>
-            <a:fillRef idx="0">
-              <a:schemeClr val="accent1"/>
-            </a:fillRef>
-            <a:effectRef idx="0">
-              <a:schemeClr val="accent1"/>
-            </a:effectRef>
-            <a:fontRef idx="minor">
-              <a:schemeClr val="tx1"/>
-            </a:fontRef>
-          </p:style>
-        </p:cxnSp>
-        <p:cxnSp>
-          <p:nvCxnSpPr>
-            <p:cNvPr id="78" name="Straight Connector 77"/>
-            <p:cNvCxnSpPr/>
-            <p:nvPr/>
-          </p:nvCxnSpPr>
-          <p:spPr>
-            <a:xfrm rot="5400000" flipH="1" flipV="1">
-              <a:off x="4557568" y="3898479"/>
-              <a:ext cx="73202" cy="50119"/>
-            </a:xfrm>
-            <a:prstGeom prst="line">
-              <a:avLst/>
-            </a:prstGeom>
-            <a:ln w="12700">
-              <a:solidFill>
-                <a:schemeClr val="tx1"/>
-              </a:solidFill>
-              <a:prstDash val="dash"/>
-            </a:ln>
-          </p:spPr>
-          <p:style>
-            <a:lnRef idx="1">
-              <a:schemeClr val="accent1"/>
-            </a:lnRef>
-            <a:fillRef idx="0">
-              <a:schemeClr val="accent1"/>
-            </a:fillRef>
-            <a:effectRef idx="0">
-              <a:schemeClr val="accent1"/>
-            </a:effectRef>
-            <a:fontRef idx="minor">
-              <a:schemeClr val="tx1"/>
-            </a:fontRef>
-          </p:style>
-        </p:cxnSp>
-        <p:sp>
-          <p:nvSpPr>
-            <p:cNvPr id="138" name="Multiply 137"/>
-            <p:cNvSpPr>
-              <a:spLocks noChangeAspect="1"/>
-            </p:cNvSpPr>
-            <p:nvPr/>
-          </p:nvSpPr>
-          <p:spPr>
-            <a:xfrm>
-              <a:off x="4396841" y="4994030"/>
-              <a:ext cx="72817" cy="82800"/>
-            </a:xfrm>
-            <a:prstGeom prst="mathMultiply">
-              <a:avLst/>
-            </a:prstGeom>
-            <a:solidFill>
-              <a:srgbClr val="00B0F0"/>
-            </a:solidFill>
-            <a:ln w="3175">
-              <a:solidFill>
-                <a:schemeClr val="tx1"/>
-              </a:solidFill>
-            </a:ln>
-          </p:spPr>
-          <p:style>
-            <a:lnRef idx="2">
-              <a:schemeClr val="accent1">
-                <a:shade val="50000"/>
-              </a:schemeClr>
-            </a:lnRef>
-            <a:fillRef idx="1">
-              <a:schemeClr val="accent1"/>
-            </a:fillRef>
-            <a:effectRef idx="0">
-              <a:schemeClr val="accent1"/>
-            </a:effectRef>
-            <a:fontRef idx="minor">
-              <a:schemeClr val="lt1"/>
-            </a:fontRef>
-          </p:style>
-          <p:txBody>
-            <a:bodyPr rtlCol="0" anchor="ctr"/>
-            <a:lstStyle/>
-            <a:p>
-              <a:pPr algn="ctr"/>
-              <a:endParaRPr lang="pt-BR"/>
-            </a:p>
-          </p:txBody>
-        </p:sp>
-        <p:cxnSp>
-          <p:nvCxnSpPr>
-            <p:cNvPr id="98" name="Straight Connector 97"/>
-            <p:cNvCxnSpPr/>
-            <p:nvPr/>
-          </p:nvCxnSpPr>
-          <p:spPr>
-            <a:xfrm flipV="1">
-              <a:off x="4433250" y="4936612"/>
-              <a:ext cx="145222" cy="101777"/>
-            </a:xfrm>
-            <a:prstGeom prst="line">
-              <a:avLst/>
-            </a:prstGeom>
-            <a:ln w="12700">
-              <a:solidFill>
-                <a:schemeClr val="tx1"/>
-              </a:solidFill>
-              <a:prstDash val="dash"/>
-            </a:ln>
-          </p:spPr>
-          <p:style>
-            <a:lnRef idx="1">
-              <a:schemeClr val="accent1"/>
-            </a:lnRef>
-            <a:fillRef idx="0">
-              <a:schemeClr val="accent1"/>
-            </a:fillRef>
-            <a:effectRef idx="0">
-              <a:schemeClr val="accent1"/>
-            </a:effectRef>
-            <a:fontRef idx="minor">
-              <a:schemeClr val="tx1"/>
-            </a:fontRef>
-          </p:style>
-        </p:cxnSp>
-        <p:cxnSp>
-          <p:nvCxnSpPr>
-            <p:cNvPr id="100" name="Straight Connector 99"/>
-            <p:cNvCxnSpPr/>
-            <p:nvPr/>
-          </p:nvCxnSpPr>
-          <p:spPr>
-            <a:xfrm>
-              <a:off x="4433250" y="5036924"/>
-              <a:ext cx="206493" cy="180000"/>
-            </a:xfrm>
-            <a:prstGeom prst="line">
-              <a:avLst/>
-            </a:prstGeom>
-            <a:ln w="12700">
-              <a:solidFill>
-                <a:schemeClr val="tx1"/>
-              </a:solidFill>
-              <a:prstDash val="dash"/>
-            </a:ln>
-          </p:spPr>
-          <p:style>
-            <a:lnRef idx="1">
-              <a:schemeClr val="accent1"/>
-            </a:lnRef>
-            <a:fillRef idx="0">
-              <a:schemeClr val="accent1"/>
-            </a:fillRef>
-            <a:effectRef idx="0">
-              <a:schemeClr val="accent1"/>
-            </a:effectRef>
-            <a:fontRef idx="minor">
-              <a:schemeClr val="tx1"/>
-            </a:fontRef>
-          </p:style>
-        </p:cxnSp>
-        <p:sp>
-          <p:nvSpPr>
-            <p:cNvPr id="139" name="Multiply 138"/>
-            <p:cNvSpPr>
-              <a:spLocks noChangeAspect="1"/>
-            </p:cNvSpPr>
-            <p:nvPr/>
-          </p:nvSpPr>
-          <p:spPr>
-            <a:xfrm>
-              <a:off x="4541256" y="4892106"/>
-              <a:ext cx="72817" cy="82800"/>
-            </a:xfrm>
-            <a:prstGeom prst="mathMultiply">
-              <a:avLst/>
-            </a:prstGeom>
-            <a:solidFill>
-              <a:srgbClr val="00B0F0"/>
-            </a:solidFill>
-            <a:ln w="3175">
-              <a:solidFill>
-                <a:schemeClr val="tx1"/>
-              </a:solidFill>
-            </a:ln>
-          </p:spPr>
-          <p:style>
-            <a:lnRef idx="2">
-              <a:schemeClr val="accent1">
-                <a:shade val="50000"/>
-              </a:schemeClr>
-            </a:lnRef>
-            <a:fillRef idx="1">
-              <a:schemeClr val="accent1"/>
-            </a:fillRef>
-            <a:effectRef idx="0">
-              <a:schemeClr val="accent1"/>
-            </a:effectRef>
-            <a:fontRef idx="minor">
-              <a:schemeClr val="lt1"/>
-            </a:fontRef>
-          </p:style>
-          <p:txBody>
-            <a:bodyPr rtlCol="0" anchor="ctr"/>
-            <a:lstStyle/>
-            <a:p>
-              <a:pPr algn="ctr"/>
-              <a:endParaRPr lang="pt-BR"/>
-            </a:p>
-          </p:txBody>
-        </p:sp>
-        <p:sp>
-          <p:nvSpPr>
-            <p:cNvPr id="140" name="Multiply 139"/>
-            <p:cNvSpPr>
-              <a:spLocks noChangeAspect="1"/>
-            </p:cNvSpPr>
-            <p:nvPr/>
-          </p:nvSpPr>
-          <p:spPr>
-            <a:xfrm>
-              <a:off x="4416484" y="4782417"/>
-              <a:ext cx="72817" cy="82800"/>
-            </a:xfrm>
-            <a:prstGeom prst="mathMultiply">
-              <a:avLst/>
-            </a:prstGeom>
-            <a:solidFill>
-              <a:srgbClr val="00B0F0"/>
-            </a:solidFill>
-            <a:ln w="3175">
-              <a:solidFill>
-                <a:schemeClr val="tx1"/>
-              </a:solidFill>
-            </a:ln>
-          </p:spPr>
-          <p:style>
-            <a:lnRef idx="2">
-              <a:schemeClr val="accent1">
-                <a:shade val="50000"/>
-              </a:schemeClr>
-            </a:lnRef>
-            <a:fillRef idx="1">
-              <a:schemeClr val="accent1"/>
-            </a:fillRef>
-            <a:effectRef idx="0">
-              <a:schemeClr val="accent1"/>
-            </a:effectRef>
-            <a:fontRef idx="minor">
-              <a:schemeClr val="lt1"/>
-            </a:fontRef>
-          </p:style>
-          <p:txBody>
-            <a:bodyPr rtlCol="0" anchor="ctr"/>
-            <a:lstStyle/>
-            <a:p>
-              <a:pPr algn="ctr"/>
-              <a:endParaRPr lang="pt-BR"/>
-            </a:p>
-          </p:txBody>
-        </p:sp>
-        <p:sp>
-          <p:nvSpPr>
-            <p:cNvPr id="141" name="Multiply 140"/>
-            <p:cNvSpPr>
-              <a:spLocks noChangeAspect="1"/>
-            </p:cNvSpPr>
-            <p:nvPr/>
-          </p:nvSpPr>
-          <p:spPr>
-            <a:xfrm>
-              <a:off x="4527814" y="4665846"/>
-              <a:ext cx="72817" cy="82800"/>
-            </a:xfrm>
-            <a:prstGeom prst="mathMultiply">
-              <a:avLst/>
-            </a:prstGeom>
-            <a:solidFill>
-              <a:srgbClr val="00B0F0"/>
-            </a:solidFill>
-            <a:ln w="3175">
-              <a:solidFill>
-                <a:schemeClr val="tx1"/>
-              </a:solidFill>
-            </a:ln>
-          </p:spPr>
-          <p:style>
-            <a:lnRef idx="2">
-              <a:schemeClr val="accent1">
-                <a:shade val="50000"/>
-              </a:schemeClr>
-            </a:lnRef>
-            <a:fillRef idx="1">
-              <a:schemeClr val="accent1"/>
-            </a:fillRef>
-            <a:effectRef idx="0">
-              <a:schemeClr val="accent1"/>
-            </a:effectRef>
-            <a:fontRef idx="minor">
-              <a:schemeClr val="lt1"/>
-            </a:fontRef>
-          </p:style>
-          <p:txBody>
-            <a:bodyPr rtlCol="0" anchor="ctr"/>
-            <a:lstStyle/>
-            <a:p>
-              <a:pPr algn="ctr"/>
-              <a:endParaRPr lang="pt-BR"/>
-            </a:p>
-          </p:txBody>
-        </p:sp>
-        <p:sp>
-          <p:nvSpPr>
-            <p:cNvPr id="142" name="Multiply 141"/>
-            <p:cNvSpPr>
-              <a:spLocks/>
-            </p:cNvSpPr>
-            <p:nvPr/>
-          </p:nvSpPr>
-          <p:spPr>
-            <a:xfrm>
-              <a:off x="4432482" y="4497324"/>
-              <a:ext cx="72000" cy="82800"/>
-            </a:xfrm>
-            <a:prstGeom prst="mathMultiply">
-              <a:avLst/>
-            </a:prstGeom>
-            <a:solidFill>
-              <a:srgbClr val="00B0F0"/>
-            </a:solidFill>
-            <a:ln w="3175">
-              <a:solidFill>
-                <a:schemeClr val="tx1"/>
-              </a:solidFill>
-            </a:ln>
-          </p:spPr>
-          <p:style>
-            <a:lnRef idx="2">
-              <a:schemeClr val="accent1">
-                <a:shade val="50000"/>
-              </a:schemeClr>
-            </a:lnRef>
-            <a:fillRef idx="1">
-              <a:schemeClr val="accent1"/>
-            </a:fillRef>
-            <a:effectRef idx="0">
-              <a:schemeClr val="accent1"/>
-            </a:effectRef>
-            <a:fontRef idx="minor">
-              <a:schemeClr val="lt1"/>
-            </a:fontRef>
-          </p:style>
-          <p:txBody>
-            <a:bodyPr rtlCol="0" anchor="ctr"/>
-            <a:lstStyle/>
-            <a:p>
-              <a:pPr algn="ctr"/>
-              <a:endParaRPr lang="pt-BR"/>
-            </a:p>
-          </p:txBody>
-        </p:sp>
-        <p:sp>
-          <p:nvSpPr>
-            <p:cNvPr id="143" name="Multiply 142"/>
-            <p:cNvSpPr>
-              <a:spLocks/>
-            </p:cNvSpPr>
-            <p:nvPr/>
-          </p:nvSpPr>
-          <p:spPr>
-            <a:xfrm>
-              <a:off x="4586752" y="4430025"/>
-              <a:ext cx="72000" cy="82800"/>
-            </a:xfrm>
-            <a:prstGeom prst="mathMultiply">
-              <a:avLst/>
-            </a:prstGeom>
-            <a:solidFill>
-              <a:srgbClr val="00B0F0"/>
-            </a:solidFill>
-            <a:ln w="3175">
-              <a:solidFill>
-                <a:schemeClr val="tx1"/>
-              </a:solidFill>
-            </a:ln>
-          </p:spPr>
-          <p:style>
-            <a:lnRef idx="2">
-              <a:schemeClr val="accent1">
-                <a:shade val="50000"/>
-              </a:schemeClr>
-            </a:lnRef>
-            <a:fillRef idx="1">
-              <a:schemeClr val="accent1"/>
-            </a:fillRef>
-            <a:effectRef idx="0">
-              <a:schemeClr val="accent1"/>
-            </a:effectRef>
-            <a:fontRef idx="minor">
-              <a:schemeClr val="lt1"/>
-            </a:fontRef>
-          </p:style>
-          <p:txBody>
-            <a:bodyPr rtlCol="0" anchor="ctr"/>
-            <a:lstStyle/>
-            <a:p>
-              <a:pPr algn="ctr"/>
-              <a:endParaRPr lang="pt-BR"/>
-            </a:p>
-          </p:txBody>
-        </p:sp>
-        <p:sp>
-          <p:nvSpPr>
-            <p:cNvPr id="144" name="Multiply 143"/>
-            <p:cNvSpPr>
-              <a:spLocks/>
-            </p:cNvSpPr>
-            <p:nvPr/>
-          </p:nvSpPr>
-          <p:spPr>
-            <a:xfrm>
-              <a:off x="4489301" y="4254654"/>
-              <a:ext cx="72000" cy="82800"/>
-            </a:xfrm>
-            <a:prstGeom prst="mathMultiply">
-              <a:avLst/>
-            </a:prstGeom>
-            <a:solidFill>
-              <a:srgbClr val="00B0F0"/>
-            </a:solidFill>
-            <a:ln w="3175">
-              <a:solidFill>
-                <a:schemeClr val="tx1"/>
-              </a:solidFill>
-            </a:ln>
-          </p:spPr>
-          <p:style>
-            <a:lnRef idx="2">
-              <a:schemeClr val="accent1">
-                <a:shade val="50000"/>
-              </a:schemeClr>
-            </a:lnRef>
-            <a:fillRef idx="1">
-              <a:schemeClr val="accent1"/>
-            </a:fillRef>
-            <a:effectRef idx="0">
-              <a:schemeClr val="accent1"/>
-            </a:effectRef>
-            <a:fontRef idx="minor">
-              <a:schemeClr val="lt1"/>
-            </a:fontRef>
-          </p:style>
-          <p:txBody>
-            <a:bodyPr rtlCol="0" anchor="ctr"/>
-            <a:lstStyle/>
-            <a:p>
-              <a:pPr algn="ctr"/>
-              <a:endParaRPr lang="pt-BR"/>
-            </a:p>
-          </p:txBody>
-        </p:sp>
-        <p:sp>
-          <p:nvSpPr>
-            <p:cNvPr id="145" name="Multiply 144"/>
-            <p:cNvSpPr>
-              <a:spLocks/>
-            </p:cNvSpPr>
-            <p:nvPr/>
-          </p:nvSpPr>
-          <p:spPr>
-            <a:xfrm>
-              <a:off x="4647454" y="4169248"/>
-              <a:ext cx="72000" cy="82800"/>
-            </a:xfrm>
-            <a:prstGeom prst="mathMultiply">
-              <a:avLst/>
-            </a:prstGeom>
-            <a:solidFill>
-              <a:srgbClr val="00B0F0"/>
-            </a:solidFill>
-            <a:ln w="3175">
-              <a:solidFill>
-                <a:schemeClr val="tx1"/>
-              </a:solidFill>
-            </a:ln>
-          </p:spPr>
-          <p:style>
-            <a:lnRef idx="2">
-              <a:schemeClr val="accent1">
-                <a:shade val="50000"/>
-              </a:schemeClr>
-            </a:lnRef>
-            <a:fillRef idx="1">
-              <a:schemeClr val="accent1"/>
-            </a:fillRef>
-            <a:effectRef idx="0">
-              <a:schemeClr val="accent1"/>
-            </a:effectRef>
-            <a:fontRef idx="minor">
-              <a:schemeClr val="lt1"/>
-            </a:fontRef>
-          </p:style>
-          <p:txBody>
-            <a:bodyPr rtlCol="0" anchor="ctr"/>
-            <a:lstStyle/>
-            <a:p>
-              <a:pPr algn="ctr"/>
-              <a:endParaRPr lang="pt-BR"/>
-            </a:p>
-          </p:txBody>
-        </p:sp>
-        <p:sp>
-          <p:nvSpPr>
-            <p:cNvPr id="146" name="Multiply 145"/>
-            <p:cNvSpPr>
-              <a:spLocks/>
-            </p:cNvSpPr>
-            <p:nvPr/>
-          </p:nvSpPr>
-          <p:spPr>
-            <a:xfrm>
-              <a:off x="4515354" y="4085156"/>
-              <a:ext cx="72000" cy="82800"/>
-            </a:xfrm>
-            <a:prstGeom prst="mathMultiply">
-              <a:avLst/>
-            </a:prstGeom>
-            <a:solidFill>
-              <a:srgbClr val="00B0F0"/>
-            </a:solidFill>
-            <a:ln w="3175">
-              <a:solidFill>
-                <a:schemeClr val="tx1"/>
-              </a:solidFill>
-            </a:ln>
-          </p:spPr>
-          <p:style>
-            <a:lnRef idx="2">
-              <a:schemeClr val="accent1">
-                <a:shade val="50000"/>
-              </a:schemeClr>
-            </a:lnRef>
-            <a:fillRef idx="1">
-              <a:schemeClr val="accent1"/>
-            </a:fillRef>
-            <a:effectRef idx="0">
-              <a:schemeClr val="accent1"/>
-            </a:effectRef>
-            <a:fontRef idx="minor">
-              <a:schemeClr val="lt1"/>
-            </a:fontRef>
-          </p:style>
-          <p:txBody>
-            <a:bodyPr rtlCol="0" anchor="ctr"/>
-            <a:lstStyle/>
-            <a:p>
-              <a:pPr algn="ctr"/>
-              <a:endParaRPr lang="pt-BR"/>
-            </a:p>
-          </p:txBody>
-        </p:sp>
-        <p:sp>
-          <p:nvSpPr>
-            <p:cNvPr id="147" name="Multiply 146"/>
-            <p:cNvSpPr>
-              <a:spLocks noChangeAspect="1"/>
-            </p:cNvSpPr>
-            <p:nvPr/>
-          </p:nvSpPr>
-          <p:spPr>
-            <a:xfrm>
-              <a:off x="4601229" y="3950902"/>
-              <a:ext cx="72000" cy="81871"/>
-            </a:xfrm>
-            <a:prstGeom prst="mathMultiply">
-              <a:avLst/>
-            </a:prstGeom>
-            <a:solidFill>
-              <a:srgbClr val="00B0F0"/>
-            </a:solidFill>
-            <a:ln w="3175">
-              <a:solidFill>
-                <a:schemeClr val="tx1"/>
-              </a:solidFill>
-            </a:ln>
-          </p:spPr>
-          <p:style>
-            <a:lnRef idx="2">
-              <a:schemeClr val="accent1">
-                <a:shade val="50000"/>
-              </a:schemeClr>
-            </a:lnRef>
-            <a:fillRef idx="1">
-              <a:schemeClr val="accent1"/>
-            </a:fillRef>
-            <a:effectRef idx="0">
-              <a:schemeClr val="accent1"/>
-            </a:effectRef>
-            <a:fontRef idx="minor">
-              <a:schemeClr val="lt1"/>
-            </a:fontRef>
-          </p:style>
-          <p:txBody>
-            <a:bodyPr rtlCol="0" anchor="ctr"/>
-            <a:lstStyle/>
-            <a:p>
-              <a:pPr algn="ctr"/>
-              <a:endParaRPr lang="pt-BR"/>
-            </a:p>
-          </p:txBody>
-        </p:sp>
-        <p:sp>
-          <p:nvSpPr>
-            <p:cNvPr id="148" name="Multiply 147"/>
-            <p:cNvSpPr>
-              <a:spLocks noChangeAspect="1"/>
-            </p:cNvSpPr>
-            <p:nvPr/>
-          </p:nvSpPr>
-          <p:spPr>
-            <a:xfrm>
-              <a:off x="4598029" y="3846380"/>
-              <a:ext cx="72000" cy="81871"/>
-            </a:xfrm>
-            <a:prstGeom prst="mathMultiply">
-              <a:avLst/>
-            </a:prstGeom>
-            <a:solidFill>
-              <a:srgbClr val="00B0F0"/>
-            </a:solidFill>
-            <a:ln w="3175">
-              <a:solidFill>
-                <a:schemeClr val="tx1"/>
-              </a:solidFill>
-            </a:ln>
-          </p:spPr>
-          <p:style>
-            <a:lnRef idx="2">
-              <a:schemeClr val="accent1">
-                <a:shade val="50000"/>
-              </a:schemeClr>
-            </a:lnRef>
-            <a:fillRef idx="1">
-              <a:schemeClr val="accent1"/>
-            </a:fillRef>
-            <a:effectRef idx="0">
-              <a:schemeClr val="accent1"/>
-            </a:effectRef>
-            <a:fontRef idx="minor">
-              <a:schemeClr val="lt1"/>
-            </a:fontRef>
-          </p:style>
-          <p:txBody>
-            <a:bodyPr rtlCol="0" anchor="ctr"/>
-            <a:lstStyle/>
-            <a:p>
-              <a:pPr algn="ctr"/>
-              <a:endParaRPr lang="pt-BR"/>
-            </a:p>
-          </p:txBody>
-        </p:sp>
-        <p:sp>
-          <p:nvSpPr>
-            <p:cNvPr id="149" name="Multiply 148"/>
-            <p:cNvSpPr>
-              <a:spLocks noChangeAspect="1"/>
-            </p:cNvSpPr>
-            <p:nvPr/>
-          </p:nvSpPr>
-          <p:spPr>
-            <a:xfrm>
-              <a:off x="4517694" y="3803997"/>
-              <a:ext cx="72000" cy="81871"/>
-            </a:xfrm>
-            <a:prstGeom prst="mathMultiply">
-              <a:avLst/>
-            </a:prstGeom>
-            <a:solidFill>
-              <a:srgbClr val="00B0F0"/>
-            </a:solidFill>
-            <a:ln w="3175">
-              <a:solidFill>
-                <a:schemeClr val="tx1"/>
-              </a:solidFill>
-            </a:ln>
-          </p:spPr>
-          <p:style>
-            <a:lnRef idx="2">
-              <a:schemeClr val="accent1">
-                <a:shade val="50000"/>
-              </a:schemeClr>
-            </a:lnRef>
-            <a:fillRef idx="1">
-              <a:schemeClr val="accent1"/>
-            </a:fillRef>
-            <a:effectRef idx="0">
-              <a:schemeClr val="accent1"/>
-            </a:effectRef>
-            <a:fontRef idx="minor">
-              <a:schemeClr val="lt1"/>
-            </a:fontRef>
-          </p:style>
-          <p:txBody>
-            <a:bodyPr rtlCol="0" anchor="ctr"/>
-            <a:lstStyle/>
-            <a:p>
-              <a:pPr algn="ctr"/>
-              <a:endParaRPr lang="pt-BR"/>
-            </a:p>
-          </p:txBody>
-        </p:sp>
-        <p:sp>
-          <p:nvSpPr>
-            <p:cNvPr id="150" name="Multiply 149"/>
-            <p:cNvSpPr>
-              <a:spLocks noChangeAspect="1"/>
-            </p:cNvSpPr>
-            <p:nvPr/>
-          </p:nvSpPr>
-          <p:spPr>
-            <a:xfrm>
-              <a:off x="4496498" y="3683246"/>
-              <a:ext cx="72000" cy="81871"/>
-            </a:xfrm>
-            <a:prstGeom prst="mathMultiply">
-              <a:avLst/>
-            </a:prstGeom>
-            <a:solidFill>
-              <a:srgbClr val="00B0F0"/>
-            </a:solidFill>
-            <a:ln w="3175">
-              <a:solidFill>
-                <a:schemeClr val="tx1"/>
-              </a:solidFill>
-            </a:ln>
-          </p:spPr>
-          <p:style>
-            <a:lnRef idx="2">
-              <a:schemeClr val="accent1">
-                <a:shade val="50000"/>
-              </a:schemeClr>
-            </a:lnRef>
-            <a:fillRef idx="1">
-              <a:schemeClr val="accent1"/>
-            </a:fillRef>
-            <a:effectRef idx="0">
-              <a:schemeClr val="accent1"/>
-            </a:effectRef>
-            <a:fontRef idx="minor">
-              <a:schemeClr val="lt1"/>
-            </a:fontRef>
-          </p:style>
-          <p:txBody>
-            <a:bodyPr rtlCol="0" anchor="ctr"/>
-            <a:lstStyle/>
-            <a:p>
-              <a:pPr algn="ctr"/>
-              <a:endParaRPr lang="pt-BR"/>
-            </a:p>
-          </p:txBody>
-        </p:sp>
-        <p:sp>
-          <p:nvSpPr>
-            <p:cNvPr id="151" name="Multiply 150"/>
-            <p:cNvSpPr>
-              <a:spLocks noChangeAspect="1"/>
-            </p:cNvSpPr>
-            <p:nvPr/>
-          </p:nvSpPr>
-          <p:spPr>
-            <a:xfrm>
-              <a:off x="4486717" y="3557718"/>
-              <a:ext cx="72000" cy="81871"/>
-            </a:xfrm>
-            <a:prstGeom prst="mathMultiply">
-              <a:avLst/>
-            </a:prstGeom>
-            <a:solidFill>
-              <a:srgbClr val="00B0F0"/>
-            </a:solidFill>
-            <a:ln w="3175">
-              <a:solidFill>
-                <a:schemeClr val="tx1"/>
-              </a:solidFill>
-            </a:ln>
-          </p:spPr>
-          <p:style>
-            <a:lnRef idx="2">
-              <a:schemeClr val="accent1">
-                <a:shade val="50000"/>
-              </a:schemeClr>
-            </a:lnRef>
-            <a:fillRef idx="1">
-              <a:schemeClr val="accent1"/>
-            </a:fillRef>
-            <a:effectRef idx="0">
-              <a:schemeClr val="accent1"/>
-            </a:effectRef>
-            <a:fontRef idx="minor">
-              <a:schemeClr val="lt1"/>
-            </a:fontRef>
-          </p:style>
-          <p:txBody>
-            <a:bodyPr rtlCol="0" anchor="ctr"/>
-            <a:lstStyle/>
-            <a:p>
-              <a:pPr algn="ctr"/>
-              <a:endParaRPr lang="pt-BR"/>
-            </a:p>
-          </p:txBody>
-        </p:sp>
-        <p:cxnSp>
-          <p:nvCxnSpPr>
-            <p:cNvPr id="80" name="Straight Connector 79"/>
-            <p:cNvCxnSpPr/>
-            <p:nvPr/>
-          </p:nvCxnSpPr>
-          <p:spPr>
-            <a:xfrm rot="10800000" flipH="1" flipV="1">
-              <a:off x="4569109" y="3960140"/>
-              <a:ext cx="73202" cy="50119"/>
-            </a:xfrm>
-            <a:prstGeom prst="line">
-              <a:avLst/>
-            </a:prstGeom>
-            <a:ln w="12700">
-              <a:solidFill>
-                <a:schemeClr val="tx1"/>
-              </a:solidFill>
-              <a:prstDash val="dash"/>
-            </a:ln>
-          </p:spPr>
-          <p:style>
-            <a:lnRef idx="1">
-              <a:schemeClr val="accent1"/>
-            </a:lnRef>
-            <a:fillRef idx="0">
-              <a:schemeClr val="accent1"/>
-            </a:fillRef>
-            <a:effectRef idx="0">
-              <a:schemeClr val="accent1"/>
-            </a:effectRef>
-            <a:fontRef idx="minor">
-              <a:schemeClr val="tx1"/>
-            </a:fontRef>
-          </p:style>
-        </p:cxnSp>
-        <p:cxnSp>
-          <p:nvCxnSpPr>
-            <p:cNvPr id="81" name="Straight Connector 80"/>
-            <p:cNvCxnSpPr/>
-            <p:nvPr/>
-          </p:nvCxnSpPr>
-          <p:spPr>
-            <a:xfrm flipV="1">
-              <a:off x="4551996" y="4006045"/>
-              <a:ext cx="87747" cy="124391"/>
-            </a:xfrm>
-            <a:prstGeom prst="line">
-              <a:avLst/>
-            </a:prstGeom>
-            <a:ln w="12700">
-              <a:solidFill>
-                <a:schemeClr val="tx1"/>
-              </a:solidFill>
-              <a:prstDash val="dash"/>
-            </a:ln>
-          </p:spPr>
-          <p:style>
-            <a:lnRef idx="1">
-              <a:schemeClr val="accent1"/>
-            </a:lnRef>
-            <a:fillRef idx="0">
-              <a:schemeClr val="accent1"/>
-            </a:fillRef>
-            <a:effectRef idx="0">
-              <a:schemeClr val="accent1"/>
-            </a:effectRef>
-            <a:fontRef idx="minor">
-              <a:schemeClr val="tx1"/>
-            </a:fontRef>
-          </p:style>
-        </p:cxnSp>
-        <p:cxnSp>
-          <p:nvCxnSpPr>
-            <p:cNvPr id="88" name="Straight Connector 87"/>
-            <p:cNvCxnSpPr/>
-            <p:nvPr/>
-          </p:nvCxnSpPr>
-          <p:spPr>
-            <a:xfrm rot="5400000" flipV="1">
-              <a:off x="4570316" y="4113719"/>
-              <a:ext cx="87747" cy="124391"/>
-            </a:xfrm>
-            <a:prstGeom prst="line">
-              <a:avLst/>
-            </a:prstGeom>
-            <a:ln w="12700">
-              <a:solidFill>
-                <a:schemeClr val="tx1"/>
-              </a:solidFill>
-              <a:prstDash val="dash"/>
-            </a:ln>
-          </p:spPr>
-          <p:style>
-            <a:lnRef idx="1">
-              <a:schemeClr val="accent1"/>
-            </a:lnRef>
-            <a:fillRef idx="0">
-              <a:schemeClr val="accent1"/>
-            </a:fillRef>
-            <a:effectRef idx="0">
-              <a:schemeClr val="accent1"/>
-            </a:effectRef>
-            <a:fontRef idx="minor">
-              <a:schemeClr val="tx1"/>
-            </a:fontRef>
-          </p:style>
-        </p:cxnSp>
-        <p:cxnSp>
-          <p:nvCxnSpPr>
-            <p:cNvPr id="89" name="Straight Connector 88"/>
-            <p:cNvCxnSpPr/>
-            <p:nvPr/>
-          </p:nvCxnSpPr>
-          <p:spPr>
-            <a:xfrm flipH="1">
-              <a:off x="4522717" y="4217178"/>
-              <a:ext cx="158615" cy="91964"/>
-            </a:xfrm>
-            <a:prstGeom prst="line">
-              <a:avLst/>
-            </a:prstGeom>
-            <a:ln w="12700">
-              <a:solidFill>
-                <a:schemeClr val="tx1"/>
-              </a:solidFill>
-              <a:prstDash val="dash"/>
-            </a:ln>
-          </p:spPr>
-          <p:style>
-            <a:lnRef idx="1">
-              <a:schemeClr val="accent1"/>
-            </a:lnRef>
-            <a:fillRef idx="0">
-              <a:schemeClr val="accent1"/>
-            </a:fillRef>
-            <a:effectRef idx="0">
-              <a:schemeClr val="accent1"/>
-            </a:effectRef>
-            <a:fontRef idx="minor">
-              <a:schemeClr val="tx1"/>
-            </a:fontRef>
-          </p:style>
-        </p:cxnSp>
-        <p:cxnSp>
-          <p:nvCxnSpPr>
-            <p:cNvPr id="91" name="Straight Connector 90"/>
-            <p:cNvCxnSpPr/>
-            <p:nvPr/>
-          </p:nvCxnSpPr>
-          <p:spPr>
-            <a:xfrm rot="5400000" flipH="1">
-              <a:off x="4490591" y="4331172"/>
-              <a:ext cx="158615" cy="91964"/>
-            </a:xfrm>
-            <a:prstGeom prst="line">
-              <a:avLst/>
-            </a:prstGeom>
-            <a:ln w="12700">
-              <a:solidFill>
-                <a:schemeClr val="tx1"/>
-              </a:solidFill>
-              <a:prstDash val="dash"/>
-            </a:ln>
-          </p:spPr>
-          <p:style>
-            <a:lnRef idx="1">
-              <a:schemeClr val="accent1"/>
-            </a:lnRef>
-            <a:fillRef idx="0">
-              <a:schemeClr val="accent1"/>
-            </a:fillRef>
-            <a:effectRef idx="0">
-              <a:schemeClr val="accent1"/>
-            </a:effectRef>
-            <a:fontRef idx="minor">
-              <a:schemeClr val="tx1"/>
-            </a:fontRef>
-          </p:style>
-        </p:cxnSp>
-        <p:cxnSp>
-          <p:nvCxnSpPr>
-            <p:cNvPr id="92" name="Straight Connector 91"/>
-            <p:cNvCxnSpPr/>
-            <p:nvPr/>
-          </p:nvCxnSpPr>
-          <p:spPr>
-            <a:xfrm rot="10800000" flipH="1">
-              <a:off x="4466582" y="4460600"/>
-              <a:ext cx="158615" cy="91964"/>
-            </a:xfrm>
-            <a:prstGeom prst="line">
-              <a:avLst/>
-            </a:prstGeom>
-            <a:ln w="12700">
-              <a:solidFill>
-                <a:schemeClr val="tx1"/>
-              </a:solidFill>
-              <a:prstDash val="dash"/>
-            </a:ln>
-          </p:spPr>
-          <p:style>
-            <a:lnRef idx="1">
-              <a:schemeClr val="accent1"/>
-            </a:lnRef>
-            <a:fillRef idx="0">
-              <a:schemeClr val="accent1"/>
-            </a:fillRef>
-            <a:effectRef idx="0">
-              <a:schemeClr val="accent1"/>
-            </a:effectRef>
-            <a:fontRef idx="minor">
-              <a:schemeClr val="tx1"/>
-            </a:fontRef>
-          </p:style>
-        </p:cxnSp>
-        <p:cxnSp>
-          <p:nvCxnSpPr>
-            <p:cNvPr id="93" name="Straight Connector 92"/>
-            <p:cNvCxnSpPr/>
-            <p:nvPr/>
-          </p:nvCxnSpPr>
-          <p:spPr>
-            <a:xfrm rot="16200000" flipH="1">
-              <a:off x="4438387" y="4578734"/>
-              <a:ext cx="158615" cy="91964"/>
-            </a:xfrm>
-            <a:prstGeom prst="line">
-              <a:avLst/>
-            </a:prstGeom>
-            <a:ln w="12700">
-              <a:solidFill>
-                <a:schemeClr val="tx1"/>
-              </a:solidFill>
-              <a:prstDash val="dash"/>
-            </a:ln>
-          </p:spPr>
-          <p:style>
-            <a:lnRef idx="1">
-              <a:schemeClr val="accent1"/>
-            </a:lnRef>
-            <a:fillRef idx="0">
-              <a:schemeClr val="accent1"/>
-            </a:fillRef>
-            <a:effectRef idx="0">
-              <a:schemeClr val="accent1"/>
-            </a:effectRef>
-            <a:fontRef idx="minor">
-              <a:schemeClr val="tx1"/>
-            </a:fontRef>
-          </p:style>
-        </p:cxnSp>
-        <p:cxnSp>
-          <p:nvCxnSpPr>
-            <p:cNvPr id="95" name="Straight Connector 94"/>
-            <p:cNvCxnSpPr/>
-            <p:nvPr/>
-          </p:nvCxnSpPr>
-          <p:spPr>
-            <a:xfrm flipV="1">
-              <a:off x="4460231" y="4699147"/>
-              <a:ext cx="105160" cy="126727"/>
-            </a:xfrm>
-            <a:prstGeom prst="line">
-              <a:avLst/>
-            </a:prstGeom>
-            <a:ln w="12700">
-              <a:solidFill>
-                <a:schemeClr val="tx1"/>
-              </a:solidFill>
-              <a:prstDash val="dash"/>
-            </a:ln>
-          </p:spPr>
-          <p:style>
-            <a:lnRef idx="1">
-              <a:schemeClr val="accent1"/>
-            </a:lnRef>
-            <a:fillRef idx="0">
-              <a:schemeClr val="accent1"/>
-            </a:fillRef>
-            <a:effectRef idx="0">
-              <a:schemeClr val="accent1"/>
-            </a:effectRef>
-            <a:fontRef idx="minor">
-              <a:schemeClr val="tx1"/>
-            </a:fontRef>
-          </p:style>
-        </p:cxnSp>
-        <p:cxnSp>
-          <p:nvCxnSpPr>
-            <p:cNvPr id="97" name="Straight Connector 96"/>
-            <p:cNvCxnSpPr/>
-            <p:nvPr/>
-          </p:nvCxnSpPr>
-          <p:spPr>
-            <a:xfrm rot="5400000" flipV="1">
-              <a:off x="4470137" y="4820883"/>
-              <a:ext cx="105160" cy="126727"/>
-            </a:xfrm>
-            <a:prstGeom prst="line">
-              <a:avLst/>
-            </a:prstGeom>
-            <a:ln w="12700">
-              <a:solidFill>
-                <a:schemeClr val="tx1"/>
-              </a:solidFill>
-              <a:prstDash val="dash"/>
-            </a:ln>
-          </p:spPr>
-          <p:style>
-            <a:lnRef idx="1">
-              <a:schemeClr val="accent1"/>
-            </a:lnRef>
-            <a:fillRef idx="0">
-              <a:schemeClr val="accent1"/>
-            </a:fillRef>
-            <a:effectRef idx="0">
-              <a:schemeClr val="accent1"/>
-            </a:effectRef>
-            <a:fontRef idx="minor">
-              <a:schemeClr val="tx1"/>
-            </a:fontRef>
-          </p:style>
-        </p:cxnSp>
-        <p:cxnSp>
-          <p:nvCxnSpPr>
-            <p:cNvPr id="66" name="Straight Connector 65"/>
-            <p:cNvCxnSpPr/>
-            <p:nvPr/>
-          </p:nvCxnSpPr>
-          <p:spPr>
-            <a:xfrm flipV="1">
-              <a:off x="4513192" y="3490807"/>
-              <a:ext cx="42247" cy="120375"/>
-            </a:xfrm>
-            <a:prstGeom prst="line">
-              <a:avLst/>
-            </a:prstGeom>
-            <a:ln w="12700">
-              <a:solidFill>
-                <a:schemeClr val="tx1"/>
-              </a:solidFill>
-              <a:prstDash val="dash"/>
-            </a:ln>
-          </p:spPr>
-          <p:style>
-            <a:lnRef idx="1">
-              <a:schemeClr val="accent1"/>
-            </a:lnRef>
-            <a:fillRef idx="0">
-              <a:schemeClr val="accent1"/>
-            </a:fillRef>
-            <a:effectRef idx="0">
-              <a:schemeClr val="accent1"/>
-            </a:effectRef>
-            <a:fontRef idx="minor">
-              <a:schemeClr val="tx1"/>
-            </a:fontRef>
-          </p:style>
-        </p:cxnSp>
-        <p:cxnSp>
-          <p:nvCxnSpPr>
-            <p:cNvPr id="75" name="Straight Connector 74"/>
-            <p:cNvCxnSpPr/>
-            <p:nvPr/>
-          </p:nvCxnSpPr>
-          <p:spPr>
-            <a:xfrm rot="10800000" flipH="1" flipV="1">
-              <a:off x="4527096" y="3725595"/>
-              <a:ext cx="73202" cy="50119"/>
-            </a:xfrm>
-            <a:prstGeom prst="line">
-              <a:avLst/>
-            </a:prstGeom>
-            <a:ln w="12700">
-              <a:solidFill>
-                <a:schemeClr val="tx1"/>
-              </a:solidFill>
-              <a:prstDash val="dash"/>
-            </a:ln>
-          </p:spPr>
-          <p:style>
-            <a:lnRef idx="1">
-              <a:schemeClr val="accent1"/>
-            </a:lnRef>
-            <a:fillRef idx="0">
-              <a:schemeClr val="accent1"/>
-            </a:fillRef>
-            <a:effectRef idx="0">
-              <a:schemeClr val="accent1"/>
-            </a:effectRef>
-            <a:fontRef idx="minor">
-              <a:schemeClr val="tx1"/>
-            </a:fontRef>
-          </p:style>
-        </p:cxnSp>
-        <p:sp>
-          <p:nvSpPr>
-            <p:cNvPr id="152" name="Multiply 151"/>
-            <p:cNvSpPr>
-              <a:spLocks noChangeAspect="1"/>
-            </p:cNvSpPr>
-            <p:nvPr/>
-          </p:nvSpPr>
-          <p:spPr>
-            <a:xfrm>
-              <a:off x="4568482" y="3722621"/>
-              <a:ext cx="72000" cy="81871"/>
-            </a:xfrm>
-            <a:prstGeom prst="mathMultiply">
-              <a:avLst/>
-            </a:prstGeom>
-            <a:solidFill>
-              <a:srgbClr val="00B0F0"/>
-            </a:solidFill>
-            <a:ln w="3175">
-              <a:solidFill>
-                <a:schemeClr val="tx1"/>
-              </a:solidFill>
-            </a:ln>
-          </p:spPr>
-          <p:style>
-            <a:lnRef idx="2">
-              <a:schemeClr val="accent1">
-                <a:shade val="50000"/>
-              </a:schemeClr>
-            </a:lnRef>
-            <a:fillRef idx="1">
-              <a:schemeClr val="accent1"/>
-            </a:fillRef>
-            <a:effectRef idx="0">
-              <a:schemeClr val="accent1"/>
-            </a:effectRef>
-            <a:fontRef idx="minor">
-              <a:schemeClr val="lt1"/>
-            </a:fontRef>
-          </p:style>
-          <p:txBody>
-            <a:bodyPr rtlCol="0" anchor="ctr"/>
-            <a:lstStyle/>
-            <a:p>
-              <a:pPr algn="ctr"/>
-              <a:endParaRPr lang="pt-BR"/>
-            </a:p>
-          </p:txBody>
-        </p:sp>
-        <p:sp>
-          <p:nvSpPr>
-            <p:cNvPr id="153" name="Multiply 152"/>
-            <p:cNvSpPr>
-              <a:spLocks noChangeAspect="1"/>
-            </p:cNvSpPr>
-            <p:nvPr/>
-          </p:nvSpPr>
-          <p:spPr>
-            <a:xfrm>
-              <a:off x="4553694" y="3612134"/>
-              <a:ext cx="72000" cy="81871"/>
-            </a:xfrm>
-            <a:prstGeom prst="mathMultiply">
-              <a:avLst/>
-            </a:prstGeom>
-            <a:solidFill>
-              <a:srgbClr val="00B0F0"/>
-            </a:solidFill>
-            <a:ln w="3175">
-              <a:solidFill>
-                <a:schemeClr val="tx1"/>
-              </a:solidFill>
-            </a:ln>
-          </p:spPr>
-          <p:style>
-            <a:lnRef idx="2">
-              <a:schemeClr val="accent1">
-                <a:shade val="50000"/>
-              </a:schemeClr>
-            </a:lnRef>
-            <a:fillRef idx="1">
-              <a:schemeClr val="accent1"/>
-            </a:fillRef>
-            <a:effectRef idx="0">
-              <a:schemeClr val="accent1"/>
-            </a:effectRef>
-            <a:fontRef idx="minor">
-              <a:schemeClr val="lt1"/>
-            </a:fontRef>
-          </p:style>
-          <p:txBody>
-            <a:bodyPr rtlCol="0" anchor="ctr"/>
-            <a:lstStyle/>
-            <a:p>
-              <a:pPr algn="ctr"/>
-              <a:endParaRPr lang="pt-BR"/>
-            </a:p>
-          </p:txBody>
-        </p:sp>
-        <p:cxnSp>
-          <p:nvCxnSpPr>
-            <p:cNvPr id="158" name="Straight Arrow Connector 157"/>
-            <p:cNvCxnSpPr/>
-            <p:nvPr/>
-          </p:nvCxnSpPr>
-          <p:spPr>
-            <a:xfrm>
-              <a:off x="3030134" y="1302987"/>
-              <a:ext cx="0" cy="4284000"/>
-            </a:xfrm>
-            <a:prstGeom prst="straightConnector1">
-              <a:avLst/>
-            </a:prstGeom>
-            <a:ln w="19050">
-              <a:solidFill>
-                <a:schemeClr val="tx1"/>
-              </a:solidFill>
-              <a:headEnd type="triangle" w="med" len="med"/>
-              <a:tailEnd type="none" w="med" len="med"/>
-            </a:ln>
-          </p:spPr>
-          <p:style>
-            <a:lnRef idx="1">
-              <a:schemeClr val="accent1"/>
-            </a:lnRef>
-            <a:fillRef idx="0">
-              <a:schemeClr val="accent1"/>
-            </a:fillRef>
-            <a:effectRef idx="0">
-              <a:schemeClr val="accent1"/>
-            </a:effectRef>
-            <a:fontRef idx="minor">
-              <a:schemeClr val="tx1"/>
-            </a:fontRef>
-          </p:style>
-        </p:cxnSp>
-        <p:cxnSp>
-          <p:nvCxnSpPr>
-            <p:cNvPr id="159" name="Straight Arrow Connector 158"/>
-            <p:cNvCxnSpPr/>
-            <p:nvPr/>
-          </p:nvCxnSpPr>
-          <p:spPr>
-            <a:xfrm rot="5400000">
-              <a:off x="4496439" y="4118552"/>
-              <a:ext cx="0" cy="2952000"/>
-            </a:xfrm>
-            <a:prstGeom prst="straightConnector1">
-              <a:avLst/>
-            </a:prstGeom>
-            <a:ln w="19050">
-              <a:solidFill>
-                <a:schemeClr val="tx1"/>
-              </a:solidFill>
-              <a:headEnd type="triangle" w="med" len="med"/>
-              <a:tailEnd type="none" w="med" len="med"/>
-            </a:ln>
-          </p:spPr>
-          <p:style>
-            <a:lnRef idx="1">
-              <a:schemeClr val="accent1"/>
-            </a:lnRef>
-            <a:fillRef idx="0">
-              <a:schemeClr val="accent1"/>
-            </a:fillRef>
-            <a:effectRef idx="0">
-              <a:schemeClr val="accent1"/>
-            </a:effectRef>
-            <a:fontRef idx="minor">
-              <a:schemeClr val="tx1"/>
-            </a:fontRef>
-          </p:style>
-        </p:cxnSp>
-        <mc:AlternateContent xmlns:mc="http://schemas.openxmlformats.org/markup-compatibility/2006" xmlns:a14="http://schemas.microsoft.com/office/drawing/2010/main">
-          <mc:Choice Requires="a14">
-            <p:sp>
-              <p:nvSpPr>
-                <p:cNvPr id="164" name="TextBox 163"/>
-                <p:cNvSpPr txBox="1"/>
-                <p:nvPr/>
-              </p:nvSpPr>
-              <p:spPr>
-                <a:xfrm>
-                  <a:off x="5930875" y="5387262"/>
-                  <a:ext cx="426028" cy="400110"/>
-                </a:xfrm>
-                <a:prstGeom prst="rect">
-                  <a:avLst/>
-                </a:prstGeom>
-                <a:noFill/>
-              </p:spPr>
-              <p:txBody>
-                <a:bodyPr wrap="square" rtlCol="0">
-                  <a:spAutoFit/>
-                </a:bodyPr>
-                <a:lstStyle/>
-                <a:p>
-                  <a:pPr/>
-                  <a14:m>
-                    <m:oMathPara xmlns:m="http://schemas.openxmlformats.org/officeDocument/2006/math">
-                      <m:oMathParaPr>
-                        <m:jc m:val="centerGroup"/>
-                      </m:oMathParaPr>
-                      <m:oMath xmlns:m="http://schemas.openxmlformats.org/officeDocument/2006/math">
-                        <m:sSub>
-                          <m:sSubPr>
-                            <m:ctrlPr>
-                              <a:rPr lang="pt-BR" sz="2000" i="1" smtClean="0">
-                                <a:latin typeface="Cambria Math" panose="02040503050406030204" pitchFamily="18" charset="0"/>
-                              </a:rPr>
-                            </m:ctrlPr>
-                          </m:sSubPr>
-                          <m:e>
-                            <m:r>
-                              <a:rPr lang="pt-BR" sz="2000" b="0" i="1" smtClean="0">
-                                <a:latin typeface="Cambria Math" panose="02040503050406030204" pitchFamily="18" charset="0"/>
-                              </a:rPr>
-                              <m:t>𝑎</m:t>
-                            </m:r>
-                          </m:e>
-                          <m:sub>
-                            <m:r>
-                              <a:rPr lang="pt-BR" sz="2000" b="0" i="1" smtClean="0">
-                                <a:latin typeface="Cambria Math" panose="02040503050406030204" pitchFamily="18" charset="0"/>
-                              </a:rPr>
-                              <m:t>1</m:t>
-                            </m:r>
-                          </m:sub>
-                        </m:sSub>
-                      </m:oMath>
-                    </m:oMathPara>
-                  </a14:m>
-                  <a:endParaRPr lang="pt-BR" sz="2000" dirty="0"/>
-                </a:p>
-              </p:txBody>
-            </p:sp>
-          </mc:Choice>
-          <mc:Fallback xmlns="">
-            <p:sp>
-              <p:nvSpPr>
-                <p:cNvPr id="164" name="TextBox 163"/>
-                <p:cNvSpPr txBox="1">
-                  <a:spLocks noRot="1" noChangeAspect="1" noMove="1" noResize="1" noEditPoints="1" noAdjustHandles="1" noChangeArrowheads="1" noChangeShapeType="1" noTextEdit="1"/>
-                </p:cNvSpPr>
-                <p:nvPr/>
-              </p:nvSpPr>
-              <p:spPr>
-                <a:xfrm>
-                  <a:off x="5930875" y="5387262"/>
-                  <a:ext cx="426028" cy="400110"/>
-                </a:xfrm>
-                <a:prstGeom prst="rect">
-                  <a:avLst/>
-                </a:prstGeom>
-                <a:blipFill>
-                  <a:blip r:embed="rId4"/>
-                  <a:stretch>
-                    <a:fillRect/>
-                  </a:stretch>
-                </a:blipFill>
-              </p:spPr>
-              <p:txBody>
-                <a:bodyPr/>
-                <a:lstStyle/>
-                <a:p>
-                  <a:r>
-                    <a:rPr lang="pt-BR">
-                      <a:noFill/>
-                    </a:rPr>
-                    <a:t> </a:t>
-                  </a:r>
-                </a:p>
-              </p:txBody>
-            </p:sp>
-          </mc:Fallback>
-        </mc:AlternateContent>
-        <mc:AlternateContent xmlns:mc="http://schemas.openxmlformats.org/markup-compatibility/2006" xmlns:a14="http://schemas.microsoft.com/office/drawing/2010/main">
-          <mc:Choice Requires="a14">
-            <p:sp>
-              <p:nvSpPr>
-                <p:cNvPr id="165" name="TextBox 164"/>
-                <p:cNvSpPr txBox="1"/>
-                <p:nvPr/>
-              </p:nvSpPr>
-              <p:spPr>
-                <a:xfrm>
-                  <a:off x="2817120" y="895312"/>
-                  <a:ext cx="426028" cy="400110"/>
-                </a:xfrm>
-                <a:prstGeom prst="rect">
-                  <a:avLst/>
-                </a:prstGeom>
-                <a:noFill/>
-              </p:spPr>
-              <p:txBody>
-                <a:bodyPr wrap="square" rtlCol="0">
-                  <a:spAutoFit/>
-                </a:bodyPr>
-                <a:lstStyle/>
-                <a:p>
-                  <a:pPr/>
-                  <a14:m>
-                    <m:oMathPara xmlns:m="http://schemas.openxmlformats.org/officeDocument/2006/math">
-                      <m:oMathParaPr>
-                        <m:jc m:val="centerGroup"/>
-                      </m:oMathParaPr>
-                      <m:oMath xmlns:m="http://schemas.openxmlformats.org/officeDocument/2006/math">
-                        <m:sSub>
-                          <m:sSubPr>
-                            <m:ctrlPr>
-                              <a:rPr lang="pt-BR" sz="2000" i="1" smtClean="0">
-                                <a:latin typeface="Cambria Math" panose="02040503050406030204" pitchFamily="18" charset="0"/>
-                              </a:rPr>
-                            </m:ctrlPr>
-                          </m:sSubPr>
-                          <m:e>
-                            <m:r>
-                              <a:rPr lang="pt-BR" sz="2000" b="0" i="1" smtClean="0">
-                                <a:latin typeface="Cambria Math" panose="02040503050406030204" pitchFamily="18" charset="0"/>
-                              </a:rPr>
-                              <m:t>𝑎</m:t>
-                            </m:r>
-                          </m:e>
-                          <m:sub>
-                            <m:r>
-                              <a:rPr lang="pt-BR" sz="2000" b="0" i="1" smtClean="0">
-                                <a:latin typeface="Cambria Math" panose="02040503050406030204" pitchFamily="18" charset="0"/>
-                              </a:rPr>
-                              <m:t>2</m:t>
-                            </m:r>
-                          </m:sub>
-                        </m:sSub>
-                      </m:oMath>
-                    </m:oMathPara>
-                  </a14:m>
-                  <a:endParaRPr lang="pt-BR" sz="2000" dirty="0"/>
-                </a:p>
-              </p:txBody>
-            </p:sp>
-          </mc:Choice>
-          <mc:Fallback xmlns="">
-            <p:sp>
-              <p:nvSpPr>
-                <p:cNvPr id="165" name="TextBox 164"/>
-                <p:cNvSpPr txBox="1">
-                  <a:spLocks noRot="1" noChangeAspect="1" noMove="1" noResize="1" noEditPoints="1" noAdjustHandles="1" noChangeArrowheads="1" noChangeShapeType="1" noTextEdit="1"/>
-                </p:cNvSpPr>
-                <p:nvPr/>
-              </p:nvSpPr>
-              <p:spPr>
-                <a:xfrm>
-                  <a:off x="2817120" y="895312"/>
-                  <a:ext cx="426028" cy="400110"/>
-                </a:xfrm>
-                <a:prstGeom prst="rect">
-                  <a:avLst/>
-                </a:prstGeom>
-                <a:blipFill>
-                  <a:blip r:embed="rId5"/>
-                  <a:stretch>
-                    <a:fillRect/>
-                  </a:stretch>
-                </a:blipFill>
-              </p:spPr>
-              <p:txBody>
-                <a:bodyPr/>
-                <a:lstStyle/>
-                <a:p>
-                  <a:r>
-                    <a:rPr lang="pt-BR">
-                      <a:noFill/>
-                    </a:rPr>
-                    <a:t> </a:t>
-                  </a:r>
-                </a:p>
-              </p:txBody>
-            </p:sp>
-          </mc:Fallback>
-        </mc:AlternateContent>
-      </p:grpSp>
-    </p:spTree>
-    <p:extLst>
-      <p:ext uri="{BB962C8B-B14F-4D97-AF65-F5344CB8AC3E}">
-        <p14:creationId xmlns:p14="http://schemas.microsoft.com/office/powerpoint/2010/main" val="3580847131"/>
-      </p:ext>
-    </p:extLst>
-  </p:cSld>
-  <p:clrMapOvr>
-    <a:masterClrMapping/>
-  </p:clrMapOvr>
-</p:sld>
-</file>
-
 <file path=ppt/slides/slide4.xml><?xml version="1.0" encoding="utf-8"?>
 <p:sld xmlns:a="http://schemas.openxmlformats.org/drawingml/2006/main" xmlns:r="http://schemas.openxmlformats.org/officeDocument/2006/relationships" xmlns:p="http://schemas.openxmlformats.org/presentationml/2006/main">
   <p:cSld>
@@ -33353,8 +30060,8 @@
           </a:p>
         </p:txBody>
       </p:sp>
-      <mc:AlternateContent xmlns:mc="http://schemas.openxmlformats.org/markup-compatibility/2006">
-        <mc:Choice xmlns:a14="http://schemas.microsoft.com/office/drawing/2010/main" Requires="a14">
+      <mc:AlternateContent xmlns:mc="http://schemas.openxmlformats.org/markup-compatibility/2006" xmlns:a14="http://schemas.microsoft.com/office/drawing/2010/main">
+        <mc:Choice Requires="a14">
           <p:sp>
             <p:nvSpPr>
               <p:cNvPr id="3" name="Espaço Reservado para Conteúdo 2">
@@ -33451,7 +30158,7 @@
             </p:txBody>
           </p:sp>
         </mc:Choice>
-        <mc:Fallback>
+        <mc:Fallback xmlns="">
           <p:sp>
             <p:nvSpPr>
               <p:cNvPr id="3" name="Espaço Reservado para Conteúdo 2">
@@ -33764,6 +30471,3432 @@
 </file>
 
 <file path=ppt/slides/slide40.xml><?xml version="1.0" encoding="utf-8"?>
+<p:sld xmlns:a="http://schemas.openxmlformats.org/drawingml/2006/main" xmlns:r="http://schemas.openxmlformats.org/officeDocument/2006/relationships" xmlns:p="http://schemas.openxmlformats.org/presentationml/2006/main">
+  <p:cSld>
+    <p:spTree>
+      <p:nvGrpSpPr>
+        <p:cNvPr id="1" name=""/>
+        <p:cNvGrpSpPr/>
+        <p:nvPr/>
+      </p:nvGrpSpPr>
+      <p:grpSpPr>
+        <a:xfrm>
+          <a:off x="0" y="0"/>
+          <a:ext cx="0" cy="0"/>
+          <a:chOff x="0" y="0"/>
+          <a:chExt cx="0" cy="0"/>
+        </a:xfrm>
+      </p:grpSpPr>
+      <p:grpSp>
+        <p:nvGrpSpPr>
+          <p:cNvPr id="167" name="Group 166"/>
+          <p:cNvGrpSpPr/>
+          <p:nvPr/>
+        </p:nvGrpSpPr>
+        <p:grpSpPr>
+          <a:xfrm>
+            <a:off x="6818898" y="2134388"/>
+            <a:ext cx="3549478" cy="3157828"/>
+            <a:chOff x="6818898" y="2134388"/>
+            <a:chExt cx="3549478" cy="3157828"/>
+          </a:xfrm>
+        </p:grpSpPr>
+        <p:sp>
+          <p:nvSpPr>
+            <p:cNvPr id="108" name="Oval 107"/>
+            <p:cNvSpPr/>
+            <p:nvPr/>
+          </p:nvSpPr>
+          <p:spPr>
+            <a:xfrm>
+              <a:off x="7353299" y="2749031"/>
+              <a:ext cx="2160000" cy="2160000"/>
+            </a:xfrm>
+            <a:prstGeom prst="ellipse">
+              <a:avLst/>
+            </a:prstGeom>
+            <a:noFill/>
+            <a:ln>
+              <a:solidFill>
+                <a:schemeClr val="tx1"/>
+              </a:solidFill>
+            </a:ln>
+          </p:spPr>
+          <p:style>
+            <a:lnRef idx="2">
+              <a:schemeClr val="accent1">
+                <a:shade val="50000"/>
+              </a:schemeClr>
+            </a:lnRef>
+            <a:fillRef idx="1">
+              <a:schemeClr val="accent1"/>
+            </a:fillRef>
+            <a:effectRef idx="0">
+              <a:schemeClr val="accent1"/>
+            </a:effectRef>
+            <a:fontRef idx="minor">
+              <a:schemeClr val="lt1"/>
+            </a:fontRef>
+          </p:style>
+          <p:txBody>
+            <a:bodyPr rtlCol="0" anchor="ctr"/>
+            <a:lstStyle/>
+            <a:p>
+              <a:pPr algn="ctr"/>
+              <a:endParaRPr lang="pt-BR"/>
+            </a:p>
+          </p:txBody>
+        </p:sp>
+        <p:sp>
+          <p:nvSpPr>
+            <p:cNvPr id="109" name="Oval 108"/>
+            <p:cNvSpPr/>
+            <p:nvPr/>
+          </p:nvSpPr>
+          <p:spPr>
+            <a:xfrm>
+              <a:off x="7533299" y="2929031"/>
+              <a:ext cx="1800000" cy="1800000"/>
+            </a:xfrm>
+            <a:prstGeom prst="ellipse">
+              <a:avLst/>
+            </a:prstGeom>
+            <a:noFill/>
+            <a:ln>
+              <a:solidFill>
+                <a:schemeClr val="tx1"/>
+              </a:solidFill>
+            </a:ln>
+          </p:spPr>
+          <p:style>
+            <a:lnRef idx="2">
+              <a:schemeClr val="accent1">
+                <a:shade val="50000"/>
+              </a:schemeClr>
+            </a:lnRef>
+            <a:fillRef idx="1">
+              <a:schemeClr val="accent1"/>
+            </a:fillRef>
+            <a:effectRef idx="0">
+              <a:schemeClr val="accent1"/>
+            </a:effectRef>
+            <a:fontRef idx="minor">
+              <a:schemeClr val="lt1"/>
+            </a:fontRef>
+          </p:style>
+          <p:txBody>
+            <a:bodyPr rtlCol="0" anchor="ctr"/>
+            <a:lstStyle/>
+            <a:p>
+              <a:pPr algn="ctr"/>
+              <a:endParaRPr lang="pt-BR"/>
+            </a:p>
+          </p:txBody>
+        </p:sp>
+        <p:sp>
+          <p:nvSpPr>
+            <p:cNvPr id="110" name="Oval 109"/>
+            <p:cNvSpPr/>
+            <p:nvPr/>
+          </p:nvSpPr>
+          <p:spPr>
+            <a:xfrm>
+              <a:off x="7713299" y="3109031"/>
+              <a:ext cx="1440000" cy="1440000"/>
+            </a:xfrm>
+            <a:prstGeom prst="ellipse">
+              <a:avLst/>
+            </a:prstGeom>
+            <a:noFill/>
+            <a:ln>
+              <a:solidFill>
+                <a:schemeClr val="tx1"/>
+              </a:solidFill>
+            </a:ln>
+          </p:spPr>
+          <p:style>
+            <a:lnRef idx="2">
+              <a:schemeClr val="accent1">
+                <a:shade val="50000"/>
+              </a:schemeClr>
+            </a:lnRef>
+            <a:fillRef idx="1">
+              <a:schemeClr val="accent1"/>
+            </a:fillRef>
+            <a:effectRef idx="0">
+              <a:schemeClr val="accent1"/>
+            </a:effectRef>
+            <a:fontRef idx="minor">
+              <a:schemeClr val="lt1"/>
+            </a:fontRef>
+          </p:style>
+          <p:txBody>
+            <a:bodyPr rtlCol="0" anchor="ctr"/>
+            <a:lstStyle/>
+            <a:p>
+              <a:pPr algn="ctr"/>
+              <a:endParaRPr lang="pt-BR"/>
+            </a:p>
+          </p:txBody>
+        </p:sp>
+        <p:sp>
+          <p:nvSpPr>
+            <p:cNvPr id="111" name="Oval 110"/>
+            <p:cNvSpPr/>
+            <p:nvPr/>
+          </p:nvSpPr>
+          <p:spPr>
+            <a:xfrm>
+              <a:off x="7893299" y="3289031"/>
+              <a:ext cx="1080000" cy="1080000"/>
+            </a:xfrm>
+            <a:prstGeom prst="ellipse">
+              <a:avLst/>
+            </a:prstGeom>
+            <a:noFill/>
+            <a:ln>
+              <a:solidFill>
+                <a:schemeClr val="tx1"/>
+              </a:solidFill>
+            </a:ln>
+          </p:spPr>
+          <p:style>
+            <a:lnRef idx="2">
+              <a:schemeClr val="accent1">
+                <a:shade val="50000"/>
+              </a:schemeClr>
+            </a:lnRef>
+            <a:fillRef idx="1">
+              <a:schemeClr val="accent1"/>
+            </a:fillRef>
+            <a:effectRef idx="0">
+              <a:schemeClr val="accent1"/>
+            </a:effectRef>
+            <a:fontRef idx="minor">
+              <a:schemeClr val="lt1"/>
+            </a:fontRef>
+          </p:style>
+          <p:txBody>
+            <a:bodyPr rtlCol="0" anchor="ctr"/>
+            <a:lstStyle/>
+            <a:p>
+              <a:pPr algn="ctr"/>
+              <a:endParaRPr lang="pt-BR"/>
+            </a:p>
+          </p:txBody>
+        </p:sp>
+        <p:sp>
+          <p:nvSpPr>
+            <p:cNvPr id="112" name="Oval 111"/>
+            <p:cNvSpPr/>
+            <p:nvPr/>
+          </p:nvSpPr>
+          <p:spPr>
+            <a:xfrm>
+              <a:off x="8073299" y="3469031"/>
+              <a:ext cx="720000" cy="720000"/>
+            </a:xfrm>
+            <a:prstGeom prst="ellipse">
+              <a:avLst/>
+            </a:prstGeom>
+            <a:noFill/>
+            <a:ln>
+              <a:solidFill>
+                <a:schemeClr val="tx1"/>
+              </a:solidFill>
+            </a:ln>
+          </p:spPr>
+          <p:style>
+            <a:lnRef idx="2">
+              <a:schemeClr val="accent1">
+                <a:shade val="50000"/>
+              </a:schemeClr>
+            </a:lnRef>
+            <a:fillRef idx="1">
+              <a:schemeClr val="accent1"/>
+            </a:fillRef>
+            <a:effectRef idx="0">
+              <a:schemeClr val="accent1"/>
+            </a:effectRef>
+            <a:fontRef idx="minor">
+              <a:schemeClr val="lt1"/>
+            </a:fontRef>
+          </p:style>
+          <p:txBody>
+            <a:bodyPr rtlCol="0" anchor="ctr"/>
+            <a:lstStyle/>
+            <a:p>
+              <a:pPr algn="ctr"/>
+              <a:endParaRPr lang="pt-BR"/>
+            </a:p>
+          </p:txBody>
+        </p:sp>
+        <p:sp>
+          <p:nvSpPr>
+            <p:cNvPr id="113" name="Oval 112"/>
+            <p:cNvSpPr/>
+            <p:nvPr/>
+          </p:nvSpPr>
+          <p:spPr>
+            <a:xfrm>
+              <a:off x="8253299" y="3649031"/>
+              <a:ext cx="360000" cy="360000"/>
+            </a:xfrm>
+            <a:prstGeom prst="ellipse">
+              <a:avLst/>
+            </a:prstGeom>
+            <a:noFill/>
+            <a:ln>
+              <a:solidFill>
+                <a:schemeClr val="tx1"/>
+              </a:solidFill>
+            </a:ln>
+          </p:spPr>
+          <p:style>
+            <a:lnRef idx="2">
+              <a:schemeClr val="accent1">
+                <a:shade val="50000"/>
+              </a:schemeClr>
+            </a:lnRef>
+            <a:fillRef idx="1">
+              <a:schemeClr val="accent1"/>
+            </a:fillRef>
+            <a:effectRef idx="0">
+              <a:schemeClr val="accent1"/>
+            </a:effectRef>
+            <a:fontRef idx="minor">
+              <a:schemeClr val="lt1"/>
+            </a:fontRef>
+          </p:style>
+          <p:txBody>
+            <a:bodyPr rtlCol="0" anchor="ctr"/>
+            <a:lstStyle/>
+            <a:p>
+              <a:pPr algn="ctr"/>
+              <a:endParaRPr lang="pt-BR"/>
+            </a:p>
+          </p:txBody>
+        </p:sp>
+        <p:sp>
+          <p:nvSpPr>
+            <p:cNvPr id="114" name="Multiply 113"/>
+            <p:cNvSpPr>
+              <a:spLocks noChangeAspect="1"/>
+            </p:cNvSpPr>
+            <p:nvPr/>
+          </p:nvSpPr>
+          <p:spPr>
+            <a:xfrm>
+              <a:off x="8349614" y="3734666"/>
+              <a:ext cx="158298" cy="180000"/>
+            </a:xfrm>
+            <a:prstGeom prst="mathMultiply">
+              <a:avLst/>
+            </a:prstGeom>
+            <a:solidFill>
+              <a:srgbClr val="FF0000"/>
+            </a:solidFill>
+            <a:ln w="3175">
+              <a:solidFill>
+                <a:schemeClr val="tx1"/>
+              </a:solidFill>
+            </a:ln>
+          </p:spPr>
+          <p:style>
+            <a:lnRef idx="2">
+              <a:schemeClr val="accent1">
+                <a:shade val="50000"/>
+              </a:schemeClr>
+            </a:lnRef>
+            <a:fillRef idx="1">
+              <a:schemeClr val="accent1"/>
+            </a:fillRef>
+            <a:effectRef idx="0">
+              <a:schemeClr val="accent1"/>
+            </a:effectRef>
+            <a:fontRef idx="minor">
+              <a:schemeClr val="lt1"/>
+            </a:fontRef>
+          </p:style>
+          <p:txBody>
+            <a:bodyPr rtlCol="0" anchor="ctr"/>
+            <a:lstStyle/>
+            <a:p>
+              <a:pPr algn="ctr"/>
+              <a:endParaRPr lang="pt-BR"/>
+            </a:p>
+          </p:txBody>
+        </p:sp>
+        <p:cxnSp>
+          <p:nvCxnSpPr>
+            <p:cNvPr id="119" name="Straight Connector 118"/>
+            <p:cNvCxnSpPr/>
+            <p:nvPr/>
+          </p:nvCxnSpPr>
+          <p:spPr>
+            <a:xfrm flipH="1">
+              <a:off x="7936368" y="4340403"/>
+              <a:ext cx="136931" cy="180000"/>
+            </a:xfrm>
+            <a:prstGeom prst="line">
+              <a:avLst/>
+            </a:prstGeom>
+            <a:ln w="12700">
+              <a:solidFill>
+                <a:schemeClr val="tx1"/>
+              </a:solidFill>
+              <a:prstDash val="dash"/>
+            </a:ln>
+          </p:spPr>
+          <p:style>
+            <a:lnRef idx="1">
+              <a:schemeClr val="accent1"/>
+            </a:lnRef>
+            <a:fillRef idx="0">
+              <a:schemeClr val="accent1"/>
+            </a:fillRef>
+            <a:effectRef idx="0">
+              <a:schemeClr val="accent1"/>
+            </a:effectRef>
+            <a:fontRef idx="minor">
+              <a:schemeClr val="tx1"/>
+            </a:fontRef>
+          </p:style>
+        </p:cxnSp>
+        <p:cxnSp>
+          <p:nvCxnSpPr>
+            <p:cNvPr id="121" name="Straight Connector 120"/>
+            <p:cNvCxnSpPr/>
+            <p:nvPr/>
+          </p:nvCxnSpPr>
+          <p:spPr>
+            <a:xfrm flipH="1">
+              <a:off x="8074119" y="4165165"/>
+              <a:ext cx="153100" cy="175266"/>
+            </a:xfrm>
+            <a:prstGeom prst="line">
+              <a:avLst/>
+            </a:prstGeom>
+            <a:ln w="12700">
+              <a:solidFill>
+                <a:schemeClr val="tx1"/>
+              </a:solidFill>
+              <a:prstDash val="dash"/>
+            </a:ln>
+          </p:spPr>
+          <p:style>
+            <a:lnRef idx="1">
+              <a:schemeClr val="accent1"/>
+            </a:lnRef>
+            <a:fillRef idx="0">
+              <a:schemeClr val="accent1"/>
+            </a:fillRef>
+            <a:effectRef idx="0">
+              <a:schemeClr val="accent1"/>
+            </a:effectRef>
+            <a:fontRef idx="minor">
+              <a:schemeClr val="tx1"/>
+            </a:fontRef>
+          </p:style>
+        </p:cxnSp>
+        <p:cxnSp>
+          <p:nvCxnSpPr>
+            <p:cNvPr id="123" name="Straight Connector 122"/>
+            <p:cNvCxnSpPr/>
+            <p:nvPr/>
+          </p:nvCxnSpPr>
+          <p:spPr>
+            <a:xfrm flipH="1">
+              <a:off x="8216880" y="4030041"/>
+              <a:ext cx="86539" cy="150678"/>
+            </a:xfrm>
+            <a:prstGeom prst="line">
+              <a:avLst/>
+            </a:prstGeom>
+            <a:ln w="12700">
+              <a:solidFill>
+                <a:schemeClr val="tx1"/>
+              </a:solidFill>
+              <a:prstDash val="dash"/>
+            </a:ln>
+          </p:spPr>
+          <p:style>
+            <a:lnRef idx="1">
+              <a:schemeClr val="accent1"/>
+            </a:lnRef>
+            <a:fillRef idx="0">
+              <a:schemeClr val="accent1"/>
+            </a:fillRef>
+            <a:effectRef idx="0">
+              <a:schemeClr val="accent1"/>
+            </a:effectRef>
+            <a:fontRef idx="minor">
+              <a:schemeClr val="tx1"/>
+            </a:fontRef>
+          </p:style>
+        </p:cxnSp>
+        <p:cxnSp>
+          <p:nvCxnSpPr>
+            <p:cNvPr id="126" name="Straight Connector 125"/>
+            <p:cNvCxnSpPr/>
+            <p:nvPr/>
+          </p:nvCxnSpPr>
+          <p:spPr>
+            <a:xfrm flipH="1">
+              <a:off x="8304826" y="3915692"/>
+              <a:ext cx="65154" cy="112507"/>
+            </a:xfrm>
+            <a:prstGeom prst="line">
+              <a:avLst/>
+            </a:prstGeom>
+            <a:ln w="12700">
+              <a:solidFill>
+                <a:schemeClr val="tx1"/>
+              </a:solidFill>
+              <a:prstDash val="dash"/>
+            </a:ln>
+          </p:spPr>
+          <p:style>
+            <a:lnRef idx="1">
+              <a:schemeClr val="accent1"/>
+            </a:lnRef>
+            <a:fillRef idx="0">
+              <a:schemeClr val="accent1"/>
+            </a:fillRef>
+            <a:effectRef idx="0">
+              <a:schemeClr val="accent1"/>
+            </a:effectRef>
+            <a:fontRef idx="minor">
+              <a:schemeClr val="tx1"/>
+            </a:fontRef>
+          </p:style>
+        </p:cxnSp>
+        <p:cxnSp>
+          <p:nvCxnSpPr>
+            <p:cNvPr id="128" name="Straight Connector 127"/>
+            <p:cNvCxnSpPr/>
+            <p:nvPr/>
+          </p:nvCxnSpPr>
+          <p:spPr>
+            <a:xfrm flipH="1">
+              <a:off x="8368145" y="3829031"/>
+              <a:ext cx="65154" cy="92178"/>
+            </a:xfrm>
+            <a:prstGeom prst="line">
+              <a:avLst/>
+            </a:prstGeom>
+            <a:ln w="12700">
+              <a:solidFill>
+                <a:schemeClr val="tx1"/>
+              </a:solidFill>
+              <a:prstDash val="dash"/>
+            </a:ln>
+          </p:spPr>
+          <p:style>
+            <a:lnRef idx="1">
+              <a:schemeClr val="accent1"/>
+            </a:lnRef>
+            <a:fillRef idx="0">
+              <a:schemeClr val="accent1"/>
+            </a:fillRef>
+            <a:effectRef idx="0">
+              <a:schemeClr val="accent1"/>
+            </a:effectRef>
+            <a:fontRef idx="minor">
+              <a:schemeClr val="tx1"/>
+            </a:fontRef>
+          </p:style>
+        </p:cxnSp>
+        <p:sp>
+          <p:nvSpPr>
+            <p:cNvPr id="131" name="Multiply 130"/>
+            <p:cNvSpPr>
+              <a:spLocks noChangeAspect="1"/>
+            </p:cNvSpPr>
+            <p:nvPr/>
+          </p:nvSpPr>
+          <p:spPr>
+            <a:xfrm>
+              <a:off x="7733351" y="4634932"/>
+              <a:ext cx="72817" cy="82800"/>
+            </a:xfrm>
+            <a:prstGeom prst="mathMultiply">
+              <a:avLst/>
+            </a:prstGeom>
+            <a:solidFill>
+              <a:srgbClr val="00B0F0"/>
+            </a:solidFill>
+            <a:ln w="3175">
+              <a:solidFill>
+                <a:schemeClr val="tx1"/>
+              </a:solidFill>
+            </a:ln>
+          </p:spPr>
+          <p:style>
+            <a:lnRef idx="2">
+              <a:schemeClr val="accent1">
+                <a:shade val="50000"/>
+              </a:schemeClr>
+            </a:lnRef>
+            <a:fillRef idx="1">
+              <a:schemeClr val="accent1"/>
+            </a:fillRef>
+            <a:effectRef idx="0">
+              <a:schemeClr val="accent1"/>
+            </a:effectRef>
+            <a:fontRef idx="minor">
+              <a:schemeClr val="lt1"/>
+            </a:fontRef>
+          </p:style>
+          <p:txBody>
+            <a:bodyPr rtlCol="0" anchor="ctr"/>
+            <a:lstStyle/>
+            <a:p>
+              <a:pPr algn="ctr"/>
+              <a:endParaRPr lang="pt-BR"/>
+            </a:p>
+          </p:txBody>
+        </p:sp>
+        <p:cxnSp>
+          <p:nvCxnSpPr>
+            <p:cNvPr id="115" name="Straight Connector 114"/>
+            <p:cNvCxnSpPr/>
+            <p:nvPr/>
+          </p:nvCxnSpPr>
+          <p:spPr>
+            <a:xfrm flipH="1">
+              <a:off x="7750018" y="4513680"/>
+              <a:ext cx="193832" cy="182857"/>
+            </a:xfrm>
+            <a:prstGeom prst="line">
+              <a:avLst/>
+            </a:prstGeom>
+            <a:ln w="12700">
+              <a:solidFill>
+                <a:schemeClr val="tx1"/>
+              </a:solidFill>
+              <a:prstDash val="dash"/>
+            </a:ln>
+          </p:spPr>
+          <p:style>
+            <a:lnRef idx="1">
+              <a:schemeClr val="accent1"/>
+            </a:lnRef>
+            <a:fillRef idx="0">
+              <a:schemeClr val="accent1"/>
+            </a:fillRef>
+            <a:effectRef idx="0">
+              <a:schemeClr val="accent1"/>
+            </a:effectRef>
+            <a:fontRef idx="minor">
+              <a:schemeClr val="tx1"/>
+            </a:fontRef>
+          </p:style>
+        </p:cxnSp>
+        <p:sp>
+          <p:nvSpPr>
+            <p:cNvPr id="132" name="Multiply 131"/>
+            <p:cNvSpPr>
+              <a:spLocks noChangeAspect="1"/>
+            </p:cNvSpPr>
+            <p:nvPr/>
+          </p:nvSpPr>
+          <p:spPr>
+            <a:xfrm>
+              <a:off x="7907441" y="4469956"/>
+              <a:ext cx="72817" cy="82800"/>
+            </a:xfrm>
+            <a:prstGeom prst="mathMultiply">
+              <a:avLst/>
+            </a:prstGeom>
+            <a:solidFill>
+              <a:srgbClr val="00B0F0"/>
+            </a:solidFill>
+            <a:ln w="3175">
+              <a:solidFill>
+                <a:schemeClr val="tx1"/>
+              </a:solidFill>
+            </a:ln>
+          </p:spPr>
+          <p:style>
+            <a:lnRef idx="2">
+              <a:schemeClr val="accent1">
+                <a:shade val="50000"/>
+              </a:schemeClr>
+            </a:lnRef>
+            <a:fillRef idx="1">
+              <a:schemeClr val="accent1"/>
+            </a:fillRef>
+            <a:effectRef idx="0">
+              <a:schemeClr val="accent1"/>
+            </a:effectRef>
+            <a:fontRef idx="minor">
+              <a:schemeClr val="lt1"/>
+            </a:fontRef>
+          </p:style>
+          <p:txBody>
+            <a:bodyPr rtlCol="0" anchor="ctr"/>
+            <a:lstStyle/>
+            <a:p>
+              <a:pPr algn="ctr"/>
+              <a:endParaRPr lang="pt-BR"/>
+            </a:p>
+          </p:txBody>
+        </p:sp>
+        <p:sp>
+          <p:nvSpPr>
+            <p:cNvPr id="133" name="Multiply 132"/>
+            <p:cNvSpPr>
+              <a:spLocks noChangeAspect="1"/>
+            </p:cNvSpPr>
+            <p:nvPr/>
+          </p:nvSpPr>
+          <p:spPr>
+            <a:xfrm>
+              <a:off x="7991128" y="4358555"/>
+              <a:ext cx="72817" cy="82800"/>
+            </a:xfrm>
+            <a:prstGeom prst="mathMultiply">
+              <a:avLst/>
+            </a:prstGeom>
+            <a:solidFill>
+              <a:srgbClr val="00B0F0"/>
+            </a:solidFill>
+            <a:ln w="3175">
+              <a:solidFill>
+                <a:schemeClr val="tx1"/>
+              </a:solidFill>
+            </a:ln>
+          </p:spPr>
+          <p:style>
+            <a:lnRef idx="2">
+              <a:schemeClr val="accent1">
+                <a:shade val="50000"/>
+              </a:schemeClr>
+            </a:lnRef>
+            <a:fillRef idx="1">
+              <a:schemeClr val="accent1"/>
+            </a:fillRef>
+            <a:effectRef idx="0">
+              <a:schemeClr val="accent1"/>
+            </a:effectRef>
+            <a:fontRef idx="minor">
+              <a:schemeClr val="lt1"/>
+            </a:fontRef>
+          </p:style>
+          <p:txBody>
+            <a:bodyPr rtlCol="0" anchor="ctr"/>
+            <a:lstStyle/>
+            <a:p>
+              <a:pPr algn="ctr"/>
+              <a:endParaRPr lang="pt-BR"/>
+            </a:p>
+          </p:txBody>
+        </p:sp>
+        <p:sp>
+          <p:nvSpPr>
+            <p:cNvPr id="134" name="Multiply 133"/>
+            <p:cNvSpPr>
+              <a:spLocks noChangeAspect="1"/>
+            </p:cNvSpPr>
+            <p:nvPr/>
+          </p:nvSpPr>
+          <p:spPr>
+            <a:xfrm>
+              <a:off x="8073299" y="4257603"/>
+              <a:ext cx="72817" cy="82800"/>
+            </a:xfrm>
+            <a:prstGeom prst="mathMultiply">
+              <a:avLst/>
+            </a:prstGeom>
+            <a:solidFill>
+              <a:srgbClr val="00B0F0"/>
+            </a:solidFill>
+            <a:ln w="3175">
+              <a:solidFill>
+                <a:schemeClr val="tx1"/>
+              </a:solidFill>
+            </a:ln>
+          </p:spPr>
+          <p:style>
+            <a:lnRef idx="2">
+              <a:schemeClr val="accent1">
+                <a:shade val="50000"/>
+              </a:schemeClr>
+            </a:lnRef>
+            <a:fillRef idx="1">
+              <a:schemeClr val="accent1"/>
+            </a:fillRef>
+            <a:effectRef idx="0">
+              <a:schemeClr val="accent1"/>
+            </a:effectRef>
+            <a:fontRef idx="minor">
+              <a:schemeClr val="lt1"/>
+            </a:fontRef>
+          </p:style>
+          <p:txBody>
+            <a:bodyPr rtlCol="0" anchor="ctr"/>
+            <a:lstStyle/>
+            <a:p>
+              <a:pPr algn="ctr"/>
+              <a:endParaRPr lang="pt-BR"/>
+            </a:p>
+          </p:txBody>
+        </p:sp>
+        <p:sp>
+          <p:nvSpPr>
+            <p:cNvPr id="135" name="Multiply 134"/>
+            <p:cNvSpPr>
+              <a:spLocks noChangeAspect="1"/>
+            </p:cNvSpPr>
+            <p:nvPr/>
+          </p:nvSpPr>
+          <p:spPr>
+            <a:xfrm>
+              <a:off x="8300077" y="3920332"/>
+              <a:ext cx="72817" cy="82800"/>
+            </a:xfrm>
+            <a:prstGeom prst="mathMultiply">
+              <a:avLst/>
+            </a:prstGeom>
+            <a:solidFill>
+              <a:srgbClr val="00B0F0"/>
+            </a:solidFill>
+            <a:ln w="3175">
+              <a:solidFill>
+                <a:schemeClr val="tx1"/>
+              </a:solidFill>
+            </a:ln>
+          </p:spPr>
+          <p:style>
+            <a:lnRef idx="2">
+              <a:schemeClr val="accent1">
+                <a:shade val="50000"/>
+              </a:schemeClr>
+            </a:lnRef>
+            <a:fillRef idx="1">
+              <a:schemeClr val="accent1"/>
+            </a:fillRef>
+            <a:effectRef idx="0">
+              <a:schemeClr val="accent1"/>
+            </a:effectRef>
+            <a:fontRef idx="minor">
+              <a:schemeClr val="lt1"/>
+            </a:fontRef>
+          </p:style>
+          <p:txBody>
+            <a:bodyPr rtlCol="0" anchor="ctr"/>
+            <a:lstStyle/>
+            <a:p>
+              <a:pPr algn="ctr"/>
+              <a:endParaRPr lang="pt-BR"/>
+            </a:p>
+          </p:txBody>
+        </p:sp>
+        <p:sp>
+          <p:nvSpPr>
+            <p:cNvPr id="154" name="Multiply 153"/>
+            <p:cNvSpPr>
+              <a:spLocks noChangeAspect="1"/>
+            </p:cNvSpPr>
+            <p:nvPr/>
+          </p:nvSpPr>
+          <p:spPr>
+            <a:xfrm>
+              <a:off x="8175312" y="4136565"/>
+              <a:ext cx="72817" cy="82800"/>
+            </a:xfrm>
+            <a:prstGeom prst="mathMultiply">
+              <a:avLst/>
+            </a:prstGeom>
+            <a:solidFill>
+              <a:srgbClr val="00B0F0"/>
+            </a:solidFill>
+            <a:ln w="3175">
+              <a:solidFill>
+                <a:schemeClr val="tx1"/>
+              </a:solidFill>
+            </a:ln>
+          </p:spPr>
+          <p:style>
+            <a:lnRef idx="2">
+              <a:schemeClr val="accent1">
+                <a:shade val="50000"/>
+              </a:schemeClr>
+            </a:lnRef>
+            <a:fillRef idx="1">
+              <a:schemeClr val="accent1"/>
+            </a:fillRef>
+            <a:effectRef idx="0">
+              <a:schemeClr val="accent1"/>
+            </a:effectRef>
+            <a:fontRef idx="minor">
+              <a:schemeClr val="lt1"/>
+            </a:fontRef>
+          </p:style>
+          <p:txBody>
+            <a:bodyPr rtlCol="0" anchor="ctr"/>
+            <a:lstStyle/>
+            <a:p>
+              <a:pPr algn="ctr"/>
+              <a:endParaRPr lang="pt-BR"/>
+            </a:p>
+          </p:txBody>
+        </p:sp>
+        <p:sp>
+          <p:nvSpPr>
+            <p:cNvPr id="155" name="Multiply 154"/>
+            <p:cNvSpPr>
+              <a:spLocks noChangeAspect="1"/>
+            </p:cNvSpPr>
+            <p:nvPr/>
+          </p:nvSpPr>
+          <p:spPr>
+            <a:xfrm>
+              <a:off x="8241507" y="4011444"/>
+              <a:ext cx="72817" cy="82800"/>
+            </a:xfrm>
+            <a:prstGeom prst="mathMultiply">
+              <a:avLst/>
+            </a:prstGeom>
+            <a:solidFill>
+              <a:srgbClr val="00B0F0"/>
+            </a:solidFill>
+            <a:ln w="3175">
+              <a:solidFill>
+                <a:schemeClr val="tx1"/>
+              </a:solidFill>
+            </a:ln>
+          </p:spPr>
+          <p:style>
+            <a:lnRef idx="2">
+              <a:schemeClr val="accent1">
+                <a:shade val="50000"/>
+              </a:schemeClr>
+            </a:lnRef>
+            <a:fillRef idx="1">
+              <a:schemeClr val="accent1"/>
+            </a:fillRef>
+            <a:effectRef idx="0">
+              <a:schemeClr val="accent1"/>
+            </a:effectRef>
+            <a:fontRef idx="minor">
+              <a:schemeClr val="lt1"/>
+            </a:fontRef>
+          </p:style>
+          <p:txBody>
+            <a:bodyPr rtlCol="0" anchor="ctr"/>
+            <a:lstStyle/>
+            <a:p>
+              <a:pPr algn="ctr"/>
+              <a:endParaRPr lang="pt-BR"/>
+            </a:p>
+          </p:txBody>
+        </p:sp>
+        <p:cxnSp>
+          <p:nvCxnSpPr>
+            <p:cNvPr id="160" name="Straight Arrow Connector 159"/>
+            <p:cNvCxnSpPr/>
+            <p:nvPr/>
+          </p:nvCxnSpPr>
+          <p:spPr>
+            <a:xfrm>
+              <a:off x="7038874" y="2534498"/>
+              <a:ext cx="0" cy="2556000"/>
+            </a:xfrm>
+            <a:prstGeom prst="straightConnector1">
+              <a:avLst/>
+            </a:prstGeom>
+            <a:ln w="19050">
+              <a:solidFill>
+                <a:schemeClr val="tx1"/>
+              </a:solidFill>
+              <a:headEnd type="triangle" w="med" len="med"/>
+              <a:tailEnd type="none" w="med" len="med"/>
+            </a:ln>
+          </p:spPr>
+          <p:style>
+            <a:lnRef idx="1">
+              <a:schemeClr val="accent1"/>
+            </a:lnRef>
+            <a:fillRef idx="0">
+              <a:schemeClr val="accent1"/>
+            </a:fillRef>
+            <a:effectRef idx="0">
+              <a:schemeClr val="accent1"/>
+            </a:effectRef>
+            <a:fontRef idx="minor">
+              <a:schemeClr val="tx1"/>
+            </a:fontRef>
+          </p:style>
+        </p:cxnSp>
+        <p:cxnSp>
+          <p:nvCxnSpPr>
+            <p:cNvPr id="161" name="Straight Arrow Connector 160"/>
+            <p:cNvCxnSpPr/>
+            <p:nvPr/>
+          </p:nvCxnSpPr>
+          <p:spPr>
+            <a:xfrm rot="5400000">
+              <a:off x="8507912" y="3626810"/>
+              <a:ext cx="0" cy="2952000"/>
+            </a:xfrm>
+            <a:prstGeom prst="straightConnector1">
+              <a:avLst/>
+            </a:prstGeom>
+            <a:ln w="19050">
+              <a:solidFill>
+                <a:schemeClr val="tx1"/>
+              </a:solidFill>
+              <a:headEnd type="triangle" w="med" len="med"/>
+              <a:tailEnd type="none" w="med" len="med"/>
+            </a:ln>
+          </p:spPr>
+          <p:style>
+            <a:lnRef idx="1">
+              <a:schemeClr val="accent1"/>
+            </a:lnRef>
+            <a:fillRef idx="0">
+              <a:schemeClr val="accent1"/>
+            </a:fillRef>
+            <a:effectRef idx="0">
+              <a:schemeClr val="accent1"/>
+            </a:effectRef>
+            <a:fontRef idx="minor">
+              <a:schemeClr val="tx1"/>
+            </a:fontRef>
+          </p:style>
+        </p:cxnSp>
+        <mc:AlternateContent xmlns:mc="http://schemas.openxmlformats.org/markup-compatibility/2006" xmlns:a14="http://schemas.microsoft.com/office/drawing/2010/main">
+          <mc:Choice Requires="a14">
+            <p:sp>
+              <p:nvSpPr>
+                <p:cNvPr id="162" name="TextBox 161"/>
+                <p:cNvSpPr txBox="1"/>
+                <p:nvPr/>
+              </p:nvSpPr>
+              <p:spPr>
+                <a:xfrm>
+                  <a:off x="9942348" y="4892106"/>
+                  <a:ext cx="426028" cy="400110"/>
+                </a:xfrm>
+                <a:prstGeom prst="rect">
+                  <a:avLst/>
+                </a:prstGeom>
+                <a:noFill/>
+              </p:spPr>
+              <p:txBody>
+                <a:bodyPr wrap="square" rtlCol="0">
+                  <a:spAutoFit/>
+                </a:bodyPr>
+                <a:lstStyle/>
+                <a:p>
+                  <a:pPr/>
+                  <a14:m>
+                    <m:oMathPara xmlns:m="http://schemas.openxmlformats.org/officeDocument/2006/math">
+                      <m:oMathParaPr>
+                        <m:jc m:val="centerGroup"/>
+                      </m:oMathParaPr>
+                      <m:oMath xmlns:m="http://schemas.openxmlformats.org/officeDocument/2006/math">
+                        <m:sSub>
+                          <m:sSubPr>
+                            <m:ctrlPr>
+                              <a:rPr lang="pt-BR" sz="2000" i="1" smtClean="0">
+                                <a:latin typeface="Cambria Math" panose="02040503050406030204" pitchFamily="18" charset="0"/>
+                              </a:rPr>
+                            </m:ctrlPr>
+                          </m:sSubPr>
+                          <m:e>
+                            <m:r>
+                              <a:rPr lang="pt-BR" sz="2000" b="0" i="1" smtClean="0">
+                                <a:latin typeface="Cambria Math" panose="02040503050406030204" pitchFamily="18" charset="0"/>
+                              </a:rPr>
+                              <m:t>𝑎</m:t>
+                            </m:r>
+                          </m:e>
+                          <m:sub>
+                            <m:r>
+                              <a:rPr lang="pt-BR" sz="2000" b="0" i="1" smtClean="0">
+                                <a:latin typeface="Cambria Math" panose="02040503050406030204" pitchFamily="18" charset="0"/>
+                              </a:rPr>
+                              <m:t>1</m:t>
+                            </m:r>
+                          </m:sub>
+                        </m:sSub>
+                      </m:oMath>
+                    </m:oMathPara>
+                  </a14:m>
+                  <a:endParaRPr lang="pt-BR" sz="2000" dirty="0"/>
+                </a:p>
+              </p:txBody>
+            </p:sp>
+          </mc:Choice>
+          <mc:Fallback xmlns="">
+            <p:sp>
+              <p:nvSpPr>
+                <p:cNvPr id="162" name="TextBox 161"/>
+                <p:cNvSpPr txBox="1">
+                  <a:spLocks noRot="1" noChangeAspect="1" noMove="1" noResize="1" noEditPoints="1" noAdjustHandles="1" noChangeArrowheads="1" noChangeShapeType="1" noTextEdit="1"/>
+                </p:cNvSpPr>
+                <p:nvPr/>
+              </p:nvSpPr>
+              <p:spPr>
+                <a:xfrm>
+                  <a:off x="9942348" y="4892106"/>
+                  <a:ext cx="426028" cy="400110"/>
+                </a:xfrm>
+                <a:prstGeom prst="rect">
+                  <a:avLst/>
+                </a:prstGeom>
+                <a:blipFill>
+                  <a:blip r:embed="rId2"/>
+                  <a:stretch>
+                    <a:fillRect/>
+                  </a:stretch>
+                </a:blipFill>
+              </p:spPr>
+              <p:txBody>
+                <a:bodyPr/>
+                <a:lstStyle/>
+                <a:p>
+                  <a:r>
+                    <a:rPr lang="pt-BR">
+                      <a:noFill/>
+                    </a:rPr>
+                    <a:t> </a:t>
+                  </a:r>
+                </a:p>
+              </p:txBody>
+            </p:sp>
+          </mc:Fallback>
+        </mc:AlternateContent>
+        <mc:AlternateContent xmlns:mc="http://schemas.openxmlformats.org/markup-compatibility/2006" xmlns:a14="http://schemas.microsoft.com/office/drawing/2010/main">
+          <mc:Choice Requires="a14">
+            <p:sp>
+              <p:nvSpPr>
+                <p:cNvPr id="163" name="TextBox 162"/>
+                <p:cNvSpPr txBox="1"/>
+                <p:nvPr/>
+              </p:nvSpPr>
+              <p:spPr>
+                <a:xfrm>
+                  <a:off x="6818898" y="2134388"/>
+                  <a:ext cx="426028" cy="400110"/>
+                </a:xfrm>
+                <a:prstGeom prst="rect">
+                  <a:avLst/>
+                </a:prstGeom>
+                <a:noFill/>
+              </p:spPr>
+              <p:txBody>
+                <a:bodyPr wrap="square" rtlCol="0">
+                  <a:spAutoFit/>
+                </a:bodyPr>
+                <a:lstStyle/>
+                <a:p>
+                  <a:pPr/>
+                  <a14:m>
+                    <m:oMathPara xmlns:m="http://schemas.openxmlformats.org/officeDocument/2006/math">
+                      <m:oMathParaPr>
+                        <m:jc m:val="centerGroup"/>
+                      </m:oMathParaPr>
+                      <m:oMath xmlns:m="http://schemas.openxmlformats.org/officeDocument/2006/math">
+                        <m:sSub>
+                          <m:sSubPr>
+                            <m:ctrlPr>
+                              <a:rPr lang="pt-BR" sz="2000" i="1" smtClean="0">
+                                <a:latin typeface="Cambria Math" panose="02040503050406030204" pitchFamily="18" charset="0"/>
+                              </a:rPr>
+                            </m:ctrlPr>
+                          </m:sSubPr>
+                          <m:e>
+                            <m:r>
+                              <a:rPr lang="pt-BR" sz="2000" b="0" i="1" smtClean="0">
+                                <a:latin typeface="Cambria Math" panose="02040503050406030204" pitchFamily="18" charset="0"/>
+                              </a:rPr>
+                              <m:t>𝑎</m:t>
+                            </m:r>
+                          </m:e>
+                          <m:sub>
+                            <m:r>
+                              <a:rPr lang="pt-BR" sz="2000" b="0" i="1" smtClean="0">
+                                <a:latin typeface="Cambria Math" panose="02040503050406030204" pitchFamily="18" charset="0"/>
+                              </a:rPr>
+                              <m:t>2</m:t>
+                            </m:r>
+                          </m:sub>
+                        </m:sSub>
+                      </m:oMath>
+                    </m:oMathPara>
+                  </a14:m>
+                  <a:endParaRPr lang="pt-BR" sz="2000" dirty="0"/>
+                </a:p>
+              </p:txBody>
+            </p:sp>
+          </mc:Choice>
+          <mc:Fallback xmlns="">
+            <p:sp>
+              <p:nvSpPr>
+                <p:cNvPr id="163" name="TextBox 162"/>
+                <p:cNvSpPr txBox="1">
+                  <a:spLocks noRot="1" noChangeAspect="1" noMove="1" noResize="1" noEditPoints="1" noAdjustHandles="1" noChangeArrowheads="1" noChangeShapeType="1" noTextEdit="1"/>
+                </p:cNvSpPr>
+                <p:nvPr/>
+              </p:nvSpPr>
+              <p:spPr>
+                <a:xfrm>
+                  <a:off x="6818898" y="2134388"/>
+                  <a:ext cx="426028" cy="400110"/>
+                </a:xfrm>
+                <a:prstGeom prst="rect">
+                  <a:avLst/>
+                </a:prstGeom>
+                <a:blipFill>
+                  <a:blip r:embed="rId3"/>
+                  <a:stretch>
+                    <a:fillRect/>
+                  </a:stretch>
+                </a:blipFill>
+              </p:spPr>
+              <p:txBody>
+                <a:bodyPr/>
+                <a:lstStyle/>
+                <a:p>
+                  <a:r>
+                    <a:rPr lang="pt-BR">
+                      <a:noFill/>
+                    </a:rPr>
+                    <a:t> </a:t>
+                  </a:r>
+                </a:p>
+              </p:txBody>
+            </p:sp>
+          </mc:Fallback>
+        </mc:AlternateContent>
+      </p:grpSp>
+      <p:grpSp>
+        <p:nvGrpSpPr>
+          <p:cNvPr id="166" name="Group 165"/>
+          <p:cNvGrpSpPr/>
+          <p:nvPr/>
+        </p:nvGrpSpPr>
+        <p:grpSpPr>
+          <a:xfrm>
+            <a:off x="2817120" y="895312"/>
+            <a:ext cx="3539783" cy="4892060"/>
+            <a:chOff x="2817120" y="895312"/>
+            <a:chExt cx="3539783" cy="4892060"/>
+          </a:xfrm>
+        </p:grpSpPr>
+        <p:sp>
+          <p:nvSpPr>
+            <p:cNvPr id="4" name="Oval 3"/>
+            <p:cNvSpPr>
+              <a:spLocks/>
+            </p:cNvSpPr>
+            <p:nvPr/>
+          </p:nvSpPr>
+          <p:spPr>
+            <a:xfrm>
+              <a:off x="3657598" y="1683325"/>
+              <a:ext cx="1800000" cy="3600000"/>
+            </a:xfrm>
+            <a:prstGeom prst="ellipse">
+              <a:avLst/>
+            </a:prstGeom>
+            <a:noFill/>
+            <a:ln>
+              <a:solidFill>
+                <a:schemeClr val="tx1"/>
+              </a:solidFill>
+            </a:ln>
+          </p:spPr>
+          <p:style>
+            <a:lnRef idx="2">
+              <a:schemeClr val="accent1">
+                <a:shade val="50000"/>
+              </a:schemeClr>
+            </a:lnRef>
+            <a:fillRef idx="1">
+              <a:schemeClr val="accent1"/>
+            </a:fillRef>
+            <a:effectRef idx="0">
+              <a:schemeClr val="accent1"/>
+            </a:effectRef>
+            <a:fontRef idx="minor">
+              <a:schemeClr val="lt1"/>
+            </a:fontRef>
+          </p:style>
+          <p:txBody>
+            <a:bodyPr rtlCol="0" anchor="ctr"/>
+            <a:lstStyle/>
+            <a:p>
+              <a:pPr algn="ctr"/>
+              <a:endParaRPr lang="pt-BR"/>
+            </a:p>
+          </p:txBody>
+        </p:sp>
+        <p:sp>
+          <p:nvSpPr>
+            <p:cNvPr id="5" name="Oval 4"/>
+            <p:cNvSpPr/>
+            <p:nvPr/>
+          </p:nvSpPr>
+          <p:spPr>
+            <a:xfrm>
+              <a:off x="4017598" y="2042031"/>
+              <a:ext cx="1080000" cy="2880000"/>
+            </a:xfrm>
+            <a:prstGeom prst="ellipse">
+              <a:avLst/>
+            </a:prstGeom>
+            <a:noFill/>
+            <a:ln>
+              <a:solidFill>
+                <a:schemeClr val="tx1"/>
+              </a:solidFill>
+            </a:ln>
+          </p:spPr>
+          <p:style>
+            <a:lnRef idx="2">
+              <a:schemeClr val="accent1">
+                <a:shade val="50000"/>
+              </a:schemeClr>
+            </a:lnRef>
+            <a:fillRef idx="1">
+              <a:schemeClr val="accent1"/>
+            </a:fillRef>
+            <a:effectRef idx="0">
+              <a:schemeClr val="accent1"/>
+            </a:effectRef>
+            <a:fontRef idx="minor">
+              <a:schemeClr val="lt1"/>
+            </a:fontRef>
+          </p:style>
+          <p:txBody>
+            <a:bodyPr rtlCol="0" anchor="ctr"/>
+            <a:lstStyle/>
+            <a:p>
+              <a:pPr algn="ctr"/>
+              <a:endParaRPr lang="pt-BR"/>
+            </a:p>
+          </p:txBody>
+        </p:sp>
+        <p:sp>
+          <p:nvSpPr>
+            <p:cNvPr id="7" name="Oval 6"/>
+            <p:cNvSpPr/>
+            <p:nvPr/>
+          </p:nvSpPr>
+          <p:spPr>
+            <a:xfrm>
+              <a:off x="4377598" y="2402031"/>
+              <a:ext cx="360000" cy="2160000"/>
+            </a:xfrm>
+            <a:prstGeom prst="ellipse">
+              <a:avLst/>
+            </a:prstGeom>
+            <a:noFill/>
+            <a:ln>
+              <a:solidFill>
+                <a:schemeClr val="tx1"/>
+              </a:solidFill>
+            </a:ln>
+          </p:spPr>
+          <p:style>
+            <a:lnRef idx="2">
+              <a:schemeClr val="accent1">
+                <a:shade val="50000"/>
+              </a:schemeClr>
+            </a:lnRef>
+            <a:fillRef idx="1">
+              <a:schemeClr val="accent1"/>
+            </a:fillRef>
+            <a:effectRef idx="0">
+              <a:schemeClr val="accent1"/>
+            </a:effectRef>
+            <a:fontRef idx="minor">
+              <a:schemeClr val="lt1"/>
+            </a:fontRef>
+          </p:style>
+          <p:txBody>
+            <a:bodyPr rtlCol="0" anchor="ctr"/>
+            <a:lstStyle/>
+            <a:p>
+              <a:pPr algn="ctr"/>
+              <a:endParaRPr lang="pt-BR"/>
+            </a:p>
+          </p:txBody>
+        </p:sp>
+        <p:sp>
+          <p:nvSpPr>
+            <p:cNvPr id="9" name="Oval 8"/>
+            <p:cNvSpPr/>
+            <p:nvPr/>
+          </p:nvSpPr>
+          <p:spPr>
+            <a:xfrm>
+              <a:off x="4197598" y="2222031"/>
+              <a:ext cx="720000" cy="2520000"/>
+            </a:xfrm>
+            <a:prstGeom prst="ellipse">
+              <a:avLst/>
+            </a:prstGeom>
+            <a:noFill/>
+            <a:ln>
+              <a:solidFill>
+                <a:schemeClr val="tx1"/>
+              </a:solidFill>
+            </a:ln>
+          </p:spPr>
+          <p:style>
+            <a:lnRef idx="2">
+              <a:schemeClr val="accent1">
+                <a:shade val="50000"/>
+              </a:schemeClr>
+            </a:lnRef>
+            <a:fillRef idx="1">
+              <a:schemeClr val="accent1"/>
+            </a:fillRef>
+            <a:effectRef idx="0">
+              <a:schemeClr val="accent1"/>
+            </a:effectRef>
+            <a:fontRef idx="minor">
+              <a:schemeClr val="lt1"/>
+            </a:fontRef>
+          </p:style>
+          <p:txBody>
+            <a:bodyPr rtlCol="0" anchor="ctr"/>
+            <a:lstStyle/>
+            <a:p>
+              <a:pPr algn="ctr"/>
+              <a:endParaRPr lang="pt-BR"/>
+            </a:p>
+          </p:txBody>
+        </p:sp>
+        <p:sp>
+          <p:nvSpPr>
+            <p:cNvPr id="10" name="Oval 9"/>
+            <p:cNvSpPr/>
+            <p:nvPr/>
+          </p:nvSpPr>
+          <p:spPr>
+            <a:xfrm>
+              <a:off x="3837598" y="1862031"/>
+              <a:ext cx="1440000" cy="3240000"/>
+            </a:xfrm>
+            <a:prstGeom prst="ellipse">
+              <a:avLst/>
+            </a:prstGeom>
+            <a:noFill/>
+            <a:ln>
+              <a:solidFill>
+                <a:schemeClr val="tx1"/>
+              </a:solidFill>
+            </a:ln>
+          </p:spPr>
+          <p:style>
+            <a:lnRef idx="2">
+              <a:schemeClr val="accent1">
+                <a:shade val="50000"/>
+              </a:schemeClr>
+            </a:lnRef>
+            <a:fillRef idx="1">
+              <a:schemeClr val="accent1"/>
+            </a:fillRef>
+            <a:effectRef idx="0">
+              <a:schemeClr val="accent1"/>
+            </a:effectRef>
+            <a:fontRef idx="minor">
+              <a:schemeClr val="lt1"/>
+            </a:fontRef>
+          </p:style>
+          <p:txBody>
+            <a:bodyPr rtlCol="0" anchor="ctr"/>
+            <a:lstStyle/>
+            <a:p>
+              <a:pPr algn="ctr"/>
+              <a:endParaRPr lang="pt-BR"/>
+            </a:p>
+          </p:txBody>
+        </p:sp>
+        <p:sp>
+          <p:nvSpPr>
+            <p:cNvPr id="11" name="Oval 10"/>
+            <p:cNvSpPr>
+              <a:spLocks/>
+            </p:cNvSpPr>
+            <p:nvPr/>
+          </p:nvSpPr>
+          <p:spPr>
+            <a:xfrm>
+              <a:off x="3477598" y="1502031"/>
+              <a:ext cx="2160000" cy="3960000"/>
+            </a:xfrm>
+            <a:prstGeom prst="ellipse">
+              <a:avLst/>
+            </a:prstGeom>
+            <a:noFill/>
+            <a:ln>
+              <a:solidFill>
+                <a:schemeClr val="tx1"/>
+              </a:solidFill>
+            </a:ln>
+          </p:spPr>
+          <p:style>
+            <a:lnRef idx="2">
+              <a:schemeClr val="accent1">
+                <a:shade val="50000"/>
+              </a:schemeClr>
+            </a:lnRef>
+            <a:fillRef idx="1">
+              <a:schemeClr val="accent1"/>
+            </a:fillRef>
+            <a:effectRef idx="0">
+              <a:schemeClr val="accent1"/>
+            </a:effectRef>
+            <a:fontRef idx="minor">
+              <a:schemeClr val="lt1"/>
+            </a:fontRef>
+          </p:style>
+          <p:txBody>
+            <a:bodyPr rtlCol="0" anchor="ctr"/>
+            <a:lstStyle/>
+            <a:p>
+              <a:pPr algn="ctr"/>
+              <a:endParaRPr lang="pt-BR"/>
+            </a:p>
+          </p:txBody>
+        </p:sp>
+        <p:cxnSp>
+          <p:nvCxnSpPr>
+            <p:cNvPr id="103" name="Straight Connector 102"/>
+            <p:cNvCxnSpPr/>
+            <p:nvPr/>
+          </p:nvCxnSpPr>
+          <p:spPr>
+            <a:xfrm flipH="1">
+              <a:off x="4253250" y="5216278"/>
+              <a:ext cx="386493" cy="153789"/>
+            </a:xfrm>
+            <a:prstGeom prst="line">
+              <a:avLst/>
+            </a:prstGeom>
+            <a:ln w="12700">
+              <a:solidFill>
+                <a:schemeClr val="tx1"/>
+              </a:solidFill>
+              <a:prstDash val="dash"/>
+            </a:ln>
+          </p:spPr>
+          <p:style>
+            <a:lnRef idx="1">
+              <a:schemeClr val="accent1"/>
+            </a:lnRef>
+            <a:fillRef idx="0">
+              <a:schemeClr val="accent1"/>
+            </a:fillRef>
+            <a:effectRef idx="0">
+              <a:schemeClr val="accent1"/>
+            </a:effectRef>
+            <a:fontRef idx="minor">
+              <a:schemeClr val="tx1"/>
+            </a:fontRef>
+          </p:style>
+        </p:cxnSp>
+        <p:sp>
+          <p:nvSpPr>
+            <p:cNvPr id="136" name="Multiply 135"/>
+            <p:cNvSpPr>
+              <a:spLocks/>
+            </p:cNvSpPr>
+            <p:nvPr/>
+          </p:nvSpPr>
+          <p:spPr>
+            <a:xfrm>
+              <a:off x="4216841" y="5338443"/>
+              <a:ext cx="72817" cy="82800"/>
+            </a:xfrm>
+            <a:prstGeom prst="mathMultiply">
+              <a:avLst/>
+            </a:prstGeom>
+            <a:solidFill>
+              <a:srgbClr val="00B0F0"/>
+            </a:solidFill>
+            <a:ln w="3175">
+              <a:solidFill>
+                <a:schemeClr val="tx1"/>
+              </a:solidFill>
+            </a:ln>
+          </p:spPr>
+          <p:style>
+            <a:lnRef idx="2">
+              <a:schemeClr val="accent1">
+                <a:shade val="50000"/>
+              </a:schemeClr>
+            </a:lnRef>
+            <a:fillRef idx="1">
+              <a:schemeClr val="accent1"/>
+            </a:fillRef>
+            <a:effectRef idx="0">
+              <a:schemeClr val="accent1"/>
+            </a:effectRef>
+            <a:fontRef idx="minor">
+              <a:schemeClr val="lt1"/>
+            </a:fontRef>
+          </p:style>
+          <p:txBody>
+            <a:bodyPr rtlCol="0" anchor="ctr"/>
+            <a:lstStyle/>
+            <a:p>
+              <a:pPr algn="ctr"/>
+              <a:endParaRPr lang="pt-BR"/>
+            </a:p>
+          </p:txBody>
+        </p:sp>
+        <p:sp>
+          <p:nvSpPr>
+            <p:cNvPr id="137" name="Multiply 136"/>
+            <p:cNvSpPr>
+              <a:spLocks/>
+            </p:cNvSpPr>
+            <p:nvPr/>
+          </p:nvSpPr>
+          <p:spPr>
+            <a:xfrm>
+              <a:off x="4598658" y="5170600"/>
+              <a:ext cx="72817" cy="82800"/>
+            </a:xfrm>
+            <a:prstGeom prst="mathMultiply">
+              <a:avLst/>
+            </a:prstGeom>
+            <a:solidFill>
+              <a:srgbClr val="00B0F0"/>
+            </a:solidFill>
+            <a:ln w="3175">
+              <a:solidFill>
+                <a:schemeClr val="tx1"/>
+              </a:solidFill>
+            </a:ln>
+          </p:spPr>
+          <p:style>
+            <a:lnRef idx="2">
+              <a:schemeClr val="accent1">
+                <a:shade val="50000"/>
+              </a:schemeClr>
+            </a:lnRef>
+            <a:fillRef idx="1">
+              <a:schemeClr val="accent1"/>
+            </a:fillRef>
+            <a:effectRef idx="0">
+              <a:schemeClr val="accent1"/>
+            </a:effectRef>
+            <a:fontRef idx="minor">
+              <a:schemeClr val="lt1"/>
+            </a:fontRef>
+          </p:style>
+          <p:txBody>
+            <a:bodyPr rtlCol="0" anchor="ctr"/>
+            <a:lstStyle/>
+            <a:p>
+              <a:pPr algn="ctr"/>
+              <a:endParaRPr lang="pt-BR"/>
+            </a:p>
+          </p:txBody>
+        </p:sp>
+        <p:sp>
+          <p:nvSpPr>
+            <p:cNvPr id="69" name="Multiply 68"/>
+            <p:cNvSpPr>
+              <a:spLocks noChangeAspect="1"/>
+            </p:cNvSpPr>
+            <p:nvPr/>
+          </p:nvSpPr>
+          <p:spPr>
+            <a:xfrm>
+              <a:off x="4468132" y="3344554"/>
+              <a:ext cx="158298" cy="180000"/>
+            </a:xfrm>
+            <a:prstGeom prst="mathMultiply">
+              <a:avLst/>
+            </a:prstGeom>
+            <a:solidFill>
+              <a:srgbClr val="FF0000"/>
+            </a:solidFill>
+            <a:ln w="3175">
+              <a:solidFill>
+                <a:schemeClr val="tx1"/>
+              </a:solidFill>
+            </a:ln>
+          </p:spPr>
+          <p:style>
+            <a:lnRef idx="2">
+              <a:schemeClr val="accent1">
+                <a:shade val="50000"/>
+              </a:schemeClr>
+            </a:lnRef>
+            <a:fillRef idx="1">
+              <a:schemeClr val="accent1"/>
+            </a:fillRef>
+            <a:effectRef idx="0">
+              <a:schemeClr val="accent1"/>
+            </a:effectRef>
+            <a:fontRef idx="minor">
+              <a:schemeClr val="lt1"/>
+            </a:fontRef>
+          </p:style>
+          <p:txBody>
+            <a:bodyPr rtlCol="0" anchor="ctr"/>
+            <a:lstStyle/>
+            <a:p>
+              <a:pPr algn="ctr"/>
+              <a:endParaRPr lang="pt-BR"/>
+            </a:p>
+          </p:txBody>
+        </p:sp>
+        <p:cxnSp>
+          <p:nvCxnSpPr>
+            <p:cNvPr id="71" name="Straight Connector 70"/>
+            <p:cNvCxnSpPr/>
+            <p:nvPr/>
+          </p:nvCxnSpPr>
+          <p:spPr>
+            <a:xfrm flipH="1" flipV="1">
+              <a:off x="4516368" y="3611183"/>
+              <a:ext cx="73202" cy="50119"/>
+            </a:xfrm>
+            <a:prstGeom prst="line">
+              <a:avLst/>
+            </a:prstGeom>
+            <a:ln w="12700">
+              <a:solidFill>
+                <a:schemeClr val="tx1"/>
+              </a:solidFill>
+              <a:prstDash val="dash"/>
+            </a:ln>
+          </p:spPr>
+          <p:style>
+            <a:lnRef idx="1">
+              <a:schemeClr val="accent1"/>
+            </a:lnRef>
+            <a:fillRef idx="0">
+              <a:schemeClr val="accent1"/>
+            </a:fillRef>
+            <a:effectRef idx="0">
+              <a:schemeClr val="accent1"/>
+            </a:effectRef>
+            <a:fontRef idx="minor">
+              <a:schemeClr val="tx1"/>
+            </a:fontRef>
+          </p:style>
+        </p:cxnSp>
+        <p:cxnSp>
+          <p:nvCxnSpPr>
+            <p:cNvPr id="74" name="Straight Connector 73"/>
+            <p:cNvCxnSpPr/>
+            <p:nvPr/>
+          </p:nvCxnSpPr>
+          <p:spPr>
+            <a:xfrm rot="5400000" flipH="1" flipV="1">
+              <a:off x="4522774" y="3661302"/>
+              <a:ext cx="73202" cy="50119"/>
+            </a:xfrm>
+            <a:prstGeom prst="line">
+              <a:avLst/>
+            </a:prstGeom>
+            <a:ln w="12700">
+              <a:solidFill>
+                <a:schemeClr val="tx1"/>
+              </a:solidFill>
+              <a:prstDash val="dash"/>
+            </a:ln>
+          </p:spPr>
+          <p:style>
+            <a:lnRef idx="1">
+              <a:schemeClr val="accent1"/>
+            </a:lnRef>
+            <a:fillRef idx="0">
+              <a:schemeClr val="accent1"/>
+            </a:fillRef>
+            <a:effectRef idx="0">
+              <a:schemeClr val="accent1"/>
+            </a:effectRef>
+            <a:fontRef idx="minor">
+              <a:schemeClr val="tx1"/>
+            </a:fontRef>
+          </p:style>
+        </p:cxnSp>
+        <p:cxnSp>
+          <p:nvCxnSpPr>
+            <p:cNvPr id="76" name="Straight Connector 75"/>
+            <p:cNvCxnSpPr/>
+            <p:nvPr/>
+          </p:nvCxnSpPr>
+          <p:spPr>
+            <a:xfrm rot="5400000" flipH="1" flipV="1">
+              <a:off x="4540454" y="3778347"/>
+              <a:ext cx="73202" cy="50119"/>
+            </a:xfrm>
+            <a:prstGeom prst="line">
+              <a:avLst/>
+            </a:prstGeom>
+            <a:ln w="12700">
+              <a:solidFill>
+                <a:schemeClr val="tx1"/>
+              </a:solidFill>
+              <a:prstDash val="dash"/>
+            </a:ln>
+          </p:spPr>
+          <p:style>
+            <a:lnRef idx="1">
+              <a:schemeClr val="accent1"/>
+            </a:lnRef>
+            <a:fillRef idx="0">
+              <a:schemeClr val="accent1"/>
+            </a:fillRef>
+            <a:effectRef idx="0">
+              <a:schemeClr val="accent1"/>
+            </a:effectRef>
+            <a:fontRef idx="minor">
+              <a:schemeClr val="tx1"/>
+            </a:fontRef>
+          </p:style>
+        </p:cxnSp>
+        <p:cxnSp>
+          <p:nvCxnSpPr>
+            <p:cNvPr id="77" name="Straight Connector 76"/>
+            <p:cNvCxnSpPr/>
+            <p:nvPr/>
+          </p:nvCxnSpPr>
+          <p:spPr>
+            <a:xfrm rot="10800000" flipH="1" flipV="1">
+              <a:off x="4551995" y="3841032"/>
+              <a:ext cx="73202" cy="50119"/>
+            </a:xfrm>
+            <a:prstGeom prst="line">
+              <a:avLst/>
+            </a:prstGeom>
+            <a:ln w="12700">
+              <a:solidFill>
+                <a:schemeClr val="tx1"/>
+              </a:solidFill>
+              <a:prstDash val="dash"/>
+            </a:ln>
+          </p:spPr>
+          <p:style>
+            <a:lnRef idx="1">
+              <a:schemeClr val="accent1"/>
+            </a:lnRef>
+            <a:fillRef idx="0">
+              <a:schemeClr val="accent1"/>
+            </a:fillRef>
+            <a:effectRef idx="0">
+              <a:schemeClr val="accent1"/>
+            </a:effectRef>
+            <a:fontRef idx="minor">
+              <a:schemeClr val="tx1"/>
+            </a:fontRef>
+          </p:style>
+        </p:cxnSp>
+        <p:cxnSp>
+          <p:nvCxnSpPr>
+            <p:cNvPr id="78" name="Straight Connector 77"/>
+            <p:cNvCxnSpPr/>
+            <p:nvPr/>
+          </p:nvCxnSpPr>
+          <p:spPr>
+            <a:xfrm rot="5400000" flipH="1" flipV="1">
+              <a:off x="4557568" y="3898479"/>
+              <a:ext cx="73202" cy="50119"/>
+            </a:xfrm>
+            <a:prstGeom prst="line">
+              <a:avLst/>
+            </a:prstGeom>
+            <a:ln w="12700">
+              <a:solidFill>
+                <a:schemeClr val="tx1"/>
+              </a:solidFill>
+              <a:prstDash val="dash"/>
+            </a:ln>
+          </p:spPr>
+          <p:style>
+            <a:lnRef idx="1">
+              <a:schemeClr val="accent1"/>
+            </a:lnRef>
+            <a:fillRef idx="0">
+              <a:schemeClr val="accent1"/>
+            </a:fillRef>
+            <a:effectRef idx="0">
+              <a:schemeClr val="accent1"/>
+            </a:effectRef>
+            <a:fontRef idx="minor">
+              <a:schemeClr val="tx1"/>
+            </a:fontRef>
+          </p:style>
+        </p:cxnSp>
+        <p:sp>
+          <p:nvSpPr>
+            <p:cNvPr id="138" name="Multiply 137"/>
+            <p:cNvSpPr>
+              <a:spLocks noChangeAspect="1"/>
+            </p:cNvSpPr>
+            <p:nvPr/>
+          </p:nvSpPr>
+          <p:spPr>
+            <a:xfrm>
+              <a:off x="4396841" y="4994030"/>
+              <a:ext cx="72817" cy="82800"/>
+            </a:xfrm>
+            <a:prstGeom prst="mathMultiply">
+              <a:avLst/>
+            </a:prstGeom>
+            <a:solidFill>
+              <a:srgbClr val="00B0F0"/>
+            </a:solidFill>
+            <a:ln w="3175">
+              <a:solidFill>
+                <a:schemeClr val="tx1"/>
+              </a:solidFill>
+            </a:ln>
+          </p:spPr>
+          <p:style>
+            <a:lnRef idx="2">
+              <a:schemeClr val="accent1">
+                <a:shade val="50000"/>
+              </a:schemeClr>
+            </a:lnRef>
+            <a:fillRef idx="1">
+              <a:schemeClr val="accent1"/>
+            </a:fillRef>
+            <a:effectRef idx="0">
+              <a:schemeClr val="accent1"/>
+            </a:effectRef>
+            <a:fontRef idx="minor">
+              <a:schemeClr val="lt1"/>
+            </a:fontRef>
+          </p:style>
+          <p:txBody>
+            <a:bodyPr rtlCol="0" anchor="ctr"/>
+            <a:lstStyle/>
+            <a:p>
+              <a:pPr algn="ctr"/>
+              <a:endParaRPr lang="pt-BR"/>
+            </a:p>
+          </p:txBody>
+        </p:sp>
+        <p:cxnSp>
+          <p:nvCxnSpPr>
+            <p:cNvPr id="98" name="Straight Connector 97"/>
+            <p:cNvCxnSpPr/>
+            <p:nvPr/>
+          </p:nvCxnSpPr>
+          <p:spPr>
+            <a:xfrm flipV="1">
+              <a:off x="4433250" y="4936612"/>
+              <a:ext cx="145222" cy="101777"/>
+            </a:xfrm>
+            <a:prstGeom prst="line">
+              <a:avLst/>
+            </a:prstGeom>
+            <a:ln w="12700">
+              <a:solidFill>
+                <a:schemeClr val="tx1"/>
+              </a:solidFill>
+              <a:prstDash val="dash"/>
+            </a:ln>
+          </p:spPr>
+          <p:style>
+            <a:lnRef idx="1">
+              <a:schemeClr val="accent1"/>
+            </a:lnRef>
+            <a:fillRef idx="0">
+              <a:schemeClr val="accent1"/>
+            </a:fillRef>
+            <a:effectRef idx="0">
+              <a:schemeClr val="accent1"/>
+            </a:effectRef>
+            <a:fontRef idx="minor">
+              <a:schemeClr val="tx1"/>
+            </a:fontRef>
+          </p:style>
+        </p:cxnSp>
+        <p:cxnSp>
+          <p:nvCxnSpPr>
+            <p:cNvPr id="100" name="Straight Connector 99"/>
+            <p:cNvCxnSpPr/>
+            <p:nvPr/>
+          </p:nvCxnSpPr>
+          <p:spPr>
+            <a:xfrm>
+              <a:off x="4433250" y="5036924"/>
+              <a:ext cx="206493" cy="180000"/>
+            </a:xfrm>
+            <a:prstGeom prst="line">
+              <a:avLst/>
+            </a:prstGeom>
+            <a:ln w="12700">
+              <a:solidFill>
+                <a:schemeClr val="tx1"/>
+              </a:solidFill>
+              <a:prstDash val="dash"/>
+            </a:ln>
+          </p:spPr>
+          <p:style>
+            <a:lnRef idx="1">
+              <a:schemeClr val="accent1"/>
+            </a:lnRef>
+            <a:fillRef idx="0">
+              <a:schemeClr val="accent1"/>
+            </a:fillRef>
+            <a:effectRef idx="0">
+              <a:schemeClr val="accent1"/>
+            </a:effectRef>
+            <a:fontRef idx="minor">
+              <a:schemeClr val="tx1"/>
+            </a:fontRef>
+          </p:style>
+        </p:cxnSp>
+        <p:sp>
+          <p:nvSpPr>
+            <p:cNvPr id="139" name="Multiply 138"/>
+            <p:cNvSpPr>
+              <a:spLocks noChangeAspect="1"/>
+            </p:cNvSpPr>
+            <p:nvPr/>
+          </p:nvSpPr>
+          <p:spPr>
+            <a:xfrm>
+              <a:off x="4541256" y="4892106"/>
+              <a:ext cx="72817" cy="82800"/>
+            </a:xfrm>
+            <a:prstGeom prst="mathMultiply">
+              <a:avLst/>
+            </a:prstGeom>
+            <a:solidFill>
+              <a:srgbClr val="00B0F0"/>
+            </a:solidFill>
+            <a:ln w="3175">
+              <a:solidFill>
+                <a:schemeClr val="tx1"/>
+              </a:solidFill>
+            </a:ln>
+          </p:spPr>
+          <p:style>
+            <a:lnRef idx="2">
+              <a:schemeClr val="accent1">
+                <a:shade val="50000"/>
+              </a:schemeClr>
+            </a:lnRef>
+            <a:fillRef idx="1">
+              <a:schemeClr val="accent1"/>
+            </a:fillRef>
+            <a:effectRef idx="0">
+              <a:schemeClr val="accent1"/>
+            </a:effectRef>
+            <a:fontRef idx="minor">
+              <a:schemeClr val="lt1"/>
+            </a:fontRef>
+          </p:style>
+          <p:txBody>
+            <a:bodyPr rtlCol="0" anchor="ctr"/>
+            <a:lstStyle/>
+            <a:p>
+              <a:pPr algn="ctr"/>
+              <a:endParaRPr lang="pt-BR"/>
+            </a:p>
+          </p:txBody>
+        </p:sp>
+        <p:sp>
+          <p:nvSpPr>
+            <p:cNvPr id="140" name="Multiply 139"/>
+            <p:cNvSpPr>
+              <a:spLocks noChangeAspect="1"/>
+            </p:cNvSpPr>
+            <p:nvPr/>
+          </p:nvSpPr>
+          <p:spPr>
+            <a:xfrm>
+              <a:off x="4416484" y="4782417"/>
+              <a:ext cx="72817" cy="82800"/>
+            </a:xfrm>
+            <a:prstGeom prst="mathMultiply">
+              <a:avLst/>
+            </a:prstGeom>
+            <a:solidFill>
+              <a:srgbClr val="00B0F0"/>
+            </a:solidFill>
+            <a:ln w="3175">
+              <a:solidFill>
+                <a:schemeClr val="tx1"/>
+              </a:solidFill>
+            </a:ln>
+          </p:spPr>
+          <p:style>
+            <a:lnRef idx="2">
+              <a:schemeClr val="accent1">
+                <a:shade val="50000"/>
+              </a:schemeClr>
+            </a:lnRef>
+            <a:fillRef idx="1">
+              <a:schemeClr val="accent1"/>
+            </a:fillRef>
+            <a:effectRef idx="0">
+              <a:schemeClr val="accent1"/>
+            </a:effectRef>
+            <a:fontRef idx="minor">
+              <a:schemeClr val="lt1"/>
+            </a:fontRef>
+          </p:style>
+          <p:txBody>
+            <a:bodyPr rtlCol="0" anchor="ctr"/>
+            <a:lstStyle/>
+            <a:p>
+              <a:pPr algn="ctr"/>
+              <a:endParaRPr lang="pt-BR"/>
+            </a:p>
+          </p:txBody>
+        </p:sp>
+        <p:sp>
+          <p:nvSpPr>
+            <p:cNvPr id="141" name="Multiply 140"/>
+            <p:cNvSpPr>
+              <a:spLocks noChangeAspect="1"/>
+            </p:cNvSpPr>
+            <p:nvPr/>
+          </p:nvSpPr>
+          <p:spPr>
+            <a:xfrm>
+              <a:off x="4527814" y="4665846"/>
+              <a:ext cx="72817" cy="82800"/>
+            </a:xfrm>
+            <a:prstGeom prst="mathMultiply">
+              <a:avLst/>
+            </a:prstGeom>
+            <a:solidFill>
+              <a:srgbClr val="00B0F0"/>
+            </a:solidFill>
+            <a:ln w="3175">
+              <a:solidFill>
+                <a:schemeClr val="tx1"/>
+              </a:solidFill>
+            </a:ln>
+          </p:spPr>
+          <p:style>
+            <a:lnRef idx="2">
+              <a:schemeClr val="accent1">
+                <a:shade val="50000"/>
+              </a:schemeClr>
+            </a:lnRef>
+            <a:fillRef idx="1">
+              <a:schemeClr val="accent1"/>
+            </a:fillRef>
+            <a:effectRef idx="0">
+              <a:schemeClr val="accent1"/>
+            </a:effectRef>
+            <a:fontRef idx="minor">
+              <a:schemeClr val="lt1"/>
+            </a:fontRef>
+          </p:style>
+          <p:txBody>
+            <a:bodyPr rtlCol="0" anchor="ctr"/>
+            <a:lstStyle/>
+            <a:p>
+              <a:pPr algn="ctr"/>
+              <a:endParaRPr lang="pt-BR"/>
+            </a:p>
+          </p:txBody>
+        </p:sp>
+        <p:sp>
+          <p:nvSpPr>
+            <p:cNvPr id="142" name="Multiply 141"/>
+            <p:cNvSpPr>
+              <a:spLocks/>
+            </p:cNvSpPr>
+            <p:nvPr/>
+          </p:nvSpPr>
+          <p:spPr>
+            <a:xfrm>
+              <a:off x="4432482" y="4497324"/>
+              <a:ext cx="72000" cy="82800"/>
+            </a:xfrm>
+            <a:prstGeom prst="mathMultiply">
+              <a:avLst/>
+            </a:prstGeom>
+            <a:solidFill>
+              <a:srgbClr val="00B0F0"/>
+            </a:solidFill>
+            <a:ln w="3175">
+              <a:solidFill>
+                <a:schemeClr val="tx1"/>
+              </a:solidFill>
+            </a:ln>
+          </p:spPr>
+          <p:style>
+            <a:lnRef idx="2">
+              <a:schemeClr val="accent1">
+                <a:shade val="50000"/>
+              </a:schemeClr>
+            </a:lnRef>
+            <a:fillRef idx="1">
+              <a:schemeClr val="accent1"/>
+            </a:fillRef>
+            <a:effectRef idx="0">
+              <a:schemeClr val="accent1"/>
+            </a:effectRef>
+            <a:fontRef idx="minor">
+              <a:schemeClr val="lt1"/>
+            </a:fontRef>
+          </p:style>
+          <p:txBody>
+            <a:bodyPr rtlCol="0" anchor="ctr"/>
+            <a:lstStyle/>
+            <a:p>
+              <a:pPr algn="ctr"/>
+              <a:endParaRPr lang="pt-BR"/>
+            </a:p>
+          </p:txBody>
+        </p:sp>
+        <p:sp>
+          <p:nvSpPr>
+            <p:cNvPr id="143" name="Multiply 142"/>
+            <p:cNvSpPr>
+              <a:spLocks/>
+            </p:cNvSpPr>
+            <p:nvPr/>
+          </p:nvSpPr>
+          <p:spPr>
+            <a:xfrm>
+              <a:off x="4586752" y="4430025"/>
+              <a:ext cx="72000" cy="82800"/>
+            </a:xfrm>
+            <a:prstGeom prst="mathMultiply">
+              <a:avLst/>
+            </a:prstGeom>
+            <a:solidFill>
+              <a:srgbClr val="00B0F0"/>
+            </a:solidFill>
+            <a:ln w="3175">
+              <a:solidFill>
+                <a:schemeClr val="tx1"/>
+              </a:solidFill>
+            </a:ln>
+          </p:spPr>
+          <p:style>
+            <a:lnRef idx="2">
+              <a:schemeClr val="accent1">
+                <a:shade val="50000"/>
+              </a:schemeClr>
+            </a:lnRef>
+            <a:fillRef idx="1">
+              <a:schemeClr val="accent1"/>
+            </a:fillRef>
+            <a:effectRef idx="0">
+              <a:schemeClr val="accent1"/>
+            </a:effectRef>
+            <a:fontRef idx="minor">
+              <a:schemeClr val="lt1"/>
+            </a:fontRef>
+          </p:style>
+          <p:txBody>
+            <a:bodyPr rtlCol="0" anchor="ctr"/>
+            <a:lstStyle/>
+            <a:p>
+              <a:pPr algn="ctr"/>
+              <a:endParaRPr lang="pt-BR"/>
+            </a:p>
+          </p:txBody>
+        </p:sp>
+        <p:sp>
+          <p:nvSpPr>
+            <p:cNvPr id="144" name="Multiply 143"/>
+            <p:cNvSpPr>
+              <a:spLocks/>
+            </p:cNvSpPr>
+            <p:nvPr/>
+          </p:nvSpPr>
+          <p:spPr>
+            <a:xfrm>
+              <a:off x="4489301" y="4254654"/>
+              <a:ext cx="72000" cy="82800"/>
+            </a:xfrm>
+            <a:prstGeom prst="mathMultiply">
+              <a:avLst/>
+            </a:prstGeom>
+            <a:solidFill>
+              <a:srgbClr val="00B0F0"/>
+            </a:solidFill>
+            <a:ln w="3175">
+              <a:solidFill>
+                <a:schemeClr val="tx1"/>
+              </a:solidFill>
+            </a:ln>
+          </p:spPr>
+          <p:style>
+            <a:lnRef idx="2">
+              <a:schemeClr val="accent1">
+                <a:shade val="50000"/>
+              </a:schemeClr>
+            </a:lnRef>
+            <a:fillRef idx="1">
+              <a:schemeClr val="accent1"/>
+            </a:fillRef>
+            <a:effectRef idx="0">
+              <a:schemeClr val="accent1"/>
+            </a:effectRef>
+            <a:fontRef idx="minor">
+              <a:schemeClr val="lt1"/>
+            </a:fontRef>
+          </p:style>
+          <p:txBody>
+            <a:bodyPr rtlCol="0" anchor="ctr"/>
+            <a:lstStyle/>
+            <a:p>
+              <a:pPr algn="ctr"/>
+              <a:endParaRPr lang="pt-BR"/>
+            </a:p>
+          </p:txBody>
+        </p:sp>
+        <p:sp>
+          <p:nvSpPr>
+            <p:cNvPr id="145" name="Multiply 144"/>
+            <p:cNvSpPr>
+              <a:spLocks/>
+            </p:cNvSpPr>
+            <p:nvPr/>
+          </p:nvSpPr>
+          <p:spPr>
+            <a:xfrm>
+              <a:off x="4647454" y="4169248"/>
+              <a:ext cx="72000" cy="82800"/>
+            </a:xfrm>
+            <a:prstGeom prst="mathMultiply">
+              <a:avLst/>
+            </a:prstGeom>
+            <a:solidFill>
+              <a:srgbClr val="00B0F0"/>
+            </a:solidFill>
+            <a:ln w="3175">
+              <a:solidFill>
+                <a:schemeClr val="tx1"/>
+              </a:solidFill>
+            </a:ln>
+          </p:spPr>
+          <p:style>
+            <a:lnRef idx="2">
+              <a:schemeClr val="accent1">
+                <a:shade val="50000"/>
+              </a:schemeClr>
+            </a:lnRef>
+            <a:fillRef idx="1">
+              <a:schemeClr val="accent1"/>
+            </a:fillRef>
+            <a:effectRef idx="0">
+              <a:schemeClr val="accent1"/>
+            </a:effectRef>
+            <a:fontRef idx="minor">
+              <a:schemeClr val="lt1"/>
+            </a:fontRef>
+          </p:style>
+          <p:txBody>
+            <a:bodyPr rtlCol="0" anchor="ctr"/>
+            <a:lstStyle/>
+            <a:p>
+              <a:pPr algn="ctr"/>
+              <a:endParaRPr lang="pt-BR"/>
+            </a:p>
+          </p:txBody>
+        </p:sp>
+        <p:sp>
+          <p:nvSpPr>
+            <p:cNvPr id="146" name="Multiply 145"/>
+            <p:cNvSpPr>
+              <a:spLocks/>
+            </p:cNvSpPr>
+            <p:nvPr/>
+          </p:nvSpPr>
+          <p:spPr>
+            <a:xfrm>
+              <a:off x="4515354" y="4085156"/>
+              <a:ext cx="72000" cy="82800"/>
+            </a:xfrm>
+            <a:prstGeom prst="mathMultiply">
+              <a:avLst/>
+            </a:prstGeom>
+            <a:solidFill>
+              <a:srgbClr val="00B0F0"/>
+            </a:solidFill>
+            <a:ln w="3175">
+              <a:solidFill>
+                <a:schemeClr val="tx1"/>
+              </a:solidFill>
+            </a:ln>
+          </p:spPr>
+          <p:style>
+            <a:lnRef idx="2">
+              <a:schemeClr val="accent1">
+                <a:shade val="50000"/>
+              </a:schemeClr>
+            </a:lnRef>
+            <a:fillRef idx="1">
+              <a:schemeClr val="accent1"/>
+            </a:fillRef>
+            <a:effectRef idx="0">
+              <a:schemeClr val="accent1"/>
+            </a:effectRef>
+            <a:fontRef idx="minor">
+              <a:schemeClr val="lt1"/>
+            </a:fontRef>
+          </p:style>
+          <p:txBody>
+            <a:bodyPr rtlCol="0" anchor="ctr"/>
+            <a:lstStyle/>
+            <a:p>
+              <a:pPr algn="ctr"/>
+              <a:endParaRPr lang="pt-BR"/>
+            </a:p>
+          </p:txBody>
+        </p:sp>
+        <p:sp>
+          <p:nvSpPr>
+            <p:cNvPr id="147" name="Multiply 146"/>
+            <p:cNvSpPr>
+              <a:spLocks noChangeAspect="1"/>
+            </p:cNvSpPr>
+            <p:nvPr/>
+          </p:nvSpPr>
+          <p:spPr>
+            <a:xfrm>
+              <a:off x="4601229" y="3950902"/>
+              <a:ext cx="72000" cy="81871"/>
+            </a:xfrm>
+            <a:prstGeom prst="mathMultiply">
+              <a:avLst/>
+            </a:prstGeom>
+            <a:solidFill>
+              <a:srgbClr val="00B0F0"/>
+            </a:solidFill>
+            <a:ln w="3175">
+              <a:solidFill>
+                <a:schemeClr val="tx1"/>
+              </a:solidFill>
+            </a:ln>
+          </p:spPr>
+          <p:style>
+            <a:lnRef idx="2">
+              <a:schemeClr val="accent1">
+                <a:shade val="50000"/>
+              </a:schemeClr>
+            </a:lnRef>
+            <a:fillRef idx="1">
+              <a:schemeClr val="accent1"/>
+            </a:fillRef>
+            <a:effectRef idx="0">
+              <a:schemeClr val="accent1"/>
+            </a:effectRef>
+            <a:fontRef idx="minor">
+              <a:schemeClr val="lt1"/>
+            </a:fontRef>
+          </p:style>
+          <p:txBody>
+            <a:bodyPr rtlCol="0" anchor="ctr"/>
+            <a:lstStyle/>
+            <a:p>
+              <a:pPr algn="ctr"/>
+              <a:endParaRPr lang="pt-BR"/>
+            </a:p>
+          </p:txBody>
+        </p:sp>
+        <p:sp>
+          <p:nvSpPr>
+            <p:cNvPr id="148" name="Multiply 147"/>
+            <p:cNvSpPr>
+              <a:spLocks noChangeAspect="1"/>
+            </p:cNvSpPr>
+            <p:nvPr/>
+          </p:nvSpPr>
+          <p:spPr>
+            <a:xfrm>
+              <a:off x="4598029" y="3846380"/>
+              <a:ext cx="72000" cy="81871"/>
+            </a:xfrm>
+            <a:prstGeom prst="mathMultiply">
+              <a:avLst/>
+            </a:prstGeom>
+            <a:solidFill>
+              <a:srgbClr val="00B0F0"/>
+            </a:solidFill>
+            <a:ln w="3175">
+              <a:solidFill>
+                <a:schemeClr val="tx1"/>
+              </a:solidFill>
+            </a:ln>
+          </p:spPr>
+          <p:style>
+            <a:lnRef idx="2">
+              <a:schemeClr val="accent1">
+                <a:shade val="50000"/>
+              </a:schemeClr>
+            </a:lnRef>
+            <a:fillRef idx="1">
+              <a:schemeClr val="accent1"/>
+            </a:fillRef>
+            <a:effectRef idx="0">
+              <a:schemeClr val="accent1"/>
+            </a:effectRef>
+            <a:fontRef idx="minor">
+              <a:schemeClr val="lt1"/>
+            </a:fontRef>
+          </p:style>
+          <p:txBody>
+            <a:bodyPr rtlCol="0" anchor="ctr"/>
+            <a:lstStyle/>
+            <a:p>
+              <a:pPr algn="ctr"/>
+              <a:endParaRPr lang="pt-BR"/>
+            </a:p>
+          </p:txBody>
+        </p:sp>
+        <p:sp>
+          <p:nvSpPr>
+            <p:cNvPr id="149" name="Multiply 148"/>
+            <p:cNvSpPr>
+              <a:spLocks noChangeAspect="1"/>
+            </p:cNvSpPr>
+            <p:nvPr/>
+          </p:nvSpPr>
+          <p:spPr>
+            <a:xfrm>
+              <a:off x="4517694" y="3803997"/>
+              <a:ext cx="72000" cy="81871"/>
+            </a:xfrm>
+            <a:prstGeom prst="mathMultiply">
+              <a:avLst/>
+            </a:prstGeom>
+            <a:solidFill>
+              <a:srgbClr val="00B0F0"/>
+            </a:solidFill>
+            <a:ln w="3175">
+              <a:solidFill>
+                <a:schemeClr val="tx1"/>
+              </a:solidFill>
+            </a:ln>
+          </p:spPr>
+          <p:style>
+            <a:lnRef idx="2">
+              <a:schemeClr val="accent1">
+                <a:shade val="50000"/>
+              </a:schemeClr>
+            </a:lnRef>
+            <a:fillRef idx="1">
+              <a:schemeClr val="accent1"/>
+            </a:fillRef>
+            <a:effectRef idx="0">
+              <a:schemeClr val="accent1"/>
+            </a:effectRef>
+            <a:fontRef idx="minor">
+              <a:schemeClr val="lt1"/>
+            </a:fontRef>
+          </p:style>
+          <p:txBody>
+            <a:bodyPr rtlCol="0" anchor="ctr"/>
+            <a:lstStyle/>
+            <a:p>
+              <a:pPr algn="ctr"/>
+              <a:endParaRPr lang="pt-BR"/>
+            </a:p>
+          </p:txBody>
+        </p:sp>
+        <p:sp>
+          <p:nvSpPr>
+            <p:cNvPr id="150" name="Multiply 149"/>
+            <p:cNvSpPr>
+              <a:spLocks noChangeAspect="1"/>
+            </p:cNvSpPr>
+            <p:nvPr/>
+          </p:nvSpPr>
+          <p:spPr>
+            <a:xfrm>
+              <a:off x="4496498" y="3683246"/>
+              <a:ext cx="72000" cy="81871"/>
+            </a:xfrm>
+            <a:prstGeom prst="mathMultiply">
+              <a:avLst/>
+            </a:prstGeom>
+            <a:solidFill>
+              <a:srgbClr val="00B0F0"/>
+            </a:solidFill>
+            <a:ln w="3175">
+              <a:solidFill>
+                <a:schemeClr val="tx1"/>
+              </a:solidFill>
+            </a:ln>
+          </p:spPr>
+          <p:style>
+            <a:lnRef idx="2">
+              <a:schemeClr val="accent1">
+                <a:shade val="50000"/>
+              </a:schemeClr>
+            </a:lnRef>
+            <a:fillRef idx="1">
+              <a:schemeClr val="accent1"/>
+            </a:fillRef>
+            <a:effectRef idx="0">
+              <a:schemeClr val="accent1"/>
+            </a:effectRef>
+            <a:fontRef idx="minor">
+              <a:schemeClr val="lt1"/>
+            </a:fontRef>
+          </p:style>
+          <p:txBody>
+            <a:bodyPr rtlCol="0" anchor="ctr"/>
+            <a:lstStyle/>
+            <a:p>
+              <a:pPr algn="ctr"/>
+              <a:endParaRPr lang="pt-BR"/>
+            </a:p>
+          </p:txBody>
+        </p:sp>
+        <p:sp>
+          <p:nvSpPr>
+            <p:cNvPr id="151" name="Multiply 150"/>
+            <p:cNvSpPr>
+              <a:spLocks noChangeAspect="1"/>
+            </p:cNvSpPr>
+            <p:nvPr/>
+          </p:nvSpPr>
+          <p:spPr>
+            <a:xfrm>
+              <a:off x="4486717" y="3557718"/>
+              <a:ext cx="72000" cy="81871"/>
+            </a:xfrm>
+            <a:prstGeom prst="mathMultiply">
+              <a:avLst/>
+            </a:prstGeom>
+            <a:solidFill>
+              <a:srgbClr val="00B0F0"/>
+            </a:solidFill>
+            <a:ln w="3175">
+              <a:solidFill>
+                <a:schemeClr val="tx1"/>
+              </a:solidFill>
+            </a:ln>
+          </p:spPr>
+          <p:style>
+            <a:lnRef idx="2">
+              <a:schemeClr val="accent1">
+                <a:shade val="50000"/>
+              </a:schemeClr>
+            </a:lnRef>
+            <a:fillRef idx="1">
+              <a:schemeClr val="accent1"/>
+            </a:fillRef>
+            <a:effectRef idx="0">
+              <a:schemeClr val="accent1"/>
+            </a:effectRef>
+            <a:fontRef idx="minor">
+              <a:schemeClr val="lt1"/>
+            </a:fontRef>
+          </p:style>
+          <p:txBody>
+            <a:bodyPr rtlCol="0" anchor="ctr"/>
+            <a:lstStyle/>
+            <a:p>
+              <a:pPr algn="ctr"/>
+              <a:endParaRPr lang="pt-BR"/>
+            </a:p>
+          </p:txBody>
+        </p:sp>
+        <p:cxnSp>
+          <p:nvCxnSpPr>
+            <p:cNvPr id="80" name="Straight Connector 79"/>
+            <p:cNvCxnSpPr/>
+            <p:nvPr/>
+          </p:nvCxnSpPr>
+          <p:spPr>
+            <a:xfrm rot="10800000" flipH="1" flipV="1">
+              <a:off x="4569109" y="3960140"/>
+              <a:ext cx="73202" cy="50119"/>
+            </a:xfrm>
+            <a:prstGeom prst="line">
+              <a:avLst/>
+            </a:prstGeom>
+            <a:ln w="12700">
+              <a:solidFill>
+                <a:schemeClr val="tx1"/>
+              </a:solidFill>
+              <a:prstDash val="dash"/>
+            </a:ln>
+          </p:spPr>
+          <p:style>
+            <a:lnRef idx="1">
+              <a:schemeClr val="accent1"/>
+            </a:lnRef>
+            <a:fillRef idx="0">
+              <a:schemeClr val="accent1"/>
+            </a:fillRef>
+            <a:effectRef idx="0">
+              <a:schemeClr val="accent1"/>
+            </a:effectRef>
+            <a:fontRef idx="minor">
+              <a:schemeClr val="tx1"/>
+            </a:fontRef>
+          </p:style>
+        </p:cxnSp>
+        <p:cxnSp>
+          <p:nvCxnSpPr>
+            <p:cNvPr id="81" name="Straight Connector 80"/>
+            <p:cNvCxnSpPr/>
+            <p:nvPr/>
+          </p:nvCxnSpPr>
+          <p:spPr>
+            <a:xfrm flipV="1">
+              <a:off x="4551996" y="4006045"/>
+              <a:ext cx="87747" cy="124391"/>
+            </a:xfrm>
+            <a:prstGeom prst="line">
+              <a:avLst/>
+            </a:prstGeom>
+            <a:ln w="12700">
+              <a:solidFill>
+                <a:schemeClr val="tx1"/>
+              </a:solidFill>
+              <a:prstDash val="dash"/>
+            </a:ln>
+          </p:spPr>
+          <p:style>
+            <a:lnRef idx="1">
+              <a:schemeClr val="accent1"/>
+            </a:lnRef>
+            <a:fillRef idx="0">
+              <a:schemeClr val="accent1"/>
+            </a:fillRef>
+            <a:effectRef idx="0">
+              <a:schemeClr val="accent1"/>
+            </a:effectRef>
+            <a:fontRef idx="minor">
+              <a:schemeClr val="tx1"/>
+            </a:fontRef>
+          </p:style>
+        </p:cxnSp>
+        <p:cxnSp>
+          <p:nvCxnSpPr>
+            <p:cNvPr id="88" name="Straight Connector 87"/>
+            <p:cNvCxnSpPr/>
+            <p:nvPr/>
+          </p:nvCxnSpPr>
+          <p:spPr>
+            <a:xfrm rot="5400000" flipV="1">
+              <a:off x="4570316" y="4113719"/>
+              <a:ext cx="87747" cy="124391"/>
+            </a:xfrm>
+            <a:prstGeom prst="line">
+              <a:avLst/>
+            </a:prstGeom>
+            <a:ln w="12700">
+              <a:solidFill>
+                <a:schemeClr val="tx1"/>
+              </a:solidFill>
+              <a:prstDash val="dash"/>
+            </a:ln>
+          </p:spPr>
+          <p:style>
+            <a:lnRef idx="1">
+              <a:schemeClr val="accent1"/>
+            </a:lnRef>
+            <a:fillRef idx="0">
+              <a:schemeClr val="accent1"/>
+            </a:fillRef>
+            <a:effectRef idx="0">
+              <a:schemeClr val="accent1"/>
+            </a:effectRef>
+            <a:fontRef idx="minor">
+              <a:schemeClr val="tx1"/>
+            </a:fontRef>
+          </p:style>
+        </p:cxnSp>
+        <p:cxnSp>
+          <p:nvCxnSpPr>
+            <p:cNvPr id="89" name="Straight Connector 88"/>
+            <p:cNvCxnSpPr/>
+            <p:nvPr/>
+          </p:nvCxnSpPr>
+          <p:spPr>
+            <a:xfrm flipH="1">
+              <a:off x="4522717" y="4217178"/>
+              <a:ext cx="158615" cy="91964"/>
+            </a:xfrm>
+            <a:prstGeom prst="line">
+              <a:avLst/>
+            </a:prstGeom>
+            <a:ln w="12700">
+              <a:solidFill>
+                <a:schemeClr val="tx1"/>
+              </a:solidFill>
+              <a:prstDash val="dash"/>
+            </a:ln>
+          </p:spPr>
+          <p:style>
+            <a:lnRef idx="1">
+              <a:schemeClr val="accent1"/>
+            </a:lnRef>
+            <a:fillRef idx="0">
+              <a:schemeClr val="accent1"/>
+            </a:fillRef>
+            <a:effectRef idx="0">
+              <a:schemeClr val="accent1"/>
+            </a:effectRef>
+            <a:fontRef idx="minor">
+              <a:schemeClr val="tx1"/>
+            </a:fontRef>
+          </p:style>
+        </p:cxnSp>
+        <p:cxnSp>
+          <p:nvCxnSpPr>
+            <p:cNvPr id="91" name="Straight Connector 90"/>
+            <p:cNvCxnSpPr/>
+            <p:nvPr/>
+          </p:nvCxnSpPr>
+          <p:spPr>
+            <a:xfrm rot="5400000" flipH="1">
+              <a:off x="4490591" y="4331172"/>
+              <a:ext cx="158615" cy="91964"/>
+            </a:xfrm>
+            <a:prstGeom prst="line">
+              <a:avLst/>
+            </a:prstGeom>
+            <a:ln w="12700">
+              <a:solidFill>
+                <a:schemeClr val="tx1"/>
+              </a:solidFill>
+              <a:prstDash val="dash"/>
+            </a:ln>
+          </p:spPr>
+          <p:style>
+            <a:lnRef idx="1">
+              <a:schemeClr val="accent1"/>
+            </a:lnRef>
+            <a:fillRef idx="0">
+              <a:schemeClr val="accent1"/>
+            </a:fillRef>
+            <a:effectRef idx="0">
+              <a:schemeClr val="accent1"/>
+            </a:effectRef>
+            <a:fontRef idx="minor">
+              <a:schemeClr val="tx1"/>
+            </a:fontRef>
+          </p:style>
+        </p:cxnSp>
+        <p:cxnSp>
+          <p:nvCxnSpPr>
+            <p:cNvPr id="92" name="Straight Connector 91"/>
+            <p:cNvCxnSpPr/>
+            <p:nvPr/>
+          </p:nvCxnSpPr>
+          <p:spPr>
+            <a:xfrm rot="10800000" flipH="1">
+              <a:off x="4466582" y="4460600"/>
+              <a:ext cx="158615" cy="91964"/>
+            </a:xfrm>
+            <a:prstGeom prst="line">
+              <a:avLst/>
+            </a:prstGeom>
+            <a:ln w="12700">
+              <a:solidFill>
+                <a:schemeClr val="tx1"/>
+              </a:solidFill>
+              <a:prstDash val="dash"/>
+            </a:ln>
+          </p:spPr>
+          <p:style>
+            <a:lnRef idx="1">
+              <a:schemeClr val="accent1"/>
+            </a:lnRef>
+            <a:fillRef idx="0">
+              <a:schemeClr val="accent1"/>
+            </a:fillRef>
+            <a:effectRef idx="0">
+              <a:schemeClr val="accent1"/>
+            </a:effectRef>
+            <a:fontRef idx="minor">
+              <a:schemeClr val="tx1"/>
+            </a:fontRef>
+          </p:style>
+        </p:cxnSp>
+        <p:cxnSp>
+          <p:nvCxnSpPr>
+            <p:cNvPr id="93" name="Straight Connector 92"/>
+            <p:cNvCxnSpPr/>
+            <p:nvPr/>
+          </p:nvCxnSpPr>
+          <p:spPr>
+            <a:xfrm rot="16200000" flipH="1">
+              <a:off x="4438387" y="4578734"/>
+              <a:ext cx="158615" cy="91964"/>
+            </a:xfrm>
+            <a:prstGeom prst="line">
+              <a:avLst/>
+            </a:prstGeom>
+            <a:ln w="12700">
+              <a:solidFill>
+                <a:schemeClr val="tx1"/>
+              </a:solidFill>
+              <a:prstDash val="dash"/>
+            </a:ln>
+          </p:spPr>
+          <p:style>
+            <a:lnRef idx="1">
+              <a:schemeClr val="accent1"/>
+            </a:lnRef>
+            <a:fillRef idx="0">
+              <a:schemeClr val="accent1"/>
+            </a:fillRef>
+            <a:effectRef idx="0">
+              <a:schemeClr val="accent1"/>
+            </a:effectRef>
+            <a:fontRef idx="minor">
+              <a:schemeClr val="tx1"/>
+            </a:fontRef>
+          </p:style>
+        </p:cxnSp>
+        <p:cxnSp>
+          <p:nvCxnSpPr>
+            <p:cNvPr id="95" name="Straight Connector 94"/>
+            <p:cNvCxnSpPr/>
+            <p:nvPr/>
+          </p:nvCxnSpPr>
+          <p:spPr>
+            <a:xfrm flipV="1">
+              <a:off x="4460231" y="4699147"/>
+              <a:ext cx="105160" cy="126727"/>
+            </a:xfrm>
+            <a:prstGeom prst="line">
+              <a:avLst/>
+            </a:prstGeom>
+            <a:ln w="12700">
+              <a:solidFill>
+                <a:schemeClr val="tx1"/>
+              </a:solidFill>
+              <a:prstDash val="dash"/>
+            </a:ln>
+          </p:spPr>
+          <p:style>
+            <a:lnRef idx="1">
+              <a:schemeClr val="accent1"/>
+            </a:lnRef>
+            <a:fillRef idx="0">
+              <a:schemeClr val="accent1"/>
+            </a:fillRef>
+            <a:effectRef idx="0">
+              <a:schemeClr val="accent1"/>
+            </a:effectRef>
+            <a:fontRef idx="minor">
+              <a:schemeClr val="tx1"/>
+            </a:fontRef>
+          </p:style>
+        </p:cxnSp>
+        <p:cxnSp>
+          <p:nvCxnSpPr>
+            <p:cNvPr id="97" name="Straight Connector 96"/>
+            <p:cNvCxnSpPr/>
+            <p:nvPr/>
+          </p:nvCxnSpPr>
+          <p:spPr>
+            <a:xfrm rot="5400000" flipV="1">
+              <a:off x="4470137" y="4820883"/>
+              <a:ext cx="105160" cy="126727"/>
+            </a:xfrm>
+            <a:prstGeom prst="line">
+              <a:avLst/>
+            </a:prstGeom>
+            <a:ln w="12700">
+              <a:solidFill>
+                <a:schemeClr val="tx1"/>
+              </a:solidFill>
+              <a:prstDash val="dash"/>
+            </a:ln>
+          </p:spPr>
+          <p:style>
+            <a:lnRef idx="1">
+              <a:schemeClr val="accent1"/>
+            </a:lnRef>
+            <a:fillRef idx="0">
+              <a:schemeClr val="accent1"/>
+            </a:fillRef>
+            <a:effectRef idx="0">
+              <a:schemeClr val="accent1"/>
+            </a:effectRef>
+            <a:fontRef idx="minor">
+              <a:schemeClr val="tx1"/>
+            </a:fontRef>
+          </p:style>
+        </p:cxnSp>
+        <p:cxnSp>
+          <p:nvCxnSpPr>
+            <p:cNvPr id="66" name="Straight Connector 65"/>
+            <p:cNvCxnSpPr/>
+            <p:nvPr/>
+          </p:nvCxnSpPr>
+          <p:spPr>
+            <a:xfrm flipV="1">
+              <a:off x="4513192" y="3490807"/>
+              <a:ext cx="42247" cy="120375"/>
+            </a:xfrm>
+            <a:prstGeom prst="line">
+              <a:avLst/>
+            </a:prstGeom>
+            <a:ln w="12700">
+              <a:solidFill>
+                <a:schemeClr val="tx1"/>
+              </a:solidFill>
+              <a:prstDash val="dash"/>
+            </a:ln>
+          </p:spPr>
+          <p:style>
+            <a:lnRef idx="1">
+              <a:schemeClr val="accent1"/>
+            </a:lnRef>
+            <a:fillRef idx="0">
+              <a:schemeClr val="accent1"/>
+            </a:fillRef>
+            <a:effectRef idx="0">
+              <a:schemeClr val="accent1"/>
+            </a:effectRef>
+            <a:fontRef idx="minor">
+              <a:schemeClr val="tx1"/>
+            </a:fontRef>
+          </p:style>
+        </p:cxnSp>
+        <p:cxnSp>
+          <p:nvCxnSpPr>
+            <p:cNvPr id="75" name="Straight Connector 74"/>
+            <p:cNvCxnSpPr/>
+            <p:nvPr/>
+          </p:nvCxnSpPr>
+          <p:spPr>
+            <a:xfrm rot="10800000" flipH="1" flipV="1">
+              <a:off x="4527096" y="3725595"/>
+              <a:ext cx="73202" cy="50119"/>
+            </a:xfrm>
+            <a:prstGeom prst="line">
+              <a:avLst/>
+            </a:prstGeom>
+            <a:ln w="12700">
+              <a:solidFill>
+                <a:schemeClr val="tx1"/>
+              </a:solidFill>
+              <a:prstDash val="dash"/>
+            </a:ln>
+          </p:spPr>
+          <p:style>
+            <a:lnRef idx="1">
+              <a:schemeClr val="accent1"/>
+            </a:lnRef>
+            <a:fillRef idx="0">
+              <a:schemeClr val="accent1"/>
+            </a:fillRef>
+            <a:effectRef idx="0">
+              <a:schemeClr val="accent1"/>
+            </a:effectRef>
+            <a:fontRef idx="minor">
+              <a:schemeClr val="tx1"/>
+            </a:fontRef>
+          </p:style>
+        </p:cxnSp>
+        <p:sp>
+          <p:nvSpPr>
+            <p:cNvPr id="152" name="Multiply 151"/>
+            <p:cNvSpPr>
+              <a:spLocks noChangeAspect="1"/>
+            </p:cNvSpPr>
+            <p:nvPr/>
+          </p:nvSpPr>
+          <p:spPr>
+            <a:xfrm>
+              <a:off x="4568482" y="3722621"/>
+              <a:ext cx="72000" cy="81871"/>
+            </a:xfrm>
+            <a:prstGeom prst="mathMultiply">
+              <a:avLst/>
+            </a:prstGeom>
+            <a:solidFill>
+              <a:srgbClr val="00B0F0"/>
+            </a:solidFill>
+            <a:ln w="3175">
+              <a:solidFill>
+                <a:schemeClr val="tx1"/>
+              </a:solidFill>
+            </a:ln>
+          </p:spPr>
+          <p:style>
+            <a:lnRef idx="2">
+              <a:schemeClr val="accent1">
+                <a:shade val="50000"/>
+              </a:schemeClr>
+            </a:lnRef>
+            <a:fillRef idx="1">
+              <a:schemeClr val="accent1"/>
+            </a:fillRef>
+            <a:effectRef idx="0">
+              <a:schemeClr val="accent1"/>
+            </a:effectRef>
+            <a:fontRef idx="minor">
+              <a:schemeClr val="lt1"/>
+            </a:fontRef>
+          </p:style>
+          <p:txBody>
+            <a:bodyPr rtlCol="0" anchor="ctr"/>
+            <a:lstStyle/>
+            <a:p>
+              <a:pPr algn="ctr"/>
+              <a:endParaRPr lang="pt-BR"/>
+            </a:p>
+          </p:txBody>
+        </p:sp>
+        <p:sp>
+          <p:nvSpPr>
+            <p:cNvPr id="153" name="Multiply 152"/>
+            <p:cNvSpPr>
+              <a:spLocks noChangeAspect="1"/>
+            </p:cNvSpPr>
+            <p:nvPr/>
+          </p:nvSpPr>
+          <p:spPr>
+            <a:xfrm>
+              <a:off x="4553694" y="3612134"/>
+              <a:ext cx="72000" cy="81871"/>
+            </a:xfrm>
+            <a:prstGeom prst="mathMultiply">
+              <a:avLst/>
+            </a:prstGeom>
+            <a:solidFill>
+              <a:srgbClr val="00B0F0"/>
+            </a:solidFill>
+            <a:ln w="3175">
+              <a:solidFill>
+                <a:schemeClr val="tx1"/>
+              </a:solidFill>
+            </a:ln>
+          </p:spPr>
+          <p:style>
+            <a:lnRef idx="2">
+              <a:schemeClr val="accent1">
+                <a:shade val="50000"/>
+              </a:schemeClr>
+            </a:lnRef>
+            <a:fillRef idx="1">
+              <a:schemeClr val="accent1"/>
+            </a:fillRef>
+            <a:effectRef idx="0">
+              <a:schemeClr val="accent1"/>
+            </a:effectRef>
+            <a:fontRef idx="minor">
+              <a:schemeClr val="lt1"/>
+            </a:fontRef>
+          </p:style>
+          <p:txBody>
+            <a:bodyPr rtlCol="0" anchor="ctr"/>
+            <a:lstStyle/>
+            <a:p>
+              <a:pPr algn="ctr"/>
+              <a:endParaRPr lang="pt-BR"/>
+            </a:p>
+          </p:txBody>
+        </p:sp>
+        <p:cxnSp>
+          <p:nvCxnSpPr>
+            <p:cNvPr id="158" name="Straight Arrow Connector 157"/>
+            <p:cNvCxnSpPr/>
+            <p:nvPr/>
+          </p:nvCxnSpPr>
+          <p:spPr>
+            <a:xfrm>
+              <a:off x="3030134" y="1302987"/>
+              <a:ext cx="0" cy="4284000"/>
+            </a:xfrm>
+            <a:prstGeom prst="straightConnector1">
+              <a:avLst/>
+            </a:prstGeom>
+            <a:ln w="19050">
+              <a:solidFill>
+                <a:schemeClr val="tx1"/>
+              </a:solidFill>
+              <a:headEnd type="triangle" w="med" len="med"/>
+              <a:tailEnd type="none" w="med" len="med"/>
+            </a:ln>
+          </p:spPr>
+          <p:style>
+            <a:lnRef idx="1">
+              <a:schemeClr val="accent1"/>
+            </a:lnRef>
+            <a:fillRef idx="0">
+              <a:schemeClr val="accent1"/>
+            </a:fillRef>
+            <a:effectRef idx="0">
+              <a:schemeClr val="accent1"/>
+            </a:effectRef>
+            <a:fontRef idx="minor">
+              <a:schemeClr val="tx1"/>
+            </a:fontRef>
+          </p:style>
+        </p:cxnSp>
+        <p:cxnSp>
+          <p:nvCxnSpPr>
+            <p:cNvPr id="159" name="Straight Arrow Connector 158"/>
+            <p:cNvCxnSpPr/>
+            <p:nvPr/>
+          </p:nvCxnSpPr>
+          <p:spPr>
+            <a:xfrm rot="5400000">
+              <a:off x="4496439" y="4118552"/>
+              <a:ext cx="0" cy="2952000"/>
+            </a:xfrm>
+            <a:prstGeom prst="straightConnector1">
+              <a:avLst/>
+            </a:prstGeom>
+            <a:ln w="19050">
+              <a:solidFill>
+                <a:schemeClr val="tx1"/>
+              </a:solidFill>
+              <a:headEnd type="triangle" w="med" len="med"/>
+              <a:tailEnd type="none" w="med" len="med"/>
+            </a:ln>
+          </p:spPr>
+          <p:style>
+            <a:lnRef idx="1">
+              <a:schemeClr val="accent1"/>
+            </a:lnRef>
+            <a:fillRef idx="0">
+              <a:schemeClr val="accent1"/>
+            </a:fillRef>
+            <a:effectRef idx="0">
+              <a:schemeClr val="accent1"/>
+            </a:effectRef>
+            <a:fontRef idx="minor">
+              <a:schemeClr val="tx1"/>
+            </a:fontRef>
+          </p:style>
+        </p:cxnSp>
+        <mc:AlternateContent xmlns:mc="http://schemas.openxmlformats.org/markup-compatibility/2006" xmlns:a14="http://schemas.microsoft.com/office/drawing/2010/main">
+          <mc:Choice Requires="a14">
+            <p:sp>
+              <p:nvSpPr>
+                <p:cNvPr id="164" name="TextBox 163"/>
+                <p:cNvSpPr txBox="1"/>
+                <p:nvPr/>
+              </p:nvSpPr>
+              <p:spPr>
+                <a:xfrm>
+                  <a:off x="5930875" y="5387262"/>
+                  <a:ext cx="426028" cy="400110"/>
+                </a:xfrm>
+                <a:prstGeom prst="rect">
+                  <a:avLst/>
+                </a:prstGeom>
+                <a:noFill/>
+              </p:spPr>
+              <p:txBody>
+                <a:bodyPr wrap="square" rtlCol="0">
+                  <a:spAutoFit/>
+                </a:bodyPr>
+                <a:lstStyle/>
+                <a:p>
+                  <a:pPr/>
+                  <a14:m>
+                    <m:oMathPara xmlns:m="http://schemas.openxmlformats.org/officeDocument/2006/math">
+                      <m:oMathParaPr>
+                        <m:jc m:val="centerGroup"/>
+                      </m:oMathParaPr>
+                      <m:oMath xmlns:m="http://schemas.openxmlformats.org/officeDocument/2006/math">
+                        <m:sSub>
+                          <m:sSubPr>
+                            <m:ctrlPr>
+                              <a:rPr lang="pt-BR" sz="2000" i="1" smtClean="0">
+                                <a:latin typeface="Cambria Math" panose="02040503050406030204" pitchFamily="18" charset="0"/>
+                              </a:rPr>
+                            </m:ctrlPr>
+                          </m:sSubPr>
+                          <m:e>
+                            <m:r>
+                              <a:rPr lang="pt-BR" sz="2000" b="0" i="1" smtClean="0">
+                                <a:latin typeface="Cambria Math" panose="02040503050406030204" pitchFamily="18" charset="0"/>
+                              </a:rPr>
+                              <m:t>𝑎</m:t>
+                            </m:r>
+                          </m:e>
+                          <m:sub>
+                            <m:r>
+                              <a:rPr lang="pt-BR" sz="2000" b="0" i="1" smtClean="0">
+                                <a:latin typeface="Cambria Math" panose="02040503050406030204" pitchFamily="18" charset="0"/>
+                              </a:rPr>
+                              <m:t>1</m:t>
+                            </m:r>
+                          </m:sub>
+                        </m:sSub>
+                      </m:oMath>
+                    </m:oMathPara>
+                  </a14:m>
+                  <a:endParaRPr lang="pt-BR" sz="2000" dirty="0"/>
+                </a:p>
+              </p:txBody>
+            </p:sp>
+          </mc:Choice>
+          <mc:Fallback xmlns="">
+            <p:sp>
+              <p:nvSpPr>
+                <p:cNvPr id="164" name="TextBox 163"/>
+                <p:cNvSpPr txBox="1">
+                  <a:spLocks noRot="1" noChangeAspect="1" noMove="1" noResize="1" noEditPoints="1" noAdjustHandles="1" noChangeArrowheads="1" noChangeShapeType="1" noTextEdit="1"/>
+                </p:cNvSpPr>
+                <p:nvPr/>
+              </p:nvSpPr>
+              <p:spPr>
+                <a:xfrm>
+                  <a:off x="5930875" y="5387262"/>
+                  <a:ext cx="426028" cy="400110"/>
+                </a:xfrm>
+                <a:prstGeom prst="rect">
+                  <a:avLst/>
+                </a:prstGeom>
+                <a:blipFill>
+                  <a:blip r:embed="rId4"/>
+                  <a:stretch>
+                    <a:fillRect/>
+                  </a:stretch>
+                </a:blipFill>
+              </p:spPr>
+              <p:txBody>
+                <a:bodyPr/>
+                <a:lstStyle/>
+                <a:p>
+                  <a:r>
+                    <a:rPr lang="pt-BR">
+                      <a:noFill/>
+                    </a:rPr>
+                    <a:t> </a:t>
+                  </a:r>
+                </a:p>
+              </p:txBody>
+            </p:sp>
+          </mc:Fallback>
+        </mc:AlternateContent>
+        <mc:AlternateContent xmlns:mc="http://schemas.openxmlformats.org/markup-compatibility/2006" xmlns:a14="http://schemas.microsoft.com/office/drawing/2010/main">
+          <mc:Choice Requires="a14">
+            <p:sp>
+              <p:nvSpPr>
+                <p:cNvPr id="165" name="TextBox 164"/>
+                <p:cNvSpPr txBox="1"/>
+                <p:nvPr/>
+              </p:nvSpPr>
+              <p:spPr>
+                <a:xfrm>
+                  <a:off x="2817120" y="895312"/>
+                  <a:ext cx="426028" cy="400110"/>
+                </a:xfrm>
+                <a:prstGeom prst="rect">
+                  <a:avLst/>
+                </a:prstGeom>
+                <a:noFill/>
+              </p:spPr>
+              <p:txBody>
+                <a:bodyPr wrap="square" rtlCol="0">
+                  <a:spAutoFit/>
+                </a:bodyPr>
+                <a:lstStyle/>
+                <a:p>
+                  <a:pPr/>
+                  <a14:m>
+                    <m:oMathPara xmlns:m="http://schemas.openxmlformats.org/officeDocument/2006/math">
+                      <m:oMathParaPr>
+                        <m:jc m:val="centerGroup"/>
+                      </m:oMathParaPr>
+                      <m:oMath xmlns:m="http://schemas.openxmlformats.org/officeDocument/2006/math">
+                        <m:sSub>
+                          <m:sSubPr>
+                            <m:ctrlPr>
+                              <a:rPr lang="pt-BR" sz="2000" i="1" smtClean="0">
+                                <a:latin typeface="Cambria Math" panose="02040503050406030204" pitchFamily="18" charset="0"/>
+                              </a:rPr>
+                            </m:ctrlPr>
+                          </m:sSubPr>
+                          <m:e>
+                            <m:r>
+                              <a:rPr lang="pt-BR" sz="2000" b="0" i="1" smtClean="0">
+                                <a:latin typeface="Cambria Math" panose="02040503050406030204" pitchFamily="18" charset="0"/>
+                              </a:rPr>
+                              <m:t>𝑎</m:t>
+                            </m:r>
+                          </m:e>
+                          <m:sub>
+                            <m:r>
+                              <a:rPr lang="pt-BR" sz="2000" b="0" i="1" smtClean="0">
+                                <a:latin typeface="Cambria Math" panose="02040503050406030204" pitchFamily="18" charset="0"/>
+                              </a:rPr>
+                              <m:t>2</m:t>
+                            </m:r>
+                          </m:sub>
+                        </m:sSub>
+                      </m:oMath>
+                    </m:oMathPara>
+                  </a14:m>
+                  <a:endParaRPr lang="pt-BR" sz="2000" dirty="0"/>
+                </a:p>
+              </p:txBody>
+            </p:sp>
+          </mc:Choice>
+          <mc:Fallback xmlns="">
+            <p:sp>
+              <p:nvSpPr>
+                <p:cNvPr id="165" name="TextBox 164"/>
+                <p:cNvSpPr txBox="1">
+                  <a:spLocks noRot="1" noChangeAspect="1" noMove="1" noResize="1" noEditPoints="1" noAdjustHandles="1" noChangeArrowheads="1" noChangeShapeType="1" noTextEdit="1"/>
+                </p:cNvSpPr>
+                <p:nvPr/>
+              </p:nvSpPr>
+              <p:spPr>
+                <a:xfrm>
+                  <a:off x="2817120" y="895312"/>
+                  <a:ext cx="426028" cy="400110"/>
+                </a:xfrm>
+                <a:prstGeom prst="rect">
+                  <a:avLst/>
+                </a:prstGeom>
+                <a:blipFill>
+                  <a:blip r:embed="rId5"/>
+                  <a:stretch>
+                    <a:fillRect/>
+                  </a:stretch>
+                </a:blipFill>
+              </p:spPr>
+              <p:txBody>
+                <a:bodyPr/>
+                <a:lstStyle/>
+                <a:p>
+                  <a:r>
+                    <a:rPr lang="pt-BR">
+                      <a:noFill/>
+                    </a:rPr>
+                    <a:t> </a:t>
+                  </a:r>
+                </a:p>
+              </p:txBody>
+            </p:sp>
+          </mc:Fallback>
+        </mc:AlternateContent>
+      </p:grpSp>
+    </p:spTree>
+    <p:extLst>
+      <p:ext uri="{BB962C8B-B14F-4D97-AF65-F5344CB8AC3E}">
+        <p14:creationId xmlns:p14="http://schemas.microsoft.com/office/powerpoint/2010/main" val="3580847131"/>
+      </p:ext>
+    </p:extLst>
+  </p:cSld>
+  <p:clrMapOvr>
+    <a:masterClrMapping/>
+  </p:clrMapOvr>
+</p:sld>
+</file>
+
+<file path=ppt/slides/slide41.xml><?xml version="1.0" encoding="utf-8"?>
 <p:sld xmlns:a="http://schemas.openxmlformats.org/drawingml/2006/main" xmlns:r="http://schemas.openxmlformats.org/officeDocument/2006/relationships" xmlns:p="http://schemas.openxmlformats.org/presentationml/2006/main">
   <p:cSld>
     <p:spTree>
@@ -35838,7 +35971,7 @@
 </p:sld>
 </file>
 
-<file path=ppt/slides/slide41.xml><?xml version="1.0" encoding="utf-8"?>
+<file path=ppt/slides/slide42.xml><?xml version="1.0" encoding="utf-8"?>
 <p:sld xmlns:a="http://schemas.openxmlformats.org/drawingml/2006/main" xmlns:r="http://schemas.openxmlformats.org/officeDocument/2006/relationships" xmlns:p="http://schemas.openxmlformats.org/presentationml/2006/main">
   <p:cSld>
     <p:spTree>
@@ -35943,7 +36076,7 @@
 </p:sld>
 </file>
 
-<file path=ppt/slides/slide42.xml><?xml version="1.0" encoding="utf-8"?>
+<file path=ppt/slides/slide43.xml><?xml version="1.0" encoding="utf-8"?>
 <p:sld xmlns:a="http://schemas.openxmlformats.org/drawingml/2006/main" xmlns:r="http://schemas.openxmlformats.org/officeDocument/2006/relationships" xmlns:p="http://schemas.openxmlformats.org/presentationml/2006/main">
   <p:cSld>
     <p:spTree>
@@ -38087,7 +38220,7 @@
 </p:sld>
 </file>
 
-<file path=ppt/slides/slide43.xml><?xml version="1.0" encoding="utf-8"?>
+<file path=ppt/slides/slide44.xml><?xml version="1.0" encoding="utf-8"?>
 <p:sld xmlns:a="http://schemas.openxmlformats.org/drawingml/2006/main" xmlns:r="http://schemas.openxmlformats.org/officeDocument/2006/relationships" xmlns:p="http://schemas.openxmlformats.org/presentationml/2006/main">
   <p:cSld>
     <p:spTree>
@@ -39326,8 +39459,8 @@
           </a:p>
         </p:txBody>
       </p:sp>
-      <mc:AlternateContent xmlns:mc="http://schemas.openxmlformats.org/markup-compatibility/2006">
-        <mc:Choice xmlns:a14="http://schemas.microsoft.com/office/drawing/2010/main" Requires="a14">
+      <mc:AlternateContent xmlns:mc="http://schemas.openxmlformats.org/markup-compatibility/2006" xmlns:a14="http://schemas.microsoft.com/office/drawing/2010/main">
+        <mc:Choice Requires="a14">
           <p:sp>
             <p:nvSpPr>
               <p:cNvPr id="3" name="Espaço Reservado para Conteúdo 2">
@@ -39448,7 +39581,7 @@
             </p:txBody>
           </p:sp>
         </mc:Choice>
-        <mc:Fallback>
+        <mc:Fallback xmlns="">
           <p:sp>
             <p:nvSpPr>
               <p:cNvPr id="3" name="Espaço Reservado para Conteúdo 2">
@@ -39540,8 +39673,8 @@
           </a:p>
         </p:txBody>
       </p:sp>
-      <mc:AlternateContent xmlns:mc="http://schemas.openxmlformats.org/markup-compatibility/2006">
-        <mc:Choice xmlns:a14="http://schemas.microsoft.com/office/drawing/2010/main" Requires="a14">
+      <mc:AlternateContent xmlns:mc="http://schemas.openxmlformats.org/markup-compatibility/2006" xmlns:a14="http://schemas.microsoft.com/office/drawing/2010/main">
+        <mc:Choice Requires="a14">
           <p:sp>
             <p:nvSpPr>
               <p:cNvPr id="7" name="TextBox 17">
@@ -39598,7 +39731,7 @@
             </p:txBody>
           </p:sp>
         </mc:Choice>
-        <mc:Fallback>
+        <mc:Fallback xmlns="">
           <p:sp>
             <p:nvSpPr>
               <p:cNvPr id="7" name="TextBox 17">
@@ -39691,8 +39824,8 @@
           </a:p>
         </p:txBody>
       </p:sp>
-      <mc:AlternateContent xmlns:mc="http://schemas.openxmlformats.org/markup-compatibility/2006">
-        <mc:Choice xmlns:a14="http://schemas.microsoft.com/office/drawing/2010/main" Requires="a14">
+      <mc:AlternateContent xmlns:mc="http://schemas.openxmlformats.org/markup-compatibility/2006" xmlns:a14="http://schemas.microsoft.com/office/drawing/2010/main">
+        <mc:Choice Requires="a14">
           <p:sp>
             <p:nvSpPr>
               <p:cNvPr id="9" name="TextBox 19">
@@ -39756,7 +39889,7 @@
             </p:txBody>
           </p:sp>
         </mc:Choice>
-        <mc:Fallback>
+        <mc:Fallback xmlns="">
           <p:sp>
             <p:nvSpPr>
               <p:cNvPr id="9" name="TextBox 19">
@@ -39849,8 +39982,8 @@
           </a:p>
         </p:txBody>
       </p:sp>
-      <mc:AlternateContent xmlns:mc="http://schemas.openxmlformats.org/markup-compatibility/2006">
-        <mc:Choice xmlns:a14="http://schemas.microsoft.com/office/drawing/2010/main" Requires="a14">
+      <mc:AlternateContent xmlns:mc="http://schemas.openxmlformats.org/markup-compatibility/2006" xmlns:a14="http://schemas.microsoft.com/office/drawing/2010/main">
+        <mc:Choice Requires="a14">
           <p:sp>
             <p:nvSpPr>
               <p:cNvPr id="11" name="TextBox 21">
@@ -39907,7 +40040,7 @@
             </p:txBody>
           </p:sp>
         </mc:Choice>
-        <mc:Fallback>
+        <mc:Fallback xmlns="">
           <p:sp>
             <p:nvSpPr>
               <p:cNvPr id="11" name="TextBox 21">
@@ -40099,8 +40232,8 @@
           </a:p>
         </p:txBody>
       </p:sp>
-      <mc:AlternateContent xmlns:mc="http://schemas.openxmlformats.org/markup-compatibility/2006">
-        <mc:Choice xmlns:a14="http://schemas.microsoft.com/office/drawing/2010/main" Requires="a14">
+      <mc:AlternateContent xmlns:mc="http://schemas.openxmlformats.org/markup-compatibility/2006" xmlns:a14="http://schemas.microsoft.com/office/drawing/2010/main">
+        <mc:Choice Requires="a14">
           <p:sp>
             <p:nvSpPr>
               <p:cNvPr id="15" name="TextBox 28">
@@ -40157,7 +40290,7 @@
             </p:txBody>
           </p:sp>
         </mc:Choice>
-        <mc:Fallback>
+        <mc:Fallback xmlns="">
           <p:sp>
             <p:nvSpPr>
               <p:cNvPr id="15" name="TextBox 28">
@@ -40202,8 +40335,8 @@
           </p:sp>
         </mc:Fallback>
       </mc:AlternateContent>
-      <mc:AlternateContent xmlns:mc="http://schemas.openxmlformats.org/markup-compatibility/2006">
-        <mc:Choice xmlns:a14="http://schemas.microsoft.com/office/drawing/2010/main" Requires="a14">
+      <mc:AlternateContent xmlns:mc="http://schemas.openxmlformats.org/markup-compatibility/2006" xmlns:a14="http://schemas.microsoft.com/office/drawing/2010/main">
+        <mc:Choice Requires="a14">
           <p:sp>
             <p:nvSpPr>
               <p:cNvPr id="16" name="TextBox 29">
@@ -40267,7 +40400,7 @@
             </p:txBody>
           </p:sp>
         </mc:Choice>
-        <mc:Fallback>
+        <mc:Fallback xmlns="">
           <p:sp>
             <p:nvSpPr>
               <p:cNvPr id="16" name="TextBox 29">
@@ -40312,8 +40445,8 @@
           </p:sp>
         </mc:Fallback>
       </mc:AlternateContent>
-      <mc:AlternateContent xmlns:mc="http://schemas.openxmlformats.org/markup-compatibility/2006">
-        <mc:Choice xmlns:a14="http://schemas.microsoft.com/office/drawing/2010/main" Requires="a14">
+      <mc:AlternateContent xmlns:mc="http://schemas.openxmlformats.org/markup-compatibility/2006" xmlns:a14="http://schemas.microsoft.com/office/drawing/2010/main">
+        <mc:Choice Requires="a14">
           <p:sp>
             <p:nvSpPr>
               <p:cNvPr id="17" name="TextBox 19">
@@ -40377,7 +40510,7 @@
             </p:txBody>
           </p:sp>
         </mc:Choice>
-        <mc:Fallback>
+        <mc:Fallback xmlns="">
           <p:sp>
             <p:nvSpPr>
               <p:cNvPr id="17" name="TextBox 19">
@@ -41501,4 +41634,318 @@
     </a:ext>
   </a:extLst>
 </a:theme>
+</file>
+
+<file path=customXml/item1.xml><?xml version="1.0" encoding="utf-8"?>
+<?mso-contentType ?>
+<FormTemplates xmlns="http://schemas.microsoft.com/sharepoint/v3/contenttype/forms">
+  <Display>DocumentLibraryForm</Display>
+  <Edit>DocumentLibraryForm</Edit>
+  <New>DocumentLibraryForm</New>
+</FormTemplates>
+</file>
+
+<file path=customXml/item2.xml><?xml version="1.0" encoding="utf-8"?>
+<p:properties xmlns:p="http://schemas.microsoft.com/office/2006/metadata/properties" xmlns:xsi="http://www.w3.org/2001/XMLSchema-instance" xmlns:pc="http://schemas.microsoft.com/office/infopath/2007/PartnerControls">
+  <documentManagement>
+    <_activity xmlns="10322600-47b9-44f6-86ef-c87c87ba6e82" xsi:nil="true"/>
+  </documentManagement>
+</p:properties>
+</file>
+
+<file path=customXml/item3.xml><?xml version="1.0" encoding="utf-8"?>
+<ct:contentTypeSchema xmlns:ct="http://schemas.microsoft.com/office/2006/metadata/contentType" xmlns:ma="http://schemas.microsoft.com/office/2006/metadata/properties/metaAttributes" ct:_="" ma:_="" ma:contentTypeName="Document" ma:contentTypeID="0x010100A6553FE09A98904B92A9D00A38127206" ma:contentTypeVersion="18" ma:contentTypeDescription="Create a new document." ma:contentTypeScope="" ma:versionID="92863cfdd2d5fd2ee9b6f30d8c51b1f5">
+  <xsd:schema xmlns:xsd="http://www.w3.org/2001/XMLSchema" xmlns:xs="http://www.w3.org/2001/XMLSchema" xmlns:p="http://schemas.microsoft.com/office/2006/metadata/properties" xmlns:ns3="10322600-47b9-44f6-86ef-c87c87ba6e82" xmlns:ns4="026c264a-64f6-48aa-bde0-8bf9e5064f89" targetNamespace="http://schemas.microsoft.com/office/2006/metadata/properties" ma:root="true" ma:fieldsID="86148dd4b4cd32a5258cd233a95bdcf5" ns3:_="" ns4:_="">
+    <xsd:import namespace="10322600-47b9-44f6-86ef-c87c87ba6e82"/>
+    <xsd:import namespace="026c264a-64f6-48aa-bde0-8bf9e5064f89"/>
+    <xsd:element name="properties">
+      <xsd:complexType>
+        <xsd:sequence>
+          <xsd:element name="documentManagement">
+            <xsd:complexType>
+              <xsd:all>
+                <xsd:element ref="ns3:MediaServiceMetadata" minOccurs="0"/>
+                <xsd:element ref="ns3:MediaServiceFastMetadata" minOccurs="0"/>
+                <xsd:element ref="ns4:SharedWithUsers" minOccurs="0"/>
+                <xsd:element ref="ns4:SharedWithDetails" minOccurs="0"/>
+                <xsd:element ref="ns4:SharingHintHash" minOccurs="0"/>
+                <xsd:element ref="ns3:MediaServiceAutoTags" minOccurs="0"/>
+                <xsd:element ref="ns3:MediaServiceOCR" minOccurs="0"/>
+                <xsd:element ref="ns3:MediaServiceGenerationTime" minOccurs="0"/>
+                <xsd:element ref="ns3:MediaServiceEventHashCode" minOccurs="0"/>
+                <xsd:element ref="ns3:MediaServiceDateTaken" minOccurs="0"/>
+                <xsd:element ref="ns3:MediaLengthInSeconds" minOccurs="0"/>
+                <xsd:element ref="ns3:MediaServiceAutoKeyPoints" minOccurs="0"/>
+                <xsd:element ref="ns3:MediaServiceKeyPoints" minOccurs="0"/>
+                <xsd:element ref="ns3:MediaServiceLocation" minOccurs="0"/>
+                <xsd:element ref="ns3:MediaServiceSearchProperties" minOccurs="0"/>
+                <xsd:element ref="ns3:_activity" minOccurs="0"/>
+                <xsd:element ref="ns3:MediaServiceObjectDetectorVersions" minOccurs="0"/>
+                <xsd:element ref="ns3:MediaServiceSystemTags" minOccurs="0"/>
+              </xsd:all>
+            </xsd:complexType>
+          </xsd:element>
+        </xsd:sequence>
+      </xsd:complexType>
+    </xsd:element>
+  </xsd:schema>
+  <xsd:schema xmlns:xsd="http://www.w3.org/2001/XMLSchema" xmlns:xs="http://www.w3.org/2001/XMLSchema" xmlns:dms="http://schemas.microsoft.com/office/2006/documentManagement/types" xmlns:pc="http://schemas.microsoft.com/office/infopath/2007/PartnerControls" targetNamespace="10322600-47b9-44f6-86ef-c87c87ba6e82" elementFormDefault="qualified">
+    <xsd:import namespace="http://schemas.microsoft.com/office/2006/documentManagement/types"/>
+    <xsd:import namespace="http://schemas.microsoft.com/office/infopath/2007/PartnerControls"/>
+    <xsd:element name="MediaServiceMetadata" ma:index="8" nillable="true" ma:displayName="MediaServiceMetadata" ma:hidden="true" ma:internalName="MediaServiceMetadata" ma:readOnly="true">
+      <xsd:simpleType>
+        <xsd:restriction base="dms:Note"/>
+      </xsd:simpleType>
+    </xsd:element>
+    <xsd:element name="MediaServiceFastMetadata" ma:index="9" nillable="true" ma:displayName="MediaServiceFastMetadata" ma:hidden="true" ma:internalName="MediaServiceFastMetadata" ma:readOnly="true">
+      <xsd:simpleType>
+        <xsd:restriction base="dms:Note"/>
+      </xsd:simpleType>
+    </xsd:element>
+    <xsd:element name="MediaServiceAutoTags" ma:index="13" nillable="true" ma:displayName="Tags" ma:internalName="MediaServiceAutoTags" ma:readOnly="true">
+      <xsd:simpleType>
+        <xsd:restriction base="dms:Text"/>
+      </xsd:simpleType>
+    </xsd:element>
+    <xsd:element name="MediaServiceOCR" ma:index="14" nillable="true" ma:displayName="Extracted Text" ma:internalName="MediaServiceOCR" ma:readOnly="true">
+      <xsd:simpleType>
+        <xsd:restriction base="dms:Note">
+          <xsd:maxLength value="255"/>
+        </xsd:restriction>
+      </xsd:simpleType>
+    </xsd:element>
+    <xsd:element name="MediaServiceGenerationTime" ma:index="15" nillable="true" ma:displayName="MediaServiceGenerationTime" ma:hidden="true" ma:internalName="MediaServiceGenerationTime" ma:readOnly="true">
+      <xsd:simpleType>
+        <xsd:restriction base="dms:Text"/>
+      </xsd:simpleType>
+    </xsd:element>
+    <xsd:element name="MediaServiceEventHashCode" ma:index="16" nillable="true" ma:displayName="MediaServiceEventHashCode" ma:hidden="true" ma:internalName="MediaServiceEventHashCode" ma:readOnly="true">
+      <xsd:simpleType>
+        <xsd:restriction base="dms:Text"/>
+      </xsd:simpleType>
+    </xsd:element>
+    <xsd:element name="MediaServiceDateTaken" ma:index="17" nillable="true" ma:displayName="MediaServiceDateTaken" ma:hidden="true" ma:internalName="MediaServiceDateTaken" ma:readOnly="true">
+      <xsd:simpleType>
+        <xsd:restriction base="dms:Text"/>
+      </xsd:simpleType>
+    </xsd:element>
+    <xsd:element name="MediaLengthInSeconds" ma:index="18" nillable="true" ma:displayName="Length (seconds)" ma:internalName="MediaLengthInSeconds" ma:readOnly="true">
+      <xsd:simpleType>
+        <xsd:restriction base="dms:Unknown"/>
+      </xsd:simpleType>
+    </xsd:element>
+    <xsd:element name="MediaServiceAutoKeyPoints" ma:index="19" nillable="true" ma:displayName="MediaServiceAutoKeyPoints" ma:hidden="true" ma:internalName="MediaServiceAutoKeyPoints" ma:readOnly="true">
+      <xsd:simpleType>
+        <xsd:restriction base="dms:Note"/>
+      </xsd:simpleType>
+    </xsd:element>
+    <xsd:element name="MediaServiceKeyPoints" ma:index="20" nillable="true" ma:displayName="KeyPoints" ma:internalName="MediaServiceKeyPoints" ma:readOnly="true">
+      <xsd:simpleType>
+        <xsd:restriction base="dms:Note">
+          <xsd:maxLength value="255"/>
+        </xsd:restriction>
+      </xsd:simpleType>
+    </xsd:element>
+    <xsd:element name="MediaServiceLocation" ma:index="21" nillable="true" ma:displayName="Location" ma:indexed="true" ma:internalName="MediaServiceLocation" ma:readOnly="true">
+      <xsd:simpleType>
+        <xsd:restriction base="dms:Text"/>
+      </xsd:simpleType>
+    </xsd:element>
+    <xsd:element name="MediaServiceSearchProperties" ma:index="22" nillable="true" ma:displayName="MediaServiceSearchProperties" ma:hidden="true" ma:internalName="MediaServiceSearchProperties" ma:readOnly="true">
+      <xsd:simpleType>
+        <xsd:restriction base="dms:Note"/>
+      </xsd:simpleType>
+    </xsd:element>
+    <xsd:element name="_activity" ma:index="23" nillable="true" ma:displayName="_activity" ma:hidden="true" ma:internalName="_activity">
+      <xsd:simpleType>
+        <xsd:restriction base="dms:Note"/>
+      </xsd:simpleType>
+    </xsd:element>
+    <xsd:element name="MediaServiceObjectDetectorVersions" ma:index="24" nillable="true" ma:displayName="MediaServiceObjectDetectorVersions" ma:hidden="true" ma:indexed="true" ma:internalName="MediaServiceObjectDetectorVersions" ma:readOnly="true">
+      <xsd:simpleType>
+        <xsd:restriction base="dms:Text"/>
+      </xsd:simpleType>
+    </xsd:element>
+    <xsd:element name="MediaServiceSystemTags" ma:index="25" nillable="true" ma:displayName="MediaServiceSystemTags" ma:hidden="true" ma:internalName="MediaServiceSystemTags" ma:readOnly="true">
+      <xsd:simpleType>
+        <xsd:restriction base="dms:Note"/>
+      </xsd:simpleType>
+    </xsd:element>
+  </xsd:schema>
+  <xsd:schema xmlns:xsd="http://www.w3.org/2001/XMLSchema" xmlns:xs="http://www.w3.org/2001/XMLSchema" xmlns:dms="http://schemas.microsoft.com/office/2006/documentManagement/types" xmlns:pc="http://schemas.microsoft.com/office/infopath/2007/PartnerControls" targetNamespace="026c264a-64f6-48aa-bde0-8bf9e5064f89" elementFormDefault="qualified">
+    <xsd:import namespace="http://schemas.microsoft.com/office/2006/documentManagement/types"/>
+    <xsd:import namespace="http://schemas.microsoft.com/office/infopath/2007/PartnerControls"/>
+    <xsd:element name="SharedWithUsers" ma:index="10" nillable="true" ma:displayName="Shared With" ma:internalName="SharedWithUsers" ma:readOnly="true">
+      <xsd:complexType>
+        <xsd:complexContent>
+          <xsd:extension base="dms:UserMulti">
+            <xsd:sequence>
+              <xsd:element name="UserInfo" minOccurs="0" maxOccurs="unbounded">
+                <xsd:complexType>
+                  <xsd:sequence>
+                    <xsd:element name="DisplayName" type="xsd:string" minOccurs="0"/>
+                    <xsd:element name="AccountId" type="dms:UserId" minOccurs="0" nillable="true"/>
+                    <xsd:element name="AccountType" type="xsd:string" minOccurs="0"/>
+                  </xsd:sequence>
+                </xsd:complexType>
+              </xsd:element>
+            </xsd:sequence>
+          </xsd:extension>
+        </xsd:complexContent>
+      </xsd:complexType>
+    </xsd:element>
+    <xsd:element name="SharedWithDetails" ma:index="11" nillable="true" ma:displayName="Shared With Details" ma:internalName="SharedWithDetails" ma:readOnly="true">
+      <xsd:simpleType>
+        <xsd:restriction base="dms:Note">
+          <xsd:maxLength value="255"/>
+        </xsd:restriction>
+      </xsd:simpleType>
+    </xsd:element>
+    <xsd:element name="SharingHintHash" ma:index="12" nillable="true" ma:displayName="Sharing Hint Hash" ma:hidden="true" ma:internalName="SharingHintHash" ma:readOnly="true">
+      <xsd:simpleType>
+        <xsd:restriction base="dms:Text"/>
+      </xsd:simpleType>
+    </xsd:element>
+  </xsd:schema>
+  <xsd:schema xmlns="http://schemas.openxmlformats.org/package/2006/metadata/core-properties" xmlns:xsd="http://www.w3.org/2001/XMLSchema" xmlns:xsi="http://www.w3.org/2001/XMLSchema-instance" xmlns:dc="http://purl.org/dc/elements/1.1/" xmlns:dcterms="http://purl.org/dc/terms/" xmlns:odoc="http://schemas.microsoft.com/internal/obd" targetNamespace="http://schemas.openxmlformats.org/package/2006/metadata/core-properties" elementFormDefault="qualified" attributeFormDefault="unqualified" blockDefault="#all">
+    <xsd:import namespace="http://purl.org/dc/elements/1.1/" schemaLocation="http://dublincore.org/schemas/xmls/qdc/2003/04/02/dc.xsd"/>
+    <xsd:import namespace="http://purl.org/dc/terms/" schemaLocation="http://dublincore.org/schemas/xmls/qdc/2003/04/02/dcterms.xsd"/>
+    <xsd:element name="coreProperties" type="CT_coreProperties"/>
+    <xsd:complexType name="CT_coreProperties">
+      <xsd:all>
+        <xsd:element ref="dc:creator" minOccurs="0" maxOccurs="1"/>
+        <xsd:element ref="dcterms:created" minOccurs="0" maxOccurs="1"/>
+        <xsd:element ref="dc:identifier" minOccurs="0" maxOccurs="1"/>
+        <xsd:element name="contentType" minOccurs="0" maxOccurs="1" type="xsd:string" ma:index="0" ma:displayName="Content Type"/>
+        <xsd:element ref="dc:title" minOccurs="0" maxOccurs="1" ma:index="4" ma:displayName="Title"/>
+        <xsd:element ref="dc:subject" minOccurs="0" maxOccurs="1"/>
+        <xsd:element ref="dc:description" minOccurs="0" maxOccurs="1"/>
+        <xsd:element name="keywords" minOccurs="0" maxOccurs="1" type="xsd:string"/>
+        <xsd:element ref="dc:language" minOccurs="0" maxOccurs="1"/>
+        <xsd:element name="category" minOccurs="0" maxOccurs="1" type="xsd:string"/>
+        <xsd:element name="version" minOccurs="0" maxOccurs="1" type="xsd:string"/>
+        <xsd:element name="revision" minOccurs="0" maxOccurs="1" type="xsd:string">
+          <xsd:annotation>
+            <xsd:documentation>
+                        This value indicates the number of saves or revisions. The application is responsible for updating this value after each revision.
+                    </xsd:documentation>
+          </xsd:annotation>
+        </xsd:element>
+        <xsd:element name="lastModifiedBy" minOccurs="0" maxOccurs="1" type="xsd:string"/>
+        <xsd:element ref="dcterms:modified" minOccurs="0" maxOccurs="1"/>
+        <xsd:element name="contentStatus" minOccurs="0" maxOccurs="1" type="xsd:string"/>
+      </xsd:all>
+    </xsd:complexType>
+  </xsd:schema>
+  <xs:schema xmlns:pc="http://schemas.microsoft.com/office/infopath/2007/PartnerControls" xmlns:xs="http://www.w3.org/2001/XMLSchema" targetNamespace="http://schemas.microsoft.com/office/infopath/2007/PartnerControls" elementFormDefault="qualified" attributeFormDefault="unqualified">
+    <xs:element name="Person">
+      <xs:complexType>
+        <xs:sequence>
+          <xs:element ref="pc:DisplayName" minOccurs="0"/>
+          <xs:element ref="pc:AccountId" minOccurs="0"/>
+          <xs:element ref="pc:AccountType" minOccurs="0"/>
+        </xs:sequence>
+      </xs:complexType>
+    </xs:element>
+    <xs:element name="DisplayName" type="xs:string"/>
+    <xs:element name="AccountId" type="xs:string"/>
+    <xs:element name="AccountType" type="xs:string"/>
+    <xs:element name="BDCAssociatedEntity">
+      <xs:complexType>
+        <xs:sequence>
+          <xs:element ref="pc:BDCEntity" minOccurs="0" maxOccurs="unbounded"/>
+        </xs:sequence>
+        <xs:attribute ref="pc:EntityNamespace"/>
+        <xs:attribute ref="pc:EntityName"/>
+        <xs:attribute ref="pc:SystemInstanceName"/>
+        <xs:attribute ref="pc:AssociationName"/>
+      </xs:complexType>
+    </xs:element>
+    <xs:attribute name="EntityNamespace" type="xs:string"/>
+    <xs:attribute name="EntityName" type="xs:string"/>
+    <xs:attribute name="SystemInstanceName" type="xs:string"/>
+    <xs:attribute name="AssociationName" type="xs:string"/>
+    <xs:element name="BDCEntity">
+      <xs:complexType>
+        <xs:sequence>
+          <xs:element ref="pc:EntityDisplayName" minOccurs="0"/>
+          <xs:element ref="pc:EntityInstanceReference" minOccurs="0"/>
+          <xs:element ref="pc:EntityId1" minOccurs="0"/>
+          <xs:element ref="pc:EntityId2" minOccurs="0"/>
+          <xs:element ref="pc:EntityId3" minOccurs="0"/>
+          <xs:element ref="pc:EntityId4" minOccurs="0"/>
+          <xs:element ref="pc:EntityId5" minOccurs="0"/>
+        </xs:sequence>
+      </xs:complexType>
+    </xs:element>
+    <xs:element name="EntityDisplayName" type="xs:string"/>
+    <xs:element name="EntityInstanceReference" type="xs:string"/>
+    <xs:element name="EntityId1" type="xs:string"/>
+    <xs:element name="EntityId2" type="xs:string"/>
+    <xs:element name="EntityId3" type="xs:string"/>
+    <xs:element name="EntityId4" type="xs:string"/>
+    <xs:element name="EntityId5" type="xs:string"/>
+    <xs:element name="Terms">
+      <xs:complexType>
+        <xs:sequence>
+          <xs:element ref="pc:TermInfo" minOccurs="0" maxOccurs="unbounded"/>
+        </xs:sequence>
+      </xs:complexType>
+    </xs:element>
+    <xs:element name="TermInfo">
+      <xs:complexType>
+        <xs:sequence>
+          <xs:element ref="pc:TermName" minOccurs="0"/>
+          <xs:element ref="pc:TermId" minOccurs="0"/>
+        </xs:sequence>
+      </xs:complexType>
+    </xs:element>
+    <xs:element name="TermName" type="xs:string"/>
+    <xs:element name="TermId" type="xs:string"/>
+  </xs:schema>
+</ct:contentTypeSchema>
+</file>
+
+<file path=customXml/itemProps1.xml><?xml version="1.0" encoding="utf-8"?>
+<ds:datastoreItem xmlns:ds="http://schemas.openxmlformats.org/officeDocument/2006/customXml" ds:itemID="{CF4A17E5-ECCE-48A8-A291-06961455A1A6}">
+  <ds:schemaRefs>
+    <ds:schemaRef ds:uri="http://schemas.microsoft.com/sharepoint/v3/contenttype/forms"/>
+  </ds:schemaRefs>
+</ds:datastoreItem>
+</file>
+
+<file path=customXml/itemProps2.xml><?xml version="1.0" encoding="utf-8"?>
+<ds:datastoreItem xmlns:ds="http://schemas.openxmlformats.org/officeDocument/2006/customXml" ds:itemID="{C4421A6D-F900-459F-9179-A64A47727DAC}">
+  <ds:schemaRefs>
+    <ds:schemaRef ds:uri="http://schemas.microsoft.com/office/2006/documentManagement/types"/>
+    <ds:schemaRef ds:uri="026c264a-64f6-48aa-bde0-8bf9e5064f89"/>
+    <ds:schemaRef ds:uri="http://schemas.openxmlformats.org/package/2006/metadata/core-properties"/>
+    <ds:schemaRef ds:uri="http://purl.org/dc/elements/1.1/"/>
+    <ds:schemaRef ds:uri="http://purl.org/dc/dcmitype/"/>
+    <ds:schemaRef ds:uri="http://schemas.microsoft.com/office/2006/metadata/properties"/>
+    <ds:schemaRef ds:uri="http://www.w3.org/XML/1998/namespace"/>
+    <ds:schemaRef ds:uri="http://schemas.microsoft.com/office/infopath/2007/PartnerControls"/>
+    <ds:schemaRef ds:uri="10322600-47b9-44f6-86ef-c87c87ba6e82"/>
+    <ds:schemaRef ds:uri="http://purl.org/dc/terms/"/>
+  </ds:schemaRefs>
+</ds:datastoreItem>
+</file>
+
+<file path=customXml/itemProps3.xml><?xml version="1.0" encoding="utf-8"?>
+<ds:datastoreItem xmlns:ds="http://schemas.openxmlformats.org/officeDocument/2006/customXml" ds:itemID="{E765951F-25BB-44C2-B87A-A88FE1B68A23}">
+  <ds:schemaRefs>
+    <ds:schemaRef ds:uri="http://schemas.microsoft.com/office/2006/metadata/contentType"/>
+    <ds:schemaRef ds:uri="http://schemas.microsoft.com/office/2006/metadata/properties/metaAttributes"/>
+    <ds:schemaRef ds:uri="http://www.w3.org/2001/XMLSchema"/>
+    <ds:schemaRef ds:uri="http://schemas.microsoft.com/office/2006/metadata/properties"/>
+    <ds:schemaRef ds:uri="10322600-47b9-44f6-86ef-c87c87ba6e82"/>
+    <ds:schemaRef ds:uri="026c264a-64f6-48aa-bde0-8bf9e5064f89"/>
+    <ds:schemaRef ds:uri="http://schemas.microsoft.com/office/2006/documentManagement/types"/>
+    <ds:schemaRef ds:uri="http://schemas.microsoft.com/office/infopath/2007/PartnerControls"/>
+    <ds:schemaRef ds:uri="http://schemas.openxmlformats.org/package/2006/metadata/core-properties"/>
+    <ds:schemaRef ds:uri="http://purl.org/dc/elements/1.1/"/>
+    <ds:schemaRef ds:uri="http://purl.org/dc/terms/"/>
+    <ds:schemaRef ds:uri="http://schemas.microsoft.com/internal/obd"/>
+  </ds:schemaRefs>
+</ds:datastoreItem>
 </file>
--- a/slides/T319_Regressão_Linear (Parte III).pptx
+++ b/slides/T319_Regressão_Linear (Parte III).pptx
@@ -5,7 +5,7 @@
     <p:sldMasterId id="2147483648" r:id="rId4"/>
   </p:sldMasterIdLst>
   <p:notesMasterIdLst>
-    <p:notesMasterId r:id="rId49"/>
+    <p:notesMasterId r:id="rId48"/>
   </p:notesMasterIdLst>
   <p:sldIdLst>
     <p:sldId id="259" r:id="rId5"/>
@@ -32,26 +32,25 @@
     <p:sldId id="512" r:id="rId26"/>
     <p:sldId id="504" r:id="rId27"/>
     <p:sldId id="517" r:id="rId28"/>
-    <p:sldId id="505" r:id="rId29"/>
-    <p:sldId id="508" r:id="rId30"/>
-    <p:sldId id="510" r:id="rId31"/>
-    <p:sldId id="511" r:id="rId32"/>
-    <p:sldId id="482" r:id="rId33"/>
-    <p:sldId id="317" r:id="rId34"/>
-    <p:sldId id="332" r:id="rId35"/>
-    <p:sldId id="299" r:id="rId36"/>
-    <p:sldId id="285" r:id="rId37"/>
-    <p:sldId id="415" r:id="rId38"/>
-    <p:sldId id="283" r:id="rId39"/>
-    <p:sldId id="274" r:id="rId40"/>
-    <p:sldId id="278" r:id="rId41"/>
-    <p:sldId id="292" r:id="rId42"/>
-    <p:sldId id="498" r:id="rId43"/>
-    <p:sldId id="295" r:id="rId44"/>
-    <p:sldId id="396" r:id="rId45"/>
-    <p:sldId id="484" r:id="rId46"/>
-    <p:sldId id="421" r:id="rId47"/>
-    <p:sldId id="423" r:id="rId48"/>
+    <p:sldId id="508" r:id="rId29"/>
+    <p:sldId id="510" r:id="rId30"/>
+    <p:sldId id="511" r:id="rId31"/>
+    <p:sldId id="482" r:id="rId32"/>
+    <p:sldId id="317" r:id="rId33"/>
+    <p:sldId id="332" r:id="rId34"/>
+    <p:sldId id="299" r:id="rId35"/>
+    <p:sldId id="285" r:id="rId36"/>
+    <p:sldId id="415" r:id="rId37"/>
+    <p:sldId id="283" r:id="rId38"/>
+    <p:sldId id="274" r:id="rId39"/>
+    <p:sldId id="278" r:id="rId40"/>
+    <p:sldId id="292" r:id="rId41"/>
+    <p:sldId id="498" r:id="rId42"/>
+    <p:sldId id="295" r:id="rId43"/>
+    <p:sldId id="396" r:id="rId44"/>
+    <p:sldId id="484" r:id="rId45"/>
+    <p:sldId id="421" r:id="rId46"/>
+    <p:sldId id="423" r:id="rId47"/>
   </p:sldIdLst>
   <p:sldSz cx="12192000" cy="6858000"/>
   <p:notesSz cx="6858000" cy="9144000"/>
@@ -671,6 +670,26 @@
             </a:r>
           </a:p>
           <a:p>
+            <a:pPr marL="0" marR="0" lvl="0" indent="0" algn="l" defTabSz="914400" rtl="0" eaLnBrk="1" fontAlgn="auto" latinLnBrk="0" hangingPunct="1">
+              <a:lnSpc>
+                <a:spcPct val="100000"/>
+              </a:lnSpc>
+              <a:spcBef>
+                <a:spcPts val="0"/>
+              </a:spcBef>
+              <a:spcAft>
+                <a:spcPts val="0"/>
+              </a:spcAft>
+              <a:buClrTx/>
+              <a:buSzTx/>
+              <a:buFontTx/>
+              <a:buNone/>
+              <a:tabLst/>
+              <a:defRPr/>
+            </a:pPr>
+            <a:endParaRPr lang="pt-BR" dirty="0"/>
+          </a:p>
+          <a:p>
             <a:endParaRPr lang="en-US" dirty="0"/>
           </a:p>
         </p:txBody>
@@ -986,7 +1005,7 @@
           <a:p>
             <a:fld id="{DA8B99DF-01BC-492A-8CEF-4FD88D18DD9D}" type="slidenum">
               <a:rPr lang="nl-BE" smtClean="0"/>
-              <a:t>26</a:t>
+              <a:t>25</a:t>
             </a:fld>
             <a:endParaRPr lang="nl-BE"/>
           </a:p>
@@ -1280,7 +1299,7 @@
           <a:p>
             <a:fld id="{DA8B99DF-01BC-492A-8CEF-4FD88D18DD9D}" type="slidenum">
               <a:rPr lang="nl-BE" smtClean="0"/>
-              <a:t>27</a:t>
+              <a:t>26</a:t>
             </a:fld>
             <a:endParaRPr lang="nl-BE"/>
           </a:p>
@@ -1574,7 +1593,7 @@
           <a:p>
             <a:fld id="{DA8B99DF-01BC-492A-8CEF-4FD88D18DD9D}" type="slidenum">
               <a:rPr lang="nl-BE" smtClean="0"/>
-              <a:t>28</a:t>
+              <a:t>27</a:t>
             </a:fld>
             <a:endParaRPr lang="nl-BE"/>
           </a:p>
@@ -1689,7 +1708,7 @@
           <a:p>
             <a:fld id="{DA8B99DF-01BC-492A-8CEF-4FD88D18DD9D}" type="slidenum">
               <a:rPr lang="nl-BE" smtClean="0"/>
-              <a:t>29</a:t>
+              <a:t>28</a:t>
             </a:fld>
             <a:endParaRPr lang="nl-BE"/>
           </a:p>
@@ -1773,7 +1792,7 @@
           <a:p>
             <a:fld id="{DA8B99DF-01BC-492A-8CEF-4FD88D18DD9D}" type="slidenum">
               <a:rPr lang="nl-BE" smtClean="0"/>
-              <a:t>34</a:t>
+              <a:t>33</a:t>
             </a:fld>
             <a:endParaRPr lang="nl-BE"/>
           </a:p>
@@ -1857,7 +1876,7 @@
           <a:p>
             <a:fld id="{DA8B99DF-01BC-492A-8CEF-4FD88D18DD9D}" type="slidenum">
               <a:rPr lang="nl-BE" smtClean="0"/>
-              <a:t>35</a:t>
+              <a:t>34</a:t>
             </a:fld>
             <a:endParaRPr lang="nl-BE"/>
           </a:p>
@@ -1941,7 +1960,7 @@
           <a:p>
             <a:fld id="{DA8B99DF-01BC-492A-8CEF-4FD88D18DD9D}" type="slidenum">
               <a:rPr lang="nl-BE" smtClean="0"/>
-              <a:t>38</a:t>
+              <a:t>37</a:t>
             </a:fld>
             <a:endParaRPr lang="nl-BE"/>
           </a:p>
@@ -2025,7 +2044,7 @@
           <a:p>
             <a:fld id="{DA8B99DF-01BC-492A-8CEF-4FD88D18DD9D}" type="slidenum">
               <a:rPr lang="nl-BE" smtClean="0"/>
-              <a:t>39</a:t>
+              <a:t>38</a:t>
             </a:fld>
             <a:endParaRPr lang="nl-BE"/>
           </a:p>
@@ -2112,7 +2131,7 @@
           <a:p>
             <a:fld id="{DA8B99DF-01BC-492A-8CEF-4FD88D18DD9D}" type="slidenum">
               <a:rPr lang="nl-BE" smtClean="0"/>
-              <a:t>44</a:t>
+              <a:t>43</a:t>
             </a:fld>
             <a:endParaRPr lang="nl-BE"/>
           </a:p>
@@ -13170,7 +13189,7 @@
             </a:r>
             <a:r>
               <a:rPr lang="pt-BR" dirty="0"/>
-              <a:t> reduz o passo usando o acúmulo de gradientes anteriores.</a:t>
+              <a:t> reduz o passo usando o acúmulo de gradientes anteriores, mas sofre com a redução excessiva do passo ao longo do tempo.</a:t>
             </a:r>
           </a:p>
           <a:p>
@@ -13198,7 +13217,7 @@
             </a:r>
             <a:r>
               <a:rPr lang="pt-BR" dirty="0"/>
-              <a:t> com termo momento (média dos gradientes).</a:t>
+              <a:t> com o termo momento (média dos gradientes).</a:t>
             </a:r>
           </a:p>
           <a:p>
@@ -13212,23 +13231,7 @@
                   <a:srgbClr val="00B050"/>
                 </a:solidFill>
               </a:rPr>
-              <a:t>não precisa de </a:t>
-            </a:r>
-            <a:r>
-              <a:rPr lang="pt-BR" b="1" i="1">
-                <a:solidFill>
-                  <a:srgbClr val="00B050"/>
-                </a:solidFill>
-              </a:rPr>
-              <a:t>ajuste de </a:t>
-            </a:r>
-            <a:r>
-              <a:rPr lang="pt-BR" b="1" i="1" dirty="0">
-                <a:solidFill>
-                  <a:srgbClr val="00B050"/>
-                </a:solidFill>
-              </a:rPr>
-              <a:t>nenhum </a:t>
+              <a:t>não precisa de ajuste de nenhum </a:t>
             </a:r>
             <a:r>
               <a:rPr lang="pt-BR" b="1" i="1" dirty="0" err="1">
@@ -13264,330 +13267,6 @@
 </file>
 
 <file path=ppt/slides/slide25.xml><?xml version="1.0" encoding="utf-8"?>
-<p:sld xmlns:a="http://schemas.openxmlformats.org/drawingml/2006/main" xmlns:r="http://schemas.openxmlformats.org/officeDocument/2006/relationships" xmlns:p="http://schemas.openxmlformats.org/presentationml/2006/main">
-  <p:cSld>
-    <p:spTree>
-      <p:nvGrpSpPr>
-        <p:cNvPr id="1" name=""/>
-        <p:cNvGrpSpPr/>
-        <p:nvPr/>
-      </p:nvGrpSpPr>
-      <p:grpSpPr>
-        <a:xfrm>
-          <a:off x="0" y="0"/>
-          <a:ext cx="0" cy="0"/>
-          <a:chOff x="0" y="0"/>
-          <a:chExt cx="0" cy="0"/>
-        </a:xfrm>
-      </p:grpSpPr>
-      <p:sp>
-        <p:nvSpPr>
-          <p:cNvPr id="2" name="Título 1">
-            <a:extLst>
-              <a:ext uri="{FF2B5EF4-FFF2-40B4-BE49-F238E27FC236}">
-                <a16:creationId xmlns:a16="http://schemas.microsoft.com/office/drawing/2014/main" id="{8FE2DAD2-5657-42A1-35B9-4BB9FD00F794}"/>
-              </a:ext>
-            </a:extLst>
-          </p:cNvPr>
-          <p:cNvSpPr>
-            <a:spLocks noGrp="1"/>
-          </p:cNvSpPr>
-          <p:nvPr>
-            <p:ph type="title"/>
-          </p:nvPr>
-        </p:nvSpPr>
-        <p:spPr>
-          <a:xfrm>
-            <a:off x="838200" y="365125"/>
-            <a:ext cx="10896600" cy="1325563"/>
-          </a:xfrm>
-        </p:spPr>
-        <p:txBody>
-          <a:bodyPr/>
-          <a:lstStyle/>
-          <a:p>
-            <a:r>
-              <a:rPr lang="pt-BR" dirty="0"/>
-              <a:t>Variação adaptativa dos passos</a:t>
-            </a:r>
-          </a:p>
-        </p:txBody>
-      </p:sp>
-      <mc:AlternateContent xmlns:mc="http://schemas.openxmlformats.org/markup-compatibility/2006" xmlns:a14="http://schemas.microsoft.com/office/drawing/2010/main">
-        <mc:Choice Requires="a14">
-          <p:sp>
-            <p:nvSpPr>
-              <p:cNvPr id="3" name="Espaço Reservado para Conteúdo 2">
-                <a:extLst>
-                  <a:ext uri="{FF2B5EF4-FFF2-40B4-BE49-F238E27FC236}">
-                    <a16:creationId xmlns:a16="http://schemas.microsoft.com/office/drawing/2014/main" id="{90C1EAA3-4293-62D4-5778-91C90AA88537}"/>
-                  </a:ext>
-                </a:extLst>
-              </p:cNvPr>
-              <p:cNvSpPr>
-                <a:spLocks noGrp="1"/>
-              </p:cNvSpPr>
-              <p:nvPr>
-                <p:ph idx="1"/>
-              </p:nvPr>
-            </p:nvSpPr>
-            <p:spPr>
-              <a:xfrm>
-                <a:off x="838199" y="1825624"/>
-                <a:ext cx="11209257" cy="5032375"/>
-              </a:xfrm>
-            </p:spPr>
-            <p:txBody>
-              <a:bodyPr>
-                <a:normAutofit/>
-              </a:bodyPr>
-              <a:lstStyle/>
-              <a:p>
-                <a:r>
-                  <a:rPr lang="pt-BR" dirty="0"/>
-                  <a:t>Usa</a:t>
-                </a:r>
-                <a:r>
-                  <a:rPr lang="pt-BR" b="1" i="1" dirty="0">
-                    <a:solidFill>
-                      <a:srgbClr val="00B050"/>
-                    </a:solidFill>
-                  </a:rPr>
-                  <a:t> passos de aprendizagem </a:t>
-                </a:r>
-                <a:r>
-                  <a:rPr lang="pt-BR" b="1" i="1" dirty="0">
-                    <a:solidFill>
-                      <a:schemeClr val="accent2"/>
-                    </a:solidFill>
-                  </a:rPr>
-                  <a:t>diferentes</a:t>
-                </a:r>
-                <a:r>
-                  <a:rPr lang="pt-BR" b="1" i="1" dirty="0">
-                    <a:solidFill>
-                      <a:srgbClr val="00B050"/>
-                    </a:solidFill>
-                  </a:rPr>
-                  <a:t> para cada peso </a:t>
-                </a:r>
-                <a:r>
-                  <a:rPr lang="pt-BR" dirty="0"/>
-                  <a:t>do modelo, </a:t>
-                </a:r>
-                <a:r>
-                  <a:rPr lang="pt-BR" b="1" i="1" dirty="0">
-                    <a:solidFill>
-                      <a:srgbClr val="00B050"/>
-                    </a:solidFill>
-                  </a:rPr>
-                  <a:t>os atualizando de forma independente</a:t>
-                </a:r>
-                <a:r>
-                  <a:rPr lang="pt-BR" dirty="0"/>
-                  <a:t> de acordo com a </a:t>
-                </a:r>
-                <a:r>
-                  <a:rPr lang="pt-BR" b="1" i="1" dirty="0">
-                    <a:solidFill>
-                      <a:schemeClr val="accent1"/>
-                    </a:solidFill>
-                  </a:rPr>
-                  <a:t>inclinação da superfície</a:t>
-                </a:r>
-                <a:r>
-                  <a:rPr lang="pt-BR" dirty="0"/>
-                  <a:t> na direção dos pesos.</a:t>
-                </a:r>
-              </a:p>
-              <a:p>
-                <a:r>
-                  <a:rPr lang="pt-BR" dirty="0"/>
-                  <a:t>Na </a:t>
-                </a:r>
-                <a:r>
-                  <a:rPr lang="pt-BR" b="1" i="1" dirty="0">
-                    <a:solidFill>
-                      <a:srgbClr val="7030A0"/>
-                    </a:solidFill>
-                  </a:rPr>
-                  <a:t>variação adaptativa</a:t>
-                </a:r>
-                <a:r>
-                  <a:rPr lang="pt-BR" dirty="0"/>
-                  <a:t>, o passo</a:t>
-                </a:r>
-                <a14:m>
-                  <m:oMath xmlns:m="http://schemas.openxmlformats.org/officeDocument/2006/math">
-                    <m:r>
-                      <a:rPr lang="pt-BR" i="1">
-                        <a:latin typeface="Cambria Math" panose="02040503050406030204" pitchFamily="18" charset="0"/>
-                        <a:ea typeface="Cambria Math" panose="02040503050406030204" pitchFamily="18" charset="0"/>
-                      </a:rPr>
-                      <m:t> </m:t>
-                    </m:r>
-                  </m:oMath>
-                </a14:m>
-                <a:r>
-                  <a:rPr lang="pt-BR" dirty="0"/>
-                  <a:t>de aprendizagem é </a:t>
-                </a:r>
-                <a:r>
-                  <a:rPr lang="pt-BR" b="1" i="1" dirty="0">
-                    <a:solidFill>
-                      <a:srgbClr val="00B050"/>
-                    </a:solidFill>
-                  </a:rPr>
-                  <a:t>ajustado adaptativamente </a:t>
-                </a:r>
-                <a:r>
-                  <a:rPr lang="pt-BR" dirty="0"/>
-                  <a:t>de acordo com a </a:t>
-                </a:r>
-                <a:r>
-                  <a:rPr lang="pt-BR" b="1" i="1" dirty="0">
-                    <a:solidFill>
-                      <a:srgbClr val="7030A0"/>
-                    </a:solidFill>
-                  </a:rPr>
-                  <a:t>inclinação da superfície de erro</a:t>
-                </a:r>
-                <a:r>
-                  <a:rPr lang="pt-BR" dirty="0"/>
-                  <a:t>. </a:t>
-                </a:r>
-              </a:p>
-              <a:p>
-                <a:r>
-                  <a:rPr lang="pt-BR" dirty="0"/>
-                  <a:t>Pode ser </a:t>
-                </a:r>
-                <a:r>
-                  <a:rPr lang="pt-BR" b="1" i="1" dirty="0">
-                    <a:solidFill>
-                      <a:srgbClr val="00B050"/>
-                    </a:solidFill>
-                  </a:rPr>
-                  <a:t>combinado com o termo momentum </a:t>
-                </a:r>
-                <a:r>
-                  <a:rPr lang="pt-BR" dirty="0"/>
-                  <a:t>para ajustar o termo de atualização dos pesos, melhorando ainda mais a convergência.</a:t>
-                </a:r>
-              </a:p>
-              <a:p>
-                <a:r>
-                  <a:rPr lang="pt-BR" dirty="0"/>
-                  <a:t>Uma </a:t>
-                </a:r>
-                <a:r>
-                  <a:rPr lang="pt-BR" b="1" i="1" dirty="0">
-                    <a:solidFill>
-                      <a:srgbClr val="00B050"/>
-                    </a:solidFill>
-                  </a:rPr>
-                  <a:t>vantagem</a:t>
-                </a:r>
-                <a:r>
-                  <a:rPr lang="pt-BR" dirty="0"/>
-                  <a:t> é que na maioria dos casos, </a:t>
-                </a:r>
-                <a:r>
-                  <a:rPr lang="pt-BR" b="1" i="1" dirty="0">
-                    <a:solidFill>
-                      <a:srgbClr val="00B050"/>
-                    </a:solidFill>
-                  </a:rPr>
-                  <a:t>não é necessário se ajustar manualmente nenhum hiperparâmetro</a:t>
-                </a:r>
-                <a:r>
-                  <a:rPr lang="pt-BR" dirty="0"/>
-                  <a:t> como no caso das técnicas de redução gradual e do termo momentum.</a:t>
-                </a:r>
-              </a:p>
-              <a:p>
-                <a:r>
-                  <a:rPr lang="pt-BR" dirty="0"/>
-                  <a:t>As técnicas mais conhecidas são </a:t>
-                </a:r>
-                <a:r>
-                  <a:rPr lang="pt-BR" dirty="0" err="1"/>
-                  <a:t>RMSProp</a:t>
-                </a:r>
-                <a:r>
-                  <a:rPr lang="pt-BR" dirty="0"/>
-                  <a:t>, </a:t>
-                </a:r>
-                <a:r>
-                  <a:rPr lang="pt-BR" dirty="0" err="1"/>
-                  <a:t>AdaGrad</a:t>
-                </a:r>
-                <a:r>
-                  <a:rPr lang="pt-BR" dirty="0"/>
-                  <a:t> e Adam.</a:t>
-                </a:r>
-              </a:p>
-            </p:txBody>
-          </p:sp>
-        </mc:Choice>
-        <mc:Fallback xmlns="">
-          <p:sp>
-            <p:nvSpPr>
-              <p:cNvPr id="3" name="Espaço Reservado para Conteúdo 2">
-                <a:extLst>
-                  <a:ext uri="{FF2B5EF4-FFF2-40B4-BE49-F238E27FC236}">
-                    <a16:creationId xmlns:a16="http://schemas.microsoft.com/office/drawing/2014/main" id="{90C1EAA3-4293-62D4-5778-91C90AA88537}"/>
-                  </a:ext>
-                </a:extLst>
-              </p:cNvPr>
-              <p:cNvSpPr>
-                <a:spLocks noGrp="1" noRot="1" noChangeAspect="1" noMove="1" noResize="1" noEditPoints="1" noAdjustHandles="1" noChangeArrowheads="1" noChangeShapeType="1" noTextEdit="1"/>
-              </p:cNvSpPr>
-              <p:nvPr>
-                <p:ph idx="1"/>
-              </p:nvPr>
-            </p:nvSpPr>
-            <p:spPr>
-              <a:xfrm>
-                <a:off x="838199" y="1825624"/>
-                <a:ext cx="11209257" cy="5032375"/>
-              </a:xfrm>
-              <a:blipFill>
-                <a:blip r:embed="rId2"/>
-                <a:stretch>
-                  <a:fillRect l="-924" t="-1937"/>
-                </a:stretch>
-              </a:blipFill>
-            </p:spPr>
-            <p:txBody>
-              <a:bodyPr/>
-              <a:lstStyle/>
-              <a:p>
-                <a:r>
-                  <a:rPr lang="en-US">
-                    <a:noFill/>
-                  </a:rPr>
-                  <a:t> </a:t>
-                </a:r>
-              </a:p>
-            </p:txBody>
-          </p:sp>
-        </mc:Fallback>
-      </mc:AlternateContent>
-    </p:spTree>
-    <p:extLst>
-      <p:ext uri="{BB962C8B-B14F-4D97-AF65-F5344CB8AC3E}">
-        <p14:creationId xmlns:p14="http://schemas.microsoft.com/office/powerpoint/2010/main" val="3484290040"/>
-      </p:ext>
-    </p:extLst>
-  </p:cSld>
-  <p:clrMapOvr>
-    <a:masterClrMapping/>
-  </p:clrMapOvr>
-</p:sld>
-</file>
-
-<file path=ppt/slides/slide26.xml><?xml version="1.0" encoding="utf-8"?>
 <p:sld xmlns:a="http://schemas.openxmlformats.org/drawingml/2006/main" xmlns:r="http://schemas.openxmlformats.org/officeDocument/2006/relationships" xmlns:p="http://schemas.openxmlformats.org/presentationml/2006/main">
   <p:cSld>
     <p:spTree>
@@ -14758,7 +14437,31 @@
             </a:pPr>
             <a:r>
               <a:rPr lang="pt-BR" dirty="0"/>
-              <a:t>O passo não influencia na direção, apenas no tamanho do deslocamento. </a:t>
+              <a:t>O </a:t>
+            </a:r>
+            <a:r>
+              <a:rPr lang="pt-BR" b="1" i="1" dirty="0">
+                <a:solidFill>
+                  <a:schemeClr val="accent2"/>
+                </a:solidFill>
+              </a:rPr>
+              <a:t>passo não influencia na direção</a:t>
+            </a:r>
+            <a:r>
+              <a:rPr lang="pt-BR" dirty="0"/>
+              <a:t>, </a:t>
+            </a:r>
+            <a:r>
+              <a:rPr lang="pt-BR" b="1" i="1" dirty="0">
+                <a:solidFill>
+                  <a:srgbClr val="00B050"/>
+                </a:solidFill>
+              </a:rPr>
+              <a:t>apenas no tamanho</a:t>
+            </a:r>
+            <a:r>
+              <a:rPr lang="pt-BR" dirty="0"/>
+              <a:t> do deslocamento. </a:t>
             </a:r>
             <a:endParaRPr lang="pt-BR" sz="2800" dirty="0"/>
           </a:p>
@@ -14821,7 +14524,7 @@
 </p:sld>
 </file>
 
-<file path=ppt/slides/slide27.xml><?xml version="1.0" encoding="utf-8"?>
+<file path=ppt/slides/slide26.xml><?xml version="1.0" encoding="utf-8"?>
 <p:sld xmlns:a="http://schemas.openxmlformats.org/drawingml/2006/main" xmlns:r="http://schemas.openxmlformats.org/officeDocument/2006/relationships" xmlns:p="http://schemas.openxmlformats.org/presentationml/2006/main">
   <p:cSld>
     <p:spTree>
@@ -16069,7 +15772,7 @@
 </p:sld>
 </file>
 
-<file path=ppt/slides/slide28.xml><?xml version="1.0" encoding="utf-8"?>
+<file path=ppt/slides/slide27.xml><?xml version="1.0" encoding="utf-8"?>
 <p:sld xmlns:a="http://schemas.openxmlformats.org/drawingml/2006/main" xmlns:r="http://schemas.openxmlformats.org/officeDocument/2006/relationships" xmlns:p="http://schemas.openxmlformats.org/presentationml/2006/main">
   <p:cSld>
     <p:spTree>
@@ -17224,7 +16927,7 @@
 </p:sld>
 </file>
 
-<file path=ppt/slides/slide29.xml><?xml version="1.0" encoding="utf-8"?>
+<file path=ppt/slides/slide28.xml><?xml version="1.0" encoding="utf-8"?>
 <p:sld xmlns:a="http://schemas.openxmlformats.org/drawingml/2006/main" xmlns:r="http://schemas.openxmlformats.org/officeDocument/2006/relationships" xmlns:p="http://schemas.openxmlformats.org/presentationml/2006/main">
   <p:cSld>
     <p:spTree>
@@ -17388,6 +17091,91 @@
     <p:extLst>
       <p:ext uri="{BB962C8B-B14F-4D97-AF65-F5344CB8AC3E}">
         <p14:creationId xmlns:p14="http://schemas.microsoft.com/office/powerpoint/2010/main" val="2149093365"/>
+      </p:ext>
+    </p:extLst>
+  </p:cSld>
+  <p:clrMapOvr>
+    <a:masterClrMapping/>
+  </p:clrMapOvr>
+</p:sld>
+</file>
+
+<file path=ppt/slides/slide29.xml><?xml version="1.0" encoding="utf-8"?>
+<p:sld xmlns:a="http://schemas.openxmlformats.org/drawingml/2006/main" xmlns:r="http://schemas.openxmlformats.org/officeDocument/2006/relationships" xmlns:p="http://schemas.openxmlformats.org/presentationml/2006/main">
+  <p:cSld>
+    <p:spTree>
+      <p:nvGrpSpPr>
+        <p:cNvPr id="1" name=""/>
+        <p:cNvGrpSpPr/>
+        <p:nvPr/>
+      </p:nvGrpSpPr>
+      <p:grpSpPr>
+        <a:xfrm>
+          <a:off x="0" y="0"/>
+          <a:ext cx="0" cy="0"/>
+          <a:chOff x="0" y="0"/>
+          <a:chExt cx="0" cy="0"/>
+        </a:xfrm>
+      </p:grpSpPr>
+      <p:sp>
+        <p:nvSpPr>
+          <p:cNvPr id="4" name="Título 1">
+            <a:extLst>
+              <a:ext uri="{FF2B5EF4-FFF2-40B4-BE49-F238E27FC236}">
+                <a16:creationId xmlns:a16="http://schemas.microsoft.com/office/drawing/2014/main" id="{32666AC8-2E17-4DB4-B0F5-60C640CCFD2E}"/>
+              </a:ext>
+            </a:extLst>
+          </p:cNvPr>
+          <p:cNvSpPr txBox="1">
+            <a:spLocks/>
+          </p:cNvSpPr>
+          <p:nvPr/>
+        </p:nvSpPr>
+        <p:spPr>
+          <a:xfrm>
+            <a:off x="1431533" y="2720526"/>
+            <a:ext cx="9144000" cy="1029541"/>
+          </a:xfrm>
+          <a:prstGeom prst="rect">
+            <a:avLst/>
+          </a:prstGeom>
+        </p:spPr>
+        <p:txBody>
+          <a:bodyPr vert="horz" lIns="91440" tIns="45720" rIns="91440" bIns="45720" rtlCol="0" anchor="ctr">
+            <a:normAutofit/>
+          </a:bodyPr>
+          <a:lstStyle>
+            <a:lvl1pPr algn="l" defTabSz="914400" rtl="0" eaLnBrk="1" latinLnBrk="0" hangingPunct="1">
+              <a:lnSpc>
+                <a:spcPct val="90000"/>
+              </a:lnSpc>
+              <a:spcBef>
+                <a:spcPct val="0"/>
+              </a:spcBef>
+              <a:buNone/>
+              <a:defRPr sz="4400" kern="1200">
+                <a:solidFill>
+                  <a:schemeClr val="tx1"/>
+                </a:solidFill>
+                <a:latin typeface="+mj-lt"/>
+                <a:ea typeface="+mj-ea"/>
+                <a:cs typeface="+mj-cs"/>
+              </a:defRPr>
+            </a:lvl1pPr>
+          </a:lstStyle>
+          <a:p>
+            <a:pPr algn="ctr"/>
+            <a:r>
+              <a:rPr lang="pt-BR" sz="6600" dirty="0"/>
+              <a:t>Obrigado!</a:t>
+            </a:r>
+          </a:p>
+        </p:txBody>
+      </p:sp>
+    </p:spTree>
+    <p:extLst>
+      <p:ext uri="{BB962C8B-B14F-4D97-AF65-F5344CB8AC3E}">
+        <p14:creationId xmlns:p14="http://schemas.microsoft.com/office/powerpoint/2010/main" val="309872539"/>
       </p:ext>
     </p:extLst>
   </p:cSld>
@@ -17756,91 +17544,6 @@
           <a:chExt cx="0" cy="0"/>
         </a:xfrm>
       </p:grpSpPr>
-      <p:sp>
-        <p:nvSpPr>
-          <p:cNvPr id="4" name="Título 1">
-            <a:extLst>
-              <a:ext uri="{FF2B5EF4-FFF2-40B4-BE49-F238E27FC236}">
-                <a16:creationId xmlns:a16="http://schemas.microsoft.com/office/drawing/2014/main" id="{32666AC8-2E17-4DB4-B0F5-60C640CCFD2E}"/>
-              </a:ext>
-            </a:extLst>
-          </p:cNvPr>
-          <p:cNvSpPr txBox="1">
-            <a:spLocks/>
-          </p:cNvSpPr>
-          <p:nvPr/>
-        </p:nvSpPr>
-        <p:spPr>
-          <a:xfrm>
-            <a:off x="1431533" y="2720526"/>
-            <a:ext cx="9144000" cy="1029541"/>
-          </a:xfrm>
-          <a:prstGeom prst="rect">
-            <a:avLst/>
-          </a:prstGeom>
-        </p:spPr>
-        <p:txBody>
-          <a:bodyPr vert="horz" lIns="91440" tIns="45720" rIns="91440" bIns="45720" rtlCol="0" anchor="ctr">
-            <a:normAutofit/>
-          </a:bodyPr>
-          <a:lstStyle>
-            <a:lvl1pPr algn="l" defTabSz="914400" rtl="0" eaLnBrk="1" latinLnBrk="0" hangingPunct="1">
-              <a:lnSpc>
-                <a:spcPct val="90000"/>
-              </a:lnSpc>
-              <a:spcBef>
-                <a:spcPct val="0"/>
-              </a:spcBef>
-              <a:buNone/>
-              <a:defRPr sz="4400" kern="1200">
-                <a:solidFill>
-                  <a:schemeClr val="tx1"/>
-                </a:solidFill>
-                <a:latin typeface="+mj-lt"/>
-                <a:ea typeface="+mj-ea"/>
-                <a:cs typeface="+mj-cs"/>
-              </a:defRPr>
-            </a:lvl1pPr>
-          </a:lstStyle>
-          <a:p>
-            <a:pPr algn="ctr"/>
-            <a:r>
-              <a:rPr lang="pt-BR" sz="6600" dirty="0"/>
-              <a:t>Obrigado!</a:t>
-            </a:r>
-          </a:p>
-        </p:txBody>
-      </p:sp>
-    </p:spTree>
-    <p:extLst>
-      <p:ext uri="{BB962C8B-B14F-4D97-AF65-F5344CB8AC3E}">
-        <p14:creationId xmlns:p14="http://schemas.microsoft.com/office/powerpoint/2010/main" val="309872539"/>
-      </p:ext>
-    </p:extLst>
-  </p:cSld>
-  <p:clrMapOvr>
-    <a:masterClrMapping/>
-  </p:clrMapOvr>
-</p:sld>
-</file>
-
-<file path=ppt/slides/slide31.xml><?xml version="1.0" encoding="utf-8"?>
-<p:sld xmlns:a="http://schemas.openxmlformats.org/drawingml/2006/main" xmlns:r="http://schemas.openxmlformats.org/officeDocument/2006/relationships" xmlns:p="http://schemas.openxmlformats.org/presentationml/2006/main">
-  <p:cSld>
-    <p:spTree>
-      <p:nvGrpSpPr>
-        <p:cNvPr id="1" name=""/>
-        <p:cNvGrpSpPr/>
-        <p:nvPr/>
-      </p:nvGrpSpPr>
-      <p:grpSpPr>
-        <a:xfrm>
-          <a:off x="0" y="0"/>
-          <a:ext cx="0" cy="0"/>
-          <a:chOff x="0" y="0"/>
-          <a:chExt cx="0" cy="0"/>
-        </a:xfrm>
-      </p:grpSpPr>
       <p:pic>
         <p:nvPicPr>
           <p:cNvPr id="1032" name="Picture 8" descr="Nenhuma descrição de foto disponível."/>
@@ -18100,7 +17803,7 @@
 </p:sld>
 </file>
 
-<file path=ppt/slides/slide32.xml><?xml version="1.0" encoding="utf-8"?>
+<file path=ppt/slides/slide31.xml><?xml version="1.0" encoding="utf-8"?>
 <p:sld xmlns:a="http://schemas.openxmlformats.org/drawingml/2006/main" xmlns:r="http://schemas.openxmlformats.org/officeDocument/2006/relationships" xmlns:p="http://schemas.openxmlformats.org/presentationml/2006/main">
   <p:cSld>
     <p:spTree>
@@ -18158,7 +17861,7 @@
 </p:sld>
 </file>
 
-<file path=ppt/slides/slide33.xml><?xml version="1.0" encoding="utf-8"?>
+<file path=ppt/slides/slide32.xml><?xml version="1.0" encoding="utf-8"?>
 <p:sld xmlns:a="http://schemas.openxmlformats.org/drawingml/2006/main" xmlns:r="http://schemas.openxmlformats.org/officeDocument/2006/relationships" xmlns:p="http://schemas.openxmlformats.org/presentationml/2006/main">
   <p:cSld>
     <p:spTree>
@@ -19907,7 +19610,7 @@
 </p:sld>
 </file>
 
-<file path=ppt/slides/slide34.xml><?xml version="1.0" encoding="utf-8"?>
+<file path=ppt/slides/slide33.xml><?xml version="1.0" encoding="utf-8"?>
 <p:sld xmlns:a="http://schemas.openxmlformats.org/drawingml/2006/main" xmlns:r="http://schemas.openxmlformats.org/officeDocument/2006/relationships" xmlns:p="http://schemas.openxmlformats.org/presentationml/2006/main">
   <p:cSld>
     <p:spTree>
@@ -21848,7 +21551,7 @@
 </p:sld>
 </file>
 
-<file path=ppt/slides/slide35.xml><?xml version="1.0" encoding="utf-8"?>
+<file path=ppt/slides/slide34.xml><?xml version="1.0" encoding="utf-8"?>
 <p:sld xmlns:a="http://schemas.openxmlformats.org/drawingml/2006/main" xmlns:r="http://schemas.openxmlformats.org/officeDocument/2006/relationships" xmlns:p="http://schemas.openxmlformats.org/presentationml/2006/main">
   <p:cSld>
     <p:spTree>
@@ -22998,7 +22701,7 @@
 </p:sld>
 </file>
 
-<file path=ppt/slides/slide36.xml><?xml version="1.0" encoding="utf-8"?>
+<file path=ppt/slides/slide35.xml><?xml version="1.0" encoding="utf-8"?>
 <p:sld xmlns:a="http://schemas.openxmlformats.org/drawingml/2006/main" xmlns:r="http://schemas.openxmlformats.org/officeDocument/2006/relationships" xmlns:p="http://schemas.openxmlformats.org/presentationml/2006/main">
   <p:cSld>
     <p:spTree>
@@ -24343,7 +24046,7 @@
 </p:sld>
 </file>
 
-<file path=ppt/slides/slide37.xml><?xml version="1.0" encoding="utf-8"?>
+<file path=ppt/slides/slide36.xml><?xml version="1.0" encoding="utf-8"?>
 <p:sld xmlns:a="http://schemas.openxmlformats.org/drawingml/2006/main" xmlns:r="http://schemas.openxmlformats.org/officeDocument/2006/relationships" xmlns:p="http://schemas.openxmlformats.org/presentationml/2006/main">
   <p:cSld>
     <p:spTree>
@@ -25687,7 +25390,7 @@
 </p:sld>
 </file>
 
-<file path=ppt/slides/slide38.xml><?xml version="1.0" encoding="utf-8"?>
+<file path=ppt/slides/slide37.xml><?xml version="1.0" encoding="utf-8"?>
 <p:sld xmlns:a="http://schemas.openxmlformats.org/drawingml/2006/main" xmlns:r="http://schemas.openxmlformats.org/officeDocument/2006/relationships" xmlns:p="http://schemas.openxmlformats.org/presentationml/2006/main">
   <p:cSld>
     <p:spTree>
@@ -28255,7 +27958,7 @@
 </p:sld>
 </file>
 
-<file path=ppt/slides/slide39.xml><?xml version="1.0" encoding="utf-8"?>
+<file path=ppt/slides/slide38.xml><?xml version="1.0" encoding="utf-8"?>
 <p:sld xmlns:a="http://schemas.openxmlformats.org/drawingml/2006/main" xmlns:r="http://schemas.openxmlformats.org/officeDocument/2006/relationships" xmlns:p="http://schemas.openxmlformats.org/presentationml/2006/main">
   <p:cSld>
     <p:spTree>
@@ -30015,6 +29718,3432 @@
 </p:sld>
 </file>
 
+<file path=ppt/slides/slide39.xml><?xml version="1.0" encoding="utf-8"?>
+<p:sld xmlns:a="http://schemas.openxmlformats.org/drawingml/2006/main" xmlns:r="http://schemas.openxmlformats.org/officeDocument/2006/relationships" xmlns:p="http://schemas.openxmlformats.org/presentationml/2006/main">
+  <p:cSld>
+    <p:spTree>
+      <p:nvGrpSpPr>
+        <p:cNvPr id="1" name=""/>
+        <p:cNvGrpSpPr/>
+        <p:nvPr/>
+      </p:nvGrpSpPr>
+      <p:grpSpPr>
+        <a:xfrm>
+          <a:off x="0" y="0"/>
+          <a:ext cx="0" cy="0"/>
+          <a:chOff x="0" y="0"/>
+          <a:chExt cx="0" cy="0"/>
+        </a:xfrm>
+      </p:grpSpPr>
+      <p:grpSp>
+        <p:nvGrpSpPr>
+          <p:cNvPr id="167" name="Group 166"/>
+          <p:cNvGrpSpPr/>
+          <p:nvPr/>
+        </p:nvGrpSpPr>
+        <p:grpSpPr>
+          <a:xfrm>
+            <a:off x="6818898" y="2134388"/>
+            <a:ext cx="3549478" cy="3157828"/>
+            <a:chOff x="6818898" y="2134388"/>
+            <a:chExt cx="3549478" cy="3157828"/>
+          </a:xfrm>
+        </p:grpSpPr>
+        <p:sp>
+          <p:nvSpPr>
+            <p:cNvPr id="108" name="Oval 107"/>
+            <p:cNvSpPr/>
+            <p:nvPr/>
+          </p:nvSpPr>
+          <p:spPr>
+            <a:xfrm>
+              <a:off x="7353299" y="2749031"/>
+              <a:ext cx="2160000" cy="2160000"/>
+            </a:xfrm>
+            <a:prstGeom prst="ellipse">
+              <a:avLst/>
+            </a:prstGeom>
+            <a:noFill/>
+            <a:ln>
+              <a:solidFill>
+                <a:schemeClr val="tx1"/>
+              </a:solidFill>
+            </a:ln>
+          </p:spPr>
+          <p:style>
+            <a:lnRef idx="2">
+              <a:schemeClr val="accent1">
+                <a:shade val="50000"/>
+              </a:schemeClr>
+            </a:lnRef>
+            <a:fillRef idx="1">
+              <a:schemeClr val="accent1"/>
+            </a:fillRef>
+            <a:effectRef idx="0">
+              <a:schemeClr val="accent1"/>
+            </a:effectRef>
+            <a:fontRef idx="minor">
+              <a:schemeClr val="lt1"/>
+            </a:fontRef>
+          </p:style>
+          <p:txBody>
+            <a:bodyPr rtlCol="0" anchor="ctr"/>
+            <a:lstStyle/>
+            <a:p>
+              <a:pPr algn="ctr"/>
+              <a:endParaRPr lang="pt-BR"/>
+            </a:p>
+          </p:txBody>
+        </p:sp>
+        <p:sp>
+          <p:nvSpPr>
+            <p:cNvPr id="109" name="Oval 108"/>
+            <p:cNvSpPr/>
+            <p:nvPr/>
+          </p:nvSpPr>
+          <p:spPr>
+            <a:xfrm>
+              <a:off x="7533299" y="2929031"/>
+              <a:ext cx="1800000" cy="1800000"/>
+            </a:xfrm>
+            <a:prstGeom prst="ellipse">
+              <a:avLst/>
+            </a:prstGeom>
+            <a:noFill/>
+            <a:ln>
+              <a:solidFill>
+                <a:schemeClr val="tx1"/>
+              </a:solidFill>
+            </a:ln>
+          </p:spPr>
+          <p:style>
+            <a:lnRef idx="2">
+              <a:schemeClr val="accent1">
+                <a:shade val="50000"/>
+              </a:schemeClr>
+            </a:lnRef>
+            <a:fillRef idx="1">
+              <a:schemeClr val="accent1"/>
+            </a:fillRef>
+            <a:effectRef idx="0">
+              <a:schemeClr val="accent1"/>
+            </a:effectRef>
+            <a:fontRef idx="minor">
+              <a:schemeClr val="lt1"/>
+            </a:fontRef>
+          </p:style>
+          <p:txBody>
+            <a:bodyPr rtlCol="0" anchor="ctr"/>
+            <a:lstStyle/>
+            <a:p>
+              <a:pPr algn="ctr"/>
+              <a:endParaRPr lang="pt-BR"/>
+            </a:p>
+          </p:txBody>
+        </p:sp>
+        <p:sp>
+          <p:nvSpPr>
+            <p:cNvPr id="110" name="Oval 109"/>
+            <p:cNvSpPr/>
+            <p:nvPr/>
+          </p:nvSpPr>
+          <p:spPr>
+            <a:xfrm>
+              <a:off x="7713299" y="3109031"/>
+              <a:ext cx="1440000" cy="1440000"/>
+            </a:xfrm>
+            <a:prstGeom prst="ellipse">
+              <a:avLst/>
+            </a:prstGeom>
+            <a:noFill/>
+            <a:ln>
+              <a:solidFill>
+                <a:schemeClr val="tx1"/>
+              </a:solidFill>
+            </a:ln>
+          </p:spPr>
+          <p:style>
+            <a:lnRef idx="2">
+              <a:schemeClr val="accent1">
+                <a:shade val="50000"/>
+              </a:schemeClr>
+            </a:lnRef>
+            <a:fillRef idx="1">
+              <a:schemeClr val="accent1"/>
+            </a:fillRef>
+            <a:effectRef idx="0">
+              <a:schemeClr val="accent1"/>
+            </a:effectRef>
+            <a:fontRef idx="minor">
+              <a:schemeClr val="lt1"/>
+            </a:fontRef>
+          </p:style>
+          <p:txBody>
+            <a:bodyPr rtlCol="0" anchor="ctr"/>
+            <a:lstStyle/>
+            <a:p>
+              <a:pPr algn="ctr"/>
+              <a:endParaRPr lang="pt-BR"/>
+            </a:p>
+          </p:txBody>
+        </p:sp>
+        <p:sp>
+          <p:nvSpPr>
+            <p:cNvPr id="111" name="Oval 110"/>
+            <p:cNvSpPr/>
+            <p:nvPr/>
+          </p:nvSpPr>
+          <p:spPr>
+            <a:xfrm>
+              <a:off x="7893299" y="3289031"/>
+              <a:ext cx="1080000" cy="1080000"/>
+            </a:xfrm>
+            <a:prstGeom prst="ellipse">
+              <a:avLst/>
+            </a:prstGeom>
+            <a:noFill/>
+            <a:ln>
+              <a:solidFill>
+                <a:schemeClr val="tx1"/>
+              </a:solidFill>
+            </a:ln>
+          </p:spPr>
+          <p:style>
+            <a:lnRef idx="2">
+              <a:schemeClr val="accent1">
+                <a:shade val="50000"/>
+              </a:schemeClr>
+            </a:lnRef>
+            <a:fillRef idx="1">
+              <a:schemeClr val="accent1"/>
+            </a:fillRef>
+            <a:effectRef idx="0">
+              <a:schemeClr val="accent1"/>
+            </a:effectRef>
+            <a:fontRef idx="minor">
+              <a:schemeClr val="lt1"/>
+            </a:fontRef>
+          </p:style>
+          <p:txBody>
+            <a:bodyPr rtlCol="0" anchor="ctr"/>
+            <a:lstStyle/>
+            <a:p>
+              <a:pPr algn="ctr"/>
+              <a:endParaRPr lang="pt-BR"/>
+            </a:p>
+          </p:txBody>
+        </p:sp>
+        <p:sp>
+          <p:nvSpPr>
+            <p:cNvPr id="112" name="Oval 111"/>
+            <p:cNvSpPr/>
+            <p:nvPr/>
+          </p:nvSpPr>
+          <p:spPr>
+            <a:xfrm>
+              <a:off x="8073299" y="3469031"/>
+              <a:ext cx="720000" cy="720000"/>
+            </a:xfrm>
+            <a:prstGeom prst="ellipse">
+              <a:avLst/>
+            </a:prstGeom>
+            <a:noFill/>
+            <a:ln>
+              <a:solidFill>
+                <a:schemeClr val="tx1"/>
+              </a:solidFill>
+            </a:ln>
+          </p:spPr>
+          <p:style>
+            <a:lnRef idx="2">
+              <a:schemeClr val="accent1">
+                <a:shade val="50000"/>
+              </a:schemeClr>
+            </a:lnRef>
+            <a:fillRef idx="1">
+              <a:schemeClr val="accent1"/>
+            </a:fillRef>
+            <a:effectRef idx="0">
+              <a:schemeClr val="accent1"/>
+            </a:effectRef>
+            <a:fontRef idx="minor">
+              <a:schemeClr val="lt1"/>
+            </a:fontRef>
+          </p:style>
+          <p:txBody>
+            <a:bodyPr rtlCol="0" anchor="ctr"/>
+            <a:lstStyle/>
+            <a:p>
+              <a:pPr algn="ctr"/>
+              <a:endParaRPr lang="pt-BR"/>
+            </a:p>
+          </p:txBody>
+        </p:sp>
+        <p:sp>
+          <p:nvSpPr>
+            <p:cNvPr id="113" name="Oval 112"/>
+            <p:cNvSpPr/>
+            <p:nvPr/>
+          </p:nvSpPr>
+          <p:spPr>
+            <a:xfrm>
+              <a:off x="8253299" y="3649031"/>
+              <a:ext cx="360000" cy="360000"/>
+            </a:xfrm>
+            <a:prstGeom prst="ellipse">
+              <a:avLst/>
+            </a:prstGeom>
+            <a:noFill/>
+            <a:ln>
+              <a:solidFill>
+                <a:schemeClr val="tx1"/>
+              </a:solidFill>
+            </a:ln>
+          </p:spPr>
+          <p:style>
+            <a:lnRef idx="2">
+              <a:schemeClr val="accent1">
+                <a:shade val="50000"/>
+              </a:schemeClr>
+            </a:lnRef>
+            <a:fillRef idx="1">
+              <a:schemeClr val="accent1"/>
+            </a:fillRef>
+            <a:effectRef idx="0">
+              <a:schemeClr val="accent1"/>
+            </a:effectRef>
+            <a:fontRef idx="minor">
+              <a:schemeClr val="lt1"/>
+            </a:fontRef>
+          </p:style>
+          <p:txBody>
+            <a:bodyPr rtlCol="0" anchor="ctr"/>
+            <a:lstStyle/>
+            <a:p>
+              <a:pPr algn="ctr"/>
+              <a:endParaRPr lang="pt-BR"/>
+            </a:p>
+          </p:txBody>
+        </p:sp>
+        <p:sp>
+          <p:nvSpPr>
+            <p:cNvPr id="114" name="Multiply 113"/>
+            <p:cNvSpPr>
+              <a:spLocks noChangeAspect="1"/>
+            </p:cNvSpPr>
+            <p:nvPr/>
+          </p:nvSpPr>
+          <p:spPr>
+            <a:xfrm>
+              <a:off x="8349614" y="3734666"/>
+              <a:ext cx="158298" cy="180000"/>
+            </a:xfrm>
+            <a:prstGeom prst="mathMultiply">
+              <a:avLst/>
+            </a:prstGeom>
+            <a:solidFill>
+              <a:srgbClr val="FF0000"/>
+            </a:solidFill>
+            <a:ln w="3175">
+              <a:solidFill>
+                <a:schemeClr val="tx1"/>
+              </a:solidFill>
+            </a:ln>
+          </p:spPr>
+          <p:style>
+            <a:lnRef idx="2">
+              <a:schemeClr val="accent1">
+                <a:shade val="50000"/>
+              </a:schemeClr>
+            </a:lnRef>
+            <a:fillRef idx="1">
+              <a:schemeClr val="accent1"/>
+            </a:fillRef>
+            <a:effectRef idx="0">
+              <a:schemeClr val="accent1"/>
+            </a:effectRef>
+            <a:fontRef idx="minor">
+              <a:schemeClr val="lt1"/>
+            </a:fontRef>
+          </p:style>
+          <p:txBody>
+            <a:bodyPr rtlCol="0" anchor="ctr"/>
+            <a:lstStyle/>
+            <a:p>
+              <a:pPr algn="ctr"/>
+              <a:endParaRPr lang="pt-BR"/>
+            </a:p>
+          </p:txBody>
+        </p:sp>
+        <p:cxnSp>
+          <p:nvCxnSpPr>
+            <p:cNvPr id="119" name="Straight Connector 118"/>
+            <p:cNvCxnSpPr/>
+            <p:nvPr/>
+          </p:nvCxnSpPr>
+          <p:spPr>
+            <a:xfrm flipH="1">
+              <a:off x="7936368" y="4340403"/>
+              <a:ext cx="136931" cy="180000"/>
+            </a:xfrm>
+            <a:prstGeom prst="line">
+              <a:avLst/>
+            </a:prstGeom>
+            <a:ln w="12700">
+              <a:solidFill>
+                <a:schemeClr val="tx1"/>
+              </a:solidFill>
+              <a:prstDash val="dash"/>
+            </a:ln>
+          </p:spPr>
+          <p:style>
+            <a:lnRef idx="1">
+              <a:schemeClr val="accent1"/>
+            </a:lnRef>
+            <a:fillRef idx="0">
+              <a:schemeClr val="accent1"/>
+            </a:fillRef>
+            <a:effectRef idx="0">
+              <a:schemeClr val="accent1"/>
+            </a:effectRef>
+            <a:fontRef idx="minor">
+              <a:schemeClr val="tx1"/>
+            </a:fontRef>
+          </p:style>
+        </p:cxnSp>
+        <p:cxnSp>
+          <p:nvCxnSpPr>
+            <p:cNvPr id="121" name="Straight Connector 120"/>
+            <p:cNvCxnSpPr/>
+            <p:nvPr/>
+          </p:nvCxnSpPr>
+          <p:spPr>
+            <a:xfrm flipH="1">
+              <a:off x="8074119" y="4165165"/>
+              <a:ext cx="153100" cy="175266"/>
+            </a:xfrm>
+            <a:prstGeom prst="line">
+              <a:avLst/>
+            </a:prstGeom>
+            <a:ln w="12700">
+              <a:solidFill>
+                <a:schemeClr val="tx1"/>
+              </a:solidFill>
+              <a:prstDash val="dash"/>
+            </a:ln>
+          </p:spPr>
+          <p:style>
+            <a:lnRef idx="1">
+              <a:schemeClr val="accent1"/>
+            </a:lnRef>
+            <a:fillRef idx="0">
+              <a:schemeClr val="accent1"/>
+            </a:fillRef>
+            <a:effectRef idx="0">
+              <a:schemeClr val="accent1"/>
+            </a:effectRef>
+            <a:fontRef idx="minor">
+              <a:schemeClr val="tx1"/>
+            </a:fontRef>
+          </p:style>
+        </p:cxnSp>
+        <p:cxnSp>
+          <p:nvCxnSpPr>
+            <p:cNvPr id="123" name="Straight Connector 122"/>
+            <p:cNvCxnSpPr/>
+            <p:nvPr/>
+          </p:nvCxnSpPr>
+          <p:spPr>
+            <a:xfrm flipH="1">
+              <a:off x="8216880" y="4030041"/>
+              <a:ext cx="86539" cy="150678"/>
+            </a:xfrm>
+            <a:prstGeom prst="line">
+              <a:avLst/>
+            </a:prstGeom>
+            <a:ln w="12700">
+              <a:solidFill>
+                <a:schemeClr val="tx1"/>
+              </a:solidFill>
+              <a:prstDash val="dash"/>
+            </a:ln>
+          </p:spPr>
+          <p:style>
+            <a:lnRef idx="1">
+              <a:schemeClr val="accent1"/>
+            </a:lnRef>
+            <a:fillRef idx="0">
+              <a:schemeClr val="accent1"/>
+            </a:fillRef>
+            <a:effectRef idx="0">
+              <a:schemeClr val="accent1"/>
+            </a:effectRef>
+            <a:fontRef idx="minor">
+              <a:schemeClr val="tx1"/>
+            </a:fontRef>
+          </p:style>
+        </p:cxnSp>
+        <p:cxnSp>
+          <p:nvCxnSpPr>
+            <p:cNvPr id="126" name="Straight Connector 125"/>
+            <p:cNvCxnSpPr/>
+            <p:nvPr/>
+          </p:nvCxnSpPr>
+          <p:spPr>
+            <a:xfrm flipH="1">
+              <a:off x="8304826" y="3915692"/>
+              <a:ext cx="65154" cy="112507"/>
+            </a:xfrm>
+            <a:prstGeom prst="line">
+              <a:avLst/>
+            </a:prstGeom>
+            <a:ln w="12700">
+              <a:solidFill>
+                <a:schemeClr val="tx1"/>
+              </a:solidFill>
+              <a:prstDash val="dash"/>
+            </a:ln>
+          </p:spPr>
+          <p:style>
+            <a:lnRef idx="1">
+              <a:schemeClr val="accent1"/>
+            </a:lnRef>
+            <a:fillRef idx="0">
+              <a:schemeClr val="accent1"/>
+            </a:fillRef>
+            <a:effectRef idx="0">
+              <a:schemeClr val="accent1"/>
+            </a:effectRef>
+            <a:fontRef idx="minor">
+              <a:schemeClr val="tx1"/>
+            </a:fontRef>
+          </p:style>
+        </p:cxnSp>
+        <p:cxnSp>
+          <p:nvCxnSpPr>
+            <p:cNvPr id="128" name="Straight Connector 127"/>
+            <p:cNvCxnSpPr/>
+            <p:nvPr/>
+          </p:nvCxnSpPr>
+          <p:spPr>
+            <a:xfrm flipH="1">
+              <a:off x="8368145" y="3829031"/>
+              <a:ext cx="65154" cy="92178"/>
+            </a:xfrm>
+            <a:prstGeom prst="line">
+              <a:avLst/>
+            </a:prstGeom>
+            <a:ln w="12700">
+              <a:solidFill>
+                <a:schemeClr val="tx1"/>
+              </a:solidFill>
+              <a:prstDash val="dash"/>
+            </a:ln>
+          </p:spPr>
+          <p:style>
+            <a:lnRef idx="1">
+              <a:schemeClr val="accent1"/>
+            </a:lnRef>
+            <a:fillRef idx="0">
+              <a:schemeClr val="accent1"/>
+            </a:fillRef>
+            <a:effectRef idx="0">
+              <a:schemeClr val="accent1"/>
+            </a:effectRef>
+            <a:fontRef idx="minor">
+              <a:schemeClr val="tx1"/>
+            </a:fontRef>
+          </p:style>
+        </p:cxnSp>
+        <p:sp>
+          <p:nvSpPr>
+            <p:cNvPr id="131" name="Multiply 130"/>
+            <p:cNvSpPr>
+              <a:spLocks noChangeAspect="1"/>
+            </p:cNvSpPr>
+            <p:nvPr/>
+          </p:nvSpPr>
+          <p:spPr>
+            <a:xfrm>
+              <a:off x="7733351" y="4634932"/>
+              <a:ext cx="72817" cy="82800"/>
+            </a:xfrm>
+            <a:prstGeom prst="mathMultiply">
+              <a:avLst/>
+            </a:prstGeom>
+            <a:solidFill>
+              <a:srgbClr val="00B0F0"/>
+            </a:solidFill>
+            <a:ln w="3175">
+              <a:solidFill>
+                <a:schemeClr val="tx1"/>
+              </a:solidFill>
+            </a:ln>
+          </p:spPr>
+          <p:style>
+            <a:lnRef idx="2">
+              <a:schemeClr val="accent1">
+                <a:shade val="50000"/>
+              </a:schemeClr>
+            </a:lnRef>
+            <a:fillRef idx="1">
+              <a:schemeClr val="accent1"/>
+            </a:fillRef>
+            <a:effectRef idx="0">
+              <a:schemeClr val="accent1"/>
+            </a:effectRef>
+            <a:fontRef idx="minor">
+              <a:schemeClr val="lt1"/>
+            </a:fontRef>
+          </p:style>
+          <p:txBody>
+            <a:bodyPr rtlCol="0" anchor="ctr"/>
+            <a:lstStyle/>
+            <a:p>
+              <a:pPr algn="ctr"/>
+              <a:endParaRPr lang="pt-BR"/>
+            </a:p>
+          </p:txBody>
+        </p:sp>
+        <p:cxnSp>
+          <p:nvCxnSpPr>
+            <p:cNvPr id="115" name="Straight Connector 114"/>
+            <p:cNvCxnSpPr/>
+            <p:nvPr/>
+          </p:nvCxnSpPr>
+          <p:spPr>
+            <a:xfrm flipH="1">
+              <a:off x="7750018" y="4513680"/>
+              <a:ext cx="193832" cy="182857"/>
+            </a:xfrm>
+            <a:prstGeom prst="line">
+              <a:avLst/>
+            </a:prstGeom>
+            <a:ln w="12700">
+              <a:solidFill>
+                <a:schemeClr val="tx1"/>
+              </a:solidFill>
+              <a:prstDash val="dash"/>
+            </a:ln>
+          </p:spPr>
+          <p:style>
+            <a:lnRef idx="1">
+              <a:schemeClr val="accent1"/>
+            </a:lnRef>
+            <a:fillRef idx="0">
+              <a:schemeClr val="accent1"/>
+            </a:fillRef>
+            <a:effectRef idx="0">
+              <a:schemeClr val="accent1"/>
+            </a:effectRef>
+            <a:fontRef idx="minor">
+              <a:schemeClr val="tx1"/>
+            </a:fontRef>
+          </p:style>
+        </p:cxnSp>
+        <p:sp>
+          <p:nvSpPr>
+            <p:cNvPr id="132" name="Multiply 131"/>
+            <p:cNvSpPr>
+              <a:spLocks noChangeAspect="1"/>
+            </p:cNvSpPr>
+            <p:nvPr/>
+          </p:nvSpPr>
+          <p:spPr>
+            <a:xfrm>
+              <a:off x="7907441" y="4469956"/>
+              <a:ext cx="72817" cy="82800"/>
+            </a:xfrm>
+            <a:prstGeom prst="mathMultiply">
+              <a:avLst/>
+            </a:prstGeom>
+            <a:solidFill>
+              <a:srgbClr val="00B0F0"/>
+            </a:solidFill>
+            <a:ln w="3175">
+              <a:solidFill>
+                <a:schemeClr val="tx1"/>
+              </a:solidFill>
+            </a:ln>
+          </p:spPr>
+          <p:style>
+            <a:lnRef idx="2">
+              <a:schemeClr val="accent1">
+                <a:shade val="50000"/>
+              </a:schemeClr>
+            </a:lnRef>
+            <a:fillRef idx="1">
+              <a:schemeClr val="accent1"/>
+            </a:fillRef>
+            <a:effectRef idx="0">
+              <a:schemeClr val="accent1"/>
+            </a:effectRef>
+            <a:fontRef idx="minor">
+              <a:schemeClr val="lt1"/>
+            </a:fontRef>
+          </p:style>
+          <p:txBody>
+            <a:bodyPr rtlCol="0" anchor="ctr"/>
+            <a:lstStyle/>
+            <a:p>
+              <a:pPr algn="ctr"/>
+              <a:endParaRPr lang="pt-BR"/>
+            </a:p>
+          </p:txBody>
+        </p:sp>
+        <p:sp>
+          <p:nvSpPr>
+            <p:cNvPr id="133" name="Multiply 132"/>
+            <p:cNvSpPr>
+              <a:spLocks noChangeAspect="1"/>
+            </p:cNvSpPr>
+            <p:nvPr/>
+          </p:nvSpPr>
+          <p:spPr>
+            <a:xfrm>
+              <a:off x="7991128" y="4358555"/>
+              <a:ext cx="72817" cy="82800"/>
+            </a:xfrm>
+            <a:prstGeom prst="mathMultiply">
+              <a:avLst/>
+            </a:prstGeom>
+            <a:solidFill>
+              <a:srgbClr val="00B0F0"/>
+            </a:solidFill>
+            <a:ln w="3175">
+              <a:solidFill>
+                <a:schemeClr val="tx1"/>
+              </a:solidFill>
+            </a:ln>
+          </p:spPr>
+          <p:style>
+            <a:lnRef idx="2">
+              <a:schemeClr val="accent1">
+                <a:shade val="50000"/>
+              </a:schemeClr>
+            </a:lnRef>
+            <a:fillRef idx="1">
+              <a:schemeClr val="accent1"/>
+            </a:fillRef>
+            <a:effectRef idx="0">
+              <a:schemeClr val="accent1"/>
+            </a:effectRef>
+            <a:fontRef idx="minor">
+              <a:schemeClr val="lt1"/>
+            </a:fontRef>
+          </p:style>
+          <p:txBody>
+            <a:bodyPr rtlCol="0" anchor="ctr"/>
+            <a:lstStyle/>
+            <a:p>
+              <a:pPr algn="ctr"/>
+              <a:endParaRPr lang="pt-BR"/>
+            </a:p>
+          </p:txBody>
+        </p:sp>
+        <p:sp>
+          <p:nvSpPr>
+            <p:cNvPr id="134" name="Multiply 133"/>
+            <p:cNvSpPr>
+              <a:spLocks noChangeAspect="1"/>
+            </p:cNvSpPr>
+            <p:nvPr/>
+          </p:nvSpPr>
+          <p:spPr>
+            <a:xfrm>
+              <a:off x="8073299" y="4257603"/>
+              <a:ext cx="72817" cy="82800"/>
+            </a:xfrm>
+            <a:prstGeom prst="mathMultiply">
+              <a:avLst/>
+            </a:prstGeom>
+            <a:solidFill>
+              <a:srgbClr val="00B0F0"/>
+            </a:solidFill>
+            <a:ln w="3175">
+              <a:solidFill>
+                <a:schemeClr val="tx1"/>
+              </a:solidFill>
+            </a:ln>
+          </p:spPr>
+          <p:style>
+            <a:lnRef idx="2">
+              <a:schemeClr val="accent1">
+                <a:shade val="50000"/>
+              </a:schemeClr>
+            </a:lnRef>
+            <a:fillRef idx="1">
+              <a:schemeClr val="accent1"/>
+            </a:fillRef>
+            <a:effectRef idx="0">
+              <a:schemeClr val="accent1"/>
+            </a:effectRef>
+            <a:fontRef idx="minor">
+              <a:schemeClr val="lt1"/>
+            </a:fontRef>
+          </p:style>
+          <p:txBody>
+            <a:bodyPr rtlCol="0" anchor="ctr"/>
+            <a:lstStyle/>
+            <a:p>
+              <a:pPr algn="ctr"/>
+              <a:endParaRPr lang="pt-BR"/>
+            </a:p>
+          </p:txBody>
+        </p:sp>
+        <p:sp>
+          <p:nvSpPr>
+            <p:cNvPr id="135" name="Multiply 134"/>
+            <p:cNvSpPr>
+              <a:spLocks noChangeAspect="1"/>
+            </p:cNvSpPr>
+            <p:nvPr/>
+          </p:nvSpPr>
+          <p:spPr>
+            <a:xfrm>
+              <a:off x="8300077" y="3920332"/>
+              <a:ext cx="72817" cy="82800"/>
+            </a:xfrm>
+            <a:prstGeom prst="mathMultiply">
+              <a:avLst/>
+            </a:prstGeom>
+            <a:solidFill>
+              <a:srgbClr val="00B0F0"/>
+            </a:solidFill>
+            <a:ln w="3175">
+              <a:solidFill>
+                <a:schemeClr val="tx1"/>
+              </a:solidFill>
+            </a:ln>
+          </p:spPr>
+          <p:style>
+            <a:lnRef idx="2">
+              <a:schemeClr val="accent1">
+                <a:shade val="50000"/>
+              </a:schemeClr>
+            </a:lnRef>
+            <a:fillRef idx="1">
+              <a:schemeClr val="accent1"/>
+            </a:fillRef>
+            <a:effectRef idx="0">
+              <a:schemeClr val="accent1"/>
+            </a:effectRef>
+            <a:fontRef idx="minor">
+              <a:schemeClr val="lt1"/>
+            </a:fontRef>
+          </p:style>
+          <p:txBody>
+            <a:bodyPr rtlCol="0" anchor="ctr"/>
+            <a:lstStyle/>
+            <a:p>
+              <a:pPr algn="ctr"/>
+              <a:endParaRPr lang="pt-BR"/>
+            </a:p>
+          </p:txBody>
+        </p:sp>
+        <p:sp>
+          <p:nvSpPr>
+            <p:cNvPr id="154" name="Multiply 153"/>
+            <p:cNvSpPr>
+              <a:spLocks noChangeAspect="1"/>
+            </p:cNvSpPr>
+            <p:nvPr/>
+          </p:nvSpPr>
+          <p:spPr>
+            <a:xfrm>
+              <a:off x="8175312" y="4136565"/>
+              <a:ext cx="72817" cy="82800"/>
+            </a:xfrm>
+            <a:prstGeom prst="mathMultiply">
+              <a:avLst/>
+            </a:prstGeom>
+            <a:solidFill>
+              <a:srgbClr val="00B0F0"/>
+            </a:solidFill>
+            <a:ln w="3175">
+              <a:solidFill>
+                <a:schemeClr val="tx1"/>
+              </a:solidFill>
+            </a:ln>
+          </p:spPr>
+          <p:style>
+            <a:lnRef idx="2">
+              <a:schemeClr val="accent1">
+                <a:shade val="50000"/>
+              </a:schemeClr>
+            </a:lnRef>
+            <a:fillRef idx="1">
+              <a:schemeClr val="accent1"/>
+            </a:fillRef>
+            <a:effectRef idx="0">
+              <a:schemeClr val="accent1"/>
+            </a:effectRef>
+            <a:fontRef idx="minor">
+              <a:schemeClr val="lt1"/>
+            </a:fontRef>
+          </p:style>
+          <p:txBody>
+            <a:bodyPr rtlCol="0" anchor="ctr"/>
+            <a:lstStyle/>
+            <a:p>
+              <a:pPr algn="ctr"/>
+              <a:endParaRPr lang="pt-BR"/>
+            </a:p>
+          </p:txBody>
+        </p:sp>
+        <p:sp>
+          <p:nvSpPr>
+            <p:cNvPr id="155" name="Multiply 154"/>
+            <p:cNvSpPr>
+              <a:spLocks noChangeAspect="1"/>
+            </p:cNvSpPr>
+            <p:nvPr/>
+          </p:nvSpPr>
+          <p:spPr>
+            <a:xfrm>
+              <a:off x="8241507" y="4011444"/>
+              <a:ext cx="72817" cy="82800"/>
+            </a:xfrm>
+            <a:prstGeom prst="mathMultiply">
+              <a:avLst/>
+            </a:prstGeom>
+            <a:solidFill>
+              <a:srgbClr val="00B0F0"/>
+            </a:solidFill>
+            <a:ln w="3175">
+              <a:solidFill>
+                <a:schemeClr val="tx1"/>
+              </a:solidFill>
+            </a:ln>
+          </p:spPr>
+          <p:style>
+            <a:lnRef idx="2">
+              <a:schemeClr val="accent1">
+                <a:shade val="50000"/>
+              </a:schemeClr>
+            </a:lnRef>
+            <a:fillRef idx="1">
+              <a:schemeClr val="accent1"/>
+            </a:fillRef>
+            <a:effectRef idx="0">
+              <a:schemeClr val="accent1"/>
+            </a:effectRef>
+            <a:fontRef idx="minor">
+              <a:schemeClr val="lt1"/>
+            </a:fontRef>
+          </p:style>
+          <p:txBody>
+            <a:bodyPr rtlCol="0" anchor="ctr"/>
+            <a:lstStyle/>
+            <a:p>
+              <a:pPr algn="ctr"/>
+              <a:endParaRPr lang="pt-BR"/>
+            </a:p>
+          </p:txBody>
+        </p:sp>
+        <p:cxnSp>
+          <p:nvCxnSpPr>
+            <p:cNvPr id="160" name="Straight Arrow Connector 159"/>
+            <p:cNvCxnSpPr/>
+            <p:nvPr/>
+          </p:nvCxnSpPr>
+          <p:spPr>
+            <a:xfrm>
+              <a:off x="7038874" y="2534498"/>
+              <a:ext cx="0" cy="2556000"/>
+            </a:xfrm>
+            <a:prstGeom prst="straightConnector1">
+              <a:avLst/>
+            </a:prstGeom>
+            <a:ln w="19050">
+              <a:solidFill>
+                <a:schemeClr val="tx1"/>
+              </a:solidFill>
+              <a:headEnd type="triangle" w="med" len="med"/>
+              <a:tailEnd type="none" w="med" len="med"/>
+            </a:ln>
+          </p:spPr>
+          <p:style>
+            <a:lnRef idx="1">
+              <a:schemeClr val="accent1"/>
+            </a:lnRef>
+            <a:fillRef idx="0">
+              <a:schemeClr val="accent1"/>
+            </a:fillRef>
+            <a:effectRef idx="0">
+              <a:schemeClr val="accent1"/>
+            </a:effectRef>
+            <a:fontRef idx="minor">
+              <a:schemeClr val="tx1"/>
+            </a:fontRef>
+          </p:style>
+        </p:cxnSp>
+        <p:cxnSp>
+          <p:nvCxnSpPr>
+            <p:cNvPr id="161" name="Straight Arrow Connector 160"/>
+            <p:cNvCxnSpPr/>
+            <p:nvPr/>
+          </p:nvCxnSpPr>
+          <p:spPr>
+            <a:xfrm rot="5400000">
+              <a:off x="8507912" y="3626810"/>
+              <a:ext cx="0" cy="2952000"/>
+            </a:xfrm>
+            <a:prstGeom prst="straightConnector1">
+              <a:avLst/>
+            </a:prstGeom>
+            <a:ln w="19050">
+              <a:solidFill>
+                <a:schemeClr val="tx1"/>
+              </a:solidFill>
+              <a:headEnd type="triangle" w="med" len="med"/>
+              <a:tailEnd type="none" w="med" len="med"/>
+            </a:ln>
+          </p:spPr>
+          <p:style>
+            <a:lnRef idx="1">
+              <a:schemeClr val="accent1"/>
+            </a:lnRef>
+            <a:fillRef idx="0">
+              <a:schemeClr val="accent1"/>
+            </a:fillRef>
+            <a:effectRef idx="0">
+              <a:schemeClr val="accent1"/>
+            </a:effectRef>
+            <a:fontRef idx="minor">
+              <a:schemeClr val="tx1"/>
+            </a:fontRef>
+          </p:style>
+        </p:cxnSp>
+        <mc:AlternateContent xmlns:mc="http://schemas.openxmlformats.org/markup-compatibility/2006" xmlns:a14="http://schemas.microsoft.com/office/drawing/2010/main">
+          <mc:Choice Requires="a14">
+            <p:sp>
+              <p:nvSpPr>
+                <p:cNvPr id="162" name="TextBox 161"/>
+                <p:cNvSpPr txBox="1"/>
+                <p:nvPr/>
+              </p:nvSpPr>
+              <p:spPr>
+                <a:xfrm>
+                  <a:off x="9942348" y="4892106"/>
+                  <a:ext cx="426028" cy="400110"/>
+                </a:xfrm>
+                <a:prstGeom prst="rect">
+                  <a:avLst/>
+                </a:prstGeom>
+                <a:noFill/>
+              </p:spPr>
+              <p:txBody>
+                <a:bodyPr wrap="square" rtlCol="0">
+                  <a:spAutoFit/>
+                </a:bodyPr>
+                <a:lstStyle/>
+                <a:p>
+                  <a:pPr/>
+                  <a14:m>
+                    <m:oMathPara xmlns:m="http://schemas.openxmlformats.org/officeDocument/2006/math">
+                      <m:oMathParaPr>
+                        <m:jc m:val="centerGroup"/>
+                      </m:oMathParaPr>
+                      <m:oMath xmlns:m="http://schemas.openxmlformats.org/officeDocument/2006/math">
+                        <m:sSub>
+                          <m:sSubPr>
+                            <m:ctrlPr>
+                              <a:rPr lang="pt-BR" sz="2000" i="1" smtClean="0">
+                                <a:latin typeface="Cambria Math" panose="02040503050406030204" pitchFamily="18" charset="0"/>
+                              </a:rPr>
+                            </m:ctrlPr>
+                          </m:sSubPr>
+                          <m:e>
+                            <m:r>
+                              <a:rPr lang="pt-BR" sz="2000" b="0" i="1" smtClean="0">
+                                <a:latin typeface="Cambria Math" panose="02040503050406030204" pitchFamily="18" charset="0"/>
+                              </a:rPr>
+                              <m:t>𝑎</m:t>
+                            </m:r>
+                          </m:e>
+                          <m:sub>
+                            <m:r>
+                              <a:rPr lang="pt-BR" sz="2000" b="0" i="1" smtClean="0">
+                                <a:latin typeface="Cambria Math" panose="02040503050406030204" pitchFamily="18" charset="0"/>
+                              </a:rPr>
+                              <m:t>1</m:t>
+                            </m:r>
+                          </m:sub>
+                        </m:sSub>
+                      </m:oMath>
+                    </m:oMathPara>
+                  </a14:m>
+                  <a:endParaRPr lang="pt-BR" sz="2000" dirty="0"/>
+                </a:p>
+              </p:txBody>
+            </p:sp>
+          </mc:Choice>
+          <mc:Fallback xmlns="">
+            <p:sp>
+              <p:nvSpPr>
+                <p:cNvPr id="162" name="TextBox 161"/>
+                <p:cNvSpPr txBox="1">
+                  <a:spLocks noRot="1" noChangeAspect="1" noMove="1" noResize="1" noEditPoints="1" noAdjustHandles="1" noChangeArrowheads="1" noChangeShapeType="1" noTextEdit="1"/>
+                </p:cNvSpPr>
+                <p:nvPr/>
+              </p:nvSpPr>
+              <p:spPr>
+                <a:xfrm>
+                  <a:off x="9942348" y="4892106"/>
+                  <a:ext cx="426028" cy="400110"/>
+                </a:xfrm>
+                <a:prstGeom prst="rect">
+                  <a:avLst/>
+                </a:prstGeom>
+                <a:blipFill>
+                  <a:blip r:embed="rId2"/>
+                  <a:stretch>
+                    <a:fillRect/>
+                  </a:stretch>
+                </a:blipFill>
+              </p:spPr>
+              <p:txBody>
+                <a:bodyPr/>
+                <a:lstStyle/>
+                <a:p>
+                  <a:r>
+                    <a:rPr lang="pt-BR">
+                      <a:noFill/>
+                    </a:rPr>
+                    <a:t> </a:t>
+                  </a:r>
+                </a:p>
+              </p:txBody>
+            </p:sp>
+          </mc:Fallback>
+        </mc:AlternateContent>
+        <mc:AlternateContent xmlns:mc="http://schemas.openxmlformats.org/markup-compatibility/2006" xmlns:a14="http://schemas.microsoft.com/office/drawing/2010/main">
+          <mc:Choice Requires="a14">
+            <p:sp>
+              <p:nvSpPr>
+                <p:cNvPr id="163" name="TextBox 162"/>
+                <p:cNvSpPr txBox="1"/>
+                <p:nvPr/>
+              </p:nvSpPr>
+              <p:spPr>
+                <a:xfrm>
+                  <a:off x="6818898" y="2134388"/>
+                  <a:ext cx="426028" cy="400110"/>
+                </a:xfrm>
+                <a:prstGeom prst="rect">
+                  <a:avLst/>
+                </a:prstGeom>
+                <a:noFill/>
+              </p:spPr>
+              <p:txBody>
+                <a:bodyPr wrap="square" rtlCol="0">
+                  <a:spAutoFit/>
+                </a:bodyPr>
+                <a:lstStyle/>
+                <a:p>
+                  <a:pPr/>
+                  <a14:m>
+                    <m:oMathPara xmlns:m="http://schemas.openxmlformats.org/officeDocument/2006/math">
+                      <m:oMathParaPr>
+                        <m:jc m:val="centerGroup"/>
+                      </m:oMathParaPr>
+                      <m:oMath xmlns:m="http://schemas.openxmlformats.org/officeDocument/2006/math">
+                        <m:sSub>
+                          <m:sSubPr>
+                            <m:ctrlPr>
+                              <a:rPr lang="pt-BR" sz="2000" i="1" smtClean="0">
+                                <a:latin typeface="Cambria Math" panose="02040503050406030204" pitchFamily="18" charset="0"/>
+                              </a:rPr>
+                            </m:ctrlPr>
+                          </m:sSubPr>
+                          <m:e>
+                            <m:r>
+                              <a:rPr lang="pt-BR" sz="2000" b="0" i="1" smtClean="0">
+                                <a:latin typeface="Cambria Math" panose="02040503050406030204" pitchFamily="18" charset="0"/>
+                              </a:rPr>
+                              <m:t>𝑎</m:t>
+                            </m:r>
+                          </m:e>
+                          <m:sub>
+                            <m:r>
+                              <a:rPr lang="pt-BR" sz="2000" b="0" i="1" smtClean="0">
+                                <a:latin typeface="Cambria Math" panose="02040503050406030204" pitchFamily="18" charset="0"/>
+                              </a:rPr>
+                              <m:t>2</m:t>
+                            </m:r>
+                          </m:sub>
+                        </m:sSub>
+                      </m:oMath>
+                    </m:oMathPara>
+                  </a14:m>
+                  <a:endParaRPr lang="pt-BR" sz="2000" dirty="0"/>
+                </a:p>
+              </p:txBody>
+            </p:sp>
+          </mc:Choice>
+          <mc:Fallback xmlns="">
+            <p:sp>
+              <p:nvSpPr>
+                <p:cNvPr id="163" name="TextBox 162"/>
+                <p:cNvSpPr txBox="1">
+                  <a:spLocks noRot="1" noChangeAspect="1" noMove="1" noResize="1" noEditPoints="1" noAdjustHandles="1" noChangeArrowheads="1" noChangeShapeType="1" noTextEdit="1"/>
+                </p:cNvSpPr>
+                <p:nvPr/>
+              </p:nvSpPr>
+              <p:spPr>
+                <a:xfrm>
+                  <a:off x="6818898" y="2134388"/>
+                  <a:ext cx="426028" cy="400110"/>
+                </a:xfrm>
+                <a:prstGeom prst="rect">
+                  <a:avLst/>
+                </a:prstGeom>
+                <a:blipFill>
+                  <a:blip r:embed="rId3"/>
+                  <a:stretch>
+                    <a:fillRect/>
+                  </a:stretch>
+                </a:blipFill>
+              </p:spPr>
+              <p:txBody>
+                <a:bodyPr/>
+                <a:lstStyle/>
+                <a:p>
+                  <a:r>
+                    <a:rPr lang="pt-BR">
+                      <a:noFill/>
+                    </a:rPr>
+                    <a:t> </a:t>
+                  </a:r>
+                </a:p>
+              </p:txBody>
+            </p:sp>
+          </mc:Fallback>
+        </mc:AlternateContent>
+      </p:grpSp>
+      <p:grpSp>
+        <p:nvGrpSpPr>
+          <p:cNvPr id="166" name="Group 165"/>
+          <p:cNvGrpSpPr/>
+          <p:nvPr/>
+        </p:nvGrpSpPr>
+        <p:grpSpPr>
+          <a:xfrm>
+            <a:off x="2817120" y="895312"/>
+            <a:ext cx="3539783" cy="4892060"/>
+            <a:chOff x="2817120" y="895312"/>
+            <a:chExt cx="3539783" cy="4892060"/>
+          </a:xfrm>
+        </p:grpSpPr>
+        <p:sp>
+          <p:nvSpPr>
+            <p:cNvPr id="4" name="Oval 3"/>
+            <p:cNvSpPr>
+              <a:spLocks/>
+            </p:cNvSpPr>
+            <p:nvPr/>
+          </p:nvSpPr>
+          <p:spPr>
+            <a:xfrm>
+              <a:off x="3657598" y="1683325"/>
+              <a:ext cx="1800000" cy="3600000"/>
+            </a:xfrm>
+            <a:prstGeom prst="ellipse">
+              <a:avLst/>
+            </a:prstGeom>
+            <a:noFill/>
+            <a:ln>
+              <a:solidFill>
+                <a:schemeClr val="tx1"/>
+              </a:solidFill>
+            </a:ln>
+          </p:spPr>
+          <p:style>
+            <a:lnRef idx="2">
+              <a:schemeClr val="accent1">
+                <a:shade val="50000"/>
+              </a:schemeClr>
+            </a:lnRef>
+            <a:fillRef idx="1">
+              <a:schemeClr val="accent1"/>
+            </a:fillRef>
+            <a:effectRef idx="0">
+              <a:schemeClr val="accent1"/>
+            </a:effectRef>
+            <a:fontRef idx="minor">
+              <a:schemeClr val="lt1"/>
+            </a:fontRef>
+          </p:style>
+          <p:txBody>
+            <a:bodyPr rtlCol="0" anchor="ctr"/>
+            <a:lstStyle/>
+            <a:p>
+              <a:pPr algn="ctr"/>
+              <a:endParaRPr lang="pt-BR"/>
+            </a:p>
+          </p:txBody>
+        </p:sp>
+        <p:sp>
+          <p:nvSpPr>
+            <p:cNvPr id="5" name="Oval 4"/>
+            <p:cNvSpPr/>
+            <p:nvPr/>
+          </p:nvSpPr>
+          <p:spPr>
+            <a:xfrm>
+              <a:off x="4017598" y="2042031"/>
+              <a:ext cx="1080000" cy="2880000"/>
+            </a:xfrm>
+            <a:prstGeom prst="ellipse">
+              <a:avLst/>
+            </a:prstGeom>
+            <a:noFill/>
+            <a:ln>
+              <a:solidFill>
+                <a:schemeClr val="tx1"/>
+              </a:solidFill>
+            </a:ln>
+          </p:spPr>
+          <p:style>
+            <a:lnRef idx="2">
+              <a:schemeClr val="accent1">
+                <a:shade val="50000"/>
+              </a:schemeClr>
+            </a:lnRef>
+            <a:fillRef idx="1">
+              <a:schemeClr val="accent1"/>
+            </a:fillRef>
+            <a:effectRef idx="0">
+              <a:schemeClr val="accent1"/>
+            </a:effectRef>
+            <a:fontRef idx="minor">
+              <a:schemeClr val="lt1"/>
+            </a:fontRef>
+          </p:style>
+          <p:txBody>
+            <a:bodyPr rtlCol="0" anchor="ctr"/>
+            <a:lstStyle/>
+            <a:p>
+              <a:pPr algn="ctr"/>
+              <a:endParaRPr lang="pt-BR"/>
+            </a:p>
+          </p:txBody>
+        </p:sp>
+        <p:sp>
+          <p:nvSpPr>
+            <p:cNvPr id="7" name="Oval 6"/>
+            <p:cNvSpPr/>
+            <p:nvPr/>
+          </p:nvSpPr>
+          <p:spPr>
+            <a:xfrm>
+              <a:off x="4377598" y="2402031"/>
+              <a:ext cx="360000" cy="2160000"/>
+            </a:xfrm>
+            <a:prstGeom prst="ellipse">
+              <a:avLst/>
+            </a:prstGeom>
+            <a:noFill/>
+            <a:ln>
+              <a:solidFill>
+                <a:schemeClr val="tx1"/>
+              </a:solidFill>
+            </a:ln>
+          </p:spPr>
+          <p:style>
+            <a:lnRef idx="2">
+              <a:schemeClr val="accent1">
+                <a:shade val="50000"/>
+              </a:schemeClr>
+            </a:lnRef>
+            <a:fillRef idx="1">
+              <a:schemeClr val="accent1"/>
+            </a:fillRef>
+            <a:effectRef idx="0">
+              <a:schemeClr val="accent1"/>
+            </a:effectRef>
+            <a:fontRef idx="minor">
+              <a:schemeClr val="lt1"/>
+            </a:fontRef>
+          </p:style>
+          <p:txBody>
+            <a:bodyPr rtlCol="0" anchor="ctr"/>
+            <a:lstStyle/>
+            <a:p>
+              <a:pPr algn="ctr"/>
+              <a:endParaRPr lang="pt-BR"/>
+            </a:p>
+          </p:txBody>
+        </p:sp>
+        <p:sp>
+          <p:nvSpPr>
+            <p:cNvPr id="9" name="Oval 8"/>
+            <p:cNvSpPr/>
+            <p:nvPr/>
+          </p:nvSpPr>
+          <p:spPr>
+            <a:xfrm>
+              <a:off x="4197598" y="2222031"/>
+              <a:ext cx="720000" cy="2520000"/>
+            </a:xfrm>
+            <a:prstGeom prst="ellipse">
+              <a:avLst/>
+            </a:prstGeom>
+            <a:noFill/>
+            <a:ln>
+              <a:solidFill>
+                <a:schemeClr val="tx1"/>
+              </a:solidFill>
+            </a:ln>
+          </p:spPr>
+          <p:style>
+            <a:lnRef idx="2">
+              <a:schemeClr val="accent1">
+                <a:shade val="50000"/>
+              </a:schemeClr>
+            </a:lnRef>
+            <a:fillRef idx="1">
+              <a:schemeClr val="accent1"/>
+            </a:fillRef>
+            <a:effectRef idx="0">
+              <a:schemeClr val="accent1"/>
+            </a:effectRef>
+            <a:fontRef idx="minor">
+              <a:schemeClr val="lt1"/>
+            </a:fontRef>
+          </p:style>
+          <p:txBody>
+            <a:bodyPr rtlCol="0" anchor="ctr"/>
+            <a:lstStyle/>
+            <a:p>
+              <a:pPr algn="ctr"/>
+              <a:endParaRPr lang="pt-BR"/>
+            </a:p>
+          </p:txBody>
+        </p:sp>
+        <p:sp>
+          <p:nvSpPr>
+            <p:cNvPr id="10" name="Oval 9"/>
+            <p:cNvSpPr/>
+            <p:nvPr/>
+          </p:nvSpPr>
+          <p:spPr>
+            <a:xfrm>
+              <a:off x="3837598" y="1862031"/>
+              <a:ext cx="1440000" cy="3240000"/>
+            </a:xfrm>
+            <a:prstGeom prst="ellipse">
+              <a:avLst/>
+            </a:prstGeom>
+            <a:noFill/>
+            <a:ln>
+              <a:solidFill>
+                <a:schemeClr val="tx1"/>
+              </a:solidFill>
+            </a:ln>
+          </p:spPr>
+          <p:style>
+            <a:lnRef idx="2">
+              <a:schemeClr val="accent1">
+                <a:shade val="50000"/>
+              </a:schemeClr>
+            </a:lnRef>
+            <a:fillRef idx="1">
+              <a:schemeClr val="accent1"/>
+            </a:fillRef>
+            <a:effectRef idx="0">
+              <a:schemeClr val="accent1"/>
+            </a:effectRef>
+            <a:fontRef idx="minor">
+              <a:schemeClr val="lt1"/>
+            </a:fontRef>
+          </p:style>
+          <p:txBody>
+            <a:bodyPr rtlCol="0" anchor="ctr"/>
+            <a:lstStyle/>
+            <a:p>
+              <a:pPr algn="ctr"/>
+              <a:endParaRPr lang="pt-BR"/>
+            </a:p>
+          </p:txBody>
+        </p:sp>
+        <p:sp>
+          <p:nvSpPr>
+            <p:cNvPr id="11" name="Oval 10"/>
+            <p:cNvSpPr>
+              <a:spLocks/>
+            </p:cNvSpPr>
+            <p:nvPr/>
+          </p:nvSpPr>
+          <p:spPr>
+            <a:xfrm>
+              <a:off x="3477598" y="1502031"/>
+              <a:ext cx="2160000" cy="3960000"/>
+            </a:xfrm>
+            <a:prstGeom prst="ellipse">
+              <a:avLst/>
+            </a:prstGeom>
+            <a:noFill/>
+            <a:ln>
+              <a:solidFill>
+                <a:schemeClr val="tx1"/>
+              </a:solidFill>
+            </a:ln>
+          </p:spPr>
+          <p:style>
+            <a:lnRef idx="2">
+              <a:schemeClr val="accent1">
+                <a:shade val="50000"/>
+              </a:schemeClr>
+            </a:lnRef>
+            <a:fillRef idx="1">
+              <a:schemeClr val="accent1"/>
+            </a:fillRef>
+            <a:effectRef idx="0">
+              <a:schemeClr val="accent1"/>
+            </a:effectRef>
+            <a:fontRef idx="minor">
+              <a:schemeClr val="lt1"/>
+            </a:fontRef>
+          </p:style>
+          <p:txBody>
+            <a:bodyPr rtlCol="0" anchor="ctr"/>
+            <a:lstStyle/>
+            <a:p>
+              <a:pPr algn="ctr"/>
+              <a:endParaRPr lang="pt-BR"/>
+            </a:p>
+          </p:txBody>
+        </p:sp>
+        <p:cxnSp>
+          <p:nvCxnSpPr>
+            <p:cNvPr id="103" name="Straight Connector 102"/>
+            <p:cNvCxnSpPr/>
+            <p:nvPr/>
+          </p:nvCxnSpPr>
+          <p:spPr>
+            <a:xfrm flipH="1">
+              <a:off x="4253250" y="5216278"/>
+              <a:ext cx="386493" cy="153789"/>
+            </a:xfrm>
+            <a:prstGeom prst="line">
+              <a:avLst/>
+            </a:prstGeom>
+            <a:ln w="12700">
+              <a:solidFill>
+                <a:schemeClr val="tx1"/>
+              </a:solidFill>
+              <a:prstDash val="dash"/>
+            </a:ln>
+          </p:spPr>
+          <p:style>
+            <a:lnRef idx="1">
+              <a:schemeClr val="accent1"/>
+            </a:lnRef>
+            <a:fillRef idx="0">
+              <a:schemeClr val="accent1"/>
+            </a:fillRef>
+            <a:effectRef idx="0">
+              <a:schemeClr val="accent1"/>
+            </a:effectRef>
+            <a:fontRef idx="minor">
+              <a:schemeClr val="tx1"/>
+            </a:fontRef>
+          </p:style>
+        </p:cxnSp>
+        <p:sp>
+          <p:nvSpPr>
+            <p:cNvPr id="136" name="Multiply 135"/>
+            <p:cNvSpPr>
+              <a:spLocks/>
+            </p:cNvSpPr>
+            <p:nvPr/>
+          </p:nvSpPr>
+          <p:spPr>
+            <a:xfrm>
+              <a:off x="4216841" y="5338443"/>
+              <a:ext cx="72817" cy="82800"/>
+            </a:xfrm>
+            <a:prstGeom prst="mathMultiply">
+              <a:avLst/>
+            </a:prstGeom>
+            <a:solidFill>
+              <a:srgbClr val="00B0F0"/>
+            </a:solidFill>
+            <a:ln w="3175">
+              <a:solidFill>
+                <a:schemeClr val="tx1"/>
+              </a:solidFill>
+            </a:ln>
+          </p:spPr>
+          <p:style>
+            <a:lnRef idx="2">
+              <a:schemeClr val="accent1">
+                <a:shade val="50000"/>
+              </a:schemeClr>
+            </a:lnRef>
+            <a:fillRef idx="1">
+              <a:schemeClr val="accent1"/>
+            </a:fillRef>
+            <a:effectRef idx="0">
+              <a:schemeClr val="accent1"/>
+            </a:effectRef>
+            <a:fontRef idx="minor">
+              <a:schemeClr val="lt1"/>
+            </a:fontRef>
+          </p:style>
+          <p:txBody>
+            <a:bodyPr rtlCol="0" anchor="ctr"/>
+            <a:lstStyle/>
+            <a:p>
+              <a:pPr algn="ctr"/>
+              <a:endParaRPr lang="pt-BR"/>
+            </a:p>
+          </p:txBody>
+        </p:sp>
+        <p:sp>
+          <p:nvSpPr>
+            <p:cNvPr id="137" name="Multiply 136"/>
+            <p:cNvSpPr>
+              <a:spLocks/>
+            </p:cNvSpPr>
+            <p:nvPr/>
+          </p:nvSpPr>
+          <p:spPr>
+            <a:xfrm>
+              <a:off x="4598658" y="5170600"/>
+              <a:ext cx="72817" cy="82800"/>
+            </a:xfrm>
+            <a:prstGeom prst="mathMultiply">
+              <a:avLst/>
+            </a:prstGeom>
+            <a:solidFill>
+              <a:srgbClr val="00B0F0"/>
+            </a:solidFill>
+            <a:ln w="3175">
+              <a:solidFill>
+                <a:schemeClr val="tx1"/>
+              </a:solidFill>
+            </a:ln>
+          </p:spPr>
+          <p:style>
+            <a:lnRef idx="2">
+              <a:schemeClr val="accent1">
+                <a:shade val="50000"/>
+              </a:schemeClr>
+            </a:lnRef>
+            <a:fillRef idx="1">
+              <a:schemeClr val="accent1"/>
+            </a:fillRef>
+            <a:effectRef idx="0">
+              <a:schemeClr val="accent1"/>
+            </a:effectRef>
+            <a:fontRef idx="minor">
+              <a:schemeClr val="lt1"/>
+            </a:fontRef>
+          </p:style>
+          <p:txBody>
+            <a:bodyPr rtlCol="0" anchor="ctr"/>
+            <a:lstStyle/>
+            <a:p>
+              <a:pPr algn="ctr"/>
+              <a:endParaRPr lang="pt-BR"/>
+            </a:p>
+          </p:txBody>
+        </p:sp>
+        <p:sp>
+          <p:nvSpPr>
+            <p:cNvPr id="69" name="Multiply 68"/>
+            <p:cNvSpPr>
+              <a:spLocks noChangeAspect="1"/>
+            </p:cNvSpPr>
+            <p:nvPr/>
+          </p:nvSpPr>
+          <p:spPr>
+            <a:xfrm>
+              <a:off x="4468132" y="3344554"/>
+              <a:ext cx="158298" cy="180000"/>
+            </a:xfrm>
+            <a:prstGeom prst="mathMultiply">
+              <a:avLst/>
+            </a:prstGeom>
+            <a:solidFill>
+              <a:srgbClr val="FF0000"/>
+            </a:solidFill>
+            <a:ln w="3175">
+              <a:solidFill>
+                <a:schemeClr val="tx1"/>
+              </a:solidFill>
+            </a:ln>
+          </p:spPr>
+          <p:style>
+            <a:lnRef idx="2">
+              <a:schemeClr val="accent1">
+                <a:shade val="50000"/>
+              </a:schemeClr>
+            </a:lnRef>
+            <a:fillRef idx="1">
+              <a:schemeClr val="accent1"/>
+            </a:fillRef>
+            <a:effectRef idx="0">
+              <a:schemeClr val="accent1"/>
+            </a:effectRef>
+            <a:fontRef idx="minor">
+              <a:schemeClr val="lt1"/>
+            </a:fontRef>
+          </p:style>
+          <p:txBody>
+            <a:bodyPr rtlCol="0" anchor="ctr"/>
+            <a:lstStyle/>
+            <a:p>
+              <a:pPr algn="ctr"/>
+              <a:endParaRPr lang="pt-BR"/>
+            </a:p>
+          </p:txBody>
+        </p:sp>
+        <p:cxnSp>
+          <p:nvCxnSpPr>
+            <p:cNvPr id="71" name="Straight Connector 70"/>
+            <p:cNvCxnSpPr/>
+            <p:nvPr/>
+          </p:nvCxnSpPr>
+          <p:spPr>
+            <a:xfrm flipH="1" flipV="1">
+              <a:off x="4516368" y="3611183"/>
+              <a:ext cx="73202" cy="50119"/>
+            </a:xfrm>
+            <a:prstGeom prst="line">
+              <a:avLst/>
+            </a:prstGeom>
+            <a:ln w="12700">
+              <a:solidFill>
+                <a:schemeClr val="tx1"/>
+              </a:solidFill>
+              <a:prstDash val="dash"/>
+            </a:ln>
+          </p:spPr>
+          <p:style>
+            <a:lnRef idx="1">
+              <a:schemeClr val="accent1"/>
+            </a:lnRef>
+            <a:fillRef idx="0">
+              <a:schemeClr val="accent1"/>
+            </a:fillRef>
+            <a:effectRef idx="0">
+              <a:schemeClr val="accent1"/>
+            </a:effectRef>
+            <a:fontRef idx="minor">
+              <a:schemeClr val="tx1"/>
+            </a:fontRef>
+          </p:style>
+        </p:cxnSp>
+        <p:cxnSp>
+          <p:nvCxnSpPr>
+            <p:cNvPr id="74" name="Straight Connector 73"/>
+            <p:cNvCxnSpPr/>
+            <p:nvPr/>
+          </p:nvCxnSpPr>
+          <p:spPr>
+            <a:xfrm rot="5400000" flipH="1" flipV="1">
+              <a:off x="4522774" y="3661302"/>
+              <a:ext cx="73202" cy="50119"/>
+            </a:xfrm>
+            <a:prstGeom prst="line">
+              <a:avLst/>
+            </a:prstGeom>
+            <a:ln w="12700">
+              <a:solidFill>
+                <a:schemeClr val="tx1"/>
+              </a:solidFill>
+              <a:prstDash val="dash"/>
+            </a:ln>
+          </p:spPr>
+          <p:style>
+            <a:lnRef idx="1">
+              <a:schemeClr val="accent1"/>
+            </a:lnRef>
+            <a:fillRef idx="0">
+              <a:schemeClr val="accent1"/>
+            </a:fillRef>
+            <a:effectRef idx="0">
+              <a:schemeClr val="accent1"/>
+            </a:effectRef>
+            <a:fontRef idx="minor">
+              <a:schemeClr val="tx1"/>
+            </a:fontRef>
+          </p:style>
+        </p:cxnSp>
+        <p:cxnSp>
+          <p:nvCxnSpPr>
+            <p:cNvPr id="76" name="Straight Connector 75"/>
+            <p:cNvCxnSpPr/>
+            <p:nvPr/>
+          </p:nvCxnSpPr>
+          <p:spPr>
+            <a:xfrm rot="5400000" flipH="1" flipV="1">
+              <a:off x="4540454" y="3778347"/>
+              <a:ext cx="73202" cy="50119"/>
+            </a:xfrm>
+            <a:prstGeom prst="line">
+              <a:avLst/>
+            </a:prstGeom>
+            <a:ln w="12700">
+              <a:solidFill>
+                <a:schemeClr val="tx1"/>
+              </a:solidFill>
+              <a:prstDash val="dash"/>
+            </a:ln>
+          </p:spPr>
+          <p:style>
+            <a:lnRef idx="1">
+              <a:schemeClr val="accent1"/>
+            </a:lnRef>
+            <a:fillRef idx="0">
+              <a:schemeClr val="accent1"/>
+            </a:fillRef>
+            <a:effectRef idx="0">
+              <a:schemeClr val="accent1"/>
+            </a:effectRef>
+            <a:fontRef idx="minor">
+              <a:schemeClr val="tx1"/>
+            </a:fontRef>
+          </p:style>
+        </p:cxnSp>
+        <p:cxnSp>
+          <p:nvCxnSpPr>
+            <p:cNvPr id="77" name="Straight Connector 76"/>
+            <p:cNvCxnSpPr/>
+            <p:nvPr/>
+          </p:nvCxnSpPr>
+          <p:spPr>
+            <a:xfrm rot="10800000" flipH="1" flipV="1">
+              <a:off x="4551995" y="3841032"/>
+              <a:ext cx="73202" cy="50119"/>
+            </a:xfrm>
+            <a:prstGeom prst="line">
+              <a:avLst/>
+            </a:prstGeom>
+            <a:ln w="12700">
+              <a:solidFill>
+                <a:schemeClr val="tx1"/>
+              </a:solidFill>
+              <a:prstDash val="dash"/>
+            </a:ln>
+          </p:spPr>
+          <p:style>
+            <a:lnRef idx="1">
+              <a:schemeClr val="accent1"/>
+            </a:lnRef>
+            <a:fillRef idx="0">
+              <a:schemeClr val="accent1"/>
+            </a:fillRef>
+            <a:effectRef idx="0">
+              <a:schemeClr val="accent1"/>
+            </a:effectRef>
+            <a:fontRef idx="minor">
+              <a:schemeClr val="tx1"/>
+            </a:fontRef>
+          </p:style>
+        </p:cxnSp>
+        <p:cxnSp>
+          <p:nvCxnSpPr>
+            <p:cNvPr id="78" name="Straight Connector 77"/>
+            <p:cNvCxnSpPr/>
+            <p:nvPr/>
+          </p:nvCxnSpPr>
+          <p:spPr>
+            <a:xfrm rot="5400000" flipH="1" flipV="1">
+              <a:off x="4557568" y="3898479"/>
+              <a:ext cx="73202" cy="50119"/>
+            </a:xfrm>
+            <a:prstGeom prst="line">
+              <a:avLst/>
+            </a:prstGeom>
+            <a:ln w="12700">
+              <a:solidFill>
+                <a:schemeClr val="tx1"/>
+              </a:solidFill>
+              <a:prstDash val="dash"/>
+            </a:ln>
+          </p:spPr>
+          <p:style>
+            <a:lnRef idx="1">
+              <a:schemeClr val="accent1"/>
+            </a:lnRef>
+            <a:fillRef idx="0">
+              <a:schemeClr val="accent1"/>
+            </a:fillRef>
+            <a:effectRef idx="0">
+              <a:schemeClr val="accent1"/>
+            </a:effectRef>
+            <a:fontRef idx="minor">
+              <a:schemeClr val="tx1"/>
+            </a:fontRef>
+          </p:style>
+        </p:cxnSp>
+        <p:sp>
+          <p:nvSpPr>
+            <p:cNvPr id="138" name="Multiply 137"/>
+            <p:cNvSpPr>
+              <a:spLocks noChangeAspect="1"/>
+            </p:cNvSpPr>
+            <p:nvPr/>
+          </p:nvSpPr>
+          <p:spPr>
+            <a:xfrm>
+              <a:off x="4396841" y="4994030"/>
+              <a:ext cx="72817" cy="82800"/>
+            </a:xfrm>
+            <a:prstGeom prst="mathMultiply">
+              <a:avLst/>
+            </a:prstGeom>
+            <a:solidFill>
+              <a:srgbClr val="00B0F0"/>
+            </a:solidFill>
+            <a:ln w="3175">
+              <a:solidFill>
+                <a:schemeClr val="tx1"/>
+              </a:solidFill>
+            </a:ln>
+          </p:spPr>
+          <p:style>
+            <a:lnRef idx="2">
+              <a:schemeClr val="accent1">
+                <a:shade val="50000"/>
+              </a:schemeClr>
+            </a:lnRef>
+            <a:fillRef idx="1">
+              <a:schemeClr val="accent1"/>
+            </a:fillRef>
+            <a:effectRef idx="0">
+              <a:schemeClr val="accent1"/>
+            </a:effectRef>
+            <a:fontRef idx="minor">
+              <a:schemeClr val="lt1"/>
+            </a:fontRef>
+          </p:style>
+          <p:txBody>
+            <a:bodyPr rtlCol="0" anchor="ctr"/>
+            <a:lstStyle/>
+            <a:p>
+              <a:pPr algn="ctr"/>
+              <a:endParaRPr lang="pt-BR"/>
+            </a:p>
+          </p:txBody>
+        </p:sp>
+        <p:cxnSp>
+          <p:nvCxnSpPr>
+            <p:cNvPr id="98" name="Straight Connector 97"/>
+            <p:cNvCxnSpPr/>
+            <p:nvPr/>
+          </p:nvCxnSpPr>
+          <p:spPr>
+            <a:xfrm flipV="1">
+              <a:off x="4433250" y="4936612"/>
+              <a:ext cx="145222" cy="101777"/>
+            </a:xfrm>
+            <a:prstGeom prst="line">
+              <a:avLst/>
+            </a:prstGeom>
+            <a:ln w="12700">
+              <a:solidFill>
+                <a:schemeClr val="tx1"/>
+              </a:solidFill>
+              <a:prstDash val="dash"/>
+            </a:ln>
+          </p:spPr>
+          <p:style>
+            <a:lnRef idx="1">
+              <a:schemeClr val="accent1"/>
+            </a:lnRef>
+            <a:fillRef idx="0">
+              <a:schemeClr val="accent1"/>
+            </a:fillRef>
+            <a:effectRef idx="0">
+              <a:schemeClr val="accent1"/>
+            </a:effectRef>
+            <a:fontRef idx="minor">
+              <a:schemeClr val="tx1"/>
+            </a:fontRef>
+          </p:style>
+        </p:cxnSp>
+        <p:cxnSp>
+          <p:nvCxnSpPr>
+            <p:cNvPr id="100" name="Straight Connector 99"/>
+            <p:cNvCxnSpPr/>
+            <p:nvPr/>
+          </p:nvCxnSpPr>
+          <p:spPr>
+            <a:xfrm>
+              <a:off x="4433250" y="5036924"/>
+              <a:ext cx="206493" cy="180000"/>
+            </a:xfrm>
+            <a:prstGeom prst="line">
+              <a:avLst/>
+            </a:prstGeom>
+            <a:ln w="12700">
+              <a:solidFill>
+                <a:schemeClr val="tx1"/>
+              </a:solidFill>
+              <a:prstDash val="dash"/>
+            </a:ln>
+          </p:spPr>
+          <p:style>
+            <a:lnRef idx="1">
+              <a:schemeClr val="accent1"/>
+            </a:lnRef>
+            <a:fillRef idx="0">
+              <a:schemeClr val="accent1"/>
+            </a:fillRef>
+            <a:effectRef idx="0">
+              <a:schemeClr val="accent1"/>
+            </a:effectRef>
+            <a:fontRef idx="minor">
+              <a:schemeClr val="tx1"/>
+            </a:fontRef>
+          </p:style>
+        </p:cxnSp>
+        <p:sp>
+          <p:nvSpPr>
+            <p:cNvPr id="139" name="Multiply 138"/>
+            <p:cNvSpPr>
+              <a:spLocks noChangeAspect="1"/>
+            </p:cNvSpPr>
+            <p:nvPr/>
+          </p:nvSpPr>
+          <p:spPr>
+            <a:xfrm>
+              <a:off x="4541256" y="4892106"/>
+              <a:ext cx="72817" cy="82800"/>
+            </a:xfrm>
+            <a:prstGeom prst="mathMultiply">
+              <a:avLst/>
+            </a:prstGeom>
+            <a:solidFill>
+              <a:srgbClr val="00B0F0"/>
+            </a:solidFill>
+            <a:ln w="3175">
+              <a:solidFill>
+                <a:schemeClr val="tx1"/>
+              </a:solidFill>
+            </a:ln>
+          </p:spPr>
+          <p:style>
+            <a:lnRef idx="2">
+              <a:schemeClr val="accent1">
+                <a:shade val="50000"/>
+              </a:schemeClr>
+            </a:lnRef>
+            <a:fillRef idx="1">
+              <a:schemeClr val="accent1"/>
+            </a:fillRef>
+            <a:effectRef idx="0">
+              <a:schemeClr val="accent1"/>
+            </a:effectRef>
+            <a:fontRef idx="minor">
+              <a:schemeClr val="lt1"/>
+            </a:fontRef>
+          </p:style>
+          <p:txBody>
+            <a:bodyPr rtlCol="0" anchor="ctr"/>
+            <a:lstStyle/>
+            <a:p>
+              <a:pPr algn="ctr"/>
+              <a:endParaRPr lang="pt-BR"/>
+            </a:p>
+          </p:txBody>
+        </p:sp>
+        <p:sp>
+          <p:nvSpPr>
+            <p:cNvPr id="140" name="Multiply 139"/>
+            <p:cNvSpPr>
+              <a:spLocks noChangeAspect="1"/>
+            </p:cNvSpPr>
+            <p:nvPr/>
+          </p:nvSpPr>
+          <p:spPr>
+            <a:xfrm>
+              <a:off x="4416484" y="4782417"/>
+              <a:ext cx="72817" cy="82800"/>
+            </a:xfrm>
+            <a:prstGeom prst="mathMultiply">
+              <a:avLst/>
+            </a:prstGeom>
+            <a:solidFill>
+              <a:srgbClr val="00B0F0"/>
+            </a:solidFill>
+            <a:ln w="3175">
+              <a:solidFill>
+                <a:schemeClr val="tx1"/>
+              </a:solidFill>
+            </a:ln>
+          </p:spPr>
+          <p:style>
+            <a:lnRef idx="2">
+              <a:schemeClr val="accent1">
+                <a:shade val="50000"/>
+              </a:schemeClr>
+            </a:lnRef>
+            <a:fillRef idx="1">
+              <a:schemeClr val="accent1"/>
+            </a:fillRef>
+            <a:effectRef idx="0">
+              <a:schemeClr val="accent1"/>
+            </a:effectRef>
+            <a:fontRef idx="minor">
+              <a:schemeClr val="lt1"/>
+            </a:fontRef>
+          </p:style>
+          <p:txBody>
+            <a:bodyPr rtlCol="0" anchor="ctr"/>
+            <a:lstStyle/>
+            <a:p>
+              <a:pPr algn="ctr"/>
+              <a:endParaRPr lang="pt-BR"/>
+            </a:p>
+          </p:txBody>
+        </p:sp>
+        <p:sp>
+          <p:nvSpPr>
+            <p:cNvPr id="141" name="Multiply 140"/>
+            <p:cNvSpPr>
+              <a:spLocks noChangeAspect="1"/>
+            </p:cNvSpPr>
+            <p:nvPr/>
+          </p:nvSpPr>
+          <p:spPr>
+            <a:xfrm>
+              <a:off x="4527814" y="4665846"/>
+              <a:ext cx="72817" cy="82800"/>
+            </a:xfrm>
+            <a:prstGeom prst="mathMultiply">
+              <a:avLst/>
+            </a:prstGeom>
+            <a:solidFill>
+              <a:srgbClr val="00B0F0"/>
+            </a:solidFill>
+            <a:ln w="3175">
+              <a:solidFill>
+                <a:schemeClr val="tx1"/>
+              </a:solidFill>
+            </a:ln>
+          </p:spPr>
+          <p:style>
+            <a:lnRef idx="2">
+              <a:schemeClr val="accent1">
+                <a:shade val="50000"/>
+              </a:schemeClr>
+            </a:lnRef>
+            <a:fillRef idx="1">
+              <a:schemeClr val="accent1"/>
+            </a:fillRef>
+            <a:effectRef idx="0">
+              <a:schemeClr val="accent1"/>
+            </a:effectRef>
+            <a:fontRef idx="minor">
+              <a:schemeClr val="lt1"/>
+            </a:fontRef>
+          </p:style>
+          <p:txBody>
+            <a:bodyPr rtlCol="0" anchor="ctr"/>
+            <a:lstStyle/>
+            <a:p>
+              <a:pPr algn="ctr"/>
+              <a:endParaRPr lang="pt-BR"/>
+            </a:p>
+          </p:txBody>
+        </p:sp>
+        <p:sp>
+          <p:nvSpPr>
+            <p:cNvPr id="142" name="Multiply 141"/>
+            <p:cNvSpPr>
+              <a:spLocks/>
+            </p:cNvSpPr>
+            <p:nvPr/>
+          </p:nvSpPr>
+          <p:spPr>
+            <a:xfrm>
+              <a:off x="4432482" y="4497324"/>
+              <a:ext cx="72000" cy="82800"/>
+            </a:xfrm>
+            <a:prstGeom prst="mathMultiply">
+              <a:avLst/>
+            </a:prstGeom>
+            <a:solidFill>
+              <a:srgbClr val="00B0F0"/>
+            </a:solidFill>
+            <a:ln w="3175">
+              <a:solidFill>
+                <a:schemeClr val="tx1"/>
+              </a:solidFill>
+            </a:ln>
+          </p:spPr>
+          <p:style>
+            <a:lnRef idx="2">
+              <a:schemeClr val="accent1">
+                <a:shade val="50000"/>
+              </a:schemeClr>
+            </a:lnRef>
+            <a:fillRef idx="1">
+              <a:schemeClr val="accent1"/>
+            </a:fillRef>
+            <a:effectRef idx="0">
+              <a:schemeClr val="accent1"/>
+            </a:effectRef>
+            <a:fontRef idx="minor">
+              <a:schemeClr val="lt1"/>
+            </a:fontRef>
+          </p:style>
+          <p:txBody>
+            <a:bodyPr rtlCol="0" anchor="ctr"/>
+            <a:lstStyle/>
+            <a:p>
+              <a:pPr algn="ctr"/>
+              <a:endParaRPr lang="pt-BR"/>
+            </a:p>
+          </p:txBody>
+        </p:sp>
+        <p:sp>
+          <p:nvSpPr>
+            <p:cNvPr id="143" name="Multiply 142"/>
+            <p:cNvSpPr>
+              <a:spLocks/>
+            </p:cNvSpPr>
+            <p:nvPr/>
+          </p:nvSpPr>
+          <p:spPr>
+            <a:xfrm>
+              <a:off x="4586752" y="4430025"/>
+              <a:ext cx="72000" cy="82800"/>
+            </a:xfrm>
+            <a:prstGeom prst="mathMultiply">
+              <a:avLst/>
+            </a:prstGeom>
+            <a:solidFill>
+              <a:srgbClr val="00B0F0"/>
+            </a:solidFill>
+            <a:ln w="3175">
+              <a:solidFill>
+                <a:schemeClr val="tx1"/>
+              </a:solidFill>
+            </a:ln>
+          </p:spPr>
+          <p:style>
+            <a:lnRef idx="2">
+              <a:schemeClr val="accent1">
+                <a:shade val="50000"/>
+              </a:schemeClr>
+            </a:lnRef>
+            <a:fillRef idx="1">
+              <a:schemeClr val="accent1"/>
+            </a:fillRef>
+            <a:effectRef idx="0">
+              <a:schemeClr val="accent1"/>
+            </a:effectRef>
+            <a:fontRef idx="minor">
+              <a:schemeClr val="lt1"/>
+            </a:fontRef>
+          </p:style>
+          <p:txBody>
+            <a:bodyPr rtlCol="0" anchor="ctr"/>
+            <a:lstStyle/>
+            <a:p>
+              <a:pPr algn="ctr"/>
+              <a:endParaRPr lang="pt-BR"/>
+            </a:p>
+          </p:txBody>
+        </p:sp>
+        <p:sp>
+          <p:nvSpPr>
+            <p:cNvPr id="144" name="Multiply 143"/>
+            <p:cNvSpPr>
+              <a:spLocks/>
+            </p:cNvSpPr>
+            <p:nvPr/>
+          </p:nvSpPr>
+          <p:spPr>
+            <a:xfrm>
+              <a:off x="4489301" y="4254654"/>
+              <a:ext cx="72000" cy="82800"/>
+            </a:xfrm>
+            <a:prstGeom prst="mathMultiply">
+              <a:avLst/>
+            </a:prstGeom>
+            <a:solidFill>
+              <a:srgbClr val="00B0F0"/>
+            </a:solidFill>
+            <a:ln w="3175">
+              <a:solidFill>
+                <a:schemeClr val="tx1"/>
+              </a:solidFill>
+            </a:ln>
+          </p:spPr>
+          <p:style>
+            <a:lnRef idx="2">
+              <a:schemeClr val="accent1">
+                <a:shade val="50000"/>
+              </a:schemeClr>
+            </a:lnRef>
+            <a:fillRef idx="1">
+              <a:schemeClr val="accent1"/>
+            </a:fillRef>
+            <a:effectRef idx="0">
+              <a:schemeClr val="accent1"/>
+            </a:effectRef>
+            <a:fontRef idx="minor">
+              <a:schemeClr val="lt1"/>
+            </a:fontRef>
+          </p:style>
+          <p:txBody>
+            <a:bodyPr rtlCol="0" anchor="ctr"/>
+            <a:lstStyle/>
+            <a:p>
+              <a:pPr algn="ctr"/>
+              <a:endParaRPr lang="pt-BR"/>
+            </a:p>
+          </p:txBody>
+        </p:sp>
+        <p:sp>
+          <p:nvSpPr>
+            <p:cNvPr id="145" name="Multiply 144"/>
+            <p:cNvSpPr>
+              <a:spLocks/>
+            </p:cNvSpPr>
+            <p:nvPr/>
+          </p:nvSpPr>
+          <p:spPr>
+            <a:xfrm>
+              <a:off x="4647454" y="4169248"/>
+              <a:ext cx="72000" cy="82800"/>
+            </a:xfrm>
+            <a:prstGeom prst="mathMultiply">
+              <a:avLst/>
+            </a:prstGeom>
+            <a:solidFill>
+              <a:srgbClr val="00B0F0"/>
+            </a:solidFill>
+            <a:ln w="3175">
+              <a:solidFill>
+                <a:schemeClr val="tx1"/>
+              </a:solidFill>
+            </a:ln>
+          </p:spPr>
+          <p:style>
+            <a:lnRef idx="2">
+              <a:schemeClr val="accent1">
+                <a:shade val="50000"/>
+              </a:schemeClr>
+            </a:lnRef>
+            <a:fillRef idx="1">
+              <a:schemeClr val="accent1"/>
+            </a:fillRef>
+            <a:effectRef idx="0">
+              <a:schemeClr val="accent1"/>
+            </a:effectRef>
+            <a:fontRef idx="minor">
+              <a:schemeClr val="lt1"/>
+            </a:fontRef>
+          </p:style>
+          <p:txBody>
+            <a:bodyPr rtlCol="0" anchor="ctr"/>
+            <a:lstStyle/>
+            <a:p>
+              <a:pPr algn="ctr"/>
+              <a:endParaRPr lang="pt-BR"/>
+            </a:p>
+          </p:txBody>
+        </p:sp>
+        <p:sp>
+          <p:nvSpPr>
+            <p:cNvPr id="146" name="Multiply 145"/>
+            <p:cNvSpPr>
+              <a:spLocks/>
+            </p:cNvSpPr>
+            <p:nvPr/>
+          </p:nvSpPr>
+          <p:spPr>
+            <a:xfrm>
+              <a:off x="4515354" y="4085156"/>
+              <a:ext cx="72000" cy="82800"/>
+            </a:xfrm>
+            <a:prstGeom prst="mathMultiply">
+              <a:avLst/>
+            </a:prstGeom>
+            <a:solidFill>
+              <a:srgbClr val="00B0F0"/>
+            </a:solidFill>
+            <a:ln w="3175">
+              <a:solidFill>
+                <a:schemeClr val="tx1"/>
+              </a:solidFill>
+            </a:ln>
+          </p:spPr>
+          <p:style>
+            <a:lnRef idx="2">
+              <a:schemeClr val="accent1">
+                <a:shade val="50000"/>
+              </a:schemeClr>
+            </a:lnRef>
+            <a:fillRef idx="1">
+              <a:schemeClr val="accent1"/>
+            </a:fillRef>
+            <a:effectRef idx="0">
+              <a:schemeClr val="accent1"/>
+            </a:effectRef>
+            <a:fontRef idx="minor">
+              <a:schemeClr val="lt1"/>
+            </a:fontRef>
+          </p:style>
+          <p:txBody>
+            <a:bodyPr rtlCol="0" anchor="ctr"/>
+            <a:lstStyle/>
+            <a:p>
+              <a:pPr algn="ctr"/>
+              <a:endParaRPr lang="pt-BR"/>
+            </a:p>
+          </p:txBody>
+        </p:sp>
+        <p:sp>
+          <p:nvSpPr>
+            <p:cNvPr id="147" name="Multiply 146"/>
+            <p:cNvSpPr>
+              <a:spLocks noChangeAspect="1"/>
+            </p:cNvSpPr>
+            <p:nvPr/>
+          </p:nvSpPr>
+          <p:spPr>
+            <a:xfrm>
+              <a:off x="4601229" y="3950902"/>
+              <a:ext cx="72000" cy="81871"/>
+            </a:xfrm>
+            <a:prstGeom prst="mathMultiply">
+              <a:avLst/>
+            </a:prstGeom>
+            <a:solidFill>
+              <a:srgbClr val="00B0F0"/>
+            </a:solidFill>
+            <a:ln w="3175">
+              <a:solidFill>
+                <a:schemeClr val="tx1"/>
+              </a:solidFill>
+            </a:ln>
+          </p:spPr>
+          <p:style>
+            <a:lnRef idx="2">
+              <a:schemeClr val="accent1">
+                <a:shade val="50000"/>
+              </a:schemeClr>
+            </a:lnRef>
+            <a:fillRef idx="1">
+              <a:schemeClr val="accent1"/>
+            </a:fillRef>
+            <a:effectRef idx="0">
+              <a:schemeClr val="accent1"/>
+            </a:effectRef>
+            <a:fontRef idx="minor">
+              <a:schemeClr val="lt1"/>
+            </a:fontRef>
+          </p:style>
+          <p:txBody>
+            <a:bodyPr rtlCol="0" anchor="ctr"/>
+            <a:lstStyle/>
+            <a:p>
+              <a:pPr algn="ctr"/>
+              <a:endParaRPr lang="pt-BR"/>
+            </a:p>
+          </p:txBody>
+        </p:sp>
+        <p:sp>
+          <p:nvSpPr>
+            <p:cNvPr id="148" name="Multiply 147"/>
+            <p:cNvSpPr>
+              <a:spLocks noChangeAspect="1"/>
+            </p:cNvSpPr>
+            <p:nvPr/>
+          </p:nvSpPr>
+          <p:spPr>
+            <a:xfrm>
+              <a:off x="4598029" y="3846380"/>
+              <a:ext cx="72000" cy="81871"/>
+            </a:xfrm>
+            <a:prstGeom prst="mathMultiply">
+              <a:avLst/>
+            </a:prstGeom>
+            <a:solidFill>
+              <a:srgbClr val="00B0F0"/>
+            </a:solidFill>
+            <a:ln w="3175">
+              <a:solidFill>
+                <a:schemeClr val="tx1"/>
+              </a:solidFill>
+            </a:ln>
+          </p:spPr>
+          <p:style>
+            <a:lnRef idx="2">
+              <a:schemeClr val="accent1">
+                <a:shade val="50000"/>
+              </a:schemeClr>
+            </a:lnRef>
+            <a:fillRef idx="1">
+              <a:schemeClr val="accent1"/>
+            </a:fillRef>
+            <a:effectRef idx="0">
+              <a:schemeClr val="accent1"/>
+            </a:effectRef>
+            <a:fontRef idx="minor">
+              <a:schemeClr val="lt1"/>
+            </a:fontRef>
+          </p:style>
+          <p:txBody>
+            <a:bodyPr rtlCol="0" anchor="ctr"/>
+            <a:lstStyle/>
+            <a:p>
+              <a:pPr algn="ctr"/>
+              <a:endParaRPr lang="pt-BR"/>
+            </a:p>
+          </p:txBody>
+        </p:sp>
+        <p:sp>
+          <p:nvSpPr>
+            <p:cNvPr id="149" name="Multiply 148"/>
+            <p:cNvSpPr>
+              <a:spLocks noChangeAspect="1"/>
+            </p:cNvSpPr>
+            <p:nvPr/>
+          </p:nvSpPr>
+          <p:spPr>
+            <a:xfrm>
+              <a:off x="4517694" y="3803997"/>
+              <a:ext cx="72000" cy="81871"/>
+            </a:xfrm>
+            <a:prstGeom prst="mathMultiply">
+              <a:avLst/>
+            </a:prstGeom>
+            <a:solidFill>
+              <a:srgbClr val="00B0F0"/>
+            </a:solidFill>
+            <a:ln w="3175">
+              <a:solidFill>
+                <a:schemeClr val="tx1"/>
+              </a:solidFill>
+            </a:ln>
+          </p:spPr>
+          <p:style>
+            <a:lnRef idx="2">
+              <a:schemeClr val="accent1">
+                <a:shade val="50000"/>
+              </a:schemeClr>
+            </a:lnRef>
+            <a:fillRef idx="1">
+              <a:schemeClr val="accent1"/>
+            </a:fillRef>
+            <a:effectRef idx="0">
+              <a:schemeClr val="accent1"/>
+            </a:effectRef>
+            <a:fontRef idx="minor">
+              <a:schemeClr val="lt1"/>
+            </a:fontRef>
+          </p:style>
+          <p:txBody>
+            <a:bodyPr rtlCol="0" anchor="ctr"/>
+            <a:lstStyle/>
+            <a:p>
+              <a:pPr algn="ctr"/>
+              <a:endParaRPr lang="pt-BR"/>
+            </a:p>
+          </p:txBody>
+        </p:sp>
+        <p:sp>
+          <p:nvSpPr>
+            <p:cNvPr id="150" name="Multiply 149"/>
+            <p:cNvSpPr>
+              <a:spLocks noChangeAspect="1"/>
+            </p:cNvSpPr>
+            <p:nvPr/>
+          </p:nvSpPr>
+          <p:spPr>
+            <a:xfrm>
+              <a:off x="4496498" y="3683246"/>
+              <a:ext cx="72000" cy="81871"/>
+            </a:xfrm>
+            <a:prstGeom prst="mathMultiply">
+              <a:avLst/>
+            </a:prstGeom>
+            <a:solidFill>
+              <a:srgbClr val="00B0F0"/>
+            </a:solidFill>
+            <a:ln w="3175">
+              <a:solidFill>
+                <a:schemeClr val="tx1"/>
+              </a:solidFill>
+            </a:ln>
+          </p:spPr>
+          <p:style>
+            <a:lnRef idx="2">
+              <a:schemeClr val="accent1">
+                <a:shade val="50000"/>
+              </a:schemeClr>
+            </a:lnRef>
+            <a:fillRef idx="1">
+              <a:schemeClr val="accent1"/>
+            </a:fillRef>
+            <a:effectRef idx="0">
+              <a:schemeClr val="accent1"/>
+            </a:effectRef>
+            <a:fontRef idx="minor">
+              <a:schemeClr val="lt1"/>
+            </a:fontRef>
+          </p:style>
+          <p:txBody>
+            <a:bodyPr rtlCol="0" anchor="ctr"/>
+            <a:lstStyle/>
+            <a:p>
+              <a:pPr algn="ctr"/>
+              <a:endParaRPr lang="pt-BR"/>
+            </a:p>
+          </p:txBody>
+        </p:sp>
+        <p:sp>
+          <p:nvSpPr>
+            <p:cNvPr id="151" name="Multiply 150"/>
+            <p:cNvSpPr>
+              <a:spLocks noChangeAspect="1"/>
+            </p:cNvSpPr>
+            <p:nvPr/>
+          </p:nvSpPr>
+          <p:spPr>
+            <a:xfrm>
+              <a:off x="4486717" y="3557718"/>
+              <a:ext cx="72000" cy="81871"/>
+            </a:xfrm>
+            <a:prstGeom prst="mathMultiply">
+              <a:avLst/>
+            </a:prstGeom>
+            <a:solidFill>
+              <a:srgbClr val="00B0F0"/>
+            </a:solidFill>
+            <a:ln w="3175">
+              <a:solidFill>
+                <a:schemeClr val="tx1"/>
+              </a:solidFill>
+            </a:ln>
+          </p:spPr>
+          <p:style>
+            <a:lnRef idx="2">
+              <a:schemeClr val="accent1">
+                <a:shade val="50000"/>
+              </a:schemeClr>
+            </a:lnRef>
+            <a:fillRef idx="1">
+              <a:schemeClr val="accent1"/>
+            </a:fillRef>
+            <a:effectRef idx="0">
+              <a:schemeClr val="accent1"/>
+            </a:effectRef>
+            <a:fontRef idx="minor">
+              <a:schemeClr val="lt1"/>
+            </a:fontRef>
+          </p:style>
+          <p:txBody>
+            <a:bodyPr rtlCol="0" anchor="ctr"/>
+            <a:lstStyle/>
+            <a:p>
+              <a:pPr algn="ctr"/>
+              <a:endParaRPr lang="pt-BR"/>
+            </a:p>
+          </p:txBody>
+        </p:sp>
+        <p:cxnSp>
+          <p:nvCxnSpPr>
+            <p:cNvPr id="80" name="Straight Connector 79"/>
+            <p:cNvCxnSpPr/>
+            <p:nvPr/>
+          </p:nvCxnSpPr>
+          <p:spPr>
+            <a:xfrm rot="10800000" flipH="1" flipV="1">
+              <a:off x="4569109" y="3960140"/>
+              <a:ext cx="73202" cy="50119"/>
+            </a:xfrm>
+            <a:prstGeom prst="line">
+              <a:avLst/>
+            </a:prstGeom>
+            <a:ln w="12700">
+              <a:solidFill>
+                <a:schemeClr val="tx1"/>
+              </a:solidFill>
+              <a:prstDash val="dash"/>
+            </a:ln>
+          </p:spPr>
+          <p:style>
+            <a:lnRef idx="1">
+              <a:schemeClr val="accent1"/>
+            </a:lnRef>
+            <a:fillRef idx="0">
+              <a:schemeClr val="accent1"/>
+            </a:fillRef>
+            <a:effectRef idx="0">
+              <a:schemeClr val="accent1"/>
+            </a:effectRef>
+            <a:fontRef idx="minor">
+              <a:schemeClr val="tx1"/>
+            </a:fontRef>
+          </p:style>
+        </p:cxnSp>
+        <p:cxnSp>
+          <p:nvCxnSpPr>
+            <p:cNvPr id="81" name="Straight Connector 80"/>
+            <p:cNvCxnSpPr/>
+            <p:nvPr/>
+          </p:nvCxnSpPr>
+          <p:spPr>
+            <a:xfrm flipV="1">
+              <a:off x="4551996" y="4006045"/>
+              <a:ext cx="87747" cy="124391"/>
+            </a:xfrm>
+            <a:prstGeom prst="line">
+              <a:avLst/>
+            </a:prstGeom>
+            <a:ln w="12700">
+              <a:solidFill>
+                <a:schemeClr val="tx1"/>
+              </a:solidFill>
+              <a:prstDash val="dash"/>
+            </a:ln>
+          </p:spPr>
+          <p:style>
+            <a:lnRef idx="1">
+              <a:schemeClr val="accent1"/>
+            </a:lnRef>
+            <a:fillRef idx="0">
+              <a:schemeClr val="accent1"/>
+            </a:fillRef>
+            <a:effectRef idx="0">
+              <a:schemeClr val="accent1"/>
+            </a:effectRef>
+            <a:fontRef idx="minor">
+              <a:schemeClr val="tx1"/>
+            </a:fontRef>
+          </p:style>
+        </p:cxnSp>
+        <p:cxnSp>
+          <p:nvCxnSpPr>
+            <p:cNvPr id="88" name="Straight Connector 87"/>
+            <p:cNvCxnSpPr/>
+            <p:nvPr/>
+          </p:nvCxnSpPr>
+          <p:spPr>
+            <a:xfrm rot="5400000" flipV="1">
+              <a:off x="4570316" y="4113719"/>
+              <a:ext cx="87747" cy="124391"/>
+            </a:xfrm>
+            <a:prstGeom prst="line">
+              <a:avLst/>
+            </a:prstGeom>
+            <a:ln w="12700">
+              <a:solidFill>
+                <a:schemeClr val="tx1"/>
+              </a:solidFill>
+              <a:prstDash val="dash"/>
+            </a:ln>
+          </p:spPr>
+          <p:style>
+            <a:lnRef idx="1">
+              <a:schemeClr val="accent1"/>
+            </a:lnRef>
+            <a:fillRef idx="0">
+              <a:schemeClr val="accent1"/>
+            </a:fillRef>
+            <a:effectRef idx="0">
+              <a:schemeClr val="accent1"/>
+            </a:effectRef>
+            <a:fontRef idx="minor">
+              <a:schemeClr val="tx1"/>
+            </a:fontRef>
+          </p:style>
+        </p:cxnSp>
+        <p:cxnSp>
+          <p:nvCxnSpPr>
+            <p:cNvPr id="89" name="Straight Connector 88"/>
+            <p:cNvCxnSpPr/>
+            <p:nvPr/>
+          </p:nvCxnSpPr>
+          <p:spPr>
+            <a:xfrm flipH="1">
+              <a:off x="4522717" y="4217178"/>
+              <a:ext cx="158615" cy="91964"/>
+            </a:xfrm>
+            <a:prstGeom prst="line">
+              <a:avLst/>
+            </a:prstGeom>
+            <a:ln w="12700">
+              <a:solidFill>
+                <a:schemeClr val="tx1"/>
+              </a:solidFill>
+              <a:prstDash val="dash"/>
+            </a:ln>
+          </p:spPr>
+          <p:style>
+            <a:lnRef idx="1">
+              <a:schemeClr val="accent1"/>
+            </a:lnRef>
+            <a:fillRef idx="0">
+              <a:schemeClr val="accent1"/>
+            </a:fillRef>
+            <a:effectRef idx="0">
+              <a:schemeClr val="accent1"/>
+            </a:effectRef>
+            <a:fontRef idx="minor">
+              <a:schemeClr val="tx1"/>
+            </a:fontRef>
+          </p:style>
+        </p:cxnSp>
+        <p:cxnSp>
+          <p:nvCxnSpPr>
+            <p:cNvPr id="91" name="Straight Connector 90"/>
+            <p:cNvCxnSpPr/>
+            <p:nvPr/>
+          </p:nvCxnSpPr>
+          <p:spPr>
+            <a:xfrm rot="5400000" flipH="1">
+              <a:off x="4490591" y="4331172"/>
+              <a:ext cx="158615" cy="91964"/>
+            </a:xfrm>
+            <a:prstGeom prst="line">
+              <a:avLst/>
+            </a:prstGeom>
+            <a:ln w="12700">
+              <a:solidFill>
+                <a:schemeClr val="tx1"/>
+              </a:solidFill>
+              <a:prstDash val="dash"/>
+            </a:ln>
+          </p:spPr>
+          <p:style>
+            <a:lnRef idx="1">
+              <a:schemeClr val="accent1"/>
+            </a:lnRef>
+            <a:fillRef idx="0">
+              <a:schemeClr val="accent1"/>
+            </a:fillRef>
+            <a:effectRef idx="0">
+              <a:schemeClr val="accent1"/>
+            </a:effectRef>
+            <a:fontRef idx="minor">
+              <a:schemeClr val="tx1"/>
+            </a:fontRef>
+          </p:style>
+        </p:cxnSp>
+        <p:cxnSp>
+          <p:nvCxnSpPr>
+            <p:cNvPr id="92" name="Straight Connector 91"/>
+            <p:cNvCxnSpPr/>
+            <p:nvPr/>
+          </p:nvCxnSpPr>
+          <p:spPr>
+            <a:xfrm rot="10800000" flipH="1">
+              <a:off x="4466582" y="4460600"/>
+              <a:ext cx="158615" cy="91964"/>
+            </a:xfrm>
+            <a:prstGeom prst="line">
+              <a:avLst/>
+            </a:prstGeom>
+            <a:ln w="12700">
+              <a:solidFill>
+                <a:schemeClr val="tx1"/>
+              </a:solidFill>
+              <a:prstDash val="dash"/>
+            </a:ln>
+          </p:spPr>
+          <p:style>
+            <a:lnRef idx="1">
+              <a:schemeClr val="accent1"/>
+            </a:lnRef>
+            <a:fillRef idx="0">
+              <a:schemeClr val="accent1"/>
+            </a:fillRef>
+            <a:effectRef idx="0">
+              <a:schemeClr val="accent1"/>
+            </a:effectRef>
+            <a:fontRef idx="minor">
+              <a:schemeClr val="tx1"/>
+            </a:fontRef>
+          </p:style>
+        </p:cxnSp>
+        <p:cxnSp>
+          <p:nvCxnSpPr>
+            <p:cNvPr id="93" name="Straight Connector 92"/>
+            <p:cNvCxnSpPr/>
+            <p:nvPr/>
+          </p:nvCxnSpPr>
+          <p:spPr>
+            <a:xfrm rot="16200000" flipH="1">
+              <a:off x="4438387" y="4578734"/>
+              <a:ext cx="158615" cy="91964"/>
+            </a:xfrm>
+            <a:prstGeom prst="line">
+              <a:avLst/>
+            </a:prstGeom>
+            <a:ln w="12700">
+              <a:solidFill>
+                <a:schemeClr val="tx1"/>
+              </a:solidFill>
+              <a:prstDash val="dash"/>
+            </a:ln>
+          </p:spPr>
+          <p:style>
+            <a:lnRef idx="1">
+              <a:schemeClr val="accent1"/>
+            </a:lnRef>
+            <a:fillRef idx="0">
+              <a:schemeClr val="accent1"/>
+            </a:fillRef>
+            <a:effectRef idx="0">
+              <a:schemeClr val="accent1"/>
+            </a:effectRef>
+            <a:fontRef idx="minor">
+              <a:schemeClr val="tx1"/>
+            </a:fontRef>
+          </p:style>
+        </p:cxnSp>
+        <p:cxnSp>
+          <p:nvCxnSpPr>
+            <p:cNvPr id="95" name="Straight Connector 94"/>
+            <p:cNvCxnSpPr/>
+            <p:nvPr/>
+          </p:nvCxnSpPr>
+          <p:spPr>
+            <a:xfrm flipV="1">
+              <a:off x="4460231" y="4699147"/>
+              <a:ext cx="105160" cy="126727"/>
+            </a:xfrm>
+            <a:prstGeom prst="line">
+              <a:avLst/>
+            </a:prstGeom>
+            <a:ln w="12700">
+              <a:solidFill>
+                <a:schemeClr val="tx1"/>
+              </a:solidFill>
+              <a:prstDash val="dash"/>
+            </a:ln>
+          </p:spPr>
+          <p:style>
+            <a:lnRef idx="1">
+              <a:schemeClr val="accent1"/>
+            </a:lnRef>
+            <a:fillRef idx="0">
+              <a:schemeClr val="accent1"/>
+            </a:fillRef>
+            <a:effectRef idx="0">
+              <a:schemeClr val="accent1"/>
+            </a:effectRef>
+            <a:fontRef idx="minor">
+              <a:schemeClr val="tx1"/>
+            </a:fontRef>
+          </p:style>
+        </p:cxnSp>
+        <p:cxnSp>
+          <p:nvCxnSpPr>
+            <p:cNvPr id="97" name="Straight Connector 96"/>
+            <p:cNvCxnSpPr/>
+            <p:nvPr/>
+          </p:nvCxnSpPr>
+          <p:spPr>
+            <a:xfrm rot="5400000" flipV="1">
+              <a:off x="4470137" y="4820883"/>
+              <a:ext cx="105160" cy="126727"/>
+            </a:xfrm>
+            <a:prstGeom prst="line">
+              <a:avLst/>
+            </a:prstGeom>
+            <a:ln w="12700">
+              <a:solidFill>
+                <a:schemeClr val="tx1"/>
+              </a:solidFill>
+              <a:prstDash val="dash"/>
+            </a:ln>
+          </p:spPr>
+          <p:style>
+            <a:lnRef idx="1">
+              <a:schemeClr val="accent1"/>
+            </a:lnRef>
+            <a:fillRef idx="0">
+              <a:schemeClr val="accent1"/>
+            </a:fillRef>
+            <a:effectRef idx="0">
+              <a:schemeClr val="accent1"/>
+            </a:effectRef>
+            <a:fontRef idx="minor">
+              <a:schemeClr val="tx1"/>
+            </a:fontRef>
+          </p:style>
+        </p:cxnSp>
+        <p:cxnSp>
+          <p:nvCxnSpPr>
+            <p:cNvPr id="66" name="Straight Connector 65"/>
+            <p:cNvCxnSpPr/>
+            <p:nvPr/>
+          </p:nvCxnSpPr>
+          <p:spPr>
+            <a:xfrm flipV="1">
+              <a:off x="4513192" y="3490807"/>
+              <a:ext cx="42247" cy="120375"/>
+            </a:xfrm>
+            <a:prstGeom prst="line">
+              <a:avLst/>
+            </a:prstGeom>
+            <a:ln w="12700">
+              <a:solidFill>
+                <a:schemeClr val="tx1"/>
+              </a:solidFill>
+              <a:prstDash val="dash"/>
+            </a:ln>
+          </p:spPr>
+          <p:style>
+            <a:lnRef idx="1">
+              <a:schemeClr val="accent1"/>
+            </a:lnRef>
+            <a:fillRef idx="0">
+              <a:schemeClr val="accent1"/>
+            </a:fillRef>
+            <a:effectRef idx="0">
+              <a:schemeClr val="accent1"/>
+            </a:effectRef>
+            <a:fontRef idx="minor">
+              <a:schemeClr val="tx1"/>
+            </a:fontRef>
+          </p:style>
+        </p:cxnSp>
+        <p:cxnSp>
+          <p:nvCxnSpPr>
+            <p:cNvPr id="75" name="Straight Connector 74"/>
+            <p:cNvCxnSpPr/>
+            <p:nvPr/>
+          </p:nvCxnSpPr>
+          <p:spPr>
+            <a:xfrm rot="10800000" flipH="1" flipV="1">
+              <a:off x="4527096" y="3725595"/>
+              <a:ext cx="73202" cy="50119"/>
+            </a:xfrm>
+            <a:prstGeom prst="line">
+              <a:avLst/>
+            </a:prstGeom>
+            <a:ln w="12700">
+              <a:solidFill>
+                <a:schemeClr val="tx1"/>
+              </a:solidFill>
+              <a:prstDash val="dash"/>
+            </a:ln>
+          </p:spPr>
+          <p:style>
+            <a:lnRef idx="1">
+              <a:schemeClr val="accent1"/>
+            </a:lnRef>
+            <a:fillRef idx="0">
+              <a:schemeClr val="accent1"/>
+            </a:fillRef>
+            <a:effectRef idx="0">
+              <a:schemeClr val="accent1"/>
+            </a:effectRef>
+            <a:fontRef idx="minor">
+              <a:schemeClr val="tx1"/>
+            </a:fontRef>
+          </p:style>
+        </p:cxnSp>
+        <p:sp>
+          <p:nvSpPr>
+            <p:cNvPr id="152" name="Multiply 151"/>
+            <p:cNvSpPr>
+              <a:spLocks noChangeAspect="1"/>
+            </p:cNvSpPr>
+            <p:nvPr/>
+          </p:nvSpPr>
+          <p:spPr>
+            <a:xfrm>
+              <a:off x="4568482" y="3722621"/>
+              <a:ext cx="72000" cy="81871"/>
+            </a:xfrm>
+            <a:prstGeom prst="mathMultiply">
+              <a:avLst/>
+            </a:prstGeom>
+            <a:solidFill>
+              <a:srgbClr val="00B0F0"/>
+            </a:solidFill>
+            <a:ln w="3175">
+              <a:solidFill>
+                <a:schemeClr val="tx1"/>
+              </a:solidFill>
+            </a:ln>
+          </p:spPr>
+          <p:style>
+            <a:lnRef idx="2">
+              <a:schemeClr val="accent1">
+                <a:shade val="50000"/>
+              </a:schemeClr>
+            </a:lnRef>
+            <a:fillRef idx="1">
+              <a:schemeClr val="accent1"/>
+            </a:fillRef>
+            <a:effectRef idx="0">
+              <a:schemeClr val="accent1"/>
+            </a:effectRef>
+            <a:fontRef idx="minor">
+              <a:schemeClr val="lt1"/>
+            </a:fontRef>
+          </p:style>
+          <p:txBody>
+            <a:bodyPr rtlCol="0" anchor="ctr"/>
+            <a:lstStyle/>
+            <a:p>
+              <a:pPr algn="ctr"/>
+              <a:endParaRPr lang="pt-BR"/>
+            </a:p>
+          </p:txBody>
+        </p:sp>
+        <p:sp>
+          <p:nvSpPr>
+            <p:cNvPr id="153" name="Multiply 152"/>
+            <p:cNvSpPr>
+              <a:spLocks noChangeAspect="1"/>
+            </p:cNvSpPr>
+            <p:nvPr/>
+          </p:nvSpPr>
+          <p:spPr>
+            <a:xfrm>
+              <a:off x="4553694" y="3612134"/>
+              <a:ext cx="72000" cy="81871"/>
+            </a:xfrm>
+            <a:prstGeom prst="mathMultiply">
+              <a:avLst/>
+            </a:prstGeom>
+            <a:solidFill>
+              <a:srgbClr val="00B0F0"/>
+            </a:solidFill>
+            <a:ln w="3175">
+              <a:solidFill>
+                <a:schemeClr val="tx1"/>
+              </a:solidFill>
+            </a:ln>
+          </p:spPr>
+          <p:style>
+            <a:lnRef idx="2">
+              <a:schemeClr val="accent1">
+                <a:shade val="50000"/>
+              </a:schemeClr>
+            </a:lnRef>
+            <a:fillRef idx="1">
+              <a:schemeClr val="accent1"/>
+            </a:fillRef>
+            <a:effectRef idx="0">
+              <a:schemeClr val="accent1"/>
+            </a:effectRef>
+            <a:fontRef idx="minor">
+              <a:schemeClr val="lt1"/>
+            </a:fontRef>
+          </p:style>
+          <p:txBody>
+            <a:bodyPr rtlCol="0" anchor="ctr"/>
+            <a:lstStyle/>
+            <a:p>
+              <a:pPr algn="ctr"/>
+              <a:endParaRPr lang="pt-BR"/>
+            </a:p>
+          </p:txBody>
+        </p:sp>
+        <p:cxnSp>
+          <p:nvCxnSpPr>
+            <p:cNvPr id="158" name="Straight Arrow Connector 157"/>
+            <p:cNvCxnSpPr/>
+            <p:nvPr/>
+          </p:nvCxnSpPr>
+          <p:spPr>
+            <a:xfrm>
+              <a:off x="3030134" y="1302987"/>
+              <a:ext cx="0" cy="4284000"/>
+            </a:xfrm>
+            <a:prstGeom prst="straightConnector1">
+              <a:avLst/>
+            </a:prstGeom>
+            <a:ln w="19050">
+              <a:solidFill>
+                <a:schemeClr val="tx1"/>
+              </a:solidFill>
+              <a:headEnd type="triangle" w="med" len="med"/>
+              <a:tailEnd type="none" w="med" len="med"/>
+            </a:ln>
+          </p:spPr>
+          <p:style>
+            <a:lnRef idx="1">
+              <a:schemeClr val="accent1"/>
+            </a:lnRef>
+            <a:fillRef idx="0">
+              <a:schemeClr val="accent1"/>
+            </a:fillRef>
+            <a:effectRef idx="0">
+              <a:schemeClr val="accent1"/>
+            </a:effectRef>
+            <a:fontRef idx="minor">
+              <a:schemeClr val="tx1"/>
+            </a:fontRef>
+          </p:style>
+        </p:cxnSp>
+        <p:cxnSp>
+          <p:nvCxnSpPr>
+            <p:cNvPr id="159" name="Straight Arrow Connector 158"/>
+            <p:cNvCxnSpPr/>
+            <p:nvPr/>
+          </p:nvCxnSpPr>
+          <p:spPr>
+            <a:xfrm rot="5400000">
+              <a:off x="4496439" y="4118552"/>
+              <a:ext cx="0" cy="2952000"/>
+            </a:xfrm>
+            <a:prstGeom prst="straightConnector1">
+              <a:avLst/>
+            </a:prstGeom>
+            <a:ln w="19050">
+              <a:solidFill>
+                <a:schemeClr val="tx1"/>
+              </a:solidFill>
+              <a:headEnd type="triangle" w="med" len="med"/>
+              <a:tailEnd type="none" w="med" len="med"/>
+            </a:ln>
+          </p:spPr>
+          <p:style>
+            <a:lnRef idx="1">
+              <a:schemeClr val="accent1"/>
+            </a:lnRef>
+            <a:fillRef idx="0">
+              <a:schemeClr val="accent1"/>
+            </a:fillRef>
+            <a:effectRef idx="0">
+              <a:schemeClr val="accent1"/>
+            </a:effectRef>
+            <a:fontRef idx="minor">
+              <a:schemeClr val="tx1"/>
+            </a:fontRef>
+          </p:style>
+        </p:cxnSp>
+        <mc:AlternateContent xmlns:mc="http://schemas.openxmlformats.org/markup-compatibility/2006" xmlns:a14="http://schemas.microsoft.com/office/drawing/2010/main">
+          <mc:Choice Requires="a14">
+            <p:sp>
+              <p:nvSpPr>
+                <p:cNvPr id="164" name="TextBox 163"/>
+                <p:cNvSpPr txBox="1"/>
+                <p:nvPr/>
+              </p:nvSpPr>
+              <p:spPr>
+                <a:xfrm>
+                  <a:off x="5930875" y="5387262"/>
+                  <a:ext cx="426028" cy="400110"/>
+                </a:xfrm>
+                <a:prstGeom prst="rect">
+                  <a:avLst/>
+                </a:prstGeom>
+                <a:noFill/>
+              </p:spPr>
+              <p:txBody>
+                <a:bodyPr wrap="square" rtlCol="0">
+                  <a:spAutoFit/>
+                </a:bodyPr>
+                <a:lstStyle/>
+                <a:p>
+                  <a:pPr/>
+                  <a14:m>
+                    <m:oMathPara xmlns:m="http://schemas.openxmlformats.org/officeDocument/2006/math">
+                      <m:oMathParaPr>
+                        <m:jc m:val="centerGroup"/>
+                      </m:oMathParaPr>
+                      <m:oMath xmlns:m="http://schemas.openxmlformats.org/officeDocument/2006/math">
+                        <m:sSub>
+                          <m:sSubPr>
+                            <m:ctrlPr>
+                              <a:rPr lang="pt-BR" sz="2000" i="1" smtClean="0">
+                                <a:latin typeface="Cambria Math" panose="02040503050406030204" pitchFamily="18" charset="0"/>
+                              </a:rPr>
+                            </m:ctrlPr>
+                          </m:sSubPr>
+                          <m:e>
+                            <m:r>
+                              <a:rPr lang="pt-BR" sz="2000" b="0" i="1" smtClean="0">
+                                <a:latin typeface="Cambria Math" panose="02040503050406030204" pitchFamily="18" charset="0"/>
+                              </a:rPr>
+                              <m:t>𝑎</m:t>
+                            </m:r>
+                          </m:e>
+                          <m:sub>
+                            <m:r>
+                              <a:rPr lang="pt-BR" sz="2000" b="0" i="1" smtClean="0">
+                                <a:latin typeface="Cambria Math" panose="02040503050406030204" pitchFamily="18" charset="0"/>
+                              </a:rPr>
+                              <m:t>1</m:t>
+                            </m:r>
+                          </m:sub>
+                        </m:sSub>
+                      </m:oMath>
+                    </m:oMathPara>
+                  </a14:m>
+                  <a:endParaRPr lang="pt-BR" sz="2000" dirty="0"/>
+                </a:p>
+              </p:txBody>
+            </p:sp>
+          </mc:Choice>
+          <mc:Fallback xmlns="">
+            <p:sp>
+              <p:nvSpPr>
+                <p:cNvPr id="164" name="TextBox 163"/>
+                <p:cNvSpPr txBox="1">
+                  <a:spLocks noRot="1" noChangeAspect="1" noMove="1" noResize="1" noEditPoints="1" noAdjustHandles="1" noChangeArrowheads="1" noChangeShapeType="1" noTextEdit="1"/>
+                </p:cNvSpPr>
+                <p:nvPr/>
+              </p:nvSpPr>
+              <p:spPr>
+                <a:xfrm>
+                  <a:off x="5930875" y="5387262"/>
+                  <a:ext cx="426028" cy="400110"/>
+                </a:xfrm>
+                <a:prstGeom prst="rect">
+                  <a:avLst/>
+                </a:prstGeom>
+                <a:blipFill>
+                  <a:blip r:embed="rId4"/>
+                  <a:stretch>
+                    <a:fillRect/>
+                  </a:stretch>
+                </a:blipFill>
+              </p:spPr>
+              <p:txBody>
+                <a:bodyPr/>
+                <a:lstStyle/>
+                <a:p>
+                  <a:r>
+                    <a:rPr lang="pt-BR">
+                      <a:noFill/>
+                    </a:rPr>
+                    <a:t> </a:t>
+                  </a:r>
+                </a:p>
+              </p:txBody>
+            </p:sp>
+          </mc:Fallback>
+        </mc:AlternateContent>
+        <mc:AlternateContent xmlns:mc="http://schemas.openxmlformats.org/markup-compatibility/2006" xmlns:a14="http://schemas.microsoft.com/office/drawing/2010/main">
+          <mc:Choice Requires="a14">
+            <p:sp>
+              <p:nvSpPr>
+                <p:cNvPr id="165" name="TextBox 164"/>
+                <p:cNvSpPr txBox="1"/>
+                <p:nvPr/>
+              </p:nvSpPr>
+              <p:spPr>
+                <a:xfrm>
+                  <a:off x="2817120" y="895312"/>
+                  <a:ext cx="426028" cy="400110"/>
+                </a:xfrm>
+                <a:prstGeom prst="rect">
+                  <a:avLst/>
+                </a:prstGeom>
+                <a:noFill/>
+              </p:spPr>
+              <p:txBody>
+                <a:bodyPr wrap="square" rtlCol="0">
+                  <a:spAutoFit/>
+                </a:bodyPr>
+                <a:lstStyle/>
+                <a:p>
+                  <a:pPr/>
+                  <a14:m>
+                    <m:oMathPara xmlns:m="http://schemas.openxmlformats.org/officeDocument/2006/math">
+                      <m:oMathParaPr>
+                        <m:jc m:val="centerGroup"/>
+                      </m:oMathParaPr>
+                      <m:oMath xmlns:m="http://schemas.openxmlformats.org/officeDocument/2006/math">
+                        <m:sSub>
+                          <m:sSubPr>
+                            <m:ctrlPr>
+                              <a:rPr lang="pt-BR" sz="2000" i="1" smtClean="0">
+                                <a:latin typeface="Cambria Math" panose="02040503050406030204" pitchFamily="18" charset="0"/>
+                              </a:rPr>
+                            </m:ctrlPr>
+                          </m:sSubPr>
+                          <m:e>
+                            <m:r>
+                              <a:rPr lang="pt-BR" sz="2000" b="0" i="1" smtClean="0">
+                                <a:latin typeface="Cambria Math" panose="02040503050406030204" pitchFamily="18" charset="0"/>
+                              </a:rPr>
+                              <m:t>𝑎</m:t>
+                            </m:r>
+                          </m:e>
+                          <m:sub>
+                            <m:r>
+                              <a:rPr lang="pt-BR" sz="2000" b="0" i="1" smtClean="0">
+                                <a:latin typeface="Cambria Math" panose="02040503050406030204" pitchFamily="18" charset="0"/>
+                              </a:rPr>
+                              <m:t>2</m:t>
+                            </m:r>
+                          </m:sub>
+                        </m:sSub>
+                      </m:oMath>
+                    </m:oMathPara>
+                  </a14:m>
+                  <a:endParaRPr lang="pt-BR" sz="2000" dirty="0"/>
+                </a:p>
+              </p:txBody>
+            </p:sp>
+          </mc:Choice>
+          <mc:Fallback xmlns="">
+            <p:sp>
+              <p:nvSpPr>
+                <p:cNvPr id="165" name="TextBox 164"/>
+                <p:cNvSpPr txBox="1">
+                  <a:spLocks noRot="1" noChangeAspect="1" noMove="1" noResize="1" noEditPoints="1" noAdjustHandles="1" noChangeArrowheads="1" noChangeShapeType="1" noTextEdit="1"/>
+                </p:cNvSpPr>
+                <p:nvPr/>
+              </p:nvSpPr>
+              <p:spPr>
+                <a:xfrm>
+                  <a:off x="2817120" y="895312"/>
+                  <a:ext cx="426028" cy="400110"/>
+                </a:xfrm>
+                <a:prstGeom prst="rect">
+                  <a:avLst/>
+                </a:prstGeom>
+                <a:blipFill>
+                  <a:blip r:embed="rId5"/>
+                  <a:stretch>
+                    <a:fillRect/>
+                  </a:stretch>
+                </a:blipFill>
+              </p:spPr>
+              <p:txBody>
+                <a:bodyPr/>
+                <a:lstStyle/>
+                <a:p>
+                  <a:r>
+                    <a:rPr lang="pt-BR">
+                      <a:noFill/>
+                    </a:rPr>
+                    <a:t> </a:t>
+                  </a:r>
+                </a:p>
+              </p:txBody>
+            </p:sp>
+          </mc:Fallback>
+        </mc:AlternateContent>
+      </p:grpSp>
+    </p:spTree>
+    <p:extLst>
+      <p:ext uri="{BB962C8B-B14F-4D97-AF65-F5344CB8AC3E}">
+        <p14:creationId xmlns:p14="http://schemas.microsoft.com/office/powerpoint/2010/main" val="3580847131"/>
+      </p:ext>
+    </p:extLst>
+  </p:cSld>
+  <p:clrMapOvr>
+    <a:masterClrMapping/>
+  </p:clrMapOvr>
+</p:sld>
+</file>
+
 <file path=ppt/slides/slide4.xml><?xml version="1.0" encoding="utf-8"?>
 <p:sld xmlns:a="http://schemas.openxmlformats.org/drawingml/2006/main" xmlns:r="http://schemas.openxmlformats.org/officeDocument/2006/relationships" xmlns:p="http://schemas.openxmlformats.org/presentationml/2006/main">
   <p:cSld>
@@ -30471,3432 +33600,6 @@
 </file>
 
 <file path=ppt/slides/slide40.xml><?xml version="1.0" encoding="utf-8"?>
-<p:sld xmlns:a="http://schemas.openxmlformats.org/drawingml/2006/main" xmlns:r="http://schemas.openxmlformats.org/officeDocument/2006/relationships" xmlns:p="http://schemas.openxmlformats.org/presentationml/2006/main">
-  <p:cSld>
-    <p:spTree>
-      <p:nvGrpSpPr>
-        <p:cNvPr id="1" name=""/>
-        <p:cNvGrpSpPr/>
-        <p:nvPr/>
-      </p:nvGrpSpPr>
-      <p:grpSpPr>
-        <a:xfrm>
-          <a:off x="0" y="0"/>
-          <a:ext cx="0" cy="0"/>
-          <a:chOff x="0" y="0"/>
-          <a:chExt cx="0" cy="0"/>
-        </a:xfrm>
-      </p:grpSpPr>
-      <p:grpSp>
-        <p:nvGrpSpPr>
-          <p:cNvPr id="167" name="Group 166"/>
-          <p:cNvGrpSpPr/>
-          <p:nvPr/>
-        </p:nvGrpSpPr>
-        <p:grpSpPr>
-          <a:xfrm>
-            <a:off x="6818898" y="2134388"/>
-            <a:ext cx="3549478" cy="3157828"/>
-            <a:chOff x="6818898" y="2134388"/>
-            <a:chExt cx="3549478" cy="3157828"/>
-          </a:xfrm>
-        </p:grpSpPr>
-        <p:sp>
-          <p:nvSpPr>
-            <p:cNvPr id="108" name="Oval 107"/>
-            <p:cNvSpPr/>
-            <p:nvPr/>
-          </p:nvSpPr>
-          <p:spPr>
-            <a:xfrm>
-              <a:off x="7353299" y="2749031"/>
-              <a:ext cx="2160000" cy="2160000"/>
-            </a:xfrm>
-            <a:prstGeom prst="ellipse">
-              <a:avLst/>
-            </a:prstGeom>
-            <a:noFill/>
-            <a:ln>
-              <a:solidFill>
-                <a:schemeClr val="tx1"/>
-              </a:solidFill>
-            </a:ln>
-          </p:spPr>
-          <p:style>
-            <a:lnRef idx="2">
-              <a:schemeClr val="accent1">
-                <a:shade val="50000"/>
-              </a:schemeClr>
-            </a:lnRef>
-            <a:fillRef idx="1">
-              <a:schemeClr val="accent1"/>
-            </a:fillRef>
-            <a:effectRef idx="0">
-              <a:schemeClr val="accent1"/>
-            </a:effectRef>
-            <a:fontRef idx="minor">
-              <a:schemeClr val="lt1"/>
-            </a:fontRef>
-          </p:style>
-          <p:txBody>
-            <a:bodyPr rtlCol="0" anchor="ctr"/>
-            <a:lstStyle/>
-            <a:p>
-              <a:pPr algn="ctr"/>
-              <a:endParaRPr lang="pt-BR"/>
-            </a:p>
-          </p:txBody>
-        </p:sp>
-        <p:sp>
-          <p:nvSpPr>
-            <p:cNvPr id="109" name="Oval 108"/>
-            <p:cNvSpPr/>
-            <p:nvPr/>
-          </p:nvSpPr>
-          <p:spPr>
-            <a:xfrm>
-              <a:off x="7533299" y="2929031"/>
-              <a:ext cx="1800000" cy="1800000"/>
-            </a:xfrm>
-            <a:prstGeom prst="ellipse">
-              <a:avLst/>
-            </a:prstGeom>
-            <a:noFill/>
-            <a:ln>
-              <a:solidFill>
-                <a:schemeClr val="tx1"/>
-              </a:solidFill>
-            </a:ln>
-          </p:spPr>
-          <p:style>
-            <a:lnRef idx="2">
-              <a:schemeClr val="accent1">
-                <a:shade val="50000"/>
-              </a:schemeClr>
-            </a:lnRef>
-            <a:fillRef idx="1">
-              <a:schemeClr val="accent1"/>
-            </a:fillRef>
-            <a:effectRef idx="0">
-              <a:schemeClr val="accent1"/>
-            </a:effectRef>
-            <a:fontRef idx="minor">
-              <a:schemeClr val="lt1"/>
-            </a:fontRef>
-          </p:style>
-          <p:txBody>
-            <a:bodyPr rtlCol="0" anchor="ctr"/>
-            <a:lstStyle/>
-            <a:p>
-              <a:pPr algn="ctr"/>
-              <a:endParaRPr lang="pt-BR"/>
-            </a:p>
-          </p:txBody>
-        </p:sp>
-        <p:sp>
-          <p:nvSpPr>
-            <p:cNvPr id="110" name="Oval 109"/>
-            <p:cNvSpPr/>
-            <p:nvPr/>
-          </p:nvSpPr>
-          <p:spPr>
-            <a:xfrm>
-              <a:off x="7713299" y="3109031"/>
-              <a:ext cx="1440000" cy="1440000"/>
-            </a:xfrm>
-            <a:prstGeom prst="ellipse">
-              <a:avLst/>
-            </a:prstGeom>
-            <a:noFill/>
-            <a:ln>
-              <a:solidFill>
-                <a:schemeClr val="tx1"/>
-              </a:solidFill>
-            </a:ln>
-          </p:spPr>
-          <p:style>
-            <a:lnRef idx="2">
-              <a:schemeClr val="accent1">
-                <a:shade val="50000"/>
-              </a:schemeClr>
-            </a:lnRef>
-            <a:fillRef idx="1">
-              <a:schemeClr val="accent1"/>
-            </a:fillRef>
-            <a:effectRef idx="0">
-              <a:schemeClr val="accent1"/>
-            </a:effectRef>
-            <a:fontRef idx="minor">
-              <a:schemeClr val="lt1"/>
-            </a:fontRef>
-          </p:style>
-          <p:txBody>
-            <a:bodyPr rtlCol="0" anchor="ctr"/>
-            <a:lstStyle/>
-            <a:p>
-              <a:pPr algn="ctr"/>
-              <a:endParaRPr lang="pt-BR"/>
-            </a:p>
-          </p:txBody>
-        </p:sp>
-        <p:sp>
-          <p:nvSpPr>
-            <p:cNvPr id="111" name="Oval 110"/>
-            <p:cNvSpPr/>
-            <p:nvPr/>
-          </p:nvSpPr>
-          <p:spPr>
-            <a:xfrm>
-              <a:off x="7893299" y="3289031"/>
-              <a:ext cx="1080000" cy="1080000"/>
-            </a:xfrm>
-            <a:prstGeom prst="ellipse">
-              <a:avLst/>
-            </a:prstGeom>
-            <a:noFill/>
-            <a:ln>
-              <a:solidFill>
-                <a:schemeClr val="tx1"/>
-              </a:solidFill>
-            </a:ln>
-          </p:spPr>
-          <p:style>
-            <a:lnRef idx="2">
-              <a:schemeClr val="accent1">
-                <a:shade val="50000"/>
-              </a:schemeClr>
-            </a:lnRef>
-            <a:fillRef idx="1">
-              <a:schemeClr val="accent1"/>
-            </a:fillRef>
-            <a:effectRef idx="0">
-              <a:schemeClr val="accent1"/>
-            </a:effectRef>
-            <a:fontRef idx="minor">
-              <a:schemeClr val="lt1"/>
-            </a:fontRef>
-          </p:style>
-          <p:txBody>
-            <a:bodyPr rtlCol="0" anchor="ctr"/>
-            <a:lstStyle/>
-            <a:p>
-              <a:pPr algn="ctr"/>
-              <a:endParaRPr lang="pt-BR"/>
-            </a:p>
-          </p:txBody>
-        </p:sp>
-        <p:sp>
-          <p:nvSpPr>
-            <p:cNvPr id="112" name="Oval 111"/>
-            <p:cNvSpPr/>
-            <p:nvPr/>
-          </p:nvSpPr>
-          <p:spPr>
-            <a:xfrm>
-              <a:off x="8073299" y="3469031"/>
-              <a:ext cx="720000" cy="720000"/>
-            </a:xfrm>
-            <a:prstGeom prst="ellipse">
-              <a:avLst/>
-            </a:prstGeom>
-            <a:noFill/>
-            <a:ln>
-              <a:solidFill>
-                <a:schemeClr val="tx1"/>
-              </a:solidFill>
-            </a:ln>
-          </p:spPr>
-          <p:style>
-            <a:lnRef idx="2">
-              <a:schemeClr val="accent1">
-                <a:shade val="50000"/>
-              </a:schemeClr>
-            </a:lnRef>
-            <a:fillRef idx="1">
-              <a:schemeClr val="accent1"/>
-            </a:fillRef>
-            <a:effectRef idx="0">
-              <a:schemeClr val="accent1"/>
-            </a:effectRef>
-            <a:fontRef idx="minor">
-              <a:schemeClr val="lt1"/>
-            </a:fontRef>
-          </p:style>
-          <p:txBody>
-            <a:bodyPr rtlCol="0" anchor="ctr"/>
-            <a:lstStyle/>
-            <a:p>
-              <a:pPr algn="ctr"/>
-              <a:endParaRPr lang="pt-BR"/>
-            </a:p>
-          </p:txBody>
-        </p:sp>
-        <p:sp>
-          <p:nvSpPr>
-            <p:cNvPr id="113" name="Oval 112"/>
-            <p:cNvSpPr/>
-            <p:nvPr/>
-          </p:nvSpPr>
-          <p:spPr>
-            <a:xfrm>
-              <a:off x="8253299" y="3649031"/>
-              <a:ext cx="360000" cy="360000"/>
-            </a:xfrm>
-            <a:prstGeom prst="ellipse">
-              <a:avLst/>
-            </a:prstGeom>
-            <a:noFill/>
-            <a:ln>
-              <a:solidFill>
-                <a:schemeClr val="tx1"/>
-              </a:solidFill>
-            </a:ln>
-          </p:spPr>
-          <p:style>
-            <a:lnRef idx="2">
-              <a:schemeClr val="accent1">
-                <a:shade val="50000"/>
-              </a:schemeClr>
-            </a:lnRef>
-            <a:fillRef idx="1">
-              <a:schemeClr val="accent1"/>
-            </a:fillRef>
-            <a:effectRef idx="0">
-              <a:schemeClr val="accent1"/>
-            </a:effectRef>
-            <a:fontRef idx="minor">
-              <a:schemeClr val="lt1"/>
-            </a:fontRef>
-          </p:style>
-          <p:txBody>
-            <a:bodyPr rtlCol="0" anchor="ctr"/>
-            <a:lstStyle/>
-            <a:p>
-              <a:pPr algn="ctr"/>
-              <a:endParaRPr lang="pt-BR"/>
-            </a:p>
-          </p:txBody>
-        </p:sp>
-        <p:sp>
-          <p:nvSpPr>
-            <p:cNvPr id="114" name="Multiply 113"/>
-            <p:cNvSpPr>
-              <a:spLocks noChangeAspect="1"/>
-            </p:cNvSpPr>
-            <p:nvPr/>
-          </p:nvSpPr>
-          <p:spPr>
-            <a:xfrm>
-              <a:off x="8349614" y="3734666"/>
-              <a:ext cx="158298" cy="180000"/>
-            </a:xfrm>
-            <a:prstGeom prst="mathMultiply">
-              <a:avLst/>
-            </a:prstGeom>
-            <a:solidFill>
-              <a:srgbClr val="FF0000"/>
-            </a:solidFill>
-            <a:ln w="3175">
-              <a:solidFill>
-                <a:schemeClr val="tx1"/>
-              </a:solidFill>
-            </a:ln>
-          </p:spPr>
-          <p:style>
-            <a:lnRef idx="2">
-              <a:schemeClr val="accent1">
-                <a:shade val="50000"/>
-              </a:schemeClr>
-            </a:lnRef>
-            <a:fillRef idx="1">
-              <a:schemeClr val="accent1"/>
-            </a:fillRef>
-            <a:effectRef idx="0">
-              <a:schemeClr val="accent1"/>
-            </a:effectRef>
-            <a:fontRef idx="minor">
-              <a:schemeClr val="lt1"/>
-            </a:fontRef>
-          </p:style>
-          <p:txBody>
-            <a:bodyPr rtlCol="0" anchor="ctr"/>
-            <a:lstStyle/>
-            <a:p>
-              <a:pPr algn="ctr"/>
-              <a:endParaRPr lang="pt-BR"/>
-            </a:p>
-          </p:txBody>
-        </p:sp>
-        <p:cxnSp>
-          <p:nvCxnSpPr>
-            <p:cNvPr id="119" name="Straight Connector 118"/>
-            <p:cNvCxnSpPr/>
-            <p:nvPr/>
-          </p:nvCxnSpPr>
-          <p:spPr>
-            <a:xfrm flipH="1">
-              <a:off x="7936368" y="4340403"/>
-              <a:ext cx="136931" cy="180000"/>
-            </a:xfrm>
-            <a:prstGeom prst="line">
-              <a:avLst/>
-            </a:prstGeom>
-            <a:ln w="12700">
-              <a:solidFill>
-                <a:schemeClr val="tx1"/>
-              </a:solidFill>
-              <a:prstDash val="dash"/>
-            </a:ln>
-          </p:spPr>
-          <p:style>
-            <a:lnRef idx="1">
-              <a:schemeClr val="accent1"/>
-            </a:lnRef>
-            <a:fillRef idx="0">
-              <a:schemeClr val="accent1"/>
-            </a:fillRef>
-            <a:effectRef idx="0">
-              <a:schemeClr val="accent1"/>
-            </a:effectRef>
-            <a:fontRef idx="minor">
-              <a:schemeClr val="tx1"/>
-            </a:fontRef>
-          </p:style>
-        </p:cxnSp>
-        <p:cxnSp>
-          <p:nvCxnSpPr>
-            <p:cNvPr id="121" name="Straight Connector 120"/>
-            <p:cNvCxnSpPr/>
-            <p:nvPr/>
-          </p:nvCxnSpPr>
-          <p:spPr>
-            <a:xfrm flipH="1">
-              <a:off x="8074119" y="4165165"/>
-              <a:ext cx="153100" cy="175266"/>
-            </a:xfrm>
-            <a:prstGeom prst="line">
-              <a:avLst/>
-            </a:prstGeom>
-            <a:ln w="12700">
-              <a:solidFill>
-                <a:schemeClr val="tx1"/>
-              </a:solidFill>
-              <a:prstDash val="dash"/>
-            </a:ln>
-          </p:spPr>
-          <p:style>
-            <a:lnRef idx="1">
-              <a:schemeClr val="accent1"/>
-            </a:lnRef>
-            <a:fillRef idx="0">
-              <a:schemeClr val="accent1"/>
-            </a:fillRef>
-            <a:effectRef idx="0">
-              <a:schemeClr val="accent1"/>
-            </a:effectRef>
-            <a:fontRef idx="minor">
-              <a:schemeClr val="tx1"/>
-            </a:fontRef>
-          </p:style>
-        </p:cxnSp>
-        <p:cxnSp>
-          <p:nvCxnSpPr>
-            <p:cNvPr id="123" name="Straight Connector 122"/>
-            <p:cNvCxnSpPr/>
-            <p:nvPr/>
-          </p:nvCxnSpPr>
-          <p:spPr>
-            <a:xfrm flipH="1">
-              <a:off x="8216880" y="4030041"/>
-              <a:ext cx="86539" cy="150678"/>
-            </a:xfrm>
-            <a:prstGeom prst="line">
-              <a:avLst/>
-            </a:prstGeom>
-            <a:ln w="12700">
-              <a:solidFill>
-                <a:schemeClr val="tx1"/>
-              </a:solidFill>
-              <a:prstDash val="dash"/>
-            </a:ln>
-          </p:spPr>
-          <p:style>
-            <a:lnRef idx="1">
-              <a:schemeClr val="accent1"/>
-            </a:lnRef>
-            <a:fillRef idx="0">
-              <a:schemeClr val="accent1"/>
-            </a:fillRef>
-            <a:effectRef idx="0">
-              <a:schemeClr val="accent1"/>
-            </a:effectRef>
-            <a:fontRef idx="minor">
-              <a:schemeClr val="tx1"/>
-            </a:fontRef>
-          </p:style>
-        </p:cxnSp>
-        <p:cxnSp>
-          <p:nvCxnSpPr>
-            <p:cNvPr id="126" name="Straight Connector 125"/>
-            <p:cNvCxnSpPr/>
-            <p:nvPr/>
-          </p:nvCxnSpPr>
-          <p:spPr>
-            <a:xfrm flipH="1">
-              <a:off x="8304826" y="3915692"/>
-              <a:ext cx="65154" cy="112507"/>
-            </a:xfrm>
-            <a:prstGeom prst="line">
-              <a:avLst/>
-            </a:prstGeom>
-            <a:ln w="12700">
-              <a:solidFill>
-                <a:schemeClr val="tx1"/>
-              </a:solidFill>
-              <a:prstDash val="dash"/>
-            </a:ln>
-          </p:spPr>
-          <p:style>
-            <a:lnRef idx="1">
-              <a:schemeClr val="accent1"/>
-            </a:lnRef>
-            <a:fillRef idx="0">
-              <a:schemeClr val="accent1"/>
-            </a:fillRef>
-            <a:effectRef idx="0">
-              <a:schemeClr val="accent1"/>
-            </a:effectRef>
-            <a:fontRef idx="minor">
-              <a:schemeClr val="tx1"/>
-            </a:fontRef>
-          </p:style>
-        </p:cxnSp>
-        <p:cxnSp>
-          <p:nvCxnSpPr>
-            <p:cNvPr id="128" name="Straight Connector 127"/>
-            <p:cNvCxnSpPr/>
-            <p:nvPr/>
-          </p:nvCxnSpPr>
-          <p:spPr>
-            <a:xfrm flipH="1">
-              <a:off x="8368145" y="3829031"/>
-              <a:ext cx="65154" cy="92178"/>
-            </a:xfrm>
-            <a:prstGeom prst="line">
-              <a:avLst/>
-            </a:prstGeom>
-            <a:ln w="12700">
-              <a:solidFill>
-                <a:schemeClr val="tx1"/>
-              </a:solidFill>
-              <a:prstDash val="dash"/>
-            </a:ln>
-          </p:spPr>
-          <p:style>
-            <a:lnRef idx="1">
-              <a:schemeClr val="accent1"/>
-            </a:lnRef>
-            <a:fillRef idx="0">
-              <a:schemeClr val="accent1"/>
-            </a:fillRef>
-            <a:effectRef idx="0">
-              <a:schemeClr val="accent1"/>
-            </a:effectRef>
-            <a:fontRef idx="minor">
-              <a:schemeClr val="tx1"/>
-            </a:fontRef>
-          </p:style>
-        </p:cxnSp>
-        <p:sp>
-          <p:nvSpPr>
-            <p:cNvPr id="131" name="Multiply 130"/>
-            <p:cNvSpPr>
-              <a:spLocks noChangeAspect="1"/>
-            </p:cNvSpPr>
-            <p:nvPr/>
-          </p:nvSpPr>
-          <p:spPr>
-            <a:xfrm>
-              <a:off x="7733351" y="4634932"/>
-              <a:ext cx="72817" cy="82800"/>
-            </a:xfrm>
-            <a:prstGeom prst="mathMultiply">
-              <a:avLst/>
-            </a:prstGeom>
-            <a:solidFill>
-              <a:srgbClr val="00B0F0"/>
-            </a:solidFill>
-            <a:ln w="3175">
-              <a:solidFill>
-                <a:schemeClr val="tx1"/>
-              </a:solidFill>
-            </a:ln>
-          </p:spPr>
-          <p:style>
-            <a:lnRef idx="2">
-              <a:schemeClr val="accent1">
-                <a:shade val="50000"/>
-              </a:schemeClr>
-            </a:lnRef>
-            <a:fillRef idx="1">
-              <a:schemeClr val="accent1"/>
-            </a:fillRef>
-            <a:effectRef idx="0">
-              <a:schemeClr val="accent1"/>
-            </a:effectRef>
-            <a:fontRef idx="minor">
-              <a:schemeClr val="lt1"/>
-            </a:fontRef>
-          </p:style>
-          <p:txBody>
-            <a:bodyPr rtlCol="0" anchor="ctr"/>
-            <a:lstStyle/>
-            <a:p>
-              <a:pPr algn="ctr"/>
-              <a:endParaRPr lang="pt-BR"/>
-            </a:p>
-          </p:txBody>
-        </p:sp>
-        <p:cxnSp>
-          <p:nvCxnSpPr>
-            <p:cNvPr id="115" name="Straight Connector 114"/>
-            <p:cNvCxnSpPr/>
-            <p:nvPr/>
-          </p:nvCxnSpPr>
-          <p:spPr>
-            <a:xfrm flipH="1">
-              <a:off x="7750018" y="4513680"/>
-              <a:ext cx="193832" cy="182857"/>
-            </a:xfrm>
-            <a:prstGeom prst="line">
-              <a:avLst/>
-            </a:prstGeom>
-            <a:ln w="12700">
-              <a:solidFill>
-                <a:schemeClr val="tx1"/>
-              </a:solidFill>
-              <a:prstDash val="dash"/>
-            </a:ln>
-          </p:spPr>
-          <p:style>
-            <a:lnRef idx="1">
-              <a:schemeClr val="accent1"/>
-            </a:lnRef>
-            <a:fillRef idx="0">
-              <a:schemeClr val="accent1"/>
-            </a:fillRef>
-            <a:effectRef idx="0">
-              <a:schemeClr val="accent1"/>
-            </a:effectRef>
-            <a:fontRef idx="minor">
-              <a:schemeClr val="tx1"/>
-            </a:fontRef>
-          </p:style>
-        </p:cxnSp>
-        <p:sp>
-          <p:nvSpPr>
-            <p:cNvPr id="132" name="Multiply 131"/>
-            <p:cNvSpPr>
-              <a:spLocks noChangeAspect="1"/>
-            </p:cNvSpPr>
-            <p:nvPr/>
-          </p:nvSpPr>
-          <p:spPr>
-            <a:xfrm>
-              <a:off x="7907441" y="4469956"/>
-              <a:ext cx="72817" cy="82800"/>
-            </a:xfrm>
-            <a:prstGeom prst="mathMultiply">
-              <a:avLst/>
-            </a:prstGeom>
-            <a:solidFill>
-              <a:srgbClr val="00B0F0"/>
-            </a:solidFill>
-            <a:ln w="3175">
-              <a:solidFill>
-                <a:schemeClr val="tx1"/>
-              </a:solidFill>
-            </a:ln>
-          </p:spPr>
-          <p:style>
-            <a:lnRef idx="2">
-              <a:schemeClr val="accent1">
-                <a:shade val="50000"/>
-              </a:schemeClr>
-            </a:lnRef>
-            <a:fillRef idx="1">
-              <a:schemeClr val="accent1"/>
-            </a:fillRef>
-            <a:effectRef idx="0">
-              <a:schemeClr val="accent1"/>
-            </a:effectRef>
-            <a:fontRef idx="minor">
-              <a:schemeClr val="lt1"/>
-            </a:fontRef>
-          </p:style>
-          <p:txBody>
-            <a:bodyPr rtlCol="0" anchor="ctr"/>
-            <a:lstStyle/>
-            <a:p>
-              <a:pPr algn="ctr"/>
-              <a:endParaRPr lang="pt-BR"/>
-            </a:p>
-          </p:txBody>
-        </p:sp>
-        <p:sp>
-          <p:nvSpPr>
-            <p:cNvPr id="133" name="Multiply 132"/>
-            <p:cNvSpPr>
-              <a:spLocks noChangeAspect="1"/>
-            </p:cNvSpPr>
-            <p:nvPr/>
-          </p:nvSpPr>
-          <p:spPr>
-            <a:xfrm>
-              <a:off x="7991128" y="4358555"/>
-              <a:ext cx="72817" cy="82800"/>
-            </a:xfrm>
-            <a:prstGeom prst="mathMultiply">
-              <a:avLst/>
-            </a:prstGeom>
-            <a:solidFill>
-              <a:srgbClr val="00B0F0"/>
-            </a:solidFill>
-            <a:ln w="3175">
-              <a:solidFill>
-                <a:schemeClr val="tx1"/>
-              </a:solidFill>
-            </a:ln>
-          </p:spPr>
-          <p:style>
-            <a:lnRef idx="2">
-              <a:schemeClr val="accent1">
-                <a:shade val="50000"/>
-              </a:schemeClr>
-            </a:lnRef>
-            <a:fillRef idx="1">
-              <a:schemeClr val="accent1"/>
-            </a:fillRef>
-            <a:effectRef idx="0">
-              <a:schemeClr val="accent1"/>
-            </a:effectRef>
-            <a:fontRef idx="minor">
-              <a:schemeClr val="lt1"/>
-            </a:fontRef>
-          </p:style>
-          <p:txBody>
-            <a:bodyPr rtlCol="0" anchor="ctr"/>
-            <a:lstStyle/>
-            <a:p>
-              <a:pPr algn="ctr"/>
-              <a:endParaRPr lang="pt-BR"/>
-            </a:p>
-          </p:txBody>
-        </p:sp>
-        <p:sp>
-          <p:nvSpPr>
-            <p:cNvPr id="134" name="Multiply 133"/>
-            <p:cNvSpPr>
-              <a:spLocks noChangeAspect="1"/>
-            </p:cNvSpPr>
-            <p:nvPr/>
-          </p:nvSpPr>
-          <p:spPr>
-            <a:xfrm>
-              <a:off x="8073299" y="4257603"/>
-              <a:ext cx="72817" cy="82800"/>
-            </a:xfrm>
-            <a:prstGeom prst="mathMultiply">
-              <a:avLst/>
-            </a:prstGeom>
-            <a:solidFill>
-              <a:srgbClr val="00B0F0"/>
-            </a:solidFill>
-            <a:ln w="3175">
-              <a:solidFill>
-                <a:schemeClr val="tx1"/>
-              </a:solidFill>
-            </a:ln>
-          </p:spPr>
-          <p:style>
-            <a:lnRef idx="2">
-              <a:schemeClr val="accent1">
-                <a:shade val="50000"/>
-              </a:schemeClr>
-            </a:lnRef>
-            <a:fillRef idx="1">
-              <a:schemeClr val="accent1"/>
-            </a:fillRef>
-            <a:effectRef idx="0">
-              <a:schemeClr val="accent1"/>
-            </a:effectRef>
-            <a:fontRef idx="minor">
-              <a:schemeClr val="lt1"/>
-            </a:fontRef>
-          </p:style>
-          <p:txBody>
-            <a:bodyPr rtlCol="0" anchor="ctr"/>
-            <a:lstStyle/>
-            <a:p>
-              <a:pPr algn="ctr"/>
-              <a:endParaRPr lang="pt-BR"/>
-            </a:p>
-          </p:txBody>
-        </p:sp>
-        <p:sp>
-          <p:nvSpPr>
-            <p:cNvPr id="135" name="Multiply 134"/>
-            <p:cNvSpPr>
-              <a:spLocks noChangeAspect="1"/>
-            </p:cNvSpPr>
-            <p:nvPr/>
-          </p:nvSpPr>
-          <p:spPr>
-            <a:xfrm>
-              <a:off x="8300077" y="3920332"/>
-              <a:ext cx="72817" cy="82800"/>
-            </a:xfrm>
-            <a:prstGeom prst="mathMultiply">
-              <a:avLst/>
-            </a:prstGeom>
-            <a:solidFill>
-              <a:srgbClr val="00B0F0"/>
-            </a:solidFill>
-            <a:ln w="3175">
-              <a:solidFill>
-                <a:schemeClr val="tx1"/>
-              </a:solidFill>
-            </a:ln>
-          </p:spPr>
-          <p:style>
-            <a:lnRef idx="2">
-              <a:schemeClr val="accent1">
-                <a:shade val="50000"/>
-              </a:schemeClr>
-            </a:lnRef>
-            <a:fillRef idx="1">
-              <a:schemeClr val="accent1"/>
-            </a:fillRef>
-            <a:effectRef idx="0">
-              <a:schemeClr val="accent1"/>
-            </a:effectRef>
-            <a:fontRef idx="minor">
-              <a:schemeClr val="lt1"/>
-            </a:fontRef>
-          </p:style>
-          <p:txBody>
-            <a:bodyPr rtlCol="0" anchor="ctr"/>
-            <a:lstStyle/>
-            <a:p>
-              <a:pPr algn="ctr"/>
-              <a:endParaRPr lang="pt-BR"/>
-            </a:p>
-          </p:txBody>
-        </p:sp>
-        <p:sp>
-          <p:nvSpPr>
-            <p:cNvPr id="154" name="Multiply 153"/>
-            <p:cNvSpPr>
-              <a:spLocks noChangeAspect="1"/>
-            </p:cNvSpPr>
-            <p:nvPr/>
-          </p:nvSpPr>
-          <p:spPr>
-            <a:xfrm>
-              <a:off x="8175312" y="4136565"/>
-              <a:ext cx="72817" cy="82800"/>
-            </a:xfrm>
-            <a:prstGeom prst="mathMultiply">
-              <a:avLst/>
-            </a:prstGeom>
-            <a:solidFill>
-              <a:srgbClr val="00B0F0"/>
-            </a:solidFill>
-            <a:ln w="3175">
-              <a:solidFill>
-                <a:schemeClr val="tx1"/>
-              </a:solidFill>
-            </a:ln>
-          </p:spPr>
-          <p:style>
-            <a:lnRef idx="2">
-              <a:schemeClr val="accent1">
-                <a:shade val="50000"/>
-              </a:schemeClr>
-            </a:lnRef>
-            <a:fillRef idx="1">
-              <a:schemeClr val="accent1"/>
-            </a:fillRef>
-            <a:effectRef idx="0">
-              <a:schemeClr val="accent1"/>
-            </a:effectRef>
-            <a:fontRef idx="minor">
-              <a:schemeClr val="lt1"/>
-            </a:fontRef>
-          </p:style>
-          <p:txBody>
-            <a:bodyPr rtlCol="0" anchor="ctr"/>
-            <a:lstStyle/>
-            <a:p>
-              <a:pPr algn="ctr"/>
-              <a:endParaRPr lang="pt-BR"/>
-            </a:p>
-          </p:txBody>
-        </p:sp>
-        <p:sp>
-          <p:nvSpPr>
-            <p:cNvPr id="155" name="Multiply 154"/>
-            <p:cNvSpPr>
-              <a:spLocks noChangeAspect="1"/>
-            </p:cNvSpPr>
-            <p:nvPr/>
-          </p:nvSpPr>
-          <p:spPr>
-            <a:xfrm>
-              <a:off x="8241507" y="4011444"/>
-              <a:ext cx="72817" cy="82800"/>
-            </a:xfrm>
-            <a:prstGeom prst="mathMultiply">
-              <a:avLst/>
-            </a:prstGeom>
-            <a:solidFill>
-              <a:srgbClr val="00B0F0"/>
-            </a:solidFill>
-            <a:ln w="3175">
-              <a:solidFill>
-                <a:schemeClr val="tx1"/>
-              </a:solidFill>
-            </a:ln>
-          </p:spPr>
-          <p:style>
-            <a:lnRef idx="2">
-              <a:schemeClr val="accent1">
-                <a:shade val="50000"/>
-              </a:schemeClr>
-            </a:lnRef>
-            <a:fillRef idx="1">
-              <a:schemeClr val="accent1"/>
-            </a:fillRef>
-            <a:effectRef idx="0">
-              <a:schemeClr val="accent1"/>
-            </a:effectRef>
-            <a:fontRef idx="minor">
-              <a:schemeClr val="lt1"/>
-            </a:fontRef>
-          </p:style>
-          <p:txBody>
-            <a:bodyPr rtlCol="0" anchor="ctr"/>
-            <a:lstStyle/>
-            <a:p>
-              <a:pPr algn="ctr"/>
-              <a:endParaRPr lang="pt-BR"/>
-            </a:p>
-          </p:txBody>
-        </p:sp>
-        <p:cxnSp>
-          <p:nvCxnSpPr>
-            <p:cNvPr id="160" name="Straight Arrow Connector 159"/>
-            <p:cNvCxnSpPr/>
-            <p:nvPr/>
-          </p:nvCxnSpPr>
-          <p:spPr>
-            <a:xfrm>
-              <a:off x="7038874" y="2534498"/>
-              <a:ext cx="0" cy="2556000"/>
-            </a:xfrm>
-            <a:prstGeom prst="straightConnector1">
-              <a:avLst/>
-            </a:prstGeom>
-            <a:ln w="19050">
-              <a:solidFill>
-                <a:schemeClr val="tx1"/>
-              </a:solidFill>
-              <a:headEnd type="triangle" w="med" len="med"/>
-              <a:tailEnd type="none" w="med" len="med"/>
-            </a:ln>
-          </p:spPr>
-          <p:style>
-            <a:lnRef idx="1">
-              <a:schemeClr val="accent1"/>
-            </a:lnRef>
-            <a:fillRef idx="0">
-              <a:schemeClr val="accent1"/>
-            </a:fillRef>
-            <a:effectRef idx="0">
-              <a:schemeClr val="accent1"/>
-            </a:effectRef>
-            <a:fontRef idx="minor">
-              <a:schemeClr val="tx1"/>
-            </a:fontRef>
-          </p:style>
-        </p:cxnSp>
-        <p:cxnSp>
-          <p:nvCxnSpPr>
-            <p:cNvPr id="161" name="Straight Arrow Connector 160"/>
-            <p:cNvCxnSpPr/>
-            <p:nvPr/>
-          </p:nvCxnSpPr>
-          <p:spPr>
-            <a:xfrm rot="5400000">
-              <a:off x="8507912" y="3626810"/>
-              <a:ext cx="0" cy="2952000"/>
-            </a:xfrm>
-            <a:prstGeom prst="straightConnector1">
-              <a:avLst/>
-            </a:prstGeom>
-            <a:ln w="19050">
-              <a:solidFill>
-                <a:schemeClr val="tx1"/>
-              </a:solidFill>
-              <a:headEnd type="triangle" w="med" len="med"/>
-              <a:tailEnd type="none" w="med" len="med"/>
-            </a:ln>
-          </p:spPr>
-          <p:style>
-            <a:lnRef idx="1">
-              <a:schemeClr val="accent1"/>
-            </a:lnRef>
-            <a:fillRef idx="0">
-              <a:schemeClr val="accent1"/>
-            </a:fillRef>
-            <a:effectRef idx="0">
-              <a:schemeClr val="accent1"/>
-            </a:effectRef>
-            <a:fontRef idx="minor">
-              <a:schemeClr val="tx1"/>
-            </a:fontRef>
-          </p:style>
-        </p:cxnSp>
-        <mc:AlternateContent xmlns:mc="http://schemas.openxmlformats.org/markup-compatibility/2006" xmlns:a14="http://schemas.microsoft.com/office/drawing/2010/main">
-          <mc:Choice Requires="a14">
-            <p:sp>
-              <p:nvSpPr>
-                <p:cNvPr id="162" name="TextBox 161"/>
-                <p:cNvSpPr txBox="1"/>
-                <p:nvPr/>
-              </p:nvSpPr>
-              <p:spPr>
-                <a:xfrm>
-                  <a:off x="9942348" y="4892106"/>
-                  <a:ext cx="426028" cy="400110"/>
-                </a:xfrm>
-                <a:prstGeom prst="rect">
-                  <a:avLst/>
-                </a:prstGeom>
-                <a:noFill/>
-              </p:spPr>
-              <p:txBody>
-                <a:bodyPr wrap="square" rtlCol="0">
-                  <a:spAutoFit/>
-                </a:bodyPr>
-                <a:lstStyle/>
-                <a:p>
-                  <a:pPr/>
-                  <a14:m>
-                    <m:oMathPara xmlns:m="http://schemas.openxmlformats.org/officeDocument/2006/math">
-                      <m:oMathParaPr>
-                        <m:jc m:val="centerGroup"/>
-                      </m:oMathParaPr>
-                      <m:oMath xmlns:m="http://schemas.openxmlformats.org/officeDocument/2006/math">
-                        <m:sSub>
-                          <m:sSubPr>
-                            <m:ctrlPr>
-                              <a:rPr lang="pt-BR" sz="2000" i="1" smtClean="0">
-                                <a:latin typeface="Cambria Math" panose="02040503050406030204" pitchFamily="18" charset="0"/>
-                              </a:rPr>
-                            </m:ctrlPr>
-                          </m:sSubPr>
-                          <m:e>
-                            <m:r>
-                              <a:rPr lang="pt-BR" sz="2000" b="0" i="1" smtClean="0">
-                                <a:latin typeface="Cambria Math" panose="02040503050406030204" pitchFamily="18" charset="0"/>
-                              </a:rPr>
-                              <m:t>𝑎</m:t>
-                            </m:r>
-                          </m:e>
-                          <m:sub>
-                            <m:r>
-                              <a:rPr lang="pt-BR" sz="2000" b="0" i="1" smtClean="0">
-                                <a:latin typeface="Cambria Math" panose="02040503050406030204" pitchFamily="18" charset="0"/>
-                              </a:rPr>
-                              <m:t>1</m:t>
-                            </m:r>
-                          </m:sub>
-                        </m:sSub>
-                      </m:oMath>
-                    </m:oMathPara>
-                  </a14:m>
-                  <a:endParaRPr lang="pt-BR" sz="2000" dirty="0"/>
-                </a:p>
-              </p:txBody>
-            </p:sp>
-          </mc:Choice>
-          <mc:Fallback xmlns="">
-            <p:sp>
-              <p:nvSpPr>
-                <p:cNvPr id="162" name="TextBox 161"/>
-                <p:cNvSpPr txBox="1">
-                  <a:spLocks noRot="1" noChangeAspect="1" noMove="1" noResize="1" noEditPoints="1" noAdjustHandles="1" noChangeArrowheads="1" noChangeShapeType="1" noTextEdit="1"/>
-                </p:cNvSpPr>
-                <p:nvPr/>
-              </p:nvSpPr>
-              <p:spPr>
-                <a:xfrm>
-                  <a:off x="9942348" y="4892106"/>
-                  <a:ext cx="426028" cy="400110"/>
-                </a:xfrm>
-                <a:prstGeom prst="rect">
-                  <a:avLst/>
-                </a:prstGeom>
-                <a:blipFill>
-                  <a:blip r:embed="rId2"/>
-                  <a:stretch>
-                    <a:fillRect/>
-                  </a:stretch>
-                </a:blipFill>
-              </p:spPr>
-              <p:txBody>
-                <a:bodyPr/>
-                <a:lstStyle/>
-                <a:p>
-                  <a:r>
-                    <a:rPr lang="pt-BR">
-                      <a:noFill/>
-                    </a:rPr>
-                    <a:t> </a:t>
-                  </a:r>
-                </a:p>
-              </p:txBody>
-            </p:sp>
-          </mc:Fallback>
-        </mc:AlternateContent>
-        <mc:AlternateContent xmlns:mc="http://schemas.openxmlformats.org/markup-compatibility/2006" xmlns:a14="http://schemas.microsoft.com/office/drawing/2010/main">
-          <mc:Choice Requires="a14">
-            <p:sp>
-              <p:nvSpPr>
-                <p:cNvPr id="163" name="TextBox 162"/>
-                <p:cNvSpPr txBox="1"/>
-                <p:nvPr/>
-              </p:nvSpPr>
-              <p:spPr>
-                <a:xfrm>
-                  <a:off x="6818898" y="2134388"/>
-                  <a:ext cx="426028" cy="400110"/>
-                </a:xfrm>
-                <a:prstGeom prst="rect">
-                  <a:avLst/>
-                </a:prstGeom>
-                <a:noFill/>
-              </p:spPr>
-              <p:txBody>
-                <a:bodyPr wrap="square" rtlCol="0">
-                  <a:spAutoFit/>
-                </a:bodyPr>
-                <a:lstStyle/>
-                <a:p>
-                  <a:pPr/>
-                  <a14:m>
-                    <m:oMathPara xmlns:m="http://schemas.openxmlformats.org/officeDocument/2006/math">
-                      <m:oMathParaPr>
-                        <m:jc m:val="centerGroup"/>
-                      </m:oMathParaPr>
-                      <m:oMath xmlns:m="http://schemas.openxmlformats.org/officeDocument/2006/math">
-                        <m:sSub>
-                          <m:sSubPr>
-                            <m:ctrlPr>
-                              <a:rPr lang="pt-BR" sz="2000" i="1" smtClean="0">
-                                <a:latin typeface="Cambria Math" panose="02040503050406030204" pitchFamily="18" charset="0"/>
-                              </a:rPr>
-                            </m:ctrlPr>
-                          </m:sSubPr>
-                          <m:e>
-                            <m:r>
-                              <a:rPr lang="pt-BR" sz="2000" b="0" i="1" smtClean="0">
-                                <a:latin typeface="Cambria Math" panose="02040503050406030204" pitchFamily="18" charset="0"/>
-                              </a:rPr>
-                              <m:t>𝑎</m:t>
-                            </m:r>
-                          </m:e>
-                          <m:sub>
-                            <m:r>
-                              <a:rPr lang="pt-BR" sz="2000" b="0" i="1" smtClean="0">
-                                <a:latin typeface="Cambria Math" panose="02040503050406030204" pitchFamily="18" charset="0"/>
-                              </a:rPr>
-                              <m:t>2</m:t>
-                            </m:r>
-                          </m:sub>
-                        </m:sSub>
-                      </m:oMath>
-                    </m:oMathPara>
-                  </a14:m>
-                  <a:endParaRPr lang="pt-BR" sz="2000" dirty="0"/>
-                </a:p>
-              </p:txBody>
-            </p:sp>
-          </mc:Choice>
-          <mc:Fallback xmlns="">
-            <p:sp>
-              <p:nvSpPr>
-                <p:cNvPr id="163" name="TextBox 162"/>
-                <p:cNvSpPr txBox="1">
-                  <a:spLocks noRot="1" noChangeAspect="1" noMove="1" noResize="1" noEditPoints="1" noAdjustHandles="1" noChangeArrowheads="1" noChangeShapeType="1" noTextEdit="1"/>
-                </p:cNvSpPr>
-                <p:nvPr/>
-              </p:nvSpPr>
-              <p:spPr>
-                <a:xfrm>
-                  <a:off x="6818898" y="2134388"/>
-                  <a:ext cx="426028" cy="400110"/>
-                </a:xfrm>
-                <a:prstGeom prst="rect">
-                  <a:avLst/>
-                </a:prstGeom>
-                <a:blipFill>
-                  <a:blip r:embed="rId3"/>
-                  <a:stretch>
-                    <a:fillRect/>
-                  </a:stretch>
-                </a:blipFill>
-              </p:spPr>
-              <p:txBody>
-                <a:bodyPr/>
-                <a:lstStyle/>
-                <a:p>
-                  <a:r>
-                    <a:rPr lang="pt-BR">
-                      <a:noFill/>
-                    </a:rPr>
-                    <a:t> </a:t>
-                  </a:r>
-                </a:p>
-              </p:txBody>
-            </p:sp>
-          </mc:Fallback>
-        </mc:AlternateContent>
-      </p:grpSp>
-      <p:grpSp>
-        <p:nvGrpSpPr>
-          <p:cNvPr id="166" name="Group 165"/>
-          <p:cNvGrpSpPr/>
-          <p:nvPr/>
-        </p:nvGrpSpPr>
-        <p:grpSpPr>
-          <a:xfrm>
-            <a:off x="2817120" y="895312"/>
-            <a:ext cx="3539783" cy="4892060"/>
-            <a:chOff x="2817120" y="895312"/>
-            <a:chExt cx="3539783" cy="4892060"/>
-          </a:xfrm>
-        </p:grpSpPr>
-        <p:sp>
-          <p:nvSpPr>
-            <p:cNvPr id="4" name="Oval 3"/>
-            <p:cNvSpPr>
-              <a:spLocks/>
-            </p:cNvSpPr>
-            <p:nvPr/>
-          </p:nvSpPr>
-          <p:spPr>
-            <a:xfrm>
-              <a:off x="3657598" y="1683325"/>
-              <a:ext cx="1800000" cy="3600000"/>
-            </a:xfrm>
-            <a:prstGeom prst="ellipse">
-              <a:avLst/>
-            </a:prstGeom>
-            <a:noFill/>
-            <a:ln>
-              <a:solidFill>
-                <a:schemeClr val="tx1"/>
-              </a:solidFill>
-            </a:ln>
-          </p:spPr>
-          <p:style>
-            <a:lnRef idx="2">
-              <a:schemeClr val="accent1">
-                <a:shade val="50000"/>
-              </a:schemeClr>
-            </a:lnRef>
-            <a:fillRef idx="1">
-              <a:schemeClr val="accent1"/>
-            </a:fillRef>
-            <a:effectRef idx="0">
-              <a:schemeClr val="accent1"/>
-            </a:effectRef>
-            <a:fontRef idx="minor">
-              <a:schemeClr val="lt1"/>
-            </a:fontRef>
-          </p:style>
-          <p:txBody>
-            <a:bodyPr rtlCol="0" anchor="ctr"/>
-            <a:lstStyle/>
-            <a:p>
-              <a:pPr algn="ctr"/>
-              <a:endParaRPr lang="pt-BR"/>
-            </a:p>
-          </p:txBody>
-        </p:sp>
-        <p:sp>
-          <p:nvSpPr>
-            <p:cNvPr id="5" name="Oval 4"/>
-            <p:cNvSpPr/>
-            <p:nvPr/>
-          </p:nvSpPr>
-          <p:spPr>
-            <a:xfrm>
-              <a:off x="4017598" y="2042031"/>
-              <a:ext cx="1080000" cy="2880000"/>
-            </a:xfrm>
-            <a:prstGeom prst="ellipse">
-              <a:avLst/>
-            </a:prstGeom>
-            <a:noFill/>
-            <a:ln>
-              <a:solidFill>
-                <a:schemeClr val="tx1"/>
-              </a:solidFill>
-            </a:ln>
-          </p:spPr>
-          <p:style>
-            <a:lnRef idx="2">
-              <a:schemeClr val="accent1">
-                <a:shade val="50000"/>
-              </a:schemeClr>
-            </a:lnRef>
-            <a:fillRef idx="1">
-              <a:schemeClr val="accent1"/>
-            </a:fillRef>
-            <a:effectRef idx="0">
-              <a:schemeClr val="accent1"/>
-            </a:effectRef>
-            <a:fontRef idx="minor">
-              <a:schemeClr val="lt1"/>
-            </a:fontRef>
-          </p:style>
-          <p:txBody>
-            <a:bodyPr rtlCol="0" anchor="ctr"/>
-            <a:lstStyle/>
-            <a:p>
-              <a:pPr algn="ctr"/>
-              <a:endParaRPr lang="pt-BR"/>
-            </a:p>
-          </p:txBody>
-        </p:sp>
-        <p:sp>
-          <p:nvSpPr>
-            <p:cNvPr id="7" name="Oval 6"/>
-            <p:cNvSpPr/>
-            <p:nvPr/>
-          </p:nvSpPr>
-          <p:spPr>
-            <a:xfrm>
-              <a:off x="4377598" y="2402031"/>
-              <a:ext cx="360000" cy="2160000"/>
-            </a:xfrm>
-            <a:prstGeom prst="ellipse">
-              <a:avLst/>
-            </a:prstGeom>
-            <a:noFill/>
-            <a:ln>
-              <a:solidFill>
-                <a:schemeClr val="tx1"/>
-              </a:solidFill>
-            </a:ln>
-          </p:spPr>
-          <p:style>
-            <a:lnRef idx="2">
-              <a:schemeClr val="accent1">
-                <a:shade val="50000"/>
-              </a:schemeClr>
-            </a:lnRef>
-            <a:fillRef idx="1">
-              <a:schemeClr val="accent1"/>
-            </a:fillRef>
-            <a:effectRef idx="0">
-              <a:schemeClr val="accent1"/>
-            </a:effectRef>
-            <a:fontRef idx="minor">
-              <a:schemeClr val="lt1"/>
-            </a:fontRef>
-          </p:style>
-          <p:txBody>
-            <a:bodyPr rtlCol="0" anchor="ctr"/>
-            <a:lstStyle/>
-            <a:p>
-              <a:pPr algn="ctr"/>
-              <a:endParaRPr lang="pt-BR"/>
-            </a:p>
-          </p:txBody>
-        </p:sp>
-        <p:sp>
-          <p:nvSpPr>
-            <p:cNvPr id="9" name="Oval 8"/>
-            <p:cNvSpPr/>
-            <p:nvPr/>
-          </p:nvSpPr>
-          <p:spPr>
-            <a:xfrm>
-              <a:off x="4197598" y="2222031"/>
-              <a:ext cx="720000" cy="2520000"/>
-            </a:xfrm>
-            <a:prstGeom prst="ellipse">
-              <a:avLst/>
-            </a:prstGeom>
-            <a:noFill/>
-            <a:ln>
-              <a:solidFill>
-                <a:schemeClr val="tx1"/>
-              </a:solidFill>
-            </a:ln>
-          </p:spPr>
-          <p:style>
-            <a:lnRef idx="2">
-              <a:schemeClr val="accent1">
-                <a:shade val="50000"/>
-              </a:schemeClr>
-            </a:lnRef>
-            <a:fillRef idx="1">
-              <a:schemeClr val="accent1"/>
-            </a:fillRef>
-            <a:effectRef idx="0">
-              <a:schemeClr val="accent1"/>
-            </a:effectRef>
-            <a:fontRef idx="minor">
-              <a:schemeClr val="lt1"/>
-            </a:fontRef>
-          </p:style>
-          <p:txBody>
-            <a:bodyPr rtlCol="0" anchor="ctr"/>
-            <a:lstStyle/>
-            <a:p>
-              <a:pPr algn="ctr"/>
-              <a:endParaRPr lang="pt-BR"/>
-            </a:p>
-          </p:txBody>
-        </p:sp>
-        <p:sp>
-          <p:nvSpPr>
-            <p:cNvPr id="10" name="Oval 9"/>
-            <p:cNvSpPr/>
-            <p:nvPr/>
-          </p:nvSpPr>
-          <p:spPr>
-            <a:xfrm>
-              <a:off x="3837598" y="1862031"/>
-              <a:ext cx="1440000" cy="3240000"/>
-            </a:xfrm>
-            <a:prstGeom prst="ellipse">
-              <a:avLst/>
-            </a:prstGeom>
-            <a:noFill/>
-            <a:ln>
-              <a:solidFill>
-                <a:schemeClr val="tx1"/>
-              </a:solidFill>
-            </a:ln>
-          </p:spPr>
-          <p:style>
-            <a:lnRef idx="2">
-              <a:schemeClr val="accent1">
-                <a:shade val="50000"/>
-              </a:schemeClr>
-            </a:lnRef>
-            <a:fillRef idx="1">
-              <a:schemeClr val="accent1"/>
-            </a:fillRef>
-            <a:effectRef idx="0">
-              <a:schemeClr val="accent1"/>
-            </a:effectRef>
-            <a:fontRef idx="minor">
-              <a:schemeClr val="lt1"/>
-            </a:fontRef>
-          </p:style>
-          <p:txBody>
-            <a:bodyPr rtlCol="0" anchor="ctr"/>
-            <a:lstStyle/>
-            <a:p>
-              <a:pPr algn="ctr"/>
-              <a:endParaRPr lang="pt-BR"/>
-            </a:p>
-          </p:txBody>
-        </p:sp>
-        <p:sp>
-          <p:nvSpPr>
-            <p:cNvPr id="11" name="Oval 10"/>
-            <p:cNvSpPr>
-              <a:spLocks/>
-            </p:cNvSpPr>
-            <p:nvPr/>
-          </p:nvSpPr>
-          <p:spPr>
-            <a:xfrm>
-              <a:off x="3477598" y="1502031"/>
-              <a:ext cx="2160000" cy="3960000"/>
-            </a:xfrm>
-            <a:prstGeom prst="ellipse">
-              <a:avLst/>
-            </a:prstGeom>
-            <a:noFill/>
-            <a:ln>
-              <a:solidFill>
-                <a:schemeClr val="tx1"/>
-              </a:solidFill>
-            </a:ln>
-          </p:spPr>
-          <p:style>
-            <a:lnRef idx="2">
-              <a:schemeClr val="accent1">
-                <a:shade val="50000"/>
-              </a:schemeClr>
-            </a:lnRef>
-            <a:fillRef idx="1">
-              <a:schemeClr val="accent1"/>
-            </a:fillRef>
-            <a:effectRef idx="0">
-              <a:schemeClr val="accent1"/>
-            </a:effectRef>
-            <a:fontRef idx="minor">
-              <a:schemeClr val="lt1"/>
-            </a:fontRef>
-          </p:style>
-          <p:txBody>
-            <a:bodyPr rtlCol="0" anchor="ctr"/>
-            <a:lstStyle/>
-            <a:p>
-              <a:pPr algn="ctr"/>
-              <a:endParaRPr lang="pt-BR"/>
-            </a:p>
-          </p:txBody>
-        </p:sp>
-        <p:cxnSp>
-          <p:nvCxnSpPr>
-            <p:cNvPr id="103" name="Straight Connector 102"/>
-            <p:cNvCxnSpPr/>
-            <p:nvPr/>
-          </p:nvCxnSpPr>
-          <p:spPr>
-            <a:xfrm flipH="1">
-              <a:off x="4253250" y="5216278"/>
-              <a:ext cx="386493" cy="153789"/>
-            </a:xfrm>
-            <a:prstGeom prst="line">
-              <a:avLst/>
-            </a:prstGeom>
-            <a:ln w="12700">
-              <a:solidFill>
-                <a:schemeClr val="tx1"/>
-              </a:solidFill>
-              <a:prstDash val="dash"/>
-            </a:ln>
-          </p:spPr>
-          <p:style>
-            <a:lnRef idx="1">
-              <a:schemeClr val="accent1"/>
-            </a:lnRef>
-            <a:fillRef idx="0">
-              <a:schemeClr val="accent1"/>
-            </a:fillRef>
-            <a:effectRef idx="0">
-              <a:schemeClr val="accent1"/>
-            </a:effectRef>
-            <a:fontRef idx="minor">
-              <a:schemeClr val="tx1"/>
-            </a:fontRef>
-          </p:style>
-        </p:cxnSp>
-        <p:sp>
-          <p:nvSpPr>
-            <p:cNvPr id="136" name="Multiply 135"/>
-            <p:cNvSpPr>
-              <a:spLocks/>
-            </p:cNvSpPr>
-            <p:nvPr/>
-          </p:nvSpPr>
-          <p:spPr>
-            <a:xfrm>
-              <a:off x="4216841" y="5338443"/>
-              <a:ext cx="72817" cy="82800"/>
-            </a:xfrm>
-            <a:prstGeom prst="mathMultiply">
-              <a:avLst/>
-            </a:prstGeom>
-            <a:solidFill>
-              <a:srgbClr val="00B0F0"/>
-            </a:solidFill>
-            <a:ln w="3175">
-              <a:solidFill>
-                <a:schemeClr val="tx1"/>
-              </a:solidFill>
-            </a:ln>
-          </p:spPr>
-          <p:style>
-            <a:lnRef idx="2">
-              <a:schemeClr val="accent1">
-                <a:shade val="50000"/>
-              </a:schemeClr>
-            </a:lnRef>
-            <a:fillRef idx="1">
-              <a:schemeClr val="accent1"/>
-            </a:fillRef>
-            <a:effectRef idx="0">
-              <a:schemeClr val="accent1"/>
-            </a:effectRef>
-            <a:fontRef idx="minor">
-              <a:schemeClr val="lt1"/>
-            </a:fontRef>
-          </p:style>
-          <p:txBody>
-            <a:bodyPr rtlCol="0" anchor="ctr"/>
-            <a:lstStyle/>
-            <a:p>
-              <a:pPr algn="ctr"/>
-              <a:endParaRPr lang="pt-BR"/>
-            </a:p>
-          </p:txBody>
-        </p:sp>
-        <p:sp>
-          <p:nvSpPr>
-            <p:cNvPr id="137" name="Multiply 136"/>
-            <p:cNvSpPr>
-              <a:spLocks/>
-            </p:cNvSpPr>
-            <p:nvPr/>
-          </p:nvSpPr>
-          <p:spPr>
-            <a:xfrm>
-              <a:off x="4598658" y="5170600"/>
-              <a:ext cx="72817" cy="82800"/>
-            </a:xfrm>
-            <a:prstGeom prst="mathMultiply">
-              <a:avLst/>
-            </a:prstGeom>
-            <a:solidFill>
-              <a:srgbClr val="00B0F0"/>
-            </a:solidFill>
-            <a:ln w="3175">
-              <a:solidFill>
-                <a:schemeClr val="tx1"/>
-              </a:solidFill>
-            </a:ln>
-          </p:spPr>
-          <p:style>
-            <a:lnRef idx="2">
-              <a:schemeClr val="accent1">
-                <a:shade val="50000"/>
-              </a:schemeClr>
-            </a:lnRef>
-            <a:fillRef idx="1">
-              <a:schemeClr val="accent1"/>
-            </a:fillRef>
-            <a:effectRef idx="0">
-              <a:schemeClr val="accent1"/>
-            </a:effectRef>
-            <a:fontRef idx="minor">
-              <a:schemeClr val="lt1"/>
-            </a:fontRef>
-          </p:style>
-          <p:txBody>
-            <a:bodyPr rtlCol="0" anchor="ctr"/>
-            <a:lstStyle/>
-            <a:p>
-              <a:pPr algn="ctr"/>
-              <a:endParaRPr lang="pt-BR"/>
-            </a:p>
-          </p:txBody>
-        </p:sp>
-        <p:sp>
-          <p:nvSpPr>
-            <p:cNvPr id="69" name="Multiply 68"/>
-            <p:cNvSpPr>
-              <a:spLocks noChangeAspect="1"/>
-            </p:cNvSpPr>
-            <p:nvPr/>
-          </p:nvSpPr>
-          <p:spPr>
-            <a:xfrm>
-              <a:off x="4468132" y="3344554"/>
-              <a:ext cx="158298" cy="180000"/>
-            </a:xfrm>
-            <a:prstGeom prst="mathMultiply">
-              <a:avLst/>
-            </a:prstGeom>
-            <a:solidFill>
-              <a:srgbClr val="FF0000"/>
-            </a:solidFill>
-            <a:ln w="3175">
-              <a:solidFill>
-                <a:schemeClr val="tx1"/>
-              </a:solidFill>
-            </a:ln>
-          </p:spPr>
-          <p:style>
-            <a:lnRef idx="2">
-              <a:schemeClr val="accent1">
-                <a:shade val="50000"/>
-              </a:schemeClr>
-            </a:lnRef>
-            <a:fillRef idx="1">
-              <a:schemeClr val="accent1"/>
-            </a:fillRef>
-            <a:effectRef idx="0">
-              <a:schemeClr val="accent1"/>
-            </a:effectRef>
-            <a:fontRef idx="minor">
-              <a:schemeClr val="lt1"/>
-            </a:fontRef>
-          </p:style>
-          <p:txBody>
-            <a:bodyPr rtlCol="0" anchor="ctr"/>
-            <a:lstStyle/>
-            <a:p>
-              <a:pPr algn="ctr"/>
-              <a:endParaRPr lang="pt-BR"/>
-            </a:p>
-          </p:txBody>
-        </p:sp>
-        <p:cxnSp>
-          <p:nvCxnSpPr>
-            <p:cNvPr id="71" name="Straight Connector 70"/>
-            <p:cNvCxnSpPr/>
-            <p:nvPr/>
-          </p:nvCxnSpPr>
-          <p:spPr>
-            <a:xfrm flipH="1" flipV="1">
-              <a:off x="4516368" y="3611183"/>
-              <a:ext cx="73202" cy="50119"/>
-            </a:xfrm>
-            <a:prstGeom prst="line">
-              <a:avLst/>
-            </a:prstGeom>
-            <a:ln w="12700">
-              <a:solidFill>
-                <a:schemeClr val="tx1"/>
-              </a:solidFill>
-              <a:prstDash val="dash"/>
-            </a:ln>
-          </p:spPr>
-          <p:style>
-            <a:lnRef idx="1">
-              <a:schemeClr val="accent1"/>
-            </a:lnRef>
-            <a:fillRef idx="0">
-              <a:schemeClr val="accent1"/>
-            </a:fillRef>
-            <a:effectRef idx="0">
-              <a:schemeClr val="accent1"/>
-            </a:effectRef>
-            <a:fontRef idx="minor">
-              <a:schemeClr val="tx1"/>
-            </a:fontRef>
-          </p:style>
-        </p:cxnSp>
-        <p:cxnSp>
-          <p:nvCxnSpPr>
-            <p:cNvPr id="74" name="Straight Connector 73"/>
-            <p:cNvCxnSpPr/>
-            <p:nvPr/>
-          </p:nvCxnSpPr>
-          <p:spPr>
-            <a:xfrm rot="5400000" flipH="1" flipV="1">
-              <a:off x="4522774" y="3661302"/>
-              <a:ext cx="73202" cy="50119"/>
-            </a:xfrm>
-            <a:prstGeom prst="line">
-              <a:avLst/>
-            </a:prstGeom>
-            <a:ln w="12700">
-              <a:solidFill>
-                <a:schemeClr val="tx1"/>
-              </a:solidFill>
-              <a:prstDash val="dash"/>
-            </a:ln>
-          </p:spPr>
-          <p:style>
-            <a:lnRef idx="1">
-              <a:schemeClr val="accent1"/>
-            </a:lnRef>
-            <a:fillRef idx="0">
-              <a:schemeClr val="accent1"/>
-            </a:fillRef>
-            <a:effectRef idx="0">
-              <a:schemeClr val="accent1"/>
-            </a:effectRef>
-            <a:fontRef idx="minor">
-              <a:schemeClr val="tx1"/>
-            </a:fontRef>
-          </p:style>
-        </p:cxnSp>
-        <p:cxnSp>
-          <p:nvCxnSpPr>
-            <p:cNvPr id="76" name="Straight Connector 75"/>
-            <p:cNvCxnSpPr/>
-            <p:nvPr/>
-          </p:nvCxnSpPr>
-          <p:spPr>
-            <a:xfrm rot="5400000" flipH="1" flipV="1">
-              <a:off x="4540454" y="3778347"/>
-              <a:ext cx="73202" cy="50119"/>
-            </a:xfrm>
-            <a:prstGeom prst="line">
-              <a:avLst/>
-            </a:prstGeom>
-            <a:ln w="12700">
-              <a:solidFill>
-                <a:schemeClr val="tx1"/>
-              </a:solidFill>
-              <a:prstDash val="dash"/>
-            </a:ln>
-          </p:spPr>
-          <p:style>
-            <a:lnRef idx="1">
-              <a:schemeClr val="accent1"/>
-            </a:lnRef>
-            <a:fillRef idx="0">
-              <a:schemeClr val="accent1"/>
-            </a:fillRef>
-            <a:effectRef idx="0">
-              <a:schemeClr val="accent1"/>
-            </a:effectRef>
-            <a:fontRef idx="minor">
-              <a:schemeClr val="tx1"/>
-            </a:fontRef>
-          </p:style>
-        </p:cxnSp>
-        <p:cxnSp>
-          <p:nvCxnSpPr>
-            <p:cNvPr id="77" name="Straight Connector 76"/>
-            <p:cNvCxnSpPr/>
-            <p:nvPr/>
-          </p:nvCxnSpPr>
-          <p:spPr>
-            <a:xfrm rot="10800000" flipH="1" flipV="1">
-              <a:off x="4551995" y="3841032"/>
-              <a:ext cx="73202" cy="50119"/>
-            </a:xfrm>
-            <a:prstGeom prst="line">
-              <a:avLst/>
-            </a:prstGeom>
-            <a:ln w="12700">
-              <a:solidFill>
-                <a:schemeClr val="tx1"/>
-              </a:solidFill>
-              <a:prstDash val="dash"/>
-            </a:ln>
-          </p:spPr>
-          <p:style>
-            <a:lnRef idx="1">
-              <a:schemeClr val="accent1"/>
-            </a:lnRef>
-            <a:fillRef idx="0">
-              <a:schemeClr val="accent1"/>
-            </a:fillRef>
-            <a:effectRef idx="0">
-              <a:schemeClr val="accent1"/>
-            </a:effectRef>
-            <a:fontRef idx="minor">
-              <a:schemeClr val="tx1"/>
-            </a:fontRef>
-          </p:style>
-        </p:cxnSp>
-        <p:cxnSp>
-          <p:nvCxnSpPr>
-            <p:cNvPr id="78" name="Straight Connector 77"/>
-            <p:cNvCxnSpPr/>
-            <p:nvPr/>
-          </p:nvCxnSpPr>
-          <p:spPr>
-            <a:xfrm rot="5400000" flipH="1" flipV="1">
-              <a:off x="4557568" y="3898479"/>
-              <a:ext cx="73202" cy="50119"/>
-            </a:xfrm>
-            <a:prstGeom prst="line">
-              <a:avLst/>
-            </a:prstGeom>
-            <a:ln w="12700">
-              <a:solidFill>
-                <a:schemeClr val="tx1"/>
-              </a:solidFill>
-              <a:prstDash val="dash"/>
-            </a:ln>
-          </p:spPr>
-          <p:style>
-            <a:lnRef idx="1">
-              <a:schemeClr val="accent1"/>
-            </a:lnRef>
-            <a:fillRef idx="0">
-              <a:schemeClr val="accent1"/>
-            </a:fillRef>
-            <a:effectRef idx="0">
-              <a:schemeClr val="accent1"/>
-            </a:effectRef>
-            <a:fontRef idx="minor">
-              <a:schemeClr val="tx1"/>
-            </a:fontRef>
-          </p:style>
-        </p:cxnSp>
-        <p:sp>
-          <p:nvSpPr>
-            <p:cNvPr id="138" name="Multiply 137"/>
-            <p:cNvSpPr>
-              <a:spLocks noChangeAspect="1"/>
-            </p:cNvSpPr>
-            <p:nvPr/>
-          </p:nvSpPr>
-          <p:spPr>
-            <a:xfrm>
-              <a:off x="4396841" y="4994030"/>
-              <a:ext cx="72817" cy="82800"/>
-            </a:xfrm>
-            <a:prstGeom prst="mathMultiply">
-              <a:avLst/>
-            </a:prstGeom>
-            <a:solidFill>
-              <a:srgbClr val="00B0F0"/>
-            </a:solidFill>
-            <a:ln w="3175">
-              <a:solidFill>
-                <a:schemeClr val="tx1"/>
-              </a:solidFill>
-            </a:ln>
-          </p:spPr>
-          <p:style>
-            <a:lnRef idx="2">
-              <a:schemeClr val="accent1">
-                <a:shade val="50000"/>
-              </a:schemeClr>
-            </a:lnRef>
-            <a:fillRef idx="1">
-              <a:schemeClr val="accent1"/>
-            </a:fillRef>
-            <a:effectRef idx="0">
-              <a:schemeClr val="accent1"/>
-            </a:effectRef>
-            <a:fontRef idx="minor">
-              <a:schemeClr val="lt1"/>
-            </a:fontRef>
-          </p:style>
-          <p:txBody>
-            <a:bodyPr rtlCol="0" anchor="ctr"/>
-            <a:lstStyle/>
-            <a:p>
-              <a:pPr algn="ctr"/>
-              <a:endParaRPr lang="pt-BR"/>
-            </a:p>
-          </p:txBody>
-        </p:sp>
-        <p:cxnSp>
-          <p:nvCxnSpPr>
-            <p:cNvPr id="98" name="Straight Connector 97"/>
-            <p:cNvCxnSpPr/>
-            <p:nvPr/>
-          </p:nvCxnSpPr>
-          <p:spPr>
-            <a:xfrm flipV="1">
-              <a:off x="4433250" y="4936612"/>
-              <a:ext cx="145222" cy="101777"/>
-            </a:xfrm>
-            <a:prstGeom prst="line">
-              <a:avLst/>
-            </a:prstGeom>
-            <a:ln w="12700">
-              <a:solidFill>
-                <a:schemeClr val="tx1"/>
-              </a:solidFill>
-              <a:prstDash val="dash"/>
-            </a:ln>
-          </p:spPr>
-          <p:style>
-            <a:lnRef idx="1">
-              <a:schemeClr val="accent1"/>
-            </a:lnRef>
-            <a:fillRef idx="0">
-              <a:schemeClr val="accent1"/>
-            </a:fillRef>
-            <a:effectRef idx="0">
-              <a:schemeClr val="accent1"/>
-            </a:effectRef>
-            <a:fontRef idx="minor">
-              <a:schemeClr val="tx1"/>
-            </a:fontRef>
-          </p:style>
-        </p:cxnSp>
-        <p:cxnSp>
-          <p:nvCxnSpPr>
-            <p:cNvPr id="100" name="Straight Connector 99"/>
-            <p:cNvCxnSpPr/>
-            <p:nvPr/>
-          </p:nvCxnSpPr>
-          <p:spPr>
-            <a:xfrm>
-              <a:off x="4433250" y="5036924"/>
-              <a:ext cx="206493" cy="180000"/>
-            </a:xfrm>
-            <a:prstGeom prst="line">
-              <a:avLst/>
-            </a:prstGeom>
-            <a:ln w="12700">
-              <a:solidFill>
-                <a:schemeClr val="tx1"/>
-              </a:solidFill>
-              <a:prstDash val="dash"/>
-            </a:ln>
-          </p:spPr>
-          <p:style>
-            <a:lnRef idx="1">
-              <a:schemeClr val="accent1"/>
-            </a:lnRef>
-            <a:fillRef idx="0">
-              <a:schemeClr val="accent1"/>
-            </a:fillRef>
-            <a:effectRef idx="0">
-              <a:schemeClr val="accent1"/>
-            </a:effectRef>
-            <a:fontRef idx="minor">
-              <a:schemeClr val="tx1"/>
-            </a:fontRef>
-          </p:style>
-        </p:cxnSp>
-        <p:sp>
-          <p:nvSpPr>
-            <p:cNvPr id="139" name="Multiply 138"/>
-            <p:cNvSpPr>
-              <a:spLocks noChangeAspect="1"/>
-            </p:cNvSpPr>
-            <p:nvPr/>
-          </p:nvSpPr>
-          <p:spPr>
-            <a:xfrm>
-              <a:off x="4541256" y="4892106"/>
-              <a:ext cx="72817" cy="82800"/>
-            </a:xfrm>
-            <a:prstGeom prst="mathMultiply">
-              <a:avLst/>
-            </a:prstGeom>
-            <a:solidFill>
-              <a:srgbClr val="00B0F0"/>
-            </a:solidFill>
-            <a:ln w="3175">
-              <a:solidFill>
-                <a:schemeClr val="tx1"/>
-              </a:solidFill>
-            </a:ln>
-          </p:spPr>
-          <p:style>
-            <a:lnRef idx="2">
-              <a:schemeClr val="accent1">
-                <a:shade val="50000"/>
-              </a:schemeClr>
-            </a:lnRef>
-            <a:fillRef idx="1">
-              <a:schemeClr val="accent1"/>
-            </a:fillRef>
-            <a:effectRef idx="0">
-              <a:schemeClr val="accent1"/>
-            </a:effectRef>
-            <a:fontRef idx="minor">
-              <a:schemeClr val="lt1"/>
-            </a:fontRef>
-          </p:style>
-          <p:txBody>
-            <a:bodyPr rtlCol="0" anchor="ctr"/>
-            <a:lstStyle/>
-            <a:p>
-              <a:pPr algn="ctr"/>
-              <a:endParaRPr lang="pt-BR"/>
-            </a:p>
-          </p:txBody>
-        </p:sp>
-        <p:sp>
-          <p:nvSpPr>
-            <p:cNvPr id="140" name="Multiply 139"/>
-            <p:cNvSpPr>
-              <a:spLocks noChangeAspect="1"/>
-            </p:cNvSpPr>
-            <p:nvPr/>
-          </p:nvSpPr>
-          <p:spPr>
-            <a:xfrm>
-              <a:off x="4416484" y="4782417"/>
-              <a:ext cx="72817" cy="82800"/>
-            </a:xfrm>
-            <a:prstGeom prst="mathMultiply">
-              <a:avLst/>
-            </a:prstGeom>
-            <a:solidFill>
-              <a:srgbClr val="00B0F0"/>
-            </a:solidFill>
-            <a:ln w="3175">
-              <a:solidFill>
-                <a:schemeClr val="tx1"/>
-              </a:solidFill>
-            </a:ln>
-          </p:spPr>
-          <p:style>
-            <a:lnRef idx="2">
-              <a:schemeClr val="accent1">
-                <a:shade val="50000"/>
-              </a:schemeClr>
-            </a:lnRef>
-            <a:fillRef idx="1">
-              <a:schemeClr val="accent1"/>
-            </a:fillRef>
-            <a:effectRef idx="0">
-              <a:schemeClr val="accent1"/>
-            </a:effectRef>
-            <a:fontRef idx="minor">
-              <a:schemeClr val="lt1"/>
-            </a:fontRef>
-          </p:style>
-          <p:txBody>
-            <a:bodyPr rtlCol="0" anchor="ctr"/>
-            <a:lstStyle/>
-            <a:p>
-              <a:pPr algn="ctr"/>
-              <a:endParaRPr lang="pt-BR"/>
-            </a:p>
-          </p:txBody>
-        </p:sp>
-        <p:sp>
-          <p:nvSpPr>
-            <p:cNvPr id="141" name="Multiply 140"/>
-            <p:cNvSpPr>
-              <a:spLocks noChangeAspect="1"/>
-            </p:cNvSpPr>
-            <p:nvPr/>
-          </p:nvSpPr>
-          <p:spPr>
-            <a:xfrm>
-              <a:off x="4527814" y="4665846"/>
-              <a:ext cx="72817" cy="82800"/>
-            </a:xfrm>
-            <a:prstGeom prst="mathMultiply">
-              <a:avLst/>
-            </a:prstGeom>
-            <a:solidFill>
-              <a:srgbClr val="00B0F0"/>
-            </a:solidFill>
-            <a:ln w="3175">
-              <a:solidFill>
-                <a:schemeClr val="tx1"/>
-              </a:solidFill>
-            </a:ln>
-          </p:spPr>
-          <p:style>
-            <a:lnRef idx="2">
-              <a:schemeClr val="accent1">
-                <a:shade val="50000"/>
-              </a:schemeClr>
-            </a:lnRef>
-            <a:fillRef idx="1">
-              <a:schemeClr val="accent1"/>
-            </a:fillRef>
-            <a:effectRef idx="0">
-              <a:schemeClr val="accent1"/>
-            </a:effectRef>
-            <a:fontRef idx="minor">
-              <a:schemeClr val="lt1"/>
-            </a:fontRef>
-          </p:style>
-          <p:txBody>
-            <a:bodyPr rtlCol="0" anchor="ctr"/>
-            <a:lstStyle/>
-            <a:p>
-              <a:pPr algn="ctr"/>
-              <a:endParaRPr lang="pt-BR"/>
-            </a:p>
-          </p:txBody>
-        </p:sp>
-        <p:sp>
-          <p:nvSpPr>
-            <p:cNvPr id="142" name="Multiply 141"/>
-            <p:cNvSpPr>
-              <a:spLocks/>
-            </p:cNvSpPr>
-            <p:nvPr/>
-          </p:nvSpPr>
-          <p:spPr>
-            <a:xfrm>
-              <a:off x="4432482" y="4497324"/>
-              <a:ext cx="72000" cy="82800"/>
-            </a:xfrm>
-            <a:prstGeom prst="mathMultiply">
-              <a:avLst/>
-            </a:prstGeom>
-            <a:solidFill>
-              <a:srgbClr val="00B0F0"/>
-            </a:solidFill>
-            <a:ln w="3175">
-              <a:solidFill>
-                <a:schemeClr val="tx1"/>
-              </a:solidFill>
-            </a:ln>
-          </p:spPr>
-          <p:style>
-            <a:lnRef idx="2">
-              <a:schemeClr val="accent1">
-                <a:shade val="50000"/>
-              </a:schemeClr>
-            </a:lnRef>
-            <a:fillRef idx="1">
-              <a:schemeClr val="accent1"/>
-            </a:fillRef>
-            <a:effectRef idx="0">
-              <a:schemeClr val="accent1"/>
-            </a:effectRef>
-            <a:fontRef idx="minor">
-              <a:schemeClr val="lt1"/>
-            </a:fontRef>
-          </p:style>
-          <p:txBody>
-            <a:bodyPr rtlCol="0" anchor="ctr"/>
-            <a:lstStyle/>
-            <a:p>
-              <a:pPr algn="ctr"/>
-              <a:endParaRPr lang="pt-BR"/>
-            </a:p>
-          </p:txBody>
-        </p:sp>
-        <p:sp>
-          <p:nvSpPr>
-            <p:cNvPr id="143" name="Multiply 142"/>
-            <p:cNvSpPr>
-              <a:spLocks/>
-            </p:cNvSpPr>
-            <p:nvPr/>
-          </p:nvSpPr>
-          <p:spPr>
-            <a:xfrm>
-              <a:off x="4586752" y="4430025"/>
-              <a:ext cx="72000" cy="82800"/>
-            </a:xfrm>
-            <a:prstGeom prst="mathMultiply">
-              <a:avLst/>
-            </a:prstGeom>
-            <a:solidFill>
-              <a:srgbClr val="00B0F0"/>
-            </a:solidFill>
-            <a:ln w="3175">
-              <a:solidFill>
-                <a:schemeClr val="tx1"/>
-              </a:solidFill>
-            </a:ln>
-          </p:spPr>
-          <p:style>
-            <a:lnRef idx="2">
-              <a:schemeClr val="accent1">
-                <a:shade val="50000"/>
-              </a:schemeClr>
-            </a:lnRef>
-            <a:fillRef idx="1">
-              <a:schemeClr val="accent1"/>
-            </a:fillRef>
-            <a:effectRef idx="0">
-              <a:schemeClr val="accent1"/>
-            </a:effectRef>
-            <a:fontRef idx="minor">
-              <a:schemeClr val="lt1"/>
-            </a:fontRef>
-          </p:style>
-          <p:txBody>
-            <a:bodyPr rtlCol="0" anchor="ctr"/>
-            <a:lstStyle/>
-            <a:p>
-              <a:pPr algn="ctr"/>
-              <a:endParaRPr lang="pt-BR"/>
-            </a:p>
-          </p:txBody>
-        </p:sp>
-        <p:sp>
-          <p:nvSpPr>
-            <p:cNvPr id="144" name="Multiply 143"/>
-            <p:cNvSpPr>
-              <a:spLocks/>
-            </p:cNvSpPr>
-            <p:nvPr/>
-          </p:nvSpPr>
-          <p:spPr>
-            <a:xfrm>
-              <a:off x="4489301" y="4254654"/>
-              <a:ext cx="72000" cy="82800"/>
-            </a:xfrm>
-            <a:prstGeom prst="mathMultiply">
-              <a:avLst/>
-            </a:prstGeom>
-            <a:solidFill>
-              <a:srgbClr val="00B0F0"/>
-            </a:solidFill>
-            <a:ln w="3175">
-              <a:solidFill>
-                <a:schemeClr val="tx1"/>
-              </a:solidFill>
-            </a:ln>
-          </p:spPr>
-          <p:style>
-            <a:lnRef idx="2">
-              <a:schemeClr val="accent1">
-                <a:shade val="50000"/>
-              </a:schemeClr>
-            </a:lnRef>
-            <a:fillRef idx="1">
-              <a:schemeClr val="accent1"/>
-            </a:fillRef>
-            <a:effectRef idx="0">
-              <a:schemeClr val="accent1"/>
-            </a:effectRef>
-            <a:fontRef idx="minor">
-              <a:schemeClr val="lt1"/>
-            </a:fontRef>
-          </p:style>
-          <p:txBody>
-            <a:bodyPr rtlCol="0" anchor="ctr"/>
-            <a:lstStyle/>
-            <a:p>
-              <a:pPr algn="ctr"/>
-              <a:endParaRPr lang="pt-BR"/>
-            </a:p>
-          </p:txBody>
-        </p:sp>
-        <p:sp>
-          <p:nvSpPr>
-            <p:cNvPr id="145" name="Multiply 144"/>
-            <p:cNvSpPr>
-              <a:spLocks/>
-            </p:cNvSpPr>
-            <p:nvPr/>
-          </p:nvSpPr>
-          <p:spPr>
-            <a:xfrm>
-              <a:off x="4647454" y="4169248"/>
-              <a:ext cx="72000" cy="82800"/>
-            </a:xfrm>
-            <a:prstGeom prst="mathMultiply">
-              <a:avLst/>
-            </a:prstGeom>
-            <a:solidFill>
-              <a:srgbClr val="00B0F0"/>
-            </a:solidFill>
-            <a:ln w="3175">
-              <a:solidFill>
-                <a:schemeClr val="tx1"/>
-              </a:solidFill>
-            </a:ln>
-          </p:spPr>
-          <p:style>
-            <a:lnRef idx="2">
-              <a:schemeClr val="accent1">
-                <a:shade val="50000"/>
-              </a:schemeClr>
-            </a:lnRef>
-            <a:fillRef idx="1">
-              <a:schemeClr val="accent1"/>
-            </a:fillRef>
-            <a:effectRef idx="0">
-              <a:schemeClr val="accent1"/>
-            </a:effectRef>
-            <a:fontRef idx="minor">
-              <a:schemeClr val="lt1"/>
-            </a:fontRef>
-          </p:style>
-          <p:txBody>
-            <a:bodyPr rtlCol="0" anchor="ctr"/>
-            <a:lstStyle/>
-            <a:p>
-              <a:pPr algn="ctr"/>
-              <a:endParaRPr lang="pt-BR"/>
-            </a:p>
-          </p:txBody>
-        </p:sp>
-        <p:sp>
-          <p:nvSpPr>
-            <p:cNvPr id="146" name="Multiply 145"/>
-            <p:cNvSpPr>
-              <a:spLocks/>
-            </p:cNvSpPr>
-            <p:nvPr/>
-          </p:nvSpPr>
-          <p:spPr>
-            <a:xfrm>
-              <a:off x="4515354" y="4085156"/>
-              <a:ext cx="72000" cy="82800"/>
-            </a:xfrm>
-            <a:prstGeom prst="mathMultiply">
-              <a:avLst/>
-            </a:prstGeom>
-            <a:solidFill>
-              <a:srgbClr val="00B0F0"/>
-            </a:solidFill>
-            <a:ln w="3175">
-              <a:solidFill>
-                <a:schemeClr val="tx1"/>
-              </a:solidFill>
-            </a:ln>
-          </p:spPr>
-          <p:style>
-            <a:lnRef idx="2">
-              <a:schemeClr val="accent1">
-                <a:shade val="50000"/>
-              </a:schemeClr>
-            </a:lnRef>
-            <a:fillRef idx="1">
-              <a:schemeClr val="accent1"/>
-            </a:fillRef>
-            <a:effectRef idx="0">
-              <a:schemeClr val="accent1"/>
-            </a:effectRef>
-            <a:fontRef idx="minor">
-              <a:schemeClr val="lt1"/>
-            </a:fontRef>
-          </p:style>
-          <p:txBody>
-            <a:bodyPr rtlCol="0" anchor="ctr"/>
-            <a:lstStyle/>
-            <a:p>
-              <a:pPr algn="ctr"/>
-              <a:endParaRPr lang="pt-BR"/>
-            </a:p>
-          </p:txBody>
-        </p:sp>
-        <p:sp>
-          <p:nvSpPr>
-            <p:cNvPr id="147" name="Multiply 146"/>
-            <p:cNvSpPr>
-              <a:spLocks noChangeAspect="1"/>
-            </p:cNvSpPr>
-            <p:nvPr/>
-          </p:nvSpPr>
-          <p:spPr>
-            <a:xfrm>
-              <a:off x="4601229" y="3950902"/>
-              <a:ext cx="72000" cy="81871"/>
-            </a:xfrm>
-            <a:prstGeom prst="mathMultiply">
-              <a:avLst/>
-            </a:prstGeom>
-            <a:solidFill>
-              <a:srgbClr val="00B0F0"/>
-            </a:solidFill>
-            <a:ln w="3175">
-              <a:solidFill>
-                <a:schemeClr val="tx1"/>
-              </a:solidFill>
-            </a:ln>
-          </p:spPr>
-          <p:style>
-            <a:lnRef idx="2">
-              <a:schemeClr val="accent1">
-                <a:shade val="50000"/>
-              </a:schemeClr>
-            </a:lnRef>
-            <a:fillRef idx="1">
-              <a:schemeClr val="accent1"/>
-            </a:fillRef>
-            <a:effectRef idx="0">
-              <a:schemeClr val="accent1"/>
-            </a:effectRef>
-            <a:fontRef idx="minor">
-              <a:schemeClr val="lt1"/>
-            </a:fontRef>
-          </p:style>
-          <p:txBody>
-            <a:bodyPr rtlCol="0" anchor="ctr"/>
-            <a:lstStyle/>
-            <a:p>
-              <a:pPr algn="ctr"/>
-              <a:endParaRPr lang="pt-BR"/>
-            </a:p>
-          </p:txBody>
-        </p:sp>
-        <p:sp>
-          <p:nvSpPr>
-            <p:cNvPr id="148" name="Multiply 147"/>
-            <p:cNvSpPr>
-              <a:spLocks noChangeAspect="1"/>
-            </p:cNvSpPr>
-            <p:nvPr/>
-          </p:nvSpPr>
-          <p:spPr>
-            <a:xfrm>
-              <a:off x="4598029" y="3846380"/>
-              <a:ext cx="72000" cy="81871"/>
-            </a:xfrm>
-            <a:prstGeom prst="mathMultiply">
-              <a:avLst/>
-            </a:prstGeom>
-            <a:solidFill>
-              <a:srgbClr val="00B0F0"/>
-            </a:solidFill>
-            <a:ln w="3175">
-              <a:solidFill>
-                <a:schemeClr val="tx1"/>
-              </a:solidFill>
-            </a:ln>
-          </p:spPr>
-          <p:style>
-            <a:lnRef idx="2">
-              <a:schemeClr val="accent1">
-                <a:shade val="50000"/>
-              </a:schemeClr>
-            </a:lnRef>
-            <a:fillRef idx="1">
-              <a:schemeClr val="accent1"/>
-            </a:fillRef>
-            <a:effectRef idx="0">
-              <a:schemeClr val="accent1"/>
-            </a:effectRef>
-            <a:fontRef idx="minor">
-              <a:schemeClr val="lt1"/>
-            </a:fontRef>
-          </p:style>
-          <p:txBody>
-            <a:bodyPr rtlCol="0" anchor="ctr"/>
-            <a:lstStyle/>
-            <a:p>
-              <a:pPr algn="ctr"/>
-              <a:endParaRPr lang="pt-BR"/>
-            </a:p>
-          </p:txBody>
-        </p:sp>
-        <p:sp>
-          <p:nvSpPr>
-            <p:cNvPr id="149" name="Multiply 148"/>
-            <p:cNvSpPr>
-              <a:spLocks noChangeAspect="1"/>
-            </p:cNvSpPr>
-            <p:nvPr/>
-          </p:nvSpPr>
-          <p:spPr>
-            <a:xfrm>
-              <a:off x="4517694" y="3803997"/>
-              <a:ext cx="72000" cy="81871"/>
-            </a:xfrm>
-            <a:prstGeom prst="mathMultiply">
-              <a:avLst/>
-            </a:prstGeom>
-            <a:solidFill>
-              <a:srgbClr val="00B0F0"/>
-            </a:solidFill>
-            <a:ln w="3175">
-              <a:solidFill>
-                <a:schemeClr val="tx1"/>
-              </a:solidFill>
-            </a:ln>
-          </p:spPr>
-          <p:style>
-            <a:lnRef idx="2">
-              <a:schemeClr val="accent1">
-                <a:shade val="50000"/>
-              </a:schemeClr>
-            </a:lnRef>
-            <a:fillRef idx="1">
-              <a:schemeClr val="accent1"/>
-            </a:fillRef>
-            <a:effectRef idx="0">
-              <a:schemeClr val="accent1"/>
-            </a:effectRef>
-            <a:fontRef idx="minor">
-              <a:schemeClr val="lt1"/>
-            </a:fontRef>
-          </p:style>
-          <p:txBody>
-            <a:bodyPr rtlCol="0" anchor="ctr"/>
-            <a:lstStyle/>
-            <a:p>
-              <a:pPr algn="ctr"/>
-              <a:endParaRPr lang="pt-BR"/>
-            </a:p>
-          </p:txBody>
-        </p:sp>
-        <p:sp>
-          <p:nvSpPr>
-            <p:cNvPr id="150" name="Multiply 149"/>
-            <p:cNvSpPr>
-              <a:spLocks noChangeAspect="1"/>
-            </p:cNvSpPr>
-            <p:nvPr/>
-          </p:nvSpPr>
-          <p:spPr>
-            <a:xfrm>
-              <a:off x="4496498" y="3683246"/>
-              <a:ext cx="72000" cy="81871"/>
-            </a:xfrm>
-            <a:prstGeom prst="mathMultiply">
-              <a:avLst/>
-            </a:prstGeom>
-            <a:solidFill>
-              <a:srgbClr val="00B0F0"/>
-            </a:solidFill>
-            <a:ln w="3175">
-              <a:solidFill>
-                <a:schemeClr val="tx1"/>
-              </a:solidFill>
-            </a:ln>
-          </p:spPr>
-          <p:style>
-            <a:lnRef idx="2">
-              <a:schemeClr val="accent1">
-                <a:shade val="50000"/>
-              </a:schemeClr>
-            </a:lnRef>
-            <a:fillRef idx="1">
-              <a:schemeClr val="accent1"/>
-            </a:fillRef>
-            <a:effectRef idx="0">
-              <a:schemeClr val="accent1"/>
-            </a:effectRef>
-            <a:fontRef idx="minor">
-              <a:schemeClr val="lt1"/>
-            </a:fontRef>
-          </p:style>
-          <p:txBody>
-            <a:bodyPr rtlCol="0" anchor="ctr"/>
-            <a:lstStyle/>
-            <a:p>
-              <a:pPr algn="ctr"/>
-              <a:endParaRPr lang="pt-BR"/>
-            </a:p>
-          </p:txBody>
-        </p:sp>
-        <p:sp>
-          <p:nvSpPr>
-            <p:cNvPr id="151" name="Multiply 150"/>
-            <p:cNvSpPr>
-              <a:spLocks noChangeAspect="1"/>
-            </p:cNvSpPr>
-            <p:nvPr/>
-          </p:nvSpPr>
-          <p:spPr>
-            <a:xfrm>
-              <a:off x="4486717" y="3557718"/>
-              <a:ext cx="72000" cy="81871"/>
-            </a:xfrm>
-            <a:prstGeom prst="mathMultiply">
-              <a:avLst/>
-            </a:prstGeom>
-            <a:solidFill>
-              <a:srgbClr val="00B0F0"/>
-            </a:solidFill>
-            <a:ln w="3175">
-              <a:solidFill>
-                <a:schemeClr val="tx1"/>
-              </a:solidFill>
-            </a:ln>
-          </p:spPr>
-          <p:style>
-            <a:lnRef idx="2">
-              <a:schemeClr val="accent1">
-                <a:shade val="50000"/>
-              </a:schemeClr>
-            </a:lnRef>
-            <a:fillRef idx="1">
-              <a:schemeClr val="accent1"/>
-            </a:fillRef>
-            <a:effectRef idx="0">
-              <a:schemeClr val="accent1"/>
-            </a:effectRef>
-            <a:fontRef idx="minor">
-              <a:schemeClr val="lt1"/>
-            </a:fontRef>
-          </p:style>
-          <p:txBody>
-            <a:bodyPr rtlCol="0" anchor="ctr"/>
-            <a:lstStyle/>
-            <a:p>
-              <a:pPr algn="ctr"/>
-              <a:endParaRPr lang="pt-BR"/>
-            </a:p>
-          </p:txBody>
-        </p:sp>
-        <p:cxnSp>
-          <p:nvCxnSpPr>
-            <p:cNvPr id="80" name="Straight Connector 79"/>
-            <p:cNvCxnSpPr/>
-            <p:nvPr/>
-          </p:nvCxnSpPr>
-          <p:spPr>
-            <a:xfrm rot="10800000" flipH="1" flipV="1">
-              <a:off x="4569109" y="3960140"/>
-              <a:ext cx="73202" cy="50119"/>
-            </a:xfrm>
-            <a:prstGeom prst="line">
-              <a:avLst/>
-            </a:prstGeom>
-            <a:ln w="12700">
-              <a:solidFill>
-                <a:schemeClr val="tx1"/>
-              </a:solidFill>
-              <a:prstDash val="dash"/>
-            </a:ln>
-          </p:spPr>
-          <p:style>
-            <a:lnRef idx="1">
-              <a:schemeClr val="accent1"/>
-            </a:lnRef>
-            <a:fillRef idx="0">
-              <a:schemeClr val="accent1"/>
-            </a:fillRef>
-            <a:effectRef idx="0">
-              <a:schemeClr val="accent1"/>
-            </a:effectRef>
-            <a:fontRef idx="minor">
-              <a:schemeClr val="tx1"/>
-            </a:fontRef>
-          </p:style>
-        </p:cxnSp>
-        <p:cxnSp>
-          <p:nvCxnSpPr>
-            <p:cNvPr id="81" name="Straight Connector 80"/>
-            <p:cNvCxnSpPr/>
-            <p:nvPr/>
-          </p:nvCxnSpPr>
-          <p:spPr>
-            <a:xfrm flipV="1">
-              <a:off x="4551996" y="4006045"/>
-              <a:ext cx="87747" cy="124391"/>
-            </a:xfrm>
-            <a:prstGeom prst="line">
-              <a:avLst/>
-            </a:prstGeom>
-            <a:ln w="12700">
-              <a:solidFill>
-                <a:schemeClr val="tx1"/>
-              </a:solidFill>
-              <a:prstDash val="dash"/>
-            </a:ln>
-          </p:spPr>
-          <p:style>
-            <a:lnRef idx="1">
-              <a:schemeClr val="accent1"/>
-            </a:lnRef>
-            <a:fillRef idx="0">
-              <a:schemeClr val="accent1"/>
-            </a:fillRef>
-            <a:effectRef idx="0">
-              <a:schemeClr val="accent1"/>
-            </a:effectRef>
-            <a:fontRef idx="minor">
-              <a:schemeClr val="tx1"/>
-            </a:fontRef>
-          </p:style>
-        </p:cxnSp>
-        <p:cxnSp>
-          <p:nvCxnSpPr>
-            <p:cNvPr id="88" name="Straight Connector 87"/>
-            <p:cNvCxnSpPr/>
-            <p:nvPr/>
-          </p:nvCxnSpPr>
-          <p:spPr>
-            <a:xfrm rot="5400000" flipV="1">
-              <a:off x="4570316" y="4113719"/>
-              <a:ext cx="87747" cy="124391"/>
-            </a:xfrm>
-            <a:prstGeom prst="line">
-              <a:avLst/>
-            </a:prstGeom>
-            <a:ln w="12700">
-              <a:solidFill>
-                <a:schemeClr val="tx1"/>
-              </a:solidFill>
-              <a:prstDash val="dash"/>
-            </a:ln>
-          </p:spPr>
-          <p:style>
-            <a:lnRef idx="1">
-              <a:schemeClr val="accent1"/>
-            </a:lnRef>
-            <a:fillRef idx="0">
-              <a:schemeClr val="accent1"/>
-            </a:fillRef>
-            <a:effectRef idx="0">
-              <a:schemeClr val="accent1"/>
-            </a:effectRef>
-            <a:fontRef idx="minor">
-              <a:schemeClr val="tx1"/>
-            </a:fontRef>
-          </p:style>
-        </p:cxnSp>
-        <p:cxnSp>
-          <p:nvCxnSpPr>
-            <p:cNvPr id="89" name="Straight Connector 88"/>
-            <p:cNvCxnSpPr/>
-            <p:nvPr/>
-          </p:nvCxnSpPr>
-          <p:spPr>
-            <a:xfrm flipH="1">
-              <a:off x="4522717" y="4217178"/>
-              <a:ext cx="158615" cy="91964"/>
-            </a:xfrm>
-            <a:prstGeom prst="line">
-              <a:avLst/>
-            </a:prstGeom>
-            <a:ln w="12700">
-              <a:solidFill>
-                <a:schemeClr val="tx1"/>
-              </a:solidFill>
-              <a:prstDash val="dash"/>
-            </a:ln>
-          </p:spPr>
-          <p:style>
-            <a:lnRef idx="1">
-              <a:schemeClr val="accent1"/>
-            </a:lnRef>
-            <a:fillRef idx="0">
-              <a:schemeClr val="accent1"/>
-            </a:fillRef>
-            <a:effectRef idx="0">
-              <a:schemeClr val="accent1"/>
-            </a:effectRef>
-            <a:fontRef idx="minor">
-              <a:schemeClr val="tx1"/>
-            </a:fontRef>
-          </p:style>
-        </p:cxnSp>
-        <p:cxnSp>
-          <p:nvCxnSpPr>
-            <p:cNvPr id="91" name="Straight Connector 90"/>
-            <p:cNvCxnSpPr/>
-            <p:nvPr/>
-          </p:nvCxnSpPr>
-          <p:spPr>
-            <a:xfrm rot="5400000" flipH="1">
-              <a:off x="4490591" y="4331172"/>
-              <a:ext cx="158615" cy="91964"/>
-            </a:xfrm>
-            <a:prstGeom prst="line">
-              <a:avLst/>
-            </a:prstGeom>
-            <a:ln w="12700">
-              <a:solidFill>
-                <a:schemeClr val="tx1"/>
-              </a:solidFill>
-              <a:prstDash val="dash"/>
-            </a:ln>
-          </p:spPr>
-          <p:style>
-            <a:lnRef idx="1">
-              <a:schemeClr val="accent1"/>
-            </a:lnRef>
-            <a:fillRef idx="0">
-              <a:schemeClr val="accent1"/>
-            </a:fillRef>
-            <a:effectRef idx="0">
-              <a:schemeClr val="accent1"/>
-            </a:effectRef>
-            <a:fontRef idx="minor">
-              <a:schemeClr val="tx1"/>
-            </a:fontRef>
-          </p:style>
-        </p:cxnSp>
-        <p:cxnSp>
-          <p:nvCxnSpPr>
-            <p:cNvPr id="92" name="Straight Connector 91"/>
-            <p:cNvCxnSpPr/>
-            <p:nvPr/>
-          </p:nvCxnSpPr>
-          <p:spPr>
-            <a:xfrm rot="10800000" flipH="1">
-              <a:off x="4466582" y="4460600"/>
-              <a:ext cx="158615" cy="91964"/>
-            </a:xfrm>
-            <a:prstGeom prst="line">
-              <a:avLst/>
-            </a:prstGeom>
-            <a:ln w="12700">
-              <a:solidFill>
-                <a:schemeClr val="tx1"/>
-              </a:solidFill>
-              <a:prstDash val="dash"/>
-            </a:ln>
-          </p:spPr>
-          <p:style>
-            <a:lnRef idx="1">
-              <a:schemeClr val="accent1"/>
-            </a:lnRef>
-            <a:fillRef idx="0">
-              <a:schemeClr val="accent1"/>
-            </a:fillRef>
-            <a:effectRef idx="0">
-              <a:schemeClr val="accent1"/>
-            </a:effectRef>
-            <a:fontRef idx="minor">
-              <a:schemeClr val="tx1"/>
-            </a:fontRef>
-          </p:style>
-        </p:cxnSp>
-        <p:cxnSp>
-          <p:nvCxnSpPr>
-            <p:cNvPr id="93" name="Straight Connector 92"/>
-            <p:cNvCxnSpPr/>
-            <p:nvPr/>
-          </p:nvCxnSpPr>
-          <p:spPr>
-            <a:xfrm rot="16200000" flipH="1">
-              <a:off x="4438387" y="4578734"/>
-              <a:ext cx="158615" cy="91964"/>
-            </a:xfrm>
-            <a:prstGeom prst="line">
-              <a:avLst/>
-            </a:prstGeom>
-            <a:ln w="12700">
-              <a:solidFill>
-                <a:schemeClr val="tx1"/>
-              </a:solidFill>
-              <a:prstDash val="dash"/>
-            </a:ln>
-          </p:spPr>
-          <p:style>
-            <a:lnRef idx="1">
-              <a:schemeClr val="accent1"/>
-            </a:lnRef>
-            <a:fillRef idx="0">
-              <a:schemeClr val="accent1"/>
-            </a:fillRef>
-            <a:effectRef idx="0">
-              <a:schemeClr val="accent1"/>
-            </a:effectRef>
-            <a:fontRef idx="minor">
-              <a:schemeClr val="tx1"/>
-            </a:fontRef>
-          </p:style>
-        </p:cxnSp>
-        <p:cxnSp>
-          <p:nvCxnSpPr>
-            <p:cNvPr id="95" name="Straight Connector 94"/>
-            <p:cNvCxnSpPr/>
-            <p:nvPr/>
-          </p:nvCxnSpPr>
-          <p:spPr>
-            <a:xfrm flipV="1">
-              <a:off x="4460231" y="4699147"/>
-              <a:ext cx="105160" cy="126727"/>
-            </a:xfrm>
-            <a:prstGeom prst="line">
-              <a:avLst/>
-            </a:prstGeom>
-            <a:ln w="12700">
-              <a:solidFill>
-                <a:schemeClr val="tx1"/>
-              </a:solidFill>
-              <a:prstDash val="dash"/>
-            </a:ln>
-          </p:spPr>
-          <p:style>
-            <a:lnRef idx="1">
-              <a:schemeClr val="accent1"/>
-            </a:lnRef>
-            <a:fillRef idx="0">
-              <a:schemeClr val="accent1"/>
-            </a:fillRef>
-            <a:effectRef idx="0">
-              <a:schemeClr val="accent1"/>
-            </a:effectRef>
-            <a:fontRef idx="minor">
-              <a:schemeClr val="tx1"/>
-            </a:fontRef>
-          </p:style>
-        </p:cxnSp>
-        <p:cxnSp>
-          <p:nvCxnSpPr>
-            <p:cNvPr id="97" name="Straight Connector 96"/>
-            <p:cNvCxnSpPr/>
-            <p:nvPr/>
-          </p:nvCxnSpPr>
-          <p:spPr>
-            <a:xfrm rot="5400000" flipV="1">
-              <a:off x="4470137" y="4820883"/>
-              <a:ext cx="105160" cy="126727"/>
-            </a:xfrm>
-            <a:prstGeom prst="line">
-              <a:avLst/>
-            </a:prstGeom>
-            <a:ln w="12700">
-              <a:solidFill>
-                <a:schemeClr val="tx1"/>
-              </a:solidFill>
-              <a:prstDash val="dash"/>
-            </a:ln>
-          </p:spPr>
-          <p:style>
-            <a:lnRef idx="1">
-              <a:schemeClr val="accent1"/>
-            </a:lnRef>
-            <a:fillRef idx="0">
-              <a:schemeClr val="accent1"/>
-            </a:fillRef>
-            <a:effectRef idx="0">
-              <a:schemeClr val="accent1"/>
-            </a:effectRef>
-            <a:fontRef idx="minor">
-              <a:schemeClr val="tx1"/>
-            </a:fontRef>
-          </p:style>
-        </p:cxnSp>
-        <p:cxnSp>
-          <p:nvCxnSpPr>
-            <p:cNvPr id="66" name="Straight Connector 65"/>
-            <p:cNvCxnSpPr/>
-            <p:nvPr/>
-          </p:nvCxnSpPr>
-          <p:spPr>
-            <a:xfrm flipV="1">
-              <a:off x="4513192" y="3490807"/>
-              <a:ext cx="42247" cy="120375"/>
-            </a:xfrm>
-            <a:prstGeom prst="line">
-              <a:avLst/>
-            </a:prstGeom>
-            <a:ln w="12700">
-              <a:solidFill>
-                <a:schemeClr val="tx1"/>
-              </a:solidFill>
-              <a:prstDash val="dash"/>
-            </a:ln>
-          </p:spPr>
-          <p:style>
-            <a:lnRef idx="1">
-              <a:schemeClr val="accent1"/>
-            </a:lnRef>
-            <a:fillRef idx="0">
-              <a:schemeClr val="accent1"/>
-            </a:fillRef>
-            <a:effectRef idx="0">
-              <a:schemeClr val="accent1"/>
-            </a:effectRef>
-            <a:fontRef idx="minor">
-              <a:schemeClr val="tx1"/>
-            </a:fontRef>
-          </p:style>
-        </p:cxnSp>
-        <p:cxnSp>
-          <p:nvCxnSpPr>
-            <p:cNvPr id="75" name="Straight Connector 74"/>
-            <p:cNvCxnSpPr/>
-            <p:nvPr/>
-          </p:nvCxnSpPr>
-          <p:spPr>
-            <a:xfrm rot="10800000" flipH="1" flipV="1">
-              <a:off x="4527096" y="3725595"/>
-              <a:ext cx="73202" cy="50119"/>
-            </a:xfrm>
-            <a:prstGeom prst="line">
-              <a:avLst/>
-            </a:prstGeom>
-            <a:ln w="12700">
-              <a:solidFill>
-                <a:schemeClr val="tx1"/>
-              </a:solidFill>
-              <a:prstDash val="dash"/>
-            </a:ln>
-          </p:spPr>
-          <p:style>
-            <a:lnRef idx="1">
-              <a:schemeClr val="accent1"/>
-            </a:lnRef>
-            <a:fillRef idx="0">
-              <a:schemeClr val="accent1"/>
-            </a:fillRef>
-            <a:effectRef idx="0">
-              <a:schemeClr val="accent1"/>
-            </a:effectRef>
-            <a:fontRef idx="minor">
-              <a:schemeClr val="tx1"/>
-            </a:fontRef>
-          </p:style>
-        </p:cxnSp>
-        <p:sp>
-          <p:nvSpPr>
-            <p:cNvPr id="152" name="Multiply 151"/>
-            <p:cNvSpPr>
-              <a:spLocks noChangeAspect="1"/>
-            </p:cNvSpPr>
-            <p:nvPr/>
-          </p:nvSpPr>
-          <p:spPr>
-            <a:xfrm>
-              <a:off x="4568482" y="3722621"/>
-              <a:ext cx="72000" cy="81871"/>
-            </a:xfrm>
-            <a:prstGeom prst="mathMultiply">
-              <a:avLst/>
-            </a:prstGeom>
-            <a:solidFill>
-              <a:srgbClr val="00B0F0"/>
-            </a:solidFill>
-            <a:ln w="3175">
-              <a:solidFill>
-                <a:schemeClr val="tx1"/>
-              </a:solidFill>
-            </a:ln>
-          </p:spPr>
-          <p:style>
-            <a:lnRef idx="2">
-              <a:schemeClr val="accent1">
-                <a:shade val="50000"/>
-              </a:schemeClr>
-            </a:lnRef>
-            <a:fillRef idx="1">
-              <a:schemeClr val="accent1"/>
-            </a:fillRef>
-            <a:effectRef idx="0">
-              <a:schemeClr val="accent1"/>
-            </a:effectRef>
-            <a:fontRef idx="minor">
-              <a:schemeClr val="lt1"/>
-            </a:fontRef>
-          </p:style>
-          <p:txBody>
-            <a:bodyPr rtlCol="0" anchor="ctr"/>
-            <a:lstStyle/>
-            <a:p>
-              <a:pPr algn="ctr"/>
-              <a:endParaRPr lang="pt-BR"/>
-            </a:p>
-          </p:txBody>
-        </p:sp>
-        <p:sp>
-          <p:nvSpPr>
-            <p:cNvPr id="153" name="Multiply 152"/>
-            <p:cNvSpPr>
-              <a:spLocks noChangeAspect="1"/>
-            </p:cNvSpPr>
-            <p:nvPr/>
-          </p:nvSpPr>
-          <p:spPr>
-            <a:xfrm>
-              <a:off x="4553694" y="3612134"/>
-              <a:ext cx="72000" cy="81871"/>
-            </a:xfrm>
-            <a:prstGeom prst="mathMultiply">
-              <a:avLst/>
-            </a:prstGeom>
-            <a:solidFill>
-              <a:srgbClr val="00B0F0"/>
-            </a:solidFill>
-            <a:ln w="3175">
-              <a:solidFill>
-                <a:schemeClr val="tx1"/>
-              </a:solidFill>
-            </a:ln>
-          </p:spPr>
-          <p:style>
-            <a:lnRef idx="2">
-              <a:schemeClr val="accent1">
-                <a:shade val="50000"/>
-              </a:schemeClr>
-            </a:lnRef>
-            <a:fillRef idx="1">
-              <a:schemeClr val="accent1"/>
-            </a:fillRef>
-            <a:effectRef idx="0">
-              <a:schemeClr val="accent1"/>
-            </a:effectRef>
-            <a:fontRef idx="minor">
-              <a:schemeClr val="lt1"/>
-            </a:fontRef>
-          </p:style>
-          <p:txBody>
-            <a:bodyPr rtlCol="0" anchor="ctr"/>
-            <a:lstStyle/>
-            <a:p>
-              <a:pPr algn="ctr"/>
-              <a:endParaRPr lang="pt-BR"/>
-            </a:p>
-          </p:txBody>
-        </p:sp>
-        <p:cxnSp>
-          <p:nvCxnSpPr>
-            <p:cNvPr id="158" name="Straight Arrow Connector 157"/>
-            <p:cNvCxnSpPr/>
-            <p:nvPr/>
-          </p:nvCxnSpPr>
-          <p:spPr>
-            <a:xfrm>
-              <a:off x="3030134" y="1302987"/>
-              <a:ext cx="0" cy="4284000"/>
-            </a:xfrm>
-            <a:prstGeom prst="straightConnector1">
-              <a:avLst/>
-            </a:prstGeom>
-            <a:ln w="19050">
-              <a:solidFill>
-                <a:schemeClr val="tx1"/>
-              </a:solidFill>
-              <a:headEnd type="triangle" w="med" len="med"/>
-              <a:tailEnd type="none" w="med" len="med"/>
-            </a:ln>
-          </p:spPr>
-          <p:style>
-            <a:lnRef idx="1">
-              <a:schemeClr val="accent1"/>
-            </a:lnRef>
-            <a:fillRef idx="0">
-              <a:schemeClr val="accent1"/>
-            </a:fillRef>
-            <a:effectRef idx="0">
-              <a:schemeClr val="accent1"/>
-            </a:effectRef>
-            <a:fontRef idx="minor">
-              <a:schemeClr val="tx1"/>
-            </a:fontRef>
-          </p:style>
-        </p:cxnSp>
-        <p:cxnSp>
-          <p:nvCxnSpPr>
-            <p:cNvPr id="159" name="Straight Arrow Connector 158"/>
-            <p:cNvCxnSpPr/>
-            <p:nvPr/>
-          </p:nvCxnSpPr>
-          <p:spPr>
-            <a:xfrm rot="5400000">
-              <a:off x="4496439" y="4118552"/>
-              <a:ext cx="0" cy="2952000"/>
-            </a:xfrm>
-            <a:prstGeom prst="straightConnector1">
-              <a:avLst/>
-            </a:prstGeom>
-            <a:ln w="19050">
-              <a:solidFill>
-                <a:schemeClr val="tx1"/>
-              </a:solidFill>
-              <a:headEnd type="triangle" w="med" len="med"/>
-              <a:tailEnd type="none" w="med" len="med"/>
-            </a:ln>
-          </p:spPr>
-          <p:style>
-            <a:lnRef idx="1">
-              <a:schemeClr val="accent1"/>
-            </a:lnRef>
-            <a:fillRef idx="0">
-              <a:schemeClr val="accent1"/>
-            </a:fillRef>
-            <a:effectRef idx="0">
-              <a:schemeClr val="accent1"/>
-            </a:effectRef>
-            <a:fontRef idx="minor">
-              <a:schemeClr val="tx1"/>
-            </a:fontRef>
-          </p:style>
-        </p:cxnSp>
-        <mc:AlternateContent xmlns:mc="http://schemas.openxmlformats.org/markup-compatibility/2006" xmlns:a14="http://schemas.microsoft.com/office/drawing/2010/main">
-          <mc:Choice Requires="a14">
-            <p:sp>
-              <p:nvSpPr>
-                <p:cNvPr id="164" name="TextBox 163"/>
-                <p:cNvSpPr txBox="1"/>
-                <p:nvPr/>
-              </p:nvSpPr>
-              <p:spPr>
-                <a:xfrm>
-                  <a:off x="5930875" y="5387262"/>
-                  <a:ext cx="426028" cy="400110"/>
-                </a:xfrm>
-                <a:prstGeom prst="rect">
-                  <a:avLst/>
-                </a:prstGeom>
-                <a:noFill/>
-              </p:spPr>
-              <p:txBody>
-                <a:bodyPr wrap="square" rtlCol="0">
-                  <a:spAutoFit/>
-                </a:bodyPr>
-                <a:lstStyle/>
-                <a:p>
-                  <a:pPr/>
-                  <a14:m>
-                    <m:oMathPara xmlns:m="http://schemas.openxmlformats.org/officeDocument/2006/math">
-                      <m:oMathParaPr>
-                        <m:jc m:val="centerGroup"/>
-                      </m:oMathParaPr>
-                      <m:oMath xmlns:m="http://schemas.openxmlformats.org/officeDocument/2006/math">
-                        <m:sSub>
-                          <m:sSubPr>
-                            <m:ctrlPr>
-                              <a:rPr lang="pt-BR" sz="2000" i="1" smtClean="0">
-                                <a:latin typeface="Cambria Math" panose="02040503050406030204" pitchFamily="18" charset="0"/>
-                              </a:rPr>
-                            </m:ctrlPr>
-                          </m:sSubPr>
-                          <m:e>
-                            <m:r>
-                              <a:rPr lang="pt-BR" sz="2000" b="0" i="1" smtClean="0">
-                                <a:latin typeface="Cambria Math" panose="02040503050406030204" pitchFamily="18" charset="0"/>
-                              </a:rPr>
-                              <m:t>𝑎</m:t>
-                            </m:r>
-                          </m:e>
-                          <m:sub>
-                            <m:r>
-                              <a:rPr lang="pt-BR" sz="2000" b="0" i="1" smtClean="0">
-                                <a:latin typeface="Cambria Math" panose="02040503050406030204" pitchFamily="18" charset="0"/>
-                              </a:rPr>
-                              <m:t>1</m:t>
-                            </m:r>
-                          </m:sub>
-                        </m:sSub>
-                      </m:oMath>
-                    </m:oMathPara>
-                  </a14:m>
-                  <a:endParaRPr lang="pt-BR" sz="2000" dirty="0"/>
-                </a:p>
-              </p:txBody>
-            </p:sp>
-          </mc:Choice>
-          <mc:Fallback xmlns="">
-            <p:sp>
-              <p:nvSpPr>
-                <p:cNvPr id="164" name="TextBox 163"/>
-                <p:cNvSpPr txBox="1">
-                  <a:spLocks noRot="1" noChangeAspect="1" noMove="1" noResize="1" noEditPoints="1" noAdjustHandles="1" noChangeArrowheads="1" noChangeShapeType="1" noTextEdit="1"/>
-                </p:cNvSpPr>
-                <p:nvPr/>
-              </p:nvSpPr>
-              <p:spPr>
-                <a:xfrm>
-                  <a:off x="5930875" y="5387262"/>
-                  <a:ext cx="426028" cy="400110"/>
-                </a:xfrm>
-                <a:prstGeom prst="rect">
-                  <a:avLst/>
-                </a:prstGeom>
-                <a:blipFill>
-                  <a:blip r:embed="rId4"/>
-                  <a:stretch>
-                    <a:fillRect/>
-                  </a:stretch>
-                </a:blipFill>
-              </p:spPr>
-              <p:txBody>
-                <a:bodyPr/>
-                <a:lstStyle/>
-                <a:p>
-                  <a:r>
-                    <a:rPr lang="pt-BR">
-                      <a:noFill/>
-                    </a:rPr>
-                    <a:t> </a:t>
-                  </a:r>
-                </a:p>
-              </p:txBody>
-            </p:sp>
-          </mc:Fallback>
-        </mc:AlternateContent>
-        <mc:AlternateContent xmlns:mc="http://schemas.openxmlformats.org/markup-compatibility/2006" xmlns:a14="http://schemas.microsoft.com/office/drawing/2010/main">
-          <mc:Choice Requires="a14">
-            <p:sp>
-              <p:nvSpPr>
-                <p:cNvPr id="165" name="TextBox 164"/>
-                <p:cNvSpPr txBox="1"/>
-                <p:nvPr/>
-              </p:nvSpPr>
-              <p:spPr>
-                <a:xfrm>
-                  <a:off x="2817120" y="895312"/>
-                  <a:ext cx="426028" cy="400110"/>
-                </a:xfrm>
-                <a:prstGeom prst="rect">
-                  <a:avLst/>
-                </a:prstGeom>
-                <a:noFill/>
-              </p:spPr>
-              <p:txBody>
-                <a:bodyPr wrap="square" rtlCol="0">
-                  <a:spAutoFit/>
-                </a:bodyPr>
-                <a:lstStyle/>
-                <a:p>
-                  <a:pPr/>
-                  <a14:m>
-                    <m:oMathPara xmlns:m="http://schemas.openxmlformats.org/officeDocument/2006/math">
-                      <m:oMathParaPr>
-                        <m:jc m:val="centerGroup"/>
-                      </m:oMathParaPr>
-                      <m:oMath xmlns:m="http://schemas.openxmlformats.org/officeDocument/2006/math">
-                        <m:sSub>
-                          <m:sSubPr>
-                            <m:ctrlPr>
-                              <a:rPr lang="pt-BR" sz="2000" i="1" smtClean="0">
-                                <a:latin typeface="Cambria Math" panose="02040503050406030204" pitchFamily="18" charset="0"/>
-                              </a:rPr>
-                            </m:ctrlPr>
-                          </m:sSubPr>
-                          <m:e>
-                            <m:r>
-                              <a:rPr lang="pt-BR" sz="2000" b="0" i="1" smtClean="0">
-                                <a:latin typeface="Cambria Math" panose="02040503050406030204" pitchFamily="18" charset="0"/>
-                              </a:rPr>
-                              <m:t>𝑎</m:t>
-                            </m:r>
-                          </m:e>
-                          <m:sub>
-                            <m:r>
-                              <a:rPr lang="pt-BR" sz="2000" b="0" i="1" smtClean="0">
-                                <a:latin typeface="Cambria Math" panose="02040503050406030204" pitchFamily="18" charset="0"/>
-                              </a:rPr>
-                              <m:t>2</m:t>
-                            </m:r>
-                          </m:sub>
-                        </m:sSub>
-                      </m:oMath>
-                    </m:oMathPara>
-                  </a14:m>
-                  <a:endParaRPr lang="pt-BR" sz="2000" dirty="0"/>
-                </a:p>
-              </p:txBody>
-            </p:sp>
-          </mc:Choice>
-          <mc:Fallback xmlns="">
-            <p:sp>
-              <p:nvSpPr>
-                <p:cNvPr id="165" name="TextBox 164"/>
-                <p:cNvSpPr txBox="1">
-                  <a:spLocks noRot="1" noChangeAspect="1" noMove="1" noResize="1" noEditPoints="1" noAdjustHandles="1" noChangeArrowheads="1" noChangeShapeType="1" noTextEdit="1"/>
-                </p:cNvSpPr>
-                <p:nvPr/>
-              </p:nvSpPr>
-              <p:spPr>
-                <a:xfrm>
-                  <a:off x="2817120" y="895312"/>
-                  <a:ext cx="426028" cy="400110"/>
-                </a:xfrm>
-                <a:prstGeom prst="rect">
-                  <a:avLst/>
-                </a:prstGeom>
-                <a:blipFill>
-                  <a:blip r:embed="rId5"/>
-                  <a:stretch>
-                    <a:fillRect/>
-                  </a:stretch>
-                </a:blipFill>
-              </p:spPr>
-              <p:txBody>
-                <a:bodyPr/>
-                <a:lstStyle/>
-                <a:p>
-                  <a:r>
-                    <a:rPr lang="pt-BR">
-                      <a:noFill/>
-                    </a:rPr>
-                    <a:t> </a:t>
-                  </a:r>
-                </a:p>
-              </p:txBody>
-            </p:sp>
-          </mc:Fallback>
-        </mc:AlternateContent>
-      </p:grpSp>
-    </p:spTree>
-    <p:extLst>
-      <p:ext uri="{BB962C8B-B14F-4D97-AF65-F5344CB8AC3E}">
-        <p14:creationId xmlns:p14="http://schemas.microsoft.com/office/powerpoint/2010/main" val="3580847131"/>
-      </p:ext>
-    </p:extLst>
-  </p:cSld>
-  <p:clrMapOvr>
-    <a:masterClrMapping/>
-  </p:clrMapOvr>
-</p:sld>
-</file>
-
-<file path=ppt/slides/slide41.xml><?xml version="1.0" encoding="utf-8"?>
 <p:sld xmlns:a="http://schemas.openxmlformats.org/drawingml/2006/main" xmlns:r="http://schemas.openxmlformats.org/officeDocument/2006/relationships" xmlns:p="http://schemas.openxmlformats.org/presentationml/2006/main">
   <p:cSld>
     <p:spTree>
@@ -35971,7 +35674,7 @@
 </p:sld>
 </file>
 
-<file path=ppt/slides/slide42.xml><?xml version="1.0" encoding="utf-8"?>
+<file path=ppt/slides/slide41.xml><?xml version="1.0" encoding="utf-8"?>
 <p:sld xmlns:a="http://schemas.openxmlformats.org/drawingml/2006/main" xmlns:r="http://schemas.openxmlformats.org/officeDocument/2006/relationships" xmlns:p="http://schemas.openxmlformats.org/presentationml/2006/main">
   <p:cSld>
     <p:spTree>
@@ -36076,7 +35779,7 @@
 </p:sld>
 </file>
 
-<file path=ppt/slides/slide43.xml><?xml version="1.0" encoding="utf-8"?>
+<file path=ppt/slides/slide42.xml><?xml version="1.0" encoding="utf-8"?>
 <p:sld xmlns:a="http://schemas.openxmlformats.org/drawingml/2006/main" xmlns:r="http://schemas.openxmlformats.org/officeDocument/2006/relationships" xmlns:p="http://schemas.openxmlformats.org/presentationml/2006/main">
   <p:cSld>
     <p:spTree>
@@ -38220,7 +37923,7 @@
 </p:sld>
 </file>
 
-<file path=ppt/slides/slide44.xml><?xml version="1.0" encoding="utf-8"?>
+<file path=ppt/slides/slide43.xml><?xml version="1.0" encoding="utf-8"?>
 <p:sld xmlns:a="http://schemas.openxmlformats.org/drawingml/2006/main" xmlns:r="http://schemas.openxmlformats.org/officeDocument/2006/relationships" xmlns:p="http://schemas.openxmlformats.org/presentationml/2006/main">
   <p:cSld>
     <p:spTree>
@@ -41637,15 +41340,6 @@
 </file>
 
 <file path=customXml/item1.xml><?xml version="1.0" encoding="utf-8"?>
-<?mso-contentType ?>
-<FormTemplates xmlns="http://schemas.microsoft.com/sharepoint/v3/contenttype/forms">
-  <Display>DocumentLibraryForm</Display>
-  <Edit>DocumentLibraryForm</Edit>
-  <New>DocumentLibraryForm</New>
-</FormTemplates>
-</file>
-
-<file path=customXml/item2.xml><?xml version="1.0" encoding="utf-8"?>
 <p:properties xmlns:p="http://schemas.microsoft.com/office/2006/metadata/properties" xmlns:xsi="http://www.w3.org/2001/XMLSchema-instance" xmlns:pc="http://schemas.microsoft.com/office/infopath/2007/PartnerControls">
   <documentManagement>
     <_activity xmlns="10322600-47b9-44f6-86ef-c87c87ba6e82" xsi:nil="true"/>
@@ -41653,7 +41347,7 @@
 </p:properties>
 </file>
 
-<file path=customXml/item3.xml><?xml version="1.0" encoding="utf-8"?>
+<file path=customXml/item2.xml><?xml version="1.0" encoding="utf-8"?>
 <ct:contentTypeSchema xmlns:ct="http://schemas.microsoft.com/office/2006/metadata/contentType" xmlns:ma="http://schemas.microsoft.com/office/2006/metadata/properties/metaAttributes" ct:_="" ma:_="" ma:contentTypeName="Document" ma:contentTypeID="0x010100A6553FE09A98904B92A9D00A38127206" ma:contentTypeVersion="18" ma:contentTypeDescription="Create a new document." ma:contentTypeScope="" ma:versionID="92863cfdd2d5fd2ee9b6f30d8c51b1f5">
   <xsd:schema xmlns:xsd="http://www.w3.org/2001/XMLSchema" xmlns:xs="http://www.w3.org/2001/XMLSchema" xmlns:p="http://schemas.microsoft.com/office/2006/metadata/properties" xmlns:ns3="10322600-47b9-44f6-86ef-c87c87ba6e82" xmlns:ns4="026c264a-64f6-48aa-bde0-8bf9e5064f89" targetNamespace="http://schemas.microsoft.com/office/2006/metadata/properties" ma:root="true" ma:fieldsID="86148dd4b4cd32a5258cd233a95bdcf5" ns3:_="" ns4:_="">
     <xsd:import namespace="10322600-47b9-44f6-86ef-c87c87ba6e82"/>
@@ -41906,15 +41600,16 @@
 </ct:contentTypeSchema>
 </file>
 
-<file path=customXml/itemProps1.xml><?xml version="1.0" encoding="utf-8"?>
-<ds:datastoreItem xmlns:ds="http://schemas.openxmlformats.org/officeDocument/2006/customXml" ds:itemID="{CF4A17E5-ECCE-48A8-A291-06961455A1A6}">
-  <ds:schemaRefs>
-    <ds:schemaRef ds:uri="http://schemas.microsoft.com/sharepoint/v3/contenttype/forms"/>
-  </ds:schemaRefs>
-</ds:datastoreItem>
+<file path=customXml/item3.xml><?xml version="1.0" encoding="utf-8"?>
+<?mso-contentType ?>
+<FormTemplates xmlns="http://schemas.microsoft.com/sharepoint/v3/contenttype/forms">
+  <Display>DocumentLibraryForm</Display>
+  <Edit>DocumentLibraryForm</Edit>
+  <New>DocumentLibraryForm</New>
+</FormTemplates>
 </file>
 
-<file path=customXml/itemProps2.xml><?xml version="1.0" encoding="utf-8"?>
+<file path=customXml/itemProps1.xml><?xml version="1.0" encoding="utf-8"?>
 <ds:datastoreItem xmlns:ds="http://schemas.openxmlformats.org/officeDocument/2006/customXml" ds:itemID="{C4421A6D-F900-459F-9179-A64A47727DAC}">
   <ds:schemaRefs>
     <ds:schemaRef ds:uri="http://schemas.microsoft.com/office/2006/documentManagement/types"/>
@@ -41931,7 +41626,7 @@
 </ds:datastoreItem>
 </file>
 
-<file path=customXml/itemProps3.xml><?xml version="1.0" encoding="utf-8"?>
+<file path=customXml/itemProps2.xml><?xml version="1.0" encoding="utf-8"?>
 <ds:datastoreItem xmlns:ds="http://schemas.openxmlformats.org/officeDocument/2006/customXml" ds:itemID="{E765951F-25BB-44C2-B87A-A88FE1B68A23}">
   <ds:schemaRefs>
     <ds:schemaRef ds:uri="http://schemas.microsoft.com/office/2006/metadata/contentType"/>
@@ -41948,4 +41643,12 @@
     <ds:schemaRef ds:uri="http://schemas.microsoft.com/internal/obd"/>
   </ds:schemaRefs>
 </ds:datastoreItem>
+</file>
+
+<file path=customXml/itemProps3.xml><?xml version="1.0" encoding="utf-8"?>
+<ds:datastoreItem xmlns:ds="http://schemas.openxmlformats.org/officeDocument/2006/customXml" ds:itemID="{CF4A17E5-ECCE-48A8-A291-06961455A1A6}">
+  <ds:schemaRefs>
+    <ds:schemaRef ds:uri="http://schemas.microsoft.com/sharepoint/v3/contenttype/forms"/>
+  </ds:schemaRefs>
+</ds:datastoreItem>
 </file>
--- a/slides/T319_Regressão_Linear (Parte III).pptx
+++ b/slides/T319_Regressão_Linear (Parte III).pptx
@@ -31,7 +31,7 @@
     <p:sldId id="496" r:id="rId25"/>
     <p:sldId id="512" r:id="rId26"/>
     <p:sldId id="504" r:id="rId27"/>
-    <p:sldId id="517" r:id="rId28"/>
+    <p:sldId id="518" r:id="rId28"/>
     <p:sldId id="508" r:id="rId29"/>
     <p:sldId id="510" r:id="rId30"/>
     <p:sldId id="511" r:id="rId31"/>
@@ -398,7 +398,7 @@
           <a:p>
             <a:fld id="{DA8B99DF-01BC-492A-8CEF-4FD88D18DD9D}" type="slidenum">
               <a:rPr lang="nl-BE" smtClean="0"/>
-              <a:t>‹#›</a:t>
+              <a:t>‹nº›</a:t>
             </a:fld>
             <a:endParaRPr lang="nl-BE"/>
           </a:p>
@@ -3922,7 +3922,7 @@
           <a:p>
             <a:fld id="{67C3C120-4544-49C4-A71C-C78FE5187513}" type="slidenum">
               <a:rPr lang="nl-BE" smtClean="0"/>
-              <a:t>‹#›</a:t>
+              <a:t>‹nº›</a:t>
             </a:fld>
             <a:endParaRPr lang="nl-BE"/>
           </a:p>
@@ -4092,7 +4092,7 @@
           <a:p>
             <a:fld id="{67C3C120-4544-49C4-A71C-C78FE5187513}" type="slidenum">
               <a:rPr lang="nl-BE" smtClean="0"/>
-              <a:t>‹#›</a:t>
+              <a:t>‹nº›</a:t>
             </a:fld>
             <a:endParaRPr lang="nl-BE"/>
           </a:p>
@@ -4272,7 +4272,7 @@
           <a:p>
             <a:fld id="{67C3C120-4544-49C4-A71C-C78FE5187513}" type="slidenum">
               <a:rPr lang="nl-BE" smtClean="0"/>
-              <a:t>‹#›</a:t>
+              <a:t>‹nº›</a:t>
             </a:fld>
             <a:endParaRPr lang="nl-BE"/>
           </a:p>
@@ -4442,7 +4442,7 @@
           <a:p>
             <a:fld id="{67C3C120-4544-49C4-A71C-C78FE5187513}" type="slidenum">
               <a:rPr lang="nl-BE" smtClean="0"/>
-              <a:t>‹#›</a:t>
+              <a:t>‹nº›</a:t>
             </a:fld>
             <a:endParaRPr lang="nl-BE"/>
           </a:p>
@@ -4688,7 +4688,7 @@
           <a:p>
             <a:fld id="{67C3C120-4544-49C4-A71C-C78FE5187513}" type="slidenum">
               <a:rPr lang="nl-BE" smtClean="0"/>
-              <a:t>‹#›</a:t>
+              <a:t>‹nº›</a:t>
             </a:fld>
             <a:endParaRPr lang="nl-BE"/>
           </a:p>
@@ -4920,7 +4920,7 @@
           <a:p>
             <a:fld id="{67C3C120-4544-49C4-A71C-C78FE5187513}" type="slidenum">
               <a:rPr lang="nl-BE" smtClean="0"/>
-              <a:t>‹#›</a:t>
+              <a:t>‹nº›</a:t>
             </a:fld>
             <a:endParaRPr lang="nl-BE"/>
           </a:p>
@@ -5287,7 +5287,7 @@
           <a:p>
             <a:fld id="{67C3C120-4544-49C4-A71C-C78FE5187513}" type="slidenum">
               <a:rPr lang="nl-BE" smtClean="0"/>
-              <a:t>‹#›</a:t>
+              <a:t>‹nº›</a:t>
             </a:fld>
             <a:endParaRPr lang="nl-BE"/>
           </a:p>
@@ -5405,7 +5405,7 @@
           <a:p>
             <a:fld id="{67C3C120-4544-49C4-A71C-C78FE5187513}" type="slidenum">
               <a:rPr lang="nl-BE" smtClean="0"/>
-              <a:t>‹#›</a:t>
+              <a:t>‹nº›</a:t>
             </a:fld>
             <a:endParaRPr lang="nl-BE"/>
           </a:p>
@@ -5500,7 +5500,7 @@
           <a:p>
             <a:fld id="{67C3C120-4544-49C4-A71C-C78FE5187513}" type="slidenum">
               <a:rPr lang="nl-BE" smtClean="0"/>
-              <a:t>‹#›</a:t>
+              <a:t>‹nº›</a:t>
             </a:fld>
             <a:endParaRPr lang="nl-BE"/>
           </a:p>
@@ -5777,7 +5777,7 @@
           <a:p>
             <a:fld id="{67C3C120-4544-49C4-A71C-C78FE5187513}" type="slidenum">
               <a:rPr lang="nl-BE" smtClean="0"/>
-              <a:t>‹#›</a:t>
+              <a:t>‹nº›</a:t>
             </a:fld>
             <a:endParaRPr lang="nl-BE"/>
           </a:p>
@@ -6030,7 +6030,7 @@
           <a:p>
             <a:fld id="{67C3C120-4544-49C4-A71C-C78FE5187513}" type="slidenum">
               <a:rPr lang="nl-BE" smtClean="0"/>
-              <a:t>‹#›</a:t>
+              <a:t>‹nº›</a:t>
             </a:fld>
             <a:endParaRPr lang="nl-BE"/>
           </a:p>
@@ -6279,7 +6279,7 @@
           <a:p>
             <a:fld id="{67C3C120-4544-49C4-A71C-C78FE5187513}" type="slidenum">
               <a:rPr lang="nl-BE" smtClean="0"/>
-              <a:t>‹#›</a:t>
+              <a:t>‹nº›</a:t>
             </a:fld>
             <a:endParaRPr lang="nl-BE"/>
           </a:p>
@@ -13101,7 +13101,7 @@
           <a:p>
             <a:r>
               <a:rPr lang="pt-BR" dirty="0"/>
-              <a:t>Ajustam </a:t>
+              <a:t>Estas técnicas ajustam </a:t>
             </a:r>
             <a:r>
               <a:rPr lang="pt-BR" b="1" i="1" dirty="0">
@@ -13231,7 +13231,7 @@
                   <a:srgbClr val="00B050"/>
                 </a:solidFill>
               </a:rPr>
-              <a:t>não precisa de ajuste de nenhum </a:t>
+              <a:t>não precisam de ajuste de nenhum </a:t>
             </a:r>
             <a:r>
               <a:rPr lang="pt-BR" b="1" i="1" dirty="0" err="1">
@@ -13256,7 +13256,7 @@
     </p:spTree>
     <p:extLst>
       <p:ext uri="{BB962C8B-B14F-4D97-AF65-F5344CB8AC3E}">
-        <p14:creationId xmlns:p14="http://schemas.microsoft.com/office/powerpoint/2010/main" val="3031723956"/>
+        <p14:creationId xmlns:p14="http://schemas.microsoft.com/office/powerpoint/2010/main" val="1177030681"/>
       </p:ext>
     </p:extLst>
   </p:cSld>
@@ -41340,14 +41340,6 @@
 </file>
 
 <file path=customXml/item1.xml><?xml version="1.0" encoding="utf-8"?>
-<p:properties xmlns:p="http://schemas.microsoft.com/office/2006/metadata/properties" xmlns:xsi="http://www.w3.org/2001/XMLSchema-instance" xmlns:pc="http://schemas.microsoft.com/office/infopath/2007/PartnerControls">
-  <documentManagement>
-    <_activity xmlns="10322600-47b9-44f6-86ef-c87c87ba6e82" xsi:nil="true"/>
-  </documentManagement>
-</p:properties>
-</file>
-
-<file path=customXml/item2.xml><?xml version="1.0" encoding="utf-8"?>
 <ct:contentTypeSchema xmlns:ct="http://schemas.microsoft.com/office/2006/metadata/contentType" xmlns:ma="http://schemas.microsoft.com/office/2006/metadata/properties/metaAttributes" ct:_="" ma:_="" ma:contentTypeName="Document" ma:contentTypeID="0x010100A6553FE09A98904B92A9D00A38127206" ma:contentTypeVersion="18" ma:contentTypeDescription="Create a new document." ma:contentTypeScope="" ma:versionID="92863cfdd2d5fd2ee9b6f30d8c51b1f5">
   <xsd:schema xmlns:xsd="http://www.w3.org/2001/XMLSchema" xmlns:xs="http://www.w3.org/2001/XMLSchema" xmlns:p="http://schemas.microsoft.com/office/2006/metadata/properties" xmlns:ns3="10322600-47b9-44f6-86ef-c87c87ba6e82" xmlns:ns4="026c264a-64f6-48aa-bde0-8bf9e5064f89" targetNamespace="http://schemas.microsoft.com/office/2006/metadata/properties" ma:root="true" ma:fieldsID="86148dd4b4cd32a5258cd233a95bdcf5" ns3:_="" ns4:_="">
     <xsd:import namespace="10322600-47b9-44f6-86ef-c87c87ba6e82"/>
@@ -41600,7 +41592,7 @@
 </ct:contentTypeSchema>
 </file>
 
-<file path=customXml/item3.xml><?xml version="1.0" encoding="utf-8"?>
+<file path=customXml/item2.xml><?xml version="1.0" encoding="utf-8"?>
 <?mso-contentType ?>
 <FormTemplates xmlns="http://schemas.microsoft.com/sharepoint/v3/contenttype/forms">
   <Display>DocumentLibraryForm</Display>
@@ -41609,24 +41601,15 @@
 </FormTemplates>
 </file>
 
-<file path=customXml/itemProps1.xml><?xml version="1.0" encoding="utf-8"?>
-<ds:datastoreItem xmlns:ds="http://schemas.openxmlformats.org/officeDocument/2006/customXml" ds:itemID="{C4421A6D-F900-459F-9179-A64A47727DAC}">
-  <ds:schemaRefs>
-    <ds:schemaRef ds:uri="http://schemas.microsoft.com/office/2006/documentManagement/types"/>
-    <ds:schemaRef ds:uri="026c264a-64f6-48aa-bde0-8bf9e5064f89"/>
-    <ds:schemaRef ds:uri="http://schemas.openxmlformats.org/package/2006/metadata/core-properties"/>
-    <ds:schemaRef ds:uri="http://purl.org/dc/elements/1.1/"/>
-    <ds:schemaRef ds:uri="http://purl.org/dc/dcmitype/"/>
-    <ds:schemaRef ds:uri="http://schemas.microsoft.com/office/2006/metadata/properties"/>
-    <ds:schemaRef ds:uri="http://www.w3.org/XML/1998/namespace"/>
-    <ds:schemaRef ds:uri="http://schemas.microsoft.com/office/infopath/2007/PartnerControls"/>
-    <ds:schemaRef ds:uri="10322600-47b9-44f6-86ef-c87c87ba6e82"/>
-    <ds:schemaRef ds:uri="http://purl.org/dc/terms/"/>
-  </ds:schemaRefs>
-</ds:datastoreItem>
+<file path=customXml/item3.xml><?xml version="1.0" encoding="utf-8"?>
+<p:properties xmlns:p="http://schemas.microsoft.com/office/2006/metadata/properties" xmlns:xsi="http://www.w3.org/2001/XMLSchema-instance" xmlns:pc="http://schemas.microsoft.com/office/infopath/2007/PartnerControls">
+  <documentManagement>
+    <_activity xmlns="10322600-47b9-44f6-86ef-c87c87ba6e82" xsi:nil="true"/>
+  </documentManagement>
+</p:properties>
 </file>
 
-<file path=customXml/itemProps2.xml><?xml version="1.0" encoding="utf-8"?>
+<file path=customXml/itemProps1.xml><?xml version="1.0" encoding="utf-8"?>
 <ds:datastoreItem xmlns:ds="http://schemas.openxmlformats.org/officeDocument/2006/customXml" ds:itemID="{E765951F-25BB-44C2-B87A-A88FE1B68A23}">
   <ds:schemaRefs>
     <ds:schemaRef ds:uri="http://schemas.microsoft.com/office/2006/metadata/contentType"/>
@@ -41645,10 +41628,27 @@
 </ds:datastoreItem>
 </file>
 
-<file path=customXml/itemProps3.xml><?xml version="1.0" encoding="utf-8"?>
+<file path=customXml/itemProps2.xml><?xml version="1.0" encoding="utf-8"?>
 <ds:datastoreItem xmlns:ds="http://schemas.openxmlformats.org/officeDocument/2006/customXml" ds:itemID="{CF4A17E5-ECCE-48A8-A291-06961455A1A6}">
   <ds:schemaRefs>
     <ds:schemaRef ds:uri="http://schemas.microsoft.com/sharepoint/v3/contenttype/forms"/>
   </ds:schemaRefs>
 </ds:datastoreItem>
+</file>
+
+<file path=customXml/itemProps3.xml><?xml version="1.0" encoding="utf-8"?>
+<ds:datastoreItem xmlns:ds="http://schemas.openxmlformats.org/officeDocument/2006/customXml" ds:itemID="{C4421A6D-F900-459F-9179-A64A47727DAC}">
+  <ds:schemaRefs>
+    <ds:schemaRef ds:uri="http://schemas.microsoft.com/office/2006/documentManagement/types"/>
+    <ds:schemaRef ds:uri="026c264a-64f6-48aa-bde0-8bf9e5064f89"/>
+    <ds:schemaRef ds:uri="http://schemas.openxmlformats.org/package/2006/metadata/core-properties"/>
+    <ds:schemaRef ds:uri="http://purl.org/dc/elements/1.1/"/>
+    <ds:schemaRef ds:uri="http://purl.org/dc/dcmitype/"/>
+    <ds:schemaRef ds:uri="http://schemas.microsoft.com/office/2006/metadata/properties"/>
+    <ds:schemaRef ds:uri="http://www.w3.org/XML/1998/namespace"/>
+    <ds:schemaRef ds:uri="http://schemas.microsoft.com/office/infopath/2007/PartnerControls"/>
+    <ds:schemaRef ds:uri="10322600-47b9-44f6-86ef-c87c87ba6e82"/>
+    <ds:schemaRef ds:uri="http://purl.org/dc/terms/"/>
+  </ds:schemaRefs>
+</ds:datastoreItem>
 </file>